--- a/figure/大论文作图.pptx
+++ b/figure/大论文作图.pptx
@@ -5,11 +5,12 @@
     <p:sldMasterId id="2147483648" r:id="rId1"/>
   </p:sldMasterIdLst>
   <p:notesMasterIdLst>
-    <p:notesMasterId r:id="rId4"/>
+    <p:notesMasterId r:id="rId5"/>
   </p:notesMasterIdLst>
   <p:sldIdLst>
     <p:sldId id="257" r:id="rId2"/>
     <p:sldId id="258" r:id="rId3"/>
+    <p:sldId id="259" r:id="rId4"/>
   </p:sldIdLst>
   <p:sldSz cx="12192000" cy="6858000"/>
   <p:notesSz cx="6858000" cy="9144000"/>
@@ -108,6 +109,11 @@
       </a:defRPr>
     </a:lvl9pPr>
   </p:defaultTextStyle>
+  <p:extLst>
+    <p:ext uri="{EFAFB233-063F-42B5-8137-9DF3F51BA10A}">
+      <p15:sldGuideLst xmlns:p15="http://schemas.microsoft.com/office/powerpoint/2012/main"/>
+    </p:ext>
+  </p:extLst>
 </p:presentation>
 </file>
 
@@ -193,7 +199,7 @@
           <a:p>
             <a:fld id="{85C2D6EB-C800-464F-A79F-2EE684CA1913}" type="datetimeFigureOut">
               <a:rPr lang="zh-CN" altLang="en-US" smtClean="0"/>
-              <a:t>2023/12/4</a:t>
+              <a:t>2023/12/7</a:t>
             </a:fld>
             <a:endParaRPr lang="zh-CN" altLang="en-US"/>
           </a:p>
@@ -760,7 +766,7 @@
           <a:p>
             <a:fld id="{3F936331-16FD-497A-8586-31CE5CA58C54}" type="datetimeFigureOut">
               <a:rPr lang="zh-CN" altLang="en-US" smtClean="0"/>
-              <a:t>2023/12/4</a:t>
+              <a:t>2023/12/7</a:t>
             </a:fld>
             <a:endParaRPr lang="zh-CN" altLang="en-US"/>
           </a:p>
@@ -930,7 +936,7 @@
           <a:p>
             <a:fld id="{3F936331-16FD-497A-8586-31CE5CA58C54}" type="datetimeFigureOut">
               <a:rPr lang="zh-CN" altLang="en-US" smtClean="0"/>
-              <a:t>2023/12/4</a:t>
+              <a:t>2023/12/7</a:t>
             </a:fld>
             <a:endParaRPr lang="zh-CN" altLang="en-US"/>
           </a:p>
@@ -1110,7 +1116,7 @@
           <a:p>
             <a:fld id="{3F936331-16FD-497A-8586-31CE5CA58C54}" type="datetimeFigureOut">
               <a:rPr lang="zh-CN" altLang="en-US" smtClean="0"/>
-              <a:t>2023/12/4</a:t>
+              <a:t>2023/12/7</a:t>
             </a:fld>
             <a:endParaRPr lang="zh-CN" altLang="en-US"/>
           </a:p>
@@ -1280,7 +1286,7 @@
           <a:p>
             <a:fld id="{3F936331-16FD-497A-8586-31CE5CA58C54}" type="datetimeFigureOut">
               <a:rPr lang="zh-CN" altLang="en-US" smtClean="0"/>
-              <a:t>2023/12/4</a:t>
+              <a:t>2023/12/7</a:t>
             </a:fld>
             <a:endParaRPr lang="zh-CN" altLang="en-US"/>
           </a:p>
@@ -1526,7 +1532,7 @@
           <a:p>
             <a:fld id="{3F936331-16FD-497A-8586-31CE5CA58C54}" type="datetimeFigureOut">
               <a:rPr lang="zh-CN" altLang="en-US" smtClean="0"/>
-              <a:t>2023/12/4</a:t>
+              <a:t>2023/12/7</a:t>
             </a:fld>
             <a:endParaRPr lang="zh-CN" altLang="en-US"/>
           </a:p>
@@ -1758,7 +1764,7 @@
           <a:p>
             <a:fld id="{3F936331-16FD-497A-8586-31CE5CA58C54}" type="datetimeFigureOut">
               <a:rPr lang="zh-CN" altLang="en-US" smtClean="0"/>
-              <a:t>2023/12/4</a:t>
+              <a:t>2023/12/7</a:t>
             </a:fld>
             <a:endParaRPr lang="zh-CN" altLang="en-US"/>
           </a:p>
@@ -2125,7 +2131,7 @@
           <a:p>
             <a:fld id="{3F936331-16FD-497A-8586-31CE5CA58C54}" type="datetimeFigureOut">
               <a:rPr lang="zh-CN" altLang="en-US" smtClean="0"/>
-              <a:t>2023/12/4</a:t>
+              <a:t>2023/12/7</a:t>
             </a:fld>
             <a:endParaRPr lang="zh-CN" altLang="en-US"/>
           </a:p>
@@ -2243,7 +2249,7 @@
           <a:p>
             <a:fld id="{3F936331-16FD-497A-8586-31CE5CA58C54}" type="datetimeFigureOut">
               <a:rPr lang="zh-CN" altLang="en-US" smtClean="0"/>
-              <a:t>2023/12/4</a:t>
+              <a:t>2023/12/7</a:t>
             </a:fld>
             <a:endParaRPr lang="zh-CN" altLang="en-US"/>
           </a:p>
@@ -2338,7 +2344,7 @@
           <a:p>
             <a:fld id="{3F936331-16FD-497A-8586-31CE5CA58C54}" type="datetimeFigureOut">
               <a:rPr lang="zh-CN" altLang="en-US" smtClean="0"/>
-              <a:t>2023/12/4</a:t>
+              <a:t>2023/12/7</a:t>
             </a:fld>
             <a:endParaRPr lang="zh-CN" altLang="en-US"/>
           </a:p>
@@ -2615,7 +2621,7 @@
           <a:p>
             <a:fld id="{3F936331-16FD-497A-8586-31CE5CA58C54}" type="datetimeFigureOut">
               <a:rPr lang="zh-CN" altLang="en-US" smtClean="0"/>
-              <a:t>2023/12/4</a:t>
+              <a:t>2023/12/7</a:t>
             </a:fld>
             <a:endParaRPr lang="zh-CN" altLang="en-US"/>
           </a:p>
@@ -2868,7 +2874,7 @@
           <a:p>
             <a:fld id="{3F936331-16FD-497A-8586-31CE5CA58C54}" type="datetimeFigureOut">
               <a:rPr lang="zh-CN" altLang="en-US" smtClean="0"/>
-              <a:t>2023/12/4</a:t>
+              <a:t>2023/12/7</a:t>
             </a:fld>
             <a:endParaRPr lang="zh-CN" altLang="en-US"/>
           </a:p>
@@ -3081,7 +3087,7 @@
           <a:p>
             <a:fld id="{3F936331-16FD-497A-8586-31CE5CA58C54}" type="datetimeFigureOut">
               <a:rPr lang="zh-CN" altLang="en-US" smtClean="0"/>
-              <a:t>2023/12/4</a:t>
+              <a:t>2023/12/7</a:t>
             </a:fld>
             <a:endParaRPr lang="zh-CN" altLang="en-US"/>
           </a:p>
@@ -6315,6 +6321,1533 @@
 </p:sld>
 </file>
 
+<file path=ppt/slides/slide3.xml><?xml version="1.0" encoding="utf-8"?>
+<p:sld xmlns:a="http://schemas.openxmlformats.org/drawingml/2006/main" xmlns:r="http://schemas.openxmlformats.org/officeDocument/2006/relationships" xmlns:p="http://schemas.openxmlformats.org/presentationml/2006/main">
+  <p:cSld>
+    <p:spTree>
+      <p:nvGrpSpPr>
+        <p:cNvPr id="1" name=""/>
+        <p:cNvGrpSpPr/>
+        <p:nvPr/>
+      </p:nvGrpSpPr>
+      <p:grpSpPr>
+        <a:xfrm>
+          <a:off x="0" y="0"/>
+          <a:ext cx="0" cy="0"/>
+          <a:chOff x="0" y="0"/>
+          <a:chExt cx="0" cy="0"/>
+        </a:xfrm>
+      </p:grpSpPr>
+      <p:sp>
+        <p:nvSpPr>
+          <p:cNvPr id="5" name="矩形 4"/>
+          <p:cNvSpPr/>
+          <p:nvPr/>
+        </p:nvSpPr>
+        <p:spPr>
+          <a:xfrm>
+            <a:off x="66636" y="810084"/>
+            <a:ext cx="3607078" cy="569136"/>
+          </a:xfrm>
+          <a:prstGeom prst="rect">
+            <a:avLst/>
+          </a:prstGeom>
+          <a:solidFill>
+            <a:schemeClr val="accent1">
+              <a:lumMod val="20000"/>
+              <a:lumOff val="80000"/>
+            </a:schemeClr>
+          </a:solidFill>
+          <a:ln>
+            <a:solidFill>
+              <a:schemeClr val="accent1">
+                <a:lumMod val="20000"/>
+                <a:lumOff val="80000"/>
+              </a:schemeClr>
+            </a:solidFill>
+          </a:ln>
+        </p:spPr>
+        <p:style>
+          <a:lnRef idx="2">
+            <a:schemeClr val="accent1">
+              <a:shade val="50000"/>
+            </a:schemeClr>
+          </a:lnRef>
+          <a:fillRef idx="1">
+            <a:schemeClr val="accent1"/>
+          </a:fillRef>
+          <a:effectRef idx="0">
+            <a:schemeClr val="accent1"/>
+          </a:effectRef>
+          <a:fontRef idx="minor">
+            <a:schemeClr val="lt1"/>
+          </a:fontRef>
+        </p:style>
+        <p:txBody>
+          <a:bodyPr rtlCol="0" anchor="ctr"/>
+          <a:lstStyle/>
+          <a:p>
+            <a:pPr algn="ctr"/>
+            <a:endParaRPr lang="zh-CN" altLang="en-US" sz="1600">
+              <a:latin typeface="宋体" panose="02010600030101010101" pitchFamily="2" charset="-122"/>
+              <a:ea typeface="宋体" panose="02010600030101010101" pitchFamily="2" charset="-122"/>
+            </a:endParaRPr>
+          </a:p>
+        </p:txBody>
+      </p:sp>
+      <p:sp>
+        <p:nvSpPr>
+          <p:cNvPr id="26" name="矩形 25"/>
+          <p:cNvSpPr/>
+          <p:nvPr/>
+        </p:nvSpPr>
+        <p:spPr>
+          <a:xfrm>
+            <a:off x="66636" y="810084"/>
+            <a:ext cx="3607078" cy="2626536"/>
+          </a:xfrm>
+          <a:prstGeom prst="rect">
+            <a:avLst/>
+          </a:prstGeom>
+          <a:noFill/>
+          <a:ln w="19050">
+            <a:solidFill>
+              <a:schemeClr val="tx1"/>
+            </a:solidFill>
+          </a:ln>
+        </p:spPr>
+        <p:style>
+          <a:lnRef idx="2">
+            <a:schemeClr val="accent1">
+              <a:shade val="50000"/>
+            </a:schemeClr>
+          </a:lnRef>
+          <a:fillRef idx="1">
+            <a:schemeClr val="accent1"/>
+          </a:fillRef>
+          <a:effectRef idx="0">
+            <a:schemeClr val="accent1"/>
+          </a:effectRef>
+          <a:fontRef idx="minor">
+            <a:schemeClr val="lt1"/>
+          </a:fontRef>
+        </p:style>
+        <p:txBody>
+          <a:bodyPr rtlCol="0" anchor="ctr"/>
+          <a:lstStyle/>
+          <a:p>
+            <a:pPr algn="ctr"/>
+            <a:endParaRPr lang="zh-CN" altLang="en-US" b="1" dirty="0">
+              <a:solidFill>
+                <a:schemeClr val="tx1"/>
+              </a:solidFill>
+              <a:latin typeface="宋体" panose="02010600030101010101" pitchFamily="2" charset="-122"/>
+              <a:ea typeface="宋体" panose="02010600030101010101" pitchFamily="2" charset="-122"/>
+            </a:endParaRPr>
+          </a:p>
+        </p:txBody>
+      </p:sp>
+      <p:sp>
+        <p:nvSpPr>
+          <p:cNvPr id="27" name="文本框 26"/>
+          <p:cNvSpPr txBox="1"/>
+          <p:nvPr/>
+        </p:nvSpPr>
+        <p:spPr>
+          <a:xfrm>
+            <a:off x="1200759" y="900591"/>
+            <a:ext cx="1338828" cy="369332"/>
+          </a:xfrm>
+          <a:prstGeom prst="rect">
+            <a:avLst/>
+          </a:prstGeom>
+          <a:noFill/>
+        </p:spPr>
+        <p:txBody>
+          <a:bodyPr wrap="none" rtlCol="0">
+            <a:spAutoFit/>
+          </a:bodyPr>
+          <a:lstStyle/>
+          <a:p>
+            <a:r>
+              <a:rPr lang="zh-CN" altLang="en-US" dirty="0" smtClean="0">
+                <a:latin typeface="宋体" panose="02010600030101010101" pitchFamily="2" charset="-122"/>
+                <a:ea typeface="宋体" panose="02010600030101010101" pitchFamily="2" charset="-122"/>
+              </a:rPr>
+              <a:t>研究内容一</a:t>
+            </a:r>
+            <a:endParaRPr lang="zh-CN" altLang="en-US" dirty="0">
+              <a:latin typeface="宋体" panose="02010600030101010101" pitchFamily="2" charset="-122"/>
+              <a:ea typeface="宋体" panose="02010600030101010101" pitchFamily="2" charset="-122"/>
+            </a:endParaRPr>
+          </a:p>
+        </p:txBody>
+      </p:sp>
+      <p:sp>
+        <p:nvSpPr>
+          <p:cNvPr id="28" name="矩形 27"/>
+          <p:cNvSpPr/>
+          <p:nvPr/>
+        </p:nvSpPr>
+        <p:spPr>
+          <a:xfrm>
+            <a:off x="277430" y="1536187"/>
+            <a:ext cx="3185487" cy="369332"/>
+          </a:xfrm>
+          <a:prstGeom prst="rect">
+            <a:avLst/>
+          </a:prstGeom>
+        </p:spPr>
+        <p:txBody>
+          <a:bodyPr wrap="none">
+            <a:spAutoFit/>
+          </a:bodyPr>
+          <a:lstStyle/>
+          <a:p>
+            <a:pPr algn="ctr"/>
+            <a:r>
+              <a:rPr lang="zh-CN" altLang="en-US" b="1" dirty="0" smtClean="0">
+                <a:latin typeface="宋体" panose="02010600030101010101" pitchFamily="2" charset="-122"/>
+                <a:ea typeface="宋体" panose="02010600030101010101" pitchFamily="2" charset="-122"/>
+              </a:rPr>
+              <a:t>面向一般拓扑的训练时间预测</a:t>
+            </a:r>
+            <a:endParaRPr lang="zh-CN" altLang="en-US" b="1" dirty="0">
+              <a:latin typeface="宋体" panose="02010600030101010101" pitchFamily="2" charset="-122"/>
+              <a:ea typeface="宋体" panose="02010600030101010101" pitchFamily="2" charset="-122"/>
+            </a:endParaRPr>
+          </a:p>
+        </p:txBody>
+      </p:sp>
+      <p:sp>
+        <p:nvSpPr>
+          <p:cNvPr id="35" name="矩形 34"/>
+          <p:cNvSpPr/>
+          <p:nvPr/>
+        </p:nvSpPr>
+        <p:spPr>
+          <a:xfrm>
+            <a:off x="4307166" y="810084"/>
+            <a:ext cx="3607078" cy="569136"/>
+          </a:xfrm>
+          <a:prstGeom prst="rect">
+            <a:avLst/>
+          </a:prstGeom>
+          <a:solidFill>
+            <a:schemeClr val="accent1">
+              <a:lumMod val="20000"/>
+              <a:lumOff val="80000"/>
+            </a:schemeClr>
+          </a:solidFill>
+          <a:ln>
+            <a:solidFill>
+              <a:schemeClr val="accent1">
+                <a:lumMod val="20000"/>
+                <a:lumOff val="80000"/>
+              </a:schemeClr>
+            </a:solidFill>
+          </a:ln>
+        </p:spPr>
+        <p:style>
+          <a:lnRef idx="2">
+            <a:schemeClr val="accent1">
+              <a:shade val="50000"/>
+            </a:schemeClr>
+          </a:lnRef>
+          <a:fillRef idx="1">
+            <a:schemeClr val="accent1"/>
+          </a:fillRef>
+          <a:effectRef idx="0">
+            <a:schemeClr val="accent1"/>
+          </a:effectRef>
+          <a:fontRef idx="minor">
+            <a:schemeClr val="lt1"/>
+          </a:fontRef>
+        </p:style>
+        <p:txBody>
+          <a:bodyPr rtlCol="0" anchor="ctr"/>
+          <a:lstStyle/>
+          <a:p>
+            <a:pPr algn="ctr"/>
+            <a:endParaRPr lang="zh-CN" altLang="en-US" sz="1600">
+              <a:latin typeface="宋体" panose="02010600030101010101" pitchFamily="2" charset="-122"/>
+              <a:ea typeface="宋体" panose="02010600030101010101" pitchFamily="2" charset="-122"/>
+            </a:endParaRPr>
+          </a:p>
+        </p:txBody>
+      </p:sp>
+      <p:sp>
+        <p:nvSpPr>
+          <p:cNvPr id="36" name="矩形 35"/>
+          <p:cNvSpPr/>
+          <p:nvPr/>
+        </p:nvSpPr>
+        <p:spPr>
+          <a:xfrm>
+            <a:off x="4307166" y="810084"/>
+            <a:ext cx="3607078" cy="2626536"/>
+          </a:xfrm>
+          <a:prstGeom prst="rect">
+            <a:avLst/>
+          </a:prstGeom>
+          <a:noFill/>
+          <a:ln w="19050">
+            <a:solidFill>
+              <a:schemeClr val="tx1"/>
+            </a:solidFill>
+          </a:ln>
+        </p:spPr>
+        <p:style>
+          <a:lnRef idx="2">
+            <a:schemeClr val="accent1">
+              <a:shade val="50000"/>
+            </a:schemeClr>
+          </a:lnRef>
+          <a:fillRef idx="1">
+            <a:schemeClr val="accent1"/>
+          </a:fillRef>
+          <a:effectRef idx="0">
+            <a:schemeClr val="accent1"/>
+          </a:effectRef>
+          <a:fontRef idx="minor">
+            <a:schemeClr val="lt1"/>
+          </a:fontRef>
+        </p:style>
+        <p:txBody>
+          <a:bodyPr rtlCol="0" anchor="ctr"/>
+          <a:lstStyle/>
+          <a:p>
+            <a:pPr algn="ctr"/>
+            <a:endParaRPr lang="zh-CN" altLang="en-US" b="1" dirty="0">
+              <a:solidFill>
+                <a:schemeClr val="tx1"/>
+              </a:solidFill>
+              <a:latin typeface="宋体" panose="02010600030101010101" pitchFamily="2" charset="-122"/>
+              <a:ea typeface="宋体" panose="02010600030101010101" pitchFamily="2" charset="-122"/>
+            </a:endParaRPr>
+          </a:p>
+        </p:txBody>
+      </p:sp>
+      <p:sp>
+        <p:nvSpPr>
+          <p:cNvPr id="37" name="文本框 36"/>
+          <p:cNvSpPr txBox="1"/>
+          <p:nvPr/>
+        </p:nvSpPr>
+        <p:spPr>
+          <a:xfrm>
+            <a:off x="5377171" y="900591"/>
+            <a:ext cx="1338828" cy="369332"/>
+          </a:xfrm>
+          <a:prstGeom prst="rect">
+            <a:avLst/>
+          </a:prstGeom>
+          <a:noFill/>
+        </p:spPr>
+        <p:txBody>
+          <a:bodyPr wrap="none" rtlCol="0">
+            <a:spAutoFit/>
+          </a:bodyPr>
+          <a:lstStyle/>
+          <a:p>
+            <a:r>
+              <a:rPr lang="zh-CN" altLang="en-US" dirty="0" smtClean="0">
+                <a:latin typeface="宋体" panose="02010600030101010101" pitchFamily="2" charset="-122"/>
+                <a:ea typeface="宋体" panose="02010600030101010101" pitchFamily="2" charset="-122"/>
+              </a:rPr>
+              <a:t>研究</a:t>
+            </a:r>
+            <a:r>
+              <a:rPr lang="zh-CN" altLang="en-US" dirty="0" smtClean="0">
+                <a:latin typeface="宋体" panose="02010600030101010101" pitchFamily="2" charset="-122"/>
+                <a:ea typeface="宋体" panose="02010600030101010101" pitchFamily="2" charset="-122"/>
+              </a:rPr>
+              <a:t>内容二</a:t>
+            </a:r>
+            <a:endParaRPr lang="zh-CN" altLang="en-US" dirty="0">
+              <a:latin typeface="宋体" panose="02010600030101010101" pitchFamily="2" charset="-122"/>
+              <a:ea typeface="宋体" panose="02010600030101010101" pitchFamily="2" charset="-122"/>
+            </a:endParaRPr>
+          </a:p>
+        </p:txBody>
+      </p:sp>
+      <p:sp>
+        <p:nvSpPr>
+          <p:cNvPr id="38" name="矩形 37"/>
+          <p:cNvSpPr/>
+          <p:nvPr/>
+        </p:nvSpPr>
+        <p:spPr>
+          <a:xfrm>
+            <a:off x="4677859" y="1397688"/>
+            <a:ext cx="2897579" cy="646331"/>
+          </a:xfrm>
+          <a:prstGeom prst="rect">
+            <a:avLst/>
+          </a:prstGeom>
+        </p:spPr>
+        <p:txBody>
+          <a:bodyPr wrap="square">
+            <a:spAutoFit/>
+          </a:bodyPr>
+          <a:lstStyle/>
+          <a:p>
+            <a:pPr algn="ctr"/>
+            <a:r>
+              <a:rPr lang="zh-CN" altLang="en-US" b="1" dirty="0" smtClean="0">
+                <a:latin typeface="宋体" panose="02010600030101010101" pitchFamily="2" charset="-122"/>
+                <a:ea typeface="宋体" panose="02010600030101010101" pitchFamily="2" charset="-122"/>
+              </a:rPr>
+              <a:t>面向高效通信的参数同步拓扑优化</a:t>
+            </a:r>
+            <a:endParaRPr lang="zh-CN" altLang="en-US" b="1" dirty="0">
+              <a:latin typeface="宋体" panose="02010600030101010101" pitchFamily="2" charset="-122"/>
+              <a:ea typeface="宋体" panose="02010600030101010101" pitchFamily="2" charset="-122"/>
+            </a:endParaRPr>
+          </a:p>
+        </p:txBody>
+      </p:sp>
+      <p:sp>
+        <p:nvSpPr>
+          <p:cNvPr id="39" name="文本框 38"/>
+          <p:cNvSpPr txBox="1"/>
+          <p:nvPr/>
+        </p:nvSpPr>
+        <p:spPr>
+          <a:xfrm>
+            <a:off x="4507513" y="2062487"/>
+            <a:ext cx="3206384" cy="338554"/>
+          </a:xfrm>
+          <a:prstGeom prst="rect">
+            <a:avLst/>
+          </a:prstGeom>
+          <a:solidFill>
+            <a:schemeClr val="accent3">
+              <a:lumMod val="20000"/>
+              <a:lumOff val="80000"/>
+            </a:schemeClr>
+          </a:solidFill>
+        </p:spPr>
+        <p:txBody>
+          <a:bodyPr wrap="square" rtlCol="0">
+            <a:spAutoFit/>
+          </a:bodyPr>
+          <a:lstStyle/>
+          <a:p>
+            <a:pPr algn="ctr"/>
+            <a:r>
+              <a:rPr lang="zh-CN" altLang="en-US" sz="1600" dirty="0" smtClean="0">
+                <a:latin typeface="宋体" panose="02010600030101010101" pitchFamily="2" charset="-122"/>
+                <a:ea typeface="宋体" panose="02010600030101010101" pitchFamily="2" charset="-122"/>
+              </a:rPr>
+              <a:t>基于通信约束的优化问题设计</a:t>
+            </a:r>
+            <a:endParaRPr lang="zh-CN" altLang="en-US" sz="1600" dirty="0">
+              <a:latin typeface="宋体" panose="02010600030101010101" pitchFamily="2" charset="-122"/>
+              <a:ea typeface="宋体" panose="02010600030101010101" pitchFamily="2" charset="-122"/>
+            </a:endParaRPr>
+          </a:p>
+        </p:txBody>
+      </p:sp>
+      <p:sp>
+        <p:nvSpPr>
+          <p:cNvPr id="40" name="文本框 39"/>
+          <p:cNvSpPr txBox="1"/>
+          <p:nvPr/>
+        </p:nvSpPr>
+        <p:spPr>
+          <a:xfrm>
+            <a:off x="4507513" y="2875281"/>
+            <a:ext cx="3206384" cy="338554"/>
+          </a:xfrm>
+          <a:prstGeom prst="rect">
+            <a:avLst/>
+          </a:prstGeom>
+          <a:solidFill>
+            <a:schemeClr val="accent3">
+              <a:lumMod val="20000"/>
+              <a:lumOff val="80000"/>
+            </a:schemeClr>
+          </a:solidFill>
+        </p:spPr>
+        <p:txBody>
+          <a:bodyPr wrap="square" rtlCol="0">
+            <a:spAutoFit/>
+          </a:bodyPr>
+          <a:lstStyle/>
+          <a:p>
+            <a:pPr algn="ctr"/>
+            <a:r>
+              <a:rPr lang="zh-CN" altLang="en-US" sz="1600" dirty="0" smtClean="0">
+                <a:latin typeface="宋体" panose="02010600030101010101" pitchFamily="2" charset="-122"/>
+                <a:ea typeface="宋体" panose="02010600030101010101" pitchFamily="2" charset="-122"/>
+              </a:rPr>
+              <a:t>参数同步拓扑优化问题求解框架</a:t>
+            </a:r>
+            <a:endParaRPr lang="zh-CN" altLang="en-US" sz="1600" dirty="0">
+              <a:latin typeface="宋体" panose="02010600030101010101" pitchFamily="2" charset="-122"/>
+              <a:ea typeface="宋体" panose="02010600030101010101" pitchFamily="2" charset="-122"/>
+            </a:endParaRPr>
+          </a:p>
+        </p:txBody>
+      </p:sp>
+      <p:sp>
+        <p:nvSpPr>
+          <p:cNvPr id="42" name="加号 41"/>
+          <p:cNvSpPr/>
+          <p:nvPr/>
+        </p:nvSpPr>
+        <p:spPr>
+          <a:xfrm>
+            <a:off x="5996405" y="2528995"/>
+            <a:ext cx="228600" cy="236380"/>
+          </a:xfrm>
+          <a:prstGeom prst="mathPlus">
+            <a:avLst>
+              <a:gd name="adj1" fmla="val 12292"/>
+            </a:avLst>
+          </a:prstGeom>
+          <a:solidFill>
+            <a:schemeClr val="tx1"/>
+          </a:solidFill>
+          <a:ln>
+            <a:solidFill>
+              <a:schemeClr val="tx1"/>
+            </a:solidFill>
+          </a:ln>
+        </p:spPr>
+        <p:style>
+          <a:lnRef idx="2">
+            <a:schemeClr val="accent1">
+              <a:shade val="50000"/>
+            </a:schemeClr>
+          </a:lnRef>
+          <a:fillRef idx="1">
+            <a:schemeClr val="accent1"/>
+          </a:fillRef>
+          <a:effectRef idx="0">
+            <a:schemeClr val="accent1"/>
+          </a:effectRef>
+          <a:fontRef idx="minor">
+            <a:schemeClr val="lt1"/>
+          </a:fontRef>
+        </p:style>
+        <p:txBody>
+          <a:bodyPr rtlCol="0" anchor="ctr"/>
+          <a:lstStyle/>
+          <a:p>
+            <a:pPr algn="ctr"/>
+            <a:endParaRPr lang="zh-CN" altLang="en-US" sz="1600">
+              <a:latin typeface="宋体" panose="02010600030101010101" pitchFamily="2" charset="-122"/>
+              <a:ea typeface="宋体" panose="02010600030101010101" pitchFamily="2" charset="-122"/>
+            </a:endParaRPr>
+          </a:p>
+        </p:txBody>
+      </p:sp>
+      <p:sp>
+        <p:nvSpPr>
+          <p:cNvPr id="46" name="文本框 45"/>
+          <p:cNvSpPr txBox="1"/>
+          <p:nvPr/>
+        </p:nvSpPr>
+        <p:spPr>
+          <a:xfrm>
+            <a:off x="347161" y="2067246"/>
+            <a:ext cx="3046021" cy="338554"/>
+          </a:xfrm>
+          <a:prstGeom prst="rect">
+            <a:avLst/>
+          </a:prstGeom>
+          <a:solidFill>
+            <a:schemeClr val="accent3">
+              <a:lumMod val="20000"/>
+              <a:lumOff val="80000"/>
+            </a:schemeClr>
+          </a:solidFill>
+        </p:spPr>
+        <p:txBody>
+          <a:bodyPr wrap="square" rtlCol="0">
+            <a:spAutoFit/>
+          </a:bodyPr>
+          <a:lstStyle/>
+          <a:p>
+            <a:pPr algn="ctr"/>
+            <a:r>
+              <a:rPr lang="zh-CN" altLang="en-US" sz="1600" dirty="0" smtClean="0">
+                <a:latin typeface="宋体" panose="02010600030101010101" pitchFamily="2" charset="-122"/>
+                <a:ea typeface="宋体" panose="02010600030101010101" pitchFamily="2" charset="-122"/>
+              </a:rPr>
+              <a:t>基于</a:t>
+            </a:r>
+            <a:r>
+              <a:rPr lang="en-US" altLang="zh-CN" sz="1600" dirty="0" smtClean="0">
+                <a:latin typeface="宋体" panose="02010600030101010101" pitchFamily="2" charset="-122"/>
+                <a:ea typeface="宋体" panose="02010600030101010101" pitchFamily="2" charset="-122"/>
+              </a:rPr>
+              <a:t>MLP</a:t>
+            </a:r>
+            <a:r>
+              <a:rPr lang="zh-CN" altLang="en-US" sz="1600" dirty="0" smtClean="0">
+                <a:latin typeface="宋体" panose="02010600030101010101" pitchFamily="2" charset="-122"/>
+                <a:ea typeface="宋体" panose="02010600030101010101" pitchFamily="2" charset="-122"/>
+              </a:rPr>
+              <a:t>的计算时间预测</a:t>
+            </a:r>
+            <a:endParaRPr lang="zh-CN" altLang="en-US" sz="1600" dirty="0">
+              <a:latin typeface="宋体" panose="02010600030101010101" pitchFamily="2" charset="-122"/>
+              <a:ea typeface="宋体" panose="02010600030101010101" pitchFamily="2" charset="-122"/>
+            </a:endParaRPr>
+          </a:p>
+        </p:txBody>
+      </p:sp>
+      <p:sp>
+        <p:nvSpPr>
+          <p:cNvPr id="47" name="文本框 46"/>
+          <p:cNvSpPr txBox="1"/>
+          <p:nvPr/>
+        </p:nvSpPr>
+        <p:spPr>
+          <a:xfrm>
+            <a:off x="347162" y="2875281"/>
+            <a:ext cx="3046021" cy="338554"/>
+          </a:xfrm>
+          <a:prstGeom prst="rect">
+            <a:avLst/>
+          </a:prstGeom>
+          <a:solidFill>
+            <a:schemeClr val="accent3">
+              <a:lumMod val="20000"/>
+              <a:lumOff val="80000"/>
+            </a:schemeClr>
+          </a:solidFill>
+        </p:spPr>
+        <p:txBody>
+          <a:bodyPr wrap="square" rtlCol="0">
+            <a:spAutoFit/>
+          </a:bodyPr>
+          <a:lstStyle/>
+          <a:p>
+            <a:pPr algn="ctr"/>
+            <a:r>
+              <a:rPr lang="zh-CN" altLang="en-US" sz="1600" dirty="0" smtClean="0">
+                <a:latin typeface="宋体" panose="02010600030101010101" pitchFamily="2" charset="-122"/>
+                <a:ea typeface="宋体" panose="02010600030101010101" pitchFamily="2" charset="-122"/>
+              </a:rPr>
+              <a:t>基于分析模型的通信时间预测</a:t>
+            </a:r>
+            <a:endParaRPr lang="zh-CN" altLang="en-US" sz="1600" dirty="0">
+              <a:latin typeface="宋体" panose="02010600030101010101" pitchFamily="2" charset="-122"/>
+              <a:ea typeface="宋体" panose="02010600030101010101" pitchFamily="2" charset="-122"/>
+            </a:endParaRPr>
+          </a:p>
+        </p:txBody>
+      </p:sp>
+      <p:sp>
+        <p:nvSpPr>
+          <p:cNvPr id="48" name="加号 47"/>
+          <p:cNvSpPr/>
+          <p:nvPr/>
+        </p:nvSpPr>
+        <p:spPr>
+          <a:xfrm>
+            <a:off x="1755874" y="2535049"/>
+            <a:ext cx="228600" cy="236380"/>
+          </a:xfrm>
+          <a:prstGeom prst="mathPlus">
+            <a:avLst>
+              <a:gd name="adj1" fmla="val 12292"/>
+            </a:avLst>
+          </a:prstGeom>
+          <a:solidFill>
+            <a:schemeClr val="tx1"/>
+          </a:solidFill>
+          <a:ln>
+            <a:solidFill>
+              <a:schemeClr val="tx1"/>
+            </a:solidFill>
+          </a:ln>
+        </p:spPr>
+        <p:style>
+          <a:lnRef idx="2">
+            <a:schemeClr val="accent1">
+              <a:shade val="50000"/>
+            </a:schemeClr>
+          </a:lnRef>
+          <a:fillRef idx="1">
+            <a:schemeClr val="accent1"/>
+          </a:fillRef>
+          <a:effectRef idx="0">
+            <a:schemeClr val="accent1"/>
+          </a:effectRef>
+          <a:fontRef idx="minor">
+            <a:schemeClr val="lt1"/>
+          </a:fontRef>
+        </p:style>
+        <p:txBody>
+          <a:bodyPr rtlCol="0" anchor="ctr"/>
+          <a:lstStyle/>
+          <a:p>
+            <a:pPr algn="ctr"/>
+            <a:endParaRPr lang="zh-CN" altLang="en-US" sz="1600">
+              <a:latin typeface="宋体" panose="02010600030101010101" pitchFamily="2" charset="-122"/>
+              <a:ea typeface="宋体" panose="02010600030101010101" pitchFamily="2" charset="-122"/>
+            </a:endParaRPr>
+          </a:p>
+        </p:txBody>
+      </p:sp>
+      <p:sp>
+        <p:nvSpPr>
+          <p:cNvPr id="49" name="矩形 48"/>
+          <p:cNvSpPr/>
+          <p:nvPr/>
+        </p:nvSpPr>
+        <p:spPr>
+          <a:xfrm>
+            <a:off x="8547696" y="810084"/>
+            <a:ext cx="3607078" cy="569136"/>
+          </a:xfrm>
+          <a:prstGeom prst="rect">
+            <a:avLst/>
+          </a:prstGeom>
+          <a:solidFill>
+            <a:schemeClr val="accent1">
+              <a:lumMod val="20000"/>
+              <a:lumOff val="80000"/>
+            </a:schemeClr>
+          </a:solidFill>
+          <a:ln>
+            <a:solidFill>
+              <a:schemeClr val="accent1">
+                <a:lumMod val="20000"/>
+                <a:lumOff val="80000"/>
+              </a:schemeClr>
+            </a:solidFill>
+          </a:ln>
+        </p:spPr>
+        <p:style>
+          <a:lnRef idx="2">
+            <a:schemeClr val="accent1">
+              <a:shade val="50000"/>
+            </a:schemeClr>
+          </a:lnRef>
+          <a:fillRef idx="1">
+            <a:schemeClr val="accent1"/>
+          </a:fillRef>
+          <a:effectRef idx="0">
+            <a:schemeClr val="accent1"/>
+          </a:effectRef>
+          <a:fontRef idx="minor">
+            <a:schemeClr val="lt1"/>
+          </a:fontRef>
+        </p:style>
+        <p:txBody>
+          <a:bodyPr rtlCol="0" anchor="ctr"/>
+          <a:lstStyle/>
+          <a:p>
+            <a:pPr algn="ctr"/>
+            <a:endParaRPr lang="zh-CN" altLang="en-US" sz="1600">
+              <a:latin typeface="宋体" panose="02010600030101010101" pitchFamily="2" charset="-122"/>
+              <a:ea typeface="宋体" panose="02010600030101010101" pitchFamily="2" charset="-122"/>
+            </a:endParaRPr>
+          </a:p>
+        </p:txBody>
+      </p:sp>
+      <p:sp>
+        <p:nvSpPr>
+          <p:cNvPr id="50" name="矩形 49"/>
+          <p:cNvSpPr/>
+          <p:nvPr/>
+        </p:nvSpPr>
+        <p:spPr>
+          <a:xfrm>
+            <a:off x="8547696" y="810084"/>
+            <a:ext cx="3607078" cy="2626536"/>
+          </a:xfrm>
+          <a:prstGeom prst="rect">
+            <a:avLst/>
+          </a:prstGeom>
+          <a:noFill/>
+          <a:ln w="19050">
+            <a:solidFill>
+              <a:schemeClr val="tx1"/>
+            </a:solidFill>
+          </a:ln>
+        </p:spPr>
+        <p:style>
+          <a:lnRef idx="2">
+            <a:schemeClr val="accent1">
+              <a:shade val="50000"/>
+            </a:schemeClr>
+          </a:lnRef>
+          <a:fillRef idx="1">
+            <a:schemeClr val="accent1"/>
+          </a:fillRef>
+          <a:effectRef idx="0">
+            <a:schemeClr val="accent1"/>
+          </a:effectRef>
+          <a:fontRef idx="minor">
+            <a:schemeClr val="lt1"/>
+          </a:fontRef>
+        </p:style>
+        <p:txBody>
+          <a:bodyPr rtlCol="0" anchor="ctr"/>
+          <a:lstStyle/>
+          <a:p>
+            <a:pPr algn="ctr"/>
+            <a:endParaRPr lang="zh-CN" altLang="en-US" b="1" dirty="0">
+              <a:solidFill>
+                <a:schemeClr val="tx1"/>
+              </a:solidFill>
+              <a:latin typeface="宋体" panose="02010600030101010101" pitchFamily="2" charset="-122"/>
+              <a:ea typeface="宋体" panose="02010600030101010101" pitchFamily="2" charset="-122"/>
+            </a:endParaRPr>
+          </a:p>
+        </p:txBody>
+      </p:sp>
+      <p:sp>
+        <p:nvSpPr>
+          <p:cNvPr id="51" name="文本框 50"/>
+          <p:cNvSpPr txBox="1"/>
+          <p:nvPr/>
+        </p:nvSpPr>
+        <p:spPr>
+          <a:xfrm>
+            <a:off x="9617701" y="900591"/>
+            <a:ext cx="1338828" cy="369332"/>
+          </a:xfrm>
+          <a:prstGeom prst="rect">
+            <a:avLst/>
+          </a:prstGeom>
+          <a:noFill/>
+        </p:spPr>
+        <p:txBody>
+          <a:bodyPr wrap="none" rtlCol="0">
+            <a:spAutoFit/>
+          </a:bodyPr>
+          <a:lstStyle/>
+          <a:p>
+            <a:r>
+              <a:rPr lang="zh-CN" altLang="en-US" dirty="0" smtClean="0">
+                <a:latin typeface="宋体" panose="02010600030101010101" pitchFamily="2" charset="-122"/>
+                <a:ea typeface="宋体" panose="02010600030101010101" pitchFamily="2" charset="-122"/>
+              </a:rPr>
+              <a:t>研究</a:t>
+            </a:r>
+            <a:r>
+              <a:rPr lang="zh-CN" altLang="en-US" dirty="0" smtClean="0">
+                <a:latin typeface="宋体" panose="02010600030101010101" pitchFamily="2" charset="-122"/>
+                <a:ea typeface="宋体" panose="02010600030101010101" pitchFamily="2" charset="-122"/>
+              </a:rPr>
+              <a:t>内容三</a:t>
+            </a:r>
+            <a:endParaRPr lang="zh-CN" altLang="en-US" dirty="0">
+              <a:latin typeface="宋体" panose="02010600030101010101" pitchFamily="2" charset="-122"/>
+              <a:ea typeface="宋体" panose="02010600030101010101" pitchFamily="2" charset="-122"/>
+            </a:endParaRPr>
+          </a:p>
+        </p:txBody>
+      </p:sp>
+      <p:sp>
+        <p:nvSpPr>
+          <p:cNvPr id="52" name="矩形 51"/>
+          <p:cNvSpPr/>
+          <p:nvPr/>
+        </p:nvSpPr>
+        <p:spPr>
+          <a:xfrm>
+            <a:off x="8547696" y="1536187"/>
+            <a:ext cx="3607078" cy="369332"/>
+          </a:xfrm>
+          <a:prstGeom prst="rect">
+            <a:avLst/>
+          </a:prstGeom>
+        </p:spPr>
+        <p:txBody>
+          <a:bodyPr wrap="square">
+            <a:spAutoFit/>
+          </a:bodyPr>
+          <a:lstStyle/>
+          <a:p>
+            <a:pPr algn="ctr"/>
+            <a:r>
+              <a:rPr lang="zh-CN" altLang="en-US" b="1" dirty="0" smtClean="0">
+                <a:latin typeface="宋体" panose="02010600030101010101" pitchFamily="2" charset="-122"/>
+                <a:ea typeface="宋体" panose="02010600030101010101" pitchFamily="2" charset="-122"/>
+              </a:rPr>
+              <a:t>带宽自适应的通信数据压缩</a:t>
+            </a:r>
+            <a:endParaRPr lang="zh-CN" altLang="en-US" b="1" dirty="0">
+              <a:latin typeface="宋体" panose="02010600030101010101" pitchFamily="2" charset="-122"/>
+              <a:ea typeface="宋体" panose="02010600030101010101" pitchFamily="2" charset="-122"/>
+            </a:endParaRPr>
+          </a:p>
+        </p:txBody>
+      </p:sp>
+      <p:sp>
+        <p:nvSpPr>
+          <p:cNvPr id="53" name="文本框 52"/>
+          <p:cNvSpPr txBox="1"/>
+          <p:nvPr/>
+        </p:nvSpPr>
+        <p:spPr>
+          <a:xfrm>
+            <a:off x="8656320" y="2067246"/>
+            <a:ext cx="3413760" cy="338554"/>
+          </a:xfrm>
+          <a:prstGeom prst="rect">
+            <a:avLst/>
+          </a:prstGeom>
+          <a:solidFill>
+            <a:schemeClr val="accent3">
+              <a:lumMod val="20000"/>
+              <a:lumOff val="80000"/>
+            </a:schemeClr>
+          </a:solidFill>
+        </p:spPr>
+        <p:txBody>
+          <a:bodyPr wrap="square" rtlCol="0">
+            <a:spAutoFit/>
+          </a:bodyPr>
+          <a:lstStyle/>
+          <a:p>
+            <a:pPr algn="ctr"/>
+            <a:r>
+              <a:rPr lang="zh-CN" altLang="en-US" sz="1600" dirty="0" smtClean="0">
+                <a:latin typeface="宋体" panose="02010600030101010101" pitchFamily="2" charset="-122"/>
+                <a:ea typeface="宋体" panose="02010600030101010101" pitchFamily="2" charset="-122"/>
+              </a:rPr>
+              <a:t>基于数据映射的量化策略</a:t>
+            </a:r>
+            <a:endParaRPr lang="zh-CN" altLang="en-US" sz="1600" dirty="0">
+              <a:latin typeface="宋体" panose="02010600030101010101" pitchFamily="2" charset="-122"/>
+              <a:ea typeface="宋体" panose="02010600030101010101" pitchFamily="2" charset="-122"/>
+            </a:endParaRPr>
+          </a:p>
+        </p:txBody>
+      </p:sp>
+      <p:sp>
+        <p:nvSpPr>
+          <p:cNvPr id="54" name="文本框 53"/>
+          <p:cNvSpPr txBox="1"/>
+          <p:nvPr/>
+        </p:nvSpPr>
+        <p:spPr>
+          <a:xfrm>
+            <a:off x="8656320" y="2867921"/>
+            <a:ext cx="3413760" cy="338554"/>
+          </a:xfrm>
+          <a:prstGeom prst="rect">
+            <a:avLst/>
+          </a:prstGeom>
+          <a:solidFill>
+            <a:schemeClr val="accent3">
+              <a:lumMod val="20000"/>
+              <a:lumOff val="80000"/>
+            </a:schemeClr>
+          </a:solidFill>
+        </p:spPr>
+        <p:txBody>
+          <a:bodyPr wrap="square" rtlCol="0">
+            <a:spAutoFit/>
+          </a:bodyPr>
+          <a:lstStyle/>
+          <a:p>
+            <a:pPr algn="ctr"/>
+            <a:r>
+              <a:rPr lang="zh-CN" altLang="en-US" sz="1600" dirty="0" smtClean="0">
+                <a:latin typeface="宋体" panose="02010600030101010101" pitchFamily="2" charset="-122"/>
+                <a:ea typeface="宋体" panose="02010600030101010101" pitchFamily="2" charset="-122"/>
+              </a:rPr>
+              <a:t>带宽自适应量化分布式训练算法</a:t>
+            </a:r>
+            <a:endParaRPr lang="zh-CN" altLang="en-US" sz="1600" dirty="0">
+              <a:latin typeface="宋体" panose="02010600030101010101" pitchFamily="2" charset="-122"/>
+              <a:ea typeface="宋体" panose="02010600030101010101" pitchFamily="2" charset="-122"/>
+            </a:endParaRPr>
+          </a:p>
+        </p:txBody>
+      </p:sp>
+      <p:sp>
+        <p:nvSpPr>
+          <p:cNvPr id="55" name="加号 54"/>
+          <p:cNvSpPr/>
+          <p:nvPr/>
+        </p:nvSpPr>
+        <p:spPr>
+          <a:xfrm>
+            <a:off x="10268824" y="2528995"/>
+            <a:ext cx="228600" cy="236380"/>
+          </a:xfrm>
+          <a:prstGeom prst="mathPlus">
+            <a:avLst>
+              <a:gd name="adj1" fmla="val 12292"/>
+            </a:avLst>
+          </a:prstGeom>
+          <a:solidFill>
+            <a:schemeClr val="tx1"/>
+          </a:solidFill>
+          <a:ln>
+            <a:solidFill>
+              <a:schemeClr val="tx1"/>
+            </a:solidFill>
+          </a:ln>
+        </p:spPr>
+        <p:style>
+          <a:lnRef idx="2">
+            <a:schemeClr val="accent1">
+              <a:shade val="50000"/>
+            </a:schemeClr>
+          </a:lnRef>
+          <a:fillRef idx="1">
+            <a:schemeClr val="accent1"/>
+          </a:fillRef>
+          <a:effectRef idx="0">
+            <a:schemeClr val="accent1"/>
+          </a:effectRef>
+          <a:fontRef idx="minor">
+            <a:schemeClr val="lt1"/>
+          </a:fontRef>
+        </p:style>
+        <p:txBody>
+          <a:bodyPr rtlCol="0" anchor="ctr"/>
+          <a:lstStyle/>
+          <a:p>
+            <a:pPr algn="ctr"/>
+            <a:endParaRPr lang="zh-CN" altLang="en-US" sz="1600">
+              <a:latin typeface="宋体" panose="02010600030101010101" pitchFamily="2" charset="-122"/>
+              <a:ea typeface="宋体" panose="02010600030101010101" pitchFamily="2" charset="-122"/>
+            </a:endParaRPr>
+          </a:p>
+        </p:txBody>
+      </p:sp>
+      <p:sp>
+        <p:nvSpPr>
+          <p:cNvPr id="9" name="圆角矩形 8"/>
+          <p:cNvSpPr/>
+          <p:nvPr/>
+        </p:nvSpPr>
+        <p:spPr>
+          <a:xfrm>
+            <a:off x="4507513" y="4930003"/>
+            <a:ext cx="3206384" cy="525780"/>
+          </a:xfrm>
+          <a:prstGeom prst="roundRect">
+            <a:avLst/>
+          </a:prstGeom>
+          <a:noFill/>
+          <a:ln w="19050">
+            <a:solidFill>
+              <a:schemeClr val="tx1"/>
+            </a:solidFill>
+          </a:ln>
+        </p:spPr>
+        <p:style>
+          <a:lnRef idx="2">
+            <a:schemeClr val="accent1">
+              <a:shade val="50000"/>
+            </a:schemeClr>
+          </a:lnRef>
+          <a:fillRef idx="1">
+            <a:schemeClr val="accent1"/>
+          </a:fillRef>
+          <a:effectRef idx="0">
+            <a:schemeClr val="accent1"/>
+          </a:effectRef>
+          <a:fontRef idx="minor">
+            <a:schemeClr val="lt1"/>
+          </a:fontRef>
+        </p:style>
+        <p:txBody>
+          <a:bodyPr rtlCol="0" anchor="ctr"/>
+          <a:lstStyle/>
+          <a:p>
+            <a:pPr algn="ctr"/>
+            <a:endParaRPr lang="zh-CN" altLang="en-US">
+              <a:latin typeface="宋体" panose="02010600030101010101" pitchFamily="2" charset="-122"/>
+              <a:ea typeface="宋体" panose="02010600030101010101" pitchFamily="2" charset="-122"/>
+            </a:endParaRPr>
+          </a:p>
+        </p:txBody>
+      </p:sp>
+      <p:sp>
+        <p:nvSpPr>
+          <p:cNvPr id="57" name="文本框 56"/>
+          <p:cNvSpPr txBox="1"/>
+          <p:nvPr/>
+        </p:nvSpPr>
+        <p:spPr>
+          <a:xfrm>
+            <a:off x="4528410" y="5008227"/>
+            <a:ext cx="3185487" cy="369332"/>
+          </a:xfrm>
+          <a:prstGeom prst="rect">
+            <a:avLst/>
+          </a:prstGeom>
+          <a:noFill/>
+        </p:spPr>
+        <p:txBody>
+          <a:bodyPr wrap="none" rtlCol="0">
+            <a:spAutoFit/>
+          </a:bodyPr>
+          <a:lstStyle/>
+          <a:p>
+            <a:pPr algn="ctr"/>
+            <a:r>
+              <a:rPr lang="zh-CN" altLang="en-US" b="1" dirty="0" smtClean="0">
+                <a:latin typeface="宋体" panose="02010600030101010101" pitchFamily="2" charset="-122"/>
+                <a:ea typeface="宋体" panose="02010600030101010101" pitchFamily="2" charset="-122"/>
+              </a:rPr>
+              <a:t>提高分布式深度学习训练效率</a:t>
+            </a:r>
+            <a:endParaRPr lang="zh-CN" altLang="en-US" b="1" dirty="0">
+              <a:latin typeface="宋体" panose="02010600030101010101" pitchFamily="2" charset="-122"/>
+              <a:ea typeface="宋体" panose="02010600030101010101" pitchFamily="2" charset="-122"/>
+            </a:endParaRPr>
+          </a:p>
+        </p:txBody>
+      </p:sp>
+      <p:sp>
+        <p:nvSpPr>
+          <p:cNvPr id="110" name="任意多边形 109"/>
+          <p:cNvSpPr/>
+          <p:nvPr/>
+        </p:nvSpPr>
+        <p:spPr>
+          <a:xfrm>
+            <a:off x="1834174" y="3436620"/>
+            <a:ext cx="8584950" cy="1445627"/>
+          </a:xfrm>
+          <a:custGeom>
+            <a:avLst/>
+            <a:gdLst>
+              <a:gd name="connsiteX0" fmla="*/ 0 w 8584950"/>
+              <a:gd name="connsiteY0" fmla="*/ 0 h 1445627"/>
+              <a:gd name="connsiteX1" fmla="*/ 72000 w 8584950"/>
+              <a:gd name="connsiteY1" fmla="*/ 0 h 1445627"/>
+              <a:gd name="connsiteX2" fmla="*/ 72000 w 8584950"/>
+              <a:gd name="connsiteY2" fmla="*/ 900000 h 1445627"/>
+              <a:gd name="connsiteX3" fmla="*/ 4244145 w 8584950"/>
+              <a:gd name="connsiteY3" fmla="*/ 900000 h 1445627"/>
+              <a:gd name="connsiteX4" fmla="*/ 4244145 w 8584950"/>
+              <a:gd name="connsiteY4" fmla="*/ 5447 h 1445627"/>
+              <a:gd name="connsiteX5" fmla="*/ 4324155 w 8584950"/>
+              <a:gd name="connsiteY5" fmla="*/ 5447 h 1445627"/>
+              <a:gd name="connsiteX6" fmla="*/ 4324155 w 8584950"/>
+              <a:gd name="connsiteY6" fmla="*/ 900000 h 1445627"/>
+              <a:gd name="connsiteX7" fmla="*/ 8512950 w 8584950"/>
+              <a:gd name="connsiteY7" fmla="*/ 900000 h 1445627"/>
+              <a:gd name="connsiteX8" fmla="*/ 8512950 w 8584950"/>
+              <a:gd name="connsiteY8" fmla="*/ 0 h 1445627"/>
+              <a:gd name="connsiteX9" fmla="*/ 8584950 w 8584950"/>
+              <a:gd name="connsiteY9" fmla="*/ 0 h 1445627"/>
+              <a:gd name="connsiteX10" fmla="*/ 8584950 w 8584950"/>
+              <a:gd name="connsiteY10" fmla="*/ 900000 h 1445627"/>
+              <a:gd name="connsiteX11" fmla="*/ 8584950 w 8584950"/>
+              <a:gd name="connsiteY11" fmla="*/ 972000 h 1445627"/>
+              <a:gd name="connsiteX12" fmla="*/ 4324155 w 8584950"/>
+              <a:gd name="connsiteY12" fmla="*/ 972000 h 1445627"/>
+              <a:gd name="connsiteX13" fmla="*/ 4324155 w 8584950"/>
+              <a:gd name="connsiteY13" fmla="*/ 1314503 h 1445627"/>
+              <a:gd name="connsiteX14" fmla="*/ 4364160 w 8584950"/>
+              <a:gd name="connsiteY14" fmla="*/ 1314503 h 1445627"/>
+              <a:gd name="connsiteX15" fmla="*/ 4284150 w 8584950"/>
+              <a:gd name="connsiteY15" fmla="*/ 1445627 h 1445627"/>
+              <a:gd name="connsiteX16" fmla="*/ 4204140 w 8584950"/>
+              <a:gd name="connsiteY16" fmla="*/ 1314503 h 1445627"/>
+              <a:gd name="connsiteX17" fmla="*/ 4244145 w 8584950"/>
+              <a:gd name="connsiteY17" fmla="*/ 1314503 h 1445627"/>
+              <a:gd name="connsiteX18" fmla="*/ 4244145 w 8584950"/>
+              <a:gd name="connsiteY18" fmla="*/ 972000 h 1445627"/>
+              <a:gd name="connsiteX19" fmla="*/ 0 w 8584950"/>
+              <a:gd name="connsiteY19" fmla="*/ 972000 h 1445627"/>
+              <a:gd name="connsiteX20" fmla="*/ 0 w 8584950"/>
+              <a:gd name="connsiteY20" fmla="*/ 900000 h 1445627"/>
+              <a:gd name="connsiteX21" fmla="*/ 0 w 8584950"/>
+              <a:gd name="connsiteY21" fmla="*/ 900000 h 1445627"/>
+            </a:gdLst>
+            <a:ahLst/>
+            <a:cxnLst>
+              <a:cxn ang="0">
+                <a:pos x="connsiteX0" y="connsiteY0"/>
+              </a:cxn>
+              <a:cxn ang="0">
+                <a:pos x="connsiteX1" y="connsiteY1"/>
+              </a:cxn>
+              <a:cxn ang="0">
+                <a:pos x="connsiteX2" y="connsiteY2"/>
+              </a:cxn>
+              <a:cxn ang="0">
+                <a:pos x="connsiteX3" y="connsiteY3"/>
+              </a:cxn>
+              <a:cxn ang="0">
+                <a:pos x="connsiteX4" y="connsiteY4"/>
+              </a:cxn>
+              <a:cxn ang="0">
+                <a:pos x="connsiteX5" y="connsiteY5"/>
+              </a:cxn>
+              <a:cxn ang="0">
+                <a:pos x="connsiteX6" y="connsiteY6"/>
+              </a:cxn>
+              <a:cxn ang="0">
+                <a:pos x="connsiteX7" y="connsiteY7"/>
+              </a:cxn>
+              <a:cxn ang="0">
+                <a:pos x="connsiteX8" y="connsiteY8"/>
+              </a:cxn>
+              <a:cxn ang="0">
+                <a:pos x="connsiteX9" y="connsiteY9"/>
+              </a:cxn>
+              <a:cxn ang="0">
+                <a:pos x="connsiteX10" y="connsiteY10"/>
+              </a:cxn>
+              <a:cxn ang="0">
+                <a:pos x="connsiteX11" y="connsiteY11"/>
+              </a:cxn>
+              <a:cxn ang="0">
+                <a:pos x="connsiteX12" y="connsiteY12"/>
+              </a:cxn>
+              <a:cxn ang="0">
+                <a:pos x="connsiteX13" y="connsiteY13"/>
+              </a:cxn>
+              <a:cxn ang="0">
+                <a:pos x="connsiteX14" y="connsiteY14"/>
+              </a:cxn>
+              <a:cxn ang="0">
+                <a:pos x="connsiteX15" y="connsiteY15"/>
+              </a:cxn>
+              <a:cxn ang="0">
+                <a:pos x="connsiteX16" y="connsiteY16"/>
+              </a:cxn>
+              <a:cxn ang="0">
+                <a:pos x="connsiteX17" y="connsiteY17"/>
+              </a:cxn>
+              <a:cxn ang="0">
+                <a:pos x="connsiteX18" y="connsiteY18"/>
+              </a:cxn>
+              <a:cxn ang="0">
+                <a:pos x="connsiteX19" y="connsiteY19"/>
+              </a:cxn>
+              <a:cxn ang="0">
+                <a:pos x="connsiteX20" y="connsiteY20"/>
+              </a:cxn>
+              <a:cxn ang="0">
+                <a:pos x="connsiteX21" y="connsiteY21"/>
+              </a:cxn>
+            </a:cxnLst>
+            <a:rect l="l" t="t" r="r" b="b"/>
+            <a:pathLst>
+              <a:path w="8584950" h="1445627">
+                <a:moveTo>
+                  <a:pt x="0" y="0"/>
+                </a:moveTo>
+                <a:lnTo>
+                  <a:pt x="72000" y="0"/>
+                </a:lnTo>
+                <a:lnTo>
+                  <a:pt x="72000" y="900000"/>
+                </a:lnTo>
+                <a:lnTo>
+                  <a:pt x="4244145" y="900000"/>
+                </a:lnTo>
+                <a:lnTo>
+                  <a:pt x="4244145" y="5447"/>
+                </a:lnTo>
+                <a:lnTo>
+                  <a:pt x="4324155" y="5447"/>
+                </a:lnTo>
+                <a:lnTo>
+                  <a:pt x="4324155" y="900000"/>
+                </a:lnTo>
+                <a:lnTo>
+                  <a:pt x="8512950" y="900000"/>
+                </a:lnTo>
+                <a:lnTo>
+                  <a:pt x="8512950" y="0"/>
+                </a:lnTo>
+                <a:lnTo>
+                  <a:pt x="8584950" y="0"/>
+                </a:lnTo>
+                <a:lnTo>
+                  <a:pt x="8584950" y="900000"/>
+                </a:lnTo>
+                <a:lnTo>
+                  <a:pt x="8584950" y="972000"/>
+                </a:lnTo>
+                <a:lnTo>
+                  <a:pt x="4324155" y="972000"/>
+                </a:lnTo>
+                <a:lnTo>
+                  <a:pt x="4324155" y="1314503"/>
+                </a:lnTo>
+                <a:lnTo>
+                  <a:pt x="4364160" y="1314503"/>
+                </a:lnTo>
+                <a:lnTo>
+                  <a:pt x="4284150" y="1445627"/>
+                </a:lnTo>
+                <a:lnTo>
+                  <a:pt x="4204140" y="1314503"/>
+                </a:lnTo>
+                <a:lnTo>
+                  <a:pt x="4244145" y="1314503"/>
+                </a:lnTo>
+                <a:lnTo>
+                  <a:pt x="4244145" y="972000"/>
+                </a:lnTo>
+                <a:lnTo>
+                  <a:pt x="0" y="972000"/>
+                </a:lnTo>
+                <a:lnTo>
+                  <a:pt x="0" y="900000"/>
+                </a:lnTo>
+                <a:lnTo>
+                  <a:pt x="0" y="900000"/>
+                </a:lnTo>
+                <a:close/>
+              </a:path>
+            </a:pathLst>
+          </a:custGeom>
+          <a:solidFill>
+            <a:schemeClr val="bg1"/>
+          </a:solidFill>
+          <a:ln w="19050">
+            <a:solidFill>
+              <a:schemeClr val="tx1"/>
+            </a:solidFill>
+          </a:ln>
+        </p:spPr>
+        <p:style>
+          <a:lnRef idx="2">
+            <a:schemeClr val="accent1">
+              <a:shade val="50000"/>
+            </a:schemeClr>
+          </a:lnRef>
+          <a:fillRef idx="1">
+            <a:schemeClr val="accent1"/>
+          </a:fillRef>
+          <a:effectRef idx="0">
+            <a:schemeClr val="accent1"/>
+          </a:effectRef>
+          <a:fontRef idx="minor">
+            <a:schemeClr val="lt1"/>
+          </a:fontRef>
+        </p:style>
+        <p:txBody>
+          <a:bodyPr rtlCol="0" anchor="ctr"/>
+          <a:lstStyle/>
+          <a:p>
+            <a:pPr algn="ctr"/>
+            <a:endParaRPr lang="zh-CN" altLang="en-US">
+              <a:latin typeface="宋体" panose="02010600030101010101" pitchFamily="2" charset="-122"/>
+              <a:ea typeface="宋体" panose="02010600030101010101" pitchFamily="2" charset="-122"/>
+            </a:endParaRPr>
+          </a:p>
+        </p:txBody>
+      </p:sp>
+      <p:sp>
+        <p:nvSpPr>
+          <p:cNvPr id="111" name="文本框 110"/>
+          <p:cNvSpPr txBox="1"/>
+          <p:nvPr/>
+        </p:nvSpPr>
+        <p:spPr>
+          <a:xfrm>
+            <a:off x="1923514" y="3536576"/>
+            <a:ext cx="1826141" cy="644022"/>
+          </a:xfrm>
+          <a:prstGeom prst="rect">
+            <a:avLst/>
+          </a:prstGeom>
+          <a:noFill/>
+        </p:spPr>
+        <p:txBody>
+          <a:bodyPr wrap="none" rtlCol="0">
+            <a:spAutoFit/>
+          </a:bodyPr>
+          <a:lstStyle/>
+          <a:p>
+            <a:pPr>
+              <a:lnSpc>
+                <a:spcPct val="120000"/>
+              </a:lnSpc>
+            </a:pPr>
+            <a:r>
+              <a:rPr lang="zh-CN" altLang="en-US" sz="1600" dirty="0" smtClean="0">
+                <a:latin typeface="宋体" panose="02010600030101010101" pitchFamily="2" charset="-122"/>
+                <a:ea typeface="宋体" panose="02010600030101010101" pitchFamily="2" charset="-122"/>
+              </a:rPr>
+              <a:t>确定合适集群规模</a:t>
+            </a:r>
+            <a:endParaRPr lang="en-US" altLang="zh-CN" sz="1600" dirty="0" smtClean="0">
+              <a:latin typeface="宋体" panose="02010600030101010101" pitchFamily="2" charset="-122"/>
+              <a:ea typeface="宋体" panose="02010600030101010101" pitchFamily="2" charset="-122"/>
+            </a:endParaRPr>
+          </a:p>
+          <a:p>
+            <a:pPr>
+              <a:lnSpc>
+                <a:spcPct val="120000"/>
+              </a:lnSpc>
+            </a:pPr>
+            <a:r>
+              <a:rPr lang="zh-CN" altLang="en-US" sz="1600" dirty="0">
+                <a:latin typeface="宋体" panose="02010600030101010101" pitchFamily="2" charset="-122"/>
+                <a:ea typeface="宋体" panose="02010600030101010101" pitchFamily="2" charset="-122"/>
+              </a:rPr>
+              <a:t>分析性能</a:t>
+            </a:r>
+            <a:r>
+              <a:rPr lang="zh-CN" altLang="en-US" sz="1600" dirty="0" smtClean="0">
+                <a:latin typeface="宋体" panose="02010600030101010101" pitchFamily="2" charset="-122"/>
+                <a:ea typeface="宋体" panose="02010600030101010101" pitchFamily="2" charset="-122"/>
+              </a:rPr>
+              <a:t>瓶颈</a:t>
+            </a:r>
+            <a:endParaRPr lang="en-US" altLang="zh-CN" sz="1600" dirty="0">
+              <a:latin typeface="宋体" panose="02010600030101010101" pitchFamily="2" charset="-122"/>
+              <a:ea typeface="宋体" panose="02010600030101010101" pitchFamily="2" charset="-122"/>
+            </a:endParaRPr>
+          </a:p>
+        </p:txBody>
+      </p:sp>
+      <p:sp>
+        <p:nvSpPr>
+          <p:cNvPr id="112" name="文本框 111"/>
+          <p:cNvSpPr txBox="1"/>
+          <p:nvPr/>
+        </p:nvSpPr>
+        <p:spPr>
+          <a:xfrm>
+            <a:off x="8791149" y="3536576"/>
+            <a:ext cx="1620957" cy="644022"/>
+          </a:xfrm>
+          <a:prstGeom prst="rect">
+            <a:avLst/>
+          </a:prstGeom>
+          <a:noFill/>
+        </p:spPr>
+        <p:txBody>
+          <a:bodyPr wrap="none" rtlCol="0">
+            <a:spAutoFit/>
+          </a:bodyPr>
+          <a:lstStyle/>
+          <a:p>
+            <a:pPr>
+              <a:lnSpc>
+                <a:spcPct val="120000"/>
+              </a:lnSpc>
+            </a:pPr>
+            <a:r>
+              <a:rPr lang="zh-CN" altLang="en-US" sz="1600" dirty="0">
+                <a:latin typeface="宋体" panose="02010600030101010101" pitchFamily="2" charset="-122"/>
+                <a:ea typeface="宋体" panose="02010600030101010101" pitchFamily="2" charset="-122"/>
+              </a:rPr>
+              <a:t>减少通信数据量</a:t>
+            </a:r>
+            <a:endParaRPr lang="en-US" altLang="zh-CN" sz="1600" dirty="0">
+              <a:latin typeface="宋体" panose="02010600030101010101" pitchFamily="2" charset="-122"/>
+              <a:ea typeface="宋体" panose="02010600030101010101" pitchFamily="2" charset="-122"/>
+            </a:endParaRPr>
+          </a:p>
+          <a:p>
+            <a:pPr>
+              <a:lnSpc>
+                <a:spcPct val="120000"/>
+              </a:lnSpc>
+            </a:pPr>
+            <a:r>
+              <a:rPr lang="zh-CN" altLang="en-US" sz="1600" dirty="0">
+                <a:latin typeface="宋体" panose="02010600030101010101" pitchFamily="2" charset="-122"/>
+                <a:ea typeface="宋体" panose="02010600030101010101" pitchFamily="2" charset="-122"/>
+              </a:rPr>
+              <a:t>合理利用资源</a:t>
+            </a:r>
+            <a:endParaRPr lang="en-US" altLang="zh-CN" sz="1600" dirty="0">
+              <a:latin typeface="宋体" panose="02010600030101010101" pitchFamily="2" charset="-122"/>
+              <a:ea typeface="宋体" panose="02010600030101010101" pitchFamily="2" charset="-122"/>
+            </a:endParaRPr>
+          </a:p>
+        </p:txBody>
+      </p:sp>
+      <p:sp>
+        <p:nvSpPr>
+          <p:cNvPr id="113" name="文本框 112"/>
+          <p:cNvSpPr txBox="1"/>
+          <p:nvPr/>
+        </p:nvSpPr>
+        <p:spPr>
+          <a:xfrm>
+            <a:off x="6171664" y="3520161"/>
+            <a:ext cx="1620957" cy="644022"/>
+          </a:xfrm>
+          <a:prstGeom prst="rect">
+            <a:avLst/>
+          </a:prstGeom>
+          <a:noFill/>
+        </p:spPr>
+        <p:txBody>
+          <a:bodyPr wrap="none" rtlCol="0">
+            <a:spAutoFit/>
+          </a:bodyPr>
+          <a:lstStyle/>
+          <a:p>
+            <a:pPr>
+              <a:lnSpc>
+                <a:spcPct val="120000"/>
+              </a:lnSpc>
+            </a:pPr>
+            <a:r>
+              <a:rPr lang="zh-CN" altLang="en-US" sz="1600" dirty="0">
+                <a:latin typeface="宋体" panose="02010600030101010101" pitchFamily="2" charset="-122"/>
+                <a:ea typeface="宋体" panose="02010600030101010101" pitchFamily="2" charset="-122"/>
+              </a:rPr>
+              <a:t>提高一致性速度</a:t>
+            </a:r>
+            <a:endParaRPr lang="en-US" altLang="zh-CN" sz="1600" dirty="0">
+              <a:latin typeface="宋体" panose="02010600030101010101" pitchFamily="2" charset="-122"/>
+              <a:ea typeface="宋体" panose="02010600030101010101" pitchFamily="2" charset="-122"/>
+            </a:endParaRPr>
+          </a:p>
+          <a:p>
+            <a:pPr>
+              <a:lnSpc>
+                <a:spcPct val="120000"/>
+              </a:lnSpc>
+            </a:pPr>
+            <a:r>
+              <a:rPr lang="zh-CN" altLang="en-US" sz="1600" dirty="0">
+                <a:latin typeface="宋体" panose="02010600030101010101" pitchFamily="2" charset="-122"/>
+                <a:ea typeface="宋体" panose="02010600030101010101" pitchFamily="2" charset="-122"/>
+              </a:rPr>
+              <a:t>减少通信开销</a:t>
+            </a:r>
+            <a:endParaRPr lang="en-US" altLang="zh-CN" sz="1600" dirty="0">
+              <a:latin typeface="宋体" panose="02010600030101010101" pitchFamily="2" charset="-122"/>
+              <a:ea typeface="宋体" panose="02010600030101010101" pitchFamily="2" charset="-122"/>
+            </a:endParaRPr>
+          </a:p>
+        </p:txBody>
+      </p:sp>
+    </p:spTree>
+    <p:extLst>
+      <p:ext uri="{BB962C8B-B14F-4D97-AF65-F5344CB8AC3E}">
+        <p14:creationId xmlns:p14="http://schemas.microsoft.com/office/powerpoint/2010/main" val="4172155264"/>
+      </p:ext>
+    </p:extLst>
+  </p:cSld>
+  <p:clrMapOvr>
+    <a:masterClrMapping/>
+  </p:clrMapOvr>
+  <p:timing>
+    <p:tnLst>
+      <p:par>
+        <p:cTn id="1" dur="indefinite" restart="never" nodeType="tmRoot"/>
+      </p:par>
+    </p:tnLst>
+  </p:timing>
+</p:sld>
+</file>
+
 <file path=ppt/theme/theme1.xml><?xml version="1.0" encoding="utf-8"?>
 <a:theme xmlns:a="http://schemas.openxmlformats.org/drawingml/2006/main" name="Office 主题​​">
   <a:themeElements>

--- a/figure/大论文作图.pptx
+++ b/figure/大论文作图.pptx
@@ -5,12 +5,13 @@
     <p:sldMasterId id="2147483648" r:id="rId1"/>
   </p:sldMasterIdLst>
   <p:notesMasterIdLst>
-    <p:notesMasterId r:id="rId5"/>
+    <p:notesMasterId r:id="rId6"/>
   </p:notesMasterIdLst>
   <p:sldIdLst>
     <p:sldId id="257" r:id="rId2"/>
     <p:sldId id="258" r:id="rId3"/>
     <p:sldId id="259" r:id="rId4"/>
+    <p:sldId id="260" r:id="rId5"/>
   </p:sldIdLst>
   <p:sldSz cx="12192000" cy="6858000"/>
   <p:notesSz cx="6858000" cy="9144000"/>
@@ -199,7 +200,7 @@
           <a:p>
             <a:fld id="{85C2D6EB-C800-464F-A79F-2EE684CA1913}" type="datetimeFigureOut">
               <a:rPr lang="zh-CN" altLang="en-US" smtClean="0"/>
-              <a:t>2023/12/7</a:t>
+              <a:t>2023/12/8</a:t>
             </a:fld>
             <a:endParaRPr lang="zh-CN" altLang="en-US"/>
           </a:p>
@@ -766,7 +767,7 @@
           <a:p>
             <a:fld id="{3F936331-16FD-497A-8586-31CE5CA58C54}" type="datetimeFigureOut">
               <a:rPr lang="zh-CN" altLang="en-US" smtClean="0"/>
-              <a:t>2023/12/7</a:t>
+              <a:t>2023/12/8</a:t>
             </a:fld>
             <a:endParaRPr lang="zh-CN" altLang="en-US"/>
           </a:p>
@@ -936,7 +937,7 @@
           <a:p>
             <a:fld id="{3F936331-16FD-497A-8586-31CE5CA58C54}" type="datetimeFigureOut">
               <a:rPr lang="zh-CN" altLang="en-US" smtClean="0"/>
-              <a:t>2023/12/7</a:t>
+              <a:t>2023/12/8</a:t>
             </a:fld>
             <a:endParaRPr lang="zh-CN" altLang="en-US"/>
           </a:p>
@@ -1116,7 +1117,7 @@
           <a:p>
             <a:fld id="{3F936331-16FD-497A-8586-31CE5CA58C54}" type="datetimeFigureOut">
               <a:rPr lang="zh-CN" altLang="en-US" smtClean="0"/>
-              <a:t>2023/12/7</a:t>
+              <a:t>2023/12/8</a:t>
             </a:fld>
             <a:endParaRPr lang="zh-CN" altLang="en-US"/>
           </a:p>
@@ -1286,7 +1287,7 @@
           <a:p>
             <a:fld id="{3F936331-16FD-497A-8586-31CE5CA58C54}" type="datetimeFigureOut">
               <a:rPr lang="zh-CN" altLang="en-US" smtClean="0"/>
-              <a:t>2023/12/7</a:t>
+              <a:t>2023/12/8</a:t>
             </a:fld>
             <a:endParaRPr lang="zh-CN" altLang="en-US"/>
           </a:p>
@@ -1532,7 +1533,7 @@
           <a:p>
             <a:fld id="{3F936331-16FD-497A-8586-31CE5CA58C54}" type="datetimeFigureOut">
               <a:rPr lang="zh-CN" altLang="en-US" smtClean="0"/>
-              <a:t>2023/12/7</a:t>
+              <a:t>2023/12/8</a:t>
             </a:fld>
             <a:endParaRPr lang="zh-CN" altLang="en-US"/>
           </a:p>
@@ -1764,7 +1765,7 @@
           <a:p>
             <a:fld id="{3F936331-16FD-497A-8586-31CE5CA58C54}" type="datetimeFigureOut">
               <a:rPr lang="zh-CN" altLang="en-US" smtClean="0"/>
-              <a:t>2023/12/7</a:t>
+              <a:t>2023/12/8</a:t>
             </a:fld>
             <a:endParaRPr lang="zh-CN" altLang="en-US"/>
           </a:p>
@@ -2131,7 +2132,7 @@
           <a:p>
             <a:fld id="{3F936331-16FD-497A-8586-31CE5CA58C54}" type="datetimeFigureOut">
               <a:rPr lang="zh-CN" altLang="en-US" smtClean="0"/>
-              <a:t>2023/12/7</a:t>
+              <a:t>2023/12/8</a:t>
             </a:fld>
             <a:endParaRPr lang="zh-CN" altLang="en-US"/>
           </a:p>
@@ -2249,7 +2250,7 @@
           <a:p>
             <a:fld id="{3F936331-16FD-497A-8586-31CE5CA58C54}" type="datetimeFigureOut">
               <a:rPr lang="zh-CN" altLang="en-US" smtClean="0"/>
-              <a:t>2023/12/7</a:t>
+              <a:t>2023/12/8</a:t>
             </a:fld>
             <a:endParaRPr lang="zh-CN" altLang="en-US"/>
           </a:p>
@@ -2344,7 +2345,7 @@
           <a:p>
             <a:fld id="{3F936331-16FD-497A-8586-31CE5CA58C54}" type="datetimeFigureOut">
               <a:rPr lang="zh-CN" altLang="en-US" smtClean="0"/>
-              <a:t>2023/12/7</a:t>
+              <a:t>2023/12/8</a:t>
             </a:fld>
             <a:endParaRPr lang="zh-CN" altLang="en-US"/>
           </a:p>
@@ -2621,7 +2622,7 @@
           <a:p>
             <a:fld id="{3F936331-16FD-497A-8586-31CE5CA58C54}" type="datetimeFigureOut">
               <a:rPr lang="zh-CN" altLang="en-US" smtClean="0"/>
-              <a:t>2023/12/7</a:t>
+              <a:t>2023/12/8</a:t>
             </a:fld>
             <a:endParaRPr lang="zh-CN" altLang="en-US"/>
           </a:p>
@@ -2874,7 +2875,7 @@
           <a:p>
             <a:fld id="{3F936331-16FD-497A-8586-31CE5CA58C54}" type="datetimeFigureOut">
               <a:rPr lang="zh-CN" altLang="en-US" smtClean="0"/>
-              <a:t>2023/12/7</a:t>
+              <a:t>2023/12/8</a:t>
             </a:fld>
             <a:endParaRPr lang="zh-CN" altLang="en-US"/>
           </a:p>
@@ -3087,7 +3088,7 @@
           <a:p>
             <a:fld id="{3F936331-16FD-497A-8586-31CE5CA58C54}" type="datetimeFigureOut">
               <a:rPr lang="zh-CN" altLang="en-US" smtClean="0"/>
-              <a:t>2023/12/7</a:t>
+              <a:t>2023/12/8</a:t>
             </a:fld>
             <a:endParaRPr lang="zh-CN" altLang="en-US"/>
           </a:p>
@@ -6655,14 +6656,7 @@
                 <a:latin typeface="宋体" panose="02010600030101010101" pitchFamily="2" charset="-122"/>
                 <a:ea typeface="宋体" panose="02010600030101010101" pitchFamily="2" charset="-122"/>
               </a:rPr>
-              <a:t>研究</a:t>
-            </a:r>
-            <a:r>
-              <a:rPr lang="zh-CN" altLang="en-US" dirty="0" smtClean="0">
-                <a:latin typeface="宋体" panose="02010600030101010101" pitchFamily="2" charset="-122"/>
-                <a:ea typeface="宋体" panose="02010600030101010101" pitchFamily="2" charset="-122"/>
-              </a:rPr>
-              <a:t>内容二</a:t>
+              <a:t>研究内容二</a:t>
             </a:r>
             <a:endParaRPr lang="zh-CN" altLang="en-US" dirty="0">
               <a:latin typeface="宋体" panose="02010600030101010101" pitchFamily="2" charset="-122"/>
@@ -7131,14 +7125,7 @@
                 <a:latin typeface="宋体" panose="02010600030101010101" pitchFamily="2" charset="-122"/>
                 <a:ea typeface="宋体" panose="02010600030101010101" pitchFamily="2" charset="-122"/>
               </a:rPr>
-              <a:t>研究</a:t>
-            </a:r>
-            <a:r>
-              <a:rPr lang="zh-CN" altLang="en-US" dirty="0" smtClean="0">
-                <a:latin typeface="宋体" panose="02010600030101010101" pitchFamily="2" charset="-122"/>
-                <a:ea typeface="宋体" panose="02010600030101010101" pitchFamily="2" charset="-122"/>
-              </a:rPr>
-              <a:t>内容三</a:t>
+              <a:t>研究内容三</a:t>
             </a:r>
             <a:endParaRPr lang="zh-CN" altLang="en-US" dirty="0">
               <a:latin typeface="宋体" panose="02010600030101010101" pitchFamily="2" charset="-122"/>
@@ -7653,7 +7640,7 @@
         <p:spPr>
           <a:xfrm>
             <a:off x="1923514" y="3536576"/>
-            <a:ext cx="1826141" cy="644022"/>
+            <a:ext cx="1826141" cy="683264"/>
           </a:xfrm>
           <a:prstGeom prst="rect">
             <a:avLst/>
@@ -7665,24 +7652,6 @@
             <a:spAutoFit/>
           </a:bodyPr>
           <a:lstStyle/>
-          <a:p>
-            <a:pPr>
-              <a:lnSpc>
-                <a:spcPct val="120000"/>
-              </a:lnSpc>
-            </a:pPr>
-            <a:r>
-              <a:rPr lang="zh-CN" altLang="en-US" sz="1600" dirty="0" smtClean="0">
-                <a:latin typeface="宋体" panose="02010600030101010101" pitchFamily="2" charset="-122"/>
-                <a:ea typeface="宋体" panose="02010600030101010101" pitchFamily="2" charset="-122"/>
-              </a:rPr>
-              <a:t>确定合适集群规模</a:t>
-            </a:r>
-            <a:endParaRPr lang="en-US" altLang="zh-CN" sz="1600" dirty="0" smtClean="0">
-              <a:latin typeface="宋体" panose="02010600030101010101" pitchFamily="2" charset="-122"/>
-              <a:ea typeface="宋体" panose="02010600030101010101" pitchFamily="2" charset="-122"/>
-            </a:endParaRPr>
-          </a:p>
           <a:p>
             <a:pPr>
               <a:lnSpc>
@@ -7703,7 +7672,39 @@
               </a:rPr>
               <a:t>瓶颈</a:t>
             </a:r>
-            <a:endParaRPr lang="en-US" altLang="zh-CN" sz="1600" dirty="0">
+            <a:endParaRPr lang="en-US" altLang="zh-CN" sz="1600" dirty="0" smtClean="0">
+              <a:latin typeface="宋体" panose="02010600030101010101" pitchFamily="2" charset="-122"/>
+              <a:ea typeface="宋体" panose="02010600030101010101" pitchFamily="2" charset="-122"/>
+            </a:endParaRPr>
+          </a:p>
+          <a:p>
+            <a:pPr>
+              <a:lnSpc>
+                <a:spcPct val="120000"/>
+              </a:lnSpc>
+            </a:pPr>
+            <a:r>
+              <a:rPr lang="zh-CN" altLang="en-US" sz="1600" dirty="0" smtClean="0">
+                <a:latin typeface="宋体" panose="02010600030101010101" pitchFamily="2" charset="-122"/>
+                <a:ea typeface="宋体" panose="02010600030101010101" pitchFamily="2" charset="-122"/>
+              </a:rPr>
+              <a:t>确定</a:t>
+            </a:r>
+            <a:r>
+              <a:rPr lang="zh-CN" altLang="en-US" sz="1600" dirty="0" smtClean="0">
+                <a:latin typeface="宋体" panose="02010600030101010101" pitchFamily="2" charset="-122"/>
+                <a:ea typeface="宋体" panose="02010600030101010101" pitchFamily="2" charset="-122"/>
+              </a:rPr>
+              <a:t>合适集群</a:t>
+            </a:r>
+            <a:r>
+              <a:rPr lang="zh-CN" altLang="en-US" sz="1600" dirty="0" smtClean="0">
+                <a:latin typeface="宋体" panose="02010600030101010101" pitchFamily="2" charset="-122"/>
+                <a:ea typeface="宋体" panose="02010600030101010101" pitchFamily="2" charset="-122"/>
+              </a:rPr>
+              <a:t>规模</a:t>
+            </a:r>
+            <a:endParaRPr lang="en-US" altLang="zh-CN" sz="1600" dirty="0" smtClean="0">
               <a:latin typeface="宋体" panose="02010600030101010101" pitchFamily="2" charset="-122"/>
               <a:ea typeface="宋体" panose="02010600030101010101" pitchFamily="2" charset="-122"/>
             </a:endParaRPr>
@@ -7845,6 +7846,1651 @@
       </p:par>
     </p:tnLst>
   </p:timing>
+</p:sld>
+</file>
+
+<file path=ppt/slides/slide4.xml><?xml version="1.0" encoding="utf-8"?>
+<p:sld xmlns:a="http://schemas.openxmlformats.org/drawingml/2006/main" xmlns:r="http://schemas.openxmlformats.org/officeDocument/2006/relationships" xmlns:p="http://schemas.openxmlformats.org/presentationml/2006/main">
+  <p:cSld>
+    <p:spTree>
+      <p:nvGrpSpPr>
+        <p:cNvPr id="1" name=""/>
+        <p:cNvGrpSpPr/>
+        <p:nvPr/>
+      </p:nvGrpSpPr>
+      <p:grpSpPr>
+        <a:xfrm>
+          <a:off x="0" y="0"/>
+          <a:ext cx="0" cy="0"/>
+          <a:chOff x="0" y="0"/>
+          <a:chExt cx="0" cy="0"/>
+        </a:xfrm>
+      </p:grpSpPr>
+      <p:sp>
+        <p:nvSpPr>
+          <p:cNvPr id="11" name="矩形 10"/>
+          <p:cNvSpPr/>
+          <p:nvPr/>
+        </p:nvSpPr>
+        <p:spPr>
+          <a:xfrm>
+            <a:off x="5639435" y="1714500"/>
+            <a:ext cx="3437888" cy="428624"/>
+          </a:xfrm>
+          <a:prstGeom prst="rect">
+            <a:avLst/>
+          </a:prstGeom>
+          <a:solidFill>
+            <a:schemeClr val="accent1">
+              <a:lumMod val="60000"/>
+              <a:lumOff val="40000"/>
+            </a:schemeClr>
+          </a:solidFill>
+          <a:ln>
+            <a:solidFill>
+              <a:schemeClr val="accent1">
+                <a:lumMod val="60000"/>
+                <a:lumOff val="40000"/>
+              </a:schemeClr>
+            </a:solidFill>
+          </a:ln>
+        </p:spPr>
+        <p:style>
+          <a:lnRef idx="2">
+            <a:schemeClr val="accent1">
+              <a:shade val="50000"/>
+            </a:schemeClr>
+          </a:lnRef>
+          <a:fillRef idx="1">
+            <a:schemeClr val="accent1"/>
+          </a:fillRef>
+          <a:effectRef idx="0">
+            <a:schemeClr val="accent1"/>
+          </a:effectRef>
+          <a:fontRef idx="minor">
+            <a:schemeClr val="lt1"/>
+          </a:fontRef>
+        </p:style>
+        <p:txBody>
+          <a:bodyPr rtlCol="0" anchor="ctr"/>
+          <a:lstStyle/>
+          <a:p>
+            <a:pPr algn="ctr"/>
+            <a:endParaRPr lang="zh-CN" altLang="en-US">
+              <a:latin typeface="Times New Roman" panose="02020603050405020304" pitchFamily="18" charset="0"/>
+              <a:ea typeface="宋体" panose="02010600030101010101" pitchFamily="2" charset="-122"/>
+              <a:cs typeface="Times New Roman" panose="02020603050405020304" pitchFamily="18" charset="0"/>
+            </a:endParaRPr>
+          </a:p>
+        </p:txBody>
+      </p:sp>
+      <p:sp>
+        <p:nvSpPr>
+          <p:cNvPr id="37" name="矩形 36"/>
+          <p:cNvSpPr/>
+          <p:nvPr/>
+        </p:nvSpPr>
+        <p:spPr>
+          <a:xfrm>
+            <a:off x="5280836" y="3369679"/>
+            <a:ext cx="2623359" cy="466991"/>
+          </a:xfrm>
+          <a:prstGeom prst="rect">
+            <a:avLst/>
+          </a:prstGeom>
+          <a:solidFill>
+            <a:schemeClr val="accent2">
+              <a:lumMod val="60000"/>
+              <a:lumOff val="40000"/>
+            </a:schemeClr>
+          </a:solidFill>
+          <a:ln>
+            <a:solidFill>
+              <a:srgbClr val="F4B183"/>
+            </a:solidFill>
+          </a:ln>
+        </p:spPr>
+        <p:style>
+          <a:lnRef idx="2">
+            <a:schemeClr val="accent1">
+              <a:shade val="50000"/>
+            </a:schemeClr>
+          </a:lnRef>
+          <a:fillRef idx="1">
+            <a:schemeClr val="accent1"/>
+          </a:fillRef>
+          <a:effectRef idx="0">
+            <a:schemeClr val="accent1"/>
+          </a:effectRef>
+          <a:fontRef idx="minor">
+            <a:schemeClr val="lt1"/>
+          </a:fontRef>
+        </p:style>
+        <p:txBody>
+          <a:bodyPr rtlCol="0" anchor="ctr"/>
+          <a:lstStyle/>
+          <a:p>
+            <a:pPr algn="ctr"/>
+            <a:endParaRPr lang="zh-CN" altLang="en-US" dirty="0">
+              <a:latin typeface="Times New Roman" panose="02020603050405020304" pitchFamily="18" charset="0"/>
+              <a:ea typeface="宋体" panose="02010600030101010101" pitchFamily="2" charset="-122"/>
+              <a:cs typeface="Times New Roman" panose="02020603050405020304" pitchFamily="18" charset="0"/>
+            </a:endParaRPr>
+          </a:p>
+        </p:txBody>
+      </p:sp>
+      <p:sp>
+        <p:nvSpPr>
+          <p:cNvPr id="36" name="矩形 35"/>
+          <p:cNvSpPr/>
+          <p:nvPr/>
+        </p:nvSpPr>
+        <p:spPr>
+          <a:xfrm>
+            <a:off x="5280836" y="2143125"/>
+            <a:ext cx="2623359" cy="476250"/>
+          </a:xfrm>
+          <a:prstGeom prst="rect">
+            <a:avLst/>
+          </a:prstGeom>
+          <a:solidFill>
+            <a:schemeClr val="accent2">
+              <a:lumMod val="60000"/>
+              <a:lumOff val="40000"/>
+            </a:schemeClr>
+          </a:solidFill>
+          <a:ln>
+            <a:solidFill>
+              <a:srgbClr val="F4B183"/>
+            </a:solidFill>
+          </a:ln>
+        </p:spPr>
+        <p:style>
+          <a:lnRef idx="2">
+            <a:schemeClr val="accent1">
+              <a:shade val="50000"/>
+            </a:schemeClr>
+          </a:lnRef>
+          <a:fillRef idx="1">
+            <a:schemeClr val="accent1"/>
+          </a:fillRef>
+          <a:effectRef idx="0">
+            <a:schemeClr val="accent1"/>
+          </a:effectRef>
+          <a:fontRef idx="minor">
+            <a:schemeClr val="lt1"/>
+          </a:fontRef>
+        </p:style>
+        <p:txBody>
+          <a:bodyPr rtlCol="0" anchor="ctr"/>
+          <a:lstStyle/>
+          <a:p>
+            <a:pPr algn="ctr"/>
+            <a:endParaRPr lang="zh-CN" altLang="en-US" dirty="0">
+              <a:latin typeface="Times New Roman" panose="02020603050405020304" pitchFamily="18" charset="0"/>
+              <a:ea typeface="宋体" panose="02010600030101010101" pitchFamily="2" charset="-122"/>
+              <a:cs typeface="Times New Roman" panose="02020603050405020304" pitchFamily="18" charset="0"/>
+            </a:endParaRPr>
+          </a:p>
+        </p:txBody>
+      </p:sp>
+      <p:sp>
+        <p:nvSpPr>
+          <p:cNvPr id="35" name="矩形 34"/>
+          <p:cNvSpPr/>
+          <p:nvPr/>
+        </p:nvSpPr>
+        <p:spPr>
+          <a:xfrm>
+            <a:off x="5280836" y="1246444"/>
+            <a:ext cx="2623359" cy="460704"/>
+          </a:xfrm>
+          <a:prstGeom prst="rect">
+            <a:avLst/>
+          </a:prstGeom>
+          <a:solidFill>
+            <a:schemeClr val="accent2">
+              <a:lumMod val="60000"/>
+              <a:lumOff val="40000"/>
+            </a:schemeClr>
+          </a:solidFill>
+          <a:ln>
+            <a:solidFill>
+              <a:srgbClr val="F4B183"/>
+            </a:solidFill>
+          </a:ln>
+        </p:spPr>
+        <p:style>
+          <a:lnRef idx="2">
+            <a:schemeClr val="accent1">
+              <a:shade val="50000"/>
+            </a:schemeClr>
+          </a:lnRef>
+          <a:fillRef idx="1">
+            <a:schemeClr val="accent1"/>
+          </a:fillRef>
+          <a:effectRef idx="0">
+            <a:schemeClr val="accent1"/>
+          </a:effectRef>
+          <a:fontRef idx="minor">
+            <a:schemeClr val="lt1"/>
+          </a:fontRef>
+        </p:style>
+        <p:txBody>
+          <a:bodyPr rtlCol="0" anchor="ctr"/>
+          <a:lstStyle/>
+          <a:p>
+            <a:pPr algn="ctr"/>
+            <a:endParaRPr lang="zh-CN" altLang="en-US" dirty="0">
+              <a:latin typeface="Times New Roman" panose="02020603050405020304" pitchFamily="18" charset="0"/>
+              <a:ea typeface="宋体" panose="02010600030101010101" pitchFamily="2" charset="-122"/>
+              <a:cs typeface="Times New Roman" panose="02020603050405020304" pitchFamily="18" charset="0"/>
+            </a:endParaRPr>
+          </a:p>
+        </p:txBody>
+      </p:sp>
+      <p:sp>
+        <p:nvSpPr>
+          <p:cNvPr id="32" name="矩形 31"/>
+          <p:cNvSpPr/>
+          <p:nvPr/>
+        </p:nvSpPr>
+        <p:spPr>
+          <a:xfrm>
+            <a:off x="2647952" y="3362326"/>
+            <a:ext cx="2623359" cy="476250"/>
+          </a:xfrm>
+          <a:prstGeom prst="rect">
+            <a:avLst/>
+          </a:prstGeom>
+          <a:solidFill>
+            <a:schemeClr val="accent2">
+              <a:lumMod val="60000"/>
+              <a:lumOff val="40000"/>
+            </a:schemeClr>
+          </a:solidFill>
+          <a:ln>
+            <a:solidFill>
+              <a:srgbClr val="F4B183"/>
+            </a:solidFill>
+          </a:ln>
+        </p:spPr>
+        <p:style>
+          <a:lnRef idx="2">
+            <a:schemeClr val="accent1">
+              <a:shade val="50000"/>
+            </a:schemeClr>
+          </a:lnRef>
+          <a:fillRef idx="1">
+            <a:schemeClr val="accent1"/>
+          </a:fillRef>
+          <a:effectRef idx="0">
+            <a:schemeClr val="accent1"/>
+          </a:effectRef>
+          <a:fontRef idx="minor">
+            <a:schemeClr val="lt1"/>
+          </a:fontRef>
+        </p:style>
+        <p:txBody>
+          <a:bodyPr rtlCol="0" anchor="ctr"/>
+          <a:lstStyle/>
+          <a:p>
+            <a:pPr algn="ctr"/>
+            <a:endParaRPr lang="zh-CN" altLang="en-US" dirty="0">
+              <a:latin typeface="Times New Roman" panose="02020603050405020304" pitchFamily="18" charset="0"/>
+              <a:ea typeface="宋体" panose="02010600030101010101" pitchFamily="2" charset="-122"/>
+              <a:cs typeface="Times New Roman" panose="02020603050405020304" pitchFamily="18" charset="0"/>
+            </a:endParaRPr>
+          </a:p>
+        </p:txBody>
+      </p:sp>
+      <p:sp>
+        <p:nvSpPr>
+          <p:cNvPr id="31" name="矩形 30"/>
+          <p:cNvSpPr/>
+          <p:nvPr/>
+        </p:nvSpPr>
+        <p:spPr>
+          <a:xfrm>
+            <a:off x="2647952" y="2143126"/>
+            <a:ext cx="2623359" cy="476250"/>
+          </a:xfrm>
+          <a:prstGeom prst="rect">
+            <a:avLst/>
+          </a:prstGeom>
+          <a:solidFill>
+            <a:schemeClr val="accent2">
+              <a:lumMod val="60000"/>
+              <a:lumOff val="40000"/>
+            </a:schemeClr>
+          </a:solidFill>
+          <a:ln>
+            <a:solidFill>
+              <a:srgbClr val="F4B183"/>
+            </a:solidFill>
+          </a:ln>
+        </p:spPr>
+        <p:style>
+          <a:lnRef idx="2">
+            <a:schemeClr val="accent1">
+              <a:shade val="50000"/>
+            </a:schemeClr>
+          </a:lnRef>
+          <a:fillRef idx="1">
+            <a:schemeClr val="accent1"/>
+          </a:fillRef>
+          <a:effectRef idx="0">
+            <a:schemeClr val="accent1"/>
+          </a:effectRef>
+          <a:fontRef idx="minor">
+            <a:schemeClr val="lt1"/>
+          </a:fontRef>
+        </p:style>
+        <p:txBody>
+          <a:bodyPr rtlCol="0" anchor="ctr"/>
+          <a:lstStyle/>
+          <a:p>
+            <a:pPr algn="ctr"/>
+            <a:endParaRPr lang="zh-CN" altLang="en-US" dirty="0">
+              <a:latin typeface="Times New Roman" panose="02020603050405020304" pitchFamily="18" charset="0"/>
+              <a:ea typeface="宋体" panose="02010600030101010101" pitchFamily="2" charset="-122"/>
+              <a:cs typeface="Times New Roman" panose="02020603050405020304" pitchFamily="18" charset="0"/>
+            </a:endParaRPr>
+          </a:p>
+        </p:txBody>
+      </p:sp>
+      <p:sp>
+        <p:nvSpPr>
+          <p:cNvPr id="30" name="矩形 29"/>
+          <p:cNvSpPr/>
+          <p:nvPr/>
+        </p:nvSpPr>
+        <p:spPr>
+          <a:xfrm>
+            <a:off x="2647952" y="1238252"/>
+            <a:ext cx="2623359" cy="468896"/>
+          </a:xfrm>
+          <a:prstGeom prst="rect">
+            <a:avLst/>
+          </a:prstGeom>
+          <a:solidFill>
+            <a:schemeClr val="accent2">
+              <a:lumMod val="60000"/>
+              <a:lumOff val="40000"/>
+            </a:schemeClr>
+          </a:solidFill>
+          <a:ln>
+            <a:solidFill>
+              <a:srgbClr val="F4B183"/>
+            </a:solidFill>
+          </a:ln>
+        </p:spPr>
+        <p:style>
+          <a:lnRef idx="2">
+            <a:schemeClr val="accent1">
+              <a:shade val="50000"/>
+            </a:schemeClr>
+          </a:lnRef>
+          <a:fillRef idx="1">
+            <a:schemeClr val="accent1"/>
+          </a:fillRef>
+          <a:effectRef idx="0">
+            <a:schemeClr val="accent1"/>
+          </a:effectRef>
+          <a:fontRef idx="minor">
+            <a:schemeClr val="lt1"/>
+          </a:fontRef>
+        </p:style>
+        <p:txBody>
+          <a:bodyPr rtlCol="0" anchor="ctr"/>
+          <a:lstStyle/>
+          <a:p>
+            <a:pPr algn="ctr"/>
+            <a:endParaRPr lang="zh-CN" altLang="en-US" dirty="0">
+              <a:latin typeface="Times New Roman" panose="02020603050405020304" pitchFamily="18" charset="0"/>
+              <a:ea typeface="宋体" panose="02010600030101010101" pitchFamily="2" charset="-122"/>
+              <a:cs typeface="Times New Roman" panose="02020603050405020304" pitchFamily="18" charset="0"/>
+            </a:endParaRPr>
+          </a:p>
+        </p:txBody>
+      </p:sp>
+      <p:sp>
+        <p:nvSpPr>
+          <p:cNvPr id="29" name="矩形 28"/>
+          <p:cNvSpPr/>
+          <p:nvPr/>
+        </p:nvSpPr>
+        <p:spPr>
+          <a:xfrm>
+            <a:off x="2019298" y="3369679"/>
+            <a:ext cx="619127" cy="476250"/>
+          </a:xfrm>
+          <a:prstGeom prst="rect">
+            <a:avLst/>
+          </a:prstGeom>
+          <a:solidFill>
+            <a:schemeClr val="bg2">
+              <a:lumMod val="90000"/>
+            </a:schemeClr>
+          </a:solidFill>
+          <a:ln>
+            <a:solidFill>
+              <a:schemeClr val="bg2">
+                <a:lumMod val="90000"/>
+              </a:schemeClr>
+            </a:solidFill>
+          </a:ln>
+        </p:spPr>
+        <p:style>
+          <a:lnRef idx="2">
+            <a:schemeClr val="accent1">
+              <a:shade val="50000"/>
+            </a:schemeClr>
+          </a:lnRef>
+          <a:fillRef idx="1">
+            <a:schemeClr val="accent1"/>
+          </a:fillRef>
+          <a:effectRef idx="0">
+            <a:schemeClr val="accent1"/>
+          </a:effectRef>
+          <a:fontRef idx="minor">
+            <a:schemeClr val="lt1"/>
+          </a:fontRef>
+        </p:style>
+        <p:txBody>
+          <a:bodyPr rtlCol="0" anchor="ctr"/>
+          <a:lstStyle/>
+          <a:p>
+            <a:pPr algn="ctr"/>
+            <a:endParaRPr lang="zh-CN" altLang="en-US">
+              <a:latin typeface="Times New Roman" panose="02020603050405020304" pitchFamily="18" charset="0"/>
+              <a:ea typeface="宋体" panose="02010600030101010101" pitchFamily="2" charset="-122"/>
+              <a:cs typeface="Times New Roman" panose="02020603050405020304" pitchFamily="18" charset="0"/>
+            </a:endParaRPr>
+          </a:p>
+        </p:txBody>
+      </p:sp>
+      <p:sp>
+        <p:nvSpPr>
+          <p:cNvPr id="28" name="矩形 27"/>
+          <p:cNvSpPr/>
+          <p:nvPr/>
+        </p:nvSpPr>
+        <p:spPr>
+          <a:xfrm>
+            <a:off x="2019298" y="2143126"/>
+            <a:ext cx="619127" cy="476250"/>
+          </a:xfrm>
+          <a:prstGeom prst="rect">
+            <a:avLst/>
+          </a:prstGeom>
+          <a:solidFill>
+            <a:schemeClr val="bg2">
+              <a:lumMod val="90000"/>
+            </a:schemeClr>
+          </a:solidFill>
+          <a:ln>
+            <a:solidFill>
+              <a:schemeClr val="bg2">
+                <a:lumMod val="90000"/>
+              </a:schemeClr>
+            </a:solidFill>
+          </a:ln>
+        </p:spPr>
+        <p:style>
+          <a:lnRef idx="2">
+            <a:schemeClr val="accent1">
+              <a:shade val="50000"/>
+            </a:schemeClr>
+          </a:lnRef>
+          <a:fillRef idx="1">
+            <a:schemeClr val="accent1"/>
+          </a:fillRef>
+          <a:effectRef idx="0">
+            <a:schemeClr val="accent1"/>
+          </a:effectRef>
+          <a:fontRef idx="minor">
+            <a:schemeClr val="lt1"/>
+          </a:fontRef>
+        </p:style>
+        <p:txBody>
+          <a:bodyPr rtlCol="0" anchor="ctr"/>
+          <a:lstStyle/>
+          <a:p>
+            <a:pPr algn="ctr"/>
+            <a:endParaRPr lang="zh-CN" altLang="en-US">
+              <a:latin typeface="Times New Roman" panose="02020603050405020304" pitchFamily="18" charset="0"/>
+              <a:ea typeface="宋体" panose="02010600030101010101" pitchFamily="2" charset="-122"/>
+              <a:cs typeface="Times New Roman" panose="02020603050405020304" pitchFamily="18" charset="0"/>
+            </a:endParaRPr>
+          </a:p>
+        </p:txBody>
+      </p:sp>
+      <p:sp>
+        <p:nvSpPr>
+          <p:cNvPr id="7" name="矩形 6"/>
+          <p:cNvSpPr/>
+          <p:nvPr/>
+        </p:nvSpPr>
+        <p:spPr>
+          <a:xfrm>
+            <a:off x="2019298" y="1238251"/>
+            <a:ext cx="619127" cy="476250"/>
+          </a:xfrm>
+          <a:prstGeom prst="rect">
+            <a:avLst/>
+          </a:prstGeom>
+          <a:solidFill>
+            <a:schemeClr val="bg2">
+              <a:lumMod val="90000"/>
+            </a:schemeClr>
+          </a:solidFill>
+          <a:ln>
+            <a:solidFill>
+              <a:schemeClr val="bg2">
+                <a:lumMod val="90000"/>
+              </a:schemeClr>
+            </a:solidFill>
+          </a:ln>
+        </p:spPr>
+        <p:style>
+          <a:lnRef idx="2">
+            <a:schemeClr val="accent1">
+              <a:shade val="50000"/>
+            </a:schemeClr>
+          </a:lnRef>
+          <a:fillRef idx="1">
+            <a:schemeClr val="accent1"/>
+          </a:fillRef>
+          <a:effectRef idx="0">
+            <a:schemeClr val="accent1"/>
+          </a:effectRef>
+          <a:fontRef idx="minor">
+            <a:schemeClr val="lt1"/>
+          </a:fontRef>
+        </p:style>
+        <p:txBody>
+          <a:bodyPr rtlCol="0" anchor="ctr"/>
+          <a:lstStyle/>
+          <a:p>
+            <a:pPr algn="ctr"/>
+            <a:endParaRPr lang="zh-CN" altLang="en-US">
+              <a:latin typeface="Times New Roman" panose="02020603050405020304" pitchFamily="18" charset="0"/>
+              <a:ea typeface="宋体" panose="02010600030101010101" pitchFamily="2" charset="-122"/>
+              <a:cs typeface="Times New Roman" panose="02020603050405020304" pitchFamily="18" charset="0"/>
+            </a:endParaRPr>
+          </a:p>
+        </p:txBody>
+      </p:sp>
+      <p:sp>
+        <p:nvSpPr>
+          <p:cNvPr id="3" name="矩形 2"/>
+          <p:cNvSpPr/>
+          <p:nvPr/>
+        </p:nvSpPr>
+        <p:spPr>
+          <a:xfrm>
+            <a:off x="2019300" y="1238251"/>
+            <a:ext cx="7058025" cy="476250"/>
+          </a:xfrm>
+          <a:prstGeom prst="rect">
+            <a:avLst/>
+          </a:prstGeom>
+          <a:noFill/>
+          <a:ln w="19050">
+            <a:solidFill>
+              <a:schemeClr val="tx1"/>
+            </a:solidFill>
+          </a:ln>
+        </p:spPr>
+        <p:style>
+          <a:lnRef idx="2">
+            <a:schemeClr val="accent1">
+              <a:shade val="50000"/>
+            </a:schemeClr>
+          </a:lnRef>
+          <a:fillRef idx="1">
+            <a:schemeClr val="accent1"/>
+          </a:fillRef>
+          <a:effectRef idx="0">
+            <a:schemeClr val="accent1"/>
+          </a:effectRef>
+          <a:fontRef idx="minor">
+            <a:schemeClr val="lt1"/>
+          </a:fontRef>
+        </p:style>
+        <p:txBody>
+          <a:bodyPr rtlCol="0" anchor="ctr"/>
+          <a:lstStyle/>
+          <a:p>
+            <a:pPr algn="ctr"/>
+            <a:endParaRPr lang="zh-CN" altLang="en-US">
+              <a:latin typeface="Times New Roman" panose="02020603050405020304" pitchFamily="18" charset="0"/>
+              <a:ea typeface="宋体" panose="02010600030101010101" pitchFamily="2" charset="-122"/>
+              <a:cs typeface="Times New Roman" panose="02020603050405020304" pitchFamily="18" charset="0"/>
+            </a:endParaRPr>
+          </a:p>
+        </p:txBody>
+      </p:sp>
+      <p:sp>
+        <p:nvSpPr>
+          <p:cNvPr id="23" name="矩形 22"/>
+          <p:cNvSpPr/>
+          <p:nvPr/>
+        </p:nvSpPr>
+        <p:spPr>
+          <a:xfrm>
+            <a:off x="2019299" y="2143126"/>
+            <a:ext cx="7058025" cy="476250"/>
+          </a:xfrm>
+          <a:prstGeom prst="rect">
+            <a:avLst/>
+          </a:prstGeom>
+          <a:noFill/>
+          <a:ln w="19050">
+            <a:solidFill>
+              <a:schemeClr val="tx1"/>
+            </a:solidFill>
+          </a:ln>
+        </p:spPr>
+        <p:style>
+          <a:lnRef idx="2">
+            <a:schemeClr val="accent1">
+              <a:shade val="50000"/>
+            </a:schemeClr>
+          </a:lnRef>
+          <a:fillRef idx="1">
+            <a:schemeClr val="accent1"/>
+          </a:fillRef>
+          <a:effectRef idx="0">
+            <a:schemeClr val="accent1"/>
+          </a:effectRef>
+          <a:fontRef idx="minor">
+            <a:schemeClr val="lt1"/>
+          </a:fontRef>
+        </p:style>
+        <p:txBody>
+          <a:bodyPr rtlCol="0" anchor="ctr"/>
+          <a:lstStyle/>
+          <a:p>
+            <a:pPr algn="ctr"/>
+            <a:endParaRPr lang="zh-CN" altLang="en-US">
+              <a:latin typeface="Times New Roman" panose="02020603050405020304" pitchFamily="18" charset="0"/>
+              <a:ea typeface="宋体" panose="02010600030101010101" pitchFamily="2" charset="-122"/>
+              <a:cs typeface="Times New Roman" panose="02020603050405020304" pitchFamily="18" charset="0"/>
+            </a:endParaRPr>
+          </a:p>
+        </p:txBody>
+      </p:sp>
+      <p:sp>
+        <p:nvSpPr>
+          <p:cNvPr id="24" name="矩形 23"/>
+          <p:cNvSpPr/>
+          <p:nvPr/>
+        </p:nvSpPr>
+        <p:spPr>
+          <a:xfrm>
+            <a:off x="2019298" y="3362326"/>
+            <a:ext cx="7058025" cy="476250"/>
+          </a:xfrm>
+          <a:prstGeom prst="rect">
+            <a:avLst/>
+          </a:prstGeom>
+          <a:noFill/>
+          <a:ln w="19050">
+            <a:solidFill>
+              <a:schemeClr val="tx1"/>
+            </a:solidFill>
+          </a:ln>
+        </p:spPr>
+        <p:style>
+          <a:lnRef idx="2">
+            <a:schemeClr val="accent1">
+              <a:shade val="50000"/>
+            </a:schemeClr>
+          </a:lnRef>
+          <a:fillRef idx="1">
+            <a:schemeClr val="accent1"/>
+          </a:fillRef>
+          <a:effectRef idx="0">
+            <a:schemeClr val="accent1"/>
+          </a:effectRef>
+          <a:fontRef idx="minor">
+            <a:schemeClr val="lt1"/>
+          </a:fontRef>
+        </p:style>
+        <p:txBody>
+          <a:bodyPr rtlCol="0" anchor="ctr"/>
+          <a:lstStyle/>
+          <a:p>
+            <a:pPr algn="ctr"/>
+            <a:endParaRPr lang="zh-CN" altLang="en-US">
+              <a:latin typeface="Times New Roman" panose="02020603050405020304" pitchFamily="18" charset="0"/>
+              <a:ea typeface="宋体" panose="02010600030101010101" pitchFamily="2" charset="-122"/>
+              <a:cs typeface="Times New Roman" panose="02020603050405020304" pitchFamily="18" charset="0"/>
+            </a:endParaRPr>
+          </a:p>
+        </p:txBody>
+      </p:sp>
+      <p:sp>
+        <p:nvSpPr>
+          <p:cNvPr id="4" name="文本框 3"/>
+          <p:cNvSpPr txBox="1"/>
+          <p:nvPr/>
+        </p:nvSpPr>
+        <p:spPr>
+          <a:xfrm>
+            <a:off x="1191825" y="1299903"/>
+            <a:ext cx="845103" cy="369332"/>
+          </a:xfrm>
+          <a:prstGeom prst="rect">
+            <a:avLst/>
+          </a:prstGeom>
+          <a:noFill/>
+        </p:spPr>
+        <p:txBody>
+          <a:bodyPr wrap="none" rtlCol="0">
+            <a:spAutoFit/>
+          </a:bodyPr>
+          <a:lstStyle/>
+          <a:p>
+            <a:r>
+              <a:rPr lang="en-US" altLang="zh-CN" b="1" dirty="0" smtClean="0">
+                <a:latin typeface="Times New Roman" panose="02020603050405020304" pitchFamily="18" charset="0"/>
+                <a:ea typeface="宋体" panose="02010600030101010101" pitchFamily="2" charset="-122"/>
+                <a:cs typeface="Times New Roman" panose="02020603050405020304" pitchFamily="18" charset="0"/>
+              </a:rPr>
+              <a:t>GPU 0</a:t>
+            </a:r>
+            <a:endParaRPr lang="zh-CN" altLang="en-US" b="1" dirty="0">
+              <a:latin typeface="Times New Roman" panose="02020603050405020304" pitchFamily="18" charset="0"/>
+              <a:ea typeface="宋体" panose="02010600030101010101" pitchFamily="2" charset="-122"/>
+              <a:cs typeface="Times New Roman" panose="02020603050405020304" pitchFamily="18" charset="0"/>
+            </a:endParaRPr>
+          </a:p>
+        </p:txBody>
+      </p:sp>
+      <p:sp>
+        <p:nvSpPr>
+          <p:cNvPr id="25" name="文本框 24"/>
+          <p:cNvSpPr txBox="1"/>
+          <p:nvPr/>
+        </p:nvSpPr>
+        <p:spPr>
+          <a:xfrm>
+            <a:off x="1191825" y="2191714"/>
+            <a:ext cx="845103" cy="369332"/>
+          </a:xfrm>
+          <a:prstGeom prst="rect">
+            <a:avLst/>
+          </a:prstGeom>
+          <a:noFill/>
+        </p:spPr>
+        <p:txBody>
+          <a:bodyPr wrap="none" rtlCol="0">
+            <a:spAutoFit/>
+          </a:bodyPr>
+          <a:lstStyle/>
+          <a:p>
+            <a:r>
+              <a:rPr lang="en-US" altLang="zh-CN" b="1" dirty="0" smtClean="0">
+                <a:latin typeface="Times New Roman" panose="02020603050405020304" pitchFamily="18" charset="0"/>
+                <a:ea typeface="宋体" panose="02010600030101010101" pitchFamily="2" charset="-122"/>
+                <a:cs typeface="Times New Roman" panose="02020603050405020304" pitchFamily="18" charset="0"/>
+              </a:rPr>
+              <a:t>GPU 1</a:t>
+            </a:r>
+            <a:endParaRPr lang="zh-CN" altLang="en-US" b="1" dirty="0">
+              <a:latin typeface="Times New Roman" panose="02020603050405020304" pitchFamily="18" charset="0"/>
+              <a:ea typeface="宋体" panose="02010600030101010101" pitchFamily="2" charset="-122"/>
+              <a:cs typeface="Times New Roman" panose="02020603050405020304" pitchFamily="18" charset="0"/>
+            </a:endParaRPr>
+          </a:p>
+        </p:txBody>
+      </p:sp>
+      <p:sp>
+        <p:nvSpPr>
+          <p:cNvPr id="26" name="文本框 25"/>
+          <p:cNvSpPr txBox="1"/>
+          <p:nvPr/>
+        </p:nvSpPr>
+        <p:spPr>
+          <a:xfrm>
+            <a:off x="1191825" y="3415785"/>
+            <a:ext cx="857927" cy="369332"/>
+          </a:xfrm>
+          <a:prstGeom prst="rect">
+            <a:avLst/>
+          </a:prstGeom>
+          <a:noFill/>
+        </p:spPr>
+        <p:txBody>
+          <a:bodyPr wrap="none" rtlCol="0">
+            <a:spAutoFit/>
+          </a:bodyPr>
+          <a:lstStyle/>
+          <a:p>
+            <a:r>
+              <a:rPr lang="en-US" altLang="zh-CN" b="1" dirty="0" smtClean="0">
+                <a:latin typeface="Times New Roman" panose="02020603050405020304" pitchFamily="18" charset="0"/>
+                <a:ea typeface="宋体" panose="02010600030101010101" pitchFamily="2" charset="-122"/>
+                <a:cs typeface="Times New Roman" panose="02020603050405020304" pitchFamily="18" charset="0"/>
+              </a:rPr>
+              <a:t>GPU n</a:t>
+            </a:r>
+            <a:endParaRPr lang="zh-CN" altLang="en-US" b="1" dirty="0">
+              <a:latin typeface="Times New Roman" panose="02020603050405020304" pitchFamily="18" charset="0"/>
+              <a:ea typeface="宋体" panose="02010600030101010101" pitchFamily="2" charset="-122"/>
+              <a:cs typeface="Times New Roman" panose="02020603050405020304" pitchFamily="18" charset="0"/>
+            </a:endParaRPr>
+          </a:p>
+        </p:txBody>
+      </p:sp>
+      <p:sp>
+        <p:nvSpPr>
+          <p:cNvPr id="5" name="文本框 4"/>
+          <p:cNvSpPr txBox="1"/>
+          <p:nvPr/>
+        </p:nvSpPr>
+        <p:spPr>
+          <a:xfrm>
+            <a:off x="3694588" y="2661793"/>
+            <a:ext cx="553998" cy="707886"/>
+          </a:xfrm>
+          <a:prstGeom prst="rect">
+            <a:avLst/>
+          </a:prstGeom>
+          <a:noFill/>
+        </p:spPr>
+        <p:txBody>
+          <a:bodyPr vert="eaVert" wrap="none" rtlCol="0">
+            <a:spAutoFit/>
+          </a:bodyPr>
+          <a:lstStyle/>
+          <a:p>
+            <a:r>
+              <a:rPr lang="en-AE" altLang="zh-CN" sz="2400" dirty="0" smtClean="0">
+                <a:latin typeface="Times New Roman" panose="02020603050405020304" pitchFamily="18" charset="0"/>
+                <a:ea typeface="宋体" panose="02010600030101010101" pitchFamily="2" charset="-122"/>
+                <a:cs typeface="Times New Roman" panose="02020603050405020304" pitchFamily="18" charset="0"/>
+              </a:rPr>
+              <a:t>……</a:t>
+            </a:r>
+            <a:endParaRPr lang="zh-CN" altLang="en-US" sz="2400" dirty="0">
+              <a:latin typeface="Times New Roman" panose="02020603050405020304" pitchFamily="18" charset="0"/>
+              <a:ea typeface="宋体" panose="02010600030101010101" pitchFamily="2" charset="-122"/>
+              <a:cs typeface="Times New Roman" panose="02020603050405020304" pitchFamily="18" charset="0"/>
+            </a:endParaRPr>
+          </a:p>
+        </p:txBody>
+      </p:sp>
+      <p:cxnSp>
+        <p:nvCxnSpPr>
+          <p:cNvPr id="9" name="直接连接符 8"/>
+          <p:cNvCxnSpPr/>
+          <p:nvPr/>
+        </p:nvCxnSpPr>
+        <p:spPr>
+          <a:xfrm>
+            <a:off x="2638426" y="1245604"/>
+            <a:ext cx="0" cy="2600325"/>
+          </a:xfrm>
+          <a:prstGeom prst="line">
+            <a:avLst/>
+          </a:prstGeom>
+          <a:ln w="19050">
+            <a:solidFill>
+              <a:schemeClr val="tx1"/>
+            </a:solidFill>
+            <a:prstDash val="dash"/>
+          </a:ln>
+        </p:spPr>
+        <p:style>
+          <a:lnRef idx="1">
+            <a:schemeClr val="accent1"/>
+          </a:lnRef>
+          <a:fillRef idx="0">
+            <a:schemeClr val="accent1"/>
+          </a:fillRef>
+          <a:effectRef idx="0">
+            <a:schemeClr val="accent1"/>
+          </a:effectRef>
+          <a:fontRef idx="minor">
+            <a:schemeClr val="tx1"/>
+          </a:fontRef>
+        </p:style>
+      </p:cxnSp>
+      <p:cxnSp>
+        <p:nvCxnSpPr>
+          <p:cNvPr id="34" name="直接连接符 33"/>
+          <p:cNvCxnSpPr/>
+          <p:nvPr/>
+        </p:nvCxnSpPr>
+        <p:spPr>
+          <a:xfrm>
+            <a:off x="5271311" y="1245604"/>
+            <a:ext cx="0" cy="2600325"/>
+          </a:xfrm>
+          <a:prstGeom prst="line">
+            <a:avLst/>
+          </a:prstGeom>
+          <a:ln w="19050">
+            <a:solidFill>
+              <a:schemeClr val="tx1"/>
+            </a:solidFill>
+            <a:prstDash val="dash"/>
+          </a:ln>
+        </p:spPr>
+        <p:style>
+          <a:lnRef idx="1">
+            <a:schemeClr val="accent1"/>
+          </a:lnRef>
+          <a:fillRef idx="0">
+            <a:schemeClr val="accent1"/>
+          </a:fillRef>
+          <a:effectRef idx="0">
+            <a:schemeClr val="accent1"/>
+          </a:effectRef>
+          <a:fontRef idx="minor">
+            <a:schemeClr val="tx1"/>
+          </a:fontRef>
+        </p:style>
+      </p:cxnSp>
+      <p:sp>
+        <p:nvSpPr>
+          <p:cNvPr id="10" name="左大括号 9"/>
+          <p:cNvSpPr/>
+          <p:nvPr/>
+        </p:nvSpPr>
+        <p:spPr>
+          <a:xfrm rot="-5400000">
+            <a:off x="5187696" y="1313537"/>
+            <a:ext cx="176756" cy="5256241"/>
+          </a:xfrm>
+          <a:prstGeom prst="leftBrace">
+            <a:avLst>
+              <a:gd name="adj1" fmla="val 68208"/>
+              <a:gd name="adj2" fmla="val 50000"/>
+            </a:avLst>
+          </a:prstGeom>
+          <a:noFill/>
+          <a:ln w="19050">
+            <a:solidFill>
+              <a:schemeClr val="tx1"/>
+            </a:solidFill>
+            <a:round/>
+          </a:ln>
+        </p:spPr>
+        <p:style>
+          <a:lnRef idx="1">
+            <a:schemeClr val="accent1"/>
+          </a:lnRef>
+          <a:fillRef idx="0">
+            <a:schemeClr val="accent1"/>
+          </a:fillRef>
+          <a:effectRef idx="0">
+            <a:schemeClr val="accent1"/>
+          </a:effectRef>
+          <a:fontRef idx="minor">
+            <a:schemeClr val="tx1"/>
+          </a:fontRef>
+        </p:style>
+        <p:txBody>
+          <a:bodyPr rtlCol="0" anchor="ctr"/>
+          <a:lstStyle/>
+          <a:p>
+            <a:pPr algn="ctr"/>
+            <a:endParaRPr lang="zh-CN" altLang="en-US">
+              <a:latin typeface="Times New Roman" panose="02020603050405020304" pitchFamily="18" charset="0"/>
+              <a:ea typeface="宋体" panose="02010600030101010101" pitchFamily="2" charset="-122"/>
+              <a:cs typeface="Times New Roman" panose="02020603050405020304" pitchFamily="18" charset="0"/>
+            </a:endParaRPr>
+          </a:p>
+        </p:txBody>
+      </p:sp>
+      <p:sp>
+        <p:nvSpPr>
+          <p:cNvPr id="39" name="左大括号 38"/>
+          <p:cNvSpPr/>
+          <p:nvPr/>
+        </p:nvSpPr>
+        <p:spPr>
+          <a:xfrm rot="16200000">
+            <a:off x="2245248" y="3627331"/>
+            <a:ext cx="176757" cy="628652"/>
+          </a:xfrm>
+          <a:prstGeom prst="leftBrace">
+            <a:avLst>
+              <a:gd name="adj1" fmla="val 24871"/>
+              <a:gd name="adj2" fmla="val 50000"/>
+            </a:avLst>
+          </a:prstGeom>
+          <a:noFill/>
+          <a:ln w="19050">
+            <a:solidFill>
+              <a:schemeClr val="tx1"/>
+            </a:solidFill>
+            <a:round/>
+          </a:ln>
+        </p:spPr>
+        <p:style>
+          <a:lnRef idx="1">
+            <a:schemeClr val="accent1"/>
+          </a:lnRef>
+          <a:fillRef idx="0">
+            <a:schemeClr val="accent1"/>
+          </a:fillRef>
+          <a:effectRef idx="0">
+            <a:schemeClr val="accent1"/>
+          </a:effectRef>
+          <a:fontRef idx="minor">
+            <a:schemeClr val="tx1"/>
+          </a:fontRef>
+        </p:style>
+        <p:txBody>
+          <a:bodyPr rtlCol="0" anchor="ctr"/>
+          <a:lstStyle/>
+          <a:p>
+            <a:pPr algn="ctr"/>
+            <a:endParaRPr lang="zh-CN" altLang="en-US">
+              <a:latin typeface="Times New Roman" panose="02020603050405020304" pitchFamily="18" charset="0"/>
+              <a:ea typeface="宋体" panose="02010600030101010101" pitchFamily="2" charset="-122"/>
+              <a:cs typeface="Times New Roman" panose="02020603050405020304" pitchFamily="18" charset="0"/>
+            </a:endParaRPr>
+          </a:p>
+        </p:txBody>
+      </p:sp>
+      <p:sp>
+        <p:nvSpPr>
+          <p:cNvPr id="45" name="左大括号 44"/>
+          <p:cNvSpPr/>
+          <p:nvPr/>
+        </p:nvSpPr>
+        <p:spPr>
+          <a:xfrm rot="16200000">
+            <a:off x="7270001" y="2222714"/>
+            <a:ext cx="176758" cy="3437886"/>
+          </a:xfrm>
+          <a:prstGeom prst="leftBrace">
+            <a:avLst>
+              <a:gd name="adj1" fmla="val 68208"/>
+              <a:gd name="adj2" fmla="val 50000"/>
+            </a:avLst>
+          </a:prstGeom>
+          <a:noFill/>
+          <a:ln w="19050">
+            <a:solidFill>
+              <a:schemeClr val="tx1"/>
+            </a:solidFill>
+            <a:round/>
+          </a:ln>
+        </p:spPr>
+        <p:style>
+          <a:lnRef idx="1">
+            <a:schemeClr val="accent1"/>
+          </a:lnRef>
+          <a:fillRef idx="0">
+            <a:schemeClr val="accent1"/>
+          </a:fillRef>
+          <a:effectRef idx="0">
+            <a:schemeClr val="accent1"/>
+          </a:effectRef>
+          <a:fontRef idx="minor">
+            <a:schemeClr val="tx1"/>
+          </a:fontRef>
+        </p:style>
+        <p:txBody>
+          <a:bodyPr rtlCol="0" anchor="ctr"/>
+          <a:lstStyle/>
+          <a:p>
+            <a:pPr algn="ctr"/>
+            <a:endParaRPr lang="zh-CN" altLang="en-US">
+              <a:latin typeface="Times New Roman" panose="02020603050405020304" pitchFamily="18" charset="0"/>
+              <a:ea typeface="宋体" panose="02010600030101010101" pitchFamily="2" charset="-122"/>
+              <a:cs typeface="Times New Roman" panose="02020603050405020304" pitchFamily="18" charset="0"/>
+            </a:endParaRPr>
+          </a:p>
+        </p:txBody>
+      </p:sp>
+      <p:graphicFrame>
+        <p:nvGraphicFramePr>
+          <p:cNvPr id="8" name="对象 7"/>
+          <p:cNvGraphicFramePr>
+            <a:graphicFrameLocks noChangeAspect="1"/>
+          </p:cNvGraphicFramePr>
+          <p:nvPr>
+            <p:extLst/>
+          </p:nvPr>
+        </p:nvGraphicFramePr>
+        <p:xfrm>
+          <a:off x="2052436" y="4030036"/>
+          <a:ext cx="562382" cy="409005"/>
+        </p:xfrm>
+        <a:graphic>
+          <a:graphicData uri="http://schemas.openxmlformats.org/presentationml/2006/ole">
+            <mc:AlternateContent xmlns:mc="http://schemas.openxmlformats.org/markup-compatibility/2006">
+              <mc:Choice xmlns:v="urn:schemas-microsoft-com:vml" Requires="v">
+                <p:oleObj spid="_x0000_s1029" name="AxMath" r:id="rId3" imgW="315000" imgH="228600" progId="Equation.AxMath">
+                  <p:embed/>
+                </p:oleObj>
+              </mc:Choice>
+              <mc:Fallback>
+                <p:oleObj name="AxMath" r:id="rId3" imgW="315000" imgH="228600" progId="Equation.AxMath">
+                  <p:embed/>
+                  <p:pic>
+                    <p:nvPicPr>
+                      <p:cNvPr id="8" name="对象 7"/>
+                      <p:cNvPicPr/>
+                      <p:nvPr/>
+                    </p:nvPicPr>
+                    <p:blipFill>
+                      <a:blip r:embed="rId4"/>
+                      <a:stretch>
+                        <a:fillRect/>
+                      </a:stretch>
+                    </p:blipFill>
+                    <p:spPr>
+                      <a:xfrm>
+                        <a:off x="2052436" y="4030036"/>
+                        <a:ext cx="562382" cy="409005"/>
+                      </a:xfrm>
+                      <a:prstGeom prst="rect">
+                        <a:avLst/>
+                      </a:prstGeom>
+                    </p:spPr>
+                  </p:pic>
+                </p:oleObj>
+              </mc:Fallback>
+            </mc:AlternateContent>
+          </a:graphicData>
+        </a:graphic>
+      </p:graphicFrame>
+      <p:graphicFrame>
+        <p:nvGraphicFramePr>
+          <p:cNvPr id="33" name="对象 32"/>
+          <p:cNvGraphicFramePr>
+            <a:graphicFrameLocks noChangeAspect="1"/>
+          </p:cNvGraphicFramePr>
+          <p:nvPr>
+            <p:extLst/>
+          </p:nvPr>
+        </p:nvGraphicFramePr>
+        <p:xfrm>
+          <a:off x="4968875" y="4030663"/>
+          <a:ext cx="623888" cy="407987"/>
+        </p:xfrm>
+        <a:graphic>
+          <a:graphicData uri="http://schemas.openxmlformats.org/presentationml/2006/ole">
+            <mc:AlternateContent xmlns:mc="http://schemas.openxmlformats.org/markup-compatibility/2006">
+              <mc:Choice xmlns:v="urn:schemas-microsoft-com:vml" Requires="v">
+                <p:oleObj spid="_x0000_s1030" name="AxMath" r:id="rId5" imgW="347760" imgH="228600" progId="Equation.AxMath">
+                  <p:embed/>
+                </p:oleObj>
+              </mc:Choice>
+              <mc:Fallback>
+                <p:oleObj name="AxMath" r:id="rId5" imgW="347760" imgH="228600" progId="Equation.AxMath">
+                  <p:embed/>
+                  <p:pic>
+                    <p:nvPicPr>
+                      <p:cNvPr id="33" name="对象 32"/>
+                      <p:cNvPicPr/>
+                      <p:nvPr/>
+                    </p:nvPicPr>
+                    <p:blipFill>
+                      <a:blip r:embed="rId6"/>
+                      <a:stretch>
+                        <a:fillRect/>
+                      </a:stretch>
+                    </p:blipFill>
+                    <p:spPr>
+                      <a:xfrm>
+                        <a:off x="4968875" y="4030663"/>
+                        <a:ext cx="623888" cy="407987"/>
+                      </a:xfrm>
+                      <a:prstGeom prst="rect">
+                        <a:avLst/>
+                      </a:prstGeom>
+                    </p:spPr>
+                  </p:pic>
+                </p:oleObj>
+              </mc:Fallback>
+            </mc:AlternateContent>
+          </a:graphicData>
+        </a:graphic>
+      </p:graphicFrame>
+      <p:graphicFrame>
+        <p:nvGraphicFramePr>
+          <p:cNvPr id="38" name="对象 37"/>
+          <p:cNvGraphicFramePr>
+            <a:graphicFrameLocks noChangeAspect="1"/>
+          </p:cNvGraphicFramePr>
+          <p:nvPr>
+            <p:extLst/>
+          </p:nvPr>
+        </p:nvGraphicFramePr>
+        <p:xfrm>
+          <a:off x="7019925" y="4030663"/>
+          <a:ext cx="677863" cy="407987"/>
+        </p:xfrm>
+        <a:graphic>
+          <a:graphicData uri="http://schemas.openxmlformats.org/presentationml/2006/ole">
+            <mc:AlternateContent xmlns:mc="http://schemas.openxmlformats.org/markup-compatibility/2006">
+              <mc:Choice xmlns:v="urn:schemas-microsoft-com:vml" Requires="v">
+                <p:oleObj spid="_x0000_s1031" name="AxMath" r:id="rId7" imgW="378000" imgH="228600" progId="Equation.AxMath">
+                  <p:embed/>
+                </p:oleObj>
+              </mc:Choice>
+              <mc:Fallback>
+                <p:oleObj name="AxMath" r:id="rId7" imgW="378000" imgH="228600" progId="Equation.AxMath">
+                  <p:embed/>
+                  <p:pic>
+                    <p:nvPicPr>
+                      <p:cNvPr id="38" name="对象 37"/>
+                      <p:cNvPicPr/>
+                      <p:nvPr/>
+                    </p:nvPicPr>
+                    <p:blipFill>
+                      <a:blip r:embed="rId8"/>
+                      <a:stretch>
+                        <a:fillRect/>
+                      </a:stretch>
+                    </p:blipFill>
+                    <p:spPr>
+                      <a:xfrm>
+                        <a:off x="7019925" y="4030663"/>
+                        <a:ext cx="677863" cy="407987"/>
+                      </a:xfrm>
+                      <a:prstGeom prst="rect">
+                        <a:avLst/>
+                      </a:prstGeom>
+                    </p:spPr>
+                  </p:pic>
+                </p:oleObj>
+              </mc:Fallback>
+            </mc:AlternateContent>
+          </a:graphicData>
+        </a:graphic>
+      </p:graphicFrame>
+      <p:sp>
+        <p:nvSpPr>
+          <p:cNvPr id="42" name="矩形 41"/>
+          <p:cNvSpPr/>
+          <p:nvPr/>
+        </p:nvSpPr>
+        <p:spPr>
+          <a:xfrm>
+            <a:off x="2051483" y="4576471"/>
+            <a:ext cx="589109" cy="210124"/>
+          </a:xfrm>
+          <a:prstGeom prst="rect">
+            <a:avLst/>
+          </a:prstGeom>
+          <a:solidFill>
+            <a:schemeClr val="bg2">
+              <a:lumMod val="90000"/>
+            </a:schemeClr>
+          </a:solidFill>
+          <a:ln>
+            <a:solidFill>
+              <a:schemeClr val="bg2">
+                <a:lumMod val="90000"/>
+              </a:schemeClr>
+            </a:solidFill>
+          </a:ln>
+        </p:spPr>
+        <p:style>
+          <a:lnRef idx="2">
+            <a:schemeClr val="accent1">
+              <a:shade val="50000"/>
+            </a:schemeClr>
+          </a:lnRef>
+          <a:fillRef idx="1">
+            <a:schemeClr val="accent1"/>
+          </a:fillRef>
+          <a:effectRef idx="0">
+            <a:schemeClr val="accent1"/>
+          </a:effectRef>
+          <a:fontRef idx="minor">
+            <a:schemeClr val="lt1"/>
+          </a:fontRef>
+        </p:style>
+        <p:txBody>
+          <a:bodyPr rtlCol="0" anchor="ctr"/>
+          <a:lstStyle/>
+          <a:p>
+            <a:pPr algn="ctr"/>
+            <a:endParaRPr lang="zh-CN" altLang="en-US" sz="1600" dirty="0">
+              <a:latin typeface="Times New Roman" panose="02020603050405020304" pitchFamily="18" charset="0"/>
+              <a:ea typeface="宋体" panose="02010600030101010101" pitchFamily="2" charset="-122"/>
+              <a:cs typeface="Times New Roman" panose="02020603050405020304" pitchFamily="18" charset="0"/>
+            </a:endParaRPr>
+          </a:p>
+        </p:txBody>
+      </p:sp>
+      <p:sp>
+        <p:nvSpPr>
+          <p:cNvPr id="12" name="文本框 11"/>
+          <p:cNvSpPr txBox="1"/>
+          <p:nvPr/>
+        </p:nvSpPr>
+        <p:spPr>
+          <a:xfrm>
+            <a:off x="2680484" y="4511291"/>
+            <a:ext cx="1005403" cy="338554"/>
+          </a:xfrm>
+          <a:prstGeom prst="rect">
+            <a:avLst/>
+          </a:prstGeom>
+          <a:noFill/>
+        </p:spPr>
+        <p:txBody>
+          <a:bodyPr wrap="none" rtlCol="0">
+            <a:spAutoFit/>
+          </a:bodyPr>
+          <a:lstStyle/>
+          <a:p>
+            <a:r>
+              <a:rPr lang="zh-CN" altLang="en-US" sz="1600" b="1" dirty="0" smtClean="0">
+                <a:latin typeface="Times New Roman" panose="02020603050405020304" pitchFamily="18" charset="0"/>
+                <a:ea typeface="宋体" panose="02010600030101010101" pitchFamily="2" charset="-122"/>
+                <a:cs typeface="Times New Roman" panose="02020603050405020304" pitchFamily="18" charset="0"/>
+              </a:rPr>
+              <a:t>数据拷贝</a:t>
+            </a:r>
+            <a:endParaRPr lang="zh-CN" altLang="en-US" sz="1600" b="1" dirty="0">
+              <a:latin typeface="Times New Roman" panose="02020603050405020304" pitchFamily="18" charset="0"/>
+              <a:ea typeface="宋体" panose="02010600030101010101" pitchFamily="2" charset="-122"/>
+              <a:cs typeface="Times New Roman" panose="02020603050405020304" pitchFamily="18" charset="0"/>
+            </a:endParaRPr>
+          </a:p>
+        </p:txBody>
+      </p:sp>
+      <p:sp>
+        <p:nvSpPr>
+          <p:cNvPr id="43" name="矩形 42"/>
+          <p:cNvSpPr/>
+          <p:nvPr/>
+        </p:nvSpPr>
+        <p:spPr>
+          <a:xfrm>
+            <a:off x="3971587" y="4576471"/>
+            <a:ext cx="589109" cy="210124"/>
+          </a:xfrm>
+          <a:prstGeom prst="rect">
+            <a:avLst/>
+          </a:prstGeom>
+          <a:solidFill>
+            <a:srgbClr val="F4B183"/>
+          </a:solidFill>
+          <a:ln>
+            <a:solidFill>
+              <a:srgbClr val="F4B183"/>
+            </a:solidFill>
+          </a:ln>
+        </p:spPr>
+        <p:style>
+          <a:lnRef idx="2">
+            <a:schemeClr val="accent1">
+              <a:shade val="50000"/>
+            </a:schemeClr>
+          </a:lnRef>
+          <a:fillRef idx="1">
+            <a:schemeClr val="accent1"/>
+          </a:fillRef>
+          <a:effectRef idx="0">
+            <a:schemeClr val="accent1"/>
+          </a:effectRef>
+          <a:fontRef idx="minor">
+            <a:schemeClr val="lt1"/>
+          </a:fontRef>
+        </p:style>
+        <p:txBody>
+          <a:bodyPr rtlCol="0" anchor="ctr"/>
+          <a:lstStyle/>
+          <a:p>
+            <a:pPr algn="ctr"/>
+            <a:endParaRPr lang="zh-CN" altLang="en-US" sz="1600" dirty="0">
+              <a:latin typeface="Times New Roman" panose="02020603050405020304" pitchFamily="18" charset="0"/>
+              <a:ea typeface="宋体" panose="02010600030101010101" pitchFamily="2" charset="-122"/>
+              <a:cs typeface="Times New Roman" panose="02020603050405020304" pitchFamily="18" charset="0"/>
+            </a:endParaRPr>
+          </a:p>
+        </p:txBody>
+      </p:sp>
+      <p:sp>
+        <p:nvSpPr>
+          <p:cNvPr id="44" name="文本框 43"/>
+          <p:cNvSpPr txBox="1"/>
+          <p:nvPr/>
+        </p:nvSpPr>
+        <p:spPr>
+          <a:xfrm>
+            <a:off x="4600588" y="4511291"/>
+            <a:ext cx="1415772" cy="338554"/>
+          </a:xfrm>
+          <a:prstGeom prst="rect">
+            <a:avLst/>
+          </a:prstGeom>
+          <a:noFill/>
+        </p:spPr>
+        <p:txBody>
+          <a:bodyPr wrap="none" rtlCol="0">
+            <a:spAutoFit/>
+          </a:bodyPr>
+          <a:lstStyle/>
+          <a:p>
+            <a:r>
+              <a:rPr lang="zh-CN" altLang="en-US" sz="1600" b="1" dirty="0" smtClean="0">
+                <a:latin typeface="Times New Roman" panose="02020603050405020304" pitchFamily="18" charset="0"/>
+                <a:ea typeface="宋体" panose="02010600030101010101" pitchFamily="2" charset="-122"/>
+                <a:cs typeface="Times New Roman" panose="02020603050405020304" pitchFamily="18" charset="0"/>
+              </a:rPr>
+              <a:t>节点本地计算</a:t>
+            </a:r>
+            <a:endParaRPr lang="zh-CN" altLang="en-US" sz="1600" b="1" dirty="0">
+              <a:latin typeface="Times New Roman" panose="02020603050405020304" pitchFamily="18" charset="0"/>
+              <a:ea typeface="宋体" panose="02010600030101010101" pitchFamily="2" charset="-122"/>
+              <a:cs typeface="Times New Roman" panose="02020603050405020304" pitchFamily="18" charset="0"/>
+            </a:endParaRPr>
+          </a:p>
+        </p:txBody>
+      </p:sp>
+      <p:sp>
+        <p:nvSpPr>
+          <p:cNvPr id="47" name="矩形 46"/>
+          <p:cNvSpPr/>
+          <p:nvPr/>
+        </p:nvSpPr>
+        <p:spPr>
+          <a:xfrm>
+            <a:off x="6298200" y="4576471"/>
+            <a:ext cx="589109" cy="210124"/>
+          </a:xfrm>
+          <a:prstGeom prst="rect">
+            <a:avLst/>
+          </a:prstGeom>
+          <a:solidFill>
+            <a:srgbClr val="9DC3E6"/>
+          </a:solidFill>
+          <a:ln>
+            <a:solidFill>
+              <a:srgbClr val="9DC3E6"/>
+            </a:solidFill>
+          </a:ln>
+        </p:spPr>
+        <p:style>
+          <a:lnRef idx="2">
+            <a:schemeClr val="accent1">
+              <a:shade val="50000"/>
+            </a:schemeClr>
+          </a:lnRef>
+          <a:fillRef idx="1">
+            <a:schemeClr val="accent1"/>
+          </a:fillRef>
+          <a:effectRef idx="0">
+            <a:schemeClr val="accent1"/>
+          </a:effectRef>
+          <a:fontRef idx="minor">
+            <a:schemeClr val="lt1"/>
+          </a:fontRef>
+        </p:style>
+        <p:txBody>
+          <a:bodyPr rtlCol="0" anchor="ctr"/>
+          <a:lstStyle/>
+          <a:p>
+            <a:pPr algn="ctr"/>
+            <a:endParaRPr lang="zh-CN" altLang="en-US" sz="1600" dirty="0">
+              <a:latin typeface="Times New Roman" panose="02020603050405020304" pitchFamily="18" charset="0"/>
+              <a:ea typeface="宋体" panose="02010600030101010101" pitchFamily="2" charset="-122"/>
+              <a:cs typeface="Times New Roman" panose="02020603050405020304" pitchFamily="18" charset="0"/>
+            </a:endParaRPr>
+          </a:p>
+        </p:txBody>
+      </p:sp>
+      <p:sp>
+        <p:nvSpPr>
+          <p:cNvPr id="48" name="文本框 47"/>
+          <p:cNvSpPr txBox="1"/>
+          <p:nvPr/>
+        </p:nvSpPr>
+        <p:spPr>
+          <a:xfrm>
+            <a:off x="6887309" y="4511291"/>
+            <a:ext cx="2031325" cy="338554"/>
+          </a:xfrm>
+          <a:prstGeom prst="rect">
+            <a:avLst/>
+          </a:prstGeom>
+          <a:noFill/>
+        </p:spPr>
+        <p:txBody>
+          <a:bodyPr wrap="none" rtlCol="0">
+            <a:spAutoFit/>
+          </a:bodyPr>
+          <a:lstStyle/>
+          <a:p>
+            <a:r>
+              <a:rPr lang="zh-CN" altLang="en-US" sz="1600" b="1" dirty="0" smtClean="0">
+                <a:latin typeface="Times New Roman" panose="02020603050405020304" pitchFamily="18" charset="0"/>
+                <a:ea typeface="宋体" panose="02010600030101010101" pitchFamily="2" charset="-122"/>
+                <a:cs typeface="Times New Roman" panose="02020603050405020304" pitchFamily="18" charset="0"/>
+              </a:rPr>
+              <a:t>节点之间的数据通信</a:t>
+            </a:r>
+            <a:endParaRPr lang="zh-CN" altLang="en-US" sz="1600" b="1" dirty="0">
+              <a:latin typeface="Times New Roman" panose="02020603050405020304" pitchFamily="18" charset="0"/>
+              <a:ea typeface="宋体" panose="02010600030101010101" pitchFamily="2" charset="-122"/>
+              <a:cs typeface="Times New Roman" panose="02020603050405020304" pitchFamily="18" charset="0"/>
+            </a:endParaRPr>
+          </a:p>
+        </p:txBody>
+      </p:sp>
+      <p:sp>
+        <p:nvSpPr>
+          <p:cNvPr id="40" name="矩形 39"/>
+          <p:cNvSpPr/>
+          <p:nvPr/>
+        </p:nvSpPr>
+        <p:spPr>
+          <a:xfrm>
+            <a:off x="5639435" y="2637557"/>
+            <a:ext cx="3437888" cy="428624"/>
+          </a:xfrm>
+          <a:prstGeom prst="rect">
+            <a:avLst/>
+          </a:prstGeom>
+          <a:solidFill>
+            <a:schemeClr val="accent1">
+              <a:lumMod val="60000"/>
+              <a:lumOff val="40000"/>
+            </a:schemeClr>
+          </a:solidFill>
+          <a:ln>
+            <a:solidFill>
+              <a:schemeClr val="accent1">
+                <a:lumMod val="60000"/>
+                <a:lumOff val="40000"/>
+              </a:schemeClr>
+            </a:solidFill>
+          </a:ln>
+        </p:spPr>
+        <p:style>
+          <a:lnRef idx="2">
+            <a:schemeClr val="accent1">
+              <a:shade val="50000"/>
+            </a:schemeClr>
+          </a:lnRef>
+          <a:fillRef idx="1">
+            <a:schemeClr val="accent1"/>
+          </a:fillRef>
+          <a:effectRef idx="0">
+            <a:schemeClr val="accent1"/>
+          </a:effectRef>
+          <a:fontRef idx="minor">
+            <a:schemeClr val="lt1"/>
+          </a:fontRef>
+        </p:style>
+        <p:txBody>
+          <a:bodyPr rtlCol="0" anchor="ctr"/>
+          <a:lstStyle/>
+          <a:p>
+            <a:pPr algn="ctr"/>
+            <a:endParaRPr lang="zh-CN" altLang="en-US">
+              <a:latin typeface="Times New Roman" panose="02020603050405020304" pitchFamily="18" charset="0"/>
+              <a:ea typeface="宋体" panose="02010600030101010101" pitchFamily="2" charset="-122"/>
+              <a:cs typeface="Times New Roman" panose="02020603050405020304" pitchFamily="18" charset="0"/>
+            </a:endParaRPr>
+          </a:p>
+        </p:txBody>
+      </p:sp>
+      <p:sp>
+        <p:nvSpPr>
+          <p:cNvPr id="41" name="文本框 40"/>
+          <p:cNvSpPr txBox="1"/>
+          <p:nvPr/>
+        </p:nvSpPr>
+        <p:spPr>
+          <a:xfrm>
+            <a:off x="7230108" y="3040788"/>
+            <a:ext cx="346249" cy="361637"/>
+          </a:xfrm>
+          <a:prstGeom prst="rect">
+            <a:avLst/>
+          </a:prstGeom>
+          <a:noFill/>
+        </p:spPr>
+        <p:txBody>
+          <a:bodyPr vert="eaVert" wrap="none" rtlCol="0">
+            <a:spAutoFit/>
+          </a:bodyPr>
+          <a:lstStyle/>
+          <a:p>
+            <a:r>
+              <a:rPr lang="en-AE" altLang="zh-CN" sz="1050" b="1" dirty="0" smtClean="0">
+                <a:latin typeface="Times New Roman" panose="02020603050405020304" pitchFamily="18" charset="0"/>
+                <a:ea typeface="宋体" panose="02010600030101010101" pitchFamily="2" charset="-122"/>
+                <a:cs typeface="Times New Roman" panose="02020603050405020304" pitchFamily="18" charset="0"/>
+              </a:rPr>
+              <a:t>……</a:t>
+            </a:r>
+            <a:endParaRPr lang="zh-CN" altLang="en-US" sz="1050" b="1" dirty="0">
+              <a:latin typeface="Times New Roman" panose="02020603050405020304" pitchFamily="18" charset="0"/>
+              <a:ea typeface="宋体" panose="02010600030101010101" pitchFamily="2" charset="-122"/>
+              <a:cs typeface="Times New Roman" panose="02020603050405020304" pitchFamily="18" charset="0"/>
+            </a:endParaRPr>
+          </a:p>
+        </p:txBody>
+      </p:sp>
+    </p:spTree>
+    <p:extLst>
+      <p:ext uri="{BB962C8B-B14F-4D97-AF65-F5344CB8AC3E}">
+        <p14:creationId xmlns:p14="http://schemas.microsoft.com/office/powerpoint/2010/main" val="890575263"/>
+      </p:ext>
+    </p:extLst>
+  </p:cSld>
+  <p:clrMapOvr>
+    <a:masterClrMapping/>
+  </p:clrMapOvr>
 </p:sld>
 </file>
 

--- a/figure/大论文作图.pptx
+++ b/figure/大论文作图.pptx
@@ -5,13 +5,15 @@
     <p:sldMasterId id="2147483648" r:id="rId1"/>
   </p:sldMasterIdLst>
   <p:notesMasterIdLst>
-    <p:notesMasterId r:id="rId6"/>
+    <p:notesMasterId r:id="rId8"/>
   </p:notesMasterIdLst>
   <p:sldIdLst>
     <p:sldId id="257" r:id="rId2"/>
     <p:sldId id="258" r:id="rId3"/>
     <p:sldId id="259" r:id="rId4"/>
     <p:sldId id="260" r:id="rId5"/>
+    <p:sldId id="261" r:id="rId6"/>
+    <p:sldId id="262" r:id="rId7"/>
   </p:sldIdLst>
   <p:sldSz cx="12192000" cy="6858000"/>
   <p:notesSz cx="6858000" cy="9144000"/>
@@ -200,7 +202,7 @@
           <a:p>
             <a:fld id="{85C2D6EB-C800-464F-A79F-2EE684CA1913}" type="datetimeFigureOut">
               <a:rPr lang="zh-CN" altLang="en-US" smtClean="0"/>
-              <a:t>2023/12/8</a:t>
+              <a:t>2023/12/9</a:t>
             </a:fld>
             <a:endParaRPr lang="zh-CN" altLang="en-US"/>
           </a:p>
@@ -636,6 +638,90 @@
 </p:notes>
 </file>
 
+<file path=ppt/notesSlides/notesSlide3.xml><?xml version="1.0" encoding="utf-8"?>
+<p:notes xmlns:a="http://schemas.openxmlformats.org/drawingml/2006/main" xmlns:r="http://schemas.openxmlformats.org/officeDocument/2006/relationships" xmlns:p="http://schemas.openxmlformats.org/presentationml/2006/main">
+  <p:cSld>
+    <p:spTree>
+      <p:nvGrpSpPr>
+        <p:cNvPr id="1" name=""/>
+        <p:cNvGrpSpPr/>
+        <p:nvPr/>
+      </p:nvGrpSpPr>
+      <p:grpSpPr>
+        <a:xfrm>
+          <a:off x="0" y="0"/>
+          <a:ext cx="0" cy="0"/>
+          <a:chOff x="0" y="0"/>
+          <a:chExt cx="0" cy="0"/>
+        </a:xfrm>
+      </p:grpSpPr>
+      <p:sp>
+        <p:nvSpPr>
+          <p:cNvPr id="2" name="幻灯片图像占位符 1"/>
+          <p:cNvSpPr>
+            <a:spLocks noGrp="1" noRot="1" noChangeAspect="1"/>
+          </p:cNvSpPr>
+          <p:nvPr>
+            <p:ph type="sldImg"/>
+          </p:nvPr>
+        </p:nvSpPr>
+        <p:spPr/>
+      </p:sp>
+      <p:sp>
+        <p:nvSpPr>
+          <p:cNvPr id="3" name="备注占位符 2"/>
+          <p:cNvSpPr>
+            <a:spLocks noGrp="1"/>
+          </p:cNvSpPr>
+          <p:nvPr>
+            <p:ph type="body" idx="1"/>
+          </p:nvPr>
+        </p:nvSpPr>
+        <p:spPr/>
+        <p:txBody>
+          <a:bodyPr/>
+          <a:lstStyle/>
+          <a:p>
+            <a:endParaRPr lang="zh-CN" altLang="en-US" dirty="0"/>
+          </a:p>
+        </p:txBody>
+      </p:sp>
+      <p:sp>
+        <p:nvSpPr>
+          <p:cNvPr id="4" name="灯片编号占位符 3"/>
+          <p:cNvSpPr>
+            <a:spLocks noGrp="1"/>
+          </p:cNvSpPr>
+          <p:nvPr>
+            <p:ph type="sldNum" sz="quarter" idx="10"/>
+          </p:nvPr>
+        </p:nvSpPr>
+        <p:spPr/>
+        <p:txBody>
+          <a:bodyPr/>
+          <a:lstStyle/>
+          <a:p>
+            <a:fld id="{0C85519D-9BD0-4B4B-B77F-7A9E40FFBA88}" type="slidenum">
+              <a:rPr lang="zh-CN" altLang="en-US" smtClean="0"/>
+              <a:t>5</a:t>
+            </a:fld>
+            <a:endParaRPr lang="zh-CN" altLang="en-US"/>
+          </a:p>
+        </p:txBody>
+      </p:sp>
+    </p:spTree>
+    <p:extLst>
+      <p:ext uri="{BB962C8B-B14F-4D97-AF65-F5344CB8AC3E}">
+        <p14:creationId xmlns:p14="http://schemas.microsoft.com/office/powerpoint/2010/main" val="3688325439"/>
+      </p:ext>
+    </p:extLst>
+  </p:cSld>
+  <p:clrMapOvr>
+    <a:masterClrMapping/>
+  </p:clrMapOvr>
+</p:notes>
+</file>
+
 <file path=ppt/slideLayouts/slideLayout1.xml><?xml version="1.0" encoding="utf-8"?>
 <p:sldLayout xmlns:a="http://schemas.openxmlformats.org/drawingml/2006/main" xmlns:r="http://schemas.openxmlformats.org/officeDocument/2006/relationships" xmlns:p="http://schemas.openxmlformats.org/presentationml/2006/main" type="title" preserve="1">
   <p:cSld name="标题幻灯片">
@@ -767,7 +853,7 @@
           <a:p>
             <a:fld id="{3F936331-16FD-497A-8586-31CE5CA58C54}" type="datetimeFigureOut">
               <a:rPr lang="zh-CN" altLang="en-US" smtClean="0"/>
-              <a:t>2023/12/8</a:t>
+              <a:t>2023/12/9</a:t>
             </a:fld>
             <a:endParaRPr lang="zh-CN" altLang="en-US"/>
           </a:p>
@@ -937,7 +1023,7 @@
           <a:p>
             <a:fld id="{3F936331-16FD-497A-8586-31CE5CA58C54}" type="datetimeFigureOut">
               <a:rPr lang="zh-CN" altLang="en-US" smtClean="0"/>
-              <a:t>2023/12/8</a:t>
+              <a:t>2023/12/9</a:t>
             </a:fld>
             <a:endParaRPr lang="zh-CN" altLang="en-US"/>
           </a:p>
@@ -1117,7 +1203,7 @@
           <a:p>
             <a:fld id="{3F936331-16FD-497A-8586-31CE5CA58C54}" type="datetimeFigureOut">
               <a:rPr lang="zh-CN" altLang="en-US" smtClean="0"/>
-              <a:t>2023/12/8</a:t>
+              <a:t>2023/12/9</a:t>
             </a:fld>
             <a:endParaRPr lang="zh-CN" altLang="en-US"/>
           </a:p>
@@ -1287,7 +1373,7 @@
           <a:p>
             <a:fld id="{3F936331-16FD-497A-8586-31CE5CA58C54}" type="datetimeFigureOut">
               <a:rPr lang="zh-CN" altLang="en-US" smtClean="0"/>
-              <a:t>2023/12/8</a:t>
+              <a:t>2023/12/9</a:t>
             </a:fld>
             <a:endParaRPr lang="zh-CN" altLang="en-US"/>
           </a:p>
@@ -1533,7 +1619,7 @@
           <a:p>
             <a:fld id="{3F936331-16FD-497A-8586-31CE5CA58C54}" type="datetimeFigureOut">
               <a:rPr lang="zh-CN" altLang="en-US" smtClean="0"/>
-              <a:t>2023/12/8</a:t>
+              <a:t>2023/12/9</a:t>
             </a:fld>
             <a:endParaRPr lang="zh-CN" altLang="en-US"/>
           </a:p>
@@ -1765,7 +1851,7 @@
           <a:p>
             <a:fld id="{3F936331-16FD-497A-8586-31CE5CA58C54}" type="datetimeFigureOut">
               <a:rPr lang="zh-CN" altLang="en-US" smtClean="0"/>
-              <a:t>2023/12/8</a:t>
+              <a:t>2023/12/9</a:t>
             </a:fld>
             <a:endParaRPr lang="zh-CN" altLang="en-US"/>
           </a:p>
@@ -2132,7 +2218,7 @@
           <a:p>
             <a:fld id="{3F936331-16FD-497A-8586-31CE5CA58C54}" type="datetimeFigureOut">
               <a:rPr lang="zh-CN" altLang="en-US" smtClean="0"/>
-              <a:t>2023/12/8</a:t>
+              <a:t>2023/12/9</a:t>
             </a:fld>
             <a:endParaRPr lang="zh-CN" altLang="en-US"/>
           </a:p>
@@ -2250,7 +2336,7 @@
           <a:p>
             <a:fld id="{3F936331-16FD-497A-8586-31CE5CA58C54}" type="datetimeFigureOut">
               <a:rPr lang="zh-CN" altLang="en-US" smtClean="0"/>
-              <a:t>2023/12/8</a:t>
+              <a:t>2023/12/9</a:t>
             </a:fld>
             <a:endParaRPr lang="zh-CN" altLang="en-US"/>
           </a:p>
@@ -2345,7 +2431,7 @@
           <a:p>
             <a:fld id="{3F936331-16FD-497A-8586-31CE5CA58C54}" type="datetimeFigureOut">
               <a:rPr lang="zh-CN" altLang="en-US" smtClean="0"/>
-              <a:t>2023/12/8</a:t>
+              <a:t>2023/12/9</a:t>
             </a:fld>
             <a:endParaRPr lang="zh-CN" altLang="en-US"/>
           </a:p>
@@ -2622,7 +2708,7 @@
           <a:p>
             <a:fld id="{3F936331-16FD-497A-8586-31CE5CA58C54}" type="datetimeFigureOut">
               <a:rPr lang="zh-CN" altLang="en-US" smtClean="0"/>
-              <a:t>2023/12/8</a:t>
+              <a:t>2023/12/9</a:t>
             </a:fld>
             <a:endParaRPr lang="zh-CN" altLang="en-US"/>
           </a:p>
@@ -2875,7 +2961,7 @@
           <a:p>
             <a:fld id="{3F936331-16FD-497A-8586-31CE5CA58C54}" type="datetimeFigureOut">
               <a:rPr lang="zh-CN" altLang="en-US" smtClean="0"/>
-              <a:t>2023/12/8</a:t>
+              <a:t>2023/12/9</a:t>
             </a:fld>
             <a:endParaRPr lang="zh-CN" altLang="en-US"/>
           </a:p>
@@ -3088,7 +3174,7 @@
           <a:p>
             <a:fld id="{3F936331-16FD-497A-8586-31CE5CA58C54}" type="datetimeFigureOut">
               <a:rPr lang="zh-CN" altLang="en-US" smtClean="0"/>
-              <a:t>2023/12/8</a:t>
+              <a:t>2023/12/9</a:t>
             </a:fld>
             <a:endParaRPr lang="zh-CN" altLang="en-US"/>
           </a:p>
@@ -7688,21 +7774,7 @@
                 <a:latin typeface="宋体" panose="02010600030101010101" pitchFamily="2" charset="-122"/>
                 <a:ea typeface="宋体" panose="02010600030101010101" pitchFamily="2" charset="-122"/>
               </a:rPr>
-              <a:t>确定</a:t>
-            </a:r>
-            <a:r>
-              <a:rPr lang="zh-CN" altLang="en-US" sz="1600" dirty="0" smtClean="0">
-                <a:latin typeface="宋体" panose="02010600030101010101" pitchFamily="2" charset="-122"/>
-                <a:ea typeface="宋体" panose="02010600030101010101" pitchFamily="2" charset="-122"/>
-              </a:rPr>
-              <a:t>合适集群</a:t>
-            </a:r>
-            <a:r>
-              <a:rPr lang="zh-CN" altLang="en-US" sz="1600" dirty="0" smtClean="0">
-                <a:latin typeface="宋体" panose="02010600030101010101" pitchFamily="2" charset="-122"/>
-                <a:ea typeface="宋体" panose="02010600030101010101" pitchFamily="2" charset="-122"/>
-              </a:rPr>
-              <a:t>规模</a:t>
+              <a:t>确定合适集群规模</a:t>
             </a:r>
             <a:endParaRPr lang="en-US" altLang="zh-CN" sz="1600" dirty="0" smtClean="0">
               <a:latin typeface="宋体" panose="02010600030101010101" pitchFamily="2" charset="-122"/>
@@ -8970,7 +9042,7 @@
           <a:graphicData uri="http://schemas.openxmlformats.org/presentationml/2006/ole">
             <mc:AlternateContent xmlns:mc="http://schemas.openxmlformats.org/markup-compatibility/2006">
               <mc:Choice xmlns:v="urn:schemas-microsoft-com:vml" Requires="v">
-                <p:oleObj spid="_x0000_s1029" name="AxMath" r:id="rId3" imgW="315000" imgH="228600" progId="Equation.AxMath">
+                <p:oleObj spid="_x0000_s1047" name="AxMath" r:id="rId3" imgW="315000" imgH="228600" progId="Equation.AxMath">
                   <p:embed/>
                 </p:oleObj>
               </mc:Choice>
@@ -9023,7 +9095,7 @@
           <a:graphicData uri="http://schemas.openxmlformats.org/presentationml/2006/ole">
             <mc:AlternateContent xmlns:mc="http://schemas.openxmlformats.org/markup-compatibility/2006">
               <mc:Choice xmlns:v="urn:schemas-microsoft-com:vml" Requires="v">
-                <p:oleObj spid="_x0000_s1030" name="AxMath" r:id="rId5" imgW="347760" imgH="228600" progId="Equation.AxMath">
+                <p:oleObj spid="_x0000_s1048" name="AxMath" r:id="rId5" imgW="347760" imgH="228600" progId="Equation.AxMath">
                   <p:embed/>
                 </p:oleObj>
               </mc:Choice>
@@ -9076,7 +9148,7 @@
           <a:graphicData uri="http://schemas.openxmlformats.org/presentationml/2006/ole">
             <mc:AlternateContent xmlns:mc="http://schemas.openxmlformats.org/markup-compatibility/2006">
               <mc:Choice xmlns:v="urn:schemas-microsoft-com:vml" Requires="v">
-                <p:oleObj spid="_x0000_s1031" name="AxMath" r:id="rId7" imgW="378000" imgH="228600" progId="Equation.AxMath">
+                <p:oleObj spid="_x0000_s1049" name="AxMath" r:id="rId7" imgW="378000" imgH="228600" progId="Equation.AxMath">
                   <p:embed/>
                 </p:oleObj>
               </mc:Choice>
@@ -9491,6 +9563,4982 @@
   <p:clrMapOvr>
     <a:masterClrMapping/>
   </p:clrMapOvr>
+</p:sld>
+</file>
+
+<file path=ppt/slides/slide5.xml><?xml version="1.0" encoding="utf-8"?>
+<p:sld xmlns:a="http://schemas.openxmlformats.org/drawingml/2006/main" xmlns:r="http://schemas.openxmlformats.org/officeDocument/2006/relationships" xmlns:p="http://schemas.openxmlformats.org/presentationml/2006/main">
+  <p:cSld>
+    <p:spTree>
+      <p:nvGrpSpPr>
+        <p:cNvPr id="1" name=""/>
+        <p:cNvGrpSpPr/>
+        <p:nvPr/>
+      </p:nvGrpSpPr>
+      <p:grpSpPr>
+        <a:xfrm>
+          <a:off x="0" y="0"/>
+          <a:ext cx="0" cy="0"/>
+          <a:chOff x="0" y="0"/>
+          <a:chExt cx="0" cy="0"/>
+        </a:xfrm>
+      </p:grpSpPr>
+      <p:sp>
+        <p:nvSpPr>
+          <p:cNvPr id="2" name="矩形 1"/>
+          <p:cNvSpPr/>
+          <p:nvPr/>
+        </p:nvSpPr>
+        <p:spPr>
+          <a:xfrm>
+            <a:off x="2728722" y="265219"/>
+            <a:ext cx="822331" cy="689524"/>
+          </a:xfrm>
+          <a:prstGeom prst="rect">
+            <a:avLst/>
+          </a:prstGeom>
+          <a:ln w="19050">
+            <a:noFill/>
+          </a:ln>
+        </p:spPr>
+        <p:style>
+          <a:lnRef idx="2">
+            <a:schemeClr val="accent1">
+              <a:shade val="50000"/>
+            </a:schemeClr>
+          </a:lnRef>
+          <a:fillRef idx="1">
+            <a:schemeClr val="accent1"/>
+          </a:fillRef>
+          <a:effectRef idx="0">
+            <a:schemeClr val="accent1"/>
+          </a:effectRef>
+          <a:fontRef idx="minor">
+            <a:schemeClr val="lt1"/>
+          </a:fontRef>
+        </p:style>
+        <p:txBody>
+          <a:bodyPr rtlCol="0" anchor="ctr"/>
+          <a:lstStyle/>
+          <a:p>
+            <a:pPr algn="ctr"/>
+            <a:r>
+              <a:rPr lang="en-US" altLang="zh-CN" dirty="0" smtClean="0">
+                <a:solidFill>
+                  <a:schemeClr val="tx1"/>
+                </a:solidFill>
+                <a:latin typeface="Times New Roman" panose="02020603050405020304" pitchFamily="18" charset="0"/>
+                <a:cs typeface="Times New Roman" panose="02020603050405020304" pitchFamily="18" charset="0"/>
+              </a:rPr>
+              <a:t>CPU1</a:t>
+            </a:r>
+            <a:endParaRPr lang="zh-CN" altLang="en-US" dirty="0">
+              <a:solidFill>
+                <a:schemeClr val="tx1"/>
+              </a:solidFill>
+              <a:latin typeface="Times New Roman" panose="02020603050405020304" pitchFamily="18" charset="0"/>
+              <a:cs typeface="Times New Roman" panose="02020603050405020304" pitchFamily="18" charset="0"/>
+            </a:endParaRPr>
+          </a:p>
+        </p:txBody>
+      </p:sp>
+      <p:sp>
+        <p:nvSpPr>
+          <p:cNvPr id="23" name="矩形 22"/>
+          <p:cNvSpPr/>
+          <p:nvPr/>
+        </p:nvSpPr>
+        <p:spPr>
+          <a:xfrm>
+            <a:off x="7272076" y="265219"/>
+            <a:ext cx="871728" cy="689524"/>
+          </a:xfrm>
+          <a:prstGeom prst="rect">
+            <a:avLst/>
+          </a:prstGeom>
+          <a:ln w="19050">
+            <a:noFill/>
+          </a:ln>
+        </p:spPr>
+        <p:style>
+          <a:lnRef idx="2">
+            <a:schemeClr val="accent1">
+              <a:shade val="50000"/>
+            </a:schemeClr>
+          </a:lnRef>
+          <a:fillRef idx="1">
+            <a:schemeClr val="accent1"/>
+          </a:fillRef>
+          <a:effectRef idx="0">
+            <a:schemeClr val="accent1"/>
+          </a:effectRef>
+          <a:fontRef idx="minor">
+            <a:schemeClr val="lt1"/>
+          </a:fontRef>
+        </p:style>
+        <p:txBody>
+          <a:bodyPr rtlCol="0" anchor="ctr"/>
+          <a:lstStyle/>
+          <a:p>
+            <a:pPr algn="ctr"/>
+            <a:r>
+              <a:rPr lang="en-US" altLang="zh-CN" dirty="0" smtClean="0">
+                <a:solidFill>
+                  <a:schemeClr val="tx1"/>
+                </a:solidFill>
+                <a:latin typeface="Times New Roman" panose="02020603050405020304" pitchFamily="18" charset="0"/>
+                <a:cs typeface="Times New Roman" panose="02020603050405020304" pitchFamily="18" charset="0"/>
+              </a:rPr>
+              <a:t>CPU2</a:t>
+            </a:r>
+            <a:endParaRPr lang="zh-CN" altLang="en-US" dirty="0">
+              <a:solidFill>
+                <a:schemeClr val="tx1"/>
+              </a:solidFill>
+              <a:latin typeface="Times New Roman" panose="02020603050405020304" pitchFamily="18" charset="0"/>
+              <a:cs typeface="Times New Roman" panose="02020603050405020304" pitchFamily="18" charset="0"/>
+            </a:endParaRPr>
+          </a:p>
+        </p:txBody>
+      </p:sp>
+      <p:cxnSp>
+        <p:nvCxnSpPr>
+          <p:cNvPr id="44" name="直接连接符 43"/>
+          <p:cNvCxnSpPr>
+            <a:stCxn id="2" idx="3"/>
+            <a:endCxn id="23" idx="1"/>
+          </p:cNvCxnSpPr>
+          <p:nvPr/>
+        </p:nvCxnSpPr>
+        <p:spPr>
+          <a:xfrm>
+            <a:off x="3600450" y="367665"/>
+            <a:ext cx="5033838" cy="0"/>
+          </a:xfrm>
+          <a:prstGeom prst="line">
+            <a:avLst/>
+          </a:prstGeom>
+          <a:ln w="19050">
+            <a:noFill/>
+          </a:ln>
+        </p:spPr>
+        <p:style>
+          <a:lnRef idx="1">
+            <a:schemeClr val="accent1"/>
+          </a:lnRef>
+          <a:fillRef idx="0">
+            <a:schemeClr val="accent1"/>
+          </a:fillRef>
+          <a:effectRef idx="0">
+            <a:schemeClr val="accent1"/>
+          </a:effectRef>
+          <a:fontRef idx="minor">
+            <a:schemeClr val="tx1"/>
+          </a:fontRef>
+        </p:style>
+      </p:cxnSp>
+      <p:sp>
+        <p:nvSpPr>
+          <p:cNvPr id="45" name="文本框 44"/>
+          <p:cNvSpPr txBox="1"/>
+          <p:nvPr/>
+        </p:nvSpPr>
+        <p:spPr>
+          <a:xfrm>
+            <a:off x="5133937" y="167610"/>
+            <a:ext cx="556563" cy="369332"/>
+          </a:xfrm>
+          <a:prstGeom prst="rect">
+            <a:avLst/>
+          </a:prstGeom>
+          <a:solidFill>
+            <a:schemeClr val="bg1"/>
+          </a:solidFill>
+          <a:ln w="19050">
+            <a:noFill/>
+          </a:ln>
+        </p:spPr>
+        <p:txBody>
+          <a:bodyPr wrap="none" rtlCol="0">
+            <a:spAutoFit/>
+          </a:bodyPr>
+          <a:lstStyle/>
+          <a:p>
+            <a:r>
+              <a:rPr lang="en-US" altLang="zh-CN" dirty="0" smtClean="0">
+                <a:latin typeface="Times New Roman" panose="02020603050405020304" pitchFamily="18" charset="0"/>
+                <a:cs typeface="Times New Roman" panose="02020603050405020304" pitchFamily="18" charset="0"/>
+              </a:rPr>
+              <a:t>QPI</a:t>
+            </a:r>
+            <a:endParaRPr lang="zh-CN" altLang="en-US" dirty="0">
+              <a:latin typeface="Times New Roman" panose="02020603050405020304" pitchFamily="18" charset="0"/>
+              <a:cs typeface="Times New Roman" panose="02020603050405020304" pitchFamily="18" charset="0"/>
+            </a:endParaRPr>
+          </a:p>
+        </p:txBody>
+      </p:sp>
+      <p:cxnSp>
+        <p:nvCxnSpPr>
+          <p:cNvPr id="9" name="直接箭头连接符 8"/>
+          <p:cNvCxnSpPr>
+            <a:stCxn id="2" idx="3"/>
+            <a:endCxn id="23" idx="1"/>
+          </p:cNvCxnSpPr>
+          <p:nvPr/>
+        </p:nvCxnSpPr>
+        <p:spPr>
+          <a:xfrm>
+            <a:off x="3551053" y="609981"/>
+            <a:ext cx="3721023" cy="0"/>
+          </a:xfrm>
+          <a:prstGeom prst="straightConnector1">
+            <a:avLst/>
+          </a:prstGeom>
+          <a:ln w="19050">
+            <a:solidFill>
+              <a:schemeClr val="tx1"/>
+            </a:solidFill>
+            <a:headEnd type="arrow" w="med" len="med"/>
+            <a:tailEnd type="arrow" w="med" len="med"/>
+          </a:ln>
+        </p:spPr>
+        <p:style>
+          <a:lnRef idx="1">
+            <a:schemeClr val="accent1"/>
+          </a:lnRef>
+          <a:fillRef idx="0">
+            <a:schemeClr val="accent1"/>
+          </a:fillRef>
+          <a:effectRef idx="0">
+            <a:schemeClr val="accent1"/>
+          </a:effectRef>
+          <a:fontRef idx="minor">
+            <a:schemeClr val="tx1"/>
+          </a:fontRef>
+        </p:style>
+      </p:cxnSp>
+      <p:sp>
+        <p:nvSpPr>
+          <p:cNvPr id="71" name="矩形 70"/>
+          <p:cNvSpPr/>
+          <p:nvPr/>
+        </p:nvSpPr>
+        <p:spPr>
+          <a:xfrm>
+            <a:off x="2552070" y="1491656"/>
+            <a:ext cx="1175633" cy="831188"/>
+          </a:xfrm>
+          <a:prstGeom prst="rect">
+            <a:avLst/>
+          </a:prstGeom>
+          <a:solidFill>
+            <a:srgbClr val="CCFFCC"/>
+          </a:solidFill>
+          <a:ln w="19050">
+            <a:noFill/>
+          </a:ln>
+        </p:spPr>
+        <p:style>
+          <a:lnRef idx="2">
+            <a:schemeClr val="accent1">
+              <a:shade val="50000"/>
+            </a:schemeClr>
+          </a:lnRef>
+          <a:fillRef idx="1">
+            <a:schemeClr val="accent1"/>
+          </a:fillRef>
+          <a:effectRef idx="0">
+            <a:schemeClr val="accent1"/>
+          </a:effectRef>
+          <a:fontRef idx="minor">
+            <a:schemeClr val="lt1"/>
+          </a:fontRef>
+        </p:style>
+        <p:txBody>
+          <a:bodyPr rtlCol="0" anchor="ctr"/>
+          <a:lstStyle/>
+          <a:p>
+            <a:pPr algn="ctr"/>
+            <a:endParaRPr lang="zh-CN" altLang="en-US" sz="1600" dirty="0">
+              <a:solidFill>
+                <a:schemeClr val="tx1"/>
+              </a:solidFill>
+              <a:latin typeface="Times New Roman" panose="02020603050405020304" pitchFamily="18" charset="0"/>
+              <a:cs typeface="Times New Roman" panose="02020603050405020304" pitchFamily="18" charset="0"/>
+            </a:endParaRPr>
+          </a:p>
+        </p:txBody>
+      </p:sp>
+      <p:sp>
+        <p:nvSpPr>
+          <p:cNvPr id="72" name="文本框 71"/>
+          <p:cNvSpPr txBox="1"/>
+          <p:nvPr/>
+        </p:nvSpPr>
+        <p:spPr>
+          <a:xfrm>
+            <a:off x="2505975" y="1553307"/>
+            <a:ext cx="1257930" cy="646331"/>
+          </a:xfrm>
+          <a:prstGeom prst="rect">
+            <a:avLst/>
+          </a:prstGeom>
+          <a:noFill/>
+        </p:spPr>
+        <p:txBody>
+          <a:bodyPr wrap="square" rtlCol="0">
+            <a:spAutoFit/>
+          </a:bodyPr>
+          <a:lstStyle/>
+          <a:p>
+            <a:pPr algn="ctr"/>
+            <a:r>
+              <a:rPr lang="en-US" altLang="zh-CN" dirty="0">
+                <a:latin typeface="Times New Roman" panose="02020603050405020304" pitchFamily="18" charset="0"/>
+                <a:cs typeface="Times New Roman" panose="02020603050405020304" pitchFamily="18" charset="0"/>
+              </a:rPr>
+              <a:t>Root</a:t>
+            </a:r>
+          </a:p>
+          <a:p>
+            <a:pPr algn="ctr"/>
+            <a:r>
+              <a:rPr lang="en-US" altLang="zh-CN" dirty="0">
+                <a:latin typeface="Times New Roman" panose="02020603050405020304" pitchFamily="18" charset="0"/>
+                <a:cs typeface="Times New Roman" panose="02020603050405020304" pitchFamily="18" charset="0"/>
+              </a:rPr>
+              <a:t>Complex</a:t>
+            </a:r>
+          </a:p>
+        </p:txBody>
+      </p:sp>
+      <p:cxnSp>
+        <p:nvCxnSpPr>
+          <p:cNvPr id="26" name="直接箭头连接符 25"/>
+          <p:cNvCxnSpPr>
+            <a:stCxn id="2" idx="2"/>
+            <a:endCxn id="71" idx="0"/>
+          </p:cNvCxnSpPr>
+          <p:nvPr/>
+        </p:nvCxnSpPr>
+        <p:spPr>
+          <a:xfrm flipH="1">
+            <a:off x="3139887" y="954743"/>
+            <a:ext cx="1" cy="536913"/>
+          </a:xfrm>
+          <a:prstGeom prst="straightConnector1">
+            <a:avLst/>
+          </a:prstGeom>
+          <a:ln w="19050">
+            <a:solidFill>
+              <a:schemeClr val="tx1"/>
+            </a:solidFill>
+            <a:headEnd type="arrow" w="med" len="med"/>
+            <a:tailEnd type="arrow" w="med" len="med"/>
+          </a:ln>
+        </p:spPr>
+        <p:style>
+          <a:lnRef idx="1">
+            <a:schemeClr val="accent1"/>
+          </a:lnRef>
+          <a:fillRef idx="0">
+            <a:schemeClr val="accent1"/>
+          </a:fillRef>
+          <a:effectRef idx="0">
+            <a:schemeClr val="accent1"/>
+          </a:effectRef>
+          <a:fontRef idx="minor">
+            <a:schemeClr val="tx1"/>
+          </a:fontRef>
+        </p:style>
+      </p:cxnSp>
+      <p:sp>
+        <p:nvSpPr>
+          <p:cNvPr id="80" name="矩形 79"/>
+          <p:cNvSpPr/>
+          <p:nvPr/>
+        </p:nvSpPr>
+        <p:spPr>
+          <a:xfrm>
+            <a:off x="1604374" y="2554266"/>
+            <a:ext cx="947696" cy="831188"/>
+          </a:xfrm>
+          <a:prstGeom prst="rect">
+            <a:avLst/>
+          </a:prstGeom>
+          <a:solidFill>
+            <a:srgbClr val="CCFFCC"/>
+          </a:solidFill>
+          <a:ln w="19050">
+            <a:noFill/>
+          </a:ln>
+        </p:spPr>
+        <p:style>
+          <a:lnRef idx="2">
+            <a:schemeClr val="accent1">
+              <a:shade val="50000"/>
+            </a:schemeClr>
+          </a:lnRef>
+          <a:fillRef idx="1">
+            <a:schemeClr val="accent1"/>
+          </a:fillRef>
+          <a:effectRef idx="0">
+            <a:schemeClr val="accent1"/>
+          </a:effectRef>
+          <a:fontRef idx="minor">
+            <a:schemeClr val="lt1"/>
+          </a:fontRef>
+        </p:style>
+        <p:txBody>
+          <a:bodyPr rtlCol="0" anchor="ctr"/>
+          <a:lstStyle/>
+          <a:p>
+            <a:pPr algn="ctr"/>
+            <a:endParaRPr lang="zh-CN" altLang="en-US" sz="1600" dirty="0">
+              <a:solidFill>
+                <a:schemeClr val="tx1"/>
+              </a:solidFill>
+              <a:latin typeface="Times New Roman" panose="02020603050405020304" pitchFamily="18" charset="0"/>
+              <a:cs typeface="Times New Roman" panose="02020603050405020304" pitchFamily="18" charset="0"/>
+            </a:endParaRPr>
+          </a:p>
+        </p:txBody>
+      </p:sp>
+      <p:sp>
+        <p:nvSpPr>
+          <p:cNvPr id="81" name="文本框 80"/>
+          <p:cNvSpPr txBox="1"/>
+          <p:nvPr/>
+        </p:nvSpPr>
+        <p:spPr>
+          <a:xfrm>
+            <a:off x="1652464" y="2615917"/>
+            <a:ext cx="851515" cy="646331"/>
+          </a:xfrm>
+          <a:prstGeom prst="rect">
+            <a:avLst/>
+          </a:prstGeom>
+          <a:noFill/>
+        </p:spPr>
+        <p:txBody>
+          <a:bodyPr wrap="none" rtlCol="0">
+            <a:spAutoFit/>
+          </a:bodyPr>
+          <a:lstStyle/>
+          <a:p>
+            <a:pPr algn="ctr"/>
+            <a:r>
+              <a:rPr lang="en-US" altLang="zh-CN" dirty="0" err="1" smtClean="0">
+                <a:latin typeface="Times New Roman" panose="02020603050405020304" pitchFamily="18" charset="0"/>
+                <a:cs typeface="Times New Roman" panose="02020603050405020304" pitchFamily="18" charset="0"/>
+              </a:rPr>
+              <a:t>PCIe</a:t>
+            </a:r>
+            <a:endParaRPr lang="en-US" altLang="zh-CN" dirty="0">
+              <a:latin typeface="Times New Roman" panose="02020603050405020304" pitchFamily="18" charset="0"/>
+              <a:cs typeface="Times New Roman" panose="02020603050405020304" pitchFamily="18" charset="0"/>
+            </a:endParaRPr>
+          </a:p>
+          <a:p>
+            <a:pPr algn="ctr"/>
+            <a:r>
+              <a:rPr lang="en-US" altLang="zh-CN" dirty="0" smtClean="0">
+                <a:latin typeface="Times New Roman" panose="02020603050405020304" pitchFamily="18" charset="0"/>
+                <a:cs typeface="Times New Roman" panose="02020603050405020304" pitchFamily="18" charset="0"/>
+              </a:rPr>
+              <a:t>Switch</a:t>
+            </a:r>
+            <a:endParaRPr lang="en-US" altLang="zh-CN" dirty="0">
+              <a:latin typeface="Times New Roman" panose="02020603050405020304" pitchFamily="18" charset="0"/>
+              <a:cs typeface="Times New Roman" panose="02020603050405020304" pitchFamily="18" charset="0"/>
+            </a:endParaRPr>
+          </a:p>
+        </p:txBody>
+      </p:sp>
+      <p:sp>
+        <p:nvSpPr>
+          <p:cNvPr id="82" name="矩形 81"/>
+          <p:cNvSpPr/>
+          <p:nvPr/>
+        </p:nvSpPr>
+        <p:spPr>
+          <a:xfrm>
+            <a:off x="3727703" y="2555832"/>
+            <a:ext cx="947696" cy="831188"/>
+          </a:xfrm>
+          <a:prstGeom prst="rect">
+            <a:avLst/>
+          </a:prstGeom>
+          <a:solidFill>
+            <a:srgbClr val="CCFFCC"/>
+          </a:solidFill>
+          <a:ln w="19050">
+            <a:noFill/>
+          </a:ln>
+        </p:spPr>
+        <p:style>
+          <a:lnRef idx="2">
+            <a:schemeClr val="accent1">
+              <a:shade val="50000"/>
+            </a:schemeClr>
+          </a:lnRef>
+          <a:fillRef idx="1">
+            <a:schemeClr val="accent1"/>
+          </a:fillRef>
+          <a:effectRef idx="0">
+            <a:schemeClr val="accent1"/>
+          </a:effectRef>
+          <a:fontRef idx="minor">
+            <a:schemeClr val="lt1"/>
+          </a:fontRef>
+        </p:style>
+        <p:txBody>
+          <a:bodyPr rtlCol="0" anchor="ctr"/>
+          <a:lstStyle/>
+          <a:p>
+            <a:pPr algn="ctr"/>
+            <a:endParaRPr lang="zh-CN" altLang="en-US" sz="1600" dirty="0">
+              <a:solidFill>
+                <a:schemeClr val="tx1"/>
+              </a:solidFill>
+              <a:latin typeface="Times New Roman" panose="02020603050405020304" pitchFamily="18" charset="0"/>
+              <a:cs typeface="Times New Roman" panose="02020603050405020304" pitchFamily="18" charset="0"/>
+            </a:endParaRPr>
+          </a:p>
+        </p:txBody>
+      </p:sp>
+      <p:sp>
+        <p:nvSpPr>
+          <p:cNvPr id="94" name="文本框 93"/>
+          <p:cNvSpPr txBox="1"/>
+          <p:nvPr/>
+        </p:nvSpPr>
+        <p:spPr>
+          <a:xfrm>
+            <a:off x="3775793" y="2615917"/>
+            <a:ext cx="851515" cy="646331"/>
+          </a:xfrm>
+          <a:prstGeom prst="rect">
+            <a:avLst/>
+          </a:prstGeom>
+          <a:noFill/>
+        </p:spPr>
+        <p:txBody>
+          <a:bodyPr wrap="none" rtlCol="0">
+            <a:spAutoFit/>
+          </a:bodyPr>
+          <a:lstStyle/>
+          <a:p>
+            <a:pPr algn="ctr"/>
+            <a:r>
+              <a:rPr lang="en-US" altLang="zh-CN" dirty="0" err="1" smtClean="0">
+                <a:latin typeface="Times New Roman" panose="02020603050405020304" pitchFamily="18" charset="0"/>
+                <a:cs typeface="Times New Roman" panose="02020603050405020304" pitchFamily="18" charset="0"/>
+              </a:rPr>
+              <a:t>PCIe</a:t>
+            </a:r>
+            <a:endParaRPr lang="en-US" altLang="zh-CN" dirty="0">
+              <a:latin typeface="Times New Roman" panose="02020603050405020304" pitchFamily="18" charset="0"/>
+              <a:cs typeface="Times New Roman" panose="02020603050405020304" pitchFamily="18" charset="0"/>
+            </a:endParaRPr>
+          </a:p>
+          <a:p>
+            <a:pPr algn="ctr"/>
+            <a:r>
+              <a:rPr lang="en-US" altLang="zh-CN" dirty="0" smtClean="0">
+                <a:latin typeface="Times New Roman" panose="02020603050405020304" pitchFamily="18" charset="0"/>
+                <a:cs typeface="Times New Roman" panose="02020603050405020304" pitchFamily="18" charset="0"/>
+              </a:rPr>
+              <a:t>Switch</a:t>
+            </a:r>
+            <a:endParaRPr lang="en-US" altLang="zh-CN" dirty="0">
+              <a:latin typeface="Times New Roman" panose="02020603050405020304" pitchFamily="18" charset="0"/>
+              <a:cs typeface="Times New Roman" panose="02020603050405020304" pitchFamily="18" charset="0"/>
+            </a:endParaRPr>
+          </a:p>
+        </p:txBody>
+      </p:sp>
+      <p:cxnSp>
+        <p:nvCxnSpPr>
+          <p:cNvPr id="32" name="肘形连接符 31"/>
+          <p:cNvCxnSpPr>
+            <a:stCxn id="80" idx="0"/>
+            <a:endCxn id="71" idx="1"/>
+          </p:cNvCxnSpPr>
+          <p:nvPr/>
+        </p:nvCxnSpPr>
+        <p:spPr>
+          <a:xfrm rot="5400000" flipH="1" flipV="1">
+            <a:off x="1991638" y="1993834"/>
+            <a:ext cx="647016" cy="473848"/>
+          </a:xfrm>
+          <a:prstGeom prst="bentConnector2">
+            <a:avLst/>
+          </a:prstGeom>
+          <a:ln w="19050">
+            <a:solidFill>
+              <a:schemeClr val="tx1"/>
+            </a:solidFill>
+            <a:headEnd type="arrow" w="med" len="med"/>
+            <a:tailEnd type="arrow" w="med" len="med"/>
+          </a:ln>
+        </p:spPr>
+        <p:style>
+          <a:lnRef idx="1">
+            <a:schemeClr val="accent1"/>
+          </a:lnRef>
+          <a:fillRef idx="0">
+            <a:schemeClr val="accent1"/>
+          </a:fillRef>
+          <a:effectRef idx="0">
+            <a:schemeClr val="accent1"/>
+          </a:effectRef>
+          <a:fontRef idx="minor">
+            <a:schemeClr val="tx1"/>
+          </a:fontRef>
+        </p:style>
+      </p:cxnSp>
+      <p:cxnSp>
+        <p:nvCxnSpPr>
+          <p:cNvPr id="101" name="肘形连接符 100"/>
+          <p:cNvCxnSpPr>
+            <a:stCxn id="71" idx="3"/>
+            <a:endCxn id="82" idx="0"/>
+          </p:cNvCxnSpPr>
+          <p:nvPr/>
+        </p:nvCxnSpPr>
+        <p:spPr>
+          <a:xfrm>
+            <a:off x="3727703" y="1907250"/>
+            <a:ext cx="473848" cy="648582"/>
+          </a:xfrm>
+          <a:prstGeom prst="bentConnector2">
+            <a:avLst/>
+          </a:prstGeom>
+          <a:ln w="19050">
+            <a:solidFill>
+              <a:schemeClr val="tx1"/>
+            </a:solidFill>
+            <a:headEnd type="arrow" w="med" len="med"/>
+            <a:tailEnd type="arrow" w="med" len="med"/>
+          </a:ln>
+        </p:spPr>
+        <p:style>
+          <a:lnRef idx="1">
+            <a:schemeClr val="accent1"/>
+          </a:lnRef>
+          <a:fillRef idx="0">
+            <a:schemeClr val="accent1"/>
+          </a:fillRef>
+          <a:effectRef idx="0">
+            <a:schemeClr val="accent1"/>
+          </a:effectRef>
+          <a:fontRef idx="minor">
+            <a:schemeClr val="tx1"/>
+          </a:fontRef>
+        </p:style>
+      </p:cxnSp>
+      <p:grpSp>
+        <p:nvGrpSpPr>
+          <p:cNvPr id="42" name="组合 41"/>
+          <p:cNvGrpSpPr/>
+          <p:nvPr/>
+        </p:nvGrpSpPr>
+        <p:grpSpPr>
+          <a:xfrm>
+            <a:off x="1394386" y="3932098"/>
+            <a:ext cx="1367670" cy="947504"/>
+            <a:chOff x="1361052" y="4264576"/>
+            <a:chExt cx="1367670" cy="947504"/>
+          </a:xfrm>
+        </p:grpSpPr>
+        <p:sp>
+          <p:nvSpPr>
+            <p:cNvPr id="127" name="圆角矩形 126"/>
+            <p:cNvSpPr/>
+            <p:nvPr/>
+          </p:nvSpPr>
+          <p:spPr>
+            <a:xfrm>
+              <a:off x="1361052" y="4264576"/>
+              <a:ext cx="486644" cy="947504"/>
+            </a:xfrm>
+            <a:prstGeom prst="roundRect">
+              <a:avLst/>
+            </a:prstGeom>
+            <a:solidFill>
+              <a:schemeClr val="accent6">
+                <a:lumMod val="40000"/>
+                <a:lumOff val="60000"/>
+              </a:schemeClr>
+            </a:solidFill>
+            <a:ln w="19050">
+              <a:noFill/>
+            </a:ln>
+          </p:spPr>
+          <p:style>
+            <a:lnRef idx="2">
+              <a:schemeClr val="accent1">
+                <a:shade val="50000"/>
+              </a:schemeClr>
+            </a:lnRef>
+            <a:fillRef idx="1">
+              <a:schemeClr val="accent1"/>
+            </a:fillRef>
+            <a:effectRef idx="0">
+              <a:schemeClr val="accent1"/>
+            </a:effectRef>
+            <a:fontRef idx="minor">
+              <a:schemeClr val="lt1"/>
+            </a:fontRef>
+          </p:style>
+          <p:txBody>
+            <a:bodyPr vert="vert270" rtlCol="0" anchor="ctr"/>
+            <a:lstStyle/>
+            <a:p>
+              <a:pPr algn="ctr"/>
+              <a:r>
+                <a:rPr lang="en-US" altLang="zh-CN" sz="1400" dirty="0" smtClean="0">
+                  <a:solidFill>
+                    <a:schemeClr val="tx1"/>
+                  </a:solidFill>
+                  <a:latin typeface="Times New Roman" panose="02020603050405020304" pitchFamily="18" charset="0"/>
+                  <a:cs typeface="Times New Roman" panose="02020603050405020304" pitchFamily="18" charset="0"/>
+                </a:rPr>
+                <a:t>GPU1</a:t>
+              </a:r>
+              <a:endParaRPr lang="zh-CN" altLang="en-US" sz="1400" dirty="0">
+                <a:solidFill>
+                  <a:schemeClr val="tx1"/>
+                </a:solidFill>
+                <a:latin typeface="Times New Roman" panose="02020603050405020304" pitchFamily="18" charset="0"/>
+                <a:cs typeface="Times New Roman" panose="02020603050405020304" pitchFamily="18" charset="0"/>
+              </a:endParaRPr>
+            </a:p>
+          </p:txBody>
+        </p:sp>
+        <p:sp>
+          <p:nvSpPr>
+            <p:cNvPr id="129" name="圆角矩形 128"/>
+            <p:cNvSpPr/>
+            <p:nvPr/>
+          </p:nvSpPr>
+          <p:spPr>
+            <a:xfrm>
+              <a:off x="2242078" y="4264576"/>
+              <a:ext cx="486644" cy="947504"/>
+            </a:xfrm>
+            <a:prstGeom prst="roundRect">
+              <a:avLst/>
+            </a:prstGeom>
+            <a:solidFill>
+              <a:schemeClr val="accent6">
+                <a:lumMod val="40000"/>
+                <a:lumOff val="60000"/>
+              </a:schemeClr>
+            </a:solidFill>
+            <a:ln w="19050">
+              <a:noFill/>
+            </a:ln>
+          </p:spPr>
+          <p:style>
+            <a:lnRef idx="2">
+              <a:schemeClr val="accent1">
+                <a:shade val="50000"/>
+              </a:schemeClr>
+            </a:lnRef>
+            <a:fillRef idx="1">
+              <a:schemeClr val="accent1"/>
+            </a:fillRef>
+            <a:effectRef idx="0">
+              <a:schemeClr val="accent1"/>
+            </a:effectRef>
+            <a:fontRef idx="minor">
+              <a:schemeClr val="lt1"/>
+            </a:fontRef>
+          </p:style>
+          <p:txBody>
+            <a:bodyPr vert="vert270" rtlCol="0" anchor="ctr"/>
+            <a:lstStyle/>
+            <a:p>
+              <a:pPr algn="ctr"/>
+              <a:r>
+                <a:rPr lang="en-US" altLang="zh-CN" sz="1400" dirty="0" smtClean="0">
+                  <a:solidFill>
+                    <a:schemeClr val="tx1"/>
+                  </a:solidFill>
+                  <a:latin typeface="Times New Roman" panose="02020603050405020304" pitchFamily="18" charset="0"/>
+                  <a:cs typeface="Times New Roman" panose="02020603050405020304" pitchFamily="18" charset="0"/>
+                </a:rPr>
+                <a:t>GPU2</a:t>
+              </a:r>
+              <a:endParaRPr lang="zh-CN" altLang="en-US" sz="1400" dirty="0">
+                <a:solidFill>
+                  <a:schemeClr val="tx1"/>
+                </a:solidFill>
+                <a:latin typeface="Times New Roman" panose="02020603050405020304" pitchFamily="18" charset="0"/>
+                <a:cs typeface="Times New Roman" panose="02020603050405020304" pitchFamily="18" charset="0"/>
+              </a:endParaRPr>
+            </a:p>
+          </p:txBody>
+        </p:sp>
+      </p:grpSp>
+      <p:cxnSp>
+        <p:nvCxnSpPr>
+          <p:cNvPr id="130" name="肘形连接符 129"/>
+          <p:cNvCxnSpPr>
+            <a:stCxn id="127" idx="0"/>
+          </p:cNvCxnSpPr>
+          <p:nvPr/>
+        </p:nvCxnSpPr>
+        <p:spPr>
+          <a:xfrm rot="5400000" flipH="1" flipV="1">
+            <a:off x="1514248" y="3508914"/>
+            <a:ext cx="546644" cy="299724"/>
+          </a:xfrm>
+          <a:prstGeom prst="bentConnector3">
+            <a:avLst>
+              <a:gd name="adj1" fmla="val 50000"/>
+            </a:avLst>
+          </a:prstGeom>
+          <a:ln w="19050">
+            <a:solidFill>
+              <a:schemeClr val="tx1"/>
+            </a:solidFill>
+            <a:headEnd type="arrow" w="med" len="med"/>
+            <a:tailEnd type="arrow" w="med" len="med"/>
+          </a:ln>
+        </p:spPr>
+        <p:style>
+          <a:lnRef idx="1">
+            <a:schemeClr val="accent1"/>
+          </a:lnRef>
+          <a:fillRef idx="0">
+            <a:schemeClr val="accent1"/>
+          </a:fillRef>
+          <a:effectRef idx="0">
+            <a:schemeClr val="accent1"/>
+          </a:effectRef>
+          <a:fontRef idx="minor">
+            <a:schemeClr val="tx1"/>
+          </a:fontRef>
+        </p:style>
+      </p:cxnSp>
+      <p:cxnSp>
+        <p:nvCxnSpPr>
+          <p:cNvPr id="133" name="肘形连接符 132"/>
+          <p:cNvCxnSpPr>
+            <a:stCxn id="129" idx="0"/>
+          </p:cNvCxnSpPr>
+          <p:nvPr/>
+        </p:nvCxnSpPr>
+        <p:spPr>
+          <a:xfrm rot="16200000" flipV="1">
+            <a:off x="2099189" y="3512553"/>
+            <a:ext cx="539369" cy="299722"/>
+          </a:xfrm>
+          <a:prstGeom prst="bentConnector3">
+            <a:avLst>
+              <a:gd name="adj1" fmla="val 50000"/>
+            </a:avLst>
+          </a:prstGeom>
+          <a:ln w="19050">
+            <a:solidFill>
+              <a:schemeClr val="tx1"/>
+            </a:solidFill>
+            <a:headEnd type="arrow" w="med" len="med"/>
+            <a:tailEnd type="arrow" w="med" len="med"/>
+          </a:ln>
+        </p:spPr>
+        <p:style>
+          <a:lnRef idx="1">
+            <a:schemeClr val="accent1"/>
+          </a:lnRef>
+          <a:fillRef idx="0">
+            <a:schemeClr val="accent1"/>
+          </a:fillRef>
+          <a:effectRef idx="0">
+            <a:schemeClr val="accent1"/>
+          </a:effectRef>
+          <a:fontRef idx="minor">
+            <a:schemeClr val="tx1"/>
+          </a:fontRef>
+        </p:style>
+      </p:cxnSp>
+      <p:grpSp>
+        <p:nvGrpSpPr>
+          <p:cNvPr id="140" name="组合 139"/>
+          <p:cNvGrpSpPr/>
+          <p:nvPr/>
+        </p:nvGrpSpPr>
+        <p:grpSpPr>
+          <a:xfrm>
+            <a:off x="3517716" y="3932098"/>
+            <a:ext cx="1367670" cy="947504"/>
+            <a:chOff x="1361052" y="4264576"/>
+            <a:chExt cx="1367670" cy="947504"/>
+          </a:xfrm>
+        </p:grpSpPr>
+        <p:sp>
+          <p:nvSpPr>
+            <p:cNvPr id="141" name="圆角矩形 140"/>
+            <p:cNvSpPr/>
+            <p:nvPr/>
+          </p:nvSpPr>
+          <p:spPr>
+            <a:xfrm>
+              <a:off x="1361052" y="4264576"/>
+              <a:ext cx="486644" cy="947504"/>
+            </a:xfrm>
+            <a:prstGeom prst="roundRect">
+              <a:avLst/>
+            </a:prstGeom>
+            <a:solidFill>
+              <a:schemeClr val="accent6">
+                <a:lumMod val="40000"/>
+                <a:lumOff val="60000"/>
+              </a:schemeClr>
+            </a:solidFill>
+            <a:ln w="19050">
+              <a:noFill/>
+            </a:ln>
+          </p:spPr>
+          <p:style>
+            <a:lnRef idx="2">
+              <a:schemeClr val="accent1">
+                <a:shade val="50000"/>
+              </a:schemeClr>
+            </a:lnRef>
+            <a:fillRef idx="1">
+              <a:schemeClr val="accent1"/>
+            </a:fillRef>
+            <a:effectRef idx="0">
+              <a:schemeClr val="accent1"/>
+            </a:effectRef>
+            <a:fontRef idx="minor">
+              <a:schemeClr val="lt1"/>
+            </a:fontRef>
+          </p:style>
+          <p:txBody>
+            <a:bodyPr vert="vert270" rtlCol="0" anchor="ctr"/>
+            <a:lstStyle/>
+            <a:p>
+              <a:pPr algn="ctr"/>
+              <a:r>
+                <a:rPr lang="en-US" altLang="zh-CN" sz="1400" dirty="0" smtClean="0">
+                  <a:solidFill>
+                    <a:schemeClr val="tx1"/>
+                  </a:solidFill>
+                  <a:latin typeface="Times New Roman" panose="02020603050405020304" pitchFamily="18" charset="0"/>
+                  <a:cs typeface="Times New Roman" panose="02020603050405020304" pitchFamily="18" charset="0"/>
+                </a:rPr>
+                <a:t>GPU3</a:t>
+              </a:r>
+              <a:endParaRPr lang="zh-CN" altLang="en-US" sz="1400" dirty="0">
+                <a:solidFill>
+                  <a:schemeClr val="tx1"/>
+                </a:solidFill>
+                <a:latin typeface="Times New Roman" panose="02020603050405020304" pitchFamily="18" charset="0"/>
+                <a:cs typeface="Times New Roman" panose="02020603050405020304" pitchFamily="18" charset="0"/>
+              </a:endParaRPr>
+            </a:p>
+          </p:txBody>
+        </p:sp>
+        <p:sp>
+          <p:nvSpPr>
+            <p:cNvPr id="142" name="圆角矩形 141"/>
+            <p:cNvSpPr/>
+            <p:nvPr/>
+          </p:nvSpPr>
+          <p:spPr>
+            <a:xfrm>
+              <a:off x="2242078" y="4264576"/>
+              <a:ext cx="486644" cy="947504"/>
+            </a:xfrm>
+            <a:prstGeom prst="roundRect">
+              <a:avLst/>
+            </a:prstGeom>
+            <a:solidFill>
+              <a:schemeClr val="accent6">
+                <a:lumMod val="40000"/>
+                <a:lumOff val="60000"/>
+              </a:schemeClr>
+            </a:solidFill>
+            <a:ln w="19050">
+              <a:noFill/>
+            </a:ln>
+          </p:spPr>
+          <p:style>
+            <a:lnRef idx="2">
+              <a:schemeClr val="accent1">
+                <a:shade val="50000"/>
+              </a:schemeClr>
+            </a:lnRef>
+            <a:fillRef idx="1">
+              <a:schemeClr val="accent1"/>
+            </a:fillRef>
+            <a:effectRef idx="0">
+              <a:schemeClr val="accent1"/>
+            </a:effectRef>
+            <a:fontRef idx="minor">
+              <a:schemeClr val="lt1"/>
+            </a:fontRef>
+          </p:style>
+          <p:txBody>
+            <a:bodyPr vert="vert270" rtlCol="0" anchor="ctr"/>
+            <a:lstStyle/>
+            <a:p>
+              <a:pPr algn="ctr"/>
+              <a:r>
+                <a:rPr lang="en-US" altLang="zh-CN" sz="1400" dirty="0" smtClean="0">
+                  <a:solidFill>
+                    <a:schemeClr val="tx1"/>
+                  </a:solidFill>
+                  <a:latin typeface="Times New Roman" panose="02020603050405020304" pitchFamily="18" charset="0"/>
+                  <a:cs typeface="Times New Roman" panose="02020603050405020304" pitchFamily="18" charset="0"/>
+                </a:rPr>
+                <a:t>GPU4</a:t>
+              </a:r>
+              <a:endParaRPr lang="zh-CN" altLang="en-US" sz="1400" dirty="0">
+                <a:solidFill>
+                  <a:schemeClr val="tx1"/>
+                </a:solidFill>
+                <a:latin typeface="Times New Roman" panose="02020603050405020304" pitchFamily="18" charset="0"/>
+                <a:cs typeface="Times New Roman" panose="02020603050405020304" pitchFamily="18" charset="0"/>
+              </a:endParaRPr>
+            </a:p>
+          </p:txBody>
+        </p:sp>
+      </p:grpSp>
+      <p:cxnSp>
+        <p:nvCxnSpPr>
+          <p:cNvPr id="143" name="肘形连接符 142"/>
+          <p:cNvCxnSpPr>
+            <a:stCxn id="141" idx="0"/>
+          </p:cNvCxnSpPr>
+          <p:nvPr/>
+        </p:nvCxnSpPr>
+        <p:spPr>
+          <a:xfrm rot="5400000" flipH="1" flipV="1">
+            <a:off x="3637578" y="3508914"/>
+            <a:ext cx="546644" cy="299724"/>
+          </a:xfrm>
+          <a:prstGeom prst="bentConnector3">
+            <a:avLst>
+              <a:gd name="adj1" fmla="val 50000"/>
+            </a:avLst>
+          </a:prstGeom>
+          <a:ln w="19050">
+            <a:solidFill>
+              <a:schemeClr val="tx1"/>
+            </a:solidFill>
+            <a:headEnd type="arrow" w="med" len="med"/>
+            <a:tailEnd type="arrow" w="med" len="med"/>
+          </a:ln>
+        </p:spPr>
+        <p:style>
+          <a:lnRef idx="1">
+            <a:schemeClr val="accent1"/>
+          </a:lnRef>
+          <a:fillRef idx="0">
+            <a:schemeClr val="accent1"/>
+          </a:fillRef>
+          <a:effectRef idx="0">
+            <a:schemeClr val="accent1"/>
+          </a:effectRef>
+          <a:fontRef idx="minor">
+            <a:schemeClr val="tx1"/>
+          </a:fontRef>
+        </p:style>
+      </p:cxnSp>
+      <p:cxnSp>
+        <p:nvCxnSpPr>
+          <p:cNvPr id="144" name="肘形连接符 143"/>
+          <p:cNvCxnSpPr>
+            <a:stCxn id="142" idx="0"/>
+          </p:cNvCxnSpPr>
+          <p:nvPr/>
+        </p:nvCxnSpPr>
+        <p:spPr>
+          <a:xfrm rot="16200000" flipV="1">
+            <a:off x="4222519" y="3512553"/>
+            <a:ext cx="539369" cy="299722"/>
+          </a:xfrm>
+          <a:prstGeom prst="bentConnector3">
+            <a:avLst>
+              <a:gd name="adj1" fmla="val 50000"/>
+            </a:avLst>
+          </a:prstGeom>
+          <a:ln w="19050">
+            <a:solidFill>
+              <a:schemeClr val="tx1"/>
+            </a:solidFill>
+            <a:headEnd type="arrow" w="med" len="med"/>
+            <a:tailEnd type="arrow" w="med" len="med"/>
+          </a:ln>
+        </p:spPr>
+        <p:style>
+          <a:lnRef idx="1">
+            <a:schemeClr val="accent1"/>
+          </a:lnRef>
+          <a:fillRef idx="0">
+            <a:schemeClr val="accent1"/>
+          </a:fillRef>
+          <a:effectRef idx="0">
+            <a:schemeClr val="accent1"/>
+          </a:effectRef>
+          <a:fontRef idx="minor">
+            <a:schemeClr val="tx1"/>
+          </a:fontRef>
+        </p:style>
+      </p:cxnSp>
+      <p:sp>
+        <p:nvSpPr>
+          <p:cNvPr id="145" name="矩形 144"/>
+          <p:cNvSpPr/>
+          <p:nvPr/>
+        </p:nvSpPr>
+        <p:spPr>
+          <a:xfrm>
+            <a:off x="7133458" y="1491656"/>
+            <a:ext cx="1175633" cy="831188"/>
+          </a:xfrm>
+          <a:prstGeom prst="rect">
+            <a:avLst/>
+          </a:prstGeom>
+          <a:solidFill>
+            <a:srgbClr val="CCFFCC"/>
+          </a:solidFill>
+          <a:ln w="19050">
+            <a:noFill/>
+          </a:ln>
+        </p:spPr>
+        <p:style>
+          <a:lnRef idx="2">
+            <a:schemeClr val="accent1">
+              <a:shade val="50000"/>
+            </a:schemeClr>
+          </a:lnRef>
+          <a:fillRef idx="1">
+            <a:schemeClr val="accent1"/>
+          </a:fillRef>
+          <a:effectRef idx="0">
+            <a:schemeClr val="accent1"/>
+          </a:effectRef>
+          <a:fontRef idx="minor">
+            <a:schemeClr val="lt1"/>
+          </a:fontRef>
+        </p:style>
+        <p:txBody>
+          <a:bodyPr rtlCol="0" anchor="ctr"/>
+          <a:lstStyle/>
+          <a:p>
+            <a:pPr algn="ctr"/>
+            <a:endParaRPr lang="zh-CN" altLang="en-US" sz="1600" dirty="0">
+              <a:solidFill>
+                <a:schemeClr val="tx1"/>
+              </a:solidFill>
+              <a:latin typeface="Times New Roman" panose="02020603050405020304" pitchFamily="18" charset="0"/>
+              <a:cs typeface="Times New Roman" panose="02020603050405020304" pitchFamily="18" charset="0"/>
+            </a:endParaRPr>
+          </a:p>
+        </p:txBody>
+      </p:sp>
+      <p:sp>
+        <p:nvSpPr>
+          <p:cNvPr id="146" name="文本框 145"/>
+          <p:cNvSpPr txBox="1"/>
+          <p:nvPr/>
+        </p:nvSpPr>
+        <p:spPr>
+          <a:xfrm>
+            <a:off x="7087363" y="1553307"/>
+            <a:ext cx="1257930" cy="646331"/>
+          </a:xfrm>
+          <a:prstGeom prst="rect">
+            <a:avLst/>
+          </a:prstGeom>
+          <a:noFill/>
+        </p:spPr>
+        <p:txBody>
+          <a:bodyPr wrap="square" rtlCol="0">
+            <a:spAutoFit/>
+          </a:bodyPr>
+          <a:lstStyle/>
+          <a:p>
+            <a:pPr algn="ctr"/>
+            <a:r>
+              <a:rPr lang="en-US" altLang="zh-CN" dirty="0">
+                <a:latin typeface="Times New Roman" panose="02020603050405020304" pitchFamily="18" charset="0"/>
+                <a:cs typeface="Times New Roman" panose="02020603050405020304" pitchFamily="18" charset="0"/>
+              </a:rPr>
+              <a:t>Root</a:t>
+            </a:r>
+          </a:p>
+          <a:p>
+            <a:pPr algn="ctr"/>
+            <a:r>
+              <a:rPr lang="en-US" altLang="zh-CN" dirty="0">
+                <a:latin typeface="Times New Roman" panose="02020603050405020304" pitchFamily="18" charset="0"/>
+                <a:cs typeface="Times New Roman" panose="02020603050405020304" pitchFamily="18" charset="0"/>
+              </a:rPr>
+              <a:t>Complex</a:t>
+            </a:r>
+          </a:p>
+        </p:txBody>
+      </p:sp>
+      <p:cxnSp>
+        <p:nvCxnSpPr>
+          <p:cNvPr id="147" name="直接箭头连接符 146"/>
+          <p:cNvCxnSpPr>
+            <a:endCxn id="145" idx="0"/>
+          </p:cNvCxnSpPr>
+          <p:nvPr/>
+        </p:nvCxnSpPr>
+        <p:spPr>
+          <a:xfrm flipH="1">
+            <a:off x="7721275" y="954743"/>
+            <a:ext cx="1" cy="536913"/>
+          </a:xfrm>
+          <a:prstGeom prst="straightConnector1">
+            <a:avLst/>
+          </a:prstGeom>
+          <a:ln w="19050">
+            <a:solidFill>
+              <a:schemeClr val="tx1"/>
+            </a:solidFill>
+            <a:headEnd type="arrow" w="med" len="med"/>
+            <a:tailEnd type="arrow" w="med" len="med"/>
+          </a:ln>
+        </p:spPr>
+        <p:style>
+          <a:lnRef idx="1">
+            <a:schemeClr val="accent1"/>
+          </a:lnRef>
+          <a:fillRef idx="0">
+            <a:schemeClr val="accent1"/>
+          </a:fillRef>
+          <a:effectRef idx="0">
+            <a:schemeClr val="accent1"/>
+          </a:effectRef>
+          <a:fontRef idx="minor">
+            <a:schemeClr val="tx1"/>
+          </a:fontRef>
+        </p:style>
+      </p:cxnSp>
+      <p:sp>
+        <p:nvSpPr>
+          <p:cNvPr id="148" name="矩形 147"/>
+          <p:cNvSpPr/>
+          <p:nvPr/>
+        </p:nvSpPr>
+        <p:spPr>
+          <a:xfrm>
+            <a:off x="6185762" y="2554266"/>
+            <a:ext cx="947696" cy="831188"/>
+          </a:xfrm>
+          <a:prstGeom prst="rect">
+            <a:avLst/>
+          </a:prstGeom>
+          <a:solidFill>
+            <a:srgbClr val="CCFFCC"/>
+          </a:solidFill>
+          <a:ln w="19050">
+            <a:noFill/>
+          </a:ln>
+        </p:spPr>
+        <p:style>
+          <a:lnRef idx="2">
+            <a:schemeClr val="accent1">
+              <a:shade val="50000"/>
+            </a:schemeClr>
+          </a:lnRef>
+          <a:fillRef idx="1">
+            <a:schemeClr val="accent1"/>
+          </a:fillRef>
+          <a:effectRef idx="0">
+            <a:schemeClr val="accent1"/>
+          </a:effectRef>
+          <a:fontRef idx="minor">
+            <a:schemeClr val="lt1"/>
+          </a:fontRef>
+        </p:style>
+        <p:txBody>
+          <a:bodyPr rtlCol="0" anchor="ctr"/>
+          <a:lstStyle/>
+          <a:p>
+            <a:pPr algn="ctr"/>
+            <a:endParaRPr lang="zh-CN" altLang="en-US" sz="1600" dirty="0">
+              <a:solidFill>
+                <a:schemeClr val="tx1"/>
+              </a:solidFill>
+              <a:latin typeface="Times New Roman" panose="02020603050405020304" pitchFamily="18" charset="0"/>
+              <a:cs typeface="Times New Roman" panose="02020603050405020304" pitchFamily="18" charset="0"/>
+            </a:endParaRPr>
+          </a:p>
+        </p:txBody>
+      </p:sp>
+      <p:sp>
+        <p:nvSpPr>
+          <p:cNvPr id="149" name="文本框 148"/>
+          <p:cNvSpPr txBox="1"/>
+          <p:nvPr/>
+        </p:nvSpPr>
+        <p:spPr>
+          <a:xfrm>
+            <a:off x="6233852" y="2615917"/>
+            <a:ext cx="851515" cy="646331"/>
+          </a:xfrm>
+          <a:prstGeom prst="rect">
+            <a:avLst/>
+          </a:prstGeom>
+          <a:noFill/>
+        </p:spPr>
+        <p:txBody>
+          <a:bodyPr wrap="none" rtlCol="0">
+            <a:spAutoFit/>
+          </a:bodyPr>
+          <a:lstStyle/>
+          <a:p>
+            <a:pPr algn="ctr"/>
+            <a:r>
+              <a:rPr lang="en-US" altLang="zh-CN" dirty="0" err="1" smtClean="0">
+                <a:latin typeface="Times New Roman" panose="02020603050405020304" pitchFamily="18" charset="0"/>
+                <a:cs typeface="Times New Roman" panose="02020603050405020304" pitchFamily="18" charset="0"/>
+              </a:rPr>
+              <a:t>PCIe</a:t>
+            </a:r>
+            <a:endParaRPr lang="en-US" altLang="zh-CN" dirty="0">
+              <a:latin typeface="Times New Roman" panose="02020603050405020304" pitchFamily="18" charset="0"/>
+              <a:cs typeface="Times New Roman" panose="02020603050405020304" pitchFamily="18" charset="0"/>
+            </a:endParaRPr>
+          </a:p>
+          <a:p>
+            <a:pPr algn="ctr"/>
+            <a:r>
+              <a:rPr lang="en-US" altLang="zh-CN" dirty="0" smtClean="0">
+                <a:latin typeface="Times New Roman" panose="02020603050405020304" pitchFamily="18" charset="0"/>
+                <a:cs typeface="Times New Roman" panose="02020603050405020304" pitchFamily="18" charset="0"/>
+              </a:rPr>
+              <a:t>Switch</a:t>
+            </a:r>
+            <a:endParaRPr lang="en-US" altLang="zh-CN" dirty="0">
+              <a:latin typeface="Times New Roman" panose="02020603050405020304" pitchFamily="18" charset="0"/>
+              <a:cs typeface="Times New Roman" panose="02020603050405020304" pitchFamily="18" charset="0"/>
+            </a:endParaRPr>
+          </a:p>
+        </p:txBody>
+      </p:sp>
+      <p:sp>
+        <p:nvSpPr>
+          <p:cNvPr id="150" name="矩形 149"/>
+          <p:cNvSpPr/>
+          <p:nvPr/>
+        </p:nvSpPr>
+        <p:spPr>
+          <a:xfrm>
+            <a:off x="8309091" y="2555832"/>
+            <a:ext cx="947696" cy="831188"/>
+          </a:xfrm>
+          <a:prstGeom prst="rect">
+            <a:avLst/>
+          </a:prstGeom>
+          <a:solidFill>
+            <a:srgbClr val="CCFFCC"/>
+          </a:solidFill>
+          <a:ln w="19050">
+            <a:noFill/>
+          </a:ln>
+        </p:spPr>
+        <p:style>
+          <a:lnRef idx="2">
+            <a:schemeClr val="accent1">
+              <a:shade val="50000"/>
+            </a:schemeClr>
+          </a:lnRef>
+          <a:fillRef idx="1">
+            <a:schemeClr val="accent1"/>
+          </a:fillRef>
+          <a:effectRef idx="0">
+            <a:schemeClr val="accent1"/>
+          </a:effectRef>
+          <a:fontRef idx="minor">
+            <a:schemeClr val="lt1"/>
+          </a:fontRef>
+        </p:style>
+        <p:txBody>
+          <a:bodyPr rtlCol="0" anchor="ctr"/>
+          <a:lstStyle/>
+          <a:p>
+            <a:pPr algn="ctr"/>
+            <a:endParaRPr lang="zh-CN" altLang="en-US" sz="1600" dirty="0">
+              <a:solidFill>
+                <a:schemeClr val="tx1"/>
+              </a:solidFill>
+              <a:latin typeface="Times New Roman" panose="02020603050405020304" pitchFamily="18" charset="0"/>
+              <a:cs typeface="Times New Roman" panose="02020603050405020304" pitchFamily="18" charset="0"/>
+            </a:endParaRPr>
+          </a:p>
+        </p:txBody>
+      </p:sp>
+      <p:sp>
+        <p:nvSpPr>
+          <p:cNvPr id="151" name="文本框 150"/>
+          <p:cNvSpPr txBox="1"/>
+          <p:nvPr/>
+        </p:nvSpPr>
+        <p:spPr>
+          <a:xfrm>
+            <a:off x="8357181" y="2615917"/>
+            <a:ext cx="851515" cy="646331"/>
+          </a:xfrm>
+          <a:prstGeom prst="rect">
+            <a:avLst/>
+          </a:prstGeom>
+          <a:noFill/>
+        </p:spPr>
+        <p:txBody>
+          <a:bodyPr wrap="none" rtlCol="0">
+            <a:spAutoFit/>
+          </a:bodyPr>
+          <a:lstStyle/>
+          <a:p>
+            <a:pPr algn="ctr"/>
+            <a:r>
+              <a:rPr lang="en-US" altLang="zh-CN" dirty="0" err="1" smtClean="0">
+                <a:latin typeface="Times New Roman" panose="02020603050405020304" pitchFamily="18" charset="0"/>
+                <a:cs typeface="Times New Roman" panose="02020603050405020304" pitchFamily="18" charset="0"/>
+              </a:rPr>
+              <a:t>PCIe</a:t>
+            </a:r>
+            <a:endParaRPr lang="en-US" altLang="zh-CN" dirty="0">
+              <a:latin typeface="Times New Roman" panose="02020603050405020304" pitchFamily="18" charset="0"/>
+              <a:cs typeface="Times New Roman" panose="02020603050405020304" pitchFamily="18" charset="0"/>
+            </a:endParaRPr>
+          </a:p>
+          <a:p>
+            <a:pPr algn="ctr"/>
+            <a:r>
+              <a:rPr lang="en-US" altLang="zh-CN" dirty="0" smtClean="0">
+                <a:latin typeface="Times New Roman" panose="02020603050405020304" pitchFamily="18" charset="0"/>
+                <a:cs typeface="Times New Roman" panose="02020603050405020304" pitchFamily="18" charset="0"/>
+              </a:rPr>
+              <a:t>Switch</a:t>
+            </a:r>
+            <a:endParaRPr lang="en-US" altLang="zh-CN" dirty="0">
+              <a:latin typeface="Times New Roman" panose="02020603050405020304" pitchFamily="18" charset="0"/>
+              <a:cs typeface="Times New Roman" panose="02020603050405020304" pitchFamily="18" charset="0"/>
+            </a:endParaRPr>
+          </a:p>
+        </p:txBody>
+      </p:sp>
+      <p:cxnSp>
+        <p:nvCxnSpPr>
+          <p:cNvPr id="152" name="肘形连接符 151"/>
+          <p:cNvCxnSpPr>
+            <a:stCxn id="148" idx="0"/>
+            <a:endCxn id="145" idx="1"/>
+          </p:cNvCxnSpPr>
+          <p:nvPr/>
+        </p:nvCxnSpPr>
+        <p:spPr>
+          <a:xfrm rot="5400000" flipH="1" flipV="1">
+            <a:off x="6573026" y="1993834"/>
+            <a:ext cx="647016" cy="473848"/>
+          </a:xfrm>
+          <a:prstGeom prst="bentConnector2">
+            <a:avLst/>
+          </a:prstGeom>
+          <a:ln w="19050">
+            <a:solidFill>
+              <a:schemeClr val="tx1"/>
+            </a:solidFill>
+            <a:headEnd type="arrow" w="med" len="med"/>
+            <a:tailEnd type="arrow" w="med" len="med"/>
+          </a:ln>
+        </p:spPr>
+        <p:style>
+          <a:lnRef idx="1">
+            <a:schemeClr val="accent1"/>
+          </a:lnRef>
+          <a:fillRef idx="0">
+            <a:schemeClr val="accent1"/>
+          </a:fillRef>
+          <a:effectRef idx="0">
+            <a:schemeClr val="accent1"/>
+          </a:effectRef>
+          <a:fontRef idx="minor">
+            <a:schemeClr val="tx1"/>
+          </a:fontRef>
+        </p:style>
+      </p:cxnSp>
+      <p:cxnSp>
+        <p:nvCxnSpPr>
+          <p:cNvPr id="153" name="肘形连接符 152"/>
+          <p:cNvCxnSpPr>
+            <a:stCxn id="145" idx="3"/>
+            <a:endCxn id="150" idx="0"/>
+          </p:cNvCxnSpPr>
+          <p:nvPr/>
+        </p:nvCxnSpPr>
+        <p:spPr>
+          <a:xfrm>
+            <a:off x="8309091" y="1907250"/>
+            <a:ext cx="473848" cy="648582"/>
+          </a:xfrm>
+          <a:prstGeom prst="bentConnector2">
+            <a:avLst/>
+          </a:prstGeom>
+          <a:ln w="19050">
+            <a:solidFill>
+              <a:schemeClr val="tx1"/>
+            </a:solidFill>
+            <a:headEnd type="arrow" w="med" len="med"/>
+            <a:tailEnd type="arrow" w="med" len="med"/>
+          </a:ln>
+        </p:spPr>
+        <p:style>
+          <a:lnRef idx="1">
+            <a:schemeClr val="accent1"/>
+          </a:lnRef>
+          <a:fillRef idx="0">
+            <a:schemeClr val="accent1"/>
+          </a:fillRef>
+          <a:effectRef idx="0">
+            <a:schemeClr val="accent1"/>
+          </a:effectRef>
+          <a:fontRef idx="minor">
+            <a:schemeClr val="tx1"/>
+          </a:fontRef>
+        </p:style>
+      </p:cxnSp>
+      <p:grpSp>
+        <p:nvGrpSpPr>
+          <p:cNvPr id="154" name="组合 153"/>
+          <p:cNvGrpSpPr/>
+          <p:nvPr/>
+        </p:nvGrpSpPr>
+        <p:grpSpPr>
+          <a:xfrm>
+            <a:off x="5975774" y="3932098"/>
+            <a:ext cx="1367670" cy="947504"/>
+            <a:chOff x="1361052" y="4264576"/>
+            <a:chExt cx="1367670" cy="947504"/>
+          </a:xfrm>
+        </p:grpSpPr>
+        <p:sp>
+          <p:nvSpPr>
+            <p:cNvPr id="155" name="圆角矩形 154"/>
+            <p:cNvSpPr/>
+            <p:nvPr/>
+          </p:nvSpPr>
+          <p:spPr>
+            <a:xfrm>
+              <a:off x="1361052" y="4264576"/>
+              <a:ext cx="486644" cy="947504"/>
+            </a:xfrm>
+            <a:prstGeom prst="roundRect">
+              <a:avLst/>
+            </a:prstGeom>
+            <a:solidFill>
+              <a:schemeClr val="accent6">
+                <a:lumMod val="40000"/>
+                <a:lumOff val="60000"/>
+              </a:schemeClr>
+            </a:solidFill>
+            <a:ln w="19050">
+              <a:noFill/>
+            </a:ln>
+          </p:spPr>
+          <p:style>
+            <a:lnRef idx="2">
+              <a:schemeClr val="accent1">
+                <a:shade val="50000"/>
+              </a:schemeClr>
+            </a:lnRef>
+            <a:fillRef idx="1">
+              <a:schemeClr val="accent1"/>
+            </a:fillRef>
+            <a:effectRef idx="0">
+              <a:schemeClr val="accent1"/>
+            </a:effectRef>
+            <a:fontRef idx="minor">
+              <a:schemeClr val="lt1"/>
+            </a:fontRef>
+          </p:style>
+          <p:txBody>
+            <a:bodyPr vert="vert270" rtlCol="0" anchor="ctr"/>
+            <a:lstStyle/>
+            <a:p>
+              <a:pPr algn="ctr"/>
+              <a:r>
+                <a:rPr lang="en-US" altLang="zh-CN" sz="1400" dirty="0" smtClean="0">
+                  <a:solidFill>
+                    <a:schemeClr val="tx1"/>
+                  </a:solidFill>
+                  <a:latin typeface="Times New Roman" panose="02020603050405020304" pitchFamily="18" charset="0"/>
+                  <a:cs typeface="Times New Roman" panose="02020603050405020304" pitchFamily="18" charset="0"/>
+                </a:rPr>
+                <a:t>GPU5</a:t>
+              </a:r>
+              <a:endParaRPr lang="zh-CN" altLang="en-US" sz="1400" dirty="0">
+                <a:solidFill>
+                  <a:schemeClr val="tx1"/>
+                </a:solidFill>
+                <a:latin typeface="Times New Roman" panose="02020603050405020304" pitchFamily="18" charset="0"/>
+                <a:cs typeface="Times New Roman" panose="02020603050405020304" pitchFamily="18" charset="0"/>
+              </a:endParaRPr>
+            </a:p>
+          </p:txBody>
+        </p:sp>
+        <p:sp>
+          <p:nvSpPr>
+            <p:cNvPr id="156" name="圆角矩形 155"/>
+            <p:cNvSpPr/>
+            <p:nvPr/>
+          </p:nvSpPr>
+          <p:spPr>
+            <a:xfrm>
+              <a:off x="2242078" y="4264576"/>
+              <a:ext cx="486644" cy="947504"/>
+            </a:xfrm>
+            <a:prstGeom prst="roundRect">
+              <a:avLst/>
+            </a:prstGeom>
+            <a:solidFill>
+              <a:schemeClr val="accent6">
+                <a:lumMod val="40000"/>
+                <a:lumOff val="60000"/>
+              </a:schemeClr>
+            </a:solidFill>
+            <a:ln w="19050">
+              <a:noFill/>
+            </a:ln>
+          </p:spPr>
+          <p:style>
+            <a:lnRef idx="2">
+              <a:schemeClr val="accent1">
+                <a:shade val="50000"/>
+              </a:schemeClr>
+            </a:lnRef>
+            <a:fillRef idx="1">
+              <a:schemeClr val="accent1"/>
+            </a:fillRef>
+            <a:effectRef idx="0">
+              <a:schemeClr val="accent1"/>
+            </a:effectRef>
+            <a:fontRef idx="minor">
+              <a:schemeClr val="lt1"/>
+            </a:fontRef>
+          </p:style>
+          <p:txBody>
+            <a:bodyPr vert="vert270" rtlCol="0" anchor="ctr"/>
+            <a:lstStyle/>
+            <a:p>
+              <a:pPr algn="ctr"/>
+              <a:r>
+                <a:rPr lang="en-US" altLang="zh-CN" sz="1400" dirty="0" smtClean="0">
+                  <a:solidFill>
+                    <a:schemeClr val="tx1"/>
+                  </a:solidFill>
+                  <a:latin typeface="Times New Roman" panose="02020603050405020304" pitchFamily="18" charset="0"/>
+                  <a:cs typeface="Times New Roman" panose="02020603050405020304" pitchFamily="18" charset="0"/>
+                </a:rPr>
+                <a:t>GPU6</a:t>
+              </a:r>
+              <a:endParaRPr lang="zh-CN" altLang="en-US" sz="1400" dirty="0">
+                <a:solidFill>
+                  <a:schemeClr val="tx1"/>
+                </a:solidFill>
+                <a:latin typeface="Times New Roman" panose="02020603050405020304" pitchFamily="18" charset="0"/>
+                <a:cs typeface="Times New Roman" panose="02020603050405020304" pitchFamily="18" charset="0"/>
+              </a:endParaRPr>
+            </a:p>
+          </p:txBody>
+        </p:sp>
+      </p:grpSp>
+      <p:cxnSp>
+        <p:nvCxnSpPr>
+          <p:cNvPr id="157" name="肘形连接符 156"/>
+          <p:cNvCxnSpPr>
+            <a:stCxn id="155" idx="0"/>
+          </p:cNvCxnSpPr>
+          <p:nvPr/>
+        </p:nvCxnSpPr>
+        <p:spPr>
+          <a:xfrm rot="5400000" flipH="1" flipV="1">
+            <a:off x="6095636" y="3508914"/>
+            <a:ext cx="546644" cy="299724"/>
+          </a:xfrm>
+          <a:prstGeom prst="bentConnector3">
+            <a:avLst>
+              <a:gd name="adj1" fmla="val 50000"/>
+            </a:avLst>
+          </a:prstGeom>
+          <a:ln w="19050">
+            <a:solidFill>
+              <a:schemeClr val="tx1"/>
+            </a:solidFill>
+            <a:headEnd type="arrow" w="med" len="med"/>
+            <a:tailEnd type="arrow" w="med" len="med"/>
+          </a:ln>
+        </p:spPr>
+        <p:style>
+          <a:lnRef idx="1">
+            <a:schemeClr val="accent1"/>
+          </a:lnRef>
+          <a:fillRef idx="0">
+            <a:schemeClr val="accent1"/>
+          </a:fillRef>
+          <a:effectRef idx="0">
+            <a:schemeClr val="accent1"/>
+          </a:effectRef>
+          <a:fontRef idx="minor">
+            <a:schemeClr val="tx1"/>
+          </a:fontRef>
+        </p:style>
+      </p:cxnSp>
+      <p:cxnSp>
+        <p:nvCxnSpPr>
+          <p:cNvPr id="158" name="肘形连接符 157"/>
+          <p:cNvCxnSpPr>
+            <a:stCxn id="156" idx="0"/>
+          </p:cNvCxnSpPr>
+          <p:nvPr/>
+        </p:nvCxnSpPr>
+        <p:spPr>
+          <a:xfrm rot="16200000" flipV="1">
+            <a:off x="6680577" y="3512553"/>
+            <a:ext cx="539369" cy="299722"/>
+          </a:xfrm>
+          <a:prstGeom prst="bentConnector3">
+            <a:avLst>
+              <a:gd name="adj1" fmla="val 50000"/>
+            </a:avLst>
+          </a:prstGeom>
+          <a:ln w="19050">
+            <a:solidFill>
+              <a:schemeClr val="tx1"/>
+            </a:solidFill>
+            <a:headEnd type="arrow" w="med" len="med"/>
+            <a:tailEnd type="arrow" w="med" len="med"/>
+          </a:ln>
+        </p:spPr>
+        <p:style>
+          <a:lnRef idx="1">
+            <a:schemeClr val="accent1"/>
+          </a:lnRef>
+          <a:fillRef idx="0">
+            <a:schemeClr val="accent1"/>
+          </a:fillRef>
+          <a:effectRef idx="0">
+            <a:schemeClr val="accent1"/>
+          </a:effectRef>
+          <a:fontRef idx="minor">
+            <a:schemeClr val="tx1"/>
+          </a:fontRef>
+        </p:style>
+      </p:cxnSp>
+      <p:grpSp>
+        <p:nvGrpSpPr>
+          <p:cNvPr id="159" name="组合 158"/>
+          <p:cNvGrpSpPr/>
+          <p:nvPr/>
+        </p:nvGrpSpPr>
+        <p:grpSpPr>
+          <a:xfrm>
+            <a:off x="8099104" y="3932098"/>
+            <a:ext cx="1367670" cy="947504"/>
+            <a:chOff x="1361052" y="4264576"/>
+            <a:chExt cx="1367670" cy="947504"/>
+          </a:xfrm>
+        </p:grpSpPr>
+        <p:sp>
+          <p:nvSpPr>
+            <p:cNvPr id="160" name="圆角矩形 159"/>
+            <p:cNvSpPr/>
+            <p:nvPr/>
+          </p:nvSpPr>
+          <p:spPr>
+            <a:xfrm>
+              <a:off x="1361052" y="4264576"/>
+              <a:ext cx="486644" cy="947504"/>
+            </a:xfrm>
+            <a:prstGeom prst="roundRect">
+              <a:avLst/>
+            </a:prstGeom>
+            <a:solidFill>
+              <a:schemeClr val="accent6">
+                <a:lumMod val="40000"/>
+                <a:lumOff val="60000"/>
+              </a:schemeClr>
+            </a:solidFill>
+            <a:ln w="19050">
+              <a:noFill/>
+            </a:ln>
+          </p:spPr>
+          <p:style>
+            <a:lnRef idx="2">
+              <a:schemeClr val="accent1">
+                <a:shade val="50000"/>
+              </a:schemeClr>
+            </a:lnRef>
+            <a:fillRef idx="1">
+              <a:schemeClr val="accent1"/>
+            </a:fillRef>
+            <a:effectRef idx="0">
+              <a:schemeClr val="accent1"/>
+            </a:effectRef>
+            <a:fontRef idx="minor">
+              <a:schemeClr val="lt1"/>
+            </a:fontRef>
+          </p:style>
+          <p:txBody>
+            <a:bodyPr vert="vert270" rtlCol="0" anchor="ctr"/>
+            <a:lstStyle/>
+            <a:p>
+              <a:pPr algn="ctr"/>
+              <a:r>
+                <a:rPr lang="en-US" altLang="zh-CN" sz="1400" dirty="0" smtClean="0">
+                  <a:solidFill>
+                    <a:schemeClr val="tx1"/>
+                  </a:solidFill>
+                  <a:latin typeface="Times New Roman" panose="02020603050405020304" pitchFamily="18" charset="0"/>
+                  <a:cs typeface="Times New Roman" panose="02020603050405020304" pitchFamily="18" charset="0"/>
+                </a:rPr>
+                <a:t>GPU7</a:t>
+              </a:r>
+              <a:endParaRPr lang="zh-CN" altLang="en-US" sz="1400" dirty="0">
+                <a:solidFill>
+                  <a:schemeClr val="tx1"/>
+                </a:solidFill>
+                <a:latin typeface="Times New Roman" panose="02020603050405020304" pitchFamily="18" charset="0"/>
+                <a:cs typeface="Times New Roman" panose="02020603050405020304" pitchFamily="18" charset="0"/>
+              </a:endParaRPr>
+            </a:p>
+          </p:txBody>
+        </p:sp>
+        <p:sp>
+          <p:nvSpPr>
+            <p:cNvPr id="161" name="圆角矩形 160"/>
+            <p:cNvSpPr/>
+            <p:nvPr/>
+          </p:nvSpPr>
+          <p:spPr>
+            <a:xfrm>
+              <a:off x="2242078" y="4264576"/>
+              <a:ext cx="486644" cy="947504"/>
+            </a:xfrm>
+            <a:prstGeom prst="roundRect">
+              <a:avLst/>
+            </a:prstGeom>
+            <a:solidFill>
+              <a:schemeClr val="accent6">
+                <a:lumMod val="40000"/>
+                <a:lumOff val="60000"/>
+              </a:schemeClr>
+            </a:solidFill>
+            <a:ln w="19050">
+              <a:noFill/>
+            </a:ln>
+          </p:spPr>
+          <p:style>
+            <a:lnRef idx="2">
+              <a:schemeClr val="accent1">
+                <a:shade val="50000"/>
+              </a:schemeClr>
+            </a:lnRef>
+            <a:fillRef idx="1">
+              <a:schemeClr val="accent1"/>
+            </a:fillRef>
+            <a:effectRef idx="0">
+              <a:schemeClr val="accent1"/>
+            </a:effectRef>
+            <a:fontRef idx="minor">
+              <a:schemeClr val="lt1"/>
+            </a:fontRef>
+          </p:style>
+          <p:txBody>
+            <a:bodyPr vert="vert270" rtlCol="0" anchor="ctr"/>
+            <a:lstStyle/>
+            <a:p>
+              <a:pPr algn="ctr"/>
+              <a:r>
+                <a:rPr lang="en-US" altLang="zh-CN" sz="1400" dirty="0" smtClean="0">
+                  <a:solidFill>
+                    <a:schemeClr val="tx1"/>
+                  </a:solidFill>
+                  <a:latin typeface="Times New Roman" panose="02020603050405020304" pitchFamily="18" charset="0"/>
+                  <a:cs typeface="Times New Roman" panose="02020603050405020304" pitchFamily="18" charset="0"/>
+                </a:rPr>
+                <a:t>GPU8</a:t>
+              </a:r>
+              <a:endParaRPr lang="zh-CN" altLang="en-US" sz="1400" dirty="0">
+                <a:solidFill>
+                  <a:schemeClr val="tx1"/>
+                </a:solidFill>
+                <a:latin typeface="Times New Roman" panose="02020603050405020304" pitchFamily="18" charset="0"/>
+                <a:cs typeface="Times New Roman" panose="02020603050405020304" pitchFamily="18" charset="0"/>
+              </a:endParaRPr>
+            </a:p>
+          </p:txBody>
+        </p:sp>
+      </p:grpSp>
+      <p:cxnSp>
+        <p:nvCxnSpPr>
+          <p:cNvPr id="162" name="肘形连接符 161"/>
+          <p:cNvCxnSpPr>
+            <a:stCxn id="160" idx="0"/>
+          </p:cNvCxnSpPr>
+          <p:nvPr/>
+        </p:nvCxnSpPr>
+        <p:spPr>
+          <a:xfrm rot="5400000" flipH="1" flipV="1">
+            <a:off x="8218966" y="3508914"/>
+            <a:ext cx="546644" cy="299724"/>
+          </a:xfrm>
+          <a:prstGeom prst="bentConnector3">
+            <a:avLst>
+              <a:gd name="adj1" fmla="val 50000"/>
+            </a:avLst>
+          </a:prstGeom>
+          <a:ln w="19050">
+            <a:solidFill>
+              <a:schemeClr val="tx1"/>
+            </a:solidFill>
+            <a:headEnd type="arrow" w="med" len="med"/>
+            <a:tailEnd type="arrow" w="med" len="med"/>
+          </a:ln>
+        </p:spPr>
+        <p:style>
+          <a:lnRef idx="1">
+            <a:schemeClr val="accent1"/>
+          </a:lnRef>
+          <a:fillRef idx="0">
+            <a:schemeClr val="accent1"/>
+          </a:fillRef>
+          <a:effectRef idx="0">
+            <a:schemeClr val="accent1"/>
+          </a:effectRef>
+          <a:fontRef idx="minor">
+            <a:schemeClr val="tx1"/>
+          </a:fontRef>
+        </p:style>
+      </p:cxnSp>
+      <p:cxnSp>
+        <p:nvCxnSpPr>
+          <p:cNvPr id="163" name="肘形连接符 162"/>
+          <p:cNvCxnSpPr>
+            <a:stCxn id="161" idx="0"/>
+          </p:cNvCxnSpPr>
+          <p:nvPr/>
+        </p:nvCxnSpPr>
+        <p:spPr>
+          <a:xfrm rot="16200000" flipV="1">
+            <a:off x="8803907" y="3512553"/>
+            <a:ext cx="539369" cy="299722"/>
+          </a:xfrm>
+          <a:prstGeom prst="bentConnector3">
+            <a:avLst>
+              <a:gd name="adj1" fmla="val 50000"/>
+            </a:avLst>
+          </a:prstGeom>
+          <a:ln w="19050">
+            <a:solidFill>
+              <a:schemeClr val="tx1"/>
+            </a:solidFill>
+            <a:headEnd type="arrow" w="med" len="med"/>
+            <a:tailEnd type="arrow" w="med" len="med"/>
+          </a:ln>
+        </p:spPr>
+        <p:style>
+          <a:lnRef idx="1">
+            <a:schemeClr val="accent1"/>
+          </a:lnRef>
+          <a:fillRef idx="0">
+            <a:schemeClr val="accent1"/>
+          </a:fillRef>
+          <a:effectRef idx="0">
+            <a:schemeClr val="accent1"/>
+          </a:effectRef>
+          <a:fontRef idx="minor">
+            <a:schemeClr val="tx1"/>
+          </a:fontRef>
+        </p:style>
+      </p:cxnSp>
+      <p:sp>
+        <p:nvSpPr>
+          <p:cNvPr id="165" name="文本框 164"/>
+          <p:cNvSpPr txBox="1"/>
+          <p:nvPr/>
+        </p:nvSpPr>
+        <p:spPr>
+          <a:xfrm>
+            <a:off x="1212054" y="3349973"/>
+            <a:ext cx="543739" cy="307777"/>
+          </a:xfrm>
+          <a:prstGeom prst="rect">
+            <a:avLst/>
+          </a:prstGeom>
+          <a:noFill/>
+          <a:ln w="19050">
+            <a:noFill/>
+          </a:ln>
+        </p:spPr>
+        <p:txBody>
+          <a:bodyPr wrap="none" rtlCol="0">
+            <a:spAutoFit/>
+          </a:bodyPr>
+          <a:lstStyle/>
+          <a:p>
+            <a:r>
+              <a:rPr lang="en-US" altLang="zh-CN" sz="1400" dirty="0" err="1" smtClean="0">
+                <a:latin typeface="Times New Roman" panose="02020603050405020304" pitchFamily="18" charset="0"/>
+                <a:cs typeface="Times New Roman" panose="02020603050405020304" pitchFamily="18" charset="0"/>
+              </a:rPr>
+              <a:t>PCIe</a:t>
+            </a:r>
+            <a:endParaRPr lang="zh-CN" altLang="en-US" sz="1400" dirty="0">
+              <a:latin typeface="Times New Roman" panose="02020603050405020304" pitchFamily="18" charset="0"/>
+              <a:cs typeface="Times New Roman" panose="02020603050405020304" pitchFamily="18" charset="0"/>
+            </a:endParaRPr>
+          </a:p>
+        </p:txBody>
+      </p:sp>
+      <p:sp>
+        <p:nvSpPr>
+          <p:cNvPr id="166" name="文本框 165"/>
+          <p:cNvSpPr txBox="1"/>
+          <p:nvPr/>
+        </p:nvSpPr>
+        <p:spPr>
+          <a:xfrm>
+            <a:off x="2290053" y="3349973"/>
+            <a:ext cx="543739" cy="307777"/>
+          </a:xfrm>
+          <a:prstGeom prst="rect">
+            <a:avLst/>
+          </a:prstGeom>
+          <a:noFill/>
+          <a:ln w="19050">
+            <a:noFill/>
+          </a:ln>
+        </p:spPr>
+        <p:txBody>
+          <a:bodyPr wrap="none" rtlCol="0">
+            <a:spAutoFit/>
+          </a:bodyPr>
+          <a:lstStyle/>
+          <a:p>
+            <a:r>
+              <a:rPr lang="en-US" altLang="zh-CN" sz="1400" dirty="0" err="1" smtClean="0">
+                <a:latin typeface="Times New Roman" panose="02020603050405020304" pitchFamily="18" charset="0"/>
+                <a:cs typeface="Times New Roman" panose="02020603050405020304" pitchFamily="18" charset="0"/>
+              </a:rPr>
+              <a:t>PCIe</a:t>
+            </a:r>
+            <a:endParaRPr lang="zh-CN" altLang="en-US" sz="1400" dirty="0">
+              <a:latin typeface="Times New Roman" panose="02020603050405020304" pitchFamily="18" charset="0"/>
+              <a:cs typeface="Times New Roman" panose="02020603050405020304" pitchFamily="18" charset="0"/>
+            </a:endParaRPr>
+          </a:p>
+        </p:txBody>
+      </p:sp>
+      <p:sp>
+        <p:nvSpPr>
+          <p:cNvPr id="167" name="文本框 166"/>
+          <p:cNvSpPr txBox="1"/>
+          <p:nvPr/>
+        </p:nvSpPr>
+        <p:spPr>
+          <a:xfrm>
+            <a:off x="3344870" y="3359382"/>
+            <a:ext cx="543739" cy="307777"/>
+          </a:xfrm>
+          <a:prstGeom prst="rect">
+            <a:avLst/>
+          </a:prstGeom>
+          <a:noFill/>
+          <a:ln w="19050">
+            <a:noFill/>
+          </a:ln>
+        </p:spPr>
+        <p:txBody>
+          <a:bodyPr wrap="none" rtlCol="0">
+            <a:spAutoFit/>
+          </a:bodyPr>
+          <a:lstStyle/>
+          <a:p>
+            <a:r>
+              <a:rPr lang="en-US" altLang="zh-CN" sz="1400" dirty="0" err="1" smtClean="0">
+                <a:latin typeface="Times New Roman" panose="02020603050405020304" pitchFamily="18" charset="0"/>
+                <a:cs typeface="Times New Roman" panose="02020603050405020304" pitchFamily="18" charset="0"/>
+              </a:rPr>
+              <a:t>PCIe</a:t>
+            </a:r>
+            <a:endParaRPr lang="zh-CN" altLang="en-US" sz="1400" dirty="0">
+              <a:latin typeface="Times New Roman" panose="02020603050405020304" pitchFamily="18" charset="0"/>
+              <a:cs typeface="Times New Roman" panose="02020603050405020304" pitchFamily="18" charset="0"/>
+            </a:endParaRPr>
+          </a:p>
+        </p:txBody>
+      </p:sp>
+      <p:sp>
+        <p:nvSpPr>
+          <p:cNvPr id="168" name="文本框 167"/>
+          <p:cNvSpPr txBox="1"/>
+          <p:nvPr/>
+        </p:nvSpPr>
+        <p:spPr>
+          <a:xfrm>
+            <a:off x="4422869" y="3359382"/>
+            <a:ext cx="543739" cy="307777"/>
+          </a:xfrm>
+          <a:prstGeom prst="rect">
+            <a:avLst/>
+          </a:prstGeom>
+          <a:noFill/>
+          <a:ln w="19050">
+            <a:noFill/>
+          </a:ln>
+        </p:spPr>
+        <p:txBody>
+          <a:bodyPr wrap="none" rtlCol="0">
+            <a:spAutoFit/>
+          </a:bodyPr>
+          <a:lstStyle/>
+          <a:p>
+            <a:r>
+              <a:rPr lang="en-US" altLang="zh-CN" sz="1400" dirty="0" err="1" smtClean="0">
+                <a:latin typeface="Times New Roman" panose="02020603050405020304" pitchFamily="18" charset="0"/>
+                <a:cs typeface="Times New Roman" panose="02020603050405020304" pitchFamily="18" charset="0"/>
+              </a:rPr>
+              <a:t>PCIe</a:t>
+            </a:r>
+            <a:endParaRPr lang="zh-CN" altLang="en-US" sz="1400" dirty="0">
+              <a:latin typeface="Times New Roman" panose="02020603050405020304" pitchFamily="18" charset="0"/>
+              <a:cs typeface="Times New Roman" panose="02020603050405020304" pitchFamily="18" charset="0"/>
+            </a:endParaRPr>
+          </a:p>
+        </p:txBody>
+      </p:sp>
+      <p:sp>
+        <p:nvSpPr>
+          <p:cNvPr id="169" name="文本框 168"/>
+          <p:cNvSpPr txBox="1"/>
+          <p:nvPr/>
+        </p:nvSpPr>
+        <p:spPr>
+          <a:xfrm>
+            <a:off x="5794572" y="3359382"/>
+            <a:ext cx="543739" cy="307777"/>
+          </a:xfrm>
+          <a:prstGeom prst="rect">
+            <a:avLst/>
+          </a:prstGeom>
+          <a:noFill/>
+          <a:ln w="19050">
+            <a:noFill/>
+          </a:ln>
+        </p:spPr>
+        <p:txBody>
+          <a:bodyPr wrap="none" rtlCol="0">
+            <a:spAutoFit/>
+          </a:bodyPr>
+          <a:lstStyle/>
+          <a:p>
+            <a:r>
+              <a:rPr lang="en-US" altLang="zh-CN" sz="1400" dirty="0" err="1" smtClean="0">
+                <a:latin typeface="Times New Roman" panose="02020603050405020304" pitchFamily="18" charset="0"/>
+                <a:cs typeface="Times New Roman" panose="02020603050405020304" pitchFamily="18" charset="0"/>
+              </a:rPr>
+              <a:t>PCIe</a:t>
+            </a:r>
+            <a:endParaRPr lang="zh-CN" altLang="en-US" sz="1400" dirty="0">
+              <a:latin typeface="Times New Roman" panose="02020603050405020304" pitchFamily="18" charset="0"/>
+              <a:cs typeface="Times New Roman" panose="02020603050405020304" pitchFamily="18" charset="0"/>
+            </a:endParaRPr>
+          </a:p>
+        </p:txBody>
+      </p:sp>
+      <p:sp>
+        <p:nvSpPr>
+          <p:cNvPr id="170" name="文本框 169"/>
+          <p:cNvSpPr txBox="1"/>
+          <p:nvPr/>
+        </p:nvSpPr>
+        <p:spPr>
+          <a:xfrm>
+            <a:off x="6872571" y="3359382"/>
+            <a:ext cx="543739" cy="307777"/>
+          </a:xfrm>
+          <a:prstGeom prst="rect">
+            <a:avLst/>
+          </a:prstGeom>
+          <a:noFill/>
+          <a:ln w="19050">
+            <a:noFill/>
+          </a:ln>
+        </p:spPr>
+        <p:txBody>
+          <a:bodyPr wrap="none" rtlCol="0">
+            <a:spAutoFit/>
+          </a:bodyPr>
+          <a:lstStyle/>
+          <a:p>
+            <a:r>
+              <a:rPr lang="en-US" altLang="zh-CN" sz="1400" dirty="0" err="1" smtClean="0">
+                <a:latin typeface="Times New Roman" panose="02020603050405020304" pitchFamily="18" charset="0"/>
+                <a:cs typeface="Times New Roman" panose="02020603050405020304" pitchFamily="18" charset="0"/>
+              </a:rPr>
+              <a:t>PCIe</a:t>
+            </a:r>
+            <a:endParaRPr lang="zh-CN" altLang="en-US" sz="1400" dirty="0">
+              <a:latin typeface="Times New Roman" panose="02020603050405020304" pitchFamily="18" charset="0"/>
+              <a:cs typeface="Times New Roman" panose="02020603050405020304" pitchFamily="18" charset="0"/>
+            </a:endParaRPr>
+          </a:p>
+        </p:txBody>
+      </p:sp>
+      <p:sp>
+        <p:nvSpPr>
+          <p:cNvPr id="171" name="文本框 170"/>
+          <p:cNvSpPr txBox="1"/>
+          <p:nvPr/>
+        </p:nvSpPr>
+        <p:spPr>
+          <a:xfrm>
+            <a:off x="7951667" y="3349973"/>
+            <a:ext cx="543739" cy="307777"/>
+          </a:xfrm>
+          <a:prstGeom prst="rect">
+            <a:avLst/>
+          </a:prstGeom>
+          <a:noFill/>
+          <a:ln w="19050">
+            <a:noFill/>
+          </a:ln>
+        </p:spPr>
+        <p:txBody>
+          <a:bodyPr wrap="none" rtlCol="0">
+            <a:spAutoFit/>
+          </a:bodyPr>
+          <a:lstStyle/>
+          <a:p>
+            <a:r>
+              <a:rPr lang="en-US" altLang="zh-CN" sz="1400" dirty="0" err="1" smtClean="0">
+                <a:latin typeface="Times New Roman" panose="02020603050405020304" pitchFamily="18" charset="0"/>
+                <a:cs typeface="Times New Roman" panose="02020603050405020304" pitchFamily="18" charset="0"/>
+              </a:rPr>
+              <a:t>PCIe</a:t>
+            </a:r>
+            <a:endParaRPr lang="zh-CN" altLang="en-US" sz="1400" dirty="0">
+              <a:latin typeface="Times New Roman" panose="02020603050405020304" pitchFamily="18" charset="0"/>
+              <a:cs typeface="Times New Roman" panose="02020603050405020304" pitchFamily="18" charset="0"/>
+            </a:endParaRPr>
+          </a:p>
+        </p:txBody>
+      </p:sp>
+      <p:sp>
+        <p:nvSpPr>
+          <p:cNvPr id="172" name="文本框 171"/>
+          <p:cNvSpPr txBox="1"/>
+          <p:nvPr/>
+        </p:nvSpPr>
+        <p:spPr>
+          <a:xfrm>
+            <a:off x="9029666" y="3349973"/>
+            <a:ext cx="543739" cy="307777"/>
+          </a:xfrm>
+          <a:prstGeom prst="rect">
+            <a:avLst/>
+          </a:prstGeom>
+          <a:noFill/>
+          <a:ln w="19050">
+            <a:noFill/>
+          </a:ln>
+        </p:spPr>
+        <p:txBody>
+          <a:bodyPr wrap="none" rtlCol="0">
+            <a:spAutoFit/>
+          </a:bodyPr>
+          <a:lstStyle/>
+          <a:p>
+            <a:r>
+              <a:rPr lang="en-US" altLang="zh-CN" sz="1400" dirty="0" err="1" smtClean="0">
+                <a:latin typeface="Times New Roman" panose="02020603050405020304" pitchFamily="18" charset="0"/>
+                <a:cs typeface="Times New Roman" panose="02020603050405020304" pitchFamily="18" charset="0"/>
+              </a:rPr>
+              <a:t>PCIe</a:t>
+            </a:r>
+            <a:endParaRPr lang="zh-CN" altLang="en-US" sz="1400" dirty="0">
+              <a:latin typeface="Times New Roman" panose="02020603050405020304" pitchFamily="18" charset="0"/>
+              <a:cs typeface="Times New Roman" panose="02020603050405020304" pitchFamily="18" charset="0"/>
+            </a:endParaRPr>
+          </a:p>
+        </p:txBody>
+      </p:sp>
+      <p:sp>
+        <p:nvSpPr>
+          <p:cNvPr id="173" name="文本框 172"/>
+          <p:cNvSpPr txBox="1"/>
+          <p:nvPr/>
+        </p:nvSpPr>
+        <p:spPr>
+          <a:xfrm>
+            <a:off x="1937432" y="1550956"/>
+            <a:ext cx="543739" cy="307777"/>
+          </a:xfrm>
+          <a:prstGeom prst="rect">
+            <a:avLst/>
+          </a:prstGeom>
+          <a:noFill/>
+          <a:ln w="19050">
+            <a:noFill/>
+          </a:ln>
+        </p:spPr>
+        <p:txBody>
+          <a:bodyPr wrap="none" rtlCol="0">
+            <a:spAutoFit/>
+          </a:bodyPr>
+          <a:lstStyle/>
+          <a:p>
+            <a:r>
+              <a:rPr lang="en-US" altLang="zh-CN" sz="1400" dirty="0" err="1" smtClean="0">
+                <a:latin typeface="Times New Roman" panose="02020603050405020304" pitchFamily="18" charset="0"/>
+                <a:cs typeface="Times New Roman" panose="02020603050405020304" pitchFamily="18" charset="0"/>
+              </a:rPr>
+              <a:t>PCIe</a:t>
+            </a:r>
+            <a:endParaRPr lang="zh-CN" altLang="en-US" sz="1400" dirty="0">
+              <a:latin typeface="Times New Roman" panose="02020603050405020304" pitchFamily="18" charset="0"/>
+              <a:cs typeface="Times New Roman" panose="02020603050405020304" pitchFamily="18" charset="0"/>
+            </a:endParaRPr>
+          </a:p>
+        </p:txBody>
+      </p:sp>
+      <p:sp>
+        <p:nvSpPr>
+          <p:cNvPr id="174" name="文本框 173"/>
+          <p:cNvSpPr txBox="1"/>
+          <p:nvPr/>
+        </p:nvSpPr>
+        <p:spPr>
+          <a:xfrm>
+            <a:off x="3779044" y="1548283"/>
+            <a:ext cx="543739" cy="307777"/>
+          </a:xfrm>
+          <a:prstGeom prst="rect">
+            <a:avLst/>
+          </a:prstGeom>
+          <a:noFill/>
+          <a:ln w="19050">
+            <a:noFill/>
+          </a:ln>
+        </p:spPr>
+        <p:txBody>
+          <a:bodyPr wrap="none" rtlCol="0">
+            <a:spAutoFit/>
+          </a:bodyPr>
+          <a:lstStyle/>
+          <a:p>
+            <a:r>
+              <a:rPr lang="en-US" altLang="zh-CN" sz="1400" dirty="0" err="1" smtClean="0">
+                <a:latin typeface="Times New Roman" panose="02020603050405020304" pitchFamily="18" charset="0"/>
+                <a:cs typeface="Times New Roman" panose="02020603050405020304" pitchFamily="18" charset="0"/>
+              </a:rPr>
+              <a:t>PCIe</a:t>
+            </a:r>
+            <a:endParaRPr lang="zh-CN" altLang="en-US" sz="1400" dirty="0">
+              <a:latin typeface="Times New Roman" panose="02020603050405020304" pitchFamily="18" charset="0"/>
+              <a:cs typeface="Times New Roman" panose="02020603050405020304" pitchFamily="18" charset="0"/>
+            </a:endParaRPr>
+          </a:p>
+        </p:txBody>
+      </p:sp>
+      <p:sp>
+        <p:nvSpPr>
+          <p:cNvPr id="175" name="文本框 174"/>
+          <p:cNvSpPr txBox="1"/>
+          <p:nvPr/>
+        </p:nvSpPr>
+        <p:spPr>
+          <a:xfrm>
+            <a:off x="6491952" y="1544493"/>
+            <a:ext cx="543739" cy="307777"/>
+          </a:xfrm>
+          <a:prstGeom prst="rect">
+            <a:avLst/>
+          </a:prstGeom>
+          <a:noFill/>
+          <a:ln w="19050">
+            <a:noFill/>
+          </a:ln>
+        </p:spPr>
+        <p:txBody>
+          <a:bodyPr wrap="none" rtlCol="0">
+            <a:spAutoFit/>
+          </a:bodyPr>
+          <a:lstStyle/>
+          <a:p>
+            <a:r>
+              <a:rPr lang="en-US" altLang="zh-CN" sz="1400" dirty="0" err="1" smtClean="0">
+                <a:latin typeface="Times New Roman" panose="02020603050405020304" pitchFamily="18" charset="0"/>
+                <a:cs typeface="Times New Roman" panose="02020603050405020304" pitchFamily="18" charset="0"/>
+              </a:rPr>
+              <a:t>PCIe</a:t>
+            </a:r>
+            <a:endParaRPr lang="zh-CN" altLang="en-US" sz="1400" dirty="0">
+              <a:latin typeface="Times New Roman" panose="02020603050405020304" pitchFamily="18" charset="0"/>
+              <a:cs typeface="Times New Roman" panose="02020603050405020304" pitchFamily="18" charset="0"/>
+            </a:endParaRPr>
+          </a:p>
+        </p:txBody>
+      </p:sp>
+      <p:sp>
+        <p:nvSpPr>
+          <p:cNvPr id="176" name="文本框 175"/>
+          <p:cNvSpPr txBox="1"/>
+          <p:nvPr/>
+        </p:nvSpPr>
+        <p:spPr>
+          <a:xfrm>
+            <a:off x="8333564" y="1541820"/>
+            <a:ext cx="543739" cy="307777"/>
+          </a:xfrm>
+          <a:prstGeom prst="rect">
+            <a:avLst/>
+          </a:prstGeom>
+          <a:noFill/>
+          <a:ln w="19050">
+            <a:noFill/>
+          </a:ln>
+        </p:spPr>
+        <p:txBody>
+          <a:bodyPr wrap="none" rtlCol="0">
+            <a:spAutoFit/>
+          </a:bodyPr>
+          <a:lstStyle/>
+          <a:p>
+            <a:r>
+              <a:rPr lang="en-US" altLang="zh-CN" sz="1400" dirty="0" err="1" smtClean="0">
+                <a:latin typeface="Times New Roman" panose="02020603050405020304" pitchFamily="18" charset="0"/>
+                <a:cs typeface="Times New Roman" panose="02020603050405020304" pitchFamily="18" charset="0"/>
+              </a:rPr>
+              <a:t>PCIe</a:t>
+            </a:r>
+            <a:endParaRPr lang="zh-CN" altLang="en-US" sz="1400" dirty="0">
+              <a:latin typeface="Times New Roman" panose="02020603050405020304" pitchFamily="18" charset="0"/>
+              <a:cs typeface="Times New Roman" panose="02020603050405020304" pitchFamily="18" charset="0"/>
+            </a:endParaRPr>
+          </a:p>
+        </p:txBody>
+      </p:sp>
+      <p:sp>
+        <p:nvSpPr>
+          <p:cNvPr id="177" name="文本框 176"/>
+          <p:cNvSpPr txBox="1"/>
+          <p:nvPr/>
+        </p:nvSpPr>
+        <p:spPr>
+          <a:xfrm>
+            <a:off x="7740979" y="1039732"/>
+            <a:ext cx="543739" cy="307777"/>
+          </a:xfrm>
+          <a:prstGeom prst="rect">
+            <a:avLst/>
+          </a:prstGeom>
+          <a:noFill/>
+          <a:ln w="19050">
+            <a:noFill/>
+          </a:ln>
+        </p:spPr>
+        <p:txBody>
+          <a:bodyPr wrap="none" rtlCol="0">
+            <a:spAutoFit/>
+          </a:bodyPr>
+          <a:lstStyle/>
+          <a:p>
+            <a:r>
+              <a:rPr lang="en-US" altLang="zh-CN" sz="1400" dirty="0" err="1" smtClean="0">
+                <a:latin typeface="Times New Roman" panose="02020603050405020304" pitchFamily="18" charset="0"/>
+                <a:cs typeface="Times New Roman" panose="02020603050405020304" pitchFamily="18" charset="0"/>
+              </a:rPr>
+              <a:t>PCIe</a:t>
+            </a:r>
+            <a:endParaRPr lang="zh-CN" altLang="en-US" sz="1400" dirty="0">
+              <a:latin typeface="Times New Roman" panose="02020603050405020304" pitchFamily="18" charset="0"/>
+              <a:cs typeface="Times New Roman" panose="02020603050405020304" pitchFamily="18" charset="0"/>
+            </a:endParaRPr>
+          </a:p>
+        </p:txBody>
+      </p:sp>
+      <p:sp>
+        <p:nvSpPr>
+          <p:cNvPr id="178" name="文本框 177"/>
+          <p:cNvSpPr txBox="1"/>
+          <p:nvPr/>
+        </p:nvSpPr>
+        <p:spPr>
+          <a:xfrm>
+            <a:off x="3177597" y="1055290"/>
+            <a:ext cx="543739" cy="307777"/>
+          </a:xfrm>
+          <a:prstGeom prst="rect">
+            <a:avLst/>
+          </a:prstGeom>
+          <a:noFill/>
+          <a:ln w="19050">
+            <a:noFill/>
+          </a:ln>
+        </p:spPr>
+        <p:txBody>
+          <a:bodyPr wrap="none" rtlCol="0">
+            <a:spAutoFit/>
+          </a:bodyPr>
+          <a:lstStyle/>
+          <a:p>
+            <a:r>
+              <a:rPr lang="en-US" altLang="zh-CN" sz="1400" dirty="0" err="1" smtClean="0">
+                <a:latin typeface="Times New Roman" panose="02020603050405020304" pitchFamily="18" charset="0"/>
+                <a:cs typeface="Times New Roman" panose="02020603050405020304" pitchFamily="18" charset="0"/>
+              </a:rPr>
+              <a:t>PCIe</a:t>
+            </a:r>
+            <a:endParaRPr lang="zh-CN" altLang="en-US" sz="1400" dirty="0">
+              <a:latin typeface="Times New Roman" panose="02020603050405020304" pitchFamily="18" charset="0"/>
+              <a:cs typeface="Times New Roman" panose="02020603050405020304" pitchFamily="18" charset="0"/>
+            </a:endParaRPr>
+          </a:p>
+        </p:txBody>
+      </p:sp>
+    </p:spTree>
+    <p:extLst>
+      <p:ext uri="{BB962C8B-B14F-4D97-AF65-F5344CB8AC3E}">
+        <p14:creationId xmlns:p14="http://schemas.microsoft.com/office/powerpoint/2010/main" val="2356398572"/>
+      </p:ext>
+    </p:extLst>
+  </p:cSld>
+  <p:clrMapOvr>
+    <a:masterClrMapping/>
+  </p:clrMapOvr>
+  <p:timing>
+    <p:tnLst>
+      <p:par>
+        <p:cTn id="1" dur="indefinite" restart="never" nodeType="tmRoot"/>
+      </p:par>
+    </p:tnLst>
+  </p:timing>
+</p:sld>
+</file>
+
+<file path=ppt/slides/slide6.xml><?xml version="1.0" encoding="utf-8"?>
+<p:sld xmlns:a="http://schemas.openxmlformats.org/drawingml/2006/main" xmlns:r="http://schemas.openxmlformats.org/officeDocument/2006/relationships" xmlns:p="http://schemas.openxmlformats.org/presentationml/2006/main">
+  <p:cSld>
+    <p:spTree>
+      <p:nvGrpSpPr>
+        <p:cNvPr id="1" name=""/>
+        <p:cNvGrpSpPr/>
+        <p:nvPr/>
+      </p:nvGrpSpPr>
+      <p:grpSpPr>
+        <a:xfrm>
+          <a:off x="0" y="0"/>
+          <a:ext cx="0" cy="0"/>
+          <a:chOff x="0" y="0"/>
+          <a:chExt cx="0" cy="0"/>
+        </a:xfrm>
+      </p:grpSpPr>
+      <p:cxnSp>
+        <p:nvCxnSpPr>
+          <p:cNvPr id="190" name="直接连接符 189"/>
+          <p:cNvCxnSpPr/>
+          <p:nvPr/>
+        </p:nvCxnSpPr>
+        <p:spPr>
+          <a:xfrm>
+            <a:off x="8716432" y="-14014755"/>
+            <a:ext cx="856482" cy="0"/>
+          </a:xfrm>
+          <a:prstGeom prst="line">
+            <a:avLst/>
+          </a:prstGeom>
+          <a:ln w="19050">
+            <a:solidFill>
+              <a:srgbClr val="FFFF00"/>
+            </a:solidFill>
+          </a:ln>
+        </p:spPr>
+        <p:style>
+          <a:lnRef idx="1">
+            <a:schemeClr val="dk1"/>
+          </a:lnRef>
+          <a:fillRef idx="0">
+            <a:schemeClr val="dk1"/>
+          </a:fillRef>
+          <a:effectRef idx="0">
+            <a:schemeClr val="dk1"/>
+          </a:effectRef>
+          <a:fontRef idx="minor">
+            <a:schemeClr val="tx1"/>
+          </a:fontRef>
+        </p:style>
+      </p:cxnSp>
+      <p:cxnSp>
+        <p:nvCxnSpPr>
+          <p:cNvPr id="194" name="直接连接符 193"/>
+          <p:cNvCxnSpPr/>
+          <p:nvPr/>
+        </p:nvCxnSpPr>
+        <p:spPr>
+          <a:xfrm>
+            <a:off x="10126975" y="-4953406"/>
+            <a:ext cx="1149898" cy="0"/>
+          </a:xfrm>
+          <a:prstGeom prst="line">
+            <a:avLst/>
+          </a:prstGeom>
+          <a:ln w="19050">
+            <a:solidFill>
+              <a:srgbClr val="FF0000"/>
+            </a:solidFill>
+          </a:ln>
+        </p:spPr>
+        <p:style>
+          <a:lnRef idx="1">
+            <a:schemeClr val="dk1"/>
+          </a:lnRef>
+          <a:fillRef idx="0">
+            <a:schemeClr val="dk1"/>
+          </a:fillRef>
+          <a:effectRef idx="0">
+            <a:schemeClr val="dk1"/>
+          </a:effectRef>
+          <a:fontRef idx="minor">
+            <a:schemeClr val="tx1"/>
+          </a:fontRef>
+        </p:style>
+      </p:cxnSp>
+      <p:sp>
+        <p:nvSpPr>
+          <p:cNvPr id="56" name="圆角矩形 55"/>
+          <p:cNvSpPr/>
+          <p:nvPr/>
+        </p:nvSpPr>
+        <p:spPr>
+          <a:xfrm>
+            <a:off x="685987" y="1899216"/>
+            <a:ext cx="5605073" cy="1714283"/>
+          </a:xfrm>
+          <a:prstGeom prst="roundRect">
+            <a:avLst/>
+          </a:prstGeom>
+          <a:noFill/>
+          <a:ln w="19050">
+            <a:solidFill>
+              <a:schemeClr val="accent1">
+                <a:lumMod val="50000"/>
+              </a:schemeClr>
+            </a:solidFill>
+            <a:prstDash val="dash"/>
+          </a:ln>
+        </p:spPr>
+        <p:style>
+          <a:lnRef idx="2">
+            <a:schemeClr val="accent5">
+              <a:shade val="50000"/>
+            </a:schemeClr>
+          </a:lnRef>
+          <a:fillRef idx="1">
+            <a:schemeClr val="accent5"/>
+          </a:fillRef>
+          <a:effectRef idx="0">
+            <a:schemeClr val="accent5"/>
+          </a:effectRef>
+          <a:fontRef idx="minor">
+            <a:schemeClr val="lt1"/>
+          </a:fontRef>
+        </p:style>
+        <p:txBody>
+          <a:bodyPr rtlCol="0" anchor="ctr"/>
+          <a:lstStyle/>
+          <a:p>
+            <a:pPr algn="ctr"/>
+            <a:endParaRPr lang="zh-CN" altLang="en-US" sz="1200">
+              <a:latin typeface="Times New Roman" panose="02020603050405020304" pitchFamily="18" charset="0"/>
+              <a:ea typeface="宋体" panose="02010600030101010101" pitchFamily="2" charset="-122"/>
+              <a:cs typeface="Times New Roman" panose="02020603050405020304" pitchFamily="18" charset="0"/>
+            </a:endParaRPr>
+          </a:p>
+        </p:txBody>
+      </p:sp>
+      <p:sp>
+        <p:nvSpPr>
+          <p:cNvPr id="82" name="文本框 81"/>
+          <p:cNvSpPr txBox="1"/>
+          <p:nvPr/>
+        </p:nvSpPr>
+        <p:spPr>
+          <a:xfrm>
+            <a:off x="632309" y="2005892"/>
+            <a:ext cx="3864867" cy="400110"/>
+          </a:xfrm>
+          <a:prstGeom prst="rect">
+            <a:avLst/>
+          </a:prstGeom>
+          <a:noFill/>
+        </p:spPr>
+        <p:txBody>
+          <a:bodyPr wrap="square" rtlCol="0">
+            <a:spAutoFit/>
+          </a:bodyPr>
+          <a:lstStyle/>
+          <a:p>
+            <a:pPr algn="ctr"/>
+            <a:r>
+              <a:rPr lang="zh-CN" altLang="en-US" sz="2000" b="1" dirty="0" smtClean="0">
+                <a:ln w="0"/>
+                <a:solidFill>
+                  <a:schemeClr val="accent1">
+                    <a:lumMod val="50000"/>
+                  </a:schemeClr>
+                </a:solidFill>
+                <a:latin typeface="Times New Roman" panose="02020603050405020304" pitchFamily="18" charset="0"/>
+                <a:ea typeface="宋体" panose="02010600030101010101" pitchFamily="2" charset="-122"/>
+                <a:cs typeface="Times New Roman" panose="02020603050405020304" pitchFamily="18" charset="0"/>
+              </a:rPr>
+              <a:t>计算通信并行性分析</a:t>
+            </a:r>
+            <a:endParaRPr lang="zh-CN" altLang="en-US" sz="2000" b="1" dirty="0">
+              <a:ln w="0"/>
+              <a:solidFill>
+                <a:schemeClr val="accent1">
+                  <a:lumMod val="50000"/>
+                </a:schemeClr>
+              </a:solidFill>
+              <a:latin typeface="Times New Roman" panose="02020603050405020304" pitchFamily="18" charset="0"/>
+              <a:ea typeface="宋体" panose="02010600030101010101" pitchFamily="2" charset="-122"/>
+              <a:cs typeface="Times New Roman" panose="02020603050405020304" pitchFamily="18" charset="0"/>
+            </a:endParaRPr>
+          </a:p>
+        </p:txBody>
+      </p:sp>
+      <p:sp>
+        <p:nvSpPr>
+          <p:cNvPr id="83" name="矩形 82"/>
+          <p:cNvSpPr/>
+          <p:nvPr/>
+        </p:nvSpPr>
+        <p:spPr>
+          <a:xfrm>
+            <a:off x="2604747" y="2573550"/>
+            <a:ext cx="1373483" cy="635560"/>
+          </a:xfrm>
+          <a:prstGeom prst="rect">
+            <a:avLst/>
+          </a:prstGeom>
+          <a:solidFill>
+            <a:schemeClr val="bg1">
+              <a:lumMod val="95000"/>
+            </a:schemeClr>
+          </a:solidFill>
+          <a:ln>
+            <a:solidFill>
+              <a:schemeClr val="bg1">
+                <a:lumMod val="95000"/>
+              </a:schemeClr>
+            </a:solidFill>
+          </a:ln>
+        </p:spPr>
+        <p:style>
+          <a:lnRef idx="2">
+            <a:schemeClr val="accent1">
+              <a:shade val="50000"/>
+            </a:schemeClr>
+          </a:lnRef>
+          <a:fillRef idx="1">
+            <a:schemeClr val="accent1"/>
+          </a:fillRef>
+          <a:effectRef idx="0">
+            <a:schemeClr val="accent1"/>
+          </a:effectRef>
+          <a:fontRef idx="minor">
+            <a:schemeClr val="lt1"/>
+          </a:fontRef>
+        </p:style>
+        <p:txBody>
+          <a:bodyPr rtlCol="0" anchor="ctr"/>
+          <a:lstStyle/>
+          <a:p>
+            <a:pPr algn="ctr"/>
+            <a:r>
+              <a:rPr lang="zh-CN" altLang="en-US" sz="1400" b="1" dirty="0" smtClean="0">
+                <a:solidFill>
+                  <a:schemeClr val="tx1"/>
+                </a:solidFill>
+                <a:latin typeface="Times New Roman" panose="02020603050405020304" pitchFamily="18" charset="0"/>
+                <a:ea typeface="宋体" panose="02010600030101010101" pitchFamily="2" charset="-122"/>
+                <a:cs typeface="Times New Roman" panose="02020603050405020304" pitchFamily="18" charset="0"/>
+              </a:rPr>
+              <a:t>关键路径提取</a:t>
+            </a:r>
+            <a:endParaRPr lang="zh-CN" altLang="en-US" sz="1600" b="1" dirty="0">
+              <a:solidFill>
+                <a:schemeClr val="tx1"/>
+              </a:solidFill>
+              <a:latin typeface="Times New Roman" panose="02020603050405020304" pitchFamily="18" charset="0"/>
+              <a:ea typeface="宋体" panose="02010600030101010101" pitchFamily="2" charset="-122"/>
+              <a:cs typeface="Times New Roman" panose="02020603050405020304" pitchFamily="18" charset="0"/>
+            </a:endParaRPr>
+          </a:p>
+        </p:txBody>
+      </p:sp>
+      <p:sp>
+        <p:nvSpPr>
+          <p:cNvPr id="84" name="矩形 83"/>
+          <p:cNvSpPr/>
+          <p:nvPr/>
+        </p:nvSpPr>
+        <p:spPr>
+          <a:xfrm>
+            <a:off x="904194" y="2573551"/>
+            <a:ext cx="1442656" cy="635560"/>
+          </a:xfrm>
+          <a:prstGeom prst="rect">
+            <a:avLst/>
+          </a:prstGeom>
+          <a:solidFill>
+            <a:schemeClr val="accent2">
+              <a:lumMod val="40000"/>
+              <a:lumOff val="60000"/>
+            </a:schemeClr>
+          </a:solidFill>
+          <a:ln>
+            <a:solidFill>
+              <a:schemeClr val="accent2">
+                <a:lumMod val="40000"/>
+                <a:lumOff val="60000"/>
+              </a:schemeClr>
+            </a:solidFill>
+          </a:ln>
+        </p:spPr>
+        <p:style>
+          <a:lnRef idx="2">
+            <a:schemeClr val="accent1">
+              <a:shade val="50000"/>
+            </a:schemeClr>
+          </a:lnRef>
+          <a:fillRef idx="1">
+            <a:schemeClr val="accent1"/>
+          </a:fillRef>
+          <a:effectRef idx="0">
+            <a:schemeClr val="accent1"/>
+          </a:effectRef>
+          <a:fontRef idx="minor">
+            <a:schemeClr val="lt1"/>
+          </a:fontRef>
+        </p:style>
+        <p:txBody>
+          <a:bodyPr rtlCol="0" anchor="ctr"/>
+          <a:lstStyle/>
+          <a:p>
+            <a:pPr algn="ctr"/>
+            <a:r>
+              <a:rPr lang="zh-CN" altLang="en-US" sz="1400" b="1" dirty="0" smtClean="0">
+                <a:solidFill>
+                  <a:schemeClr val="tx1"/>
+                </a:solidFill>
+                <a:latin typeface="Times New Roman" panose="02020603050405020304" pitchFamily="18" charset="0"/>
+                <a:ea typeface="宋体" panose="02010600030101010101" pitchFamily="2" charset="-122"/>
+                <a:cs typeface="Times New Roman" panose="02020603050405020304" pitchFamily="18" charset="0"/>
+              </a:rPr>
+              <a:t>分布式训练迭代时间</a:t>
+            </a:r>
+            <a:endParaRPr lang="zh-CN" altLang="en-US" sz="1600" b="1" dirty="0">
+              <a:solidFill>
+                <a:schemeClr val="tx1"/>
+              </a:solidFill>
+              <a:latin typeface="Times New Roman" panose="02020603050405020304" pitchFamily="18" charset="0"/>
+              <a:ea typeface="宋体" panose="02010600030101010101" pitchFamily="2" charset="-122"/>
+              <a:cs typeface="Times New Roman" panose="02020603050405020304" pitchFamily="18" charset="0"/>
+            </a:endParaRPr>
+          </a:p>
+        </p:txBody>
+      </p:sp>
+      <p:cxnSp>
+        <p:nvCxnSpPr>
+          <p:cNvPr id="85" name="直接箭头连接符 84"/>
+          <p:cNvCxnSpPr>
+            <a:stCxn id="83" idx="1"/>
+            <a:endCxn id="84" idx="3"/>
+          </p:cNvCxnSpPr>
+          <p:nvPr/>
+        </p:nvCxnSpPr>
+        <p:spPr>
+          <a:xfrm flipH="1" flipV="1">
+            <a:off x="2346850" y="2890894"/>
+            <a:ext cx="257897" cy="436"/>
+          </a:xfrm>
+          <a:prstGeom prst="straightConnector1">
+            <a:avLst/>
+          </a:prstGeom>
+          <a:ln w="19050">
+            <a:solidFill>
+              <a:schemeClr val="tx1"/>
+            </a:solidFill>
+            <a:tailEnd type="arrow" w="med" len="sm"/>
+          </a:ln>
+        </p:spPr>
+        <p:style>
+          <a:lnRef idx="1">
+            <a:schemeClr val="dk1"/>
+          </a:lnRef>
+          <a:fillRef idx="0">
+            <a:schemeClr val="dk1"/>
+          </a:fillRef>
+          <a:effectRef idx="0">
+            <a:schemeClr val="dk1"/>
+          </a:effectRef>
+          <a:fontRef idx="minor">
+            <a:schemeClr val="tx1"/>
+          </a:fontRef>
+        </p:style>
+      </p:cxnSp>
+      <p:sp>
+        <p:nvSpPr>
+          <p:cNvPr id="88" name="文本框 87"/>
+          <p:cNvSpPr txBox="1"/>
+          <p:nvPr/>
+        </p:nvSpPr>
+        <p:spPr>
+          <a:xfrm>
+            <a:off x="6349481" y="2352336"/>
+            <a:ext cx="902811" cy="523220"/>
+          </a:xfrm>
+          <a:prstGeom prst="rect">
+            <a:avLst/>
+          </a:prstGeom>
+          <a:noFill/>
+        </p:spPr>
+        <p:txBody>
+          <a:bodyPr wrap="none" rtlCol="0">
+            <a:spAutoFit/>
+          </a:bodyPr>
+          <a:lstStyle/>
+          <a:p>
+            <a:r>
+              <a:rPr lang="zh-CN" altLang="en-US" sz="1400" b="1" dirty="0" smtClean="0">
+                <a:latin typeface="Times New Roman" panose="02020603050405020304" pitchFamily="18" charset="0"/>
+                <a:ea typeface="宋体" panose="02010600030101010101" pitchFamily="2" charset="-122"/>
+                <a:cs typeface="Times New Roman" panose="02020603050405020304" pitchFamily="18" charset="0"/>
+              </a:rPr>
+              <a:t>计算时间</a:t>
+            </a:r>
+            <a:endParaRPr lang="zh-CN" altLang="en-US" sz="1400" b="1" dirty="0">
+              <a:latin typeface="Times New Roman" panose="02020603050405020304" pitchFamily="18" charset="0"/>
+              <a:ea typeface="宋体" panose="02010600030101010101" pitchFamily="2" charset="-122"/>
+              <a:cs typeface="Times New Roman" panose="02020603050405020304" pitchFamily="18" charset="0"/>
+            </a:endParaRPr>
+          </a:p>
+          <a:p>
+            <a:endParaRPr lang="zh-CN" altLang="en-US" sz="1400" dirty="0">
+              <a:latin typeface="Times New Roman" panose="02020603050405020304" pitchFamily="18" charset="0"/>
+              <a:ea typeface="宋体" panose="02010600030101010101" pitchFamily="2" charset="-122"/>
+              <a:cs typeface="Times New Roman" panose="02020603050405020304" pitchFamily="18" charset="0"/>
+            </a:endParaRPr>
+          </a:p>
+        </p:txBody>
+      </p:sp>
+      <p:sp>
+        <p:nvSpPr>
+          <p:cNvPr id="89" name="文本框 88"/>
+          <p:cNvSpPr txBox="1"/>
+          <p:nvPr/>
+        </p:nvSpPr>
+        <p:spPr>
+          <a:xfrm>
+            <a:off x="6349481" y="2879768"/>
+            <a:ext cx="902811" cy="523220"/>
+          </a:xfrm>
+          <a:prstGeom prst="rect">
+            <a:avLst/>
+          </a:prstGeom>
+          <a:noFill/>
+        </p:spPr>
+        <p:txBody>
+          <a:bodyPr wrap="none" rtlCol="0">
+            <a:spAutoFit/>
+          </a:bodyPr>
+          <a:lstStyle/>
+          <a:p>
+            <a:r>
+              <a:rPr lang="zh-CN" altLang="en-US" sz="1400" b="1" dirty="0" smtClean="0">
+                <a:latin typeface="Times New Roman" panose="02020603050405020304" pitchFamily="18" charset="0"/>
+                <a:ea typeface="宋体" panose="02010600030101010101" pitchFamily="2" charset="-122"/>
+                <a:cs typeface="Times New Roman" panose="02020603050405020304" pitchFamily="18" charset="0"/>
+              </a:rPr>
+              <a:t>通信时间</a:t>
+            </a:r>
+            <a:endParaRPr lang="zh-CN" altLang="en-US" sz="1400" b="1" dirty="0">
+              <a:latin typeface="Times New Roman" panose="02020603050405020304" pitchFamily="18" charset="0"/>
+              <a:ea typeface="宋体" panose="02010600030101010101" pitchFamily="2" charset="-122"/>
+              <a:cs typeface="Times New Roman" panose="02020603050405020304" pitchFamily="18" charset="0"/>
+            </a:endParaRPr>
+          </a:p>
+          <a:p>
+            <a:endParaRPr lang="zh-CN" altLang="en-US" sz="1400" dirty="0">
+              <a:latin typeface="Times New Roman" panose="02020603050405020304" pitchFamily="18" charset="0"/>
+              <a:ea typeface="宋体" panose="02010600030101010101" pitchFamily="2" charset="-122"/>
+              <a:cs typeface="Times New Roman" panose="02020603050405020304" pitchFamily="18" charset="0"/>
+            </a:endParaRPr>
+          </a:p>
+        </p:txBody>
+      </p:sp>
+      <p:sp>
+        <p:nvSpPr>
+          <p:cNvPr id="55" name="圆角矩形 54"/>
+          <p:cNvSpPr/>
+          <p:nvPr/>
+        </p:nvSpPr>
+        <p:spPr>
+          <a:xfrm>
+            <a:off x="613063" y="289587"/>
+            <a:ext cx="7614996" cy="1430755"/>
+          </a:xfrm>
+          <a:prstGeom prst="roundRect">
+            <a:avLst/>
+          </a:prstGeom>
+          <a:noFill/>
+          <a:ln w="19050">
+            <a:solidFill>
+              <a:schemeClr val="tx1"/>
+            </a:solidFill>
+            <a:prstDash val="dash"/>
+          </a:ln>
+        </p:spPr>
+        <p:style>
+          <a:lnRef idx="2">
+            <a:schemeClr val="accent4">
+              <a:shade val="50000"/>
+            </a:schemeClr>
+          </a:lnRef>
+          <a:fillRef idx="1">
+            <a:schemeClr val="accent4"/>
+          </a:fillRef>
+          <a:effectRef idx="0">
+            <a:schemeClr val="accent4"/>
+          </a:effectRef>
+          <a:fontRef idx="minor">
+            <a:schemeClr val="lt1"/>
+          </a:fontRef>
+        </p:style>
+        <p:txBody>
+          <a:bodyPr rtlCol="0" anchor="ctr"/>
+          <a:lstStyle/>
+          <a:p>
+            <a:pPr algn="ctr"/>
+            <a:endParaRPr lang="zh-CN" altLang="en-US" sz="1200" dirty="0">
+              <a:latin typeface="Times New Roman" panose="02020603050405020304" pitchFamily="18" charset="0"/>
+              <a:ea typeface="宋体" panose="02010600030101010101" pitchFamily="2" charset="-122"/>
+              <a:cs typeface="Times New Roman" panose="02020603050405020304" pitchFamily="18" charset="0"/>
+            </a:endParaRPr>
+          </a:p>
+        </p:txBody>
+      </p:sp>
+      <p:sp>
+        <p:nvSpPr>
+          <p:cNvPr id="58" name="文本框 57"/>
+          <p:cNvSpPr txBox="1"/>
+          <p:nvPr/>
+        </p:nvSpPr>
+        <p:spPr>
+          <a:xfrm>
+            <a:off x="6165027" y="468228"/>
+            <a:ext cx="2063032" cy="400110"/>
+          </a:xfrm>
+          <a:prstGeom prst="rect">
+            <a:avLst/>
+          </a:prstGeom>
+          <a:noFill/>
+        </p:spPr>
+        <p:txBody>
+          <a:bodyPr wrap="square" rtlCol="0">
+            <a:spAutoFit/>
+          </a:bodyPr>
+          <a:lstStyle/>
+          <a:p>
+            <a:pPr algn="ctr"/>
+            <a:r>
+              <a:rPr lang="zh-CN" altLang="en-US" sz="2000" b="1" dirty="0" smtClean="0">
+                <a:ln w="0"/>
+                <a:solidFill>
+                  <a:schemeClr val="accent1">
+                    <a:lumMod val="50000"/>
+                  </a:schemeClr>
+                </a:solidFill>
+                <a:latin typeface="Times New Roman" panose="02020603050405020304" pitchFamily="18" charset="0"/>
+                <a:ea typeface="宋体" panose="02010600030101010101" pitchFamily="2" charset="-122"/>
+                <a:cs typeface="Times New Roman" panose="02020603050405020304" pitchFamily="18" charset="0"/>
+              </a:rPr>
+              <a:t>计算时间预测</a:t>
+            </a:r>
+            <a:endParaRPr lang="zh-CN" altLang="en-US" sz="2000" b="1" dirty="0">
+              <a:ln w="0"/>
+              <a:solidFill>
+                <a:schemeClr val="accent1">
+                  <a:lumMod val="50000"/>
+                </a:schemeClr>
+              </a:solidFill>
+              <a:latin typeface="Times New Roman" panose="02020603050405020304" pitchFamily="18" charset="0"/>
+              <a:ea typeface="宋体" panose="02010600030101010101" pitchFamily="2" charset="-122"/>
+              <a:cs typeface="Times New Roman" panose="02020603050405020304" pitchFamily="18" charset="0"/>
+            </a:endParaRPr>
+          </a:p>
+        </p:txBody>
+      </p:sp>
+      <p:sp>
+        <p:nvSpPr>
+          <p:cNvPr id="59" name="矩形 58"/>
+          <p:cNvSpPr/>
+          <p:nvPr/>
+        </p:nvSpPr>
+        <p:spPr>
+          <a:xfrm>
+            <a:off x="685987" y="1058499"/>
+            <a:ext cx="1499432" cy="500339"/>
+          </a:xfrm>
+          <a:prstGeom prst="rect">
+            <a:avLst/>
+          </a:prstGeom>
+          <a:solidFill>
+            <a:schemeClr val="bg1">
+              <a:lumMod val="95000"/>
+            </a:schemeClr>
+          </a:solidFill>
+          <a:ln>
+            <a:solidFill>
+              <a:schemeClr val="bg1">
+                <a:lumMod val="95000"/>
+              </a:schemeClr>
+            </a:solidFill>
+          </a:ln>
+        </p:spPr>
+        <p:style>
+          <a:lnRef idx="2">
+            <a:schemeClr val="accent1">
+              <a:shade val="50000"/>
+            </a:schemeClr>
+          </a:lnRef>
+          <a:fillRef idx="1">
+            <a:schemeClr val="accent1"/>
+          </a:fillRef>
+          <a:effectRef idx="0">
+            <a:schemeClr val="accent1"/>
+          </a:effectRef>
+          <a:fontRef idx="minor">
+            <a:schemeClr val="lt1"/>
+          </a:fontRef>
+        </p:style>
+        <p:txBody>
+          <a:bodyPr rtlCol="0" anchor="ctr"/>
+          <a:lstStyle/>
+          <a:p>
+            <a:pPr algn="ctr"/>
+            <a:r>
+              <a:rPr lang="zh-CN" altLang="en-US" sz="1400" b="1" dirty="0" smtClean="0">
+                <a:solidFill>
+                  <a:schemeClr val="tx1"/>
+                </a:solidFill>
+                <a:latin typeface="Times New Roman" panose="02020603050405020304" pitchFamily="18" charset="0"/>
+                <a:ea typeface="宋体" panose="02010600030101010101" pitchFamily="2" charset="-122"/>
+                <a:cs typeface="Times New Roman" panose="02020603050405020304" pitchFamily="18" charset="0"/>
+              </a:rPr>
+              <a:t>神经网络分解</a:t>
+            </a:r>
+            <a:endParaRPr lang="zh-CN" altLang="en-US" sz="1400" b="1" dirty="0">
+              <a:solidFill>
+                <a:schemeClr val="tx1"/>
+              </a:solidFill>
+              <a:latin typeface="Times New Roman" panose="02020603050405020304" pitchFamily="18" charset="0"/>
+              <a:ea typeface="宋体" panose="02010600030101010101" pitchFamily="2" charset="-122"/>
+              <a:cs typeface="Times New Roman" panose="02020603050405020304" pitchFamily="18" charset="0"/>
+            </a:endParaRPr>
+          </a:p>
+        </p:txBody>
+      </p:sp>
+      <p:sp>
+        <p:nvSpPr>
+          <p:cNvPr id="64" name="矩形 63"/>
+          <p:cNvSpPr/>
+          <p:nvPr/>
+        </p:nvSpPr>
+        <p:spPr>
+          <a:xfrm>
+            <a:off x="2844075" y="1058499"/>
+            <a:ext cx="1293539" cy="500338"/>
+          </a:xfrm>
+          <a:prstGeom prst="rect">
+            <a:avLst/>
+          </a:prstGeom>
+          <a:solidFill>
+            <a:schemeClr val="bg1">
+              <a:lumMod val="95000"/>
+            </a:schemeClr>
+          </a:solidFill>
+          <a:ln>
+            <a:solidFill>
+              <a:schemeClr val="bg1">
+                <a:lumMod val="95000"/>
+              </a:schemeClr>
+            </a:solidFill>
+          </a:ln>
+        </p:spPr>
+        <p:style>
+          <a:lnRef idx="2">
+            <a:schemeClr val="accent1">
+              <a:shade val="50000"/>
+            </a:schemeClr>
+          </a:lnRef>
+          <a:fillRef idx="1">
+            <a:schemeClr val="accent1"/>
+          </a:fillRef>
+          <a:effectRef idx="0">
+            <a:schemeClr val="accent1"/>
+          </a:effectRef>
+          <a:fontRef idx="minor">
+            <a:schemeClr val="lt1"/>
+          </a:fontRef>
+        </p:style>
+        <p:txBody>
+          <a:bodyPr rtlCol="0" anchor="ctr"/>
+          <a:lstStyle/>
+          <a:p>
+            <a:pPr algn="ctr"/>
+            <a:r>
+              <a:rPr lang="zh-CN" altLang="en-US" sz="1400" b="1" dirty="0" smtClean="0">
+                <a:solidFill>
+                  <a:schemeClr val="tx1"/>
+                </a:solidFill>
+                <a:latin typeface="Times New Roman" panose="02020603050405020304" pitchFamily="18" charset="0"/>
+                <a:ea typeface="宋体" panose="02010600030101010101" pitchFamily="2" charset="-122"/>
+                <a:cs typeface="Times New Roman" panose="02020603050405020304" pitchFamily="18" charset="0"/>
+              </a:rPr>
+              <a:t>特征空间采样</a:t>
+            </a:r>
+            <a:endParaRPr lang="zh-CN" altLang="en-US" sz="1400" b="1" dirty="0">
+              <a:solidFill>
+                <a:schemeClr val="tx1"/>
+              </a:solidFill>
+              <a:latin typeface="Times New Roman" panose="02020603050405020304" pitchFamily="18" charset="0"/>
+              <a:ea typeface="宋体" panose="02010600030101010101" pitchFamily="2" charset="-122"/>
+              <a:cs typeface="Times New Roman" panose="02020603050405020304" pitchFamily="18" charset="0"/>
+            </a:endParaRPr>
+          </a:p>
+        </p:txBody>
+      </p:sp>
+      <p:cxnSp>
+        <p:nvCxnSpPr>
+          <p:cNvPr id="65" name="直接箭头连接符 64"/>
+          <p:cNvCxnSpPr>
+            <a:stCxn id="59" idx="3"/>
+            <a:endCxn id="64" idx="1"/>
+          </p:cNvCxnSpPr>
+          <p:nvPr/>
+        </p:nvCxnSpPr>
+        <p:spPr>
+          <a:xfrm flipV="1">
+            <a:off x="2185419" y="1308668"/>
+            <a:ext cx="658656" cy="1"/>
+          </a:xfrm>
+          <a:prstGeom prst="straightConnector1">
+            <a:avLst/>
+          </a:prstGeom>
+          <a:ln w="19050">
+            <a:solidFill>
+              <a:schemeClr val="tx1"/>
+            </a:solidFill>
+            <a:tailEnd type="arrow" w="med" len="sm"/>
+          </a:ln>
+        </p:spPr>
+        <p:style>
+          <a:lnRef idx="1">
+            <a:schemeClr val="dk1"/>
+          </a:lnRef>
+          <a:fillRef idx="0">
+            <a:schemeClr val="dk1"/>
+          </a:fillRef>
+          <a:effectRef idx="0">
+            <a:schemeClr val="dk1"/>
+          </a:effectRef>
+          <a:fontRef idx="minor">
+            <a:schemeClr val="tx1"/>
+          </a:fontRef>
+        </p:style>
+      </p:cxnSp>
+      <p:sp>
+        <p:nvSpPr>
+          <p:cNvPr id="66" name="矩形 65"/>
+          <p:cNvSpPr/>
+          <p:nvPr/>
+        </p:nvSpPr>
+        <p:spPr>
+          <a:xfrm>
+            <a:off x="5190941" y="1058499"/>
+            <a:ext cx="1100382" cy="500338"/>
+          </a:xfrm>
+          <a:prstGeom prst="rect">
+            <a:avLst/>
+          </a:prstGeom>
+          <a:solidFill>
+            <a:schemeClr val="bg1">
+              <a:lumMod val="95000"/>
+            </a:schemeClr>
+          </a:solidFill>
+          <a:ln>
+            <a:solidFill>
+              <a:schemeClr val="bg1">
+                <a:lumMod val="95000"/>
+              </a:schemeClr>
+            </a:solidFill>
+          </a:ln>
+        </p:spPr>
+        <p:style>
+          <a:lnRef idx="2">
+            <a:schemeClr val="accent1">
+              <a:shade val="50000"/>
+            </a:schemeClr>
+          </a:lnRef>
+          <a:fillRef idx="1">
+            <a:schemeClr val="accent1"/>
+          </a:fillRef>
+          <a:effectRef idx="0">
+            <a:schemeClr val="accent1"/>
+          </a:effectRef>
+          <a:fontRef idx="minor">
+            <a:schemeClr val="lt1"/>
+          </a:fontRef>
+        </p:style>
+        <p:txBody>
+          <a:bodyPr rtlCol="0" anchor="ctr"/>
+          <a:lstStyle/>
+          <a:p>
+            <a:pPr algn="ctr"/>
+            <a:r>
+              <a:rPr lang="zh-CN" altLang="en-US" sz="1400" b="1" dirty="0" smtClean="0">
+                <a:solidFill>
+                  <a:schemeClr val="tx1"/>
+                </a:solidFill>
+                <a:latin typeface="Times New Roman" panose="02020603050405020304" pitchFamily="18" charset="0"/>
+                <a:ea typeface="宋体" panose="02010600030101010101" pitchFamily="2" charset="-122"/>
+                <a:cs typeface="Times New Roman" panose="02020603050405020304" pitchFamily="18" charset="0"/>
+              </a:rPr>
+              <a:t>训练</a:t>
+            </a:r>
+            <a:r>
+              <a:rPr lang="en-US" altLang="zh-CN" sz="1400" b="1" dirty="0" smtClean="0">
+                <a:solidFill>
+                  <a:schemeClr val="tx1"/>
+                </a:solidFill>
+                <a:latin typeface="Times New Roman" panose="02020603050405020304" pitchFamily="18" charset="0"/>
+                <a:ea typeface="宋体" panose="02010600030101010101" pitchFamily="2" charset="-122"/>
+                <a:cs typeface="Times New Roman" panose="02020603050405020304" pitchFamily="18" charset="0"/>
+              </a:rPr>
+              <a:t>MLP</a:t>
+            </a:r>
+            <a:r>
+              <a:rPr lang="zh-CN" altLang="en-US" sz="1400" b="1" dirty="0" smtClean="0">
+                <a:solidFill>
+                  <a:schemeClr val="tx1"/>
+                </a:solidFill>
+                <a:latin typeface="Times New Roman" panose="02020603050405020304" pitchFamily="18" charset="0"/>
+                <a:ea typeface="宋体" panose="02010600030101010101" pitchFamily="2" charset="-122"/>
+                <a:cs typeface="Times New Roman" panose="02020603050405020304" pitchFamily="18" charset="0"/>
+              </a:rPr>
+              <a:t>模型</a:t>
+            </a:r>
+            <a:endParaRPr lang="zh-CN" altLang="en-US" sz="1400" b="1" dirty="0">
+              <a:solidFill>
+                <a:schemeClr val="tx1"/>
+              </a:solidFill>
+              <a:latin typeface="Times New Roman" panose="02020603050405020304" pitchFamily="18" charset="0"/>
+              <a:ea typeface="宋体" panose="02010600030101010101" pitchFamily="2" charset="-122"/>
+              <a:cs typeface="Times New Roman" panose="02020603050405020304" pitchFamily="18" charset="0"/>
+            </a:endParaRPr>
+          </a:p>
+        </p:txBody>
+      </p:sp>
+      <p:sp>
+        <p:nvSpPr>
+          <p:cNvPr id="67" name="文本框 66"/>
+          <p:cNvSpPr txBox="1"/>
+          <p:nvPr/>
+        </p:nvSpPr>
+        <p:spPr>
+          <a:xfrm>
+            <a:off x="2014805" y="988579"/>
+            <a:ext cx="999884" cy="276999"/>
+          </a:xfrm>
+          <a:prstGeom prst="rect">
+            <a:avLst/>
+          </a:prstGeom>
+          <a:noFill/>
+        </p:spPr>
+        <p:txBody>
+          <a:bodyPr wrap="square" rtlCol="0">
+            <a:spAutoFit/>
+          </a:bodyPr>
+          <a:lstStyle/>
+          <a:p>
+            <a:pPr algn="ctr"/>
+            <a:r>
+              <a:rPr lang="zh-CN" altLang="en-US" sz="1200" b="1" dirty="0" smtClean="0">
+                <a:latin typeface="Times New Roman" panose="02020603050405020304" pitchFamily="18" charset="0"/>
+                <a:ea typeface="宋体" panose="02010600030101010101" pitchFamily="2" charset="-122"/>
+                <a:cs typeface="Times New Roman" panose="02020603050405020304" pitchFamily="18" charset="0"/>
+              </a:rPr>
+              <a:t>神经网络层</a:t>
+            </a:r>
+            <a:endParaRPr lang="zh-CN" altLang="en-US" sz="1200" b="1" dirty="0">
+              <a:latin typeface="Times New Roman" panose="02020603050405020304" pitchFamily="18" charset="0"/>
+              <a:ea typeface="宋体" panose="02010600030101010101" pitchFamily="2" charset="-122"/>
+              <a:cs typeface="Times New Roman" panose="02020603050405020304" pitchFamily="18" charset="0"/>
+            </a:endParaRPr>
+          </a:p>
+        </p:txBody>
+      </p:sp>
+      <p:cxnSp>
+        <p:nvCxnSpPr>
+          <p:cNvPr id="68" name="直接箭头连接符 67"/>
+          <p:cNvCxnSpPr>
+            <a:stCxn id="64" idx="3"/>
+            <a:endCxn id="66" idx="1"/>
+          </p:cNvCxnSpPr>
+          <p:nvPr/>
+        </p:nvCxnSpPr>
+        <p:spPr>
+          <a:xfrm>
+            <a:off x="4137614" y="1308668"/>
+            <a:ext cx="1053327" cy="0"/>
+          </a:xfrm>
+          <a:prstGeom prst="straightConnector1">
+            <a:avLst/>
+          </a:prstGeom>
+          <a:ln w="19050">
+            <a:solidFill>
+              <a:schemeClr val="tx1"/>
+            </a:solidFill>
+            <a:tailEnd type="arrow" w="med" len="sm"/>
+          </a:ln>
+        </p:spPr>
+        <p:style>
+          <a:lnRef idx="1">
+            <a:schemeClr val="dk1"/>
+          </a:lnRef>
+          <a:fillRef idx="0">
+            <a:schemeClr val="dk1"/>
+          </a:fillRef>
+          <a:effectRef idx="0">
+            <a:schemeClr val="dk1"/>
+          </a:effectRef>
+          <a:fontRef idx="minor">
+            <a:schemeClr val="tx1"/>
+          </a:fontRef>
+        </p:style>
+      </p:cxnSp>
+      <p:sp>
+        <p:nvSpPr>
+          <p:cNvPr id="69" name="矩形 68"/>
+          <p:cNvSpPr/>
+          <p:nvPr/>
+        </p:nvSpPr>
+        <p:spPr>
+          <a:xfrm>
+            <a:off x="6673538" y="1056963"/>
+            <a:ext cx="1279018" cy="501874"/>
+          </a:xfrm>
+          <a:prstGeom prst="rect">
+            <a:avLst/>
+          </a:prstGeom>
+          <a:solidFill>
+            <a:schemeClr val="bg1">
+              <a:lumMod val="95000"/>
+            </a:schemeClr>
+          </a:solidFill>
+          <a:ln>
+            <a:solidFill>
+              <a:schemeClr val="bg1">
+                <a:lumMod val="95000"/>
+              </a:schemeClr>
+            </a:solidFill>
+          </a:ln>
+        </p:spPr>
+        <p:style>
+          <a:lnRef idx="2">
+            <a:schemeClr val="accent1">
+              <a:shade val="50000"/>
+            </a:schemeClr>
+          </a:lnRef>
+          <a:fillRef idx="1">
+            <a:schemeClr val="accent1"/>
+          </a:fillRef>
+          <a:effectRef idx="0">
+            <a:schemeClr val="accent1"/>
+          </a:effectRef>
+          <a:fontRef idx="minor">
+            <a:schemeClr val="lt1"/>
+          </a:fontRef>
+        </p:style>
+        <p:txBody>
+          <a:bodyPr rtlCol="0" anchor="ctr"/>
+          <a:lstStyle/>
+          <a:p>
+            <a:pPr algn="ctr"/>
+            <a:r>
+              <a:rPr lang="zh-CN" altLang="en-US" sz="1400" b="1" dirty="0" smtClean="0">
+                <a:solidFill>
+                  <a:schemeClr val="tx1"/>
+                </a:solidFill>
+                <a:latin typeface="Times New Roman" panose="02020603050405020304" pitchFamily="18" charset="0"/>
+                <a:ea typeface="宋体" panose="02010600030101010101" pitchFamily="2" charset="-122"/>
+                <a:cs typeface="Times New Roman" panose="02020603050405020304" pitchFamily="18" charset="0"/>
+              </a:rPr>
+              <a:t>逐层预测</a:t>
+            </a:r>
+            <a:endParaRPr lang="en-US" altLang="zh-CN" sz="1400" b="1" dirty="0" smtClean="0">
+              <a:solidFill>
+                <a:schemeClr val="tx1"/>
+              </a:solidFill>
+              <a:latin typeface="Times New Roman" panose="02020603050405020304" pitchFamily="18" charset="0"/>
+              <a:ea typeface="宋体" panose="02010600030101010101" pitchFamily="2" charset="-122"/>
+              <a:cs typeface="Times New Roman" panose="02020603050405020304" pitchFamily="18" charset="0"/>
+            </a:endParaRPr>
+          </a:p>
+          <a:p>
+            <a:pPr algn="ctr"/>
+            <a:r>
+              <a:rPr lang="zh-CN" altLang="en-US" sz="1400" b="1" dirty="0" smtClean="0">
+                <a:solidFill>
+                  <a:schemeClr val="tx1"/>
+                </a:solidFill>
+                <a:latin typeface="Times New Roman" panose="02020603050405020304" pitchFamily="18" charset="0"/>
+                <a:ea typeface="宋体" panose="02010600030101010101" pitchFamily="2" charset="-122"/>
+                <a:cs typeface="Times New Roman" panose="02020603050405020304" pitchFamily="18" charset="0"/>
+              </a:rPr>
+              <a:t>计算时间</a:t>
+            </a:r>
+            <a:endParaRPr lang="zh-CN" altLang="en-US" sz="1400" b="1" dirty="0">
+              <a:solidFill>
+                <a:schemeClr val="tx1"/>
+              </a:solidFill>
+              <a:latin typeface="Times New Roman" panose="02020603050405020304" pitchFamily="18" charset="0"/>
+              <a:ea typeface="宋体" panose="02010600030101010101" pitchFamily="2" charset="-122"/>
+              <a:cs typeface="Times New Roman" panose="02020603050405020304" pitchFamily="18" charset="0"/>
+            </a:endParaRPr>
+          </a:p>
+        </p:txBody>
+      </p:sp>
+      <p:cxnSp>
+        <p:nvCxnSpPr>
+          <p:cNvPr id="70" name="直接箭头连接符 69"/>
+          <p:cNvCxnSpPr>
+            <a:stCxn id="66" idx="3"/>
+            <a:endCxn id="69" idx="1"/>
+          </p:cNvCxnSpPr>
+          <p:nvPr/>
+        </p:nvCxnSpPr>
+        <p:spPr>
+          <a:xfrm flipV="1">
+            <a:off x="6291323" y="1307900"/>
+            <a:ext cx="382215" cy="768"/>
+          </a:xfrm>
+          <a:prstGeom prst="straightConnector1">
+            <a:avLst/>
+          </a:prstGeom>
+          <a:ln w="19050">
+            <a:solidFill>
+              <a:schemeClr val="tx1"/>
+            </a:solidFill>
+            <a:tailEnd type="arrow"/>
+          </a:ln>
+        </p:spPr>
+        <p:style>
+          <a:lnRef idx="1">
+            <a:schemeClr val="dk1"/>
+          </a:lnRef>
+          <a:fillRef idx="0">
+            <a:schemeClr val="dk1"/>
+          </a:fillRef>
+          <a:effectRef idx="0">
+            <a:schemeClr val="dk1"/>
+          </a:effectRef>
+          <a:fontRef idx="minor">
+            <a:schemeClr val="tx1"/>
+          </a:fontRef>
+        </p:style>
+      </p:cxnSp>
+      <p:sp>
+        <p:nvSpPr>
+          <p:cNvPr id="71" name="文本框 70"/>
+          <p:cNvSpPr txBox="1"/>
+          <p:nvPr/>
+        </p:nvSpPr>
+        <p:spPr>
+          <a:xfrm>
+            <a:off x="4260409" y="856176"/>
+            <a:ext cx="875472" cy="461665"/>
+          </a:xfrm>
+          <a:prstGeom prst="rect">
+            <a:avLst/>
+          </a:prstGeom>
+          <a:noFill/>
+        </p:spPr>
+        <p:txBody>
+          <a:bodyPr wrap="square" rtlCol="0">
+            <a:spAutoFit/>
+          </a:bodyPr>
+          <a:lstStyle/>
+          <a:p>
+            <a:pPr algn="ctr"/>
+            <a:r>
+              <a:rPr lang="zh-CN" altLang="en-US" sz="1200" b="1" dirty="0" smtClean="0">
+                <a:latin typeface="Times New Roman" panose="02020603050405020304" pitchFamily="18" charset="0"/>
+                <a:ea typeface="宋体" panose="02010600030101010101" pitchFamily="2" charset="-122"/>
+                <a:cs typeface="Times New Roman" panose="02020603050405020304" pitchFamily="18" charset="0"/>
+              </a:rPr>
+              <a:t>基准测试数据集</a:t>
+            </a:r>
+            <a:endParaRPr lang="zh-CN" altLang="en-US" sz="1200" b="1" dirty="0">
+              <a:latin typeface="Times New Roman" panose="02020603050405020304" pitchFamily="18" charset="0"/>
+              <a:ea typeface="宋体" panose="02010600030101010101" pitchFamily="2" charset="-122"/>
+              <a:cs typeface="Times New Roman" panose="02020603050405020304" pitchFamily="18" charset="0"/>
+            </a:endParaRPr>
+          </a:p>
+        </p:txBody>
+      </p:sp>
+      <p:cxnSp>
+        <p:nvCxnSpPr>
+          <p:cNvPr id="3" name="肘形连接符 2"/>
+          <p:cNvCxnSpPr>
+            <a:stCxn id="60" idx="3"/>
+          </p:cNvCxnSpPr>
+          <p:nvPr/>
+        </p:nvCxnSpPr>
+        <p:spPr>
+          <a:xfrm>
+            <a:off x="4137614" y="649059"/>
+            <a:ext cx="135532" cy="642101"/>
+          </a:xfrm>
+          <a:prstGeom prst="bentConnector2">
+            <a:avLst/>
+          </a:prstGeom>
+          <a:ln w="19050">
+            <a:solidFill>
+              <a:schemeClr val="tx1"/>
+            </a:solidFill>
+            <a:tailEnd type="arrow" w="med" len="sm"/>
+          </a:ln>
+        </p:spPr>
+        <p:style>
+          <a:lnRef idx="1">
+            <a:schemeClr val="dk1"/>
+          </a:lnRef>
+          <a:fillRef idx="0">
+            <a:schemeClr val="dk1"/>
+          </a:fillRef>
+          <a:effectRef idx="0">
+            <a:schemeClr val="dk1"/>
+          </a:effectRef>
+          <a:fontRef idx="minor">
+            <a:schemeClr val="tx1"/>
+          </a:fontRef>
+        </p:style>
+      </p:cxnSp>
+      <p:sp>
+        <p:nvSpPr>
+          <p:cNvPr id="60" name="矩形 59"/>
+          <p:cNvSpPr/>
+          <p:nvPr/>
+        </p:nvSpPr>
+        <p:spPr>
+          <a:xfrm>
+            <a:off x="2844075" y="398890"/>
+            <a:ext cx="1293539" cy="500338"/>
+          </a:xfrm>
+          <a:prstGeom prst="rect">
+            <a:avLst/>
+          </a:prstGeom>
+          <a:solidFill>
+            <a:schemeClr val="bg1">
+              <a:lumMod val="95000"/>
+            </a:schemeClr>
+          </a:solidFill>
+          <a:ln>
+            <a:solidFill>
+              <a:schemeClr val="bg1">
+                <a:lumMod val="95000"/>
+              </a:schemeClr>
+            </a:solidFill>
+          </a:ln>
+        </p:spPr>
+        <p:style>
+          <a:lnRef idx="2">
+            <a:schemeClr val="accent1">
+              <a:shade val="50000"/>
+            </a:schemeClr>
+          </a:lnRef>
+          <a:fillRef idx="1">
+            <a:schemeClr val="accent1"/>
+          </a:fillRef>
+          <a:effectRef idx="0">
+            <a:schemeClr val="accent1"/>
+          </a:effectRef>
+          <a:fontRef idx="minor">
+            <a:schemeClr val="lt1"/>
+          </a:fontRef>
+        </p:style>
+        <p:txBody>
+          <a:bodyPr rtlCol="0" anchor="ctr"/>
+          <a:lstStyle/>
+          <a:p>
+            <a:pPr algn="ctr"/>
+            <a:r>
+              <a:rPr lang="zh-CN" altLang="en-US" sz="1400" b="1" dirty="0" smtClean="0">
+                <a:solidFill>
+                  <a:schemeClr val="tx1"/>
+                </a:solidFill>
+                <a:latin typeface="Times New Roman" panose="02020603050405020304" pitchFamily="18" charset="0"/>
+                <a:ea typeface="宋体" panose="02010600030101010101" pitchFamily="2" charset="-122"/>
+                <a:cs typeface="Times New Roman" panose="02020603050405020304" pitchFamily="18" charset="0"/>
+              </a:rPr>
+              <a:t>特征扩充</a:t>
+            </a:r>
+            <a:endParaRPr lang="zh-CN" altLang="en-US" sz="1400" b="1" dirty="0">
+              <a:solidFill>
+                <a:schemeClr val="tx1"/>
+              </a:solidFill>
+              <a:latin typeface="Times New Roman" panose="02020603050405020304" pitchFamily="18" charset="0"/>
+              <a:ea typeface="宋体" panose="02010600030101010101" pitchFamily="2" charset="-122"/>
+              <a:cs typeface="Times New Roman" panose="02020603050405020304" pitchFamily="18" charset="0"/>
+            </a:endParaRPr>
+          </a:p>
+        </p:txBody>
+      </p:sp>
+      <p:sp>
+        <p:nvSpPr>
+          <p:cNvPr id="57" name="圆角矩形 56"/>
+          <p:cNvSpPr/>
+          <p:nvPr/>
+        </p:nvSpPr>
+        <p:spPr>
+          <a:xfrm>
+            <a:off x="613063" y="3844781"/>
+            <a:ext cx="7614996" cy="2416319"/>
+          </a:xfrm>
+          <a:prstGeom prst="roundRect">
+            <a:avLst/>
+          </a:prstGeom>
+          <a:noFill/>
+          <a:ln w="19050">
+            <a:solidFill>
+              <a:schemeClr val="tx1"/>
+            </a:solidFill>
+            <a:prstDash val="dash"/>
+          </a:ln>
+        </p:spPr>
+        <p:style>
+          <a:lnRef idx="2">
+            <a:schemeClr val="accent4">
+              <a:shade val="50000"/>
+            </a:schemeClr>
+          </a:lnRef>
+          <a:fillRef idx="1">
+            <a:schemeClr val="accent4"/>
+          </a:fillRef>
+          <a:effectRef idx="0">
+            <a:schemeClr val="accent4"/>
+          </a:effectRef>
+          <a:fontRef idx="minor">
+            <a:schemeClr val="lt1"/>
+          </a:fontRef>
+        </p:style>
+        <p:txBody>
+          <a:bodyPr rtlCol="0" anchor="ctr"/>
+          <a:lstStyle/>
+          <a:p>
+            <a:pPr algn="ctr"/>
+            <a:endParaRPr lang="zh-CN" altLang="en-US" sz="1200">
+              <a:latin typeface="Times New Roman" panose="02020603050405020304" pitchFamily="18" charset="0"/>
+              <a:ea typeface="宋体" panose="02010600030101010101" pitchFamily="2" charset="-122"/>
+              <a:cs typeface="Times New Roman" panose="02020603050405020304" pitchFamily="18" charset="0"/>
+            </a:endParaRPr>
+          </a:p>
+        </p:txBody>
+      </p:sp>
+      <p:sp>
+        <p:nvSpPr>
+          <p:cNvPr id="72" name="文本框 71"/>
+          <p:cNvSpPr txBox="1"/>
+          <p:nvPr/>
+        </p:nvSpPr>
+        <p:spPr>
+          <a:xfrm>
+            <a:off x="5879158" y="4136899"/>
+            <a:ext cx="2313125" cy="400110"/>
+          </a:xfrm>
+          <a:prstGeom prst="rect">
+            <a:avLst/>
+          </a:prstGeom>
+          <a:noFill/>
+        </p:spPr>
+        <p:txBody>
+          <a:bodyPr wrap="square" rtlCol="0">
+            <a:spAutoFit/>
+          </a:bodyPr>
+          <a:lstStyle/>
+          <a:p>
+            <a:pPr algn="ctr"/>
+            <a:r>
+              <a:rPr lang="zh-CN" altLang="en-US" sz="2000" b="1" dirty="0" smtClean="0">
+                <a:ln w="0"/>
+                <a:solidFill>
+                  <a:schemeClr val="accent1">
+                    <a:lumMod val="50000"/>
+                  </a:schemeClr>
+                </a:solidFill>
+                <a:latin typeface="Times New Roman" panose="02020603050405020304" pitchFamily="18" charset="0"/>
+                <a:ea typeface="宋体" panose="02010600030101010101" pitchFamily="2" charset="-122"/>
+                <a:cs typeface="Times New Roman" panose="02020603050405020304" pitchFamily="18" charset="0"/>
+              </a:rPr>
+              <a:t>通信时间预测</a:t>
+            </a:r>
+            <a:endParaRPr lang="zh-CN" altLang="en-US" sz="2000" b="1" dirty="0">
+              <a:ln w="0"/>
+              <a:solidFill>
+                <a:schemeClr val="accent1">
+                  <a:lumMod val="50000"/>
+                </a:schemeClr>
+              </a:solidFill>
+              <a:latin typeface="Times New Roman" panose="02020603050405020304" pitchFamily="18" charset="0"/>
+              <a:ea typeface="宋体" panose="02010600030101010101" pitchFamily="2" charset="-122"/>
+              <a:cs typeface="Times New Roman" panose="02020603050405020304" pitchFamily="18" charset="0"/>
+            </a:endParaRPr>
+          </a:p>
+        </p:txBody>
+      </p:sp>
+      <p:sp>
+        <p:nvSpPr>
+          <p:cNvPr id="73" name="矩形 72"/>
+          <p:cNvSpPr/>
+          <p:nvPr/>
+        </p:nvSpPr>
+        <p:spPr>
+          <a:xfrm>
+            <a:off x="910243" y="4015381"/>
+            <a:ext cx="1952055" cy="493345"/>
+          </a:xfrm>
+          <a:prstGeom prst="rect">
+            <a:avLst/>
+          </a:prstGeom>
+          <a:solidFill>
+            <a:schemeClr val="bg1">
+              <a:lumMod val="95000"/>
+            </a:schemeClr>
+          </a:solidFill>
+          <a:ln>
+            <a:solidFill>
+              <a:schemeClr val="bg1">
+                <a:lumMod val="95000"/>
+              </a:schemeClr>
+            </a:solidFill>
+          </a:ln>
+        </p:spPr>
+        <p:style>
+          <a:lnRef idx="2">
+            <a:schemeClr val="accent1">
+              <a:shade val="50000"/>
+            </a:schemeClr>
+          </a:lnRef>
+          <a:fillRef idx="1">
+            <a:schemeClr val="accent1"/>
+          </a:fillRef>
+          <a:effectRef idx="0">
+            <a:schemeClr val="accent1"/>
+          </a:effectRef>
+          <a:fontRef idx="minor">
+            <a:schemeClr val="lt1"/>
+          </a:fontRef>
+        </p:style>
+        <p:txBody>
+          <a:bodyPr rtlCol="0" anchor="ctr"/>
+          <a:lstStyle/>
+          <a:p>
+            <a:pPr algn="ctr"/>
+            <a:r>
+              <a:rPr lang="zh-CN" altLang="en-US" sz="1400" b="1" dirty="0" smtClean="0">
+                <a:solidFill>
+                  <a:schemeClr val="tx1"/>
+                </a:solidFill>
+                <a:latin typeface="Times New Roman" panose="02020603050405020304" pitchFamily="18" charset="0"/>
+                <a:ea typeface="宋体" panose="02010600030101010101" pitchFamily="2" charset="-122"/>
+                <a:cs typeface="Times New Roman" panose="02020603050405020304" pitchFamily="18" charset="0"/>
+              </a:rPr>
+              <a:t>实时吞吐量分析</a:t>
+            </a:r>
+            <a:endParaRPr lang="zh-CN" altLang="en-US" sz="1400" b="1" dirty="0">
+              <a:solidFill>
+                <a:schemeClr val="tx1"/>
+              </a:solidFill>
+              <a:latin typeface="Times New Roman" panose="02020603050405020304" pitchFamily="18" charset="0"/>
+              <a:ea typeface="宋体" panose="02010600030101010101" pitchFamily="2" charset="-122"/>
+              <a:cs typeface="Times New Roman" panose="02020603050405020304" pitchFamily="18" charset="0"/>
+            </a:endParaRPr>
+          </a:p>
+        </p:txBody>
+      </p:sp>
+      <p:sp>
+        <p:nvSpPr>
+          <p:cNvPr id="75" name="矩形 74"/>
+          <p:cNvSpPr/>
+          <p:nvPr/>
+        </p:nvSpPr>
+        <p:spPr>
+          <a:xfrm>
+            <a:off x="3252565" y="4015381"/>
+            <a:ext cx="2556622" cy="493345"/>
+          </a:xfrm>
+          <a:prstGeom prst="rect">
+            <a:avLst/>
+          </a:prstGeom>
+          <a:solidFill>
+            <a:schemeClr val="bg1">
+              <a:lumMod val="95000"/>
+            </a:schemeClr>
+          </a:solidFill>
+          <a:ln>
+            <a:solidFill>
+              <a:schemeClr val="bg1">
+                <a:lumMod val="95000"/>
+              </a:schemeClr>
+            </a:solidFill>
+          </a:ln>
+        </p:spPr>
+        <p:style>
+          <a:lnRef idx="2">
+            <a:schemeClr val="accent1">
+              <a:shade val="50000"/>
+            </a:schemeClr>
+          </a:lnRef>
+          <a:fillRef idx="1">
+            <a:schemeClr val="accent1"/>
+          </a:fillRef>
+          <a:effectRef idx="0">
+            <a:schemeClr val="accent1"/>
+          </a:effectRef>
+          <a:fontRef idx="minor">
+            <a:schemeClr val="lt1"/>
+          </a:fontRef>
+        </p:style>
+        <p:txBody>
+          <a:bodyPr rtlCol="0" anchor="ctr"/>
+          <a:lstStyle/>
+          <a:p>
+            <a:pPr algn="ctr"/>
+            <a:r>
+              <a:rPr lang="zh-CN" altLang="en-US" sz="1400" b="1" dirty="0" smtClean="0">
+                <a:solidFill>
+                  <a:schemeClr val="tx1"/>
+                </a:solidFill>
+                <a:latin typeface="Times New Roman" panose="02020603050405020304" pitchFamily="18" charset="0"/>
+                <a:ea typeface="宋体" panose="02010600030101010101" pitchFamily="2" charset="-122"/>
+                <a:cs typeface="Times New Roman" panose="02020603050405020304" pitchFamily="18" charset="0"/>
+              </a:rPr>
+              <a:t>建立单链路通信时间预测模型</a:t>
+            </a:r>
+            <a:endParaRPr lang="zh-CN" altLang="en-US" sz="1400" b="1" dirty="0">
+              <a:solidFill>
+                <a:schemeClr val="tx1"/>
+              </a:solidFill>
+              <a:latin typeface="Times New Roman" panose="02020603050405020304" pitchFamily="18" charset="0"/>
+              <a:ea typeface="宋体" panose="02010600030101010101" pitchFamily="2" charset="-122"/>
+              <a:cs typeface="Times New Roman" panose="02020603050405020304" pitchFamily="18" charset="0"/>
+            </a:endParaRPr>
+          </a:p>
+        </p:txBody>
+      </p:sp>
+      <p:sp>
+        <p:nvSpPr>
+          <p:cNvPr id="76" name="矩形 75"/>
+          <p:cNvSpPr/>
+          <p:nvPr/>
+        </p:nvSpPr>
+        <p:spPr>
+          <a:xfrm>
+            <a:off x="3252564" y="5587647"/>
+            <a:ext cx="2556623" cy="493345"/>
+          </a:xfrm>
+          <a:prstGeom prst="rect">
+            <a:avLst/>
+          </a:prstGeom>
+          <a:solidFill>
+            <a:schemeClr val="bg1">
+              <a:lumMod val="95000"/>
+            </a:schemeClr>
+          </a:solidFill>
+          <a:ln>
+            <a:solidFill>
+              <a:srgbClr val="F2F2F2"/>
+            </a:solidFill>
+          </a:ln>
+        </p:spPr>
+        <p:style>
+          <a:lnRef idx="2">
+            <a:schemeClr val="accent1">
+              <a:shade val="50000"/>
+            </a:schemeClr>
+          </a:lnRef>
+          <a:fillRef idx="1">
+            <a:schemeClr val="accent1"/>
+          </a:fillRef>
+          <a:effectRef idx="0">
+            <a:schemeClr val="accent1"/>
+          </a:effectRef>
+          <a:fontRef idx="minor">
+            <a:schemeClr val="lt1"/>
+          </a:fontRef>
+        </p:style>
+        <p:txBody>
+          <a:bodyPr rtlCol="0" anchor="ctr"/>
+          <a:lstStyle/>
+          <a:p>
+            <a:pPr algn="ctr"/>
+            <a:r>
+              <a:rPr lang="zh-CN" altLang="en-US" sz="1400" b="1" dirty="0" smtClean="0">
+                <a:solidFill>
+                  <a:schemeClr val="tx1"/>
+                </a:solidFill>
+                <a:latin typeface="Times New Roman" panose="02020603050405020304" pitchFamily="18" charset="0"/>
+                <a:ea typeface="宋体" panose="02010600030101010101" pitchFamily="2" charset="-122"/>
+                <a:cs typeface="Times New Roman" panose="02020603050405020304" pitchFamily="18" charset="0"/>
+              </a:rPr>
+              <a:t>建立集群通信时间预测模型</a:t>
+            </a:r>
+            <a:endParaRPr lang="zh-CN" altLang="en-US" sz="1400" b="1" dirty="0">
+              <a:solidFill>
+                <a:schemeClr val="tx1"/>
+              </a:solidFill>
+              <a:latin typeface="Times New Roman" panose="02020603050405020304" pitchFamily="18" charset="0"/>
+              <a:ea typeface="宋体" panose="02010600030101010101" pitchFamily="2" charset="-122"/>
+              <a:cs typeface="Times New Roman" panose="02020603050405020304" pitchFamily="18" charset="0"/>
+            </a:endParaRPr>
+          </a:p>
+        </p:txBody>
+      </p:sp>
+      <p:cxnSp>
+        <p:nvCxnSpPr>
+          <p:cNvPr id="77" name="直接箭头连接符 76"/>
+          <p:cNvCxnSpPr>
+            <a:stCxn id="73" idx="3"/>
+            <a:endCxn id="75" idx="1"/>
+          </p:cNvCxnSpPr>
+          <p:nvPr/>
+        </p:nvCxnSpPr>
+        <p:spPr>
+          <a:xfrm>
+            <a:off x="2862298" y="4262054"/>
+            <a:ext cx="395140" cy="0"/>
+          </a:xfrm>
+          <a:prstGeom prst="straightConnector1">
+            <a:avLst/>
+          </a:prstGeom>
+          <a:ln w="19050">
+            <a:solidFill>
+              <a:schemeClr val="tx1"/>
+            </a:solidFill>
+            <a:tailEnd type="arrow" w="med" len="sm"/>
+          </a:ln>
+        </p:spPr>
+        <p:style>
+          <a:lnRef idx="1">
+            <a:schemeClr val="dk1"/>
+          </a:lnRef>
+          <a:fillRef idx="0">
+            <a:schemeClr val="dk1"/>
+          </a:fillRef>
+          <a:effectRef idx="0">
+            <a:schemeClr val="dk1"/>
+          </a:effectRef>
+          <a:fontRef idx="minor">
+            <a:schemeClr val="tx1"/>
+          </a:fontRef>
+        </p:style>
+      </p:cxnSp>
+      <p:cxnSp>
+        <p:nvCxnSpPr>
+          <p:cNvPr id="78" name="直接箭头连接符 77"/>
+          <p:cNvCxnSpPr>
+            <a:stCxn id="90" idx="3"/>
+            <a:endCxn id="76" idx="1"/>
+          </p:cNvCxnSpPr>
+          <p:nvPr/>
+        </p:nvCxnSpPr>
+        <p:spPr>
+          <a:xfrm>
+            <a:off x="2862297" y="5834320"/>
+            <a:ext cx="395140" cy="0"/>
+          </a:xfrm>
+          <a:prstGeom prst="straightConnector1">
+            <a:avLst/>
+          </a:prstGeom>
+          <a:ln w="19050">
+            <a:solidFill>
+              <a:schemeClr val="tx1"/>
+            </a:solidFill>
+            <a:tailEnd type="arrow" w="med" len="sm"/>
+          </a:ln>
+        </p:spPr>
+        <p:style>
+          <a:lnRef idx="1">
+            <a:schemeClr val="dk1"/>
+          </a:lnRef>
+          <a:fillRef idx="0">
+            <a:schemeClr val="dk1"/>
+          </a:fillRef>
+          <a:effectRef idx="0">
+            <a:schemeClr val="dk1"/>
+          </a:effectRef>
+          <a:fontRef idx="minor">
+            <a:schemeClr val="tx1"/>
+          </a:fontRef>
+        </p:style>
+      </p:cxnSp>
+      <p:sp>
+        <p:nvSpPr>
+          <p:cNvPr id="79" name="矩形 78"/>
+          <p:cNvSpPr/>
+          <p:nvPr/>
+        </p:nvSpPr>
+        <p:spPr>
+          <a:xfrm>
+            <a:off x="6299512" y="4948744"/>
+            <a:ext cx="1653044" cy="355198"/>
+          </a:xfrm>
+          <a:prstGeom prst="rect">
+            <a:avLst/>
+          </a:prstGeom>
+          <a:solidFill>
+            <a:schemeClr val="bg1">
+              <a:lumMod val="95000"/>
+            </a:schemeClr>
+          </a:solidFill>
+          <a:ln>
+            <a:solidFill>
+              <a:schemeClr val="bg1">
+                <a:lumMod val="95000"/>
+              </a:schemeClr>
+            </a:solidFill>
+          </a:ln>
+        </p:spPr>
+        <p:style>
+          <a:lnRef idx="2">
+            <a:schemeClr val="accent1">
+              <a:shade val="50000"/>
+            </a:schemeClr>
+          </a:lnRef>
+          <a:fillRef idx="1">
+            <a:schemeClr val="accent1"/>
+          </a:fillRef>
+          <a:effectRef idx="0">
+            <a:schemeClr val="accent1"/>
+          </a:effectRef>
+          <a:fontRef idx="minor">
+            <a:schemeClr val="lt1"/>
+          </a:fontRef>
+        </p:style>
+        <p:txBody>
+          <a:bodyPr rtlCol="0" anchor="ctr"/>
+          <a:lstStyle/>
+          <a:p>
+            <a:pPr algn="ctr"/>
+            <a:r>
+              <a:rPr lang="zh-CN" altLang="en-US" sz="1400" b="1" dirty="0" smtClean="0">
+                <a:solidFill>
+                  <a:schemeClr val="tx1"/>
+                </a:solidFill>
+                <a:latin typeface="Times New Roman" panose="02020603050405020304" pitchFamily="18" charset="0"/>
+                <a:ea typeface="宋体" panose="02010600030101010101" pitchFamily="2" charset="-122"/>
+                <a:cs typeface="Times New Roman" panose="02020603050405020304" pitchFamily="18" charset="0"/>
+              </a:rPr>
+              <a:t>预测通信时间</a:t>
+            </a:r>
+            <a:endParaRPr lang="zh-CN" altLang="en-US" sz="1400" b="1" dirty="0">
+              <a:solidFill>
+                <a:schemeClr val="tx1"/>
+              </a:solidFill>
+              <a:latin typeface="Times New Roman" panose="02020603050405020304" pitchFamily="18" charset="0"/>
+              <a:ea typeface="宋体" panose="02010600030101010101" pitchFamily="2" charset="-122"/>
+              <a:cs typeface="Times New Roman" panose="02020603050405020304" pitchFamily="18" charset="0"/>
+            </a:endParaRPr>
+          </a:p>
+        </p:txBody>
+      </p:sp>
+      <p:sp>
+        <p:nvSpPr>
+          <p:cNvPr id="90" name="矩形 89"/>
+          <p:cNvSpPr/>
+          <p:nvPr/>
+        </p:nvSpPr>
+        <p:spPr>
+          <a:xfrm>
+            <a:off x="910242" y="5587647"/>
+            <a:ext cx="1952055" cy="493345"/>
+          </a:xfrm>
+          <a:prstGeom prst="rect">
+            <a:avLst/>
+          </a:prstGeom>
+          <a:solidFill>
+            <a:schemeClr val="bg1">
+              <a:lumMod val="95000"/>
+            </a:schemeClr>
+          </a:solidFill>
+          <a:ln>
+            <a:solidFill>
+              <a:schemeClr val="bg1">
+                <a:lumMod val="95000"/>
+              </a:schemeClr>
+            </a:solidFill>
+          </a:ln>
+        </p:spPr>
+        <p:style>
+          <a:lnRef idx="2">
+            <a:schemeClr val="accent1">
+              <a:shade val="50000"/>
+            </a:schemeClr>
+          </a:lnRef>
+          <a:fillRef idx="1">
+            <a:schemeClr val="accent1"/>
+          </a:fillRef>
+          <a:effectRef idx="0">
+            <a:schemeClr val="accent1"/>
+          </a:effectRef>
+          <a:fontRef idx="minor">
+            <a:schemeClr val="lt1"/>
+          </a:fontRef>
+        </p:style>
+        <p:txBody>
+          <a:bodyPr rtlCol="0" anchor="ctr"/>
+          <a:lstStyle/>
+          <a:p>
+            <a:pPr algn="ctr"/>
+            <a:r>
+              <a:rPr lang="zh-CN" altLang="en-US" sz="1400" b="1" dirty="0" smtClean="0">
+                <a:solidFill>
+                  <a:schemeClr val="tx1"/>
+                </a:solidFill>
+                <a:latin typeface="Times New Roman" panose="02020603050405020304" pitchFamily="18" charset="0"/>
+                <a:ea typeface="宋体" panose="02010600030101010101" pitchFamily="2" charset="-122"/>
+                <a:cs typeface="Times New Roman" panose="02020603050405020304" pitchFamily="18" charset="0"/>
+              </a:rPr>
+              <a:t>通信拓扑分析</a:t>
+            </a:r>
+            <a:endParaRPr lang="zh-CN" altLang="en-US" sz="1400" b="1" dirty="0">
+              <a:solidFill>
+                <a:schemeClr val="tx1"/>
+              </a:solidFill>
+              <a:latin typeface="Times New Roman" panose="02020603050405020304" pitchFamily="18" charset="0"/>
+              <a:ea typeface="宋体" panose="02010600030101010101" pitchFamily="2" charset="-122"/>
+              <a:cs typeface="Times New Roman" panose="02020603050405020304" pitchFamily="18" charset="0"/>
+            </a:endParaRPr>
+          </a:p>
+        </p:txBody>
+      </p:sp>
+      <p:sp>
+        <p:nvSpPr>
+          <p:cNvPr id="116" name="矩形 115"/>
+          <p:cNvSpPr/>
+          <p:nvPr/>
+        </p:nvSpPr>
+        <p:spPr>
+          <a:xfrm>
+            <a:off x="4403423" y="2313337"/>
+            <a:ext cx="1559977" cy="396369"/>
+          </a:xfrm>
+          <a:prstGeom prst="rect">
+            <a:avLst/>
+          </a:prstGeom>
+          <a:solidFill>
+            <a:schemeClr val="bg1">
+              <a:lumMod val="95000"/>
+            </a:schemeClr>
+          </a:solidFill>
+          <a:ln>
+            <a:solidFill>
+              <a:schemeClr val="bg1">
+                <a:lumMod val="95000"/>
+              </a:schemeClr>
+            </a:solidFill>
+          </a:ln>
+        </p:spPr>
+        <p:style>
+          <a:lnRef idx="2">
+            <a:schemeClr val="accent1">
+              <a:shade val="50000"/>
+            </a:schemeClr>
+          </a:lnRef>
+          <a:fillRef idx="1">
+            <a:schemeClr val="accent1"/>
+          </a:fillRef>
+          <a:effectRef idx="0">
+            <a:schemeClr val="accent1"/>
+          </a:effectRef>
+          <a:fontRef idx="minor">
+            <a:schemeClr val="lt1"/>
+          </a:fontRef>
+        </p:style>
+        <p:txBody>
+          <a:bodyPr rtlCol="0" anchor="ctr"/>
+          <a:lstStyle/>
+          <a:p>
+            <a:pPr algn="ctr"/>
+            <a:r>
+              <a:rPr lang="zh-CN" altLang="en-US" sz="1400" b="1" dirty="0" smtClean="0">
+                <a:solidFill>
+                  <a:schemeClr val="tx1"/>
+                </a:solidFill>
+                <a:latin typeface="Times New Roman" panose="02020603050405020304" pitchFamily="18" charset="0"/>
+                <a:ea typeface="宋体" panose="02010600030101010101" pitchFamily="2" charset="-122"/>
+                <a:cs typeface="Times New Roman" panose="02020603050405020304" pitchFamily="18" charset="0"/>
+              </a:rPr>
+              <a:t>操作队列</a:t>
+            </a:r>
+            <a:endParaRPr lang="zh-CN" altLang="en-US" sz="1600" b="1" dirty="0">
+              <a:solidFill>
+                <a:schemeClr val="tx1"/>
+              </a:solidFill>
+              <a:latin typeface="Times New Roman" panose="02020603050405020304" pitchFamily="18" charset="0"/>
+              <a:ea typeface="宋体" panose="02010600030101010101" pitchFamily="2" charset="-122"/>
+              <a:cs typeface="Times New Roman" panose="02020603050405020304" pitchFamily="18" charset="0"/>
+            </a:endParaRPr>
+          </a:p>
+        </p:txBody>
+      </p:sp>
+      <p:sp>
+        <p:nvSpPr>
+          <p:cNvPr id="117" name="矩形 116"/>
+          <p:cNvSpPr/>
+          <p:nvPr/>
+        </p:nvSpPr>
+        <p:spPr>
+          <a:xfrm>
+            <a:off x="4403423" y="3077773"/>
+            <a:ext cx="1559977" cy="396369"/>
+          </a:xfrm>
+          <a:prstGeom prst="rect">
+            <a:avLst/>
+          </a:prstGeom>
+          <a:solidFill>
+            <a:schemeClr val="bg1">
+              <a:lumMod val="95000"/>
+            </a:schemeClr>
+          </a:solidFill>
+          <a:ln>
+            <a:solidFill>
+              <a:schemeClr val="bg1">
+                <a:lumMod val="95000"/>
+              </a:schemeClr>
+            </a:solidFill>
+          </a:ln>
+        </p:spPr>
+        <p:style>
+          <a:lnRef idx="2">
+            <a:schemeClr val="accent1">
+              <a:shade val="50000"/>
+            </a:schemeClr>
+          </a:lnRef>
+          <a:fillRef idx="1">
+            <a:schemeClr val="accent1"/>
+          </a:fillRef>
+          <a:effectRef idx="0">
+            <a:schemeClr val="accent1"/>
+          </a:effectRef>
+          <a:fontRef idx="minor">
+            <a:schemeClr val="lt1"/>
+          </a:fontRef>
+        </p:style>
+        <p:txBody>
+          <a:bodyPr rtlCol="0" anchor="ctr"/>
+          <a:lstStyle/>
+          <a:p>
+            <a:pPr algn="ctr"/>
+            <a:r>
+              <a:rPr lang="zh-CN" altLang="en-US" sz="1400" b="1" dirty="0" smtClean="0">
+                <a:solidFill>
+                  <a:schemeClr val="tx1"/>
+                </a:solidFill>
+                <a:latin typeface="Times New Roman" panose="02020603050405020304" pitchFamily="18" charset="0"/>
+                <a:ea typeface="宋体" panose="02010600030101010101" pitchFamily="2" charset="-122"/>
+                <a:cs typeface="Times New Roman" panose="02020603050405020304" pitchFamily="18" charset="0"/>
+              </a:rPr>
+              <a:t>设备时间</a:t>
+            </a:r>
+            <a:endParaRPr lang="zh-CN" altLang="en-US" sz="1600" b="1" dirty="0">
+              <a:solidFill>
+                <a:schemeClr val="tx1"/>
+              </a:solidFill>
+              <a:latin typeface="Times New Roman" panose="02020603050405020304" pitchFamily="18" charset="0"/>
+              <a:ea typeface="宋体" panose="02010600030101010101" pitchFamily="2" charset="-122"/>
+              <a:cs typeface="Times New Roman" panose="02020603050405020304" pitchFamily="18" charset="0"/>
+            </a:endParaRPr>
+          </a:p>
+        </p:txBody>
+      </p:sp>
+      <p:cxnSp>
+        <p:nvCxnSpPr>
+          <p:cNvPr id="122" name="肘形连接符 121"/>
+          <p:cNvCxnSpPr>
+            <a:stCxn id="116" idx="1"/>
+            <a:endCxn id="117" idx="1"/>
+          </p:cNvCxnSpPr>
+          <p:nvPr/>
+        </p:nvCxnSpPr>
+        <p:spPr>
+          <a:xfrm rot="10800000" flipV="1">
+            <a:off x="4403423" y="2511522"/>
+            <a:ext cx="12700" cy="764436"/>
+          </a:xfrm>
+          <a:prstGeom prst="bentConnector3">
+            <a:avLst>
+              <a:gd name="adj1" fmla="val 1253165"/>
+            </a:avLst>
+          </a:prstGeom>
+          <a:ln w="19050">
+            <a:solidFill>
+              <a:schemeClr val="tx1"/>
+            </a:solidFill>
+          </a:ln>
+        </p:spPr>
+        <p:style>
+          <a:lnRef idx="1">
+            <a:schemeClr val="accent1"/>
+          </a:lnRef>
+          <a:fillRef idx="0">
+            <a:schemeClr val="accent1"/>
+          </a:fillRef>
+          <a:effectRef idx="0">
+            <a:schemeClr val="accent1"/>
+          </a:effectRef>
+          <a:fontRef idx="minor">
+            <a:schemeClr val="tx1"/>
+          </a:fontRef>
+        </p:style>
+      </p:cxnSp>
+      <p:cxnSp>
+        <p:nvCxnSpPr>
+          <p:cNvPr id="126" name="直接箭头连接符 125"/>
+          <p:cNvCxnSpPr>
+            <a:endCxn id="83" idx="3"/>
+          </p:cNvCxnSpPr>
+          <p:nvPr/>
+        </p:nvCxnSpPr>
+        <p:spPr>
+          <a:xfrm flipH="1">
+            <a:off x="3978230" y="2890893"/>
+            <a:ext cx="273653" cy="437"/>
+          </a:xfrm>
+          <a:prstGeom prst="straightConnector1">
+            <a:avLst/>
+          </a:prstGeom>
+          <a:ln w="19050">
+            <a:solidFill>
+              <a:schemeClr val="tx1"/>
+            </a:solidFill>
+            <a:tailEnd type="arrow" w="med" len="sm"/>
+          </a:ln>
+        </p:spPr>
+        <p:style>
+          <a:lnRef idx="1">
+            <a:schemeClr val="dk1"/>
+          </a:lnRef>
+          <a:fillRef idx="0">
+            <a:schemeClr val="dk1"/>
+          </a:fillRef>
+          <a:effectRef idx="0">
+            <a:schemeClr val="dk1"/>
+          </a:effectRef>
+          <a:fontRef idx="minor">
+            <a:schemeClr val="tx1"/>
+          </a:fontRef>
+        </p:style>
+      </p:cxnSp>
+      <p:cxnSp>
+        <p:nvCxnSpPr>
+          <p:cNvPr id="86" name="肘形连接符 85"/>
+          <p:cNvCxnSpPr>
+            <a:stCxn id="69" idx="3"/>
+          </p:cNvCxnSpPr>
+          <p:nvPr/>
+        </p:nvCxnSpPr>
+        <p:spPr>
+          <a:xfrm flipH="1">
+            <a:off x="6286940" y="1307900"/>
+            <a:ext cx="1665616" cy="1004416"/>
+          </a:xfrm>
+          <a:prstGeom prst="bentConnector3">
+            <a:avLst>
+              <a:gd name="adj1" fmla="val -9608"/>
+            </a:avLst>
+          </a:prstGeom>
+          <a:ln w="19050">
+            <a:solidFill>
+              <a:schemeClr val="tx1"/>
+            </a:solidFill>
+            <a:tailEnd type="arrow" w="med" len="sm"/>
+          </a:ln>
+        </p:spPr>
+        <p:style>
+          <a:lnRef idx="1">
+            <a:schemeClr val="dk1"/>
+          </a:lnRef>
+          <a:fillRef idx="0">
+            <a:schemeClr val="dk1"/>
+          </a:fillRef>
+          <a:effectRef idx="0">
+            <a:schemeClr val="dk1"/>
+          </a:effectRef>
+          <a:fontRef idx="minor">
+            <a:schemeClr val="tx1"/>
+          </a:fontRef>
+        </p:style>
+      </p:cxnSp>
+      <p:cxnSp>
+        <p:nvCxnSpPr>
+          <p:cNvPr id="87" name="肘形连接符 86"/>
+          <p:cNvCxnSpPr>
+            <a:stCxn id="79" idx="3"/>
+          </p:cNvCxnSpPr>
+          <p:nvPr/>
+        </p:nvCxnSpPr>
+        <p:spPr>
+          <a:xfrm flipH="1" flipV="1">
+            <a:off x="6291323" y="3287291"/>
+            <a:ext cx="1661233" cy="1839052"/>
+          </a:xfrm>
+          <a:prstGeom prst="bentConnector4">
+            <a:avLst>
+              <a:gd name="adj1" fmla="val -8792"/>
+              <a:gd name="adj2" fmla="val 100062"/>
+            </a:avLst>
+          </a:prstGeom>
+          <a:ln w="19050">
+            <a:solidFill>
+              <a:schemeClr val="tx1"/>
+            </a:solidFill>
+            <a:headEnd type="none"/>
+            <a:tailEnd type="arrow" w="med" len="sm"/>
+          </a:ln>
+        </p:spPr>
+        <p:style>
+          <a:lnRef idx="1">
+            <a:schemeClr val="dk1"/>
+          </a:lnRef>
+          <a:fillRef idx="0">
+            <a:schemeClr val="dk1"/>
+          </a:fillRef>
+          <a:effectRef idx="0">
+            <a:schemeClr val="dk1"/>
+          </a:effectRef>
+          <a:fontRef idx="minor">
+            <a:schemeClr val="tx1"/>
+          </a:fontRef>
+        </p:style>
+      </p:cxnSp>
+      <p:sp>
+        <p:nvSpPr>
+          <p:cNvPr id="10" name="加号 9"/>
+          <p:cNvSpPr/>
+          <p:nvPr/>
+        </p:nvSpPr>
+        <p:spPr>
+          <a:xfrm>
+            <a:off x="5062210" y="2756287"/>
+            <a:ext cx="257462" cy="264585"/>
+          </a:xfrm>
+          <a:prstGeom prst="mathPlus">
+            <a:avLst>
+              <a:gd name="adj1" fmla="val 16318"/>
+            </a:avLst>
+          </a:prstGeom>
+          <a:solidFill>
+            <a:schemeClr val="tx1"/>
+          </a:solidFill>
+          <a:ln>
+            <a:solidFill>
+              <a:schemeClr val="tx1"/>
+            </a:solidFill>
+          </a:ln>
+        </p:spPr>
+        <p:style>
+          <a:lnRef idx="2">
+            <a:schemeClr val="accent1">
+              <a:shade val="50000"/>
+            </a:schemeClr>
+          </a:lnRef>
+          <a:fillRef idx="1">
+            <a:schemeClr val="accent1"/>
+          </a:fillRef>
+          <a:effectRef idx="0">
+            <a:schemeClr val="accent1"/>
+          </a:effectRef>
+          <a:fontRef idx="minor">
+            <a:schemeClr val="lt1"/>
+          </a:fontRef>
+        </p:style>
+        <p:txBody>
+          <a:bodyPr rtlCol="0" anchor="ctr"/>
+          <a:lstStyle/>
+          <a:p>
+            <a:pPr algn="ctr"/>
+            <a:endParaRPr lang="zh-CN" altLang="en-US">
+              <a:latin typeface="Times New Roman" panose="02020603050405020304" pitchFamily="18" charset="0"/>
+              <a:ea typeface="宋体" panose="02010600030101010101" pitchFamily="2" charset="-122"/>
+              <a:cs typeface="Times New Roman" panose="02020603050405020304" pitchFamily="18" charset="0"/>
+            </a:endParaRPr>
+          </a:p>
+        </p:txBody>
+      </p:sp>
+      <p:cxnSp>
+        <p:nvCxnSpPr>
+          <p:cNvPr id="44" name="直接箭头连接符 43"/>
+          <p:cNvCxnSpPr>
+            <a:stCxn id="75" idx="2"/>
+            <a:endCxn id="92" idx="0"/>
+          </p:cNvCxnSpPr>
+          <p:nvPr/>
+        </p:nvCxnSpPr>
+        <p:spPr>
+          <a:xfrm>
+            <a:off x="4530876" y="4508726"/>
+            <a:ext cx="0" cy="288325"/>
+          </a:xfrm>
+          <a:prstGeom prst="straightConnector1">
+            <a:avLst/>
+          </a:prstGeom>
+          <a:ln w="19050">
+            <a:solidFill>
+              <a:schemeClr val="tx1"/>
+            </a:solidFill>
+            <a:tailEnd type="arrow" w="med" len="sm"/>
+          </a:ln>
+        </p:spPr>
+        <p:style>
+          <a:lnRef idx="1">
+            <a:schemeClr val="dk1"/>
+          </a:lnRef>
+          <a:fillRef idx="0">
+            <a:schemeClr val="dk1"/>
+          </a:fillRef>
+          <a:effectRef idx="0">
+            <a:schemeClr val="dk1"/>
+          </a:effectRef>
+          <a:fontRef idx="minor">
+            <a:schemeClr val="tx1"/>
+          </a:fontRef>
+        </p:style>
+      </p:cxnSp>
+      <p:cxnSp>
+        <p:nvCxnSpPr>
+          <p:cNvPr id="6" name="肘形连接符 5"/>
+          <p:cNvCxnSpPr>
+            <a:stCxn id="76" idx="3"/>
+            <a:endCxn id="79" idx="1"/>
+          </p:cNvCxnSpPr>
+          <p:nvPr/>
+        </p:nvCxnSpPr>
+        <p:spPr>
+          <a:xfrm flipV="1">
+            <a:off x="5809187" y="5126343"/>
+            <a:ext cx="490325" cy="707977"/>
+          </a:xfrm>
+          <a:prstGeom prst="bentConnector3">
+            <a:avLst/>
+          </a:prstGeom>
+          <a:ln w="19050">
+            <a:solidFill>
+              <a:schemeClr val="tx1"/>
+            </a:solidFill>
+            <a:tailEnd type="arrow" w="med" len="sm"/>
+          </a:ln>
+        </p:spPr>
+        <p:style>
+          <a:lnRef idx="1">
+            <a:schemeClr val="dk1"/>
+          </a:lnRef>
+          <a:fillRef idx="0">
+            <a:schemeClr val="dk1"/>
+          </a:fillRef>
+          <a:effectRef idx="0">
+            <a:schemeClr val="dk1"/>
+          </a:effectRef>
+          <a:fontRef idx="minor">
+            <a:schemeClr val="tx1"/>
+          </a:fontRef>
+        </p:style>
+      </p:cxnSp>
+      <p:sp>
+        <p:nvSpPr>
+          <p:cNvPr id="74" name="矩形 73"/>
+          <p:cNvSpPr/>
+          <p:nvPr/>
+        </p:nvSpPr>
+        <p:spPr>
+          <a:xfrm>
+            <a:off x="910242" y="4797052"/>
+            <a:ext cx="1952055" cy="493344"/>
+          </a:xfrm>
+          <a:prstGeom prst="rect">
+            <a:avLst/>
+          </a:prstGeom>
+          <a:solidFill>
+            <a:schemeClr val="bg1">
+              <a:lumMod val="95000"/>
+            </a:schemeClr>
+          </a:solidFill>
+          <a:ln>
+            <a:solidFill>
+              <a:schemeClr val="bg1">
+                <a:lumMod val="95000"/>
+              </a:schemeClr>
+            </a:solidFill>
+          </a:ln>
+        </p:spPr>
+        <p:style>
+          <a:lnRef idx="2">
+            <a:schemeClr val="accent1">
+              <a:shade val="50000"/>
+            </a:schemeClr>
+          </a:lnRef>
+          <a:fillRef idx="1">
+            <a:schemeClr val="accent1"/>
+          </a:fillRef>
+          <a:effectRef idx="0">
+            <a:schemeClr val="accent1"/>
+          </a:effectRef>
+          <a:fontRef idx="minor">
+            <a:schemeClr val="lt1"/>
+          </a:fontRef>
+        </p:style>
+        <p:txBody>
+          <a:bodyPr rtlCol="0" anchor="ctr"/>
+          <a:lstStyle/>
+          <a:p>
+            <a:pPr algn="ctr"/>
+            <a:r>
+              <a:rPr lang="zh-CN" altLang="en-US" sz="1400" b="1" dirty="0" smtClean="0">
+                <a:solidFill>
+                  <a:schemeClr val="tx1"/>
+                </a:solidFill>
+                <a:latin typeface="Times New Roman" panose="02020603050405020304" pitchFamily="18" charset="0"/>
+                <a:ea typeface="宋体" panose="02010600030101010101" pitchFamily="2" charset="-122"/>
+                <a:cs typeface="Times New Roman" panose="02020603050405020304" pitchFamily="18" charset="0"/>
+              </a:rPr>
+              <a:t>集合通信原语分析</a:t>
+            </a:r>
+            <a:endParaRPr lang="zh-CN" altLang="en-US" sz="1400" b="1" dirty="0">
+              <a:solidFill>
+                <a:schemeClr val="tx1"/>
+              </a:solidFill>
+              <a:latin typeface="Times New Roman" panose="02020603050405020304" pitchFamily="18" charset="0"/>
+              <a:ea typeface="宋体" panose="02010600030101010101" pitchFamily="2" charset="-122"/>
+              <a:cs typeface="Times New Roman" panose="02020603050405020304" pitchFamily="18" charset="0"/>
+            </a:endParaRPr>
+          </a:p>
+        </p:txBody>
+      </p:sp>
+      <p:sp>
+        <p:nvSpPr>
+          <p:cNvPr id="92" name="矩形 91"/>
+          <p:cNvSpPr/>
+          <p:nvPr/>
+        </p:nvSpPr>
+        <p:spPr>
+          <a:xfrm>
+            <a:off x="3252564" y="4797051"/>
+            <a:ext cx="2556623" cy="493345"/>
+          </a:xfrm>
+          <a:prstGeom prst="rect">
+            <a:avLst/>
+          </a:prstGeom>
+          <a:solidFill>
+            <a:schemeClr val="bg1">
+              <a:lumMod val="95000"/>
+            </a:schemeClr>
+          </a:solidFill>
+          <a:ln>
+            <a:solidFill>
+              <a:srgbClr val="F2F2F2"/>
+            </a:solidFill>
+          </a:ln>
+        </p:spPr>
+        <p:style>
+          <a:lnRef idx="2">
+            <a:schemeClr val="accent1">
+              <a:shade val="50000"/>
+            </a:schemeClr>
+          </a:lnRef>
+          <a:fillRef idx="1">
+            <a:schemeClr val="accent1"/>
+          </a:fillRef>
+          <a:effectRef idx="0">
+            <a:schemeClr val="accent1"/>
+          </a:effectRef>
+          <a:fontRef idx="minor">
+            <a:schemeClr val="lt1"/>
+          </a:fontRef>
+        </p:style>
+        <p:txBody>
+          <a:bodyPr rtlCol="0" anchor="ctr"/>
+          <a:lstStyle/>
+          <a:p>
+            <a:pPr algn="ctr"/>
+            <a:r>
+              <a:rPr lang="zh-CN" altLang="en-US" sz="1400" b="1" dirty="0" smtClean="0">
+                <a:solidFill>
+                  <a:schemeClr val="tx1"/>
+                </a:solidFill>
+                <a:latin typeface="Times New Roman" panose="02020603050405020304" pitchFamily="18" charset="0"/>
+                <a:ea typeface="宋体" panose="02010600030101010101" pitchFamily="2" charset="-122"/>
+                <a:cs typeface="Times New Roman" panose="02020603050405020304" pitchFamily="18" charset="0"/>
+              </a:rPr>
+              <a:t>建立多</a:t>
+            </a:r>
+            <a:r>
+              <a:rPr lang="en-US" altLang="zh-CN" sz="1400" b="1" dirty="0" smtClean="0">
+                <a:solidFill>
+                  <a:schemeClr val="tx1"/>
+                </a:solidFill>
+                <a:latin typeface="Times New Roman" panose="02020603050405020304" pitchFamily="18" charset="0"/>
+                <a:ea typeface="宋体" panose="02010600030101010101" pitchFamily="2" charset="-122"/>
+                <a:cs typeface="Times New Roman" panose="02020603050405020304" pitchFamily="18" charset="0"/>
+              </a:rPr>
+              <a:t>GPU</a:t>
+            </a:r>
+            <a:r>
+              <a:rPr lang="zh-CN" altLang="en-US" sz="1400" b="1" dirty="0" smtClean="0">
+                <a:solidFill>
+                  <a:schemeClr val="tx1"/>
+                </a:solidFill>
+                <a:latin typeface="Times New Roman" panose="02020603050405020304" pitchFamily="18" charset="0"/>
+                <a:ea typeface="宋体" panose="02010600030101010101" pitchFamily="2" charset="-122"/>
+                <a:cs typeface="Times New Roman" panose="02020603050405020304" pitchFamily="18" charset="0"/>
+              </a:rPr>
+              <a:t>通信时间预测模型</a:t>
+            </a:r>
+            <a:endParaRPr lang="zh-CN" altLang="en-US" sz="1400" b="1" dirty="0">
+              <a:solidFill>
+                <a:schemeClr val="tx1"/>
+              </a:solidFill>
+              <a:latin typeface="Times New Roman" panose="02020603050405020304" pitchFamily="18" charset="0"/>
+              <a:ea typeface="宋体" panose="02010600030101010101" pitchFamily="2" charset="-122"/>
+              <a:cs typeface="Times New Roman" panose="02020603050405020304" pitchFamily="18" charset="0"/>
+            </a:endParaRPr>
+          </a:p>
+        </p:txBody>
+      </p:sp>
+      <p:cxnSp>
+        <p:nvCxnSpPr>
+          <p:cNvPr id="93" name="直接箭头连接符 92"/>
+          <p:cNvCxnSpPr>
+            <a:stCxn id="92" idx="2"/>
+            <a:endCxn id="76" idx="0"/>
+          </p:cNvCxnSpPr>
+          <p:nvPr/>
+        </p:nvCxnSpPr>
+        <p:spPr>
+          <a:xfrm>
+            <a:off x="4530876" y="5290396"/>
+            <a:ext cx="0" cy="297251"/>
+          </a:xfrm>
+          <a:prstGeom prst="straightConnector1">
+            <a:avLst/>
+          </a:prstGeom>
+          <a:ln w="19050">
+            <a:solidFill>
+              <a:schemeClr val="tx1"/>
+            </a:solidFill>
+            <a:tailEnd type="arrow" w="med" len="sm"/>
+          </a:ln>
+        </p:spPr>
+        <p:style>
+          <a:lnRef idx="1">
+            <a:schemeClr val="dk1"/>
+          </a:lnRef>
+          <a:fillRef idx="0">
+            <a:schemeClr val="dk1"/>
+          </a:fillRef>
+          <a:effectRef idx="0">
+            <a:schemeClr val="dk1"/>
+          </a:effectRef>
+          <a:fontRef idx="minor">
+            <a:schemeClr val="tx1"/>
+          </a:fontRef>
+        </p:style>
+      </p:cxnSp>
+      <p:cxnSp>
+        <p:nvCxnSpPr>
+          <p:cNvPr id="94" name="直接箭头连接符 93"/>
+          <p:cNvCxnSpPr>
+            <a:stCxn id="74" idx="3"/>
+            <a:endCxn id="92" idx="1"/>
+          </p:cNvCxnSpPr>
+          <p:nvPr/>
+        </p:nvCxnSpPr>
+        <p:spPr>
+          <a:xfrm>
+            <a:off x="2862297" y="5043724"/>
+            <a:ext cx="390267" cy="0"/>
+          </a:xfrm>
+          <a:prstGeom prst="straightConnector1">
+            <a:avLst/>
+          </a:prstGeom>
+          <a:ln w="19050">
+            <a:solidFill>
+              <a:schemeClr val="tx1"/>
+            </a:solidFill>
+            <a:tailEnd type="arrow" w="med" len="sm"/>
+          </a:ln>
+        </p:spPr>
+        <p:style>
+          <a:lnRef idx="1">
+            <a:schemeClr val="dk1"/>
+          </a:lnRef>
+          <a:fillRef idx="0">
+            <a:schemeClr val="dk1"/>
+          </a:fillRef>
+          <a:effectRef idx="0">
+            <a:schemeClr val="dk1"/>
+          </a:effectRef>
+          <a:fontRef idx="minor">
+            <a:schemeClr val="tx1"/>
+          </a:fontRef>
+        </p:style>
+      </p:cxnSp>
+    </p:spTree>
+    <p:extLst>
+      <p:ext uri="{BB962C8B-B14F-4D97-AF65-F5344CB8AC3E}">
+        <p14:creationId xmlns:p14="http://schemas.microsoft.com/office/powerpoint/2010/main" val="783151812"/>
+      </p:ext>
+    </p:extLst>
+  </p:cSld>
+  <p:clrMapOvr>
+    <a:masterClrMapping/>
+  </p:clrMapOvr>
+  <p:timing>
+    <p:tnLst>
+      <p:par>
+        <p:cTn id="1" dur="indefinite" restart="never" nodeType="tmRoot"/>
+      </p:par>
+    </p:tnLst>
+  </p:timing>
 </p:sld>
 </file>
 

--- a/figure/大论文作图.pptx
+++ b/figure/大论文作图.pptx
@@ -5,7 +5,7 @@
     <p:sldMasterId id="2147483648" r:id="rId1"/>
   </p:sldMasterIdLst>
   <p:notesMasterIdLst>
-    <p:notesMasterId r:id="rId8"/>
+    <p:notesMasterId r:id="rId9"/>
   </p:notesMasterIdLst>
   <p:sldIdLst>
     <p:sldId id="257" r:id="rId2"/>
@@ -14,6 +14,7 @@
     <p:sldId id="260" r:id="rId5"/>
     <p:sldId id="261" r:id="rId6"/>
     <p:sldId id="262" r:id="rId7"/>
+    <p:sldId id="263" r:id="rId8"/>
   </p:sldIdLst>
   <p:sldSz cx="12192000" cy="6858000"/>
   <p:notesSz cx="6858000" cy="9144000"/>
@@ -202,7 +203,7 @@
           <a:p>
             <a:fld id="{85C2D6EB-C800-464F-A79F-2EE684CA1913}" type="datetimeFigureOut">
               <a:rPr lang="zh-CN" altLang="en-US" smtClean="0"/>
-              <a:t>2023/12/9</a:t>
+              <a:t>2023/12/10</a:t>
             </a:fld>
             <a:endParaRPr lang="zh-CN" altLang="en-US"/>
           </a:p>
@@ -853,7 +854,7 @@
           <a:p>
             <a:fld id="{3F936331-16FD-497A-8586-31CE5CA58C54}" type="datetimeFigureOut">
               <a:rPr lang="zh-CN" altLang="en-US" smtClean="0"/>
-              <a:t>2023/12/9</a:t>
+              <a:t>2023/12/10</a:t>
             </a:fld>
             <a:endParaRPr lang="zh-CN" altLang="en-US"/>
           </a:p>
@@ -1023,7 +1024,7 @@
           <a:p>
             <a:fld id="{3F936331-16FD-497A-8586-31CE5CA58C54}" type="datetimeFigureOut">
               <a:rPr lang="zh-CN" altLang="en-US" smtClean="0"/>
-              <a:t>2023/12/9</a:t>
+              <a:t>2023/12/10</a:t>
             </a:fld>
             <a:endParaRPr lang="zh-CN" altLang="en-US"/>
           </a:p>
@@ -1203,7 +1204,7 @@
           <a:p>
             <a:fld id="{3F936331-16FD-497A-8586-31CE5CA58C54}" type="datetimeFigureOut">
               <a:rPr lang="zh-CN" altLang="en-US" smtClean="0"/>
-              <a:t>2023/12/9</a:t>
+              <a:t>2023/12/10</a:t>
             </a:fld>
             <a:endParaRPr lang="zh-CN" altLang="en-US"/>
           </a:p>
@@ -1373,7 +1374,7 @@
           <a:p>
             <a:fld id="{3F936331-16FD-497A-8586-31CE5CA58C54}" type="datetimeFigureOut">
               <a:rPr lang="zh-CN" altLang="en-US" smtClean="0"/>
-              <a:t>2023/12/9</a:t>
+              <a:t>2023/12/10</a:t>
             </a:fld>
             <a:endParaRPr lang="zh-CN" altLang="en-US"/>
           </a:p>
@@ -1619,7 +1620,7 @@
           <a:p>
             <a:fld id="{3F936331-16FD-497A-8586-31CE5CA58C54}" type="datetimeFigureOut">
               <a:rPr lang="zh-CN" altLang="en-US" smtClean="0"/>
-              <a:t>2023/12/9</a:t>
+              <a:t>2023/12/10</a:t>
             </a:fld>
             <a:endParaRPr lang="zh-CN" altLang="en-US"/>
           </a:p>
@@ -1851,7 +1852,7 @@
           <a:p>
             <a:fld id="{3F936331-16FD-497A-8586-31CE5CA58C54}" type="datetimeFigureOut">
               <a:rPr lang="zh-CN" altLang="en-US" smtClean="0"/>
-              <a:t>2023/12/9</a:t>
+              <a:t>2023/12/10</a:t>
             </a:fld>
             <a:endParaRPr lang="zh-CN" altLang="en-US"/>
           </a:p>
@@ -2218,7 +2219,7 @@
           <a:p>
             <a:fld id="{3F936331-16FD-497A-8586-31CE5CA58C54}" type="datetimeFigureOut">
               <a:rPr lang="zh-CN" altLang="en-US" smtClean="0"/>
-              <a:t>2023/12/9</a:t>
+              <a:t>2023/12/10</a:t>
             </a:fld>
             <a:endParaRPr lang="zh-CN" altLang="en-US"/>
           </a:p>
@@ -2336,7 +2337,7 @@
           <a:p>
             <a:fld id="{3F936331-16FD-497A-8586-31CE5CA58C54}" type="datetimeFigureOut">
               <a:rPr lang="zh-CN" altLang="en-US" smtClean="0"/>
-              <a:t>2023/12/9</a:t>
+              <a:t>2023/12/10</a:t>
             </a:fld>
             <a:endParaRPr lang="zh-CN" altLang="en-US"/>
           </a:p>
@@ -2431,7 +2432,7 @@
           <a:p>
             <a:fld id="{3F936331-16FD-497A-8586-31CE5CA58C54}" type="datetimeFigureOut">
               <a:rPr lang="zh-CN" altLang="en-US" smtClean="0"/>
-              <a:t>2023/12/9</a:t>
+              <a:t>2023/12/10</a:t>
             </a:fld>
             <a:endParaRPr lang="zh-CN" altLang="en-US"/>
           </a:p>
@@ -2708,7 +2709,7 @@
           <a:p>
             <a:fld id="{3F936331-16FD-497A-8586-31CE5CA58C54}" type="datetimeFigureOut">
               <a:rPr lang="zh-CN" altLang="en-US" smtClean="0"/>
-              <a:t>2023/12/9</a:t>
+              <a:t>2023/12/10</a:t>
             </a:fld>
             <a:endParaRPr lang="zh-CN" altLang="en-US"/>
           </a:p>
@@ -2961,7 +2962,7 @@
           <a:p>
             <a:fld id="{3F936331-16FD-497A-8586-31CE5CA58C54}" type="datetimeFigureOut">
               <a:rPr lang="zh-CN" altLang="en-US" smtClean="0"/>
-              <a:t>2023/12/9</a:t>
+              <a:t>2023/12/10</a:t>
             </a:fld>
             <a:endParaRPr lang="zh-CN" altLang="en-US"/>
           </a:p>
@@ -3174,7 +3175,7 @@
           <a:p>
             <a:fld id="{3F936331-16FD-497A-8586-31CE5CA58C54}" type="datetimeFigureOut">
               <a:rPr lang="zh-CN" altLang="en-US" smtClean="0"/>
-              <a:t>2023/12/9</a:t>
+              <a:t>2023/12/10</a:t>
             </a:fld>
             <a:endParaRPr lang="zh-CN" altLang="en-US"/>
           </a:p>
@@ -9042,7 +9043,7 @@
           <a:graphicData uri="http://schemas.openxmlformats.org/presentationml/2006/ole">
             <mc:AlternateContent xmlns:mc="http://schemas.openxmlformats.org/markup-compatibility/2006">
               <mc:Choice xmlns:v="urn:schemas-microsoft-com:vml" Requires="v">
-                <p:oleObj spid="_x0000_s1047" name="AxMath" r:id="rId3" imgW="315000" imgH="228600" progId="Equation.AxMath">
+                <p:oleObj spid="_x0000_s1059" name="AxMath" r:id="rId3" imgW="315000" imgH="228600" progId="Equation.AxMath">
                   <p:embed/>
                 </p:oleObj>
               </mc:Choice>
@@ -9095,7 +9096,7 @@
           <a:graphicData uri="http://schemas.openxmlformats.org/presentationml/2006/ole">
             <mc:AlternateContent xmlns:mc="http://schemas.openxmlformats.org/markup-compatibility/2006">
               <mc:Choice xmlns:v="urn:schemas-microsoft-com:vml" Requires="v">
-                <p:oleObj spid="_x0000_s1048" name="AxMath" r:id="rId5" imgW="347760" imgH="228600" progId="Equation.AxMath">
+                <p:oleObj spid="_x0000_s1060" name="AxMath" r:id="rId5" imgW="347760" imgH="228600" progId="Equation.AxMath">
                   <p:embed/>
                 </p:oleObj>
               </mc:Choice>
@@ -9148,7 +9149,7 @@
           <a:graphicData uri="http://schemas.openxmlformats.org/presentationml/2006/ole">
             <mc:AlternateContent xmlns:mc="http://schemas.openxmlformats.org/markup-compatibility/2006">
               <mc:Choice xmlns:v="urn:schemas-microsoft-com:vml" Requires="v">
-                <p:oleObj spid="_x0000_s1049" name="AxMath" r:id="rId7" imgW="378000" imgH="228600" progId="Equation.AxMath">
+                <p:oleObj spid="_x0000_s1061" name="AxMath" r:id="rId7" imgW="378000" imgH="228600" progId="Equation.AxMath">
                   <p:embed/>
                 </p:oleObj>
               </mc:Choice>
@@ -14526,6 +14527,9237 @@
     <p:extLst>
       <p:ext uri="{BB962C8B-B14F-4D97-AF65-F5344CB8AC3E}">
         <p14:creationId xmlns:p14="http://schemas.microsoft.com/office/powerpoint/2010/main" val="783151812"/>
+      </p:ext>
+    </p:extLst>
+  </p:cSld>
+  <p:clrMapOvr>
+    <a:masterClrMapping/>
+  </p:clrMapOvr>
+  <p:timing>
+    <p:tnLst>
+      <p:par>
+        <p:cTn id="1" dur="indefinite" restart="never" nodeType="tmRoot"/>
+      </p:par>
+    </p:tnLst>
+  </p:timing>
+</p:sld>
+</file>
+
+<file path=ppt/slides/slide7.xml><?xml version="1.0" encoding="utf-8"?>
+<p:sld xmlns:a="http://schemas.openxmlformats.org/drawingml/2006/main" xmlns:r="http://schemas.openxmlformats.org/officeDocument/2006/relationships" xmlns:p="http://schemas.openxmlformats.org/presentationml/2006/main">
+  <p:cSld>
+    <p:spTree>
+      <p:nvGrpSpPr>
+        <p:cNvPr id="1" name=""/>
+        <p:cNvGrpSpPr/>
+        <p:nvPr/>
+      </p:nvGrpSpPr>
+      <p:grpSpPr>
+        <a:xfrm>
+          <a:off x="0" y="0"/>
+          <a:ext cx="0" cy="0"/>
+          <a:chOff x="0" y="0"/>
+          <a:chExt cx="0" cy="0"/>
+        </a:xfrm>
+      </p:grpSpPr>
+      <p:cxnSp>
+        <p:nvCxnSpPr>
+          <p:cNvPr id="190" name="直接连接符 189"/>
+          <p:cNvCxnSpPr/>
+          <p:nvPr/>
+        </p:nvCxnSpPr>
+        <p:spPr>
+          <a:xfrm>
+            <a:off x="8716432" y="-14014755"/>
+            <a:ext cx="856482" cy="0"/>
+          </a:xfrm>
+          <a:prstGeom prst="line">
+            <a:avLst/>
+          </a:prstGeom>
+          <a:ln w="19050">
+            <a:solidFill>
+              <a:srgbClr val="FFFF00"/>
+            </a:solidFill>
+          </a:ln>
+        </p:spPr>
+        <p:style>
+          <a:lnRef idx="1">
+            <a:schemeClr val="dk1"/>
+          </a:lnRef>
+          <a:fillRef idx="0">
+            <a:schemeClr val="dk1"/>
+          </a:fillRef>
+          <a:effectRef idx="0">
+            <a:schemeClr val="dk1"/>
+          </a:effectRef>
+          <a:fontRef idx="minor">
+            <a:schemeClr val="tx1"/>
+          </a:fontRef>
+        </p:style>
+      </p:cxnSp>
+      <p:cxnSp>
+        <p:nvCxnSpPr>
+          <p:cNvPr id="194" name="直接连接符 193"/>
+          <p:cNvCxnSpPr/>
+          <p:nvPr/>
+        </p:nvCxnSpPr>
+        <p:spPr>
+          <a:xfrm>
+            <a:off x="10126975" y="-4953406"/>
+            <a:ext cx="1149898" cy="0"/>
+          </a:xfrm>
+          <a:prstGeom prst="line">
+            <a:avLst/>
+          </a:prstGeom>
+          <a:ln w="19050">
+            <a:solidFill>
+              <a:srgbClr val="FF0000"/>
+            </a:solidFill>
+          </a:ln>
+        </p:spPr>
+        <p:style>
+          <a:lnRef idx="1">
+            <a:schemeClr val="dk1"/>
+          </a:lnRef>
+          <a:fillRef idx="0">
+            <a:schemeClr val="dk1"/>
+          </a:fillRef>
+          <a:effectRef idx="0">
+            <a:schemeClr val="dk1"/>
+          </a:effectRef>
+          <a:fontRef idx="minor">
+            <a:schemeClr val="tx1"/>
+          </a:fontRef>
+        </p:style>
+      </p:cxnSp>
+      <p:sp>
+        <p:nvSpPr>
+          <p:cNvPr id="130" name="流程图: 接点 129">
+            <a:extLst>
+              <a:ext uri="{FF2B5EF4-FFF2-40B4-BE49-F238E27FC236}">
+                <a16:creationId xmlns:a16="http://schemas.microsoft.com/office/drawing/2014/main" id="{BDFAF2B9-F17C-4264-986D-D3BB21ADEACD}"/>
+              </a:ext>
+            </a:extLst>
+          </p:cNvPr>
+          <p:cNvSpPr>
+            <a:spLocks noChangeAspect="1"/>
+          </p:cNvSpPr>
+          <p:nvPr/>
+        </p:nvSpPr>
+        <p:spPr>
+          <a:xfrm>
+            <a:off x="942045" y="1649949"/>
+            <a:ext cx="453309" cy="436274"/>
+          </a:xfrm>
+          <a:prstGeom prst="flowChartConnector">
+            <a:avLst/>
+          </a:prstGeom>
+          <a:noFill/>
+          <a:ln w="19050">
+            <a:solidFill>
+              <a:schemeClr val="tx1"/>
+            </a:solidFill>
+          </a:ln>
+        </p:spPr>
+        <p:style>
+          <a:lnRef idx="2">
+            <a:schemeClr val="accent4">
+              <a:shade val="50000"/>
+            </a:schemeClr>
+          </a:lnRef>
+          <a:fillRef idx="1">
+            <a:schemeClr val="accent4"/>
+          </a:fillRef>
+          <a:effectRef idx="0">
+            <a:schemeClr val="accent4"/>
+          </a:effectRef>
+          <a:fontRef idx="minor">
+            <a:schemeClr val="lt1"/>
+          </a:fontRef>
+        </p:style>
+        <p:txBody>
+          <a:bodyPr rtlCol="0" anchor="ctr"/>
+          <a:lstStyle/>
+          <a:p>
+            <a:pPr algn="ctr"/>
+            <a:endParaRPr lang="zh-CN" altLang="en-US" b="1">
+              <a:solidFill>
+                <a:schemeClr val="tx1"/>
+              </a:solidFill>
+            </a:endParaRPr>
+          </a:p>
+        </p:txBody>
+      </p:sp>
+      <p:sp>
+        <p:nvSpPr>
+          <p:cNvPr id="131" name="流程图: 接点 130">
+            <a:extLst>
+              <a:ext uri="{FF2B5EF4-FFF2-40B4-BE49-F238E27FC236}">
+                <a16:creationId xmlns:a16="http://schemas.microsoft.com/office/drawing/2014/main" id="{8DEB77C2-D546-43C6-88EC-AF1A35DA88C4}"/>
+              </a:ext>
+            </a:extLst>
+          </p:cNvPr>
+          <p:cNvSpPr>
+            <a:spLocks noChangeAspect="1"/>
+          </p:cNvSpPr>
+          <p:nvPr/>
+        </p:nvSpPr>
+        <p:spPr>
+          <a:xfrm>
+            <a:off x="933377" y="2391658"/>
+            <a:ext cx="453309" cy="436274"/>
+          </a:xfrm>
+          <a:prstGeom prst="flowChartConnector">
+            <a:avLst/>
+          </a:prstGeom>
+          <a:noFill/>
+          <a:ln w="19050">
+            <a:solidFill>
+              <a:schemeClr val="tx1"/>
+            </a:solidFill>
+          </a:ln>
+        </p:spPr>
+        <p:style>
+          <a:lnRef idx="2">
+            <a:schemeClr val="accent4">
+              <a:shade val="50000"/>
+            </a:schemeClr>
+          </a:lnRef>
+          <a:fillRef idx="1">
+            <a:schemeClr val="accent4"/>
+          </a:fillRef>
+          <a:effectRef idx="0">
+            <a:schemeClr val="accent4"/>
+          </a:effectRef>
+          <a:fontRef idx="minor">
+            <a:schemeClr val="lt1"/>
+          </a:fontRef>
+        </p:style>
+        <p:txBody>
+          <a:bodyPr rtlCol="0" anchor="ctr"/>
+          <a:lstStyle/>
+          <a:p>
+            <a:pPr algn="ctr"/>
+            <a:endParaRPr lang="zh-CN" altLang="en-US" b="1">
+              <a:solidFill>
+                <a:schemeClr val="tx1"/>
+              </a:solidFill>
+            </a:endParaRPr>
+          </a:p>
+        </p:txBody>
+      </p:sp>
+      <p:sp>
+        <p:nvSpPr>
+          <p:cNvPr id="132" name="流程图: 接点 131">
+            <a:extLst>
+              <a:ext uri="{FF2B5EF4-FFF2-40B4-BE49-F238E27FC236}">
+                <a16:creationId xmlns:a16="http://schemas.microsoft.com/office/drawing/2014/main" id="{B1D41E38-786F-4B78-A61C-54337B5D38BD}"/>
+              </a:ext>
+            </a:extLst>
+          </p:cNvPr>
+          <p:cNvSpPr>
+            <a:spLocks noChangeAspect="1"/>
+          </p:cNvSpPr>
+          <p:nvPr/>
+        </p:nvSpPr>
+        <p:spPr>
+          <a:xfrm>
+            <a:off x="942973" y="3682591"/>
+            <a:ext cx="453309" cy="436274"/>
+          </a:xfrm>
+          <a:prstGeom prst="flowChartConnector">
+            <a:avLst/>
+          </a:prstGeom>
+          <a:noFill/>
+          <a:ln w="19050">
+            <a:solidFill>
+              <a:schemeClr val="tx1"/>
+            </a:solidFill>
+          </a:ln>
+        </p:spPr>
+        <p:style>
+          <a:lnRef idx="2">
+            <a:schemeClr val="accent4">
+              <a:shade val="50000"/>
+            </a:schemeClr>
+          </a:lnRef>
+          <a:fillRef idx="1">
+            <a:schemeClr val="accent4"/>
+          </a:fillRef>
+          <a:effectRef idx="0">
+            <a:schemeClr val="accent4"/>
+          </a:effectRef>
+          <a:fontRef idx="minor">
+            <a:schemeClr val="lt1"/>
+          </a:fontRef>
+        </p:style>
+        <p:txBody>
+          <a:bodyPr rtlCol="0" anchor="ctr"/>
+          <a:lstStyle/>
+          <a:p>
+            <a:pPr algn="ctr"/>
+            <a:endParaRPr lang="zh-CN" altLang="en-US" b="1">
+              <a:solidFill>
+                <a:schemeClr val="tx1"/>
+              </a:solidFill>
+            </a:endParaRPr>
+          </a:p>
+        </p:txBody>
+      </p:sp>
+      <p:cxnSp>
+        <p:nvCxnSpPr>
+          <p:cNvPr id="133" name="直接连接符 132">
+            <a:extLst>
+              <a:ext uri="{FF2B5EF4-FFF2-40B4-BE49-F238E27FC236}">
+                <a16:creationId xmlns:a16="http://schemas.microsoft.com/office/drawing/2014/main" id="{50398C65-E963-4AA0-93CA-C26DC48F127F}"/>
+              </a:ext>
+            </a:extLst>
+          </p:cNvPr>
+          <p:cNvCxnSpPr>
+            <a:cxnSpLocks noChangeAspect="1"/>
+            <a:stCxn id="130" idx="6"/>
+            <a:endCxn id="155" idx="2"/>
+          </p:cNvCxnSpPr>
+          <p:nvPr/>
+        </p:nvCxnSpPr>
+        <p:spPr>
+          <a:xfrm flipV="1">
+            <a:off x="1395354" y="1470378"/>
+            <a:ext cx="650809" cy="397708"/>
+          </a:xfrm>
+          <a:prstGeom prst="line">
+            <a:avLst/>
+          </a:prstGeom>
+          <a:ln w="19050">
+            <a:solidFill>
+              <a:schemeClr val="tx1"/>
+            </a:solidFill>
+          </a:ln>
+        </p:spPr>
+        <p:style>
+          <a:lnRef idx="3">
+            <a:schemeClr val="dk1"/>
+          </a:lnRef>
+          <a:fillRef idx="0">
+            <a:schemeClr val="dk1"/>
+          </a:fillRef>
+          <a:effectRef idx="2">
+            <a:schemeClr val="dk1"/>
+          </a:effectRef>
+          <a:fontRef idx="minor">
+            <a:schemeClr val="tx1"/>
+          </a:fontRef>
+        </p:style>
+      </p:cxnSp>
+      <p:cxnSp>
+        <p:nvCxnSpPr>
+          <p:cNvPr id="134" name="直接连接符 133">
+            <a:extLst>
+              <a:ext uri="{FF2B5EF4-FFF2-40B4-BE49-F238E27FC236}">
+                <a16:creationId xmlns:a16="http://schemas.microsoft.com/office/drawing/2014/main" id="{66D0C31E-5632-4327-A5F9-D33761E33F34}"/>
+              </a:ext>
+            </a:extLst>
+          </p:cNvPr>
+          <p:cNvCxnSpPr>
+            <a:cxnSpLocks noChangeAspect="1"/>
+            <a:stCxn id="130" idx="6"/>
+            <a:endCxn id="156" idx="2"/>
+          </p:cNvCxnSpPr>
+          <p:nvPr/>
+        </p:nvCxnSpPr>
+        <p:spPr>
+          <a:xfrm>
+            <a:off x="1395354" y="1868086"/>
+            <a:ext cx="649025" cy="465293"/>
+          </a:xfrm>
+          <a:prstGeom prst="line">
+            <a:avLst/>
+          </a:prstGeom>
+          <a:ln w="19050">
+            <a:solidFill>
+              <a:schemeClr val="tx1"/>
+            </a:solidFill>
+          </a:ln>
+        </p:spPr>
+        <p:style>
+          <a:lnRef idx="3">
+            <a:schemeClr val="dk1"/>
+          </a:lnRef>
+          <a:fillRef idx="0">
+            <a:schemeClr val="dk1"/>
+          </a:fillRef>
+          <a:effectRef idx="2">
+            <a:schemeClr val="dk1"/>
+          </a:effectRef>
+          <a:fontRef idx="minor">
+            <a:schemeClr val="tx1"/>
+          </a:fontRef>
+        </p:style>
+      </p:cxnSp>
+      <p:cxnSp>
+        <p:nvCxnSpPr>
+          <p:cNvPr id="135" name="直接连接符 134">
+            <a:extLst>
+              <a:ext uri="{FF2B5EF4-FFF2-40B4-BE49-F238E27FC236}">
+                <a16:creationId xmlns:a16="http://schemas.microsoft.com/office/drawing/2014/main" id="{3A5BAE97-C76B-4C81-814E-7A99053DD7EC}"/>
+              </a:ext>
+            </a:extLst>
+          </p:cNvPr>
+          <p:cNvCxnSpPr>
+            <a:cxnSpLocks noChangeAspect="1"/>
+            <a:stCxn id="130" idx="6"/>
+            <a:endCxn id="157" idx="2"/>
+          </p:cNvCxnSpPr>
+          <p:nvPr/>
+        </p:nvCxnSpPr>
+        <p:spPr>
+          <a:xfrm>
+            <a:off x="1395354" y="1868086"/>
+            <a:ext cx="654853" cy="2735987"/>
+          </a:xfrm>
+          <a:prstGeom prst="line">
+            <a:avLst/>
+          </a:prstGeom>
+          <a:ln w="19050">
+            <a:solidFill>
+              <a:schemeClr val="tx1"/>
+            </a:solidFill>
+          </a:ln>
+        </p:spPr>
+        <p:style>
+          <a:lnRef idx="3">
+            <a:schemeClr val="dk1"/>
+          </a:lnRef>
+          <a:fillRef idx="0">
+            <a:schemeClr val="dk1"/>
+          </a:fillRef>
+          <a:effectRef idx="2">
+            <a:schemeClr val="dk1"/>
+          </a:effectRef>
+          <a:fontRef idx="minor">
+            <a:schemeClr val="tx1"/>
+          </a:fontRef>
+        </p:style>
+      </p:cxnSp>
+      <p:cxnSp>
+        <p:nvCxnSpPr>
+          <p:cNvPr id="136" name="直接连接符 135">
+            <a:extLst>
+              <a:ext uri="{FF2B5EF4-FFF2-40B4-BE49-F238E27FC236}">
+                <a16:creationId xmlns:a16="http://schemas.microsoft.com/office/drawing/2014/main" id="{F8B43C25-D672-41E6-BF93-C82733E93879}"/>
+              </a:ext>
+            </a:extLst>
+          </p:cNvPr>
+          <p:cNvCxnSpPr>
+            <a:cxnSpLocks noChangeAspect="1"/>
+            <a:stCxn id="131" idx="6"/>
+            <a:endCxn id="155" idx="2"/>
+          </p:cNvCxnSpPr>
+          <p:nvPr/>
+        </p:nvCxnSpPr>
+        <p:spPr>
+          <a:xfrm flipV="1">
+            <a:off x="1386686" y="1470378"/>
+            <a:ext cx="659477" cy="1139417"/>
+          </a:xfrm>
+          <a:prstGeom prst="line">
+            <a:avLst/>
+          </a:prstGeom>
+          <a:ln w="19050">
+            <a:solidFill>
+              <a:schemeClr val="tx1"/>
+            </a:solidFill>
+          </a:ln>
+        </p:spPr>
+        <p:style>
+          <a:lnRef idx="3">
+            <a:schemeClr val="dk1"/>
+          </a:lnRef>
+          <a:fillRef idx="0">
+            <a:schemeClr val="dk1"/>
+          </a:fillRef>
+          <a:effectRef idx="2">
+            <a:schemeClr val="dk1"/>
+          </a:effectRef>
+          <a:fontRef idx="minor">
+            <a:schemeClr val="tx1"/>
+          </a:fontRef>
+        </p:style>
+      </p:cxnSp>
+      <p:cxnSp>
+        <p:nvCxnSpPr>
+          <p:cNvPr id="137" name="直接连接符 136">
+            <a:extLst>
+              <a:ext uri="{FF2B5EF4-FFF2-40B4-BE49-F238E27FC236}">
+                <a16:creationId xmlns:a16="http://schemas.microsoft.com/office/drawing/2014/main" id="{C91671CB-C962-4122-A3A4-9DD69CCD09C4}"/>
+              </a:ext>
+            </a:extLst>
+          </p:cNvPr>
+          <p:cNvCxnSpPr>
+            <a:cxnSpLocks noChangeAspect="1"/>
+            <a:stCxn id="131" idx="6"/>
+            <a:endCxn id="156" idx="2"/>
+          </p:cNvCxnSpPr>
+          <p:nvPr/>
+        </p:nvCxnSpPr>
+        <p:spPr>
+          <a:xfrm flipV="1">
+            <a:off x="1386686" y="2333379"/>
+            <a:ext cx="657693" cy="276416"/>
+          </a:xfrm>
+          <a:prstGeom prst="line">
+            <a:avLst/>
+          </a:prstGeom>
+          <a:ln w="19050">
+            <a:solidFill>
+              <a:schemeClr val="tx1"/>
+            </a:solidFill>
+          </a:ln>
+        </p:spPr>
+        <p:style>
+          <a:lnRef idx="3">
+            <a:schemeClr val="dk1"/>
+          </a:lnRef>
+          <a:fillRef idx="0">
+            <a:schemeClr val="dk1"/>
+          </a:fillRef>
+          <a:effectRef idx="2">
+            <a:schemeClr val="dk1"/>
+          </a:effectRef>
+          <a:fontRef idx="minor">
+            <a:schemeClr val="tx1"/>
+          </a:fontRef>
+        </p:style>
+      </p:cxnSp>
+      <p:cxnSp>
+        <p:nvCxnSpPr>
+          <p:cNvPr id="138" name="直接连接符 137">
+            <a:extLst>
+              <a:ext uri="{FF2B5EF4-FFF2-40B4-BE49-F238E27FC236}">
+                <a16:creationId xmlns:a16="http://schemas.microsoft.com/office/drawing/2014/main" id="{896A9EDC-35B4-43B8-8DB4-D32E7BCA1553}"/>
+              </a:ext>
+            </a:extLst>
+          </p:cNvPr>
+          <p:cNvCxnSpPr>
+            <a:cxnSpLocks noChangeAspect="1"/>
+            <a:stCxn id="131" idx="6"/>
+            <a:endCxn id="157" idx="2"/>
+          </p:cNvCxnSpPr>
+          <p:nvPr/>
+        </p:nvCxnSpPr>
+        <p:spPr>
+          <a:xfrm>
+            <a:off x="1386686" y="2609795"/>
+            <a:ext cx="663521" cy="1994278"/>
+          </a:xfrm>
+          <a:prstGeom prst="line">
+            <a:avLst/>
+          </a:prstGeom>
+          <a:ln w="19050">
+            <a:solidFill>
+              <a:schemeClr val="tx1"/>
+            </a:solidFill>
+          </a:ln>
+        </p:spPr>
+        <p:style>
+          <a:lnRef idx="3">
+            <a:schemeClr val="dk1"/>
+          </a:lnRef>
+          <a:fillRef idx="0">
+            <a:schemeClr val="dk1"/>
+          </a:fillRef>
+          <a:effectRef idx="2">
+            <a:schemeClr val="dk1"/>
+          </a:effectRef>
+          <a:fontRef idx="minor">
+            <a:schemeClr val="tx1"/>
+          </a:fontRef>
+        </p:style>
+      </p:cxnSp>
+      <p:cxnSp>
+        <p:nvCxnSpPr>
+          <p:cNvPr id="139" name="直接连接符 138">
+            <a:extLst>
+              <a:ext uri="{FF2B5EF4-FFF2-40B4-BE49-F238E27FC236}">
+                <a16:creationId xmlns:a16="http://schemas.microsoft.com/office/drawing/2014/main" id="{1CBBA871-AD53-4474-980B-2C5666A9503F}"/>
+              </a:ext>
+            </a:extLst>
+          </p:cNvPr>
+          <p:cNvCxnSpPr>
+            <a:cxnSpLocks noChangeAspect="1"/>
+            <a:stCxn id="132" idx="6"/>
+            <a:endCxn id="155" idx="2"/>
+          </p:cNvCxnSpPr>
+          <p:nvPr/>
+        </p:nvCxnSpPr>
+        <p:spPr>
+          <a:xfrm flipV="1">
+            <a:off x="1396282" y="1470378"/>
+            <a:ext cx="649881" cy="2430350"/>
+          </a:xfrm>
+          <a:prstGeom prst="line">
+            <a:avLst/>
+          </a:prstGeom>
+          <a:ln w="19050">
+            <a:solidFill>
+              <a:schemeClr val="tx1"/>
+            </a:solidFill>
+          </a:ln>
+        </p:spPr>
+        <p:style>
+          <a:lnRef idx="3">
+            <a:schemeClr val="dk1"/>
+          </a:lnRef>
+          <a:fillRef idx="0">
+            <a:schemeClr val="dk1"/>
+          </a:fillRef>
+          <a:effectRef idx="2">
+            <a:schemeClr val="dk1"/>
+          </a:effectRef>
+          <a:fontRef idx="minor">
+            <a:schemeClr val="tx1"/>
+          </a:fontRef>
+        </p:style>
+      </p:cxnSp>
+      <p:cxnSp>
+        <p:nvCxnSpPr>
+          <p:cNvPr id="140" name="直接连接符 139">
+            <a:extLst>
+              <a:ext uri="{FF2B5EF4-FFF2-40B4-BE49-F238E27FC236}">
+                <a16:creationId xmlns:a16="http://schemas.microsoft.com/office/drawing/2014/main" id="{4EADC02C-C062-49B1-8151-00B88C356BCF}"/>
+              </a:ext>
+            </a:extLst>
+          </p:cNvPr>
+          <p:cNvCxnSpPr>
+            <a:cxnSpLocks noChangeAspect="1"/>
+            <a:stCxn id="132" idx="6"/>
+            <a:endCxn id="156" idx="2"/>
+          </p:cNvCxnSpPr>
+          <p:nvPr/>
+        </p:nvCxnSpPr>
+        <p:spPr>
+          <a:xfrm flipV="1">
+            <a:off x="1396282" y="2333379"/>
+            <a:ext cx="648097" cy="1567349"/>
+          </a:xfrm>
+          <a:prstGeom prst="line">
+            <a:avLst/>
+          </a:prstGeom>
+          <a:ln w="19050">
+            <a:solidFill>
+              <a:schemeClr val="tx1"/>
+            </a:solidFill>
+          </a:ln>
+        </p:spPr>
+        <p:style>
+          <a:lnRef idx="3">
+            <a:schemeClr val="dk1"/>
+          </a:lnRef>
+          <a:fillRef idx="0">
+            <a:schemeClr val="dk1"/>
+          </a:fillRef>
+          <a:effectRef idx="2">
+            <a:schemeClr val="dk1"/>
+          </a:effectRef>
+          <a:fontRef idx="minor">
+            <a:schemeClr val="tx1"/>
+          </a:fontRef>
+        </p:style>
+      </p:cxnSp>
+      <p:cxnSp>
+        <p:nvCxnSpPr>
+          <p:cNvPr id="141" name="直接连接符 140">
+            <a:extLst>
+              <a:ext uri="{FF2B5EF4-FFF2-40B4-BE49-F238E27FC236}">
+                <a16:creationId xmlns:a16="http://schemas.microsoft.com/office/drawing/2014/main" id="{1DBE3D74-21D6-4D01-8877-F2B817CDB8DE}"/>
+              </a:ext>
+            </a:extLst>
+          </p:cNvPr>
+          <p:cNvCxnSpPr>
+            <a:cxnSpLocks noChangeAspect="1"/>
+            <a:stCxn id="132" idx="6"/>
+            <a:endCxn id="157" idx="2"/>
+          </p:cNvCxnSpPr>
+          <p:nvPr/>
+        </p:nvCxnSpPr>
+        <p:spPr>
+          <a:xfrm>
+            <a:off x="1396282" y="3900728"/>
+            <a:ext cx="653925" cy="703345"/>
+          </a:xfrm>
+          <a:prstGeom prst="line">
+            <a:avLst/>
+          </a:prstGeom>
+          <a:ln w="19050">
+            <a:solidFill>
+              <a:schemeClr val="tx1"/>
+            </a:solidFill>
+          </a:ln>
+        </p:spPr>
+        <p:style>
+          <a:lnRef idx="3">
+            <a:schemeClr val="dk1"/>
+          </a:lnRef>
+          <a:fillRef idx="0">
+            <a:schemeClr val="dk1"/>
+          </a:fillRef>
+          <a:effectRef idx="2">
+            <a:schemeClr val="dk1"/>
+          </a:effectRef>
+          <a:fontRef idx="minor">
+            <a:schemeClr val="tx1"/>
+          </a:fontRef>
+        </p:style>
+      </p:cxnSp>
+      <p:cxnSp>
+        <p:nvCxnSpPr>
+          <p:cNvPr id="148" name="直接连接符 147">
+            <a:extLst>
+              <a:ext uri="{FF2B5EF4-FFF2-40B4-BE49-F238E27FC236}">
+                <a16:creationId xmlns:a16="http://schemas.microsoft.com/office/drawing/2014/main" id="{D98D79E2-78C1-4685-8D64-4AE303628E9A}"/>
+              </a:ext>
+            </a:extLst>
+          </p:cNvPr>
+          <p:cNvCxnSpPr>
+            <a:cxnSpLocks noChangeAspect="1"/>
+            <a:stCxn id="159" idx="2"/>
+            <a:endCxn id="192" idx="6"/>
+          </p:cNvCxnSpPr>
+          <p:nvPr/>
+        </p:nvCxnSpPr>
+        <p:spPr>
+          <a:xfrm flipH="1" flipV="1">
+            <a:off x="7289719" y="939607"/>
+            <a:ext cx="973404" cy="2038396"/>
+          </a:xfrm>
+          <a:prstGeom prst="line">
+            <a:avLst/>
+          </a:prstGeom>
+          <a:ln w="19050">
+            <a:solidFill>
+              <a:schemeClr val="tx1"/>
+            </a:solidFill>
+          </a:ln>
+        </p:spPr>
+        <p:style>
+          <a:lnRef idx="3">
+            <a:schemeClr val="dk1"/>
+          </a:lnRef>
+          <a:fillRef idx="0">
+            <a:schemeClr val="dk1"/>
+          </a:fillRef>
+          <a:effectRef idx="2">
+            <a:schemeClr val="dk1"/>
+          </a:effectRef>
+          <a:fontRef idx="minor">
+            <a:schemeClr val="tx1"/>
+          </a:fontRef>
+        </p:style>
+      </p:cxnSp>
+      <p:cxnSp>
+        <p:nvCxnSpPr>
+          <p:cNvPr id="149" name="直接连接符 148">
+            <a:extLst>
+              <a:ext uri="{FF2B5EF4-FFF2-40B4-BE49-F238E27FC236}">
+                <a16:creationId xmlns:a16="http://schemas.microsoft.com/office/drawing/2014/main" id="{78EA912F-B0E3-41C6-82EC-89595CDCF708}"/>
+              </a:ext>
+            </a:extLst>
+          </p:cNvPr>
+          <p:cNvCxnSpPr>
+            <a:cxnSpLocks noChangeAspect="1"/>
+            <a:stCxn id="159" idx="2"/>
+            <a:endCxn id="197" idx="6"/>
+          </p:cNvCxnSpPr>
+          <p:nvPr/>
+        </p:nvCxnSpPr>
+        <p:spPr>
+          <a:xfrm flipH="1" flipV="1">
+            <a:off x="7287871" y="1641056"/>
+            <a:ext cx="975252" cy="1336947"/>
+          </a:xfrm>
+          <a:prstGeom prst="line">
+            <a:avLst/>
+          </a:prstGeom>
+          <a:ln w="19050">
+            <a:solidFill>
+              <a:schemeClr val="tx1"/>
+            </a:solidFill>
+          </a:ln>
+        </p:spPr>
+        <p:style>
+          <a:lnRef idx="3">
+            <a:schemeClr val="dk1"/>
+          </a:lnRef>
+          <a:fillRef idx="0">
+            <a:schemeClr val="dk1"/>
+          </a:fillRef>
+          <a:effectRef idx="2">
+            <a:schemeClr val="dk1"/>
+          </a:effectRef>
+          <a:fontRef idx="minor">
+            <a:schemeClr val="tx1"/>
+          </a:fontRef>
+        </p:style>
+      </p:cxnSp>
+      <p:cxnSp>
+        <p:nvCxnSpPr>
+          <p:cNvPr id="153" name="直接连接符 152">
+            <a:extLst>
+              <a:ext uri="{FF2B5EF4-FFF2-40B4-BE49-F238E27FC236}">
+                <a16:creationId xmlns:a16="http://schemas.microsoft.com/office/drawing/2014/main" id="{78EA912F-B0E3-41C6-82EC-89595CDCF708}"/>
+              </a:ext>
+            </a:extLst>
+          </p:cNvPr>
+          <p:cNvCxnSpPr>
+            <a:cxnSpLocks noChangeAspect="1"/>
+            <a:stCxn id="159" idx="2"/>
+            <a:endCxn id="191" idx="6"/>
+          </p:cNvCxnSpPr>
+          <p:nvPr/>
+        </p:nvCxnSpPr>
+        <p:spPr>
+          <a:xfrm flipH="1" flipV="1">
+            <a:off x="7289720" y="239902"/>
+            <a:ext cx="973403" cy="2738101"/>
+          </a:xfrm>
+          <a:prstGeom prst="line">
+            <a:avLst/>
+          </a:prstGeom>
+          <a:ln w="19050">
+            <a:solidFill>
+              <a:schemeClr val="tx1"/>
+            </a:solidFill>
+          </a:ln>
+        </p:spPr>
+        <p:style>
+          <a:lnRef idx="3">
+            <a:schemeClr val="dk1"/>
+          </a:lnRef>
+          <a:fillRef idx="0">
+            <a:schemeClr val="dk1"/>
+          </a:fillRef>
+          <a:effectRef idx="2">
+            <a:schemeClr val="dk1"/>
+          </a:effectRef>
+          <a:fontRef idx="minor">
+            <a:schemeClr val="tx1"/>
+          </a:fontRef>
+        </p:style>
+      </p:cxnSp>
+      <p:sp>
+        <p:nvSpPr>
+          <p:cNvPr id="154" name="文本框 153"/>
+          <p:cNvSpPr txBox="1">
+            <a:spLocks noChangeAspect="1"/>
+          </p:cNvSpPr>
+          <p:nvPr/>
+        </p:nvSpPr>
+        <p:spPr>
+          <a:xfrm>
+            <a:off x="693176" y="2959814"/>
+            <a:ext cx="737399" cy="1093632"/>
+          </a:xfrm>
+          <a:prstGeom prst="rect">
+            <a:avLst/>
+          </a:prstGeom>
+          <a:noFill/>
+        </p:spPr>
+        <p:txBody>
+          <a:bodyPr vert="eaVert" wrap="square" rtlCol="0">
+            <a:spAutoFit/>
+          </a:bodyPr>
+          <a:lstStyle/>
+          <a:p>
+            <a:r>
+              <a:rPr lang="en-AE" altLang="zh-CN" sz="2400" b="1" dirty="0" smtClean="0"/>
+              <a:t>……</a:t>
+            </a:r>
+            <a:endParaRPr lang="zh-CN" altLang="en-US" sz="2400" b="1" dirty="0"/>
+          </a:p>
+        </p:txBody>
+      </p:sp>
+      <p:sp>
+        <p:nvSpPr>
+          <p:cNvPr id="155" name="流程图: 接点 154">
+            <a:extLst>
+              <a:ext uri="{FF2B5EF4-FFF2-40B4-BE49-F238E27FC236}">
+                <a16:creationId xmlns:a16="http://schemas.microsoft.com/office/drawing/2014/main" id="{BDFAF2B9-F17C-4264-986D-D3BB21ADEACD}"/>
+              </a:ext>
+            </a:extLst>
+          </p:cNvPr>
+          <p:cNvSpPr>
+            <a:spLocks noChangeAspect="1"/>
+          </p:cNvSpPr>
+          <p:nvPr/>
+        </p:nvSpPr>
+        <p:spPr>
+          <a:xfrm>
+            <a:off x="2046163" y="1252241"/>
+            <a:ext cx="453309" cy="436274"/>
+          </a:xfrm>
+          <a:prstGeom prst="flowChartConnector">
+            <a:avLst/>
+          </a:prstGeom>
+          <a:noFill/>
+          <a:ln w="19050">
+            <a:solidFill>
+              <a:schemeClr val="tx1"/>
+            </a:solidFill>
+          </a:ln>
+        </p:spPr>
+        <p:style>
+          <a:lnRef idx="2">
+            <a:schemeClr val="accent4">
+              <a:shade val="50000"/>
+            </a:schemeClr>
+          </a:lnRef>
+          <a:fillRef idx="1">
+            <a:schemeClr val="accent4"/>
+          </a:fillRef>
+          <a:effectRef idx="0">
+            <a:schemeClr val="accent4"/>
+          </a:effectRef>
+          <a:fontRef idx="minor">
+            <a:schemeClr val="lt1"/>
+          </a:fontRef>
+        </p:style>
+        <p:txBody>
+          <a:bodyPr rtlCol="0" anchor="ctr"/>
+          <a:lstStyle/>
+          <a:p>
+            <a:pPr algn="ctr"/>
+            <a:endParaRPr lang="zh-CN" altLang="en-US" b="1">
+              <a:solidFill>
+                <a:schemeClr val="tx1"/>
+              </a:solidFill>
+            </a:endParaRPr>
+          </a:p>
+        </p:txBody>
+      </p:sp>
+      <p:sp>
+        <p:nvSpPr>
+          <p:cNvPr id="156" name="流程图: 接点 155">
+            <a:extLst>
+              <a:ext uri="{FF2B5EF4-FFF2-40B4-BE49-F238E27FC236}">
+                <a16:creationId xmlns:a16="http://schemas.microsoft.com/office/drawing/2014/main" id="{BDFAF2B9-F17C-4264-986D-D3BB21ADEACD}"/>
+              </a:ext>
+            </a:extLst>
+          </p:cNvPr>
+          <p:cNvSpPr>
+            <a:spLocks noChangeAspect="1"/>
+          </p:cNvSpPr>
+          <p:nvPr/>
+        </p:nvSpPr>
+        <p:spPr>
+          <a:xfrm>
+            <a:off x="2044379" y="2115242"/>
+            <a:ext cx="453309" cy="436274"/>
+          </a:xfrm>
+          <a:prstGeom prst="flowChartConnector">
+            <a:avLst/>
+          </a:prstGeom>
+          <a:noFill/>
+          <a:ln w="19050">
+            <a:solidFill>
+              <a:schemeClr val="tx1"/>
+            </a:solidFill>
+          </a:ln>
+        </p:spPr>
+        <p:style>
+          <a:lnRef idx="2">
+            <a:schemeClr val="accent4">
+              <a:shade val="50000"/>
+            </a:schemeClr>
+          </a:lnRef>
+          <a:fillRef idx="1">
+            <a:schemeClr val="accent4"/>
+          </a:fillRef>
+          <a:effectRef idx="0">
+            <a:schemeClr val="accent4"/>
+          </a:effectRef>
+          <a:fontRef idx="minor">
+            <a:schemeClr val="lt1"/>
+          </a:fontRef>
+        </p:style>
+        <p:txBody>
+          <a:bodyPr rtlCol="0" anchor="ctr"/>
+          <a:lstStyle/>
+          <a:p>
+            <a:pPr algn="ctr"/>
+            <a:endParaRPr lang="zh-CN" altLang="en-US" b="1">
+              <a:solidFill>
+                <a:schemeClr val="tx1"/>
+              </a:solidFill>
+            </a:endParaRPr>
+          </a:p>
+        </p:txBody>
+      </p:sp>
+      <p:sp>
+        <p:nvSpPr>
+          <p:cNvPr id="157" name="流程图: 接点 156">
+            <a:extLst>
+              <a:ext uri="{FF2B5EF4-FFF2-40B4-BE49-F238E27FC236}">
+                <a16:creationId xmlns:a16="http://schemas.microsoft.com/office/drawing/2014/main" id="{BDFAF2B9-F17C-4264-986D-D3BB21ADEACD}"/>
+              </a:ext>
+            </a:extLst>
+          </p:cNvPr>
+          <p:cNvSpPr>
+            <a:spLocks noChangeAspect="1"/>
+          </p:cNvSpPr>
+          <p:nvPr/>
+        </p:nvSpPr>
+        <p:spPr>
+          <a:xfrm>
+            <a:off x="2050207" y="4385936"/>
+            <a:ext cx="453309" cy="436274"/>
+          </a:xfrm>
+          <a:prstGeom prst="flowChartConnector">
+            <a:avLst/>
+          </a:prstGeom>
+          <a:noFill/>
+          <a:ln w="19050">
+            <a:solidFill>
+              <a:schemeClr val="tx1"/>
+            </a:solidFill>
+          </a:ln>
+        </p:spPr>
+        <p:style>
+          <a:lnRef idx="2">
+            <a:schemeClr val="accent4">
+              <a:shade val="50000"/>
+            </a:schemeClr>
+          </a:lnRef>
+          <a:fillRef idx="1">
+            <a:schemeClr val="accent4"/>
+          </a:fillRef>
+          <a:effectRef idx="0">
+            <a:schemeClr val="accent4"/>
+          </a:effectRef>
+          <a:fontRef idx="minor">
+            <a:schemeClr val="lt1"/>
+          </a:fontRef>
+        </p:style>
+        <p:txBody>
+          <a:bodyPr rtlCol="0" anchor="ctr"/>
+          <a:lstStyle/>
+          <a:p>
+            <a:pPr algn="ctr"/>
+            <a:endParaRPr lang="zh-CN" altLang="en-US" b="1">
+              <a:solidFill>
+                <a:schemeClr val="tx1"/>
+              </a:solidFill>
+            </a:endParaRPr>
+          </a:p>
+        </p:txBody>
+      </p:sp>
+      <p:sp>
+        <p:nvSpPr>
+          <p:cNvPr id="159" name="流程图: 接点 158">
+            <a:extLst>
+              <a:ext uri="{FF2B5EF4-FFF2-40B4-BE49-F238E27FC236}">
+                <a16:creationId xmlns:a16="http://schemas.microsoft.com/office/drawing/2014/main" id="{BDFAF2B9-F17C-4264-986D-D3BB21ADEACD}"/>
+              </a:ext>
+            </a:extLst>
+          </p:cNvPr>
+          <p:cNvSpPr>
+            <a:spLocks noChangeAspect="1"/>
+          </p:cNvSpPr>
+          <p:nvPr/>
+        </p:nvSpPr>
+        <p:spPr>
+          <a:xfrm>
+            <a:off x="8263123" y="2759866"/>
+            <a:ext cx="453309" cy="436274"/>
+          </a:xfrm>
+          <a:prstGeom prst="flowChartConnector">
+            <a:avLst/>
+          </a:prstGeom>
+          <a:noFill/>
+          <a:ln w="19050">
+            <a:solidFill>
+              <a:schemeClr val="tx1"/>
+            </a:solidFill>
+          </a:ln>
+        </p:spPr>
+        <p:style>
+          <a:lnRef idx="2">
+            <a:schemeClr val="accent4">
+              <a:shade val="50000"/>
+            </a:schemeClr>
+          </a:lnRef>
+          <a:fillRef idx="1">
+            <a:schemeClr val="accent4"/>
+          </a:fillRef>
+          <a:effectRef idx="0">
+            <a:schemeClr val="accent4"/>
+          </a:effectRef>
+          <a:fontRef idx="minor">
+            <a:schemeClr val="lt1"/>
+          </a:fontRef>
+        </p:style>
+        <p:txBody>
+          <a:bodyPr rtlCol="0" anchor="ctr"/>
+          <a:lstStyle/>
+          <a:p>
+            <a:pPr algn="ctr"/>
+            <a:endParaRPr lang="zh-CN" altLang="en-US" b="1">
+              <a:solidFill>
+                <a:schemeClr val="tx1"/>
+              </a:solidFill>
+            </a:endParaRPr>
+          </a:p>
+        </p:txBody>
+      </p:sp>
+      <p:sp>
+        <p:nvSpPr>
+          <p:cNvPr id="169" name="流程图: 接点 168">
+            <a:extLst>
+              <a:ext uri="{FF2B5EF4-FFF2-40B4-BE49-F238E27FC236}">
+                <a16:creationId xmlns:a16="http://schemas.microsoft.com/office/drawing/2014/main" id="{B1D41E38-786F-4B78-A61C-54337B5D38BD}"/>
+              </a:ext>
+            </a:extLst>
+          </p:cNvPr>
+          <p:cNvSpPr>
+            <a:spLocks noChangeAspect="1"/>
+          </p:cNvSpPr>
+          <p:nvPr/>
+        </p:nvSpPr>
+        <p:spPr>
+          <a:xfrm>
+            <a:off x="2048573" y="3469032"/>
+            <a:ext cx="453309" cy="436274"/>
+          </a:xfrm>
+          <a:prstGeom prst="flowChartConnector">
+            <a:avLst/>
+          </a:prstGeom>
+          <a:noFill/>
+          <a:ln w="19050">
+            <a:solidFill>
+              <a:schemeClr val="tx1"/>
+            </a:solidFill>
+          </a:ln>
+        </p:spPr>
+        <p:style>
+          <a:lnRef idx="2">
+            <a:schemeClr val="accent4">
+              <a:shade val="50000"/>
+            </a:schemeClr>
+          </a:lnRef>
+          <a:fillRef idx="1">
+            <a:schemeClr val="accent4"/>
+          </a:fillRef>
+          <a:effectRef idx="0">
+            <a:schemeClr val="accent4"/>
+          </a:effectRef>
+          <a:fontRef idx="minor">
+            <a:schemeClr val="lt1"/>
+          </a:fontRef>
+        </p:style>
+        <p:txBody>
+          <a:bodyPr rtlCol="0" anchor="ctr"/>
+          <a:lstStyle/>
+          <a:p>
+            <a:pPr algn="ctr"/>
+            <a:endParaRPr lang="zh-CN" altLang="en-US" b="1">
+              <a:solidFill>
+                <a:schemeClr val="tx1"/>
+              </a:solidFill>
+            </a:endParaRPr>
+          </a:p>
+        </p:txBody>
+      </p:sp>
+      <p:sp>
+        <p:nvSpPr>
+          <p:cNvPr id="170" name="文本框 169"/>
+          <p:cNvSpPr txBox="1">
+            <a:spLocks noChangeAspect="1"/>
+          </p:cNvSpPr>
+          <p:nvPr/>
+        </p:nvSpPr>
+        <p:spPr>
+          <a:xfrm>
+            <a:off x="1798610" y="2710735"/>
+            <a:ext cx="737399" cy="1093632"/>
+          </a:xfrm>
+          <a:prstGeom prst="rect">
+            <a:avLst/>
+          </a:prstGeom>
+          <a:noFill/>
+        </p:spPr>
+        <p:txBody>
+          <a:bodyPr vert="eaVert" wrap="square" rtlCol="0">
+            <a:spAutoFit/>
+          </a:bodyPr>
+          <a:lstStyle/>
+          <a:p>
+            <a:r>
+              <a:rPr lang="en-AE" altLang="zh-CN" sz="2400" b="1" dirty="0" smtClean="0"/>
+              <a:t>……</a:t>
+            </a:r>
+            <a:endParaRPr lang="zh-CN" altLang="en-US" sz="2400" b="1" dirty="0"/>
+          </a:p>
+        </p:txBody>
+      </p:sp>
+      <p:cxnSp>
+        <p:nvCxnSpPr>
+          <p:cNvPr id="171" name="直接连接符 170">
+            <a:extLst>
+              <a:ext uri="{FF2B5EF4-FFF2-40B4-BE49-F238E27FC236}">
+                <a16:creationId xmlns:a16="http://schemas.microsoft.com/office/drawing/2014/main" id="{1DBE3D74-21D6-4D01-8877-F2B817CDB8DE}"/>
+              </a:ext>
+            </a:extLst>
+          </p:cNvPr>
+          <p:cNvCxnSpPr>
+            <a:cxnSpLocks noChangeAspect="1"/>
+            <a:stCxn id="130" idx="6"/>
+            <a:endCxn id="169" idx="2"/>
+          </p:cNvCxnSpPr>
+          <p:nvPr/>
+        </p:nvCxnSpPr>
+        <p:spPr>
+          <a:xfrm>
+            <a:off x="1395354" y="1868086"/>
+            <a:ext cx="653219" cy="1819083"/>
+          </a:xfrm>
+          <a:prstGeom prst="line">
+            <a:avLst/>
+          </a:prstGeom>
+          <a:ln w="19050">
+            <a:solidFill>
+              <a:schemeClr val="tx1"/>
+            </a:solidFill>
+          </a:ln>
+        </p:spPr>
+        <p:style>
+          <a:lnRef idx="3">
+            <a:schemeClr val="dk1"/>
+          </a:lnRef>
+          <a:fillRef idx="0">
+            <a:schemeClr val="dk1"/>
+          </a:fillRef>
+          <a:effectRef idx="2">
+            <a:schemeClr val="dk1"/>
+          </a:effectRef>
+          <a:fontRef idx="minor">
+            <a:schemeClr val="tx1"/>
+          </a:fontRef>
+        </p:style>
+      </p:cxnSp>
+      <p:cxnSp>
+        <p:nvCxnSpPr>
+          <p:cNvPr id="172" name="直接连接符 171">
+            <a:extLst>
+              <a:ext uri="{FF2B5EF4-FFF2-40B4-BE49-F238E27FC236}">
+                <a16:creationId xmlns:a16="http://schemas.microsoft.com/office/drawing/2014/main" id="{1DBE3D74-21D6-4D01-8877-F2B817CDB8DE}"/>
+              </a:ext>
+            </a:extLst>
+          </p:cNvPr>
+          <p:cNvCxnSpPr>
+            <a:cxnSpLocks noChangeAspect="1"/>
+            <a:stCxn id="131" idx="6"/>
+            <a:endCxn id="169" idx="2"/>
+          </p:cNvCxnSpPr>
+          <p:nvPr/>
+        </p:nvCxnSpPr>
+        <p:spPr>
+          <a:xfrm>
+            <a:off x="1386686" y="2609795"/>
+            <a:ext cx="661887" cy="1077374"/>
+          </a:xfrm>
+          <a:prstGeom prst="line">
+            <a:avLst/>
+          </a:prstGeom>
+          <a:ln w="19050">
+            <a:solidFill>
+              <a:schemeClr val="tx1"/>
+            </a:solidFill>
+          </a:ln>
+        </p:spPr>
+        <p:style>
+          <a:lnRef idx="3">
+            <a:schemeClr val="dk1"/>
+          </a:lnRef>
+          <a:fillRef idx="0">
+            <a:schemeClr val="dk1"/>
+          </a:fillRef>
+          <a:effectRef idx="2">
+            <a:schemeClr val="dk1"/>
+          </a:effectRef>
+          <a:fontRef idx="minor">
+            <a:schemeClr val="tx1"/>
+          </a:fontRef>
+        </p:style>
+      </p:cxnSp>
+      <p:cxnSp>
+        <p:nvCxnSpPr>
+          <p:cNvPr id="173" name="直接连接符 172">
+            <a:extLst>
+              <a:ext uri="{FF2B5EF4-FFF2-40B4-BE49-F238E27FC236}">
+                <a16:creationId xmlns:a16="http://schemas.microsoft.com/office/drawing/2014/main" id="{1DBE3D74-21D6-4D01-8877-F2B817CDB8DE}"/>
+              </a:ext>
+            </a:extLst>
+          </p:cNvPr>
+          <p:cNvCxnSpPr>
+            <a:cxnSpLocks noChangeAspect="1"/>
+            <a:stCxn id="132" idx="6"/>
+            <a:endCxn id="169" idx="2"/>
+          </p:cNvCxnSpPr>
+          <p:nvPr/>
+        </p:nvCxnSpPr>
+        <p:spPr>
+          <a:xfrm flipV="1">
+            <a:off x="1396282" y="3687169"/>
+            <a:ext cx="652291" cy="213559"/>
+          </a:xfrm>
+          <a:prstGeom prst="line">
+            <a:avLst/>
+          </a:prstGeom>
+          <a:ln w="19050">
+            <a:solidFill>
+              <a:schemeClr val="tx1"/>
+            </a:solidFill>
+          </a:ln>
+        </p:spPr>
+        <p:style>
+          <a:lnRef idx="3">
+            <a:schemeClr val="dk1"/>
+          </a:lnRef>
+          <a:fillRef idx="0">
+            <a:schemeClr val="dk1"/>
+          </a:fillRef>
+          <a:effectRef idx="2">
+            <a:schemeClr val="dk1"/>
+          </a:effectRef>
+          <a:fontRef idx="minor">
+            <a:schemeClr val="tx1"/>
+          </a:fontRef>
+        </p:style>
+      </p:cxnSp>
+      <p:sp>
+        <p:nvSpPr>
+          <p:cNvPr id="41" name="文本框 40"/>
+          <p:cNvSpPr txBox="1"/>
+          <p:nvPr/>
+        </p:nvSpPr>
+        <p:spPr>
+          <a:xfrm>
+            <a:off x="680573" y="4291925"/>
+            <a:ext cx="958917" cy="400110"/>
+          </a:xfrm>
+          <a:prstGeom prst="rect">
+            <a:avLst/>
+          </a:prstGeom>
+          <a:noFill/>
+          <a:ln w="19050">
+            <a:noFill/>
+          </a:ln>
+        </p:spPr>
+        <p:txBody>
+          <a:bodyPr wrap="none" rtlCol="0">
+            <a:spAutoFit/>
+          </a:bodyPr>
+          <a:lstStyle/>
+          <a:p>
+            <a:r>
+              <a:rPr lang="zh-CN" altLang="en-US" sz="2000" b="1" dirty="0" smtClean="0">
+                <a:latin typeface="宋体" panose="02010600030101010101" pitchFamily="2" charset="-122"/>
+                <a:ea typeface="宋体" panose="02010600030101010101" pitchFamily="2" charset="-122"/>
+              </a:rPr>
+              <a:t>输入层</a:t>
+            </a:r>
+            <a:endParaRPr lang="zh-CN" altLang="en-US" sz="2000" b="1" dirty="0">
+              <a:latin typeface="宋体" panose="02010600030101010101" pitchFamily="2" charset="-122"/>
+              <a:ea typeface="宋体" panose="02010600030101010101" pitchFamily="2" charset="-122"/>
+            </a:endParaRPr>
+          </a:p>
+        </p:txBody>
+      </p:sp>
+      <p:sp>
+        <p:nvSpPr>
+          <p:cNvPr id="174" name="流程图: 接点 173">
+            <a:extLst>
+              <a:ext uri="{FF2B5EF4-FFF2-40B4-BE49-F238E27FC236}">
+                <a16:creationId xmlns:a16="http://schemas.microsoft.com/office/drawing/2014/main" id="{BDFAF2B9-F17C-4264-986D-D3BB21ADEACD}"/>
+              </a:ext>
+            </a:extLst>
+          </p:cNvPr>
+          <p:cNvSpPr>
+            <a:spLocks noChangeAspect="1"/>
+          </p:cNvSpPr>
+          <p:nvPr/>
+        </p:nvSpPr>
+        <p:spPr>
+          <a:xfrm>
+            <a:off x="3188170" y="575346"/>
+            <a:ext cx="453309" cy="436274"/>
+          </a:xfrm>
+          <a:prstGeom prst="flowChartConnector">
+            <a:avLst/>
+          </a:prstGeom>
+          <a:noFill/>
+          <a:ln w="19050">
+            <a:solidFill>
+              <a:schemeClr val="tx1"/>
+            </a:solidFill>
+          </a:ln>
+        </p:spPr>
+        <p:style>
+          <a:lnRef idx="2">
+            <a:schemeClr val="accent4">
+              <a:shade val="50000"/>
+            </a:schemeClr>
+          </a:lnRef>
+          <a:fillRef idx="1">
+            <a:schemeClr val="accent4"/>
+          </a:fillRef>
+          <a:effectRef idx="0">
+            <a:schemeClr val="accent4"/>
+          </a:effectRef>
+          <a:fontRef idx="minor">
+            <a:schemeClr val="lt1"/>
+          </a:fontRef>
+        </p:style>
+        <p:txBody>
+          <a:bodyPr rtlCol="0" anchor="ctr"/>
+          <a:lstStyle/>
+          <a:p>
+            <a:pPr algn="ctr"/>
+            <a:endParaRPr lang="zh-CN" altLang="en-US" b="1">
+              <a:solidFill>
+                <a:schemeClr val="tx1"/>
+              </a:solidFill>
+            </a:endParaRPr>
+          </a:p>
+        </p:txBody>
+      </p:sp>
+      <p:sp>
+        <p:nvSpPr>
+          <p:cNvPr id="175" name="流程图: 接点 174">
+            <a:extLst>
+              <a:ext uri="{FF2B5EF4-FFF2-40B4-BE49-F238E27FC236}">
+                <a16:creationId xmlns:a16="http://schemas.microsoft.com/office/drawing/2014/main" id="{BDFAF2B9-F17C-4264-986D-D3BB21ADEACD}"/>
+              </a:ext>
+            </a:extLst>
+          </p:cNvPr>
+          <p:cNvSpPr>
+            <a:spLocks noChangeAspect="1"/>
+          </p:cNvSpPr>
+          <p:nvPr/>
+        </p:nvSpPr>
+        <p:spPr>
+          <a:xfrm>
+            <a:off x="3184043" y="1345084"/>
+            <a:ext cx="453309" cy="436274"/>
+          </a:xfrm>
+          <a:prstGeom prst="flowChartConnector">
+            <a:avLst/>
+          </a:prstGeom>
+          <a:noFill/>
+          <a:ln w="19050">
+            <a:solidFill>
+              <a:schemeClr val="tx1"/>
+            </a:solidFill>
+          </a:ln>
+        </p:spPr>
+        <p:style>
+          <a:lnRef idx="2">
+            <a:schemeClr val="accent4">
+              <a:shade val="50000"/>
+            </a:schemeClr>
+          </a:lnRef>
+          <a:fillRef idx="1">
+            <a:schemeClr val="accent4"/>
+          </a:fillRef>
+          <a:effectRef idx="0">
+            <a:schemeClr val="accent4"/>
+          </a:effectRef>
+          <a:fontRef idx="minor">
+            <a:schemeClr val="lt1"/>
+          </a:fontRef>
+        </p:style>
+        <p:txBody>
+          <a:bodyPr rtlCol="0" anchor="ctr"/>
+          <a:lstStyle/>
+          <a:p>
+            <a:pPr algn="ctr"/>
+            <a:endParaRPr lang="zh-CN" altLang="en-US" b="1">
+              <a:solidFill>
+                <a:schemeClr val="tx1"/>
+              </a:solidFill>
+            </a:endParaRPr>
+          </a:p>
+        </p:txBody>
+      </p:sp>
+      <p:sp>
+        <p:nvSpPr>
+          <p:cNvPr id="176" name="流程图: 接点 175">
+            <a:extLst>
+              <a:ext uri="{FF2B5EF4-FFF2-40B4-BE49-F238E27FC236}">
+                <a16:creationId xmlns:a16="http://schemas.microsoft.com/office/drawing/2014/main" id="{BDFAF2B9-F17C-4264-986D-D3BB21ADEACD}"/>
+              </a:ext>
+            </a:extLst>
+          </p:cNvPr>
+          <p:cNvSpPr>
+            <a:spLocks noChangeAspect="1"/>
+          </p:cNvSpPr>
+          <p:nvPr/>
+        </p:nvSpPr>
+        <p:spPr>
+          <a:xfrm>
+            <a:off x="3175590" y="5025818"/>
+            <a:ext cx="453309" cy="436274"/>
+          </a:xfrm>
+          <a:prstGeom prst="flowChartConnector">
+            <a:avLst/>
+          </a:prstGeom>
+          <a:noFill/>
+          <a:ln w="19050">
+            <a:solidFill>
+              <a:schemeClr val="tx1"/>
+            </a:solidFill>
+          </a:ln>
+        </p:spPr>
+        <p:style>
+          <a:lnRef idx="2">
+            <a:schemeClr val="accent4">
+              <a:shade val="50000"/>
+            </a:schemeClr>
+          </a:lnRef>
+          <a:fillRef idx="1">
+            <a:schemeClr val="accent4"/>
+          </a:fillRef>
+          <a:effectRef idx="0">
+            <a:schemeClr val="accent4"/>
+          </a:effectRef>
+          <a:fontRef idx="minor">
+            <a:schemeClr val="lt1"/>
+          </a:fontRef>
+        </p:style>
+        <p:txBody>
+          <a:bodyPr rtlCol="0" anchor="ctr"/>
+          <a:lstStyle/>
+          <a:p>
+            <a:pPr algn="ctr"/>
+            <a:endParaRPr lang="zh-CN" altLang="en-US" b="1">
+              <a:solidFill>
+                <a:schemeClr val="tx1"/>
+              </a:solidFill>
+            </a:endParaRPr>
+          </a:p>
+        </p:txBody>
+      </p:sp>
+      <p:sp>
+        <p:nvSpPr>
+          <p:cNvPr id="177" name="流程图: 接点 176">
+            <a:extLst>
+              <a:ext uri="{FF2B5EF4-FFF2-40B4-BE49-F238E27FC236}">
+                <a16:creationId xmlns:a16="http://schemas.microsoft.com/office/drawing/2014/main" id="{B1D41E38-786F-4B78-A61C-54337B5D38BD}"/>
+              </a:ext>
+            </a:extLst>
+          </p:cNvPr>
+          <p:cNvSpPr>
+            <a:spLocks noChangeAspect="1"/>
+          </p:cNvSpPr>
+          <p:nvPr/>
+        </p:nvSpPr>
+        <p:spPr>
+          <a:xfrm>
+            <a:off x="3182212" y="4251827"/>
+            <a:ext cx="453309" cy="436274"/>
+          </a:xfrm>
+          <a:prstGeom prst="flowChartConnector">
+            <a:avLst/>
+          </a:prstGeom>
+          <a:noFill/>
+          <a:ln w="19050">
+            <a:solidFill>
+              <a:schemeClr val="tx1"/>
+            </a:solidFill>
+          </a:ln>
+        </p:spPr>
+        <p:style>
+          <a:lnRef idx="2">
+            <a:schemeClr val="accent4">
+              <a:shade val="50000"/>
+            </a:schemeClr>
+          </a:lnRef>
+          <a:fillRef idx="1">
+            <a:schemeClr val="accent4"/>
+          </a:fillRef>
+          <a:effectRef idx="0">
+            <a:schemeClr val="accent4"/>
+          </a:effectRef>
+          <a:fontRef idx="minor">
+            <a:schemeClr val="lt1"/>
+          </a:fontRef>
+        </p:style>
+        <p:txBody>
+          <a:bodyPr rtlCol="0" anchor="ctr"/>
+          <a:lstStyle/>
+          <a:p>
+            <a:pPr algn="ctr"/>
+            <a:endParaRPr lang="zh-CN" altLang="en-US" b="1">
+              <a:solidFill>
+                <a:schemeClr val="tx1"/>
+              </a:solidFill>
+            </a:endParaRPr>
+          </a:p>
+        </p:txBody>
+      </p:sp>
+      <p:sp>
+        <p:nvSpPr>
+          <p:cNvPr id="178" name="文本框 177"/>
+          <p:cNvSpPr txBox="1">
+            <a:spLocks noChangeAspect="1"/>
+          </p:cNvSpPr>
+          <p:nvPr/>
+        </p:nvSpPr>
+        <p:spPr>
+          <a:xfrm>
+            <a:off x="2935134" y="2695999"/>
+            <a:ext cx="737399" cy="1093632"/>
+          </a:xfrm>
+          <a:prstGeom prst="rect">
+            <a:avLst/>
+          </a:prstGeom>
+          <a:noFill/>
+        </p:spPr>
+        <p:txBody>
+          <a:bodyPr vert="eaVert" wrap="square" rtlCol="0">
+            <a:spAutoFit/>
+          </a:bodyPr>
+          <a:lstStyle/>
+          <a:p>
+            <a:r>
+              <a:rPr lang="en-AE" altLang="zh-CN" sz="2400" b="1" dirty="0" smtClean="0"/>
+              <a:t>……</a:t>
+            </a:r>
+            <a:endParaRPr lang="zh-CN" altLang="en-US" sz="2400" b="1" dirty="0"/>
+          </a:p>
+        </p:txBody>
+      </p:sp>
+      <p:sp>
+        <p:nvSpPr>
+          <p:cNvPr id="179" name="流程图: 接点 178">
+            <a:extLst>
+              <a:ext uri="{FF2B5EF4-FFF2-40B4-BE49-F238E27FC236}">
+                <a16:creationId xmlns:a16="http://schemas.microsoft.com/office/drawing/2014/main" id="{BDFAF2B9-F17C-4264-986D-D3BB21ADEACD}"/>
+              </a:ext>
+            </a:extLst>
+          </p:cNvPr>
+          <p:cNvSpPr>
+            <a:spLocks noChangeAspect="1"/>
+          </p:cNvSpPr>
+          <p:nvPr/>
+        </p:nvSpPr>
+        <p:spPr>
+          <a:xfrm>
+            <a:off x="3179784" y="2114710"/>
+            <a:ext cx="453309" cy="436274"/>
+          </a:xfrm>
+          <a:prstGeom prst="flowChartConnector">
+            <a:avLst/>
+          </a:prstGeom>
+          <a:noFill/>
+          <a:ln w="19050">
+            <a:solidFill>
+              <a:schemeClr val="tx1"/>
+            </a:solidFill>
+          </a:ln>
+        </p:spPr>
+        <p:style>
+          <a:lnRef idx="2">
+            <a:schemeClr val="accent4">
+              <a:shade val="50000"/>
+            </a:schemeClr>
+          </a:lnRef>
+          <a:fillRef idx="1">
+            <a:schemeClr val="accent4"/>
+          </a:fillRef>
+          <a:effectRef idx="0">
+            <a:schemeClr val="accent4"/>
+          </a:effectRef>
+          <a:fontRef idx="minor">
+            <a:schemeClr val="lt1"/>
+          </a:fontRef>
+        </p:style>
+        <p:txBody>
+          <a:bodyPr rtlCol="0" anchor="ctr"/>
+          <a:lstStyle/>
+          <a:p>
+            <a:pPr algn="ctr"/>
+            <a:endParaRPr lang="zh-CN" altLang="en-US" b="1">
+              <a:solidFill>
+                <a:schemeClr val="tx1"/>
+              </a:solidFill>
+            </a:endParaRPr>
+          </a:p>
+        </p:txBody>
+      </p:sp>
+      <p:sp>
+        <p:nvSpPr>
+          <p:cNvPr id="180" name="流程图: 接点 179">
+            <a:extLst>
+              <a:ext uri="{FF2B5EF4-FFF2-40B4-BE49-F238E27FC236}">
+                <a16:creationId xmlns:a16="http://schemas.microsoft.com/office/drawing/2014/main" id="{BDFAF2B9-F17C-4264-986D-D3BB21ADEACD}"/>
+              </a:ext>
+            </a:extLst>
+          </p:cNvPr>
+          <p:cNvSpPr>
+            <a:spLocks noChangeAspect="1"/>
+          </p:cNvSpPr>
+          <p:nvPr/>
+        </p:nvSpPr>
+        <p:spPr>
+          <a:xfrm>
+            <a:off x="3181615" y="3476297"/>
+            <a:ext cx="453309" cy="436274"/>
+          </a:xfrm>
+          <a:prstGeom prst="flowChartConnector">
+            <a:avLst/>
+          </a:prstGeom>
+          <a:noFill/>
+          <a:ln w="19050">
+            <a:solidFill>
+              <a:schemeClr val="tx1"/>
+            </a:solidFill>
+          </a:ln>
+        </p:spPr>
+        <p:style>
+          <a:lnRef idx="2">
+            <a:schemeClr val="accent4">
+              <a:shade val="50000"/>
+            </a:schemeClr>
+          </a:lnRef>
+          <a:fillRef idx="1">
+            <a:schemeClr val="accent4"/>
+          </a:fillRef>
+          <a:effectRef idx="0">
+            <a:schemeClr val="accent4"/>
+          </a:effectRef>
+          <a:fontRef idx="minor">
+            <a:schemeClr val="lt1"/>
+          </a:fontRef>
+        </p:style>
+        <p:txBody>
+          <a:bodyPr rtlCol="0" anchor="ctr"/>
+          <a:lstStyle/>
+          <a:p>
+            <a:pPr algn="ctr"/>
+            <a:endParaRPr lang="zh-CN" altLang="en-US" b="1">
+              <a:solidFill>
+                <a:schemeClr val="tx1"/>
+              </a:solidFill>
+            </a:endParaRPr>
+          </a:p>
+        </p:txBody>
+      </p:sp>
+      <p:sp>
+        <p:nvSpPr>
+          <p:cNvPr id="181" name="流程图: 接点 180">
+            <a:extLst>
+              <a:ext uri="{FF2B5EF4-FFF2-40B4-BE49-F238E27FC236}">
+                <a16:creationId xmlns:a16="http://schemas.microsoft.com/office/drawing/2014/main" id="{BDFAF2B9-F17C-4264-986D-D3BB21ADEACD}"/>
+              </a:ext>
+            </a:extLst>
+          </p:cNvPr>
+          <p:cNvSpPr>
+            <a:spLocks noChangeAspect="1"/>
+          </p:cNvSpPr>
+          <p:nvPr/>
+        </p:nvSpPr>
+        <p:spPr>
+          <a:xfrm>
+            <a:off x="4945885" y="21765"/>
+            <a:ext cx="453309" cy="436274"/>
+          </a:xfrm>
+          <a:prstGeom prst="flowChartConnector">
+            <a:avLst/>
+          </a:prstGeom>
+          <a:noFill/>
+          <a:ln w="19050">
+            <a:solidFill>
+              <a:schemeClr val="tx1"/>
+            </a:solidFill>
+          </a:ln>
+        </p:spPr>
+        <p:style>
+          <a:lnRef idx="2">
+            <a:schemeClr val="accent4">
+              <a:shade val="50000"/>
+            </a:schemeClr>
+          </a:lnRef>
+          <a:fillRef idx="1">
+            <a:schemeClr val="accent4"/>
+          </a:fillRef>
+          <a:effectRef idx="0">
+            <a:schemeClr val="accent4"/>
+          </a:effectRef>
+          <a:fontRef idx="minor">
+            <a:schemeClr val="lt1"/>
+          </a:fontRef>
+        </p:style>
+        <p:txBody>
+          <a:bodyPr rtlCol="0" anchor="ctr"/>
+          <a:lstStyle/>
+          <a:p>
+            <a:pPr algn="ctr"/>
+            <a:endParaRPr lang="zh-CN" altLang="en-US" b="1">
+              <a:solidFill>
+                <a:schemeClr val="tx1"/>
+              </a:solidFill>
+            </a:endParaRPr>
+          </a:p>
+        </p:txBody>
+      </p:sp>
+      <p:sp>
+        <p:nvSpPr>
+          <p:cNvPr id="182" name="流程图: 接点 181">
+            <a:extLst>
+              <a:ext uri="{FF2B5EF4-FFF2-40B4-BE49-F238E27FC236}">
+                <a16:creationId xmlns:a16="http://schemas.microsoft.com/office/drawing/2014/main" id="{BDFAF2B9-F17C-4264-986D-D3BB21ADEACD}"/>
+              </a:ext>
+            </a:extLst>
+          </p:cNvPr>
+          <p:cNvSpPr>
+            <a:spLocks noChangeAspect="1"/>
+          </p:cNvSpPr>
+          <p:nvPr/>
+        </p:nvSpPr>
+        <p:spPr>
+          <a:xfrm>
+            <a:off x="4948123" y="721470"/>
+            <a:ext cx="453309" cy="436274"/>
+          </a:xfrm>
+          <a:prstGeom prst="flowChartConnector">
+            <a:avLst/>
+          </a:prstGeom>
+          <a:noFill/>
+          <a:ln w="19050">
+            <a:solidFill>
+              <a:schemeClr val="tx1"/>
+            </a:solidFill>
+          </a:ln>
+        </p:spPr>
+        <p:style>
+          <a:lnRef idx="2">
+            <a:schemeClr val="accent4">
+              <a:shade val="50000"/>
+            </a:schemeClr>
+          </a:lnRef>
+          <a:fillRef idx="1">
+            <a:schemeClr val="accent4"/>
+          </a:fillRef>
+          <a:effectRef idx="0">
+            <a:schemeClr val="accent4"/>
+          </a:effectRef>
+          <a:fontRef idx="minor">
+            <a:schemeClr val="lt1"/>
+          </a:fontRef>
+        </p:style>
+        <p:txBody>
+          <a:bodyPr rtlCol="0" anchor="ctr"/>
+          <a:lstStyle/>
+          <a:p>
+            <a:pPr algn="ctr"/>
+            <a:endParaRPr lang="zh-CN" altLang="en-US" b="1">
+              <a:solidFill>
+                <a:schemeClr val="tx1"/>
+              </a:solidFill>
+            </a:endParaRPr>
+          </a:p>
+        </p:txBody>
+      </p:sp>
+      <p:sp>
+        <p:nvSpPr>
+          <p:cNvPr id="183" name="流程图: 接点 182">
+            <a:extLst>
+              <a:ext uri="{FF2B5EF4-FFF2-40B4-BE49-F238E27FC236}">
+                <a16:creationId xmlns:a16="http://schemas.microsoft.com/office/drawing/2014/main" id="{BDFAF2B9-F17C-4264-986D-D3BB21ADEACD}"/>
+              </a:ext>
+            </a:extLst>
+          </p:cNvPr>
+          <p:cNvSpPr>
+            <a:spLocks noChangeAspect="1"/>
+          </p:cNvSpPr>
+          <p:nvPr/>
+        </p:nvSpPr>
+        <p:spPr>
+          <a:xfrm>
+            <a:off x="4931566" y="5570532"/>
+            <a:ext cx="453309" cy="436274"/>
+          </a:xfrm>
+          <a:prstGeom prst="flowChartConnector">
+            <a:avLst/>
+          </a:prstGeom>
+          <a:noFill/>
+          <a:ln w="19050">
+            <a:solidFill>
+              <a:schemeClr val="tx1"/>
+            </a:solidFill>
+          </a:ln>
+        </p:spPr>
+        <p:style>
+          <a:lnRef idx="2">
+            <a:schemeClr val="accent4">
+              <a:shade val="50000"/>
+            </a:schemeClr>
+          </a:lnRef>
+          <a:fillRef idx="1">
+            <a:schemeClr val="accent4"/>
+          </a:fillRef>
+          <a:effectRef idx="0">
+            <a:schemeClr val="accent4"/>
+          </a:effectRef>
+          <a:fontRef idx="minor">
+            <a:schemeClr val="lt1"/>
+          </a:fontRef>
+        </p:style>
+        <p:txBody>
+          <a:bodyPr rtlCol="0" anchor="ctr"/>
+          <a:lstStyle/>
+          <a:p>
+            <a:pPr algn="ctr"/>
+            <a:endParaRPr lang="zh-CN" altLang="en-US" b="1">
+              <a:solidFill>
+                <a:schemeClr val="tx1"/>
+              </a:solidFill>
+            </a:endParaRPr>
+          </a:p>
+        </p:txBody>
+      </p:sp>
+      <p:sp>
+        <p:nvSpPr>
+          <p:cNvPr id="184" name="流程图: 接点 183">
+            <a:extLst>
+              <a:ext uri="{FF2B5EF4-FFF2-40B4-BE49-F238E27FC236}">
+                <a16:creationId xmlns:a16="http://schemas.microsoft.com/office/drawing/2014/main" id="{B1D41E38-786F-4B78-A61C-54337B5D38BD}"/>
+              </a:ext>
+            </a:extLst>
+          </p:cNvPr>
+          <p:cNvSpPr>
+            <a:spLocks noChangeAspect="1"/>
+          </p:cNvSpPr>
+          <p:nvPr/>
+        </p:nvSpPr>
+        <p:spPr>
+          <a:xfrm>
+            <a:off x="4945349" y="4873110"/>
+            <a:ext cx="453309" cy="436274"/>
+          </a:xfrm>
+          <a:prstGeom prst="flowChartConnector">
+            <a:avLst/>
+          </a:prstGeom>
+          <a:noFill/>
+          <a:ln w="19050">
+            <a:solidFill>
+              <a:schemeClr val="tx1"/>
+            </a:solidFill>
+          </a:ln>
+        </p:spPr>
+        <p:style>
+          <a:lnRef idx="2">
+            <a:schemeClr val="accent4">
+              <a:shade val="50000"/>
+            </a:schemeClr>
+          </a:lnRef>
+          <a:fillRef idx="1">
+            <a:schemeClr val="accent4"/>
+          </a:fillRef>
+          <a:effectRef idx="0">
+            <a:schemeClr val="accent4"/>
+          </a:effectRef>
+          <a:fontRef idx="minor">
+            <a:schemeClr val="lt1"/>
+          </a:fontRef>
+        </p:style>
+        <p:txBody>
+          <a:bodyPr rtlCol="0" anchor="ctr"/>
+          <a:lstStyle/>
+          <a:p>
+            <a:pPr algn="ctr"/>
+            <a:endParaRPr lang="zh-CN" altLang="en-US" b="1">
+              <a:solidFill>
+                <a:schemeClr val="tx1"/>
+              </a:solidFill>
+            </a:endParaRPr>
+          </a:p>
+        </p:txBody>
+      </p:sp>
+      <p:sp>
+        <p:nvSpPr>
+          <p:cNvPr id="185" name="文本框 184"/>
+          <p:cNvSpPr txBox="1">
+            <a:spLocks noChangeAspect="1"/>
+          </p:cNvSpPr>
+          <p:nvPr/>
+        </p:nvSpPr>
+        <p:spPr>
+          <a:xfrm>
+            <a:off x="4689726" y="2716598"/>
+            <a:ext cx="737399" cy="1093632"/>
+          </a:xfrm>
+          <a:prstGeom prst="rect">
+            <a:avLst/>
+          </a:prstGeom>
+          <a:noFill/>
+        </p:spPr>
+        <p:txBody>
+          <a:bodyPr vert="eaVert" wrap="square" rtlCol="0">
+            <a:spAutoFit/>
+          </a:bodyPr>
+          <a:lstStyle/>
+          <a:p>
+            <a:r>
+              <a:rPr lang="en-AE" altLang="zh-CN" sz="2400" b="1" dirty="0" smtClean="0"/>
+              <a:t>……</a:t>
+            </a:r>
+            <a:endParaRPr lang="zh-CN" altLang="en-US" sz="2400" b="1" dirty="0"/>
+          </a:p>
+        </p:txBody>
+      </p:sp>
+      <p:sp>
+        <p:nvSpPr>
+          <p:cNvPr id="186" name="流程图: 接点 185">
+            <a:extLst>
+              <a:ext uri="{FF2B5EF4-FFF2-40B4-BE49-F238E27FC236}">
+                <a16:creationId xmlns:a16="http://schemas.microsoft.com/office/drawing/2014/main" id="{BDFAF2B9-F17C-4264-986D-D3BB21ADEACD}"/>
+              </a:ext>
+            </a:extLst>
+          </p:cNvPr>
+          <p:cNvSpPr>
+            <a:spLocks noChangeAspect="1"/>
+          </p:cNvSpPr>
+          <p:nvPr/>
+        </p:nvSpPr>
+        <p:spPr>
+          <a:xfrm>
+            <a:off x="4946274" y="1413822"/>
+            <a:ext cx="453309" cy="436274"/>
+          </a:xfrm>
+          <a:prstGeom prst="flowChartConnector">
+            <a:avLst/>
+          </a:prstGeom>
+          <a:noFill/>
+          <a:ln w="19050">
+            <a:solidFill>
+              <a:schemeClr val="tx1"/>
+            </a:solidFill>
+          </a:ln>
+        </p:spPr>
+        <p:style>
+          <a:lnRef idx="2">
+            <a:schemeClr val="accent4">
+              <a:shade val="50000"/>
+            </a:schemeClr>
+          </a:lnRef>
+          <a:fillRef idx="1">
+            <a:schemeClr val="accent4"/>
+          </a:fillRef>
+          <a:effectRef idx="0">
+            <a:schemeClr val="accent4"/>
+          </a:effectRef>
+          <a:fontRef idx="minor">
+            <a:schemeClr val="lt1"/>
+          </a:fontRef>
+        </p:style>
+        <p:txBody>
+          <a:bodyPr rtlCol="0" anchor="ctr"/>
+          <a:lstStyle/>
+          <a:p>
+            <a:pPr algn="ctr"/>
+            <a:endParaRPr lang="zh-CN" altLang="en-US" b="1">
+              <a:solidFill>
+                <a:schemeClr val="tx1"/>
+              </a:solidFill>
+            </a:endParaRPr>
+          </a:p>
+        </p:txBody>
+      </p:sp>
+      <p:sp>
+        <p:nvSpPr>
+          <p:cNvPr id="187" name="流程图: 接点 186">
+            <a:extLst>
+              <a:ext uri="{FF2B5EF4-FFF2-40B4-BE49-F238E27FC236}">
+                <a16:creationId xmlns:a16="http://schemas.microsoft.com/office/drawing/2014/main" id="{BDFAF2B9-F17C-4264-986D-D3BB21ADEACD}"/>
+              </a:ext>
+            </a:extLst>
+          </p:cNvPr>
+          <p:cNvSpPr>
+            <a:spLocks noChangeAspect="1"/>
+          </p:cNvSpPr>
+          <p:nvPr/>
+        </p:nvSpPr>
+        <p:spPr>
+          <a:xfrm>
+            <a:off x="4952488" y="4175688"/>
+            <a:ext cx="453309" cy="436274"/>
+          </a:xfrm>
+          <a:prstGeom prst="flowChartConnector">
+            <a:avLst/>
+          </a:prstGeom>
+          <a:noFill/>
+          <a:ln w="19050">
+            <a:solidFill>
+              <a:schemeClr val="tx1"/>
+            </a:solidFill>
+          </a:ln>
+        </p:spPr>
+        <p:style>
+          <a:lnRef idx="2">
+            <a:schemeClr val="accent4">
+              <a:shade val="50000"/>
+            </a:schemeClr>
+          </a:lnRef>
+          <a:fillRef idx="1">
+            <a:schemeClr val="accent4"/>
+          </a:fillRef>
+          <a:effectRef idx="0">
+            <a:schemeClr val="accent4"/>
+          </a:effectRef>
+          <a:fontRef idx="minor">
+            <a:schemeClr val="lt1"/>
+          </a:fontRef>
+        </p:style>
+        <p:txBody>
+          <a:bodyPr rtlCol="0" anchor="ctr"/>
+          <a:lstStyle/>
+          <a:p>
+            <a:pPr algn="ctr"/>
+            <a:endParaRPr lang="zh-CN" altLang="en-US" b="1">
+              <a:solidFill>
+                <a:schemeClr val="tx1"/>
+              </a:solidFill>
+            </a:endParaRPr>
+          </a:p>
+        </p:txBody>
+      </p:sp>
+      <p:sp>
+        <p:nvSpPr>
+          <p:cNvPr id="188" name="流程图: 接点 187">
+            <a:extLst>
+              <a:ext uri="{FF2B5EF4-FFF2-40B4-BE49-F238E27FC236}">
+                <a16:creationId xmlns:a16="http://schemas.microsoft.com/office/drawing/2014/main" id="{BDFAF2B9-F17C-4264-986D-D3BB21ADEACD}"/>
+              </a:ext>
+            </a:extLst>
+          </p:cNvPr>
+          <p:cNvSpPr>
+            <a:spLocks noChangeAspect="1"/>
+          </p:cNvSpPr>
+          <p:nvPr/>
+        </p:nvSpPr>
+        <p:spPr>
+          <a:xfrm>
+            <a:off x="4946275" y="2111244"/>
+            <a:ext cx="453309" cy="436274"/>
+          </a:xfrm>
+          <a:prstGeom prst="flowChartConnector">
+            <a:avLst/>
+          </a:prstGeom>
+          <a:noFill/>
+          <a:ln w="19050">
+            <a:solidFill>
+              <a:schemeClr val="tx1"/>
+            </a:solidFill>
+          </a:ln>
+        </p:spPr>
+        <p:style>
+          <a:lnRef idx="2">
+            <a:schemeClr val="accent4">
+              <a:shade val="50000"/>
+            </a:schemeClr>
+          </a:lnRef>
+          <a:fillRef idx="1">
+            <a:schemeClr val="accent4"/>
+          </a:fillRef>
+          <a:effectRef idx="0">
+            <a:schemeClr val="accent4"/>
+          </a:effectRef>
+          <a:fontRef idx="minor">
+            <a:schemeClr val="lt1"/>
+          </a:fontRef>
+        </p:style>
+        <p:txBody>
+          <a:bodyPr rtlCol="0" anchor="ctr"/>
+          <a:lstStyle/>
+          <a:p>
+            <a:pPr algn="ctr"/>
+            <a:endParaRPr lang="zh-CN" altLang="en-US" b="1">
+              <a:solidFill>
+                <a:schemeClr val="tx1"/>
+              </a:solidFill>
+            </a:endParaRPr>
+          </a:p>
+        </p:txBody>
+      </p:sp>
+      <p:sp>
+        <p:nvSpPr>
+          <p:cNvPr id="189" name="流程图: 接点 188">
+            <a:extLst>
+              <a:ext uri="{FF2B5EF4-FFF2-40B4-BE49-F238E27FC236}">
+                <a16:creationId xmlns:a16="http://schemas.microsoft.com/office/drawing/2014/main" id="{BDFAF2B9-F17C-4264-986D-D3BB21ADEACD}"/>
+              </a:ext>
+            </a:extLst>
+          </p:cNvPr>
+          <p:cNvSpPr>
+            <a:spLocks noChangeAspect="1"/>
+          </p:cNvSpPr>
+          <p:nvPr/>
+        </p:nvSpPr>
+        <p:spPr>
+          <a:xfrm>
+            <a:off x="4931567" y="3479763"/>
+            <a:ext cx="453309" cy="436274"/>
+          </a:xfrm>
+          <a:prstGeom prst="flowChartConnector">
+            <a:avLst/>
+          </a:prstGeom>
+          <a:noFill/>
+          <a:ln w="19050">
+            <a:solidFill>
+              <a:schemeClr val="tx1"/>
+            </a:solidFill>
+          </a:ln>
+        </p:spPr>
+        <p:style>
+          <a:lnRef idx="2">
+            <a:schemeClr val="accent4">
+              <a:shade val="50000"/>
+            </a:schemeClr>
+          </a:lnRef>
+          <a:fillRef idx="1">
+            <a:schemeClr val="accent4"/>
+          </a:fillRef>
+          <a:effectRef idx="0">
+            <a:schemeClr val="accent4"/>
+          </a:effectRef>
+          <a:fontRef idx="minor">
+            <a:schemeClr val="lt1"/>
+          </a:fontRef>
+        </p:style>
+        <p:txBody>
+          <a:bodyPr rtlCol="0" anchor="ctr"/>
+          <a:lstStyle/>
+          <a:p>
+            <a:pPr algn="ctr"/>
+            <a:endParaRPr lang="zh-CN" altLang="en-US" b="1">
+              <a:solidFill>
+                <a:schemeClr val="tx1"/>
+              </a:solidFill>
+            </a:endParaRPr>
+          </a:p>
+        </p:txBody>
+      </p:sp>
+      <p:sp>
+        <p:nvSpPr>
+          <p:cNvPr id="191" name="流程图: 接点 190">
+            <a:extLst>
+              <a:ext uri="{FF2B5EF4-FFF2-40B4-BE49-F238E27FC236}">
+                <a16:creationId xmlns:a16="http://schemas.microsoft.com/office/drawing/2014/main" id="{BDFAF2B9-F17C-4264-986D-D3BB21ADEACD}"/>
+              </a:ext>
+            </a:extLst>
+          </p:cNvPr>
+          <p:cNvSpPr>
+            <a:spLocks noChangeAspect="1"/>
+          </p:cNvSpPr>
+          <p:nvPr/>
+        </p:nvSpPr>
+        <p:spPr>
+          <a:xfrm>
+            <a:off x="6836411" y="21765"/>
+            <a:ext cx="453309" cy="436274"/>
+          </a:xfrm>
+          <a:prstGeom prst="flowChartConnector">
+            <a:avLst/>
+          </a:prstGeom>
+          <a:noFill/>
+          <a:ln w="19050">
+            <a:solidFill>
+              <a:schemeClr val="tx1"/>
+            </a:solidFill>
+          </a:ln>
+        </p:spPr>
+        <p:style>
+          <a:lnRef idx="2">
+            <a:schemeClr val="accent4">
+              <a:shade val="50000"/>
+            </a:schemeClr>
+          </a:lnRef>
+          <a:fillRef idx="1">
+            <a:schemeClr val="accent4"/>
+          </a:fillRef>
+          <a:effectRef idx="0">
+            <a:schemeClr val="accent4"/>
+          </a:effectRef>
+          <a:fontRef idx="minor">
+            <a:schemeClr val="lt1"/>
+          </a:fontRef>
+        </p:style>
+        <p:txBody>
+          <a:bodyPr rtlCol="0" anchor="ctr"/>
+          <a:lstStyle/>
+          <a:p>
+            <a:pPr algn="ctr"/>
+            <a:endParaRPr lang="zh-CN" altLang="en-US" b="1">
+              <a:solidFill>
+                <a:schemeClr val="tx1"/>
+              </a:solidFill>
+            </a:endParaRPr>
+          </a:p>
+        </p:txBody>
+      </p:sp>
+      <p:sp>
+        <p:nvSpPr>
+          <p:cNvPr id="192" name="流程图: 接点 191">
+            <a:extLst>
+              <a:ext uri="{FF2B5EF4-FFF2-40B4-BE49-F238E27FC236}">
+                <a16:creationId xmlns:a16="http://schemas.microsoft.com/office/drawing/2014/main" id="{BDFAF2B9-F17C-4264-986D-D3BB21ADEACD}"/>
+              </a:ext>
+            </a:extLst>
+          </p:cNvPr>
+          <p:cNvSpPr>
+            <a:spLocks noChangeAspect="1"/>
+          </p:cNvSpPr>
+          <p:nvPr/>
+        </p:nvSpPr>
+        <p:spPr>
+          <a:xfrm>
+            <a:off x="6836410" y="721470"/>
+            <a:ext cx="453309" cy="436274"/>
+          </a:xfrm>
+          <a:prstGeom prst="flowChartConnector">
+            <a:avLst/>
+          </a:prstGeom>
+          <a:noFill/>
+          <a:ln w="19050">
+            <a:solidFill>
+              <a:schemeClr val="tx1"/>
+            </a:solidFill>
+          </a:ln>
+        </p:spPr>
+        <p:style>
+          <a:lnRef idx="2">
+            <a:schemeClr val="accent4">
+              <a:shade val="50000"/>
+            </a:schemeClr>
+          </a:lnRef>
+          <a:fillRef idx="1">
+            <a:schemeClr val="accent4"/>
+          </a:fillRef>
+          <a:effectRef idx="0">
+            <a:schemeClr val="accent4"/>
+          </a:effectRef>
+          <a:fontRef idx="minor">
+            <a:schemeClr val="lt1"/>
+          </a:fontRef>
+        </p:style>
+        <p:txBody>
+          <a:bodyPr rtlCol="0" anchor="ctr"/>
+          <a:lstStyle/>
+          <a:p>
+            <a:pPr algn="ctr"/>
+            <a:endParaRPr lang="zh-CN" altLang="en-US" b="1">
+              <a:solidFill>
+                <a:schemeClr val="tx1"/>
+              </a:solidFill>
+            </a:endParaRPr>
+          </a:p>
+        </p:txBody>
+      </p:sp>
+      <p:sp>
+        <p:nvSpPr>
+          <p:cNvPr id="193" name="流程图: 接点 192">
+            <a:extLst>
+              <a:ext uri="{FF2B5EF4-FFF2-40B4-BE49-F238E27FC236}">
+                <a16:creationId xmlns:a16="http://schemas.microsoft.com/office/drawing/2014/main" id="{BDFAF2B9-F17C-4264-986D-D3BB21ADEACD}"/>
+              </a:ext>
+            </a:extLst>
+          </p:cNvPr>
+          <p:cNvSpPr>
+            <a:spLocks noChangeAspect="1"/>
+          </p:cNvSpPr>
+          <p:nvPr/>
+        </p:nvSpPr>
+        <p:spPr>
+          <a:xfrm>
+            <a:off x="6851401" y="5565525"/>
+            <a:ext cx="453309" cy="436274"/>
+          </a:xfrm>
+          <a:prstGeom prst="flowChartConnector">
+            <a:avLst/>
+          </a:prstGeom>
+          <a:noFill/>
+          <a:ln w="19050">
+            <a:solidFill>
+              <a:schemeClr val="tx1"/>
+            </a:solidFill>
+          </a:ln>
+        </p:spPr>
+        <p:style>
+          <a:lnRef idx="2">
+            <a:schemeClr val="accent4">
+              <a:shade val="50000"/>
+            </a:schemeClr>
+          </a:lnRef>
+          <a:fillRef idx="1">
+            <a:schemeClr val="accent4"/>
+          </a:fillRef>
+          <a:effectRef idx="0">
+            <a:schemeClr val="accent4"/>
+          </a:effectRef>
+          <a:fontRef idx="minor">
+            <a:schemeClr val="lt1"/>
+          </a:fontRef>
+        </p:style>
+        <p:txBody>
+          <a:bodyPr rtlCol="0" anchor="ctr"/>
+          <a:lstStyle/>
+          <a:p>
+            <a:pPr algn="ctr"/>
+            <a:endParaRPr lang="zh-CN" altLang="en-US" b="1">
+              <a:solidFill>
+                <a:schemeClr val="tx1"/>
+              </a:solidFill>
+            </a:endParaRPr>
+          </a:p>
+        </p:txBody>
+      </p:sp>
+      <p:sp>
+        <p:nvSpPr>
+          <p:cNvPr id="195" name="流程图: 接点 194">
+            <a:extLst>
+              <a:ext uri="{FF2B5EF4-FFF2-40B4-BE49-F238E27FC236}">
+                <a16:creationId xmlns:a16="http://schemas.microsoft.com/office/drawing/2014/main" id="{B1D41E38-786F-4B78-A61C-54337B5D38BD}"/>
+              </a:ext>
+            </a:extLst>
+          </p:cNvPr>
+          <p:cNvSpPr>
+            <a:spLocks noChangeAspect="1"/>
+          </p:cNvSpPr>
+          <p:nvPr/>
+        </p:nvSpPr>
+        <p:spPr>
+          <a:xfrm>
+            <a:off x="6845335" y="4872937"/>
+            <a:ext cx="453309" cy="436274"/>
+          </a:xfrm>
+          <a:prstGeom prst="flowChartConnector">
+            <a:avLst/>
+          </a:prstGeom>
+          <a:noFill/>
+          <a:ln w="19050">
+            <a:solidFill>
+              <a:schemeClr val="tx1"/>
+            </a:solidFill>
+          </a:ln>
+        </p:spPr>
+        <p:style>
+          <a:lnRef idx="2">
+            <a:schemeClr val="accent4">
+              <a:shade val="50000"/>
+            </a:schemeClr>
+          </a:lnRef>
+          <a:fillRef idx="1">
+            <a:schemeClr val="accent4"/>
+          </a:fillRef>
+          <a:effectRef idx="0">
+            <a:schemeClr val="accent4"/>
+          </a:effectRef>
+          <a:fontRef idx="minor">
+            <a:schemeClr val="lt1"/>
+          </a:fontRef>
+        </p:style>
+        <p:txBody>
+          <a:bodyPr rtlCol="0" anchor="ctr"/>
+          <a:lstStyle/>
+          <a:p>
+            <a:pPr algn="ctr"/>
+            <a:endParaRPr lang="zh-CN" altLang="en-US" b="1">
+              <a:solidFill>
+                <a:schemeClr val="tx1"/>
+              </a:solidFill>
+            </a:endParaRPr>
+          </a:p>
+        </p:txBody>
+      </p:sp>
+      <p:sp>
+        <p:nvSpPr>
+          <p:cNvPr id="196" name="文本框 195"/>
+          <p:cNvSpPr txBox="1">
+            <a:spLocks noChangeAspect="1"/>
+          </p:cNvSpPr>
+          <p:nvPr/>
+        </p:nvSpPr>
+        <p:spPr>
+          <a:xfrm>
+            <a:off x="6576448" y="2718430"/>
+            <a:ext cx="737399" cy="1093632"/>
+          </a:xfrm>
+          <a:prstGeom prst="rect">
+            <a:avLst/>
+          </a:prstGeom>
+          <a:noFill/>
+        </p:spPr>
+        <p:txBody>
+          <a:bodyPr vert="eaVert" wrap="square" rtlCol="0">
+            <a:spAutoFit/>
+          </a:bodyPr>
+          <a:lstStyle/>
+          <a:p>
+            <a:r>
+              <a:rPr lang="en-AE" altLang="zh-CN" sz="2400" b="1" dirty="0" smtClean="0"/>
+              <a:t>……</a:t>
+            </a:r>
+            <a:endParaRPr lang="zh-CN" altLang="en-US" sz="2400" b="1" dirty="0"/>
+          </a:p>
+        </p:txBody>
+      </p:sp>
+      <p:sp>
+        <p:nvSpPr>
+          <p:cNvPr id="197" name="流程图: 接点 196">
+            <a:extLst>
+              <a:ext uri="{FF2B5EF4-FFF2-40B4-BE49-F238E27FC236}">
+                <a16:creationId xmlns:a16="http://schemas.microsoft.com/office/drawing/2014/main" id="{BDFAF2B9-F17C-4264-986D-D3BB21ADEACD}"/>
+              </a:ext>
+            </a:extLst>
+          </p:cNvPr>
+          <p:cNvSpPr>
+            <a:spLocks noChangeAspect="1"/>
+          </p:cNvSpPr>
+          <p:nvPr/>
+        </p:nvSpPr>
+        <p:spPr>
+          <a:xfrm>
+            <a:off x="6834562" y="1422919"/>
+            <a:ext cx="453309" cy="436274"/>
+          </a:xfrm>
+          <a:prstGeom prst="flowChartConnector">
+            <a:avLst/>
+          </a:prstGeom>
+          <a:noFill/>
+          <a:ln w="19050">
+            <a:solidFill>
+              <a:schemeClr val="tx1"/>
+            </a:solidFill>
+          </a:ln>
+        </p:spPr>
+        <p:style>
+          <a:lnRef idx="2">
+            <a:schemeClr val="accent4">
+              <a:shade val="50000"/>
+            </a:schemeClr>
+          </a:lnRef>
+          <a:fillRef idx="1">
+            <a:schemeClr val="accent4"/>
+          </a:fillRef>
+          <a:effectRef idx="0">
+            <a:schemeClr val="accent4"/>
+          </a:effectRef>
+          <a:fontRef idx="minor">
+            <a:schemeClr val="lt1"/>
+          </a:fontRef>
+        </p:style>
+        <p:txBody>
+          <a:bodyPr rtlCol="0" anchor="ctr"/>
+          <a:lstStyle/>
+          <a:p>
+            <a:pPr algn="ctr"/>
+            <a:endParaRPr lang="zh-CN" altLang="en-US" b="1">
+              <a:solidFill>
+                <a:schemeClr val="tx1"/>
+              </a:solidFill>
+            </a:endParaRPr>
+          </a:p>
+        </p:txBody>
+      </p:sp>
+      <p:sp>
+        <p:nvSpPr>
+          <p:cNvPr id="198" name="流程图: 接点 197">
+            <a:extLst>
+              <a:ext uri="{FF2B5EF4-FFF2-40B4-BE49-F238E27FC236}">
+                <a16:creationId xmlns:a16="http://schemas.microsoft.com/office/drawing/2014/main" id="{BDFAF2B9-F17C-4264-986D-D3BB21ADEACD}"/>
+              </a:ext>
+            </a:extLst>
+          </p:cNvPr>
+          <p:cNvSpPr>
+            <a:spLocks noChangeAspect="1"/>
+          </p:cNvSpPr>
+          <p:nvPr/>
+        </p:nvSpPr>
+        <p:spPr>
+          <a:xfrm>
+            <a:off x="6839704" y="4175515"/>
+            <a:ext cx="453309" cy="436274"/>
+          </a:xfrm>
+          <a:prstGeom prst="flowChartConnector">
+            <a:avLst/>
+          </a:prstGeom>
+          <a:noFill/>
+          <a:ln w="19050">
+            <a:solidFill>
+              <a:schemeClr val="tx1"/>
+            </a:solidFill>
+          </a:ln>
+        </p:spPr>
+        <p:style>
+          <a:lnRef idx="2">
+            <a:schemeClr val="accent4">
+              <a:shade val="50000"/>
+            </a:schemeClr>
+          </a:lnRef>
+          <a:fillRef idx="1">
+            <a:schemeClr val="accent4"/>
+          </a:fillRef>
+          <a:effectRef idx="0">
+            <a:schemeClr val="accent4"/>
+          </a:effectRef>
+          <a:fontRef idx="minor">
+            <a:schemeClr val="lt1"/>
+          </a:fontRef>
+        </p:style>
+        <p:txBody>
+          <a:bodyPr rtlCol="0" anchor="ctr"/>
+          <a:lstStyle/>
+          <a:p>
+            <a:pPr algn="ctr"/>
+            <a:endParaRPr lang="zh-CN" altLang="en-US" b="1">
+              <a:solidFill>
+                <a:schemeClr val="tx1"/>
+              </a:solidFill>
+            </a:endParaRPr>
+          </a:p>
+        </p:txBody>
+      </p:sp>
+      <p:sp>
+        <p:nvSpPr>
+          <p:cNvPr id="199" name="流程图: 接点 198">
+            <a:extLst>
+              <a:ext uri="{FF2B5EF4-FFF2-40B4-BE49-F238E27FC236}">
+                <a16:creationId xmlns:a16="http://schemas.microsoft.com/office/drawing/2014/main" id="{BDFAF2B9-F17C-4264-986D-D3BB21ADEACD}"/>
+              </a:ext>
+            </a:extLst>
+          </p:cNvPr>
+          <p:cNvSpPr>
+            <a:spLocks noChangeAspect="1"/>
+          </p:cNvSpPr>
+          <p:nvPr/>
+        </p:nvSpPr>
+        <p:spPr>
+          <a:xfrm>
+            <a:off x="6833638" y="2112977"/>
+            <a:ext cx="453309" cy="436274"/>
+          </a:xfrm>
+          <a:prstGeom prst="flowChartConnector">
+            <a:avLst/>
+          </a:prstGeom>
+          <a:noFill/>
+          <a:ln w="19050">
+            <a:solidFill>
+              <a:schemeClr val="tx1"/>
+            </a:solidFill>
+          </a:ln>
+        </p:spPr>
+        <p:style>
+          <a:lnRef idx="2">
+            <a:schemeClr val="accent4">
+              <a:shade val="50000"/>
+            </a:schemeClr>
+          </a:lnRef>
+          <a:fillRef idx="1">
+            <a:schemeClr val="accent4"/>
+          </a:fillRef>
+          <a:effectRef idx="0">
+            <a:schemeClr val="accent4"/>
+          </a:effectRef>
+          <a:fontRef idx="minor">
+            <a:schemeClr val="lt1"/>
+          </a:fontRef>
+        </p:style>
+        <p:txBody>
+          <a:bodyPr rtlCol="0" anchor="ctr"/>
+          <a:lstStyle/>
+          <a:p>
+            <a:pPr algn="ctr"/>
+            <a:endParaRPr lang="zh-CN" altLang="en-US" b="1">
+              <a:solidFill>
+                <a:schemeClr val="tx1"/>
+              </a:solidFill>
+            </a:endParaRPr>
+          </a:p>
+        </p:txBody>
+      </p:sp>
+      <p:sp>
+        <p:nvSpPr>
+          <p:cNvPr id="200" name="流程图: 接点 199">
+            <a:extLst>
+              <a:ext uri="{FF2B5EF4-FFF2-40B4-BE49-F238E27FC236}">
+                <a16:creationId xmlns:a16="http://schemas.microsoft.com/office/drawing/2014/main" id="{BDFAF2B9-F17C-4264-986D-D3BB21ADEACD}"/>
+              </a:ext>
+            </a:extLst>
+          </p:cNvPr>
+          <p:cNvSpPr>
+            <a:spLocks noChangeAspect="1"/>
+          </p:cNvSpPr>
+          <p:nvPr/>
+        </p:nvSpPr>
+        <p:spPr>
+          <a:xfrm>
+            <a:off x="6833638" y="3469032"/>
+            <a:ext cx="453309" cy="436274"/>
+          </a:xfrm>
+          <a:prstGeom prst="flowChartConnector">
+            <a:avLst/>
+          </a:prstGeom>
+          <a:noFill/>
+          <a:ln w="19050">
+            <a:solidFill>
+              <a:schemeClr val="tx1"/>
+            </a:solidFill>
+          </a:ln>
+        </p:spPr>
+        <p:style>
+          <a:lnRef idx="2">
+            <a:schemeClr val="accent4">
+              <a:shade val="50000"/>
+            </a:schemeClr>
+          </a:lnRef>
+          <a:fillRef idx="1">
+            <a:schemeClr val="accent4"/>
+          </a:fillRef>
+          <a:effectRef idx="0">
+            <a:schemeClr val="accent4"/>
+          </a:effectRef>
+          <a:fontRef idx="minor">
+            <a:schemeClr val="lt1"/>
+          </a:fontRef>
+        </p:style>
+        <p:txBody>
+          <a:bodyPr rtlCol="0" anchor="ctr"/>
+          <a:lstStyle/>
+          <a:p>
+            <a:pPr algn="ctr"/>
+            <a:endParaRPr lang="zh-CN" altLang="en-US" b="1">
+              <a:solidFill>
+                <a:schemeClr val="tx1"/>
+              </a:solidFill>
+            </a:endParaRPr>
+          </a:p>
+        </p:txBody>
+      </p:sp>
+      <p:cxnSp>
+        <p:nvCxnSpPr>
+          <p:cNvPr id="210" name="直接连接符 209">
+            <a:extLst>
+              <a:ext uri="{FF2B5EF4-FFF2-40B4-BE49-F238E27FC236}">
+                <a16:creationId xmlns:a16="http://schemas.microsoft.com/office/drawing/2014/main" id="{78EA912F-B0E3-41C6-82EC-89595CDCF708}"/>
+              </a:ext>
+            </a:extLst>
+          </p:cNvPr>
+          <p:cNvCxnSpPr>
+            <a:cxnSpLocks noChangeAspect="1"/>
+            <a:stCxn id="159" idx="2"/>
+            <a:endCxn id="199" idx="6"/>
+          </p:cNvCxnSpPr>
+          <p:nvPr/>
+        </p:nvCxnSpPr>
+        <p:spPr>
+          <a:xfrm flipH="1" flipV="1">
+            <a:off x="7286947" y="2331114"/>
+            <a:ext cx="976176" cy="646889"/>
+          </a:xfrm>
+          <a:prstGeom prst="line">
+            <a:avLst/>
+          </a:prstGeom>
+          <a:ln w="19050">
+            <a:solidFill>
+              <a:schemeClr val="tx1"/>
+            </a:solidFill>
+          </a:ln>
+        </p:spPr>
+        <p:style>
+          <a:lnRef idx="3">
+            <a:schemeClr val="dk1"/>
+          </a:lnRef>
+          <a:fillRef idx="0">
+            <a:schemeClr val="dk1"/>
+          </a:fillRef>
+          <a:effectRef idx="2">
+            <a:schemeClr val="dk1"/>
+          </a:effectRef>
+          <a:fontRef idx="minor">
+            <a:schemeClr val="tx1"/>
+          </a:fontRef>
+        </p:style>
+      </p:cxnSp>
+      <p:cxnSp>
+        <p:nvCxnSpPr>
+          <p:cNvPr id="213" name="直接连接符 212">
+            <a:extLst>
+              <a:ext uri="{FF2B5EF4-FFF2-40B4-BE49-F238E27FC236}">
+                <a16:creationId xmlns:a16="http://schemas.microsoft.com/office/drawing/2014/main" id="{78EA912F-B0E3-41C6-82EC-89595CDCF708}"/>
+              </a:ext>
+            </a:extLst>
+          </p:cNvPr>
+          <p:cNvCxnSpPr>
+            <a:cxnSpLocks noChangeAspect="1"/>
+            <a:stCxn id="159" idx="2"/>
+            <a:endCxn id="200" idx="6"/>
+          </p:cNvCxnSpPr>
+          <p:nvPr/>
+        </p:nvCxnSpPr>
+        <p:spPr>
+          <a:xfrm flipH="1">
+            <a:off x="7286947" y="2978003"/>
+            <a:ext cx="976176" cy="709166"/>
+          </a:xfrm>
+          <a:prstGeom prst="line">
+            <a:avLst/>
+          </a:prstGeom>
+          <a:ln w="19050">
+            <a:solidFill>
+              <a:schemeClr val="tx1"/>
+            </a:solidFill>
+          </a:ln>
+        </p:spPr>
+        <p:style>
+          <a:lnRef idx="3">
+            <a:schemeClr val="dk1"/>
+          </a:lnRef>
+          <a:fillRef idx="0">
+            <a:schemeClr val="dk1"/>
+          </a:fillRef>
+          <a:effectRef idx="2">
+            <a:schemeClr val="dk1"/>
+          </a:effectRef>
+          <a:fontRef idx="minor">
+            <a:schemeClr val="tx1"/>
+          </a:fontRef>
+        </p:style>
+      </p:cxnSp>
+      <p:cxnSp>
+        <p:nvCxnSpPr>
+          <p:cNvPr id="216" name="直接连接符 215">
+            <a:extLst>
+              <a:ext uri="{FF2B5EF4-FFF2-40B4-BE49-F238E27FC236}">
+                <a16:creationId xmlns:a16="http://schemas.microsoft.com/office/drawing/2014/main" id="{78EA912F-B0E3-41C6-82EC-89595CDCF708}"/>
+              </a:ext>
+            </a:extLst>
+          </p:cNvPr>
+          <p:cNvCxnSpPr>
+            <a:cxnSpLocks noChangeAspect="1"/>
+            <a:stCxn id="159" idx="2"/>
+            <a:endCxn id="198" idx="6"/>
+          </p:cNvCxnSpPr>
+          <p:nvPr/>
+        </p:nvCxnSpPr>
+        <p:spPr>
+          <a:xfrm flipH="1">
+            <a:off x="7293013" y="2978003"/>
+            <a:ext cx="970110" cy="1415649"/>
+          </a:xfrm>
+          <a:prstGeom prst="line">
+            <a:avLst/>
+          </a:prstGeom>
+          <a:ln w="19050">
+            <a:solidFill>
+              <a:schemeClr val="tx1"/>
+            </a:solidFill>
+          </a:ln>
+        </p:spPr>
+        <p:style>
+          <a:lnRef idx="3">
+            <a:schemeClr val="dk1"/>
+          </a:lnRef>
+          <a:fillRef idx="0">
+            <a:schemeClr val="dk1"/>
+          </a:fillRef>
+          <a:effectRef idx="2">
+            <a:schemeClr val="dk1"/>
+          </a:effectRef>
+          <a:fontRef idx="minor">
+            <a:schemeClr val="tx1"/>
+          </a:fontRef>
+        </p:style>
+      </p:cxnSp>
+      <p:cxnSp>
+        <p:nvCxnSpPr>
+          <p:cNvPr id="219" name="直接连接符 218">
+            <a:extLst>
+              <a:ext uri="{FF2B5EF4-FFF2-40B4-BE49-F238E27FC236}">
+                <a16:creationId xmlns:a16="http://schemas.microsoft.com/office/drawing/2014/main" id="{78EA912F-B0E3-41C6-82EC-89595CDCF708}"/>
+              </a:ext>
+            </a:extLst>
+          </p:cNvPr>
+          <p:cNvCxnSpPr>
+            <a:cxnSpLocks noChangeAspect="1"/>
+            <a:stCxn id="159" idx="2"/>
+            <a:endCxn id="195" idx="6"/>
+          </p:cNvCxnSpPr>
+          <p:nvPr/>
+        </p:nvCxnSpPr>
+        <p:spPr>
+          <a:xfrm flipH="1">
+            <a:off x="7298644" y="2978003"/>
+            <a:ext cx="964479" cy="2113071"/>
+          </a:xfrm>
+          <a:prstGeom prst="line">
+            <a:avLst/>
+          </a:prstGeom>
+          <a:ln w="19050">
+            <a:solidFill>
+              <a:schemeClr val="tx1"/>
+            </a:solidFill>
+          </a:ln>
+        </p:spPr>
+        <p:style>
+          <a:lnRef idx="3">
+            <a:schemeClr val="dk1"/>
+          </a:lnRef>
+          <a:fillRef idx="0">
+            <a:schemeClr val="dk1"/>
+          </a:fillRef>
+          <a:effectRef idx="2">
+            <a:schemeClr val="dk1"/>
+          </a:effectRef>
+          <a:fontRef idx="minor">
+            <a:schemeClr val="tx1"/>
+          </a:fontRef>
+        </p:style>
+      </p:cxnSp>
+      <p:cxnSp>
+        <p:nvCxnSpPr>
+          <p:cNvPr id="222" name="直接连接符 221">
+            <a:extLst>
+              <a:ext uri="{FF2B5EF4-FFF2-40B4-BE49-F238E27FC236}">
+                <a16:creationId xmlns:a16="http://schemas.microsoft.com/office/drawing/2014/main" id="{78EA912F-B0E3-41C6-82EC-89595CDCF708}"/>
+              </a:ext>
+            </a:extLst>
+          </p:cNvPr>
+          <p:cNvCxnSpPr>
+            <a:cxnSpLocks noChangeAspect="1"/>
+            <a:stCxn id="159" idx="2"/>
+            <a:endCxn id="193" idx="6"/>
+          </p:cNvCxnSpPr>
+          <p:nvPr/>
+        </p:nvCxnSpPr>
+        <p:spPr>
+          <a:xfrm flipH="1">
+            <a:off x="7304710" y="2978003"/>
+            <a:ext cx="958413" cy="2805659"/>
+          </a:xfrm>
+          <a:prstGeom prst="line">
+            <a:avLst/>
+          </a:prstGeom>
+          <a:ln w="19050">
+            <a:solidFill>
+              <a:schemeClr val="tx1"/>
+            </a:solidFill>
+          </a:ln>
+        </p:spPr>
+        <p:style>
+          <a:lnRef idx="3">
+            <a:schemeClr val="dk1"/>
+          </a:lnRef>
+          <a:fillRef idx="0">
+            <a:schemeClr val="dk1"/>
+          </a:fillRef>
+          <a:effectRef idx="2">
+            <a:schemeClr val="dk1"/>
+          </a:effectRef>
+          <a:fontRef idx="minor">
+            <a:schemeClr val="tx1"/>
+          </a:fontRef>
+        </p:style>
+      </p:cxnSp>
+      <p:cxnSp>
+        <p:nvCxnSpPr>
+          <p:cNvPr id="225" name="直接连接符 224">
+            <a:extLst>
+              <a:ext uri="{FF2B5EF4-FFF2-40B4-BE49-F238E27FC236}">
+                <a16:creationId xmlns:a16="http://schemas.microsoft.com/office/drawing/2014/main" id="{78EA912F-B0E3-41C6-82EC-89595CDCF708}"/>
+              </a:ext>
+            </a:extLst>
+          </p:cNvPr>
+          <p:cNvCxnSpPr>
+            <a:cxnSpLocks noChangeAspect="1"/>
+            <a:stCxn id="174" idx="2"/>
+            <a:endCxn id="155" idx="6"/>
+          </p:cNvCxnSpPr>
+          <p:nvPr/>
+        </p:nvCxnSpPr>
+        <p:spPr>
+          <a:xfrm flipH="1">
+            <a:off x="2499472" y="793483"/>
+            <a:ext cx="688698" cy="676895"/>
+          </a:xfrm>
+          <a:prstGeom prst="line">
+            <a:avLst/>
+          </a:prstGeom>
+          <a:ln w="19050">
+            <a:solidFill>
+              <a:schemeClr val="tx1"/>
+            </a:solidFill>
+          </a:ln>
+        </p:spPr>
+        <p:style>
+          <a:lnRef idx="3">
+            <a:schemeClr val="dk1"/>
+          </a:lnRef>
+          <a:fillRef idx="0">
+            <a:schemeClr val="dk1"/>
+          </a:fillRef>
+          <a:effectRef idx="2">
+            <a:schemeClr val="dk1"/>
+          </a:effectRef>
+          <a:fontRef idx="minor">
+            <a:schemeClr val="tx1"/>
+          </a:fontRef>
+        </p:style>
+      </p:cxnSp>
+      <p:cxnSp>
+        <p:nvCxnSpPr>
+          <p:cNvPr id="228" name="直接连接符 227">
+            <a:extLst>
+              <a:ext uri="{FF2B5EF4-FFF2-40B4-BE49-F238E27FC236}">
+                <a16:creationId xmlns:a16="http://schemas.microsoft.com/office/drawing/2014/main" id="{78EA912F-B0E3-41C6-82EC-89595CDCF708}"/>
+              </a:ext>
+            </a:extLst>
+          </p:cNvPr>
+          <p:cNvCxnSpPr>
+            <a:cxnSpLocks noChangeAspect="1"/>
+            <a:stCxn id="175" idx="2"/>
+            <a:endCxn id="155" idx="6"/>
+          </p:cNvCxnSpPr>
+          <p:nvPr/>
+        </p:nvCxnSpPr>
+        <p:spPr>
+          <a:xfrm flipH="1" flipV="1">
+            <a:off x="2499472" y="1470378"/>
+            <a:ext cx="684571" cy="92843"/>
+          </a:xfrm>
+          <a:prstGeom prst="line">
+            <a:avLst/>
+          </a:prstGeom>
+          <a:ln w="19050">
+            <a:solidFill>
+              <a:schemeClr val="tx1"/>
+            </a:solidFill>
+          </a:ln>
+        </p:spPr>
+        <p:style>
+          <a:lnRef idx="3">
+            <a:schemeClr val="dk1"/>
+          </a:lnRef>
+          <a:fillRef idx="0">
+            <a:schemeClr val="dk1"/>
+          </a:fillRef>
+          <a:effectRef idx="2">
+            <a:schemeClr val="dk1"/>
+          </a:effectRef>
+          <a:fontRef idx="minor">
+            <a:schemeClr val="tx1"/>
+          </a:fontRef>
+        </p:style>
+      </p:cxnSp>
+      <p:cxnSp>
+        <p:nvCxnSpPr>
+          <p:cNvPr id="231" name="直接连接符 230">
+            <a:extLst>
+              <a:ext uri="{FF2B5EF4-FFF2-40B4-BE49-F238E27FC236}">
+                <a16:creationId xmlns:a16="http://schemas.microsoft.com/office/drawing/2014/main" id="{78EA912F-B0E3-41C6-82EC-89595CDCF708}"/>
+              </a:ext>
+            </a:extLst>
+          </p:cNvPr>
+          <p:cNvCxnSpPr>
+            <a:cxnSpLocks noChangeAspect="1"/>
+            <a:stCxn id="179" idx="2"/>
+            <a:endCxn id="155" idx="6"/>
+          </p:cNvCxnSpPr>
+          <p:nvPr/>
+        </p:nvCxnSpPr>
+        <p:spPr>
+          <a:xfrm flipH="1" flipV="1">
+            <a:off x="2499472" y="1470378"/>
+            <a:ext cx="680312" cy="862469"/>
+          </a:xfrm>
+          <a:prstGeom prst="line">
+            <a:avLst/>
+          </a:prstGeom>
+          <a:ln w="19050">
+            <a:solidFill>
+              <a:schemeClr val="tx1"/>
+            </a:solidFill>
+          </a:ln>
+        </p:spPr>
+        <p:style>
+          <a:lnRef idx="3">
+            <a:schemeClr val="dk1"/>
+          </a:lnRef>
+          <a:fillRef idx="0">
+            <a:schemeClr val="dk1"/>
+          </a:fillRef>
+          <a:effectRef idx="2">
+            <a:schemeClr val="dk1"/>
+          </a:effectRef>
+          <a:fontRef idx="minor">
+            <a:schemeClr val="tx1"/>
+          </a:fontRef>
+        </p:style>
+      </p:cxnSp>
+      <p:cxnSp>
+        <p:nvCxnSpPr>
+          <p:cNvPr id="234" name="直接连接符 233">
+            <a:extLst>
+              <a:ext uri="{FF2B5EF4-FFF2-40B4-BE49-F238E27FC236}">
+                <a16:creationId xmlns:a16="http://schemas.microsoft.com/office/drawing/2014/main" id="{78EA912F-B0E3-41C6-82EC-89595CDCF708}"/>
+              </a:ext>
+            </a:extLst>
+          </p:cNvPr>
+          <p:cNvCxnSpPr>
+            <a:cxnSpLocks noChangeAspect="1"/>
+            <a:stCxn id="180" idx="2"/>
+            <a:endCxn id="155" idx="6"/>
+          </p:cNvCxnSpPr>
+          <p:nvPr/>
+        </p:nvCxnSpPr>
+        <p:spPr>
+          <a:xfrm flipH="1" flipV="1">
+            <a:off x="2499472" y="1470378"/>
+            <a:ext cx="682143" cy="2224056"/>
+          </a:xfrm>
+          <a:prstGeom prst="line">
+            <a:avLst/>
+          </a:prstGeom>
+          <a:ln w="19050">
+            <a:solidFill>
+              <a:schemeClr val="tx1"/>
+            </a:solidFill>
+          </a:ln>
+        </p:spPr>
+        <p:style>
+          <a:lnRef idx="3">
+            <a:schemeClr val="dk1"/>
+          </a:lnRef>
+          <a:fillRef idx="0">
+            <a:schemeClr val="dk1"/>
+          </a:fillRef>
+          <a:effectRef idx="2">
+            <a:schemeClr val="dk1"/>
+          </a:effectRef>
+          <a:fontRef idx="minor">
+            <a:schemeClr val="tx1"/>
+          </a:fontRef>
+        </p:style>
+      </p:cxnSp>
+      <p:cxnSp>
+        <p:nvCxnSpPr>
+          <p:cNvPr id="237" name="直接连接符 236">
+            <a:extLst>
+              <a:ext uri="{FF2B5EF4-FFF2-40B4-BE49-F238E27FC236}">
+                <a16:creationId xmlns:a16="http://schemas.microsoft.com/office/drawing/2014/main" id="{78EA912F-B0E3-41C6-82EC-89595CDCF708}"/>
+              </a:ext>
+            </a:extLst>
+          </p:cNvPr>
+          <p:cNvCxnSpPr>
+            <a:cxnSpLocks noChangeAspect="1"/>
+            <a:stCxn id="177" idx="2"/>
+            <a:endCxn id="155" idx="6"/>
+          </p:cNvCxnSpPr>
+          <p:nvPr/>
+        </p:nvCxnSpPr>
+        <p:spPr>
+          <a:xfrm flipH="1" flipV="1">
+            <a:off x="2499472" y="1470378"/>
+            <a:ext cx="682740" cy="2999586"/>
+          </a:xfrm>
+          <a:prstGeom prst="line">
+            <a:avLst/>
+          </a:prstGeom>
+          <a:ln w="19050">
+            <a:solidFill>
+              <a:schemeClr val="tx1"/>
+            </a:solidFill>
+          </a:ln>
+        </p:spPr>
+        <p:style>
+          <a:lnRef idx="3">
+            <a:schemeClr val="dk1"/>
+          </a:lnRef>
+          <a:fillRef idx="0">
+            <a:schemeClr val="dk1"/>
+          </a:fillRef>
+          <a:effectRef idx="2">
+            <a:schemeClr val="dk1"/>
+          </a:effectRef>
+          <a:fontRef idx="minor">
+            <a:schemeClr val="tx1"/>
+          </a:fontRef>
+        </p:style>
+      </p:cxnSp>
+      <p:cxnSp>
+        <p:nvCxnSpPr>
+          <p:cNvPr id="240" name="直接连接符 239">
+            <a:extLst>
+              <a:ext uri="{FF2B5EF4-FFF2-40B4-BE49-F238E27FC236}">
+                <a16:creationId xmlns:a16="http://schemas.microsoft.com/office/drawing/2014/main" id="{78EA912F-B0E3-41C6-82EC-89595CDCF708}"/>
+              </a:ext>
+            </a:extLst>
+          </p:cNvPr>
+          <p:cNvCxnSpPr>
+            <a:cxnSpLocks noChangeAspect="1"/>
+            <a:stCxn id="176" idx="2"/>
+            <a:endCxn id="155" idx="6"/>
+          </p:cNvCxnSpPr>
+          <p:nvPr/>
+        </p:nvCxnSpPr>
+        <p:spPr>
+          <a:xfrm flipH="1" flipV="1">
+            <a:off x="2499472" y="1470378"/>
+            <a:ext cx="676118" cy="3773577"/>
+          </a:xfrm>
+          <a:prstGeom prst="line">
+            <a:avLst/>
+          </a:prstGeom>
+          <a:ln w="19050">
+            <a:solidFill>
+              <a:schemeClr val="tx1"/>
+            </a:solidFill>
+          </a:ln>
+        </p:spPr>
+        <p:style>
+          <a:lnRef idx="3">
+            <a:schemeClr val="dk1"/>
+          </a:lnRef>
+          <a:fillRef idx="0">
+            <a:schemeClr val="dk1"/>
+          </a:fillRef>
+          <a:effectRef idx="2">
+            <a:schemeClr val="dk1"/>
+          </a:effectRef>
+          <a:fontRef idx="minor">
+            <a:schemeClr val="tx1"/>
+          </a:fontRef>
+        </p:style>
+      </p:cxnSp>
+      <p:cxnSp>
+        <p:nvCxnSpPr>
+          <p:cNvPr id="243" name="直接连接符 242">
+            <a:extLst>
+              <a:ext uri="{FF2B5EF4-FFF2-40B4-BE49-F238E27FC236}">
+                <a16:creationId xmlns:a16="http://schemas.microsoft.com/office/drawing/2014/main" id="{78EA912F-B0E3-41C6-82EC-89595CDCF708}"/>
+              </a:ext>
+            </a:extLst>
+          </p:cNvPr>
+          <p:cNvCxnSpPr>
+            <a:cxnSpLocks noChangeAspect="1"/>
+            <a:stCxn id="174" idx="2"/>
+            <a:endCxn id="156" idx="6"/>
+          </p:cNvCxnSpPr>
+          <p:nvPr/>
+        </p:nvCxnSpPr>
+        <p:spPr>
+          <a:xfrm flipH="1">
+            <a:off x="2497688" y="793483"/>
+            <a:ext cx="690482" cy="1539896"/>
+          </a:xfrm>
+          <a:prstGeom prst="line">
+            <a:avLst/>
+          </a:prstGeom>
+          <a:ln w="19050">
+            <a:solidFill>
+              <a:schemeClr val="tx1"/>
+            </a:solidFill>
+          </a:ln>
+        </p:spPr>
+        <p:style>
+          <a:lnRef idx="3">
+            <a:schemeClr val="dk1"/>
+          </a:lnRef>
+          <a:fillRef idx="0">
+            <a:schemeClr val="dk1"/>
+          </a:fillRef>
+          <a:effectRef idx="2">
+            <a:schemeClr val="dk1"/>
+          </a:effectRef>
+          <a:fontRef idx="minor">
+            <a:schemeClr val="tx1"/>
+          </a:fontRef>
+        </p:style>
+      </p:cxnSp>
+      <p:cxnSp>
+        <p:nvCxnSpPr>
+          <p:cNvPr id="246" name="直接连接符 245">
+            <a:extLst>
+              <a:ext uri="{FF2B5EF4-FFF2-40B4-BE49-F238E27FC236}">
+                <a16:creationId xmlns:a16="http://schemas.microsoft.com/office/drawing/2014/main" id="{78EA912F-B0E3-41C6-82EC-89595CDCF708}"/>
+              </a:ext>
+            </a:extLst>
+          </p:cNvPr>
+          <p:cNvCxnSpPr>
+            <a:cxnSpLocks noChangeAspect="1"/>
+            <a:stCxn id="175" idx="2"/>
+            <a:endCxn id="156" idx="6"/>
+          </p:cNvCxnSpPr>
+          <p:nvPr/>
+        </p:nvCxnSpPr>
+        <p:spPr>
+          <a:xfrm flipH="1">
+            <a:off x="2497688" y="1563221"/>
+            <a:ext cx="686355" cy="770158"/>
+          </a:xfrm>
+          <a:prstGeom prst="line">
+            <a:avLst/>
+          </a:prstGeom>
+          <a:ln w="19050">
+            <a:solidFill>
+              <a:schemeClr val="tx1"/>
+            </a:solidFill>
+          </a:ln>
+        </p:spPr>
+        <p:style>
+          <a:lnRef idx="3">
+            <a:schemeClr val="dk1"/>
+          </a:lnRef>
+          <a:fillRef idx="0">
+            <a:schemeClr val="dk1"/>
+          </a:fillRef>
+          <a:effectRef idx="2">
+            <a:schemeClr val="dk1"/>
+          </a:effectRef>
+          <a:fontRef idx="minor">
+            <a:schemeClr val="tx1"/>
+          </a:fontRef>
+        </p:style>
+      </p:cxnSp>
+      <p:cxnSp>
+        <p:nvCxnSpPr>
+          <p:cNvPr id="249" name="直接连接符 248">
+            <a:extLst>
+              <a:ext uri="{FF2B5EF4-FFF2-40B4-BE49-F238E27FC236}">
+                <a16:creationId xmlns:a16="http://schemas.microsoft.com/office/drawing/2014/main" id="{78EA912F-B0E3-41C6-82EC-89595CDCF708}"/>
+              </a:ext>
+            </a:extLst>
+          </p:cNvPr>
+          <p:cNvCxnSpPr>
+            <a:cxnSpLocks noChangeAspect="1"/>
+            <a:stCxn id="179" idx="2"/>
+            <a:endCxn id="156" idx="6"/>
+          </p:cNvCxnSpPr>
+          <p:nvPr/>
+        </p:nvCxnSpPr>
+        <p:spPr>
+          <a:xfrm flipH="1">
+            <a:off x="2497688" y="2332847"/>
+            <a:ext cx="682096" cy="532"/>
+          </a:xfrm>
+          <a:prstGeom prst="line">
+            <a:avLst/>
+          </a:prstGeom>
+          <a:ln w="19050">
+            <a:solidFill>
+              <a:schemeClr val="tx1"/>
+            </a:solidFill>
+          </a:ln>
+        </p:spPr>
+        <p:style>
+          <a:lnRef idx="3">
+            <a:schemeClr val="dk1"/>
+          </a:lnRef>
+          <a:fillRef idx="0">
+            <a:schemeClr val="dk1"/>
+          </a:fillRef>
+          <a:effectRef idx="2">
+            <a:schemeClr val="dk1"/>
+          </a:effectRef>
+          <a:fontRef idx="minor">
+            <a:schemeClr val="tx1"/>
+          </a:fontRef>
+        </p:style>
+      </p:cxnSp>
+      <p:cxnSp>
+        <p:nvCxnSpPr>
+          <p:cNvPr id="252" name="直接连接符 251">
+            <a:extLst>
+              <a:ext uri="{FF2B5EF4-FFF2-40B4-BE49-F238E27FC236}">
+                <a16:creationId xmlns:a16="http://schemas.microsoft.com/office/drawing/2014/main" id="{78EA912F-B0E3-41C6-82EC-89595CDCF708}"/>
+              </a:ext>
+            </a:extLst>
+          </p:cNvPr>
+          <p:cNvCxnSpPr>
+            <a:cxnSpLocks noChangeAspect="1"/>
+            <a:stCxn id="180" idx="2"/>
+            <a:endCxn id="156" idx="6"/>
+          </p:cNvCxnSpPr>
+          <p:nvPr/>
+        </p:nvCxnSpPr>
+        <p:spPr>
+          <a:xfrm flipH="1" flipV="1">
+            <a:off x="2497688" y="2333379"/>
+            <a:ext cx="683927" cy="1361055"/>
+          </a:xfrm>
+          <a:prstGeom prst="line">
+            <a:avLst/>
+          </a:prstGeom>
+          <a:ln w="19050">
+            <a:solidFill>
+              <a:schemeClr val="tx1"/>
+            </a:solidFill>
+          </a:ln>
+        </p:spPr>
+        <p:style>
+          <a:lnRef idx="3">
+            <a:schemeClr val="dk1"/>
+          </a:lnRef>
+          <a:fillRef idx="0">
+            <a:schemeClr val="dk1"/>
+          </a:fillRef>
+          <a:effectRef idx="2">
+            <a:schemeClr val="dk1"/>
+          </a:effectRef>
+          <a:fontRef idx="minor">
+            <a:schemeClr val="tx1"/>
+          </a:fontRef>
+        </p:style>
+      </p:cxnSp>
+      <p:cxnSp>
+        <p:nvCxnSpPr>
+          <p:cNvPr id="255" name="直接连接符 254">
+            <a:extLst>
+              <a:ext uri="{FF2B5EF4-FFF2-40B4-BE49-F238E27FC236}">
+                <a16:creationId xmlns:a16="http://schemas.microsoft.com/office/drawing/2014/main" id="{78EA912F-B0E3-41C6-82EC-89595CDCF708}"/>
+              </a:ext>
+            </a:extLst>
+          </p:cNvPr>
+          <p:cNvCxnSpPr>
+            <a:cxnSpLocks noChangeAspect="1"/>
+            <a:stCxn id="177" idx="2"/>
+            <a:endCxn id="156" idx="6"/>
+          </p:cNvCxnSpPr>
+          <p:nvPr/>
+        </p:nvCxnSpPr>
+        <p:spPr>
+          <a:xfrm flipH="1" flipV="1">
+            <a:off x="2497688" y="2333379"/>
+            <a:ext cx="684524" cy="2136585"/>
+          </a:xfrm>
+          <a:prstGeom prst="line">
+            <a:avLst/>
+          </a:prstGeom>
+          <a:ln w="19050">
+            <a:solidFill>
+              <a:schemeClr val="tx1"/>
+            </a:solidFill>
+          </a:ln>
+        </p:spPr>
+        <p:style>
+          <a:lnRef idx="3">
+            <a:schemeClr val="dk1"/>
+          </a:lnRef>
+          <a:fillRef idx="0">
+            <a:schemeClr val="dk1"/>
+          </a:fillRef>
+          <a:effectRef idx="2">
+            <a:schemeClr val="dk1"/>
+          </a:effectRef>
+          <a:fontRef idx="minor">
+            <a:schemeClr val="tx1"/>
+          </a:fontRef>
+        </p:style>
+      </p:cxnSp>
+      <p:cxnSp>
+        <p:nvCxnSpPr>
+          <p:cNvPr id="258" name="直接连接符 257">
+            <a:extLst>
+              <a:ext uri="{FF2B5EF4-FFF2-40B4-BE49-F238E27FC236}">
+                <a16:creationId xmlns:a16="http://schemas.microsoft.com/office/drawing/2014/main" id="{78EA912F-B0E3-41C6-82EC-89595CDCF708}"/>
+              </a:ext>
+            </a:extLst>
+          </p:cNvPr>
+          <p:cNvCxnSpPr>
+            <a:cxnSpLocks noChangeAspect="1"/>
+            <a:stCxn id="176" idx="2"/>
+            <a:endCxn id="156" idx="6"/>
+          </p:cNvCxnSpPr>
+          <p:nvPr/>
+        </p:nvCxnSpPr>
+        <p:spPr>
+          <a:xfrm flipH="1" flipV="1">
+            <a:off x="2497688" y="2333379"/>
+            <a:ext cx="677902" cy="2910576"/>
+          </a:xfrm>
+          <a:prstGeom prst="line">
+            <a:avLst/>
+          </a:prstGeom>
+          <a:ln w="19050">
+            <a:solidFill>
+              <a:schemeClr val="tx1"/>
+            </a:solidFill>
+          </a:ln>
+        </p:spPr>
+        <p:style>
+          <a:lnRef idx="3">
+            <a:schemeClr val="dk1"/>
+          </a:lnRef>
+          <a:fillRef idx="0">
+            <a:schemeClr val="dk1"/>
+          </a:fillRef>
+          <a:effectRef idx="2">
+            <a:schemeClr val="dk1"/>
+          </a:effectRef>
+          <a:fontRef idx="minor">
+            <a:schemeClr val="tx1"/>
+          </a:fontRef>
+        </p:style>
+      </p:cxnSp>
+      <p:cxnSp>
+        <p:nvCxnSpPr>
+          <p:cNvPr id="261" name="直接连接符 260">
+            <a:extLst>
+              <a:ext uri="{FF2B5EF4-FFF2-40B4-BE49-F238E27FC236}">
+                <a16:creationId xmlns:a16="http://schemas.microsoft.com/office/drawing/2014/main" id="{78EA912F-B0E3-41C6-82EC-89595CDCF708}"/>
+              </a:ext>
+            </a:extLst>
+          </p:cNvPr>
+          <p:cNvCxnSpPr>
+            <a:cxnSpLocks noChangeAspect="1"/>
+            <a:stCxn id="174" idx="2"/>
+            <a:endCxn id="169" idx="6"/>
+          </p:cNvCxnSpPr>
+          <p:nvPr/>
+        </p:nvCxnSpPr>
+        <p:spPr>
+          <a:xfrm flipH="1">
+            <a:off x="2501882" y="793483"/>
+            <a:ext cx="686288" cy="2893686"/>
+          </a:xfrm>
+          <a:prstGeom prst="line">
+            <a:avLst/>
+          </a:prstGeom>
+          <a:ln w="19050">
+            <a:solidFill>
+              <a:schemeClr val="tx1"/>
+            </a:solidFill>
+          </a:ln>
+        </p:spPr>
+        <p:style>
+          <a:lnRef idx="3">
+            <a:schemeClr val="dk1"/>
+          </a:lnRef>
+          <a:fillRef idx="0">
+            <a:schemeClr val="dk1"/>
+          </a:fillRef>
+          <a:effectRef idx="2">
+            <a:schemeClr val="dk1"/>
+          </a:effectRef>
+          <a:fontRef idx="minor">
+            <a:schemeClr val="tx1"/>
+          </a:fontRef>
+        </p:style>
+      </p:cxnSp>
+      <p:cxnSp>
+        <p:nvCxnSpPr>
+          <p:cNvPr id="265" name="直接连接符 264">
+            <a:extLst>
+              <a:ext uri="{FF2B5EF4-FFF2-40B4-BE49-F238E27FC236}">
+                <a16:creationId xmlns:a16="http://schemas.microsoft.com/office/drawing/2014/main" id="{78EA912F-B0E3-41C6-82EC-89595CDCF708}"/>
+              </a:ext>
+            </a:extLst>
+          </p:cNvPr>
+          <p:cNvCxnSpPr>
+            <a:cxnSpLocks noChangeAspect="1"/>
+            <a:stCxn id="175" idx="2"/>
+            <a:endCxn id="169" idx="6"/>
+          </p:cNvCxnSpPr>
+          <p:nvPr/>
+        </p:nvCxnSpPr>
+        <p:spPr>
+          <a:xfrm flipH="1">
+            <a:off x="2501882" y="1563221"/>
+            <a:ext cx="682161" cy="2123948"/>
+          </a:xfrm>
+          <a:prstGeom prst="line">
+            <a:avLst/>
+          </a:prstGeom>
+          <a:ln w="19050">
+            <a:solidFill>
+              <a:schemeClr val="tx1"/>
+            </a:solidFill>
+          </a:ln>
+        </p:spPr>
+        <p:style>
+          <a:lnRef idx="3">
+            <a:schemeClr val="dk1"/>
+          </a:lnRef>
+          <a:fillRef idx="0">
+            <a:schemeClr val="dk1"/>
+          </a:fillRef>
+          <a:effectRef idx="2">
+            <a:schemeClr val="dk1"/>
+          </a:effectRef>
+          <a:fontRef idx="minor">
+            <a:schemeClr val="tx1"/>
+          </a:fontRef>
+        </p:style>
+      </p:cxnSp>
+      <p:cxnSp>
+        <p:nvCxnSpPr>
+          <p:cNvPr id="268" name="直接连接符 267">
+            <a:extLst>
+              <a:ext uri="{FF2B5EF4-FFF2-40B4-BE49-F238E27FC236}">
+                <a16:creationId xmlns:a16="http://schemas.microsoft.com/office/drawing/2014/main" id="{78EA912F-B0E3-41C6-82EC-89595CDCF708}"/>
+              </a:ext>
+            </a:extLst>
+          </p:cNvPr>
+          <p:cNvCxnSpPr>
+            <a:cxnSpLocks noChangeAspect="1"/>
+            <a:stCxn id="179" idx="2"/>
+            <a:endCxn id="169" idx="6"/>
+          </p:cNvCxnSpPr>
+          <p:nvPr/>
+        </p:nvCxnSpPr>
+        <p:spPr>
+          <a:xfrm flipH="1">
+            <a:off x="2501882" y="2332847"/>
+            <a:ext cx="677902" cy="1354322"/>
+          </a:xfrm>
+          <a:prstGeom prst="line">
+            <a:avLst/>
+          </a:prstGeom>
+          <a:ln w="19050">
+            <a:solidFill>
+              <a:schemeClr val="tx1"/>
+            </a:solidFill>
+          </a:ln>
+        </p:spPr>
+        <p:style>
+          <a:lnRef idx="3">
+            <a:schemeClr val="dk1"/>
+          </a:lnRef>
+          <a:fillRef idx="0">
+            <a:schemeClr val="dk1"/>
+          </a:fillRef>
+          <a:effectRef idx="2">
+            <a:schemeClr val="dk1"/>
+          </a:effectRef>
+          <a:fontRef idx="minor">
+            <a:schemeClr val="tx1"/>
+          </a:fontRef>
+        </p:style>
+      </p:cxnSp>
+      <p:cxnSp>
+        <p:nvCxnSpPr>
+          <p:cNvPr id="272" name="直接连接符 271">
+            <a:extLst>
+              <a:ext uri="{FF2B5EF4-FFF2-40B4-BE49-F238E27FC236}">
+                <a16:creationId xmlns:a16="http://schemas.microsoft.com/office/drawing/2014/main" id="{78EA912F-B0E3-41C6-82EC-89595CDCF708}"/>
+              </a:ext>
+            </a:extLst>
+          </p:cNvPr>
+          <p:cNvCxnSpPr>
+            <a:cxnSpLocks noChangeAspect="1"/>
+            <a:stCxn id="174" idx="2"/>
+            <a:endCxn id="157" idx="6"/>
+          </p:cNvCxnSpPr>
+          <p:nvPr/>
+        </p:nvCxnSpPr>
+        <p:spPr>
+          <a:xfrm flipH="1">
+            <a:off x="2503516" y="793483"/>
+            <a:ext cx="684654" cy="3810590"/>
+          </a:xfrm>
+          <a:prstGeom prst="line">
+            <a:avLst/>
+          </a:prstGeom>
+          <a:ln w="19050">
+            <a:solidFill>
+              <a:schemeClr val="tx1"/>
+            </a:solidFill>
+          </a:ln>
+        </p:spPr>
+        <p:style>
+          <a:lnRef idx="3">
+            <a:schemeClr val="dk1"/>
+          </a:lnRef>
+          <a:fillRef idx="0">
+            <a:schemeClr val="dk1"/>
+          </a:fillRef>
+          <a:effectRef idx="2">
+            <a:schemeClr val="dk1"/>
+          </a:effectRef>
+          <a:fontRef idx="minor">
+            <a:schemeClr val="tx1"/>
+          </a:fontRef>
+        </p:style>
+      </p:cxnSp>
+      <p:cxnSp>
+        <p:nvCxnSpPr>
+          <p:cNvPr id="275" name="直接连接符 274">
+            <a:extLst>
+              <a:ext uri="{FF2B5EF4-FFF2-40B4-BE49-F238E27FC236}">
+                <a16:creationId xmlns:a16="http://schemas.microsoft.com/office/drawing/2014/main" id="{78EA912F-B0E3-41C6-82EC-89595CDCF708}"/>
+              </a:ext>
+            </a:extLst>
+          </p:cNvPr>
+          <p:cNvCxnSpPr>
+            <a:cxnSpLocks noChangeAspect="1"/>
+            <a:stCxn id="175" idx="2"/>
+            <a:endCxn id="157" idx="6"/>
+          </p:cNvCxnSpPr>
+          <p:nvPr/>
+        </p:nvCxnSpPr>
+        <p:spPr>
+          <a:xfrm flipH="1">
+            <a:off x="2503516" y="1563221"/>
+            <a:ext cx="680527" cy="3040852"/>
+          </a:xfrm>
+          <a:prstGeom prst="line">
+            <a:avLst/>
+          </a:prstGeom>
+          <a:ln w="19050">
+            <a:solidFill>
+              <a:schemeClr val="tx1"/>
+            </a:solidFill>
+          </a:ln>
+        </p:spPr>
+        <p:style>
+          <a:lnRef idx="3">
+            <a:schemeClr val="dk1"/>
+          </a:lnRef>
+          <a:fillRef idx="0">
+            <a:schemeClr val="dk1"/>
+          </a:fillRef>
+          <a:effectRef idx="2">
+            <a:schemeClr val="dk1"/>
+          </a:effectRef>
+          <a:fontRef idx="minor">
+            <a:schemeClr val="tx1"/>
+          </a:fontRef>
+        </p:style>
+      </p:cxnSp>
+      <p:cxnSp>
+        <p:nvCxnSpPr>
+          <p:cNvPr id="278" name="直接连接符 277">
+            <a:extLst>
+              <a:ext uri="{FF2B5EF4-FFF2-40B4-BE49-F238E27FC236}">
+                <a16:creationId xmlns:a16="http://schemas.microsoft.com/office/drawing/2014/main" id="{78EA912F-B0E3-41C6-82EC-89595CDCF708}"/>
+              </a:ext>
+            </a:extLst>
+          </p:cNvPr>
+          <p:cNvCxnSpPr>
+            <a:cxnSpLocks noChangeAspect="1"/>
+            <a:stCxn id="179" idx="2"/>
+            <a:endCxn id="157" idx="6"/>
+          </p:cNvCxnSpPr>
+          <p:nvPr/>
+        </p:nvCxnSpPr>
+        <p:spPr>
+          <a:xfrm flipH="1">
+            <a:off x="2503516" y="2332847"/>
+            <a:ext cx="676268" cy="2271226"/>
+          </a:xfrm>
+          <a:prstGeom prst="line">
+            <a:avLst/>
+          </a:prstGeom>
+          <a:ln w="19050">
+            <a:solidFill>
+              <a:schemeClr val="tx1"/>
+            </a:solidFill>
+          </a:ln>
+        </p:spPr>
+        <p:style>
+          <a:lnRef idx="3">
+            <a:schemeClr val="dk1"/>
+          </a:lnRef>
+          <a:fillRef idx="0">
+            <a:schemeClr val="dk1"/>
+          </a:fillRef>
+          <a:effectRef idx="2">
+            <a:schemeClr val="dk1"/>
+          </a:effectRef>
+          <a:fontRef idx="minor">
+            <a:schemeClr val="tx1"/>
+          </a:fontRef>
+        </p:style>
+      </p:cxnSp>
+      <p:cxnSp>
+        <p:nvCxnSpPr>
+          <p:cNvPr id="284" name="直接连接符 283">
+            <a:extLst>
+              <a:ext uri="{FF2B5EF4-FFF2-40B4-BE49-F238E27FC236}">
+                <a16:creationId xmlns:a16="http://schemas.microsoft.com/office/drawing/2014/main" id="{1DBE3D74-21D6-4D01-8877-F2B817CDB8DE}"/>
+              </a:ext>
+            </a:extLst>
+          </p:cNvPr>
+          <p:cNvCxnSpPr>
+            <a:cxnSpLocks noChangeAspect="1"/>
+            <a:stCxn id="157" idx="6"/>
+            <a:endCxn id="180" idx="2"/>
+          </p:cNvCxnSpPr>
+          <p:nvPr/>
+        </p:nvCxnSpPr>
+        <p:spPr>
+          <a:xfrm flipV="1">
+            <a:off x="2503516" y="3694434"/>
+            <a:ext cx="678099" cy="909639"/>
+          </a:xfrm>
+          <a:prstGeom prst="line">
+            <a:avLst/>
+          </a:prstGeom>
+          <a:ln w="19050">
+            <a:solidFill>
+              <a:schemeClr val="tx1"/>
+            </a:solidFill>
+          </a:ln>
+        </p:spPr>
+        <p:style>
+          <a:lnRef idx="3">
+            <a:schemeClr val="dk1"/>
+          </a:lnRef>
+          <a:fillRef idx="0">
+            <a:schemeClr val="dk1"/>
+          </a:fillRef>
+          <a:effectRef idx="2">
+            <a:schemeClr val="dk1"/>
+          </a:effectRef>
+          <a:fontRef idx="minor">
+            <a:schemeClr val="tx1"/>
+          </a:fontRef>
+        </p:style>
+      </p:cxnSp>
+      <p:cxnSp>
+        <p:nvCxnSpPr>
+          <p:cNvPr id="287" name="直接连接符 286">
+            <a:extLst>
+              <a:ext uri="{FF2B5EF4-FFF2-40B4-BE49-F238E27FC236}">
+                <a16:creationId xmlns:a16="http://schemas.microsoft.com/office/drawing/2014/main" id="{1DBE3D74-21D6-4D01-8877-F2B817CDB8DE}"/>
+              </a:ext>
+            </a:extLst>
+          </p:cNvPr>
+          <p:cNvCxnSpPr>
+            <a:cxnSpLocks noChangeAspect="1"/>
+            <a:stCxn id="157" idx="6"/>
+            <a:endCxn id="177" idx="2"/>
+          </p:cNvCxnSpPr>
+          <p:nvPr/>
+        </p:nvCxnSpPr>
+        <p:spPr>
+          <a:xfrm flipV="1">
+            <a:off x="2503516" y="4469964"/>
+            <a:ext cx="678696" cy="134109"/>
+          </a:xfrm>
+          <a:prstGeom prst="line">
+            <a:avLst/>
+          </a:prstGeom>
+          <a:ln w="19050">
+            <a:solidFill>
+              <a:schemeClr val="tx1"/>
+            </a:solidFill>
+          </a:ln>
+        </p:spPr>
+        <p:style>
+          <a:lnRef idx="3">
+            <a:schemeClr val="dk1"/>
+          </a:lnRef>
+          <a:fillRef idx="0">
+            <a:schemeClr val="dk1"/>
+          </a:fillRef>
+          <a:effectRef idx="2">
+            <a:schemeClr val="dk1"/>
+          </a:effectRef>
+          <a:fontRef idx="minor">
+            <a:schemeClr val="tx1"/>
+          </a:fontRef>
+        </p:style>
+      </p:cxnSp>
+      <p:cxnSp>
+        <p:nvCxnSpPr>
+          <p:cNvPr id="290" name="直接连接符 289">
+            <a:extLst>
+              <a:ext uri="{FF2B5EF4-FFF2-40B4-BE49-F238E27FC236}">
+                <a16:creationId xmlns:a16="http://schemas.microsoft.com/office/drawing/2014/main" id="{1DBE3D74-21D6-4D01-8877-F2B817CDB8DE}"/>
+              </a:ext>
+            </a:extLst>
+          </p:cNvPr>
+          <p:cNvCxnSpPr>
+            <a:cxnSpLocks noChangeAspect="1"/>
+            <a:stCxn id="157" idx="6"/>
+            <a:endCxn id="176" idx="2"/>
+          </p:cNvCxnSpPr>
+          <p:nvPr/>
+        </p:nvCxnSpPr>
+        <p:spPr>
+          <a:xfrm>
+            <a:off x="2503516" y="4604073"/>
+            <a:ext cx="672074" cy="639882"/>
+          </a:xfrm>
+          <a:prstGeom prst="line">
+            <a:avLst/>
+          </a:prstGeom>
+          <a:ln w="19050">
+            <a:solidFill>
+              <a:schemeClr val="tx1"/>
+            </a:solidFill>
+          </a:ln>
+        </p:spPr>
+        <p:style>
+          <a:lnRef idx="3">
+            <a:schemeClr val="dk1"/>
+          </a:lnRef>
+          <a:fillRef idx="0">
+            <a:schemeClr val="dk1"/>
+          </a:fillRef>
+          <a:effectRef idx="2">
+            <a:schemeClr val="dk1"/>
+          </a:effectRef>
+          <a:fontRef idx="minor">
+            <a:schemeClr val="tx1"/>
+          </a:fontRef>
+        </p:style>
+      </p:cxnSp>
+      <p:cxnSp>
+        <p:nvCxnSpPr>
+          <p:cNvPr id="293" name="直接连接符 292">
+            <a:extLst>
+              <a:ext uri="{FF2B5EF4-FFF2-40B4-BE49-F238E27FC236}">
+                <a16:creationId xmlns:a16="http://schemas.microsoft.com/office/drawing/2014/main" id="{1DBE3D74-21D6-4D01-8877-F2B817CDB8DE}"/>
+              </a:ext>
+            </a:extLst>
+          </p:cNvPr>
+          <p:cNvCxnSpPr>
+            <a:cxnSpLocks noChangeAspect="1"/>
+            <a:stCxn id="169" idx="6"/>
+            <a:endCxn id="180" idx="2"/>
+          </p:cNvCxnSpPr>
+          <p:nvPr/>
+        </p:nvCxnSpPr>
+        <p:spPr>
+          <a:xfrm>
+            <a:off x="2501882" y="3687169"/>
+            <a:ext cx="679733" cy="7265"/>
+          </a:xfrm>
+          <a:prstGeom prst="line">
+            <a:avLst/>
+          </a:prstGeom>
+          <a:ln w="19050">
+            <a:solidFill>
+              <a:schemeClr val="tx1"/>
+            </a:solidFill>
+          </a:ln>
+        </p:spPr>
+        <p:style>
+          <a:lnRef idx="3">
+            <a:schemeClr val="dk1"/>
+          </a:lnRef>
+          <a:fillRef idx="0">
+            <a:schemeClr val="dk1"/>
+          </a:fillRef>
+          <a:effectRef idx="2">
+            <a:schemeClr val="dk1"/>
+          </a:effectRef>
+          <a:fontRef idx="minor">
+            <a:schemeClr val="tx1"/>
+          </a:fontRef>
+        </p:style>
+      </p:cxnSp>
+      <p:cxnSp>
+        <p:nvCxnSpPr>
+          <p:cNvPr id="296" name="直接连接符 295">
+            <a:extLst>
+              <a:ext uri="{FF2B5EF4-FFF2-40B4-BE49-F238E27FC236}">
+                <a16:creationId xmlns:a16="http://schemas.microsoft.com/office/drawing/2014/main" id="{1DBE3D74-21D6-4D01-8877-F2B817CDB8DE}"/>
+              </a:ext>
+            </a:extLst>
+          </p:cNvPr>
+          <p:cNvCxnSpPr>
+            <a:cxnSpLocks noChangeAspect="1"/>
+            <a:stCxn id="169" idx="6"/>
+            <a:endCxn id="177" idx="2"/>
+          </p:cNvCxnSpPr>
+          <p:nvPr/>
+        </p:nvCxnSpPr>
+        <p:spPr>
+          <a:xfrm>
+            <a:off x="2501882" y="3687169"/>
+            <a:ext cx="680330" cy="782795"/>
+          </a:xfrm>
+          <a:prstGeom prst="line">
+            <a:avLst/>
+          </a:prstGeom>
+          <a:ln w="19050">
+            <a:solidFill>
+              <a:schemeClr val="tx1"/>
+            </a:solidFill>
+          </a:ln>
+        </p:spPr>
+        <p:style>
+          <a:lnRef idx="3">
+            <a:schemeClr val="dk1"/>
+          </a:lnRef>
+          <a:fillRef idx="0">
+            <a:schemeClr val="dk1"/>
+          </a:fillRef>
+          <a:effectRef idx="2">
+            <a:schemeClr val="dk1"/>
+          </a:effectRef>
+          <a:fontRef idx="minor">
+            <a:schemeClr val="tx1"/>
+          </a:fontRef>
+        </p:style>
+      </p:cxnSp>
+      <p:cxnSp>
+        <p:nvCxnSpPr>
+          <p:cNvPr id="299" name="直接连接符 298">
+            <a:extLst>
+              <a:ext uri="{FF2B5EF4-FFF2-40B4-BE49-F238E27FC236}">
+                <a16:creationId xmlns:a16="http://schemas.microsoft.com/office/drawing/2014/main" id="{1DBE3D74-21D6-4D01-8877-F2B817CDB8DE}"/>
+              </a:ext>
+            </a:extLst>
+          </p:cNvPr>
+          <p:cNvCxnSpPr>
+            <a:cxnSpLocks noChangeAspect="1"/>
+            <a:stCxn id="169" idx="6"/>
+            <a:endCxn id="176" idx="2"/>
+          </p:cNvCxnSpPr>
+          <p:nvPr/>
+        </p:nvCxnSpPr>
+        <p:spPr>
+          <a:xfrm>
+            <a:off x="2501882" y="3687169"/>
+            <a:ext cx="673708" cy="1556786"/>
+          </a:xfrm>
+          <a:prstGeom prst="line">
+            <a:avLst/>
+          </a:prstGeom>
+          <a:ln w="19050">
+            <a:solidFill>
+              <a:schemeClr val="tx1"/>
+            </a:solidFill>
+          </a:ln>
+        </p:spPr>
+        <p:style>
+          <a:lnRef idx="3">
+            <a:schemeClr val="dk1"/>
+          </a:lnRef>
+          <a:fillRef idx="0">
+            <a:schemeClr val="dk1"/>
+          </a:fillRef>
+          <a:effectRef idx="2">
+            <a:schemeClr val="dk1"/>
+          </a:effectRef>
+          <a:fontRef idx="minor">
+            <a:schemeClr val="tx1"/>
+          </a:fontRef>
+        </p:style>
+      </p:cxnSp>
+      <p:cxnSp>
+        <p:nvCxnSpPr>
+          <p:cNvPr id="302" name="直接连接符 301">
+            <a:extLst>
+              <a:ext uri="{FF2B5EF4-FFF2-40B4-BE49-F238E27FC236}">
+                <a16:creationId xmlns:a16="http://schemas.microsoft.com/office/drawing/2014/main" id="{1DBE3D74-21D6-4D01-8877-F2B817CDB8DE}"/>
+              </a:ext>
+            </a:extLst>
+          </p:cNvPr>
+          <p:cNvCxnSpPr>
+            <a:cxnSpLocks noChangeAspect="1"/>
+            <a:stCxn id="174" idx="6"/>
+            <a:endCxn id="181" idx="2"/>
+          </p:cNvCxnSpPr>
+          <p:nvPr/>
+        </p:nvCxnSpPr>
+        <p:spPr>
+          <a:xfrm flipV="1">
+            <a:off x="3641479" y="239902"/>
+            <a:ext cx="1304406" cy="553581"/>
+          </a:xfrm>
+          <a:prstGeom prst="line">
+            <a:avLst/>
+          </a:prstGeom>
+          <a:ln w="19050">
+            <a:solidFill>
+              <a:schemeClr val="tx1"/>
+            </a:solidFill>
+          </a:ln>
+        </p:spPr>
+        <p:style>
+          <a:lnRef idx="3">
+            <a:schemeClr val="dk1"/>
+          </a:lnRef>
+          <a:fillRef idx="0">
+            <a:schemeClr val="dk1"/>
+          </a:fillRef>
+          <a:effectRef idx="2">
+            <a:schemeClr val="dk1"/>
+          </a:effectRef>
+          <a:fontRef idx="minor">
+            <a:schemeClr val="tx1"/>
+          </a:fontRef>
+        </p:style>
+      </p:cxnSp>
+      <p:cxnSp>
+        <p:nvCxnSpPr>
+          <p:cNvPr id="305" name="直接连接符 304">
+            <a:extLst>
+              <a:ext uri="{FF2B5EF4-FFF2-40B4-BE49-F238E27FC236}">
+                <a16:creationId xmlns:a16="http://schemas.microsoft.com/office/drawing/2014/main" id="{1DBE3D74-21D6-4D01-8877-F2B817CDB8DE}"/>
+              </a:ext>
+            </a:extLst>
+          </p:cNvPr>
+          <p:cNvCxnSpPr>
+            <a:cxnSpLocks noChangeAspect="1"/>
+            <a:stCxn id="174" idx="6"/>
+            <a:endCxn id="182" idx="2"/>
+          </p:cNvCxnSpPr>
+          <p:nvPr/>
+        </p:nvCxnSpPr>
+        <p:spPr>
+          <a:xfrm>
+            <a:off x="3641479" y="793483"/>
+            <a:ext cx="1306644" cy="146124"/>
+          </a:xfrm>
+          <a:prstGeom prst="line">
+            <a:avLst/>
+          </a:prstGeom>
+          <a:ln w="19050">
+            <a:solidFill>
+              <a:schemeClr val="tx1"/>
+            </a:solidFill>
+          </a:ln>
+        </p:spPr>
+        <p:style>
+          <a:lnRef idx="3">
+            <a:schemeClr val="dk1"/>
+          </a:lnRef>
+          <a:fillRef idx="0">
+            <a:schemeClr val="dk1"/>
+          </a:fillRef>
+          <a:effectRef idx="2">
+            <a:schemeClr val="dk1"/>
+          </a:effectRef>
+          <a:fontRef idx="minor">
+            <a:schemeClr val="tx1"/>
+          </a:fontRef>
+        </p:style>
+      </p:cxnSp>
+      <p:cxnSp>
+        <p:nvCxnSpPr>
+          <p:cNvPr id="308" name="直接连接符 307">
+            <a:extLst>
+              <a:ext uri="{FF2B5EF4-FFF2-40B4-BE49-F238E27FC236}">
+                <a16:creationId xmlns:a16="http://schemas.microsoft.com/office/drawing/2014/main" id="{1DBE3D74-21D6-4D01-8877-F2B817CDB8DE}"/>
+              </a:ext>
+            </a:extLst>
+          </p:cNvPr>
+          <p:cNvCxnSpPr>
+            <a:cxnSpLocks noChangeAspect="1"/>
+            <a:stCxn id="174" idx="6"/>
+            <a:endCxn id="186" idx="2"/>
+          </p:cNvCxnSpPr>
+          <p:nvPr/>
+        </p:nvCxnSpPr>
+        <p:spPr>
+          <a:xfrm>
+            <a:off x="3641479" y="793483"/>
+            <a:ext cx="1304795" cy="838476"/>
+          </a:xfrm>
+          <a:prstGeom prst="line">
+            <a:avLst/>
+          </a:prstGeom>
+          <a:ln w="19050">
+            <a:solidFill>
+              <a:schemeClr val="tx1"/>
+            </a:solidFill>
+          </a:ln>
+        </p:spPr>
+        <p:style>
+          <a:lnRef idx="3">
+            <a:schemeClr val="dk1"/>
+          </a:lnRef>
+          <a:fillRef idx="0">
+            <a:schemeClr val="dk1"/>
+          </a:fillRef>
+          <a:effectRef idx="2">
+            <a:schemeClr val="dk1"/>
+          </a:effectRef>
+          <a:fontRef idx="minor">
+            <a:schemeClr val="tx1"/>
+          </a:fontRef>
+        </p:style>
+      </p:cxnSp>
+      <p:cxnSp>
+        <p:nvCxnSpPr>
+          <p:cNvPr id="311" name="直接连接符 310">
+            <a:extLst>
+              <a:ext uri="{FF2B5EF4-FFF2-40B4-BE49-F238E27FC236}">
+                <a16:creationId xmlns:a16="http://schemas.microsoft.com/office/drawing/2014/main" id="{1DBE3D74-21D6-4D01-8877-F2B817CDB8DE}"/>
+              </a:ext>
+            </a:extLst>
+          </p:cNvPr>
+          <p:cNvCxnSpPr>
+            <a:cxnSpLocks noChangeAspect="1"/>
+            <a:stCxn id="174" idx="6"/>
+            <a:endCxn id="188" idx="2"/>
+          </p:cNvCxnSpPr>
+          <p:nvPr/>
+        </p:nvCxnSpPr>
+        <p:spPr>
+          <a:xfrm>
+            <a:off x="3641479" y="793483"/>
+            <a:ext cx="1304796" cy="1535898"/>
+          </a:xfrm>
+          <a:prstGeom prst="line">
+            <a:avLst/>
+          </a:prstGeom>
+          <a:ln w="19050">
+            <a:solidFill>
+              <a:schemeClr val="tx1"/>
+            </a:solidFill>
+          </a:ln>
+        </p:spPr>
+        <p:style>
+          <a:lnRef idx="3">
+            <a:schemeClr val="dk1"/>
+          </a:lnRef>
+          <a:fillRef idx="0">
+            <a:schemeClr val="dk1"/>
+          </a:fillRef>
+          <a:effectRef idx="2">
+            <a:schemeClr val="dk1"/>
+          </a:effectRef>
+          <a:fontRef idx="minor">
+            <a:schemeClr val="tx1"/>
+          </a:fontRef>
+        </p:style>
+      </p:cxnSp>
+      <p:cxnSp>
+        <p:nvCxnSpPr>
+          <p:cNvPr id="314" name="直接连接符 313">
+            <a:extLst>
+              <a:ext uri="{FF2B5EF4-FFF2-40B4-BE49-F238E27FC236}">
+                <a16:creationId xmlns:a16="http://schemas.microsoft.com/office/drawing/2014/main" id="{1DBE3D74-21D6-4D01-8877-F2B817CDB8DE}"/>
+              </a:ext>
+            </a:extLst>
+          </p:cNvPr>
+          <p:cNvCxnSpPr>
+            <a:cxnSpLocks noChangeAspect="1"/>
+            <a:stCxn id="174" idx="6"/>
+            <a:endCxn id="189" idx="2"/>
+          </p:cNvCxnSpPr>
+          <p:nvPr/>
+        </p:nvCxnSpPr>
+        <p:spPr>
+          <a:xfrm>
+            <a:off x="3641479" y="793483"/>
+            <a:ext cx="1290088" cy="2904417"/>
+          </a:xfrm>
+          <a:prstGeom prst="line">
+            <a:avLst/>
+          </a:prstGeom>
+          <a:ln w="19050">
+            <a:solidFill>
+              <a:schemeClr val="tx1"/>
+            </a:solidFill>
+          </a:ln>
+        </p:spPr>
+        <p:style>
+          <a:lnRef idx="3">
+            <a:schemeClr val="dk1"/>
+          </a:lnRef>
+          <a:fillRef idx="0">
+            <a:schemeClr val="dk1"/>
+          </a:fillRef>
+          <a:effectRef idx="2">
+            <a:schemeClr val="dk1"/>
+          </a:effectRef>
+          <a:fontRef idx="minor">
+            <a:schemeClr val="tx1"/>
+          </a:fontRef>
+        </p:style>
+      </p:cxnSp>
+      <p:cxnSp>
+        <p:nvCxnSpPr>
+          <p:cNvPr id="317" name="直接连接符 316">
+            <a:extLst>
+              <a:ext uri="{FF2B5EF4-FFF2-40B4-BE49-F238E27FC236}">
+                <a16:creationId xmlns:a16="http://schemas.microsoft.com/office/drawing/2014/main" id="{1DBE3D74-21D6-4D01-8877-F2B817CDB8DE}"/>
+              </a:ext>
+            </a:extLst>
+          </p:cNvPr>
+          <p:cNvCxnSpPr>
+            <a:cxnSpLocks noChangeAspect="1"/>
+            <a:stCxn id="174" idx="6"/>
+            <a:endCxn id="187" idx="2"/>
+          </p:cNvCxnSpPr>
+          <p:nvPr/>
+        </p:nvCxnSpPr>
+        <p:spPr>
+          <a:xfrm>
+            <a:off x="3641479" y="793483"/>
+            <a:ext cx="1311009" cy="3600342"/>
+          </a:xfrm>
+          <a:prstGeom prst="line">
+            <a:avLst/>
+          </a:prstGeom>
+          <a:ln w="19050">
+            <a:solidFill>
+              <a:schemeClr val="tx1"/>
+            </a:solidFill>
+          </a:ln>
+        </p:spPr>
+        <p:style>
+          <a:lnRef idx="3">
+            <a:schemeClr val="dk1"/>
+          </a:lnRef>
+          <a:fillRef idx="0">
+            <a:schemeClr val="dk1"/>
+          </a:fillRef>
+          <a:effectRef idx="2">
+            <a:schemeClr val="dk1"/>
+          </a:effectRef>
+          <a:fontRef idx="minor">
+            <a:schemeClr val="tx1"/>
+          </a:fontRef>
+        </p:style>
+      </p:cxnSp>
+      <p:cxnSp>
+        <p:nvCxnSpPr>
+          <p:cNvPr id="320" name="直接连接符 319">
+            <a:extLst>
+              <a:ext uri="{FF2B5EF4-FFF2-40B4-BE49-F238E27FC236}">
+                <a16:creationId xmlns:a16="http://schemas.microsoft.com/office/drawing/2014/main" id="{1DBE3D74-21D6-4D01-8877-F2B817CDB8DE}"/>
+              </a:ext>
+            </a:extLst>
+          </p:cNvPr>
+          <p:cNvCxnSpPr>
+            <a:cxnSpLocks noChangeAspect="1"/>
+            <a:stCxn id="174" idx="6"/>
+            <a:endCxn id="184" idx="2"/>
+          </p:cNvCxnSpPr>
+          <p:nvPr/>
+        </p:nvCxnSpPr>
+        <p:spPr>
+          <a:xfrm>
+            <a:off x="3641479" y="793483"/>
+            <a:ext cx="1303870" cy="4297764"/>
+          </a:xfrm>
+          <a:prstGeom prst="line">
+            <a:avLst/>
+          </a:prstGeom>
+          <a:ln w="19050">
+            <a:solidFill>
+              <a:schemeClr val="tx1"/>
+            </a:solidFill>
+          </a:ln>
+        </p:spPr>
+        <p:style>
+          <a:lnRef idx="3">
+            <a:schemeClr val="dk1"/>
+          </a:lnRef>
+          <a:fillRef idx="0">
+            <a:schemeClr val="dk1"/>
+          </a:fillRef>
+          <a:effectRef idx="2">
+            <a:schemeClr val="dk1"/>
+          </a:effectRef>
+          <a:fontRef idx="minor">
+            <a:schemeClr val="tx1"/>
+          </a:fontRef>
+        </p:style>
+      </p:cxnSp>
+      <p:cxnSp>
+        <p:nvCxnSpPr>
+          <p:cNvPr id="323" name="直接连接符 322">
+            <a:extLst>
+              <a:ext uri="{FF2B5EF4-FFF2-40B4-BE49-F238E27FC236}">
+                <a16:creationId xmlns:a16="http://schemas.microsoft.com/office/drawing/2014/main" id="{1DBE3D74-21D6-4D01-8877-F2B817CDB8DE}"/>
+              </a:ext>
+            </a:extLst>
+          </p:cNvPr>
+          <p:cNvCxnSpPr>
+            <a:cxnSpLocks noChangeAspect="1"/>
+            <a:stCxn id="174" idx="6"/>
+            <a:endCxn id="183" idx="2"/>
+          </p:cNvCxnSpPr>
+          <p:nvPr/>
+        </p:nvCxnSpPr>
+        <p:spPr>
+          <a:xfrm>
+            <a:off x="3641479" y="793483"/>
+            <a:ext cx="1290087" cy="4995186"/>
+          </a:xfrm>
+          <a:prstGeom prst="line">
+            <a:avLst/>
+          </a:prstGeom>
+          <a:ln w="19050">
+            <a:solidFill>
+              <a:schemeClr val="tx1"/>
+            </a:solidFill>
+          </a:ln>
+        </p:spPr>
+        <p:style>
+          <a:lnRef idx="3">
+            <a:schemeClr val="dk1"/>
+          </a:lnRef>
+          <a:fillRef idx="0">
+            <a:schemeClr val="dk1"/>
+          </a:fillRef>
+          <a:effectRef idx="2">
+            <a:schemeClr val="dk1"/>
+          </a:effectRef>
+          <a:fontRef idx="minor">
+            <a:schemeClr val="tx1"/>
+          </a:fontRef>
+        </p:style>
+      </p:cxnSp>
+      <p:cxnSp>
+        <p:nvCxnSpPr>
+          <p:cNvPr id="326" name="直接连接符 325">
+            <a:extLst>
+              <a:ext uri="{FF2B5EF4-FFF2-40B4-BE49-F238E27FC236}">
+                <a16:creationId xmlns:a16="http://schemas.microsoft.com/office/drawing/2014/main" id="{1DBE3D74-21D6-4D01-8877-F2B817CDB8DE}"/>
+              </a:ext>
+            </a:extLst>
+          </p:cNvPr>
+          <p:cNvCxnSpPr>
+            <a:cxnSpLocks noChangeAspect="1"/>
+            <a:stCxn id="175" idx="6"/>
+            <a:endCxn id="181" idx="2"/>
+          </p:cNvCxnSpPr>
+          <p:nvPr/>
+        </p:nvCxnSpPr>
+        <p:spPr>
+          <a:xfrm flipV="1">
+            <a:off x="3637352" y="239902"/>
+            <a:ext cx="1308533" cy="1323319"/>
+          </a:xfrm>
+          <a:prstGeom prst="line">
+            <a:avLst/>
+          </a:prstGeom>
+          <a:ln w="19050">
+            <a:solidFill>
+              <a:schemeClr val="tx1"/>
+            </a:solidFill>
+          </a:ln>
+        </p:spPr>
+        <p:style>
+          <a:lnRef idx="3">
+            <a:schemeClr val="dk1"/>
+          </a:lnRef>
+          <a:fillRef idx="0">
+            <a:schemeClr val="dk1"/>
+          </a:fillRef>
+          <a:effectRef idx="2">
+            <a:schemeClr val="dk1"/>
+          </a:effectRef>
+          <a:fontRef idx="minor">
+            <a:schemeClr val="tx1"/>
+          </a:fontRef>
+        </p:style>
+      </p:cxnSp>
+      <p:cxnSp>
+        <p:nvCxnSpPr>
+          <p:cNvPr id="329" name="直接连接符 328">
+            <a:extLst>
+              <a:ext uri="{FF2B5EF4-FFF2-40B4-BE49-F238E27FC236}">
+                <a16:creationId xmlns:a16="http://schemas.microsoft.com/office/drawing/2014/main" id="{1DBE3D74-21D6-4D01-8877-F2B817CDB8DE}"/>
+              </a:ext>
+            </a:extLst>
+          </p:cNvPr>
+          <p:cNvCxnSpPr>
+            <a:cxnSpLocks noChangeAspect="1"/>
+            <a:stCxn id="175" idx="6"/>
+            <a:endCxn id="182" idx="2"/>
+          </p:cNvCxnSpPr>
+          <p:nvPr/>
+        </p:nvCxnSpPr>
+        <p:spPr>
+          <a:xfrm flipV="1">
+            <a:off x="3637352" y="939607"/>
+            <a:ext cx="1310771" cy="623614"/>
+          </a:xfrm>
+          <a:prstGeom prst="line">
+            <a:avLst/>
+          </a:prstGeom>
+          <a:ln w="19050">
+            <a:solidFill>
+              <a:schemeClr val="tx1"/>
+            </a:solidFill>
+          </a:ln>
+        </p:spPr>
+        <p:style>
+          <a:lnRef idx="3">
+            <a:schemeClr val="dk1"/>
+          </a:lnRef>
+          <a:fillRef idx="0">
+            <a:schemeClr val="dk1"/>
+          </a:fillRef>
+          <a:effectRef idx="2">
+            <a:schemeClr val="dk1"/>
+          </a:effectRef>
+          <a:fontRef idx="minor">
+            <a:schemeClr val="tx1"/>
+          </a:fontRef>
+        </p:style>
+      </p:cxnSp>
+      <p:cxnSp>
+        <p:nvCxnSpPr>
+          <p:cNvPr id="332" name="直接连接符 331">
+            <a:extLst>
+              <a:ext uri="{FF2B5EF4-FFF2-40B4-BE49-F238E27FC236}">
+                <a16:creationId xmlns:a16="http://schemas.microsoft.com/office/drawing/2014/main" id="{1DBE3D74-21D6-4D01-8877-F2B817CDB8DE}"/>
+              </a:ext>
+            </a:extLst>
+          </p:cNvPr>
+          <p:cNvCxnSpPr>
+            <a:cxnSpLocks noChangeAspect="1"/>
+            <a:stCxn id="175" idx="6"/>
+            <a:endCxn id="186" idx="2"/>
+          </p:cNvCxnSpPr>
+          <p:nvPr/>
+        </p:nvCxnSpPr>
+        <p:spPr>
+          <a:xfrm>
+            <a:off x="3637352" y="1563221"/>
+            <a:ext cx="1308922" cy="68738"/>
+          </a:xfrm>
+          <a:prstGeom prst="line">
+            <a:avLst/>
+          </a:prstGeom>
+          <a:ln w="19050">
+            <a:solidFill>
+              <a:schemeClr val="tx1"/>
+            </a:solidFill>
+          </a:ln>
+        </p:spPr>
+        <p:style>
+          <a:lnRef idx="3">
+            <a:schemeClr val="dk1"/>
+          </a:lnRef>
+          <a:fillRef idx="0">
+            <a:schemeClr val="dk1"/>
+          </a:fillRef>
+          <a:effectRef idx="2">
+            <a:schemeClr val="dk1"/>
+          </a:effectRef>
+          <a:fontRef idx="minor">
+            <a:schemeClr val="tx1"/>
+          </a:fontRef>
+        </p:style>
+      </p:cxnSp>
+      <p:cxnSp>
+        <p:nvCxnSpPr>
+          <p:cNvPr id="335" name="直接连接符 334">
+            <a:extLst>
+              <a:ext uri="{FF2B5EF4-FFF2-40B4-BE49-F238E27FC236}">
+                <a16:creationId xmlns:a16="http://schemas.microsoft.com/office/drawing/2014/main" id="{1DBE3D74-21D6-4D01-8877-F2B817CDB8DE}"/>
+              </a:ext>
+            </a:extLst>
+          </p:cNvPr>
+          <p:cNvCxnSpPr>
+            <a:cxnSpLocks noChangeAspect="1"/>
+            <a:stCxn id="175" idx="6"/>
+            <a:endCxn id="188" idx="2"/>
+          </p:cNvCxnSpPr>
+          <p:nvPr/>
+        </p:nvCxnSpPr>
+        <p:spPr>
+          <a:xfrm>
+            <a:off x="3637352" y="1563221"/>
+            <a:ext cx="1308923" cy="766160"/>
+          </a:xfrm>
+          <a:prstGeom prst="line">
+            <a:avLst/>
+          </a:prstGeom>
+          <a:ln w="19050">
+            <a:solidFill>
+              <a:schemeClr val="tx1"/>
+            </a:solidFill>
+          </a:ln>
+        </p:spPr>
+        <p:style>
+          <a:lnRef idx="3">
+            <a:schemeClr val="dk1"/>
+          </a:lnRef>
+          <a:fillRef idx="0">
+            <a:schemeClr val="dk1"/>
+          </a:fillRef>
+          <a:effectRef idx="2">
+            <a:schemeClr val="dk1"/>
+          </a:effectRef>
+          <a:fontRef idx="minor">
+            <a:schemeClr val="tx1"/>
+          </a:fontRef>
+        </p:style>
+      </p:cxnSp>
+      <p:cxnSp>
+        <p:nvCxnSpPr>
+          <p:cNvPr id="338" name="直接连接符 337">
+            <a:extLst>
+              <a:ext uri="{FF2B5EF4-FFF2-40B4-BE49-F238E27FC236}">
+                <a16:creationId xmlns:a16="http://schemas.microsoft.com/office/drawing/2014/main" id="{1DBE3D74-21D6-4D01-8877-F2B817CDB8DE}"/>
+              </a:ext>
+            </a:extLst>
+          </p:cNvPr>
+          <p:cNvCxnSpPr>
+            <a:cxnSpLocks noChangeAspect="1"/>
+            <a:stCxn id="175" idx="6"/>
+            <a:endCxn id="189" idx="2"/>
+          </p:cNvCxnSpPr>
+          <p:nvPr/>
+        </p:nvCxnSpPr>
+        <p:spPr>
+          <a:xfrm>
+            <a:off x="3637352" y="1563221"/>
+            <a:ext cx="1294215" cy="2134679"/>
+          </a:xfrm>
+          <a:prstGeom prst="line">
+            <a:avLst/>
+          </a:prstGeom>
+          <a:ln w="19050">
+            <a:solidFill>
+              <a:schemeClr val="tx1"/>
+            </a:solidFill>
+          </a:ln>
+        </p:spPr>
+        <p:style>
+          <a:lnRef idx="3">
+            <a:schemeClr val="dk1"/>
+          </a:lnRef>
+          <a:fillRef idx="0">
+            <a:schemeClr val="dk1"/>
+          </a:fillRef>
+          <a:effectRef idx="2">
+            <a:schemeClr val="dk1"/>
+          </a:effectRef>
+          <a:fontRef idx="minor">
+            <a:schemeClr val="tx1"/>
+          </a:fontRef>
+        </p:style>
+      </p:cxnSp>
+      <p:cxnSp>
+        <p:nvCxnSpPr>
+          <p:cNvPr id="341" name="直接连接符 340">
+            <a:extLst>
+              <a:ext uri="{FF2B5EF4-FFF2-40B4-BE49-F238E27FC236}">
+                <a16:creationId xmlns:a16="http://schemas.microsoft.com/office/drawing/2014/main" id="{1DBE3D74-21D6-4D01-8877-F2B817CDB8DE}"/>
+              </a:ext>
+            </a:extLst>
+          </p:cNvPr>
+          <p:cNvCxnSpPr>
+            <a:cxnSpLocks noChangeAspect="1"/>
+            <a:stCxn id="175" idx="6"/>
+            <a:endCxn id="187" idx="2"/>
+          </p:cNvCxnSpPr>
+          <p:nvPr/>
+        </p:nvCxnSpPr>
+        <p:spPr>
+          <a:xfrm>
+            <a:off x="3637352" y="1563221"/>
+            <a:ext cx="1315136" cy="2830604"/>
+          </a:xfrm>
+          <a:prstGeom prst="line">
+            <a:avLst/>
+          </a:prstGeom>
+          <a:ln w="19050">
+            <a:solidFill>
+              <a:schemeClr val="tx1"/>
+            </a:solidFill>
+          </a:ln>
+        </p:spPr>
+        <p:style>
+          <a:lnRef idx="3">
+            <a:schemeClr val="dk1"/>
+          </a:lnRef>
+          <a:fillRef idx="0">
+            <a:schemeClr val="dk1"/>
+          </a:fillRef>
+          <a:effectRef idx="2">
+            <a:schemeClr val="dk1"/>
+          </a:effectRef>
+          <a:fontRef idx="minor">
+            <a:schemeClr val="tx1"/>
+          </a:fontRef>
+        </p:style>
+      </p:cxnSp>
+      <p:cxnSp>
+        <p:nvCxnSpPr>
+          <p:cNvPr id="344" name="直接连接符 343">
+            <a:extLst>
+              <a:ext uri="{FF2B5EF4-FFF2-40B4-BE49-F238E27FC236}">
+                <a16:creationId xmlns:a16="http://schemas.microsoft.com/office/drawing/2014/main" id="{1DBE3D74-21D6-4D01-8877-F2B817CDB8DE}"/>
+              </a:ext>
+            </a:extLst>
+          </p:cNvPr>
+          <p:cNvCxnSpPr>
+            <a:cxnSpLocks noChangeAspect="1"/>
+            <a:stCxn id="175" idx="6"/>
+            <a:endCxn id="187" idx="2"/>
+          </p:cNvCxnSpPr>
+          <p:nvPr/>
+        </p:nvCxnSpPr>
+        <p:spPr>
+          <a:xfrm>
+            <a:off x="3637352" y="1563221"/>
+            <a:ext cx="1315136" cy="2830604"/>
+          </a:xfrm>
+          <a:prstGeom prst="line">
+            <a:avLst/>
+          </a:prstGeom>
+          <a:ln w="19050">
+            <a:solidFill>
+              <a:schemeClr val="tx1"/>
+            </a:solidFill>
+          </a:ln>
+        </p:spPr>
+        <p:style>
+          <a:lnRef idx="3">
+            <a:schemeClr val="dk1"/>
+          </a:lnRef>
+          <a:fillRef idx="0">
+            <a:schemeClr val="dk1"/>
+          </a:fillRef>
+          <a:effectRef idx="2">
+            <a:schemeClr val="dk1"/>
+          </a:effectRef>
+          <a:fontRef idx="minor">
+            <a:schemeClr val="tx1"/>
+          </a:fontRef>
+        </p:style>
+      </p:cxnSp>
+      <p:cxnSp>
+        <p:nvCxnSpPr>
+          <p:cNvPr id="348" name="直接连接符 347">
+            <a:extLst>
+              <a:ext uri="{FF2B5EF4-FFF2-40B4-BE49-F238E27FC236}">
+                <a16:creationId xmlns:a16="http://schemas.microsoft.com/office/drawing/2014/main" id="{1DBE3D74-21D6-4D01-8877-F2B817CDB8DE}"/>
+              </a:ext>
+            </a:extLst>
+          </p:cNvPr>
+          <p:cNvCxnSpPr>
+            <a:cxnSpLocks noChangeAspect="1"/>
+            <a:stCxn id="175" idx="6"/>
+            <a:endCxn id="184" idx="2"/>
+          </p:cNvCxnSpPr>
+          <p:nvPr/>
+        </p:nvCxnSpPr>
+        <p:spPr>
+          <a:xfrm>
+            <a:off x="3637352" y="1563221"/>
+            <a:ext cx="1307997" cy="3528026"/>
+          </a:xfrm>
+          <a:prstGeom prst="line">
+            <a:avLst/>
+          </a:prstGeom>
+          <a:ln w="19050">
+            <a:solidFill>
+              <a:schemeClr val="tx1"/>
+            </a:solidFill>
+          </a:ln>
+        </p:spPr>
+        <p:style>
+          <a:lnRef idx="3">
+            <a:schemeClr val="dk1"/>
+          </a:lnRef>
+          <a:fillRef idx="0">
+            <a:schemeClr val="dk1"/>
+          </a:fillRef>
+          <a:effectRef idx="2">
+            <a:schemeClr val="dk1"/>
+          </a:effectRef>
+          <a:fontRef idx="minor">
+            <a:schemeClr val="tx1"/>
+          </a:fontRef>
+        </p:style>
+      </p:cxnSp>
+      <p:cxnSp>
+        <p:nvCxnSpPr>
+          <p:cNvPr id="351" name="直接连接符 350">
+            <a:extLst>
+              <a:ext uri="{FF2B5EF4-FFF2-40B4-BE49-F238E27FC236}">
+                <a16:creationId xmlns:a16="http://schemas.microsoft.com/office/drawing/2014/main" id="{1DBE3D74-21D6-4D01-8877-F2B817CDB8DE}"/>
+              </a:ext>
+            </a:extLst>
+          </p:cNvPr>
+          <p:cNvCxnSpPr>
+            <a:cxnSpLocks noChangeAspect="1"/>
+            <a:stCxn id="175" idx="6"/>
+            <a:endCxn id="183" idx="2"/>
+          </p:cNvCxnSpPr>
+          <p:nvPr/>
+        </p:nvCxnSpPr>
+        <p:spPr>
+          <a:xfrm>
+            <a:off x="3637352" y="1563221"/>
+            <a:ext cx="1294214" cy="4225448"/>
+          </a:xfrm>
+          <a:prstGeom prst="line">
+            <a:avLst/>
+          </a:prstGeom>
+          <a:ln w="19050">
+            <a:solidFill>
+              <a:schemeClr val="tx1"/>
+            </a:solidFill>
+          </a:ln>
+        </p:spPr>
+        <p:style>
+          <a:lnRef idx="3">
+            <a:schemeClr val="dk1"/>
+          </a:lnRef>
+          <a:fillRef idx="0">
+            <a:schemeClr val="dk1"/>
+          </a:fillRef>
+          <a:effectRef idx="2">
+            <a:schemeClr val="dk1"/>
+          </a:effectRef>
+          <a:fontRef idx="minor">
+            <a:schemeClr val="tx1"/>
+          </a:fontRef>
+        </p:style>
+      </p:cxnSp>
+      <p:cxnSp>
+        <p:nvCxnSpPr>
+          <p:cNvPr id="354" name="直接连接符 353">
+            <a:extLst>
+              <a:ext uri="{FF2B5EF4-FFF2-40B4-BE49-F238E27FC236}">
+                <a16:creationId xmlns:a16="http://schemas.microsoft.com/office/drawing/2014/main" id="{1DBE3D74-21D6-4D01-8877-F2B817CDB8DE}"/>
+              </a:ext>
+            </a:extLst>
+          </p:cNvPr>
+          <p:cNvCxnSpPr>
+            <a:cxnSpLocks noChangeAspect="1"/>
+            <a:stCxn id="179" idx="6"/>
+            <a:endCxn id="181" idx="2"/>
+          </p:cNvCxnSpPr>
+          <p:nvPr/>
+        </p:nvCxnSpPr>
+        <p:spPr>
+          <a:xfrm flipV="1">
+            <a:off x="3633093" y="239902"/>
+            <a:ext cx="1312792" cy="2092945"/>
+          </a:xfrm>
+          <a:prstGeom prst="line">
+            <a:avLst/>
+          </a:prstGeom>
+          <a:ln w="19050">
+            <a:solidFill>
+              <a:schemeClr val="tx1"/>
+            </a:solidFill>
+          </a:ln>
+        </p:spPr>
+        <p:style>
+          <a:lnRef idx="3">
+            <a:schemeClr val="dk1"/>
+          </a:lnRef>
+          <a:fillRef idx="0">
+            <a:schemeClr val="dk1"/>
+          </a:fillRef>
+          <a:effectRef idx="2">
+            <a:schemeClr val="dk1"/>
+          </a:effectRef>
+          <a:fontRef idx="minor">
+            <a:schemeClr val="tx1"/>
+          </a:fontRef>
+        </p:style>
+      </p:cxnSp>
+      <p:cxnSp>
+        <p:nvCxnSpPr>
+          <p:cNvPr id="357" name="直接连接符 356">
+            <a:extLst>
+              <a:ext uri="{FF2B5EF4-FFF2-40B4-BE49-F238E27FC236}">
+                <a16:creationId xmlns:a16="http://schemas.microsoft.com/office/drawing/2014/main" id="{1DBE3D74-21D6-4D01-8877-F2B817CDB8DE}"/>
+              </a:ext>
+            </a:extLst>
+          </p:cNvPr>
+          <p:cNvCxnSpPr>
+            <a:cxnSpLocks noChangeAspect="1"/>
+            <a:stCxn id="179" idx="6"/>
+            <a:endCxn id="182" idx="2"/>
+          </p:cNvCxnSpPr>
+          <p:nvPr/>
+        </p:nvCxnSpPr>
+        <p:spPr>
+          <a:xfrm flipV="1">
+            <a:off x="3633093" y="939607"/>
+            <a:ext cx="1315030" cy="1393240"/>
+          </a:xfrm>
+          <a:prstGeom prst="line">
+            <a:avLst/>
+          </a:prstGeom>
+          <a:ln w="19050">
+            <a:solidFill>
+              <a:schemeClr val="tx1"/>
+            </a:solidFill>
+          </a:ln>
+        </p:spPr>
+        <p:style>
+          <a:lnRef idx="3">
+            <a:schemeClr val="dk1"/>
+          </a:lnRef>
+          <a:fillRef idx="0">
+            <a:schemeClr val="dk1"/>
+          </a:fillRef>
+          <a:effectRef idx="2">
+            <a:schemeClr val="dk1"/>
+          </a:effectRef>
+          <a:fontRef idx="minor">
+            <a:schemeClr val="tx1"/>
+          </a:fontRef>
+        </p:style>
+      </p:cxnSp>
+      <p:cxnSp>
+        <p:nvCxnSpPr>
+          <p:cNvPr id="364" name="直接连接符 363">
+            <a:extLst>
+              <a:ext uri="{FF2B5EF4-FFF2-40B4-BE49-F238E27FC236}">
+                <a16:creationId xmlns:a16="http://schemas.microsoft.com/office/drawing/2014/main" id="{1DBE3D74-21D6-4D01-8877-F2B817CDB8DE}"/>
+              </a:ext>
+            </a:extLst>
+          </p:cNvPr>
+          <p:cNvCxnSpPr>
+            <a:cxnSpLocks noChangeAspect="1"/>
+            <a:stCxn id="179" idx="6"/>
+            <a:endCxn id="186" idx="2"/>
+          </p:cNvCxnSpPr>
+          <p:nvPr/>
+        </p:nvCxnSpPr>
+        <p:spPr>
+          <a:xfrm flipV="1">
+            <a:off x="3633093" y="1631959"/>
+            <a:ext cx="1313181" cy="700888"/>
+          </a:xfrm>
+          <a:prstGeom prst="line">
+            <a:avLst/>
+          </a:prstGeom>
+          <a:ln w="19050">
+            <a:solidFill>
+              <a:schemeClr val="tx1"/>
+            </a:solidFill>
+          </a:ln>
+        </p:spPr>
+        <p:style>
+          <a:lnRef idx="3">
+            <a:schemeClr val="dk1"/>
+          </a:lnRef>
+          <a:fillRef idx="0">
+            <a:schemeClr val="dk1"/>
+          </a:fillRef>
+          <a:effectRef idx="2">
+            <a:schemeClr val="dk1"/>
+          </a:effectRef>
+          <a:fontRef idx="minor">
+            <a:schemeClr val="tx1"/>
+          </a:fontRef>
+        </p:style>
+      </p:cxnSp>
+      <p:cxnSp>
+        <p:nvCxnSpPr>
+          <p:cNvPr id="367" name="直接连接符 366">
+            <a:extLst>
+              <a:ext uri="{FF2B5EF4-FFF2-40B4-BE49-F238E27FC236}">
+                <a16:creationId xmlns:a16="http://schemas.microsoft.com/office/drawing/2014/main" id="{1DBE3D74-21D6-4D01-8877-F2B817CDB8DE}"/>
+              </a:ext>
+            </a:extLst>
+          </p:cNvPr>
+          <p:cNvCxnSpPr>
+            <a:cxnSpLocks noChangeAspect="1"/>
+            <a:stCxn id="179" idx="6"/>
+            <a:endCxn id="188" idx="2"/>
+          </p:cNvCxnSpPr>
+          <p:nvPr/>
+        </p:nvCxnSpPr>
+        <p:spPr>
+          <a:xfrm flipV="1">
+            <a:off x="3633093" y="2329381"/>
+            <a:ext cx="1313182" cy="3466"/>
+          </a:xfrm>
+          <a:prstGeom prst="line">
+            <a:avLst/>
+          </a:prstGeom>
+          <a:ln w="19050">
+            <a:solidFill>
+              <a:schemeClr val="tx1"/>
+            </a:solidFill>
+          </a:ln>
+        </p:spPr>
+        <p:style>
+          <a:lnRef idx="3">
+            <a:schemeClr val="dk1"/>
+          </a:lnRef>
+          <a:fillRef idx="0">
+            <a:schemeClr val="dk1"/>
+          </a:fillRef>
+          <a:effectRef idx="2">
+            <a:schemeClr val="dk1"/>
+          </a:effectRef>
+          <a:fontRef idx="minor">
+            <a:schemeClr val="tx1"/>
+          </a:fontRef>
+        </p:style>
+      </p:cxnSp>
+      <p:cxnSp>
+        <p:nvCxnSpPr>
+          <p:cNvPr id="370" name="直接连接符 369">
+            <a:extLst>
+              <a:ext uri="{FF2B5EF4-FFF2-40B4-BE49-F238E27FC236}">
+                <a16:creationId xmlns:a16="http://schemas.microsoft.com/office/drawing/2014/main" id="{1DBE3D74-21D6-4D01-8877-F2B817CDB8DE}"/>
+              </a:ext>
+            </a:extLst>
+          </p:cNvPr>
+          <p:cNvCxnSpPr>
+            <a:cxnSpLocks noChangeAspect="1"/>
+            <a:stCxn id="179" idx="6"/>
+            <a:endCxn id="189" idx="2"/>
+          </p:cNvCxnSpPr>
+          <p:nvPr/>
+        </p:nvCxnSpPr>
+        <p:spPr>
+          <a:xfrm>
+            <a:off x="3633093" y="2332847"/>
+            <a:ext cx="1298474" cy="1365053"/>
+          </a:xfrm>
+          <a:prstGeom prst="line">
+            <a:avLst/>
+          </a:prstGeom>
+          <a:ln w="19050">
+            <a:solidFill>
+              <a:schemeClr val="tx1"/>
+            </a:solidFill>
+          </a:ln>
+        </p:spPr>
+        <p:style>
+          <a:lnRef idx="3">
+            <a:schemeClr val="dk1"/>
+          </a:lnRef>
+          <a:fillRef idx="0">
+            <a:schemeClr val="dk1"/>
+          </a:fillRef>
+          <a:effectRef idx="2">
+            <a:schemeClr val="dk1"/>
+          </a:effectRef>
+          <a:fontRef idx="minor">
+            <a:schemeClr val="tx1"/>
+          </a:fontRef>
+        </p:style>
+      </p:cxnSp>
+      <p:cxnSp>
+        <p:nvCxnSpPr>
+          <p:cNvPr id="373" name="直接连接符 372">
+            <a:extLst>
+              <a:ext uri="{FF2B5EF4-FFF2-40B4-BE49-F238E27FC236}">
+                <a16:creationId xmlns:a16="http://schemas.microsoft.com/office/drawing/2014/main" id="{1DBE3D74-21D6-4D01-8877-F2B817CDB8DE}"/>
+              </a:ext>
+            </a:extLst>
+          </p:cNvPr>
+          <p:cNvCxnSpPr>
+            <a:cxnSpLocks noChangeAspect="1"/>
+            <a:stCxn id="179" idx="6"/>
+            <a:endCxn id="187" idx="2"/>
+          </p:cNvCxnSpPr>
+          <p:nvPr/>
+        </p:nvCxnSpPr>
+        <p:spPr>
+          <a:xfrm>
+            <a:off x="3633093" y="2332847"/>
+            <a:ext cx="1319395" cy="2060978"/>
+          </a:xfrm>
+          <a:prstGeom prst="line">
+            <a:avLst/>
+          </a:prstGeom>
+          <a:ln w="19050">
+            <a:solidFill>
+              <a:schemeClr val="tx1"/>
+            </a:solidFill>
+          </a:ln>
+        </p:spPr>
+        <p:style>
+          <a:lnRef idx="3">
+            <a:schemeClr val="dk1"/>
+          </a:lnRef>
+          <a:fillRef idx="0">
+            <a:schemeClr val="dk1"/>
+          </a:fillRef>
+          <a:effectRef idx="2">
+            <a:schemeClr val="dk1"/>
+          </a:effectRef>
+          <a:fontRef idx="minor">
+            <a:schemeClr val="tx1"/>
+          </a:fontRef>
+        </p:style>
+      </p:cxnSp>
+      <p:cxnSp>
+        <p:nvCxnSpPr>
+          <p:cNvPr id="376" name="直接连接符 375">
+            <a:extLst>
+              <a:ext uri="{FF2B5EF4-FFF2-40B4-BE49-F238E27FC236}">
+                <a16:creationId xmlns:a16="http://schemas.microsoft.com/office/drawing/2014/main" id="{1DBE3D74-21D6-4D01-8877-F2B817CDB8DE}"/>
+              </a:ext>
+            </a:extLst>
+          </p:cNvPr>
+          <p:cNvCxnSpPr>
+            <a:cxnSpLocks noChangeAspect="1"/>
+            <a:stCxn id="179" idx="6"/>
+            <a:endCxn id="184" idx="2"/>
+          </p:cNvCxnSpPr>
+          <p:nvPr/>
+        </p:nvCxnSpPr>
+        <p:spPr>
+          <a:xfrm>
+            <a:off x="3633093" y="2332847"/>
+            <a:ext cx="1312256" cy="2758400"/>
+          </a:xfrm>
+          <a:prstGeom prst="line">
+            <a:avLst/>
+          </a:prstGeom>
+          <a:ln w="19050">
+            <a:solidFill>
+              <a:schemeClr val="tx1"/>
+            </a:solidFill>
+          </a:ln>
+        </p:spPr>
+        <p:style>
+          <a:lnRef idx="3">
+            <a:schemeClr val="dk1"/>
+          </a:lnRef>
+          <a:fillRef idx="0">
+            <a:schemeClr val="dk1"/>
+          </a:fillRef>
+          <a:effectRef idx="2">
+            <a:schemeClr val="dk1"/>
+          </a:effectRef>
+          <a:fontRef idx="minor">
+            <a:schemeClr val="tx1"/>
+          </a:fontRef>
+        </p:style>
+      </p:cxnSp>
+      <p:cxnSp>
+        <p:nvCxnSpPr>
+          <p:cNvPr id="379" name="直接连接符 378">
+            <a:extLst>
+              <a:ext uri="{FF2B5EF4-FFF2-40B4-BE49-F238E27FC236}">
+                <a16:creationId xmlns:a16="http://schemas.microsoft.com/office/drawing/2014/main" id="{1DBE3D74-21D6-4D01-8877-F2B817CDB8DE}"/>
+              </a:ext>
+            </a:extLst>
+          </p:cNvPr>
+          <p:cNvCxnSpPr>
+            <a:cxnSpLocks noChangeAspect="1"/>
+            <a:stCxn id="179" idx="6"/>
+            <a:endCxn id="183" idx="2"/>
+          </p:cNvCxnSpPr>
+          <p:nvPr/>
+        </p:nvCxnSpPr>
+        <p:spPr>
+          <a:xfrm>
+            <a:off x="3633093" y="2332847"/>
+            <a:ext cx="1298473" cy="3455822"/>
+          </a:xfrm>
+          <a:prstGeom prst="line">
+            <a:avLst/>
+          </a:prstGeom>
+          <a:ln w="19050">
+            <a:solidFill>
+              <a:schemeClr val="tx1"/>
+            </a:solidFill>
+          </a:ln>
+        </p:spPr>
+        <p:style>
+          <a:lnRef idx="3">
+            <a:schemeClr val="dk1"/>
+          </a:lnRef>
+          <a:fillRef idx="0">
+            <a:schemeClr val="dk1"/>
+          </a:fillRef>
+          <a:effectRef idx="2">
+            <a:schemeClr val="dk1"/>
+          </a:effectRef>
+          <a:fontRef idx="minor">
+            <a:schemeClr val="tx1"/>
+          </a:fontRef>
+        </p:style>
+      </p:cxnSp>
+      <p:cxnSp>
+        <p:nvCxnSpPr>
+          <p:cNvPr id="382" name="直接连接符 381">
+            <a:extLst>
+              <a:ext uri="{FF2B5EF4-FFF2-40B4-BE49-F238E27FC236}">
+                <a16:creationId xmlns:a16="http://schemas.microsoft.com/office/drawing/2014/main" id="{1DBE3D74-21D6-4D01-8877-F2B817CDB8DE}"/>
+              </a:ext>
+            </a:extLst>
+          </p:cNvPr>
+          <p:cNvCxnSpPr>
+            <a:cxnSpLocks noChangeAspect="1"/>
+            <a:stCxn id="180" idx="6"/>
+            <a:endCxn id="189" idx="2"/>
+          </p:cNvCxnSpPr>
+          <p:nvPr/>
+        </p:nvCxnSpPr>
+        <p:spPr>
+          <a:xfrm>
+            <a:off x="3634924" y="3694434"/>
+            <a:ext cx="1296643" cy="3466"/>
+          </a:xfrm>
+          <a:prstGeom prst="line">
+            <a:avLst/>
+          </a:prstGeom>
+          <a:ln w="19050">
+            <a:solidFill>
+              <a:schemeClr val="tx1"/>
+            </a:solidFill>
+          </a:ln>
+        </p:spPr>
+        <p:style>
+          <a:lnRef idx="3">
+            <a:schemeClr val="dk1"/>
+          </a:lnRef>
+          <a:fillRef idx="0">
+            <a:schemeClr val="dk1"/>
+          </a:fillRef>
+          <a:effectRef idx="2">
+            <a:schemeClr val="dk1"/>
+          </a:effectRef>
+          <a:fontRef idx="minor">
+            <a:schemeClr val="tx1"/>
+          </a:fontRef>
+        </p:style>
+      </p:cxnSp>
+      <p:cxnSp>
+        <p:nvCxnSpPr>
+          <p:cNvPr id="386" name="直接连接符 385">
+            <a:extLst>
+              <a:ext uri="{FF2B5EF4-FFF2-40B4-BE49-F238E27FC236}">
+                <a16:creationId xmlns:a16="http://schemas.microsoft.com/office/drawing/2014/main" id="{1DBE3D74-21D6-4D01-8877-F2B817CDB8DE}"/>
+              </a:ext>
+            </a:extLst>
+          </p:cNvPr>
+          <p:cNvCxnSpPr>
+            <a:cxnSpLocks noChangeAspect="1"/>
+            <a:stCxn id="180" idx="6"/>
+            <a:endCxn id="187" idx="2"/>
+          </p:cNvCxnSpPr>
+          <p:nvPr/>
+        </p:nvCxnSpPr>
+        <p:spPr>
+          <a:xfrm>
+            <a:off x="3634924" y="3694434"/>
+            <a:ext cx="1317564" cy="699391"/>
+          </a:xfrm>
+          <a:prstGeom prst="line">
+            <a:avLst/>
+          </a:prstGeom>
+          <a:ln w="19050">
+            <a:solidFill>
+              <a:schemeClr val="tx1"/>
+            </a:solidFill>
+          </a:ln>
+        </p:spPr>
+        <p:style>
+          <a:lnRef idx="3">
+            <a:schemeClr val="dk1"/>
+          </a:lnRef>
+          <a:fillRef idx="0">
+            <a:schemeClr val="dk1"/>
+          </a:fillRef>
+          <a:effectRef idx="2">
+            <a:schemeClr val="dk1"/>
+          </a:effectRef>
+          <a:fontRef idx="minor">
+            <a:schemeClr val="tx1"/>
+          </a:fontRef>
+        </p:style>
+      </p:cxnSp>
+      <p:cxnSp>
+        <p:nvCxnSpPr>
+          <p:cNvPr id="389" name="直接连接符 388">
+            <a:extLst>
+              <a:ext uri="{FF2B5EF4-FFF2-40B4-BE49-F238E27FC236}">
+                <a16:creationId xmlns:a16="http://schemas.microsoft.com/office/drawing/2014/main" id="{1DBE3D74-21D6-4D01-8877-F2B817CDB8DE}"/>
+              </a:ext>
+            </a:extLst>
+          </p:cNvPr>
+          <p:cNvCxnSpPr>
+            <a:cxnSpLocks noChangeAspect="1"/>
+            <a:stCxn id="180" idx="6"/>
+            <a:endCxn id="184" idx="2"/>
+          </p:cNvCxnSpPr>
+          <p:nvPr/>
+        </p:nvCxnSpPr>
+        <p:spPr>
+          <a:xfrm>
+            <a:off x="3634924" y="3694434"/>
+            <a:ext cx="1310425" cy="1396813"/>
+          </a:xfrm>
+          <a:prstGeom prst="line">
+            <a:avLst/>
+          </a:prstGeom>
+          <a:ln w="19050">
+            <a:solidFill>
+              <a:schemeClr val="tx1"/>
+            </a:solidFill>
+          </a:ln>
+        </p:spPr>
+        <p:style>
+          <a:lnRef idx="3">
+            <a:schemeClr val="dk1"/>
+          </a:lnRef>
+          <a:fillRef idx="0">
+            <a:schemeClr val="dk1"/>
+          </a:fillRef>
+          <a:effectRef idx="2">
+            <a:schemeClr val="dk1"/>
+          </a:effectRef>
+          <a:fontRef idx="minor">
+            <a:schemeClr val="tx1"/>
+          </a:fontRef>
+        </p:style>
+      </p:cxnSp>
+      <p:cxnSp>
+        <p:nvCxnSpPr>
+          <p:cNvPr id="392" name="直接连接符 391">
+            <a:extLst>
+              <a:ext uri="{FF2B5EF4-FFF2-40B4-BE49-F238E27FC236}">
+                <a16:creationId xmlns:a16="http://schemas.microsoft.com/office/drawing/2014/main" id="{1DBE3D74-21D6-4D01-8877-F2B817CDB8DE}"/>
+              </a:ext>
+            </a:extLst>
+          </p:cNvPr>
+          <p:cNvCxnSpPr>
+            <a:cxnSpLocks noChangeAspect="1"/>
+            <a:stCxn id="180" idx="6"/>
+            <a:endCxn id="183" idx="2"/>
+          </p:cNvCxnSpPr>
+          <p:nvPr/>
+        </p:nvCxnSpPr>
+        <p:spPr>
+          <a:xfrm>
+            <a:off x="3634924" y="3694434"/>
+            <a:ext cx="1296642" cy="2094235"/>
+          </a:xfrm>
+          <a:prstGeom prst="line">
+            <a:avLst/>
+          </a:prstGeom>
+          <a:ln w="19050">
+            <a:solidFill>
+              <a:schemeClr val="tx1"/>
+            </a:solidFill>
+          </a:ln>
+        </p:spPr>
+        <p:style>
+          <a:lnRef idx="3">
+            <a:schemeClr val="dk1"/>
+          </a:lnRef>
+          <a:fillRef idx="0">
+            <a:schemeClr val="dk1"/>
+          </a:fillRef>
+          <a:effectRef idx="2">
+            <a:schemeClr val="dk1"/>
+          </a:effectRef>
+          <a:fontRef idx="minor">
+            <a:schemeClr val="tx1"/>
+          </a:fontRef>
+        </p:style>
+      </p:cxnSp>
+      <p:cxnSp>
+        <p:nvCxnSpPr>
+          <p:cNvPr id="395" name="直接连接符 394">
+            <a:extLst>
+              <a:ext uri="{FF2B5EF4-FFF2-40B4-BE49-F238E27FC236}">
+                <a16:creationId xmlns:a16="http://schemas.microsoft.com/office/drawing/2014/main" id="{1DBE3D74-21D6-4D01-8877-F2B817CDB8DE}"/>
+              </a:ext>
+            </a:extLst>
+          </p:cNvPr>
+          <p:cNvCxnSpPr>
+            <a:cxnSpLocks noChangeAspect="1"/>
+            <a:stCxn id="180" idx="6"/>
+            <a:endCxn id="181" idx="2"/>
+          </p:cNvCxnSpPr>
+          <p:nvPr/>
+        </p:nvCxnSpPr>
+        <p:spPr>
+          <a:xfrm flipV="1">
+            <a:off x="3634924" y="239902"/>
+            <a:ext cx="1310961" cy="3454532"/>
+          </a:xfrm>
+          <a:prstGeom prst="line">
+            <a:avLst/>
+          </a:prstGeom>
+          <a:ln w="19050">
+            <a:solidFill>
+              <a:schemeClr val="tx1"/>
+            </a:solidFill>
+          </a:ln>
+        </p:spPr>
+        <p:style>
+          <a:lnRef idx="3">
+            <a:schemeClr val="dk1"/>
+          </a:lnRef>
+          <a:fillRef idx="0">
+            <a:schemeClr val="dk1"/>
+          </a:fillRef>
+          <a:effectRef idx="2">
+            <a:schemeClr val="dk1"/>
+          </a:effectRef>
+          <a:fontRef idx="minor">
+            <a:schemeClr val="tx1"/>
+          </a:fontRef>
+        </p:style>
+      </p:cxnSp>
+      <p:cxnSp>
+        <p:nvCxnSpPr>
+          <p:cNvPr id="398" name="直接连接符 397">
+            <a:extLst>
+              <a:ext uri="{FF2B5EF4-FFF2-40B4-BE49-F238E27FC236}">
+                <a16:creationId xmlns:a16="http://schemas.microsoft.com/office/drawing/2014/main" id="{1DBE3D74-21D6-4D01-8877-F2B817CDB8DE}"/>
+              </a:ext>
+            </a:extLst>
+          </p:cNvPr>
+          <p:cNvCxnSpPr>
+            <a:cxnSpLocks noChangeAspect="1"/>
+            <a:stCxn id="180" idx="6"/>
+            <a:endCxn id="182" idx="2"/>
+          </p:cNvCxnSpPr>
+          <p:nvPr/>
+        </p:nvCxnSpPr>
+        <p:spPr>
+          <a:xfrm flipV="1">
+            <a:off x="3634924" y="939607"/>
+            <a:ext cx="1313199" cy="2754827"/>
+          </a:xfrm>
+          <a:prstGeom prst="line">
+            <a:avLst/>
+          </a:prstGeom>
+          <a:ln w="19050">
+            <a:solidFill>
+              <a:schemeClr val="tx1"/>
+            </a:solidFill>
+          </a:ln>
+        </p:spPr>
+        <p:style>
+          <a:lnRef idx="3">
+            <a:schemeClr val="dk1"/>
+          </a:lnRef>
+          <a:fillRef idx="0">
+            <a:schemeClr val="dk1"/>
+          </a:fillRef>
+          <a:effectRef idx="2">
+            <a:schemeClr val="dk1"/>
+          </a:effectRef>
+          <a:fontRef idx="minor">
+            <a:schemeClr val="tx1"/>
+          </a:fontRef>
+        </p:style>
+      </p:cxnSp>
+      <p:cxnSp>
+        <p:nvCxnSpPr>
+          <p:cNvPr id="401" name="直接连接符 400">
+            <a:extLst>
+              <a:ext uri="{FF2B5EF4-FFF2-40B4-BE49-F238E27FC236}">
+                <a16:creationId xmlns:a16="http://schemas.microsoft.com/office/drawing/2014/main" id="{1DBE3D74-21D6-4D01-8877-F2B817CDB8DE}"/>
+              </a:ext>
+            </a:extLst>
+          </p:cNvPr>
+          <p:cNvCxnSpPr>
+            <a:cxnSpLocks noChangeAspect="1"/>
+            <a:stCxn id="180" idx="6"/>
+            <a:endCxn id="186" idx="2"/>
+          </p:cNvCxnSpPr>
+          <p:nvPr/>
+        </p:nvCxnSpPr>
+        <p:spPr>
+          <a:xfrm flipV="1">
+            <a:off x="3634924" y="1631959"/>
+            <a:ext cx="1311350" cy="2062475"/>
+          </a:xfrm>
+          <a:prstGeom prst="line">
+            <a:avLst/>
+          </a:prstGeom>
+          <a:ln w="19050">
+            <a:solidFill>
+              <a:schemeClr val="tx1"/>
+            </a:solidFill>
+          </a:ln>
+        </p:spPr>
+        <p:style>
+          <a:lnRef idx="3">
+            <a:schemeClr val="dk1"/>
+          </a:lnRef>
+          <a:fillRef idx="0">
+            <a:schemeClr val="dk1"/>
+          </a:fillRef>
+          <a:effectRef idx="2">
+            <a:schemeClr val="dk1"/>
+          </a:effectRef>
+          <a:fontRef idx="minor">
+            <a:schemeClr val="tx1"/>
+          </a:fontRef>
+        </p:style>
+      </p:cxnSp>
+      <p:cxnSp>
+        <p:nvCxnSpPr>
+          <p:cNvPr id="404" name="直接连接符 403">
+            <a:extLst>
+              <a:ext uri="{FF2B5EF4-FFF2-40B4-BE49-F238E27FC236}">
+                <a16:creationId xmlns:a16="http://schemas.microsoft.com/office/drawing/2014/main" id="{1DBE3D74-21D6-4D01-8877-F2B817CDB8DE}"/>
+              </a:ext>
+            </a:extLst>
+          </p:cNvPr>
+          <p:cNvCxnSpPr>
+            <a:cxnSpLocks noChangeAspect="1"/>
+            <a:stCxn id="180" idx="6"/>
+            <a:endCxn id="188" idx="2"/>
+          </p:cNvCxnSpPr>
+          <p:nvPr/>
+        </p:nvCxnSpPr>
+        <p:spPr>
+          <a:xfrm flipV="1">
+            <a:off x="3634924" y="2329381"/>
+            <a:ext cx="1311351" cy="1365053"/>
+          </a:xfrm>
+          <a:prstGeom prst="line">
+            <a:avLst/>
+          </a:prstGeom>
+          <a:ln w="19050">
+            <a:solidFill>
+              <a:schemeClr val="tx1"/>
+            </a:solidFill>
+          </a:ln>
+        </p:spPr>
+        <p:style>
+          <a:lnRef idx="3">
+            <a:schemeClr val="dk1"/>
+          </a:lnRef>
+          <a:fillRef idx="0">
+            <a:schemeClr val="dk1"/>
+          </a:fillRef>
+          <a:effectRef idx="2">
+            <a:schemeClr val="dk1"/>
+          </a:effectRef>
+          <a:fontRef idx="minor">
+            <a:schemeClr val="tx1"/>
+          </a:fontRef>
+        </p:style>
+      </p:cxnSp>
+      <p:cxnSp>
+        <p:nvCxnSpPr>
+          <p:cNvPr id="407" name="直接连接符 406">
+            <a:extLst>
+              <a:ext uri="{FF2B5EF4-FFF2-40B4-BE49-F238E27FC236}">
+                <a16:creationId xmlns:a16="http://schemas.microsoft.com/office/drawing/2014/main" id="{1DBE3D74-21D6-4D01-8877-F2B817CDB8DE}"/>
+              </a:ext>
+            </a:extLst>
+          </p:cNvPr>
+          <p:cNvCxnSpPr>
+            <a:cxnSpLocks noChangeAspect="1"/>
+            <a:stCxn id="177" idx="6"/>
+            <a:endCxn id="181" idx="2"/>
+          </p:cNvCxnSpPr>
+          <p:nvPr/>
+        </p:nvCxnSpPr>
+        <p:spPr>
+          <a:xfrm flipV="1">
+            <a:off x="3635521" y="239902"/>
+            <a:ext cx="1310364" cy="4230062"/>
+          </a:xfrm>
+          <a:prstGeom prst="line">
+            <a:avLst/>
+          </a:prstGeom>
+          <a:ln w="19050">
+            <a:solidFill>
+              <a:schemeClr val="tx1"/>
+            </a:solidFill>
+          </a:ln>
+        </p:spPr>
+        <p:style>
+          <a:lnRef idx="3">
+            <a:schemeClr val="dk1"/>
+          </a:lnRef>
+          <a:fillRef idx="0">
+            <a:schemeClr val="dk1"/>
+          </a:fillRef>
+          <a:effectRef idx="2">
+            <a:schemeClr val="dk1"/>
+          </a:effectRef>
+          <a:fontRef idx="minor">
+            <a:schemeClr val="tx1"/>
+          </a:fontRef>
+        </p:style>
+      </p:cxnSp>
+      <p:cxnSp>
+        <p:nvCxnSpPr>
+          <p:cNvPr id="410" name="直接连接符 409">
+            <a:extLst>
+              <a:ext uri="{FF2B5EF4-FFF2-40B4-BE49-F238E27FC236}">
+                <a16:creationId xmlns:a16="http://schemas.microsoft.com/office/drawing/2014/main" id="{1DBE3D74-21D6-4D01-8877-F2B817CDB8DE}"/>
+              </a:ext>
+            </a:extLst>
+          </p:cNvPr>
+          <p:cNvCxnSpPr>
+            <a:cxnSpLocks noChangeAspect="1"/>
+            <a:stCxn id="177" idx="6"/>
+            <a:endCxn id="182" idx="2"/>
+          </p:cNvCxnSpPr>
+          <p:nvPr/>
+        </p:nvCxnSpPr>
+        <p:spPr>
+          <a:xfrm flipV="1">
+            <a:off x="3635521" y="939607"/>
+            <a:ext cx="1312602" cy="3530357"/>
+          </a:xfrm>
+          <a:prstGeom prst="line">
+            <a:avLst/>
+          </a:prstGeom>
+          <a:ln w="19050">
+            <a:solidFill>
+              <a:schemeClr val="tx1"/>
+            </a:solidFill>
+          </a:ln>
+        </p:spPr>
+        <p:style>
+          <a:lnRef idx="3">
+            <a:schemeClr val="dk1"/>
+          </a:lnRef>
+          <a:fillRef idx="0">
+            <a:schemeClr val="dk1"/>
+          </a:fillRef>
+          <a:effectRef idx="2">
+            <a:schemeClr val="dk1"/>
+          </a:effectRef>
+          <a:fontRef idx="minor">
+            <a:schemeClr val="tx1"/>
+          </a:fontRef>
+        </p:style>
+      </p:cxnSp>
+      <p:cxnSp>
+        <p:nvCxnSpPr>
+          <p:cNvPr id="413" name="直接连接符 412">
+            <a:extLst>
+              <a:ext uri="{FF2B5EF4-FFF2-40B4-BE49-F238E27FC236}">
+                <a16:creationId xmlns:a16="http://schemas.microsoft.com/office/drawing/2014/main" id="{1DBE3D74-21D6-4D01-8877-F2B817CDB8DE}"/>
+              </a:ext>
+            </a:extLst>
+          </p:cNvPr>
+          <p:cNvCxnSpPr>
+            <a:cxnSpLocks noChangeAspect="1"/>
+            <a:stCxn id="177" idx="6"/>
+            <a:endCxn id="186" idx="2"/>
+          </p:cNvCxnSpPr>
+          <p:nvPr/>
+        </p:nvCxnSpPr>
+        <p:spPr>
+          <a:xfrm flipV="1">
+            <a:off x="3635521" y="1631959"/>
+            <a:ext cx="1310753" cy="2838005"/>
+          </a:xfrm>
+          <a:prstGeom prst="line">
+            <a:avLst/>
+          </a:prstGeom>
+          <a:ln w="19050">
+            <a:solidFill>
+              <a:schemeClr val="tx1"/>
+            </a:solidFill>
+          </a:ln>
+        </p:spPr>
+        <p:style>
+          <a:lnRef idx="3">
+            <a:schemeClr val="dk1"/>
+          </a:lnRef>
+          <a:fillRef idx="0">
+            <a:schemeClr val="dk1"/>
+          </a:fillRef>
+          <a:effectRef idx="2">
+            <a:schemeClr val="dk1"/>
+          </a:effectRef>
+          <a:fontRef idx="minor">
+            <a:schemeClr val="tx1"/>
+          </a:fontRef>
+        </p:style>
+      </p:cxnSp>
+      <p:cxnSp>
+        <p:nvCxnSpPr>
+          <p:cNvPr id="416" name="直接连接符 415">
+            <a:extLst>
+              <a:ext uri="{FF2B5EF4-FFF2-40B4-BE49-F238E27FC236}">
+                <a16:creationId xmlns:a16="http://schemas.microsoft.com/office/drawing/2014/main" id="{1DBE3D74-21D6-4D01-8877-F2B817CDB8DE}"/>
+              </a:ext>
+            </a:extLst>
+          </p:cNvPr>
+          <p:cNvCxnSpPr>
+            <a:cxnSpLocks noChangeAspect="1"/>
+            <a:stCxn id="177" idx="6"/>
+            <a:endCxn id="188" idx="2"/>
+          </p:cNvCxnSpPr>
+          <p:nvPr/>
+        </p:nvCxnSpPr>
+        <p:spPr>
+          <a:xfrm flipV="1">
+            <a:off x="3635521" y="2329381"/>
+            <a:ext cx="1310754" cy="2140583"/>
+          </a:xfrm>
+          <a:prstGeom prst="line">
+            <a:avLst/>
+          </a:prstGeom>
+          <a:ln w="19050">
+            <a:solidFill>
+              <a:schemeClr val="tx1"/>
+            </a:solidFill>
+          </a:ln>
+        </p:spPr>
+        <p:style>
+          <a:lnRef idx="3">
+            <a:schemeClr val="dk1"/>
+          </a:lnRef>
+          <a:fillRef idx="0">
+            <a:schemeClr val="dk1"/>
+          </a:fillRef>
+          <a:effectRef idx="2">
+            <a:schemeClr val="dk1"/>
+          </a:effectRef>
+          <a:fontRef idx="minor">
+            <a:schemeClr val="tx1"/>
+          </a:fontRef>
+        </p:style>
+      </p:cxnSp>
+      <p:cxnSp>
+        <p:nvCxnSpPr>
+          <p:cNvPr id="419" name="直接连接符 418">
+            <a:extLst>
+              <a:ext uri="{FF2B5EF4-FFF2-40B4-BE49-F238E27FC236}">
+                <a16:creationId xmlns:a16="http://schemas.microsoft.com/office/drawing/2014/main" id="{1DBE3D74-21D6-4D01-8877-F2B817CDB8DE}"/>
+              </a:ext>
+            </a:extLst>
+          </p:cNvPr>
+          <p:cNvCxnSpPr>
+            <a:cxnSpLocks noChangeAspect="1"/>
+            <a:stCxn id="177" idx="6"/>
+            <a:endCxn id="189" idx="2"/>
+          </p:cNvCxnSpPr>
+          <p:nvPr/>
+        </p:nvCxnSpPr>
+        <p:spPr>
+          <a:xfrm flipV="1">
+            <a:off x="3635521" y="3697900"/>
+            <a:ext cx="1296046" cy="772064"/>
+          </a:xfrm>
+          <a:prstGeom prst="line">
+            <a:avLst/>
+          </a:prstGeom>
+          <a:ln w="19050">
+            <a:solidFill>
+              <a:schemeClr val="tx1"/>
+            </a:solidFill>
+          </a:ln>
+        </p:spPr>
+        <p:style>
+          <a:lnRef idx="3">
+            <a:schemeClr val="dk1"/>
+          </a:lnRef>
+          <a:fillRef idx="0">
+            <a:schemeClr val="dk1"/>
+          </a:fillRef>
+          <a:effectRef idx="2">
+            <a:schemeClr val="dk1"/>
+          </a:effectRef>
+          <a:fontRef idx="minor">
+            <a:schemeClr val="tx1"/>
+          </a:fontRef>
+        </p:style>
+      </p:cxnSp>
+      <p:cxnSp>
+        <p:nvCxnSpPr>
+          <p:cNvPr id="422" name="直接连接符 421">
+            <a:extLst>
+              <a:ext uri="{FF2B5EF4-FFF2-40B4-BE49-F238E27FC236}">
+                <a16:creationId xmlns:a16="http://schemas.microsoft.com/office/drawing/2014/main" id="{1DBE3D74-21D6-4D01-8877-F2B817CDB8DE}"/>
+              </a:ext>
+            </a:extLst>
+          </p:cNvPr>
+          <p:cNvCxnSpPr>
+            <a:cxnSpLocks noChangeAspect="1"/>
+            <a:stCxn id="177" idx="6"/>
+            <a:endCxn id="187" idx="2"/>
+          </p:cNvCxnSpPr>
+          <p:nvPr/>
+        </p:nvCxnSpPr>
+        <p:spPr>
+          <a:xfrm flipV="1">
+            <a:off x="3635521" y="4393825"/>
+            <a:ext cx="1316967" cy="76139"/>
+          </a:xfrm>
+          <a:prstGeom prst="line">
+            <a:avLst/>
+          </a:prstGeom>
+          <a:ln w="19050">
+            <a:solidFill>
+              <a:schemeClr val="tx1"/>
+            </a:solidFill>
+          </a:ln>
+        </p:spPr>
+        <p:style>
+          <a:lnRef idx="3">
+            <a:schemeClr val="dk1"/>
+          </a:lnRef>
+          <a:fillRef idx="0">
+            <a:schemeClr val="dk1"/>
+          </a:fillRef>
+          <a:effectRef idx="2">
+            <a:schemeClr val="dk1"/>
+          </a:effectRef>
+          <a:fontRef idx="minor">
+            <a:schemeClr val="tx1"/>
+          </a:fontRef>
+        </p:style>
+      </p:cxnSp>
+      <p:cxnSp>
+        <p:nvCxnSpPr>
+          <p:cNvPr id="425" name="直接连接符 424">
+            <a:extLst>
+              <a:ext uri="{FF2B5EF4-FFF2-40B4-BE49-F238E27FC236}">
+                <a16:creationId xmlns:a16="http://schemas.microsoft.com/office/drawing/2014/main" id="{1DBE3D74-21D6-4D01-8877-F2B817CDB8DE}"/>
+              </a:ext>
+            </a:extLst>
+          </p:cNvPr>
+          <p:cNvCxnSpPr>
+            <a:cxnSpLocks noChangeAspect="1"/>
+            <a:stCxn id="177" idx="6"/>
+            <a:endCxn id="184" idx="2"/>
+          </p:cNvCxnSpPr>
+          <p:nvPr/>
+        </p:nvCxnSpPr>
+        <p:spPr>
+          <a:xfrm>
+            <a:off x="3635521" y="4469964"/>
+            <a:ext cx="1309828" cy="621283"/>
+          </a:xfrm>
+          <a:prstGeom prst="line">
+            <a:avLst/>
+          </a:prstGeom>
+          <a:ln w="19050">
+            <a:solidFill>
+              <a:schemeClr val="tx1"/>
+            </a:solidFill>
+          </a:ln>
+        </p:spPr>
+        <p:style>
+          <a:lnRef idx="3">
+            <a:schemeClr val="dk1"/>
+          </a:lnRef>
+          <a:fillRef idx="0">
+            <a:schemeClr val="dk1"/>
+          </a:fillRef>
+          <a:effectRef idx="2">
+            <a:schemeClr val="dk1"/>
+          </a:effectRef>
+          <a:fontRef idx="minor">
+            <a:schemeClr val="tx1"/>
+          </a:fontRef>
+        </p:style>
+      </p:cxnSp>
+      <p:cxnSp>
+        <p:nvCxnSpPr>
+          <p:cNvPr id="428" name="直接连接符 427">
+            <a:extLst>
+              <a:ext uri="{FF2B5EF4-FFF2-40B4-BE49-F238E27FC236}">
+                <a16:creationId xmlns:a16="http://schemas.microsoft.com/office/drawing/2014/main" id="{1DBE3D74-21D6-4D01-8877-F2B817CDB8DE}"/>
+              </a:ext>
+            </a:extLst>
+          </p:cNvPr>
+          <p:cNvCxnSpPr>
+            <a:cxnSpLocks noChangeAspect="1"/>
+            <a:stCxn id="177" idx="6"/>
+            <a:endCxn id="183" idx="2"/>
+          </p:cNvCxnSpPr>
+          <p:nvPr/>
+        </p:nvCxnSpPr>
+        <p:spPr>
+          <a:xfrm>
+            <a:off x="3635521" y="4469964"/>
+            <a:ext cx="1296045" cy="1318705"/>
+          </a:xfrm>
+          <a:prstGeom prst="line">
+            <a:avLst/>
+          </a:prstGeom>
+          <a:ln w="19050">
+            <a:solidFill>
+              <a:schemeClr val="tx1"/>
+            </a:solidFill>
+          </a:ln>
+        </p:spPr>
+        <p:style>
+          <a:lnRef idx="3">
+            <a:schemeClr val="dk1"/>
+          </a:lnRef>
+          <a:fillRef idx="0">
+            <a:schemeClr val="dk1"/>
+          </a:fillRef>
+          <a:effectRef idx="2">
+            <a:schemeClr val="dk1"/>
+          </a:effectRef>
+          <a:fontRef idx="minor">
+            <a:schemeClr val="tx1"/>
+          </a:fontRef>
+        </p:style>
+      </p:cxnSp>
+      <p:cxnSp>
+        <p:nvCxnSpPr>
+          <p:cNvPr id="431" name="直接连接符 430">
+            <a:extLst>
+              <a:ext uri="{FF2B5EF4-FFF2-40B4-BE49-F238E27FC236}">
+                <a16:creationId xmlns:a16="http://schemas.microsoft.com/office/drawing/2014/main" id="{1DBE3D74-21D6-4D01-8877-F2B817CDB8DE}"/>
+              </a:ext>
+            </a:extLst>
+          </p:cNvPr>
+          <p:cNvCxnSpPr>
+            <a:cxnSpLocks noChangeAspect="1"/>
+            <a:stCxn id="176" idx="6"/>
+            <a:endCxn id="183" idx="2"/>
+          </p:cNvCxnSpPr>
+          <p:nvPr/>
+        </p:nvCxnSpPr>
+        <p:spPr>
+          <a:xfrm>
+            <a:off x="3628899" y="5243955"/>
+            <a:ext cx="1302667" cy="544714"/>
+          </a:xfrm>
+          <a:prstGeom prst="line">
+            <a:avLst/>
+          </a:prstGeom>
+          <a:ln w="19050">
+            <a:solidFill>
+              <a:schemeClr val="tx1"/>
+            </a:solidFill>
+          </a:ln>
+        </p:spPr>
+        <p:style>
+          <a:lnRef idx="3">
+            <a:schemeClr val="dk1"/>
+          </a:lnRef>
+          <a:fillRef idx="0">
+            <a:schemeClr val="dk1"/>
+          </a:fillRef>
+          <a:effectRef idx="2">
+            <a:schemeClr val="dk1"/>
+          </a:effectRef>
+          <a:fontRef idx="minor">
+            <a:schemeClr val="tx1"/>
+          </a:fontRef>
+        </p:style>
+      </p:cxnSp>
+      <p:cxnSp>
+        <p:nvCxnSpPr>
+          <p:cNvPr id="434" name="直接连接符 433">
+            <a:extLst>
+              <a:ext uri="{FF2B5EF4-FFF2-40B4-BE49-F238E27FC236}">
+                <a16:creationId xmlns:a16="http://schemas.microsoft.com/office/drawing/2014/main" id="{1DBE3D74-21D6-4D01-8877-F2B817CDB8DE}"/>
+              </a:ext>
+            </a:extLst>
+          </p:cNvPr>
+          <p:cNvCxnSpPr>
+            <a:cxnSpLocks noChangeAspect="1"/>
+            <a:stCxn id="176" idx="6"/>
+            <a:endCxn id="184" idx="2"/>
+          </p:cNvCxnSpPr>
+          <p:nvPr/>
+        </p:nvCxnSpPr>
+        <p:spPr>
+          <a:xfrm flipV="1">
+            <a:off x="3628899" y="5091247"/>
+            <a:ext cx="1316450" cy="152708"/>
+          </a:xfrm>
+          <a:prstGeom prst="line">
+            <a:avLst/>
+          </a:prstGeom>
+          <a:ln w="19050">
+            <a:solidFill>
+              <a:schemeClr val="tx1"/>
+            </a:solidFill>
+          </a:ln>
+        </p:spPr>
+        <p:style>
+          <a:lnRef idx="3">
+            <a:schemeClr val="dk1"/>
+          </a:lnRef>
+          <a:fillRef idx="0">
+            <a:schemeClr val="dk1"/>
+          </a:fillRef>
+          <a:effectRef idx="2">
+            <a:schemeClr val="dk1"/>
+          </a:effectRef>
+          <a:fontRef idx="minor">
+            <a:schemeClr val="tx1"/>
+          </a:fontRef>
+        </p:style>
+      </p:cxnSp>
+      <p:cxnSp>
+        <p:nvCxnSpPr>
+          <p:cNvPr id="437" name="直接连接符 436">
+            <a:extLst>
+              <a:ext uri="{FF2B5EF4-FFF2-40B4-BE49-F238E27FC236}">
+                <a16:creationId xmlns:a16="http://schemas.microsoft.com/office/drawing/2014/main" id="{1DBE3D74-21D6-4D01-8877-F2B817CDB8DE}"/>
+              </a:ext>
+            </a:extLst>
+          </p:cNvPr>
+          <p:cNvCxnSpPr>
+            <a:cxnSpLocks noChangeAspect="1"/>
+            <a:stCxn id="176" idx="6"/>
+            <a:endCxn id="187" idx="2"/>
+          </p:cNvCxnSpPr>
+          <p:nvPr/>
+        </p:nvCxnSpPr>
+        <p:spPr>
+          <a:xfrm flipV="1">
+            <a:off x="3628899" y="4393825"/>
+            <a:ext cx="1323589" cy="850130"/>
+          </a:xfrm>
+          <a:prstGeom prst="line">
+            <a:avLst/>
+          </a:prstGeom>
+          <a:ln w="19050">
+            <a:solidFill>
+              <a:schemeClr val="tx1"/>
+            </a:solidFill>
+          </a:ln>
+        </p:spPr>
+        <p:style>
+          <a:lnRef idx="3">
+            <a:schemeClr val="dk1"/>
+          </a:lnRef>
+          <a:fillRef idx="0">
+            <a:schemeClr val="dk1"/>
+          </a:fillRef>
+          <a:effectRef idx="2">
+            <a:schemeClr val="dk1"/>
+          </a:effectRef>
+          <a:fontRef idx="minor">
+            <a:schemeClr val="tx1"/>
+          </a:fontRef>
+        </p:style>
+      </p:cxnSp>
+      <p:cxnSp>
+        <p:nvCxnSpPr>
+          <p:cNvPr id="440" name="直接连接符 439">
+            <a:extLst>
+              <a:ext uri="{FF2B5EF4-FFF2-40B4-BE49-F238E27FC236}">
+                <a16:creationId xmlns:a16="http://schemas.microsoft.com/office/drawing/2014/main" id="{1DBE3D74-21D6-4D01-8877-F2B817CDB8DE}"/>
+              </a:ext>
+            </a:extLst>
+          </p:cNvPr>
+          <p:cNvCxnSpPr>
+            <a:cxnSpLocks noChangeAspect="1"/>
+            <a:stCxn id="176" idx="6"/>
+            <a:endCxn id="189" idx="2"/>
+          </p:cNvCxnSpPr>
+          <p:nvPr/>
+        </p:nvCxnSpPr>
+        <p:spPr>
+          <a:xfrm flipV="1">
+            <a:off x="3628899" y="3697900"/>
+            <a:ext cx="1302668" cy="1546055"/>
+          </a:xfrm>
+          <a:prstGeom prst="line">
+            <a:avLst/>
+          </a:prstGeom>
+          <a:ln w="19050">
+            <a:solidFill>
+              <a:schemeClr val="tx1"/>
+            </a:solidFill>
+          </a:ln>
+        </p:spPr>
+        <p:style>
+          <a:lnRef idx="3">
+            <a:schemeClr val="dk1"/>
+          </a:lnRef>
+          <a:fillRef idx="0">
+            <a:schemeClr val="dk1"/>
+          </a:fillRef>
+          <a:effectRef idx="2">
+            <a:schemeClr val="dk1"/>
+          </a:effectRef>
+          <a:fontRef idx="minor">
+            <a:schemeClr val="tx1"/>
+          </a:fontRef>
+        </p:style>
+      </p:cxnSp>
+      <p:cxnSp>
+        <p:nvCxnSpPr>
+          <p:cNvPr id="443" name="直接连接符 442">
+            <a:extLst>
+              <a:ext uri="{FF2B5EF4-FFF2-40B4-BE49-F238E27FC236}">
+                <a16:creationId xmlns:a16="http://schemas.microsoft.com/office/drawing/2014/main" id="{1DBE3D74-21D6-4D01-8877-F2B817CDB8DE}"/>
+              </a:ext>
+            </a:extLst>
+          </p:cNvPr>
+          <p:cNvCxnSpPr>
+            <a:cxnSpLocks noChangeAspect="1"/>
+            <a:stCxn id="176" idx="6"/>
+            <a:endCxn id="186" idx="2"/>
+          </p:cNvCxnSpPr>
+          <p:nvPr/>
+        </p:nvCxnSpPr>
+        <p:spPr>
+          <a:xfrm flipV="1">
+            <a:off x="3628899" y="1631959"/>
+            <a:ext cx="1317375" cy="3611996"/>
+          </a:xfrm>
+          <a:prstGeom prst="line">
+            <a:avLst/>
+          </a:prstGeom>
+          <a:ln w="19050">
+            <a:solidFill>
+              <a:schemeClr val="tx1"/>
+            </a:solidFill>
+          </a:ln>
+        </p:spPr>
+        <p:style>
+          <a:lnRef idx="3">
+            <a:schemeClr val="dk1"/>
+          </a:lnRef>
+          <a:fillRef idx="0">
+            <a:schemeClr val="dk1"/>
+          </a:fillRef>
+          <a:effectRef idx="2">
+            <a:schemeClr val="dk1"/>
+          </a:effectRef>
+          <a:fontRef idx="minor">
+            <a:schemeClr val="tx1"/>
+          </a:fontRef>
+        </p:style>
+      </p:cxnSp>
+      <p:cxnSp>
+        <p:nvCxnSpPr>
+          <p:cNvPr id="446" name="直接连接符 445">
+            <a:extLst>
+              <a:ext uri="{FF2B5EF4-FFF2-40B4-BE49-F238E27FC236}">
+                <a16:creationId xmlns:a16="http://schemas.microsoft.com/office/drawing/2014/main" id="{1DBE3D74-21D6-4D01-8877-F2B817CDB8DE}"/>
+              </a:ext>
+            </a:extLst>
+          </p:cNvPr>
+          <p:cNvCxnSpPr>
+            <a:cxnSpLocks noChangeAspect="1"/>
+            <a:stCxn id="176" idx="6"/>
+            <a:endCxn id="188" idx="2"/>
+          </p:cNvCxnSpPr>
+          <p:nvPr/>
+        </p:nvCxnSpPr>
+        <p:spPr>
+          <a:xfrm flipV="1">
+            <a:off x="3628899" y="2329381"/>
+            <a:ext cx="1317376" cy="2914574"/>
+          </a:xfrm>
+          <a:prstGeom prst="line">
+            <a:avLst/>
+          </a:prstGeom>
+          <a:ln w="19050">
+            <a:solidFill>
+              <a:schemeClr val="tx1"/>
+            </a:solidFill>
+          </a:ln>
+        </p:spPr>
+        <p:style>
+          <a:lnRef idx="3">
+            <a:schemeClr val="dk1"/>
+          </a:lnRef>
+          <a:fillRef idx="0">
+            <a:schemeClr val="dk1"/>
+          </a:fillRef>
+          <a:effectRef idx="2">
+            <a:schemeClr val="dk1"/>
+          </a:effectRef>
+          <a:fontRef idx="minor">
+            <a:schemeClr val="tx1"/>
+          </a:fontRef>
+        </p:style>
+      </p:cxnSp>
+      <p:cxnSp>
+        <p:nvCxnSpPr>
+          <p:cNvPr id="453" name="直接连接符 452">
+            <a:extLst>
+              <a:ext uri="{FF2B5EF4-FFF2-40B4-BE49-F238E27FC236}">
+                <a16:creationId xmlns:a16="http://schemas.microsoft.com/office/drawing/2014/main" id="{1DBE3D74-21D6-4D01-8877-F2B817CDB8DE}"/>
+              </a:ext>
+            </a:extLst>
+          </p:cNvPr>
+          <p:cNvCxnSpPr>
+            <a:cxnSpLocks noChangeAspect="1"/>
+            <a:stCxn id="176" idx="6"/>
+            <a:endCxn id="182" idx="2"/>
+          </p:cNvCxnSpPr>
+          <p:nvPr/>
+        </p:nvCxnSpPr>
+        <p:spPr>
+          <a:xfrm flipV="1">
+            <a:off x="3628899" y="939607"/>
+            <a:ext cx="1319224" cy="4304348"/>
+          </a:xfrm>
+          <a:prstGeom prst="line">
+            <a:avLst/>
+          </a:prstGeom>
+          <a:ln w="19050">
+            <a:solidFill>
+              <a:schemeClr val="tx1"/>
+            </a:solidFill>
+          </a:ln>
+        </p:spPr>
+        <p:style>
+          <a:lnRef idx="3">
+            <a:schemeClr val="dk1"/>
+          </a:lnRef>
+          <a:fillRef idx="0">
+            <a:schemeClr val="dk1"/>
+          </a:fillRef>
+          <a:effectRef idx="2">
+            <a:schemeClr val="dk1"/>
+          </a:effectRef>
+          <a:fontRef idx="minor">
+            <a:schemeClr val="tx1"/>
+          </a:fontRef>
+        </p:style>
+      </p:cxnSp>
+      <p:cxnSp>
+        <p:nvCxnSpPr>
+          <p:cNvPr id="456" name="直接连接符 455">
+            <a:extLst>
+              <a:ext uri="{FF2B5EF4-FFF2-40B4-BE49-F238E27FC236}">
+                <a16:creationId xmlns:a16="http://schemas.microsoft.com/office/drawing/2014/main" id="{1DBE3D74-21D6-4D01-8877-F2B817CDB8DE}"/>
+              </a:ext>
+            </a:extLst>
+          </p:cNvPr>
+          <p:cNvCxnSpPr>
+            <a:cxnSpLocks noChangeAspect="1"/>
+            <a:stCxn id="176" idx="6"/>
+            <a:endCxn id="181" idx="2"/>
+          </p:cNvCxnSpPr>
+          <p:nvPr/>
+        </p:nvCxnSpPr>
+        <p:spPr>
+          <a:xfrm flipV="1">
+            <a:off x="3628899" y="239902"/>
+            <a:ext cx="1316986" cy="5004053"/>
+          </a:xfrm>
+          <a:prstGeom prst="line">
+            <a:avLst/>
+          </a:prstGeom>
+          <a:ln w="19050">
+            <a:solidFill>
+              <a:schemeClr val="tx1"/>
+            </a:solidFill>
+          </a:ln>
+        </p:spPr>
+        <p:style>
+          <a:lnRef idx="3">
+            <a:schemeClr val="dk1"/>
+          </a:lnRef>
+          <a:fillRef idx="0">
+            <a:schemeClr val="dk1"/>
+          </a:fillRef>
+          <a:effectRef idx="2">
+            <a:schemeClr val="dk1"/>
+          </a:effectRef>
+          <a:fontRef idx="minor">
+            <a:schemeClr val="tx1"/>
+          </a:fontRef>
+        </p:style>
+      </p:cxnSp>
+      <p:cxnSp>
+        <p:nvCxnSpPr>
+          <p:cNvPr id="459" name="直接连接符 458">
+            <a:extLst>
+              <a:ext uri="{FF2B5EF4-FFF2-40B4-BE49-F238E27FC236}">
+                <a16:creationId xmlns:a16="http://schemas.microsoft.com/office/drawing/2014/main" id="{1DBE3D74-21D6-4D01-8877-F2B817CDB8DE}"/>
+              </a:ext>
+            </a:extLst>
+          </p:cNvPr>
+          <p:cNvCxnSpPr>
+            <a:cxnSpLocks noChangeAspect="1"/>
+            <a:stCxn id="181" idx="6"/>
+            <a:endCxn id="191" idx="2"/>
+          </p:cNvCxnSpPr>
+          <p:nvPr/>
+        </p:nvCxnSpPr>
+        <p:spPr>
+          <a:xfrm>
+            <a:off x="5399194" y="239902"/>
+            <a:ext cx="1437217" cy="0"/>
+          </a:xfrm>
+          <a:prstGeom prst="line">
+            <a:avLst/>
+          </a:prstGeom>
+          <a:ln w="19050">
+            <a:solidFill>
+              <a:schemeClr val="tx1"/>
+            </a:solidFill>
+          </a:ln>
+        </p:spPr>
+        <p:style>
+          <a:lnRef idx="3">
+            <a:schemeClr val="dk1"/>
+          </a:lnRef>
+          <a:fillRef idx="0">
+            <a:schemeClr val="dk1"/>
+          </a:fillRef>
+          <a:effectRef idx="2">
+            <a:schemeClr val="dk1"/>
+          </a:effectRef>
+          <a:fontRef idx="minor">
+            <a:schemeClr val="tx1"/>
+          </a:fontRef>
+        </p:style>
+      </p:cxnSp>
+      <p:cxnSp>
+        <p:nvCxnSpPr>
+          <p:cNvPr id="462" name="直接连接符 461">
+            <a:extLst>
+              <a:ext uri="{FF2B5EF4-FFF2-40B4-BE49-F238E27FC236}">
+                <a16:creationId xmlns:a16="http://schemas.microsoft.com/office/drawing/2014/main" id="{1DBE3D74-21D6-4D01-8877-F2B817CDB8DE}"/>
+              </a:ext>
+            </a:extLst>
+          </p:cNvPr>
+          <p:cNvCxnSpPr>
+            <a:cxnSpLocks noChangeAspect="1"/>
+            <a:stCxn id="181" idx="6"/>
+            <a:endCxn id="192" idx="2"/>
+          </p:cNvCxnSpPr>
+          <p:nvPr/>
+        </p:nvCxnSpPr>
+        <p:spPr>
+          <a:xfrm>
+            <a:off x="5399194" y="239902"/>
+            <a:ext cx="1437216" cy="699705"/>
+          </a:xfrm>
+          <a:prstGeom prst="line">
+            <a:avLst/>
+          </a:prstGeom>
+          <a:ln w="19050">
+            <a:solidFill>
+              <a:schemeClr val="tx1"/>
+            </a:solidFill>
+          </a:ln>
+        </p:spPr>
+        <p:style>
+          <a:lnRef idx="3">
+            <a:schemeClr val="dk1"/>
+          </a:lnRef>
+          <a:fillRef idx="0">
+            <a:schemeClr val="dk1"/>
+          </a:fillRef>
+          <a:effectRef idx="2">
+            <a:schemeClr val="dk1"/>
+          </a:effectRef>
+          <a:fontRef idx="minor">
+            <a:schemeClr val="tx1"/>
+          </a:fontRef>
+        </p:style>
+      </p:cxnSp>
+      <p:cxnSp>
+        <p:nvCxnSpPr>
+          <p:cNvPr id="465" name="直接连接符 464">
+            <a:extLst>
+              <a:ext uri="{FF2B5EF4-FFF2-40B4-BE49-F238E27FC236}">
+                <a16:creationId xmlns:a16="http://schemas.microsoft.com/office/drawing/2014/main" id="{1DBE3D74-21D6-4D01-8877-F2B817CDB8DE}"/>
+              </a:ext>
+            </a:extLst>
+          </p:cNvPr>
+          <p:cNvCxnSpPr>
+            <a:cxnSpLocks noChangeAspect="1"/>
+            <a:stCxn id="181" idx="6"/>
+            <a:endCxn id="197" idx="2"/>
+          </p:cNvCxnSpPr>
+          <p:nvPr/>
+        </p:nvCxnSpPr>
+        <p:spPr>
+          <a:xfrm>
+            <a:off x="5399194" y="239902"/>
+            <a:ext cx="1435368" cy="1401154"/>
+          </a:xfrm>
+          <a:prstGeom prst="line">
+            <a:avLst/>
+          </a:prstGeom>
+          <a:ln w="19050">
+            <a:solidFill>
+              <a:schemeClr val="tx1"/>
+            </a:solidFill>
+          </a:ln>
+        </p:spPr>
+        <p:style>
+          <a:lnRef idx="3">
+            <a:schemeClr val="dk1"/>
+          </a:lnRef>
+          <a:fillRef idx="0">
+            <a:schemeClr val="dk1"/>
+          </a:fillRef>
+          <a:effectRef idx="2">
+            <a:schemeClr val="dk1"/>
+          </a:effectRef>
+          <a:fontRef idx="minor">
+            <a:schemeClr val="tx1"/>
+          </a:fontRef>
+        </p:style>
+      </p:cxnSp>
+      <p:cxnSp>
+        <p:nvCxnSpPr>
+          <p:cNvPr id="468" name="直接连接符 467">
+            <a:extLst>
+              <a:ext uri="{FF2B5EF4-FFF2-40B4-BE49-F238E27FC236}">
+                <a16:creationId xmlns:a16="http://schemas.microsoft.com/office/drawing/2014/main" id="{1DBE3D74-21D6-4D01-8877-F2B817CDB8DE}"/>
+              </a:ext>
+            </a:extLst>
+          </p:cNvPr>
+          <p:cNvCxnSpPr>
+            <a:cxnSpLocks noChangeAspect="1"/>
+            <a:stCxn id="181" idx="6"/>
+            <a:endCxn id="199" idx="2"/>
+          </p:cNvCxnSpPr>
+          <p:nvPr/>
+        </p:nvCxnSpPr>
+        <p:spPr>
+          <a:xfrm>
+            <a:off x="5399194" y="239902"/>
+            <a:ext cx="1434444" cy="2091212"/>
+          </a:xfrm>
+          <a:prstGeom prst="line">
+            <a:avLst/>
+          </a:prstGeom>
+          <a:ln w="19050">
+            <a:solidFill>
+              <a:schemeClr val="tx1"/>
+            </a:solidFill>
+          </a:ln>
+        </p:spPr>
+        <p:style>
+          <a:lnRef idx="3">
+            <a:schemeClr val="dk1"/>
+          </a:lnRef>
+          <a:fillRef idx="0">
+            <a:schemeClr val="dk1"/>
+          </a:fillRef>
+          <a:effectRef idx="2">
+            <a:schemeClr val="dk1"/>
+          </a:effectRef>
+          <a:fontRef idx="minor">
+            <a:schemeClr val="tx1"/>
+          </a:fontRef>
+        </p:style>
+      </p:cxnSp>
+      <p:cxnSp>
+        <p:nvCxnSpPr>
+          <p:cNvPr id="471" name="直接连接符 470">
+            <a:extLst>
+              <a:ext uri="{FF2B5EF4-FFF2-40B4-BE49-F238E27FC236}">
+                <a16:creationId xmlns:a16="http://schemas.microsoft.com/office/drawing/2014/main" id="{1DBE3D74-21D6-4D01-8877-F2B817CDB8DE}"/>
+              </a:ext>
+            </a:extLst>
+          </p:cNvPr>
+          <p:cNvCxnSpPr>
+            <a:cxnSpLocks noChangeAspect="1"/>
+            <a:stCxn id="181" idx="6"/>
+            <a:endCxn id="200" idx="2"/>
+          </p:cNvCxnSpPr>
+          <p:nvPr/>
+        </p:nvCxnSpPr>
+        <p:spPr>
+          <a:xfrm>
+            <a:off x="5399194" y="239902"/>
+            <a:ext cx="1434444" cy="3447267"/>
+          </a:xfrm>
+          <a:prstGeom prst="line">
+            <a:avLst/>
+          </a:prstGeom>
+          <a:ln w="19050">
+            <a:solidFill>
+              <a:schemeClr val="tx1"/>
+            </a:solidFill>
+          </a:ln>
+        </p:spPr>
+        <p:style>
+          <a:lnRef idx="3">
+            <a:schemeClr val="dk1"/>
+          </a:lnRef>
+          <a:fillRef idx="0">
+            <a:schemeClr val="dk1"/>
+          </a:fillRef>
+          <a:effectRef idx="2">
+            <a:schemeClr val="dk1"/>
+          </a:effectRef>
+          <a:fontRef idx="minor">
+            <a:schemeClr val="tx1"/>
+          </a:fontRef>
+        </p:style>
+      </p:cxnSp>
+      <p:cxnSp>
+        <p:nvCxnSpPr>
+          <p:cNvPr id="474" name="直接连接符 473">
+            <a:extLst>
+              <a:ext uri="{FF2B5EF4-FFF2-40B4-BE49-F238E27FC236}">
+                <a16:creationId xmlns:a16="http://schemas.microsoft.com/office/drawing/2014/main" id="{1DBE3D74-21D6-4D01-8877-F2B817CDB8DE}"/>
+              </a:ext>
+            </a:extLst>
+          </p:cNvPr>
+          <p:cNvCxnSpPr>
+            <a:cxnSpLocks noChangeAspect="1"/>
+            <a:stCxn id="181" idx="6"/>
+            <a:endCxn id="198" idx="2"/>
+          </p:cNvCxnSpPr>
+          <p:nvPr/>
+        </p:nvCxnSpPr>
+        <p:spPr>
+          <a:xfrm>
+            <a:off x="5399194" y="239902"/>
+            <a:ext cx="1440510" cy="4153750"/>
+          </a:xfrm>
+          <a:prstGeom prst="line">
+            <a:avLst/>
+          </a:prstGeom>
+          <a:ln w="19050">
+            <a:solidFill>
+              <a:schemeClr val="tx1"/>
+            </a:solidFill>
+          </a:ln>
+        </p:spPr>
+        <p:style>
+          <a:lnRef idx="3">
+            <a:schemeClr val="dk1"/>
+          </a:lnRef>
+          <a:fillRef idx="0">
+            <a:schemeClr val="dk1"/>
+          </a:fillRef>
+          <a:effectRef idx="2">
+            <a:schemeClr val="dk1"/>
+          </a:effectRef>
+          <a:fontRef idx="minor">
+            <a:schemeClr val="tx1"/>
+          </a:fontRef>
+        </p:style>
+      </p:cxnSp>
+      <p:cxnSp>
+        <p:nvCxnSpPr>
+          <p:cNvPr id="477" name="直接连接符 476">
+            <a:extLst>
+              <a:ext uri="{FF2B5EF4-FFF2-40B4-BE49-F238E27FC236}">
+                <a16:creationId xmlns:a16="http://schemas.microsoft.com/office/drawing/2014/main" id="{1DBE3D74-21D6-4D01-8877-F2B817CDB8DE}"/>
+              </a:ext>
+            </a:extLst>
+          </p:cNvPr>
+          <p:cNvCxnSpPr>
+            <a:cxnSpLocks noChangeAspect="1"/>
+            <a:stCxn id="181" idx="6"/>
+            <a:endCxn id="195" idx="2"/>
+          </p:cNvCxnSpPr>
+          <p:nvPr/>
+        </p:nvCxnSpPr>
+        <p:spPr>
+          <a:xfrm>
+            <a:off x="5399194" y="239902"/>
+            <a:ext cx="1446141" cy="4851172"/>
+          </a:xfrm>
+          <a:prstGeom prst="line">
+            <a:avLst/>
+          </a:prstGeom>
+          <a:ln w="19050">
+            <a:solidFill>
+              <a:schemeClr val="tx1"/>
+            </a:solidFill>
+          </a:ln>
+        </p:spPr>
+        <p:style>
+          <a:lnRef idx="3">
+            <a:schemeClr val="dk1"/>
+          </a:lnRef>
+          <a:fillRef idx="0">
+            <a:schemeClr val="dk1"/>
+          </a:fillRef>
+          <a:effectRef idx="2">
+            <a:schemeClr val="dk1"/>
+          </a:effectRef>
+          <a:fontRef idx="minor">
+            <a:schemeClr val="tx1"/>
+          </a:fontRef>
+        </p:style>
+      </p:cxnSp>
+      <p:cxnSp>
+        <p:nvCxnSpPr>
+          <p:cNvPr id="480" name="直接连接符 479">
+            <a:extLst>
+              <a:ext uri="{FF2B5EF4-FFF2-40B4-BE49-F238E27FC236}">
+                <a16:creationId xmlns:a16="http://schemas.microsoft.com/office/drawing/2014/main" id="{1DBE3D74-21D6-4D01-8877-F2B817CDB8DE}"/>
+              </a:ext>
+            </a:extLst>
+          </p:cNvPr>
+          <p:cNvCxnSpPr>
+            <a:cxnSpLocks noChangeAspect="1"/>
+            <a:stCxn id="181" idx="6"/>
+            <a:endCxn id="193" idx="2"/>
+          </p:cNvCxnSpPr>
+          <p:nvPr/>
+        </p:nvCxnSpPr>
+        <p:spPr>
+          <a:xfrm>
+            <a:off x="5399194" y="239902"/>
+            <a:ext cx="1452207" cy="5543760"/>
+          </a:xfrm>
+          <a:prstGeom prst="line">
+            <a:avLst/>
+          </a:prstGeom>
+          <a:ln w="19050">
+            <a:solidFill>
+              <a:schemeClr val="tx1"/>
+            </a:solidFill>
+          </a:ln>
+        </p:spPr>
+        <p:style>
+          <a:lnRef idx="3">
+            <a:schemeClr val="dk1"/>
+          </a:lnRef>
+          <a:fillRef idx="0">
+            <a:schemeClr val="dk1"/>
+          </a:fillRef>
+          <a:effectRef idx="2">
+            <a:schemeClr val="dk1"/>
+          </a:effectRef>
+          <a:fontRef idx="minor">
+            <a:schemeClr val="tx1"/>
+          </a:fontRef>
+        </p:style>
+      </p:cxnSp>
+      <p:cxnSp>
+        <p:nvCxnSpPr>
+          <p:cNvPr id="483" name="直接连接符 482">
+            <a:extLst>
+              <a:ext uri="{FF2B5EF4-FFF2-40B4-BE49-F238E27FC236}">
+                <a16:creationId xmlns:a16="http://schemas.microsoft.com/office/drawing/2014/main" id="{1DBE3D74-21D6-4D01-8877-F2B817CDB8DE}"/>
+              </a:ext>
+            </a:extLst>
+          </p:cNvPr>
+          <p:cNvCxnSpPr>
+            <a:cxnSpLocks noChangeAspect="1"/>
+            <a:stCxn id="182" idx="6"/>
+            <a:endCxn id="191" idx="2"/>
+          </p:cNvCxnSpPr>
+          <p:nvPr/>
+        </p:nvCxnSpPr>
+        <p:spPr>
+          <a:xfrm flipV="1">
+            <a:off x="5401432" y="239902"/>
+            <a:ext cx="1434979" cy="699705"/>
+          </a:xfrm>
+          <a:prstGeom prst="line">
+            <a:avLst/>
+          </a:prstGeom>
+          <a:ln w="19050">
+            <a:solidFill>
+              <a:schemeClr val="tx1"/>
+            </a:solidFill>
+          </a:ln>
+        </p:spPr>
+        <p:style>
+          <a:lnRef idx="3">
+            <a:schemeClr val="dk1"/>
+          </a:lnRef>
+          <a:fillRef idx="0">
+            <a:schemeClr val="dk1"/>
+          </a:fillRef>
+          <a:effectRef idx="2">
+            <a:schemeClr val="dk1"/>
+          </a:effectRef>
+          <a:fontRef idx="minor">
+            <a:schemeClr val="tx1"/>
+          </a:fontRef>
+        </p:style>
+      </p:cxnSp>
+      <p:cxnSp>
+        <p:nvCxnSpPr>
+          <p:cNvPr id="486" name="直接连接符 485">
+            <a:extLst>
+              <a:ext uri="{FF2B5EF4-FFF2-40B4-BE49-F238E27FC236}">
+                <a16:creationId xmlns:a16="http://schemas.microsoft.com/office/drawing/2014/main" id="{1DBE3D74-21D6-4D01-8877-F2B817CDB8DE}"/>
+              </a:ext>
+            </a:extLst>
+          </p:cNvPr>
+          <p:cNvCxnSpPr>
+            <a:cxnSpLocks noChangeAspect="1"/>
+            <a:stCxn id="182" idx="6"/>
+            <a:endCxn id="192" idx="2"/>
+          </p:cNvCxnSpPr>
+          <p:nvPr/>
+        </p:nvCxnSpPr>
+        <p:spPr>
+          <a:xfrm>
+            <a:off x="5401432" y="939607"/>
+            <a:ext cx="1434978" cy="0"/>
+          </a:xfrm>
+          <a:prstGeom prst="line">
+            <a:avLst/>
+          </a:prstGeom>
+          <a:ln w="19050">
+            <a:solidFill>
+              <a:schemeClr val="tx1"/>
+            </a:solidFill>
+          </a:ln>
+        </p:spPr>
+        <p:style>
+          <a:lnRef idx="3">
+            <a:schemeClr val="dk1"/>
+          </a:lnRef>
+          <a:fillRef idx="0">
+            <a:schemeClr val="dk1"/>
+          </a:fillRef>
+          <a:effectRef idx="2">
+            <a:schemeClr val="dk1"/>
+          </a:effectRef>
+          <a:fontRef idx="minor">
+            <a:schemeClr val="tx1"/>
+          </a:fontRef>
+        </p:style>
+      </p:cxnSp>
+      <p:cxnSp>
+        <p:nvCxnSpPr>
+          <p:cNvPr id="489" name="直接连接符 488">
+            <a:extLst>
+              <a:ext uri="{FF2B5EF4-FFF2-40B4-BE49-F238E27FC236}">
+                <a16:creationId xmlns:a16="http://schemas.microsoft.com/office/drawing/2014/main" id="{1DBE3D74-21D6-4D01-8877-F2B817CDB8DE}"/>
+              </a:ext>
+            </a:extLst>
+          </p:cNvPr>
+          <p:cNvCxnSpPr>
+            <a:cxnSpLocks noChangeAspect="1"/>
+            <a:stCxn id="182" idx="6"/>
+            <a:endCxn id="197" idx="2"/>
+          </p:cNvCxnSpPr>
+          <p:nvPr/>
+        </p:nvCxnSpPr>
+        <p:spPr>
+          <a:xfrm>
+            <a:off x="5401432" y="939607"/>
+            <a:ext cx="1433130" cy="701449"/>
+          </a:xfrm>
+          <a:prstGeom prst="line">
+            <a:avLst/>
+          </a:prstGeom>
+          <a:ln w="19050">
+            <a:solidFill>
+              <a:schemeClr val="tx1"/>
+            </a:solidFill>
+          </a:ln>
+        </p:spPr>
+        <p:style>
+          <a:lnRef idx="3">
+            <a:schemeClr val="dk1"/>
+          </a:lnRef>
+          <a:fillRef idx="0">
+            <a:schemeClr val="dk1"/>
+          </a:fillRef>
+          <a:effectRef idx="2">
+            <a:schemeClr val="dk1"/>
+          </a:effectRef>
+          <a:fontRef idx="minor">
+            <a:schemeClr val="tx1"/>
+          </a:fontRef>
+        </p:style>
+      </p:cxnSp>
+      <p:cxnSp>
+        <p:nvCxnSpPr>
+          <p:cNvPr id="492" name="直接连接符 491">
+            <a:extLst>
+              <a:ext uri="{FF2B5EF4-FFF2-40B4-BE49-F238E27FC236}">
+                <a16:creationId xmlns:a16="http://schemas.microsoft.com/office/drawing/2014/main" id="{1DBE3D74-21D6-4D01-8877-F2B817CDB8DE}"/>
+              </a:ext>
+            </a:extLst>
+          </p:cNvPr>
+          <p:cNvCxnSpPr>
+            <a:cxnSpLocks noChangeAspect="1"/>
+            <a:stCxn id="182" idx="6"/>
+            <a:endCxn id="199" idx="2"/>
+          </p:cNvCxnSpPr>
+          <p:nvPr/>
+        </p:nvCxnSpPr>
+        <p:spPr>
+          <a:xfrm>
+            <a:off x="5401432" y="939607"/>
+            <a:ext cx="1432206" cy="1391507"/>
+          </a:xfrm>
+          <a:prstGeom prst="line">
+            <a:avLst/>
+          </a:prstGeom>
+          <a:ln w="19050">
+            <a:solidFill>
+              <a:schemeClr val="tx1"/>
+            </a:solidFill>
+          </a:ln>
+        </p:spPr>
+        <p:style>
+          <a:lnRef idx="3">
+            <a:schemeClr val="dk1"/>
+          </a:lnRef>
+          <a:fillRef idx="0">
+            <a:schemeClr val="dk1"/>
+          </a:fillRef>
+          <a:effectRef idx="2">
+            <a:schemeClr val="dk1"/>
+          </a:effectRef>
+          <a:fontRef idx="minor">
+            <a:schemeClr val="tx1"/>
+          </a:fontRef>
+        </p:style>
+      </p:cxnSp>
+      <p:cxnSp>
+        <p:nvCxnSpPr>
+          <p:cNvPr id="495" name="直接连接符 494">
+            <a:extLst>
+              <a:ext uri="{FF2B5EF4-FFF2-40B4-BE49-F238E27FC236}">
+                <a16:creationId xmlns:a16="http://schemas.microsoft.com/office/drawing/2014/main" id="{1DBE3D74-21D6-4D01-8877-F2B817CDB8DE}"/>
+              </a:ext>
+            </a:extLst>
+          </p:cNvPr>
+          <p:cNvCxnSpPr>
+            <a:cxnSpLocks noChangeAspect="1"/>
+            <a:stCxn id="182" idx="6"/>
+            <a:endCxn id="200" idx="2"/>
+          </p:cNvCxnSpPr>
+          <p:nvPr/>
+        </p:nvCxnSpPr>
+        <p:spPr>
+          <a:xfrm>
+            <a:off x="5401432" y="939607"/>
+            <a:ext cx="1432206" cy="2747562"/>
+          </a:xfrm>
+          <a:prstGeom prst="line">
+            <a:avLst/>
+          </a:prstGeom>
+          <a:ln w="19050">
+            <a:solidFill>
+              <a:schemeClr val="tx1"/>
+            </a:solidFill>
+          </a:ln>
+        </p:spPr>
+        <p:style>
+          <a:lnRef idx="3">
+            <a:schemeClr val="dk1"/>
+          </a:lnRef>
+          <a:fillRef idx="0">
+            <a:schemeClr val="dk1"/>
+          </a:fillRef>
+          <a:effectRef idx="2">
+            <a:schemeClr val="dk1"/>
+          </a:effectRef>
+          <a:fontRef idx="minor">
+            <a:schemeClr val="tx1"/>
+          </a:fontRef>
+        </p:style>
+      </p:cxnSp>
+      <p:cxnSp>
+        <p:nvCxnSpPr>
+          <p:cNvPr id="498" name="直接连接符 497">
+            <a:extLst>
+              <a:ext uri="{FF2B5EF4-FFF2-40B4-BE49-F238E27FC236}">
+                <a16:creationId xmlns:a16="http://schemas.microsoft.com/office/drawing/2014/main" id="{1DBE3D74-21D6-4D01-8877-F2B817CDB8DE}"/>
+              </a:ext>
+            </a:extLst>
+          </p:cNvPr>
+          <p:cNvCxnSpPr>
+            <a:cxnSpLocks noChangeAspect="1"/>
+            <a:stCxn id="182" idx="6"/>
+            <a:endCxn id="198" idx="2"/>
+          </p:cNvCxnSpPr>
+          <p:nvPr/>
+        </p:nvCxnSpPr>
+        <p:spPr>
+          <a:xfrm>
+            <a:off x="5401432" y="939607"/>
+            <a:ext cx="1438272" cy="3454045"/>
+          </a:xfrm>
+          <a:prstGeom prst="line">
+            <a:avLst/>
+          </a:prstGeom>
+          <a:ln w="19050">
+            <a:solidFill>
+              <a:schemeClr val="tx1"/>
+            </a:solidFill>
+          </a:ln>
+        </p:spPr>
+        <p:style>
+          <a:lnRef idx="3">
+            <a:schemeClr val="dk1"/>
+          </a:lnRef>
+          <a:fillRef idx="0">
+            <a:schemeClr val="dk1"/>
+          </a:fillRef>
+          <a:effectRef idx="2">
+            <a:schemeClr val="dk1"/>
+          </a:effectRef>
+          <a:fontRef idx="minor">
+            <a:schemeClr val="tx1"/>
+          </a:fontRef>
+        </p:style>
+      </p:cxnSp>
+      <p:cxnSp>
+        <p:nvCxnSpPr>
+          <p:cNvPr id="501" name="直接连接符 500">
+            <a:extLst>
+              <a:ext uri="{FF2B5EF4-FFF2-40B4-BE49-F238E27FC236}">
+                <a16:creationId xmlns:a16="http://schemas.microsoft.com/office/drawing/2014/main" id="{1DBE3D74-21D6-4D01-8877-F2B817CDB8DE}"/>
+              </a:ext>
+            </a:extLst>
+          </p:cNvPr>
+          <p:cNvCxnSpPr>
+            <a:cxnSpLocks noChangeAspect="1"/>
+            <a:stCxn id="182" idx="6"/>
+            <a:endCxn id="195" idx="2"/>
+          </p:cNvCxnSpPr>
+          <p:nvPr/>
+        </p:nvCxnSpPr>
+        <p:spPr>
+          <a:xfrm>
+            <a:off x="5401432" y="939607"/>
+            <a:ext cx="1443903" cy="4151467"/>
+          </a:xfrm>
+          <a:prstGeom prst="line">
+            <a:avLst/>
+          </a:prstGeom>
+          <a:ln w="19050">
+            <a:solidFill>
+              <a:schemeClr val="tx1"/>
+            </a:solidFill>
+          </a:ln>
+        </p:spPr>
+        <p:style>
+          <a:lnRef idx="3">
+            <a:schemeClr val="dk1"/>
+          </a:lnRef>
+          <a:fillRef idx="0">
+            <a:schemeClr val="dk1"/>
+          </a:fillRef>
+          <a:effectRef idx="2">
+            <a:schemeClr val="dk1"/>
+          </a:effectRef>
+          <a:fontRef idx="minor">
+            <a:schemeClr val="tx1"/>
+          </a:fontRef>
+        </p:style>
+      </p:cxnSp>
+      <p:cxnSp>
+        <p:nvCxnSpPr>
+          <p:cNvPr id="504" name="直接连接符 503">
+            <a:extLst>
+              <a:ext uri="{FF2B5EF4-FFF2-40B4-BE49-F238E27FC236}">
+                <a16:creationId xmlns:a16="http://schemas.microsoft.com/office/drawing/2014/main" id="{1DBE3D74-21D6-4D01-8877-F2B817CDB8DE}"/>
+              </a:ext>
+            </a:extLst>
+          </p:cNvPr>
+          <p:cNvCxnSpPr>
+            <a:cxnSpLocks noChangeAspect="1"/>
+            <a:stCxn id="182" idx="6"/>
+            <a:endCxn id="193" idx="2"/>
+          </p:cNvCxnSpPr>
+          <p:nvPr/>
+        </p:nvCxnSpPr>
+        <p:spPr>
+          <a:xfrm>
+            <a:off x="5401432" y="939607"/>
+            <a:ext cx="1449969" cy="4844055"/>
+          </a:xfrm>
+          <a:prstGeom prst="line">
+            <a:avLst/>
+          </a:prstGeom>
+          <a:ln w="19050">
+            <a:solidFill>
+              <a:schemeClr val="tx1"/>
+            </a:solidFill>
+          </a:ln>
+        </p:spPr>
+        <p:style>
+          <a:lnRef idx="3">
+            <a:schemeClr val="dk1"/>
+          </a:lnRef>
+          <a:fillRef idx="0">
+            <a:schemeClr val="dk1"/>
+          </a:fillRef>
+          <a:effectRef idx="2">
+            <a:schemeClr val="dk1"/>
+          </a:effectRef>
+          <a:fontRef idx="minor">
+            <a:schemeClr val="tx1"/>
+          </a:fontRef>
+        </p:style>
+      </p:cxnSp>
+      <p:cxnSp>
+        <p:nvCxnSpPr>
+          <p:cNvPr id="507" name="直接连接符 506">
+            <a:extLst>
+              <a:ext uri="{FF2B5EF4-FFF2-40B4-BE49-F238E27FC236}">
+                <a16:creationId xmlns:a16="http://schemas.microsoft.com/office/drawing/2014/main" id="{1DBE3D74-21D6-4D01-8877-F2B817CDB8DE}"/>
+              </a:ext>
+            </a:extLst>
+          </p:cNvPr>
+          <p:cNvCxnSpPr>
+            <a:cxnSpLocks noChangeAspect="1"/>
+            <a:stCxn id="186" idx="6"/>
+            <a:endCxn id="193" idx="2"/>
+          </p:cNvCxnSpPr>
+          <p:nvPr/>
+        </p:nvCxnSpPr>
+        <p:spPr>
+          <a:xfrm>
+            <a:off x="5399583" y="1631959"/>
+            <a:ext cx="1451818" cy="4151703"/>
+          </a:xfrm>
+          <a:prstGeom prst="line">
+            <a:avLst/>
+          </a:prstGeom>
+          <a:ln w="19050">
+            <a:solidFill>
+              <a:schemeClr val="tx1"/>
+            </a:solidFill>
+          </a:ln>
+        </p:spPr>
+        <p:style>
+          <a:lnRef idx="3">
+            <a:schemeClr val="dk1"/>
+          </a:lnRef>
+          <a:fillRef idx="0">
+            <a:schemeClr val="dk1"/>
+          </a:fillRef>
+          <a:effectRef idx="2">
+            <a:schemeClr val="dk1"/>
+          </a:effectRef>
+          <a:fontRef idx="minor">
+            <a:schemeClr val="tx1"/>
+          </a:fontRef>
+        </p:style>
+      </p:cxnSp>
+      <p:cxnSp>
+        <p:nvCxnSpPr>
+          <p:cNvPr id="510" name="直接连接符 509">
+            <a:extLst>
+              <a:ext uri="{FF2B5EF4-FFF2-40B4-BE49-F238E27FC236}">
+                <a16:creationId xmlns:a16="http://schemas.microsoft.com/office/drawing/2014/main" id="{1DBE3D74-21D6-4D01-8877-F2B817CDB8DE}"/>
+              </a:ext>
+            </a:extLst>
+          </p:cNvPr>
+          <p:cNvCxnSpPr>
+            <a:cxnSpLocks noChangeAspect="1"/>
+            <a:stCxn id="186" idx="6"/>
+            <a:endCxn id="195" idx="2"/>
+          </p:cNvCxnSpPr>
+          <p:nvPr/>
+        </p:nvCxnSpPr>
+        <p:spPr>
+          <a:xfrm>
+            <a:off x="5399583" y="1631959"/>
+            <a:ext cx="1445752" cy="3459115"/>
+          </a:xfrm>
+          <a:prstGeom prst="line">
+            <a:avLst/>
+          </a:prstGeom>
+          <a:ln w="19050">
+            <a:solidFill>
+              <a:schemeClr val="tx1"/>
+            </a:solidFill>
+          </a:ln>
+        </p:spPr>
+        <p:style>
+          <a:lnRef idx="3">
+            <a:schemeClr val="dk1"/>
+          </a:lnRef>
+          <a:fillRef idx="0">
+            <a:schemeClr val="dk1"/>
+          </a:fillRef>
+          <a:effectRef idx="2">
+            <a:schemeClr val="dk1"/>
+          </a:effectRef>
+          <a:fontRef idx="minor">
+            <a:schemeClr val="tx1"/>
+          </a:fontRef>
+        </p:style>
+      </p:cxnSp>
+      <p:cxnSp>
+        <p:nvCxnSpPr>
+          <p:cNvPr id="513" name="直接连接符 512">
+            <a:extLst>
+              <a:ext uri="{FF2B5EF4-FFF2-40B4-BE49-F238E27FC236}">
+                <a16:creationId xmlns:a16="http://schemas.microsoft.com/office/drawing/2014/main" id="{1DBE3D74-21D6-4D01-8877-F2B817CDB8DE}"/>
+              </a:ext>
+            </a:extLst>
+          </p:cNvPr>
+          <p:cNvCxnSpPr>
+            <a:cxnSpLocks noChangeAspect="1"/>
+            <a:stCxn id="186" idx="6"/>
+            <a:endCxn id="198" idx="2"/>
+          </p:cNvCxnSpPr>
+          <p:nvPr/>
+        </p:nvCxnSpPr>
+        <p:spPr>
+          <a:xfrm>
+            <a:off x="5399583" y="1631959"/>
+            <a:ext cx="1440121" cy="2761693"/>
+          </a:xfrm>
+          <a:prstGeom prst="line">
+            <a:avLst/>
+          </a:prstGeom>
+          <a:ln w="19050">
+            <a:solidFill>
+              <a:schemeClr val="tx1"/>
+            </a:solidFill>
+          </a:ln>
+        </p:spPr>
+        <p:style>
+          <a:lnRef idx="3">
+            <a:schemeClr val="dk1"/>
+          </a:lnRef>
+          <a:fillRef idx="0">
+            <a:schemeClr val="dk1"/>
+          </a:fillRef>
+          <a:effectRef idx="2">
+            <a:schemeClr val="dk1"/>
+          </a:effectRef>
+          <a:fontRef idx="minor">
+            <a:schemeClr val="tx1"/>
+          </a:fontRef>
+        </p:style>
+      </p:cxnSp>
+      <p:cxnSp>
+        <p:nvCxnSpPr>
+          <p:cNvPr id="516" name="直接连接符 515">
+            <a:extLst>
+              <a:ext uri="{FF2B5EF4-FFF2-40B4-BE49-F238E27FC236}">
+                <a16:creationId xmlns:a16="http://schemas.microsoft.com/office/drawing/2014/main" id="{1DBE3D74-21D6-4D01-8877-F2B817CDB8DE}"/>
+              </a:ext>
+            </a:extLst>
+          </p:cNvPr>
+          <p:cNvCxnSpPr>
+            <a:cxnSpLocks noChangeAspect="1"/>
+            <a:stCxn id="186" idx="6"/>
+            <a:endCxn id="200" idx="2"/>
+          </p:cNvCxnSpPr>
+          <p:nvPr/>
+        </p:nvCxnSpPr>
+        <p:spPr>
+          <a:xfrm>
+            <a:off x="5399583" y="1631959"/>
+            <a:ext cx="1434055" cy="2055210"/>
+          </a:xfrm>
+          <a:prstGeom prst="line">
+            <a:avLst/>
+          </a:prstGeom>
+          <a:ln w="19050">
+            <a:solidFill>
+              <a:schemeClr val="tx1"/>
+            </a:solidFill>
+          </a:ln>
+        </p:spPr>
+        <p:style>
+          <a:lnRef idx="3">
+            <a:schemeClr val="dk1"/>
+          </a:lnRef>
+          <a:fillRef idx="0">
+            <a:schemeClr val="dk1"/>
+          </a:fillRef>
+          <a:effectRef idx="2">
+            <a:schemeClr val="dk1"/>
+          </a:effectRef>
+          <a:fontRef idx="minor">
+            <a:schemeClr val="tx1"/>
+          </a:fontRef>
+        </p:style>
+      </p:cxnSp>
+      <p:cxnSp>
+        <p:nvCxnSpPr>
+          <p:cNvPr id="519" name="直接连接符 518">
+            <a:extLst>
+              <a:ext uri="{FF2B5EF4-FFF2-40B4-BE49-F238E27FC236}">
+                <a16:creationId xmlns:a16="http://schemas.microsoft.com/office/drawing/2014/main" id="{1DBE3D74-21D6-4D01-8877-F2B817CDB8DE}"/>
+              </a:ext>
+            </a:extLst>
+          </p:cNvPr>
+          <p:cNvCxnSpPr>
+            <a:cxnSpLocks noChangeAspect="1"/>
+            <a:stCxn id="186" idx="6"/>
+            <a:endCxn id="199" idx="2"/>
+          </p:cNvCxnSpPr>
+          <p:nvPr/>
+        </p:nvCxnSpPr>
+        <p:spPr>
+          <a:xfrm>
+            <a:off x="5399583" y="1631959"/>
+            <a:ext cx="1434055" cy="699155"/>
+          </a:xfrm>
+          <a:prstGeom prst="line">
+            <a:avLst/>
+          </a:prstGeom>
+          <a:ln w="19050">
+            <a:solidFill>
+              <a:schemeClr val="tx1"/>
+            </a:solidFill>
+          </a:ln>
+        </p:spPr>
+        <p:style>
+          <a:lnRef idx="3">
+            <a:schemeClr val="dk1"/>
+          </a:lnRef>
+          <a:fillRef idx="0">
+            <a:schemeClr val="dk1"/>
+          </a:fillRef>
+          <a:effectRef idx="2">
+            <a:schemeClr val="dk1"/>
+          </a:effectRef>
+          <a:fontRef idx="minor">
+            <a:schemeClr val="tx1"/>
+          </a:fontRef>
+        </p:style>
+      </p:cxnSp>
+      <p:cxnSp>
+        <p:nvCxnSpPr>
+          <p:cNvPr id="522" name="直接连接符 521">
+            <a:extLst>
+              <a:ext uri="{FF2B5EF4-FFF2-40B4-BE49-F238E27FC236}">
+                <a16:creationId xmlns:a16="http://schemas.microsoft.com/office/drawing/2014/main" id="{1DBE3D74-21D6-4D01-8877-F2B817CDB8DE}"/>
+              </a:ext>
+            </a:extLst>
+          </p:cNvPr>
+          <p:cNvCxnSpPr>
+            <a:cxnSpLocks noChangeAspect="1"/>
+            <a:stCxn id="186" idx="6"/>
+            <a:endCxn id="197" idx="2"/>
+          </p:cNvCxnSpPr>
+          <p:nvPr/>
+        </p:nvCxnSpPr>
+        <p:spPr>
+          <a:xfrm>
+            <a:off x="5399583" y="1631959"/>
+            <a:ext cx="1434979" cy="9097"/>
+          </a:xfrm>
+          <a:prstGeom prst="line">
+            <a:avLst/>
+          </a:prstGeom>
+          <a:ln w="19050">
+            <a:solidFill>
+              <a:schemeClr val="tx1"/>
+            </a:solidFill>
+          </a:ln>
+        </p:spPr>
+        <p:style>
+          <a:lnRef idx="3">
+            <a:schemeClr val="dk1"/>
+          </a:lnRef>
+          <a:fillRef idx="0">
+            <a:schemeClr val="dk1"/>
+          </a:fillRef>
+          <a:effectRef idx="2">
+            <a:schemeClr val="dk1"/>
+          </a:effectRef>
+          <a:fontRef idx="minor">
+            <a:schemeClr val="tx1"/>
+          </a:fontRef>
+        </p:style>
+      </p:cxnSp>
+      <p:cxnSp>
+        <p:nvCxnSpPr>
+          <p:cNvPr id="525" name="直接连接符 524">
+            <a:extLst>
+              <a:ext uri="{FF2B5EF4-FFF2-40B4-BE49-F238E27FC236}">
+                <a16:creationId xmlns:a16="http://schemas.microsoft.com/office/drawing/2014/main" id="{1DBE3D74-21D6-4D01-8877-F2B817CDB8DE}"/>
+              </a:ext>
+            </a:extLst>
+          </p:cNvPr>
+          <p:cNvCxnSpPr>
+            <a:cxnSpLocks noChangeAspect="1"/>
+            <a:stCxn id="186" idx="6"/>
+            <a:endCxn id="192" idx="2"/>
+          </p:cNvCxnSpPr>
+          <p:nvPr/>
+        </p:nvCxnSpPr>
+        <p:spPr>
+          <a:xfrm flipV="1">
+            <a:off x="5399583" y="939607"/>
+            <a:ext cx="1436827" cy="692352"/>
+          </a:xfrm>
+          <a:prstGeom prst="line">
+            <a:avLst/>
+          </a:prstGeom>
+          <a:ln w="19050">
+            <a:solidFill>
+              <a:schemeClr val="tx1"/>
+            </a:solidFill>
+          </a:ln>
+        </p:spPr>
+        <p:style>
+          <a:lnRef idx="3">
+            <a:schemeClr val="dk1"/>
+          </a:lnRef>
+          <a:fillRef idx="0">
+            <a:schemeClr val="dk1"/>
+          </a:fillRef>
+          <a:effectRef idx="2">
+            <a:schemeClr val="dk1"/>
+          </a:effectRef>
+          <a:fontRef idx="minor">
+            <a:schemeClr val="tx1"/>
+          </a:fontRef>
+        </p:style>
+      </p:cxnSp>
+      <p:cxnSp>
+        <p:nvCxnSpPr>
+          <p:cNvPr id="528" name="直接连接符 527">
+            <a:extLst>
+              <a:ext uri="{FF2B5EF4-FFF2-40B4-BE49-F238E27FC236}">
+                <a16:creationId xmlns:a16="http://schemas.microsoft.com/office/drawing/2014/main" id="{1DBE3D74-21D6-4D01-8877-F2B817CDB8DE}"/>
+              </a:ext>
+            </a:extLst>
+          </p:cNvPr>
+          <p:cNvCxnSpPr>
+            <a:cxnSpLocks noChangeAspect="1"/>
+            <a:stCxn id="186" idx="6"/>
+            <a:endCxn id="191" idx="2"/>
+          </p:cNvCxnSpPr>
+          <p:nvPr/>
+        </p:nvCxnSpPr>
+        <p:spPr>
+          <a:xfrm flipV="1">
+            <a:off x="5399583" y="239902"/>
+            <a:ext cx="1436828" cy="1392057"/>
+          </a:xfrm>
+          <a:prstGeom prst="line">
+            <a:avLst/>
+          </a:prstGeom>
+          <a:ln w="19050">
+            <a:solidFill>
+              <a:schemeClr val="tx1"/>
+            </a:solidFill>
+          </a:ln>
+        </p:spPr>
+        <p:style>
+          <a:lnRef idx="3">
+            <a:schemeClr val="dk1"/>
+          </a:lnRef>
+          <a:fillRef idx="0">
+            <a:schemeClr val="dk1"/>
+          </a:fillRef>
+          <a:effectRef idx="2">
+            <a:schemeClr val="dk1"/>
+          </a:effectRef>
+          <a:fontRef idx="minor">
+            <a:schemeClr val="tx1"/>
+          </a:fontRef>
+        </p:style>
+      </p:cxnSp>
+      <p:cxnSp>
+        <p:nvCxnSpPr>
+          <p:cNvPr id="531" name="直接连接符 530">
+            <a:extLst>
+              <a:ext uri="{FF2B5EF4-FFF2-40B4-BE49-F238E27FC236}">
+                <a16:creationId xmlns:a16="http://schemas.microsoft.com/office/drawing/2014/main" id="{1DBE3D74-21D6-4D01-8877-F2B817CDB8DE}"/>
+              </a:ext>
+            </a:extLst>
+          </p:cNvPr>
+          <p:cNvCxnSpPr>
+            <a:cxnSpLocks noChangeAspect="1"/>
+            <a:stCxn id="188" idx="6"/>
+            <a:endCxn id="191" idx="2"/>
+          </p:cNvCxnSpPr>
+          <p:nvPr/>
+        </p:nvCxnSpPr>
+        <p:spPr>
+          <a:xfrm flipV="1">
+            <a:off x="5399584" y="239902"/>
+            <a:ext cx="1436827" cy="2089479"/>
+          </a:xfrm>
+          <a:prstGeom prst="line">
+            <a:avLst/>
+          </a:prstGeom>
+          <a:ln w="19050">
+            <a:solidFill>
+              <a:schemeClr val="tx1"/>
+            </a:solidFill>
+          </a:ln>
+        </p:spPr>
+        <p:style>
+          <a:lnRef idx="3">
+            <a:schemeClr val="dk1"/>
+          </a:lnRef>
+          <a:fillRef idx="0">
+            <a:schemeClr val="dk1"/>
+          </a:fillRef>
+          <a:effectRef idx="2">
+            <a:schemeClr val="dk1"/>
+          </a:effectRef>
+          <a:fontRef idx="minor">
+            <a:schemeClr val="tx1"/>
+          </a:fontRef>
+        </p:style>
+      </p:cxnSp>
+      <p:cxnSp>
+        <p:nvCxnSpPr>
+          <p:cNvPr id="534" name="直接连接符 533">
+            <a:extLst>
+              <a:ext uri="{FF2B5EF4-FFF2-40B4-BE49-F238E27FC236}">
+                <a16:creationId xmlns:a16="http://schemas.microsoft.com/office/drawing/2014/main" id="{1DBE3D74-21D6-4D01-8877-F2B817CDB8DE}"/>
+              </a:ext>
+            </a:extLst>
+          </p:cNvPr>
+          <p:cNvCxnSpPr>
+            <a:cxnSpLocks noChangeAspect="1"/>
+            <a:stCxn id="188" idx="6"/>
+            <a:endCxn id="192" idx="2"/>
+          </p:cNvCxnSpPr>
+          <p:nvPr/>
+        </p:nvCxnSpPr>
+        <p:spPr>
+          <a:xfrm flipV="1">
+            <a:off x="5399584" y="939607"/>
+            <a:ext cx="1436826" cy="1389774"/>
+          </a:xfrm>
+          <a:prstGeom prst="line">
+            <a:avLst/>
+          </a:prstGeom>
+          <a:ln w="19050">
+            <a:solidFill>
+              <a:schemeClr val="tx1"/>
+            </a:solidFill>
+          </a:ln>
+        </p:spPr>
+        <p:style>
+          <a:lnRef idx="3">
+            <a:schemeClr val="dk1"/>
+          </a:lnRef>
+          <a:fillRef idx="0">
+            <a:schemeClr val="dk1"/>
+          </a:fillRef>
+          <a:effectRef idx="2">
+            <a:schemeClr val="dk1"/>
+          </a:effectRef>
+          <a:fontRef idx="minor">
+            <a:schemeClr val="tx1"/>
+          </a:fontRef>
+        </p:style>
+      </p:cxnSp>
+      <p:cxnSp>
+        <p:nvCxnSpPr>
+          <p:cNvPr id="537" name="直接连接符 536">
+            <a:extLst>
+              <a:ext uri="{FF2B5EF4-FFF2-40B4-BE49-F238E27FC236}">
+                <a16:creationId xmlns:a16="http://schemas.microsoft.com/office/drawing/2014/main" id="{1DBE3D74-21D6-4D01-8877-F2B817CDB8DE}"/>
+              </a:ext>
+            </a:extLst>
+          </p:cNvPr>
+          <p:cNvCxnSpPr>
+            <a:cxnSpLocks noChangeAspect="1"/>
+            <a:stCxn id="188" idx="6"/>
+            <a:endCxn id="197" idx="2"/>
+          </p:cNvCxnSpPr>
+          <p:nvPr/>
+        </p:nvCxnSpPr>
+        <p:spPr>
+          <a:xfrm flipV="1">
+            <a:off x="5399584" y="1641056"/>
+            <a:ext cx="1434978" cy="688325"/>
+          </a:xfrm>
+          <a:prstGeom prst="line">
+            <a:avLst/>
+          </a:prstGeom>
+          <a:ln w="19050">
+            <a:solidFill>
+              <a:schemeClr val="tx1"/>
+            </a:solidFill>
+          </a:ln>
+        </p:spPr>
+        <p:style>
+          <a:lnRef idx="3">
+            <a:schemeClr val="dk1"/>
+          </a:lnRef>
+          <a:fillRef idx="0">
+            <a:schemeClr val="dk1"/>
+          </a:fillRef>
+          <a:effectRef idx="2">
+            <a:schemeClr val="dk1"/>
+          </a:effectRef>
+          <a:fontRef idx="minor">
+            <a:schemeClr val="tx1"/>
+          </a:fontRef>
+        </p:style>
+      </p:cxnSp>
+      <p:cxnSp>
+        <p:nvCxnSpPr>
+          <p:cNvPr id="541" name="直接连接符 540">
+            <a:extLst>
+              <a:ext uri="{FF2B5EF4-FFF2-40B4-BE49-F238E27FC236}">
+                <a16:creationId xmlns:a16="http://schemas.microsoft.com/office/drawing/2014/main" id="{1DBE3D74-21D6-4D01-8877-F2B817CDB8DE}"/>
+              </a:ext>
+            </a:extLst>
+          </p:cNvPr>
+          <p:cNvCxnSpPr>
+            <a:cxnSpLocks noChangeAspect="1"/>
+            <a:stCxn id="188" idx="6"/>
+            <a:endCxn id="199" idx="2"/>
+          </p:cNvCxnSpPr>
+          <p:nvPr/>
+        </p:nvCxnSpPr>
+        <p:spPr>
+          <a:xfrm>
+            <a:off x="5399584" y="2329381"/>
+            <a:ext cx="1434054" cy="1733"/>
+          </a:xfrm>
+          <a:prstGeom prst="line">
+            <a:avLst/>
+          </a:prstGeom>
+          <a:ln w="19050">
+            <a:solidFill>
+              <a:schemeClr val="tx1"/>
+            </a:solidFill>
+          </a:ln>
+        </p:spPr>
+        <p:style>
+          <a:lnRef idx="3">
+            <a:schemeClr val="dk1"/>
+          </a:lnRef>
+          <a:fillRef idx="0">
+            <a:schemeClr val="dk1"/>
+          </a:fillRef>
+          <a:effectRef idx="2">
+            <a:schemeClr val="dk1"/>
+          </a:effectRef>
+          <a:fontRef idx="minor">
+            <a:schemeClr val="tx1"/>
+          </a:fontRef>
+        </p:style>
+      </p:cxnSp>
+      <p:cxnSp>
+        <p:nvCxnSpPr>
+          <p:cNvPr id="544" name="直接连接符 543">
+            <a:extLst>
+              <a:ext uri="{FF2B5EF4-FFF2-40B4-BE49-F238E27FC236}">
+                <a16:creationId xmlns:a16="http://schemas.microsoft.com/office/drawing/2014/main" id="{1DBE3D74-21D6-4D01-8877-F2B817CDB8DE}"/>
+              </a:ext>
+            </a:extLst>
+          </p:cNvPr>
+          <p:cNvCxnSpPr>
+            <a:cxnSpLocks noChangeAspect="1"/>
+            <a:stCxn id="188" idx="6"/>
+            <a:endCxn id="200" idx="2"/>
+          </p:cNvCxnSpPr>
+          <p:nvPr/>
+        </p:nvCxnSpPr>
+        <p:spPr>
+          <a:xfrm>
+            <a:off x="5399584" y="2329381"/>
+            <a:ext cx="1434054" cy="1357788"/>
+          </a:xfrm>
+          <a:prstGeom prst="line">
+            <a:avLst/>
+          </a:prstGeom>
+          <a:ln w="19050">
+            <a:solidFill>
+              <a:schemeClr val="tx1"/>
+            </a:solidFill>
+          </a:ln>
+        </p:spPr>
+        <p:style>
+          <a:lnRef idx="3">
+            <a:schemeClr val="dk1"/>
+          </a:lnRef>
+          <a:fillRef idx="0">
+            <a:schemeClr val="dk1"/>
+          </a:fillRef>
+          <a:effectRef idx="2">
+            <a:schemeClr val="dk1"/>
+          </a:effectRef>
+          <a:fontRef idx="minor">
+            <a:schemeClr val="tx1"/>
+          </a:fontRef>
+        </p:style>
+      </p:cxnSp>
+      <p:cxnSp>
+        <p:nvCxnSpPr>
+          <p:cNvPr id="547" name="直接连接符 546">
+            <a:extLst>
+              <a:ext uri="{FF2B5EF4-FFF2-40B4-BE49-F238E27FC236}">
+                <a16:creationId xmlns:a16="http://schemas.microsoft.com/office/drawing/2014/main" id="{1DBE3D74-21D6-4D01-8877-F2B817CDB8DE}"/>
+              </a:ext>
+            </a:extLst>
+          </p:cNvPr>
+          <p:cNvCxnSpPr>
+            <a:cxnSpLocks noChangeAspect="1"/>
+            <a:stCxn id="188" idx="6"/>
+            <a:endCxn id="198" idx="2"/>
+          </p:cNvCxnSpPr>
+          <p:nvPr/>
+        </p:nvCxnSpPr>
+        <p:spPr>
+          <a:xfrm>
+            <a:off x="5399584" y="2329381"/>
+            <a:ext cx="1440120" cy="2064271"/>
+          </a:xfrm>
+          <a:prstGeom prst="line">
+            <a:avLst/>
+          </a:prstGeom>
+          <a:ln w="19050">
+            <a:solidFill>
+              <a:schemeClr val="tx1"/>
+            </a:solidFill>
+          </a:ln>
+        </p:spPr>
+        <p:style>
+          <a:lnRef idx="3">
+            <a:schemeClr val="dk1"/>
+          </a:lnRef>
+          <a:fillRef idx="0">
+            <a:schemeClr val="dk1"/>
+          </a:fillRef>
+          <a:effectRef idx="2">
+            <a:schemeClr val="dk1"/>
+          </a:effectRef>
+          <a:fontRef idx="minor">
+            <a:schemeClr val="tx1"/>
+          </a:fontRef>
+        </p:style>
+      </p:cxnSp>
+      <p:cxnSp>
+        <p:nvCxnSpPr>
+          <p:cNvPr id="550" name="直接连接符 549">
+            <a:extLst>
+              <a:ext uri="{FF2B5EF4-FFF2-40B4-BE49-F238E27FC236}">
+                <a16:creationId xmlns:a16="http://schemas.microsoft.com/office/drawing/2014/main" id="{1DBE3D74-21D6-4D01-8877-F2B817CDB8DE}"/>
+              </a:ext>
+            </a:extLst>
+          </p:cNvPr>
+          <p:cNvCxnSpPr>
+            <a:cxnSpLocks noChangeAspect="1"/>
+            <a:stCxn id="188" idx="6"/>
+            <a:endCxn id="195" idx="2"/>
+          </p:cNvCxnSpPr>
+          <p:nvPr/>
+        </p:nvCxnSpPr>
+        <p:spPr>
+          <a:xfrm>
+            <a:off x="5399584" y="2329381"/>
+            <a:ext cx="1445751" cy="2761693"/>
+          </a:xfrm>
+          <a:prstGeom prst="line">
+            <a:avLst/>
+          </a:prstGeom>
+          <a:ln w="19050">
+            <a:solidFill>
+              <a:schemeClr val="tx1"/>
+            </a:solidFill>
+          </a:ln>
+        </p:spPr>
+        <p:style>
+          <a:lnRef idx="3">
+            <a:schemeClr val="dk1"/>
+          </a:lnRef>
+          <a:fillRef idx="0">
+            <a:schemeClr val="dk1"/>
+          </a:fillRef>
+          <a:effectRef idx="2">
+            <a:schemeClr val="dk1"/>
+          </a:effectRef>
+          <a:fontRef idx="minor">
+            <a:schemeClr val="tx1"/>
+          </a:fontRef>
+        </p:style>
+      </p:cxnSp>
+      <p:cxnSp>
+        <p:nvCxnSpPr>
+          <p:cNvPr id="553" name="直接连接符 552">
+            <a:extLst>
+              <a:ext uri="{FF2B5EF4-FFF2-40B4-BE49-F238E27FC236}">
+                <a16:creationId xmlns:a16="http://schemas.microsoft.com/office/drawing/2014/main" id="{1DBE3D74-21D6-4D01-8877-F2B817CDB8DE}"/>
+              </a:ext>
+            </a:extLst>
+          </p:cNvPr>
+          <p:cNvCxnSpPr>
+            <a:cxnSpLocks noChangeAspect="1"/>
+            <a:stCxn id="188" idx="6"/>
+            <a:endCxn id="193" idx="2"/>
+          </p:cNvCxnSpPr>
+          <p:nvPr/>
+        </p:nvCxnSpPr>
+        <p:spPr>
+          <a:xfrm>
+            <a:off x="5399584" y="2329381"/>
+            <a:ext cx="1451817" cy="3454281"/>
+          </a:xfrm>
+          <a:prstGeom prst="line">
+            <a:avLst/>
+          </a:prstGeom>
+          <a:ln w="19050">
+            <a:solidFill>
+              <a:schemeClr val="tx1"/>
+            </a:solidFill>
+          </a:ln>
+        </p:spPr>
+        <p:style>
+          <a:lnRef idx="3">
+            <a:schemeClr val="dk1"/>
+          </a:lnRef>
+          <a:fillRef idx="0">
+            <a:schemeClr val="dk1"/>
+          </a:fillRef>
+          <a:effectRef idx="2">
+            <a:schemeClr val="dk1"/>
+          </a:effectRef>
+          <a:fontRef idx="minor">
+            <a:schemeClr val="tx1"/>
+          </a:fontRef>
+        </p:style>
+      </p:cxnSp>
+      <p:cxnSp>
+        <p:nvCxnSpPr>
+          <p:cNvPr id="556" name="直接连接符 555">
+            <a:extLst>
+              <a:ext uri="{FF2B5EF4-FFF2-40B4-BE49-F238E27FC236}">
+                <a16:creationId xmlns:a16="http://schemas.microsoft.com/office/drawing/2014/main" id="{1DBE3D74-21D6-4D01-8877-F2B817CDB8DE}"/>
+              </a:ext>
+            </a:extLst>
+          </p:cNvPr>
+          <p:cNvCxnSpPr>
+            <a:cxnSpLocks noChangeAspect="1"/>
+            <a:stCxn id="189" idx="6"/>
+            <a:endCxn id="193" idx="2"/>
+          </p:cNvCxnSpPr>
+          <p:nvPr/>
+        </p:nvCxnSpPr>
+        <p:spPr>
+          <a:xfrm>
+            <a:off x="5384876" y="3697900"/>
+            <a:ext cx="1466525" cy="2085762"/>
+          </a:xfrm>
+          <a:prstGeom prst="line">
+            <a:avLst/>
+          </a:prstGeom>
+          <a:ln w="19050">
+            <a:solidFill>
+              <a:schemeClr val="tx1"/>
+            </a:solidFill>
+          </a:ln>
+        </p:spPr>
+        <p:style>
+          <a:lnRef idx="3">
+            <a:schemeClr val="dk1"/>
+          </a:lnRef>
+          <a:fillRef idx="0">
+            <a:schemeClr val="dk1"/>
+          </a:fillRef>
+          <a:effectRef idx="2">
+            <a:schemeClr val="dk1"/>
+          </a:effectRef>
+          <a:fontRef idx="minor">
+            <a:schemeClr val="tx1"/>
+          </a:fontRef>
+        </p:style>
+      </p:cxnSp>
+      <p:cxnSp>
+        <p:nvCxnSpPr>
+          <p:cNvPr id="559" name="直接连接符 558">
+            <a:extLst>
+              <a:ext uri="{FF2B5EF4-FFF2-40B4-BE49-F238E27FC236}">
+                <a16:creationId xmlns:a16="http://schemas.microsoft.com/office/drawing/2014/main" id="{1DBE3D74-21D6-4D01-8877-F2B817CDB8DE}"/>
+              </a:ext>
+            </a:extLst>
+          </p:cNvPr>
+          <p:cNvCxnSpPr>
+            <a:cxnSpLocks noChangeAspect="1"/>
+            <a:stCxn id="189" idx="6"/>
+            <a:endCxn id="195" idx="2"/>
+          </p:cNvCxnSpPr>
+          <p:nvPr/>
+        </p:nvCxnSpPr>
+        <p:spPr>
+          <a:xfrm>
+            <a:off x="5384876" y="3697900"/>
+            <a:ext cx="1460459" cy="1393174"/>
+          </a:xfrm>
+          <a:prstGeom prst="line">
+            <a:avLst/>
+          </a:prstGeom>
+          <a:ln w="19050">
+            <a:solidFill>
+              <a:schemeClr val="tx1"/>
+            </a:solidFill>
+          </a:ln>
+        </p:spPr>
+        <p:style>
+          <a:lnRef idx="3">
+            <a:schemeClr val="dk1"/>
+          </a:lnRef>
+          <a:fillRef idx="0">
+            <a:schemeClr val="dk1"/>
+          </a:fillRef>
+          <a:effectRef idx="2">
+            <a:schemeClr val="dk1"/>
+          </a:effectRef>
+          <a:fontRef idx="minor">
+            <a:schemeClr val="tx1"/>
+          </a:fontRef>
+        </p:style>
+      </p:cxnSp>
+      <p:cxnSp>
+        <p:nvCxnSpPr>
+          <p:cNvPr id="562" name="直接连接符 561">
+            <a:extLst>
+              <a:ext uri="{FF2B5EF4-FFF2-40B4-BE49-F238E27FC236}">
+                <a16:creationId xmlns:a16="http://schemas.microsoft.com/office/drawing/2014/main" id="{1DBE3D74-21D6-4D01-8877-F2B817CDB8DE}"/>
+              </a:ext>
+            </a:extLst>
+          </p:cNvPr>
+          <p:cNvCxnSpPr>
+            <a:cxnSpLocks noChangeAspect="1"/>
+            <a:stCxn id="189" idx="6"/>
+            <a:endCxn id="198" idx="2"/>
+          </p:cNvCxnSpPr>
+          <p:nvPr/>
+        </p:nvCxnSpPr>
+        <p:spPr>
+          <a:xfrm>
+            <a:off x="5384876" y="3697900"/>
+            <a:ext cx="1454828" cy="695752"/>
+          </a:xfrm>
+          <a:prstGeom prst="line">
+            <a:avLst/>
+          </a:prstGeom>
+          <a:ln w="19050">
+            <a:solidFill>
+              <a:schemeClr val="tx1"/>
+            </a:solidFill>
+          </a:ln>
+        </p:spPr>
+        <p:style>
+          <a:lnRef idx="3">
+            <a:schemeClr val="dk1"/>
+          </a:lnRef>
+          <a:fillRef idx="0">
+            <a:schemeClr val="dk1"/>
+          </a:fillRef>
+          <a:effectRef idx="2">
+            <a:schemeClr val="dk1"/>
+          </a:effectRef>
+          <a:fontRef idx="minor">
+            <a:schemeClr val="tx1"/>
+          </a:fontRef>
+        </p:style>
+      </p:cxnSp>
+      <p:cxnSp>
+        <p:nvCxnSpPr>
+          <p:cNvPr id="565" name="直接连接符 564">
+            <a:extLst>
+              <a:ext uri="{FF2B5EF4-FFF2-40B4-BE49-F238E27FC236}">
+                <a16:creationId xmlns:a16="http://schemas.microsoft.com/office/drawing/2014/main" id="{1DBE3D74-21D6-4D01-8877-F2B817CDB8DE}"/>
+              </a:ext>
+            </a:extLst>
+          </p:cNvPr>
+          <p:cNvCxnSpPr>
+            <a:cxnSpLocks noChangeAspect="1"/>
+            <a:stCxn id="189" idx="6"/>
+            <a:endCxn id="200" idx="2"/>
+          </p:cNvCxnSpPr>
+          <p:nvPr/>
+        </p:nvCxnSpPr>
+        <p:spPr>
+          <a:xfrm flipV="1">
+            <a:off x="5384876" y="3687169"/>
+            <a:ext cx="1448762" cy="10731"/>
+          </a:xfrm>
+          <a:prstGeom prst="line">
+            <a:avLst/>
+          </a:prstGeom>
+          <a:ln w="19050">
+            <a:solidFill>
+              <a:schemeClr val="tx1"/>
+            </a:solidFill>
+          </a:ln>
+        </p:spPr>
+        <p:style>
+          <a:lnRef idx="3">
+            <a:schemeClr val="dk1"/>
+          </a:lnRef>
+          <a:fillRef idx="0">
+            <a:schemeClr val="dk1"/>
+          </a:fillRef>
+          <a:effectRef idx="2">
+            <a:schemeClr val="dk1"/>
+          </a:effectRef>
+          <a:fontRef idx="minor">
+            <a:schemeClr val="tx1"/>
+          </a:fontRef>
+        </p:style>
+      </p:cxnSp>
+      <p:cxnSp>
+        <p:nvCxnSpPr>
+          <p:cNvPr id="568" name="直接连接符 567">
+            <a:extLst>
+              <a:ext uri="{FF2B5EF4-FFF2-40B4-BE49-F238E27FC236}">
+                <a16:creationId xmlns:a16="http://schemas.microsoft.com/office/drawing/2014/main" id="{1DBE3D74-21D6-4D01-8877-F2B817CDB8DE}"/>
+              </a:ext>
+            </a:extLst>
+          </p:cNvPr>
+          <p:cNvCxnSpPr>
+            <a:cxnSpLocks noChangeAspect="1"/>
+            <a:stCxn id="189" idx="6"/>
+            <a:endCxn id="199" idx="2"/>
+          </p:cNvCxnSpPr>
+          <p:nvPr/>
+        </p:nvCxnSpPr>
+        <p:spPr>
+          <a:xfrm flipV="1">
+            <a:off x="5384876" y="2331114"/>
+            <a:ext cx="1448762" cy="1366786"/>
+          </a:xfrm>
+          <a:prstGeom prst="line">
+            <a:avLst/>
+          </a:prstGeom>
+          <a:ln w="19050">
+            <a:solidFill>
+              <a:schemeClr val="tx1"/>
+            </a:solidFill>
+          </a:ln>
+        </p:spPr>
+        <p:style>
+          <a:lnRef idx="3">
+            <a:schemeClr val="dk1"/>
+          </a:lnRef>
+          <a:fillRef idx="0">
+            <a:schemeClr val="dk1"/>
+          </a:fillRef>
+          <a:effectRef idx="2">
+            <a:schemeClr val="dk1"/>
+          </a:effectRef>
+          <a:fontRef idx="minor">
+            <a:schemeClr val="tx1"/>
+          </a:fontRef>
+        </p:style>
+      </p:cxnSp>
+      <p:cxnSp>
+        <p:nvCxnSpPr>
+          <p:cNvPr id="571" name="直接连接符 570">
+            <a:extLst>
+              <a:ext uri="{FF2B5EF4-FFF2-40B4-BE49-F238E27FC236}">
+                <a16:creationId xmlns:a16="http://schemas.microsoft.com/office/drawing/2014/main" id="{1DBE3D74-21D6-4D01-8877-F2B817CDB8DE}"/>
+              </a:ext>
+            </a:extLst>
+          </p:cNvPr>
+          <p:cNvCxnSpPr>
+            <a:cxnSpLocks noChangeAspect="1"/>
+            <a:stCxn id="189" idx="6"/>
+            <a:endCxn id="197" idx="2"/>
+          </p:cNvCxnSpPr>
+          <p:nvPr/>
+        </p:nvCxnSpPr>
+        <p:spPr>
+          <a:xfrm flipV="1">
+            <a:off x="5384876" y="1641056"/>
+            <a:ext cx="1449686" cy="2056844"/>
+          </a:xfrm>
+          <a:prstGeom prst="line">
+            <a:avLst/>
+          </a:prstGeom>
+          <a:ln w="19050">
+            <a:solidFill>
+              <a:schemeClr val="tx1"/>
+            </a:solidFill>
+          </a:ln>
+        </p:spPr>
+        <p:style>
+          <a:lnRef idx="3">
+            <a:schemeClr val="dk1"/>
+          </a:lnRef>
+          <a:fillRef idx="0">
+            <a:schemeClr val="dk1"/>
+          </a:fillRef>
+          <a:effectRef idx="2">
+            <a:schemeClr val="dk1"/>
+          </a:effectRef>
+          <a:fontRef idx="minor">
+            <a:schemeClr val="tx1"/>
+          </a:fontRef>
+        </p:style>
+      </p:cxnSp>
+      <p:cxnSp>
+        <p:nvCxnSpPr>
+          <p:cNvPr id="574" name="直接连接符 573">
+            <a:extLst>
+              <a:ext uri="{FF2B5EF4-FFF2-40B4-BE49-F238E27FC236}">
+                <a16:creationId xmlns:a16="http://schemas.microsoft.com/office/drawing/2014/main" id="{1DBE3D74-21D6-4D01-8877-F2B817CDB8DE}"/>
+              </a:ext>
+            </a:extLst>
+          </p:cNvPr>
+          <p:cNvCxnSpPr>
+            <a:cxnSpLocks noChangeAspect="1"/>
+            <a:stCxn id="189" idx="6"/>
+            <a:endCxn id="192" idx="2"/>
+          </p:cNvCxnSpPr>
+          <p:nvPr/>
+        </p:nvCxnSpPr>
+        <p:spPr>
+          <a:xfrm flipV="1">
+            <a:off x="5384876" y="939607"/>
+            <a:ext cx="1451534" cy="2758293"/>
+          </a:xfrm>
+          <a:prstGeom prst="line">
+            <a:avLst/>
+          </a:prstGeom>
+          <a:ln w="19050">
+            <a:solidFill>
+              <a:schemeClr val="tx1"/>
+            </a:solidFill>
+          </a:ln>
+        </p:spPr>
+        <p:style>
+          <a:lnRef idx="3">
+            <a:schemeClr val="dk1"/>
+          </a:lnRef>
+          <a:fillRef idx="0">
+            <a:schemeClr val="dk1"/>
+          </a:fillRef>
+          <a:effectRef idx="2">
+            <a:schemeClr val="dk1"/>
+          </a:effectRef>
+          <a:fontRef idx="minor">
+            <a:schemeClr val="tx1"/>
+          </a:fontRef>
+        </p:style>
+      </p:cxnSp>
+      <p:cxnSp>
+        <p:nvCxnSpPr>
+          <p:cNvPr id="577" name="直接连接符 576">
+            <a:extLst>
+              <a:ext uri="{FF2B5EF4-FFF2-40B4-BE49-F238E27FC236}">
+                <a16:creationId xmlns:a16="http://schemas.microsoft.com/office/drawing/2014/main" id="{1DBE3D74-21D6-4D01-8877-F2B817CDB8DE}"/>
+              </a:ext>
+            </a:extLst>
+          </p:cNvPr>
+          <p:cNvCxnSpPr>
+            <a:cxnSpLocks noChangeAspect="1"/>
+            <a:stCxn id="189" idx="6"/>
+            <a:endCxn id="191" idx="2"/>
+          </p:cNvCxnSpPr>
+          <p:nvPr/>
+        </p:nvCxnSpPr>
+        <p:spPr>
+          <a:xfrm flipV="1">
+            <a:off x="5384876" y="239902"/>
+            <a:ext cx="1451535" cy="3457998"/>
+          </a:xfrm>
+          <a:prstGeom prst="line">
+            <a:avLst/>
+          </a:prstGeom>
+          <a:ln w="19050">
+            <a:solidFill>
+              <a:schemeClr val="tx1"/>
+            </a:solidFill>
+          </a:ln>
+        </p:spPr>
+        <p:style>
+          <a:lnRef idx="3">
+            <a:schemeClr val="dk1"/>
+          </a:lnRef>
+          <a:fillRef idx="0">
+            <a:schemeClr val="dk1"/>
+          </a:fillRef>
+          <a:effectRef idx="2">
+            <a:schemeClr val="dk1"/>
+          </a:effectRef>
+          <a:fontRef idx="minor">
+            <a:schemeClr val="tx1"/>
+          </a:fontRef>
+        </p:style>
+      </p:cxnSp>
+      <p:cxnSp>
+        <p:nvCxnSpPr>
+          <p:cNvPr id="580" name="直接连接符 579">
+            <a:extLst>
+              <a:ext uri="{FF2B5EF4-FFF2-40B4-BE49-F238E27FC236}">
+                <a16:creationId xmlns:a16="http://schemas.microsoft.com/office/drawing/2014/main" id="{1DBE3D74-21D6-4D01-8877-F2B817CDB8DE}"/>
+              </a:ext>
+            </a:extLst>
+          </p:cNvPr>
+          <p:cNvCxnSpPr>
+            <a:cxnSpLocks noChangeAspect="1"/>
+            <a:stCxn id="187" idx="6"/>
+            <a:endCxn id="191" idx="2"/>
+          </p:cNvCxnSpPr>
+          <p:nvPr/>
+        </p:nvCxnSpPr>
+        <p:spPr>
+          <a:xfrm flipV="1">
+            <a:off x="5405797" y="239902"/>
+            <a:ext cx="1430614" cy="4153923"/>
+          </a:xfrm>
+          <a:prstGeom prst="line">
+            <a:avLst/>
+          </a:prstGeom>
+          <a:ln w="19050">
+            <a:solidFill>
+              <a:schemeClr val="tx1"/>
+            </a:solidFill>
+          </a:ln>
+        </p:spPr>
+        <p:style>
+          <a:lnRef idx="3">
+            <a:schemeClr val="dk1"/>
+          </a:lnRef>
+          <a:fillRef idx="0">
+            <a:schemeClr val="dk1"/>
+          </a:fillRef>
+          <a:effectRef idx="2">
+            <a:schemeClr val="dk1"/>
+          </a:effectRef>
+          <a:fontRef idx="minor">
+            <a:schemeClr val="tx1"/>
+          </a:fontRef>
+        </p:style>
+      </p:cxnSp>
+      <p:cxnSp>
+        <p:nvCxnSpPr>
+          <p:cNvPr id="583" name="直接连接符 582">
+            <a:extLst>
+              <a:ext uri="{FF2B5EF4-FFF2-40B4-BE49-F238E27FC236}">
+                <a16:creationId xmlns:a16="http://schemas.microsoft.com/office/drawing/2014/main" id="{1DBE3D74-21D6-4D01-8877-F2B817CDB8DE}"/>
+              </a:ext>
+            </a:extLst>
+          </p:cNvPr>
+          <p:cNvCxnSpPr>
+            <a:cxnSpLocks noChangeAspect="1"/>
+            <a:stCxn id="187" idx="6"/>
+            <a:endCxn id="192" idx="2"/>
+          </p:cNvCxnSpPr>
+          <p:nvPr/>
+        </p:nvCxnSpPr>
+        <p:spPr>
+          <a:xfrm flipV="1">
+            <a:off x="5405797" y="939607"/>
+            <a:ext cx="1430613" cy="3454218"/>
+          </a:xfrm>
+          <a:prstGeom prst="line">
+            <a:avLst/>
+          </a:prstGeom>
+          <a:ln w="19050">
+            <a:solidFill>
+              <a:schemeClr val="tx1"/>
+            </a:solidFill>
+          </a:ln>
+        </p:spPr>
+        <p:style>
+          <a:lnRef idx="3">
+            <a:schemeClr val="dk1"/>
+          </a:lnRef>
+          <a:fillRef idx="0">
+            <a:schemeClr val="dk1"/>
+          </a:fillRef>
+          <a:effectRef idx="2">
+            <a:schemeClr val="dk1"/>
+          </a:effectRef>
+          <a:fontRef idx="minor">
+            <a:schemeClr val="tx1"/>
+          </a:fontRef>
+        </p:style>
+      </p:cxnSp>
+      <p:cxnSp>
+        <p:nvCxnSpPr>
+          <p:cNvPr id="586" name="直接连接符 585">
+            <a:extLst>
+              <a:ext uri="{FF2B5EF4-FFF2-40B4-BE49-F238E27FC236}">
+                <a16:creationId xmlns:a16="http://schemas.microsoft.com/office/drawing/2014/main" id="{1DBE3D74-21D6-4D01-8877-F2B817CDB8DE}"/>
+              </a:ext>
+            </a:extLst>
+          </p:cNvPr>
+          <p:cNvCxnSpPr>
+            <a:cxnSpLocks noChangeAspect="1"/>
+            <a:stCxn id="187" idx="6"/>
+            <a:endCxn id="197" idx="2"/>
+          </p:cNvCxnSpPr>
+          <p:nvPr/>
+        </p:nvCxnSpPr>
+        <p:spPr>
+          <a:xfrm flipV="1">
+            <a:off x="5405797" y="1641056"/>
+            <a:ext cx="1428765" cy="2752769"/>
+          </a:xfrm>
+          <a:prstGeom prst="line">
+            <a:avLst/>
+          </a:prstGeom>
+          <a:ln w="19050">
+            <a:solidFill>
+              <a:schemeClr val="tx1"/>
+            </a:solidFill>
+          </a:ln>
+        </p:spPr>
+        <p:style>
+          <a:lnRef idx="3">
+            <a:schemeClr val="dk1"/>
+          </a:lnRef>
+          <a:fillRef idx="0">
+            <a:schemeClr val="dk1"/>
+          </a:fillRef>
+          <a:effectRef idx="2">
+            <a:schemeClr val="dk1"/>
+          </a:effectRef>
+          <a:fontRef idx="minor">
+            <a:schemeClr val="tx1"/>
+          </a:fontRef>
+        </p:style>
+      </p:cxnSp>
+      <p:cxnSp>
+        <p:nvCxnSpPr>
+          <p:cNvPr id="589" name="直接连接符 588">
+            <a:extLst>
+              <a:ext uri="{FF2B5EF4-FFF2-40B4-BE49-F238E27FC236}">
+                <a16:creationId xmlns:a16="http://schemas.microsoft.com/office/drawing/2014/main" id="{1DBE3D74-21D6-4D01-8877-F2B817CDB8DE}"/>
+              </a:ext>
+            </a:extLst>
+          </p:cNvPr>
+          <p:cNvCxnSpPr>
+            <a:cxnSpLocks noChangeAspect="1"/>
+            <a:stCxn id="187" idx="6"/>
+            <a:endCxn id="199" idx="2"/>
+          </p:cNvCxnSpPr>
+          <p:nvPr/>
+        </p:nvCxnSpPr>
+        <p:spPr>
+          <a:xfrm flipV="1">
+            <a:off x="5405797" y="2331114"/>
+            <a:ext cx="1427841" cy="2062711"/>
+          </a:xfrm>
+          <a:prstGeom prst="line">
+            <a:avLst/>
+          </a:prstGeom>
+          <a:ln w="19050">
+            <a:solidFill>
+              <a:schemeClr val="tx1"/>
+            </a:solidFill>
+          </a:ln>
+        </p:spPr>
+        <p:style>
+          <a:lnRef idx="3">
+            <a:schemeClr val="dk1"/>
+          </a:lnRef>
+          <a:fillRef idx="0">
+            <a:schemeClr val="dk1"/>
+          </a:fillRef>
+          <a:effectRef idx="2">
+            <a:schemeClr val="dk1"/>
+          </a:effectRef>
+          <a:fontRef idx="minor">
+            <a:schemeClr val="tx1"/>
+          </a:fontRef>
+        </p:style>
+      </p:cxnSp>
+      <p:cxnSp>
+        <p:nvCxnSpPr>
+          <p:cNvPr id="592" name="直接连接符 591">
+            <a:extLst>
+              <a:ext uri="{FF2B5EF4-FFF2-40B4-BE49-F238E27FC236}">
+                <a16:creationId xmlns:a16="http://schemas.microsoft.com/office/drawing/2014/main" id="{1DBE3D74-21D6-4D01-8877-F2B817CDB8DE}"/>
+              </a:ext>
+            </a:extLst>
+          </p:cNvPr>
+          <p:cNvCxnSpPr>
+            <a:cxnSpLocks noChangeAspect="1"/>
+            <a:stCxn id="187" idx="6"/>
+            <a:endCxn id="200" idx="2"/>
+          </p:cNvCxnSpPr>
+          <p:nvPr/>
+        </p:nvCxnSpPr>
+        <p:spPr>
+          <a:xfrm flipV="1">
+            <a:off x="5405797" y="3687169"/>
+            <a:ext cx="1427841" cy="706656"/>
+          </a:xfrm>
+          <a:prstGeom prst="line">
+            <a:avLst/>
+          </a:prstGeom>
+          <a:ln w="19050">
+            <a:solidFill>
+              <a:schemeClr val="tx1"/>
+            </a:solidFill>
+          </a:ln>
+        </p:spPr>
+        <p:style>
+          <a:lnRef idx="3">
+            <a:schemeClr val="dk1"/>
+          </a:lnRef>
+          <a:fillRef idx="0">
+            <a:schemeClr val="dk1"/>
+          </a:fillRef>
+          <a:effectRef idx="2">
+            <a:schemeClr val="dk1"/>
+          </a:effectRef>
+          <a:fontRef idx="minor">
+            <a:schemeClr val="tx1"/>
+          </a:fontRef>
+        </p:style>
+      </p:cxnSp>
+      <p:cxnSp>
+        <p:nvCxnSpPr>
+          <p:cNvPr id="595" name="直接连接符 594">
+            <a:extLst>
+              <a:ext uri="{FF2B5EF4-FFF2-40B4-BE49-F238E27FC236}">
+                <a16:creationId xmlns:a16="http://schemas.microsoft.com/office/drawing/2014/main" id="{1DBE3D74-21D6-4D01-8877-F2B817CDB8DE}"/>
+              </a:ext>
+            </a:extLst>
+          </p:cNvPr>
+          <p:cNvCxnSpPr>
+            <a:cxnSpLocks noChangeAspect="1"/>
+            <a:stCxn id="187" idx="6"/>
+            <a:endCxn id="198" idx="2"/>
+          </p:cNvCxnSpPr>
+          <p:nvPr/>
+        </p:nvCxnSpPr>
+        <p:spPr>
+          <a:xfrm flipV="1">
+            <a:off x="5405797" y="4393652"/>
+            <a:ext cx="1433907" cy="173"/>
+          </a:xfrm>
+          <a:prstGeom prst="line">
+            <a:avLst/>
+          </a:prstGeom>
+          <a:ln w="19050">
+            <a:solidFill>
+              <a:schemeClr val="tx1"/>
+            </a:solidFill>
+          </a:ln>
+        </p:spPr>
+        <p:style>
+          <a:lnRef idx="3">
+            <a:schemeClr val="dk1"/>
+          </a:lnRef>
+          <a:fillRef idx="0">
+            <a:schemeClr val="dk1"/>
+          </a:fillRef>
+          <a:effectRef idx="2">
+            <a:schemeClr val="dk1"/>
+          </a:effectRef>
+          <a:fontRef idx="minor">
+            <a:schemeClr val="tx1"/>
+          </a:fontRef>
+        </p:style>
+      </p:cxnSp>
+      <p:cxnSp>
+        <p:nvCxnSpPr>
+          <p:cNvPr id="598" name="直接连接符 597">
+            <a:extLst>
+              <a:ext uri="{FF2B5EF4-FFF2-40B4-BE49-F238E27FC236}">
+                <a16:creationId xmlns:a16="http://schemas.microsoft.com/office/drawing/2014/main" id="{1DBE3D74-21D6-4D01-8877-F2B817CDB8DE}"/>
+              </a:ext>
+            </a:extLst>
+          </p:cNvPr>
+          <p:cNvCxnSpPr>
+            <a:cxnSpLocks noChangeAspect="1"/>
+            <a:stCxn id="187" idx="6"/>
+            <a:endCxn id="195" idx="2"/>
+          </p:cNvCxnSpPr>
+          <p:nvPr/>
+        </p:nvCxnSpPr>
+        <p:spPr>
+          <a:xfrm>
+            <a:off x="5405797" y="4393825"/>
+            <a:ext cx="1439538" cy="697249"/>
+          </a:xfrm>
+          <a:prstGeom prst="line">
+            <a:avLst/>
+          </a:prstGeom>
+          <a:ln w="19050">
+            <a:solidFill>
+              <a:schemeClr val="tx1"/>
+            </a:solidFill>
+          </a:ln>
+        </p:spPr>
+        <p:style>
+          <a:lnRef idx="3">
+            <a:schemeClr val="dk1"/>
+          </a:lnRef>
+          <a:fillRef idx="0">
+            <a:schemeClr val="dk1"/>
+          </a:fillRef>
+          <a:effectRef idx="2">
+            <a:schemeClr val="dk1"/>
+          </a:effectRef>
+          <a:fontRef idx="minor">
+            <a:schemeClr val="tx1"/>
+          </a:fontRef>
+        </p:style>
+      </p:cxnSp>
+      <p:cxnSp>
+        <p:nvCxnSpPr>
+          <p:cNvPr id="601" name="直接连接符 600">
+            <a:extLst>
+              <a:ext uri="{FF2B5EF4-FFF2-40B4-BE49-F238E27FC236}">
+                <a16:creationId xmlns:a16="http://schemas.microsoft.com/office/drawing/2014/main" id="{1DBE3D74-21D6-4D01-8877-F2B817CDB8DE}"/>
+              </a:ext>
+            </a:extLst>
+          </p:cNvPr>
+          <p:cNvCxnSpPr>
+            <a:cxnSpLocks noChangeAspect="1"/>
+            <a:stCxn id="187" idx="6"/>
+            <a:endCxn id="193" idx="2"/>
+          </p:cNvCxnSpPr>
+          <p:nvPr/>
+        </p:nvCxnSpPr>
+        <p:spPr>
+          <a:xfrm>
+            <a:off x="5405797" y="4393825"/>
+            <a:ext cx="1445604" cy="1389837"/>
+          </a:xfrm>
+          <a:prstGeom prst="line">
+            <a:avLst/>
+          </a:prstGeom>
+          <a:ln w="19050">
+            <a:solidFill>
+              <a:schemeClr val="tx1"/>
+            </a:solidFill>
+          </a:ln>
+        </p:spPr>
+        <p:style>
+          <a:lnRef idx="3">
+            <a:schemeClr val="dk1"/>
+          </a:lnRef>
+          <a:fillRef idx="0">
+            <a:schemeClr val="dk1"/>
+          </a:fillRef>
+          <a:effectRef idx="2">
+            <a:schemeClr val="dk1"/>
+          </a:effectRef>
+          <a:fontRef idx="minor">
+            <a:schemeClr val="tx1"/>
+          </a:fontRef>
+        </p:style>
+      </p:cxnSp>
+      <p:cxnSp>
+        <p:nvCxnSpPr>
+          <p:cNvPr id="604" name="直接连接符 603">
+            <a:extLst>
+              <a:ext uri="{FF2B5EF4-FFF2-40B4-BE49-F238E27FC236}">
+                <a16:creationId xmlns:a16="http://schemas.microsoft.com/office/drawing/2014/main" id="{1DBE3D74-21D6-4D01-8877-F2B817CDB8DE}"/>
+              </a:ext>
+            </a:extLst>
+          </p:cNvPr>
+          <p:cNvCxnSpPr>
+            <a:cxnSpLocks noChangeAspect="1"/>
+            <a:stCxn id="184" idx="6"/>
+            <a:endCxn id="193" idx="2"/>
+          </p:cNvCxnSpPr>
+          <p:nvPr/>
+        </p:nvCxnSpPr>
+        <p:spPr>
+          <a:xfrm>
+            <a:off x="5398658" y="5091247"/>
+            <a:ext cx="1452743" cy="692415"/>
+          </a:xfrm>
+          <a:prstGeom prst="line">
+            <a:avLst/>
+          </a:prstGeom>
+          <a:ln w="19050">
+            <a:solidFill>
+              <a:schemeClr val="tx1"/>
+            </a:solidFill>
+          </a:ln>
+        </p:spPr>
+        <p:style>
+          <a:lnRef idx="3">
+            <a:schemeClr val="dk1"/>
+          </a:lnRef>
+          <a:fillRef idx="0">
+            <a:schemeClr val="dk1"/>
+          </a:fillRef>
+          <a:effectRef idx="2">
+            <a:schemeClr val="dk1"/>
+          </a:effectRef>
+          <a:fontRef idx="minor">
+            <a:schemeClr val="tx1"/>
+          </a:fontRef>
+        </p:style>
+      </p:cxnSp>
+      <p:cxnSp>
+        <p:nvCxnSpPr>
+          <p:cNvPr id="607" name="直接连接符 606">
+            <a:extLst>
+              <a:ext uri="{FF2B5EF4-FFF2-40B4-BE49-F238E27FC236}">
+                <a16:creationId xmlns:a16="http://schemas.microsoft.com/office/drawing/2014/main" id="{1DBE3D74-21D6-4D01-8877-F2B817CDB8DE}"/>
+              </a:ext>
+            </a:extLst>
+          </p:cNvPr>
+          <p:cNvCxnSpPr>
+            <a:cxnSpLocks noChangeAspect="1"/>
+            <a:stCxn id="184" idx="6"/>
+            <a:endCxn id="195" idx="2"/>
+          </p:cNvCxnSpPr>
+          <p:nvPr/>
+        </p:nvCxnSpPr>
+        <p:spPr>
+          <a:xfrm flipV="1">
+            <a:off x="5398658" y="5091074"/>
+            <a:ext cx="1446677" cy="173"/>
+          </a:xfrm>
+          <a:prstGeom prst="line">
+            <a:avLst/>
+          </a:prstGeom>
+          <a:ln w="19050">
+            <a:solidFill>
+              <a:schemeClr val="tx1"/>
+            </a:solidFill>
+          </a:ln>
+        </p:spPr>
+        <p:style>
+          <a:lnRef idx="3">
+            <a:schemeClr val="dk1"/>
+          </a:lnRef>
+          <a:fillRef idx="0">
+            <a:schemeClr val="dk1"/>
+          </a:fillRef>
+          <a:effectRef idx="2">
+            <a:schemeClr val="dk1"/>
+          </a:effectRef>
+          <a:fontRef idx="minor">
+            <a:schemeClr val="tx1"/>
+          </a:fontRef>
+        </p:style>
+      </p:cxnSp>
+      <p:cxnSp>
+        <p:nvCxnSpPr>
+          <p:cNvPr id="610" name="直接连接符 609">
+            <a:extLst>
+              <a:ext uri="{FF2B5EF4-FFF2-40B4-BE49-F238E27FC236}">
+                <a16:creationId xmlns:a16="http://schemas.microsoft.com/office/drawing/2014/main" id="{1DBE3D74-21D6-4D01-8877-F2B817CDB8DE}"/>
+              </a:ext>
+            </a:extLst>
+          </p:cNvPr>
+          <p:cNvCxnSpPr>
+            <a:cxnSpLocks noChangeAspect="1"/>
+            <a:stCxn id="184" idx="6"/>
+            <a:endCxn id="198" idx="2"/>
+          </p:cNvCxnSpPr>
+          <p:nvPr/>
+        </p:nvCxnSpPr>
+        <p:spPr>
+          <a:xfrm flipV="1">
+            <a:off x="5398658" y="4393652"/>
+            <a:ext cx="1441046" cy="697595"/>
+          </a:xfrm>
+          <a:prstGeom prst="line">
+            <a:avLst/>
+          </a:prstGeom>
+          <a:ln w="19050">
+            <a:solidFill>
+              <a:schemeClr val="tx1"/>
+            </a:solidFill>
+          </a:ln>
+        </p:spPr>
+        <p:style>
+          <a:lnRef idx="3">
+            <a:schemeClr val="dk1"/>
+          </a:lnRef>
+          <a:fillRef idx="0">
+            <a:schemeClr val="dk1"/>
+          </a:fillRef>
+          <a:effectRef idx="2">
+            <a:schemeClr val="dk1"/>
+          </a:effectRef>
+          <a:fontRef idx="minor">
+            <a:schemeClr val="tx1"/>
+          </a:fontRef>
+        </p:style>
+      </p:cxnSp>
+      <p:cxnSp>
+        <p:nvCxnSpPr>
+          <p:cNvPr id="613" name="直接连接符 612">
+            <a:extLst>
+              <a:ext uri="{FF2B5EF4-FFF2-40B4-BE49-F238E27FC236}">
+                <a16:creationId xmlns:a16="http://schemas.microsoft.com/office/drawing/2014/main" id="{1DBE3D74-21D6-4D01-8877-F2B817CDB8DE}"/>
+              </a:ext>
+            </a:extLst>
+          </p:cNvPr>
+          <p:cNvCxnSpPr>
+            <a:cxnSpLocks noChangeAspect="1"/>
+            <a:stCxn id="184" idx="6"/>
+            <a:endCxn id="200" idx="2"/>
+          </p:cNvCxnSpPr>
+          <p:nvPr/>
+        </p:nvCxnSpPr>
+        <p:spPr>
+          <a:xfrm flipV="1">
+            <a:off x="5398658" y="3687169"/>
+            <a:ext cx="1434980" cy="1404078"/>
+          </a:xfrm>
+          <a:prstGeom prst="line">
+            <a:avLst/>
+          </a:prstGeom>
+          <a:ln w="19050">
+            <a:solidFill>
+              <a:schemeClr val="tx1"/>
+            </a:solidFill>
+          </a:ln>
+        </p:spPr>
+        <p:style>
+          <a:lnRef idx="3">
+            <a:schemeClr val="dk1"/>
+          </a:lnRef>
+          <a:fillRef idx="0">
+            <a:schemeClr val="dk1"/>
+          </a:fillRef>
+          <a:effectRef idx="2">
+            <a:schemeClr val="dk1"/>
+          </a:effectRef>
+          <a:fontRef idx="minor">
+            <a:schemeClr val="tx1"/>
+          </a:fontRef>
+        </p:style>
+      </p:cxnSp>
+      <p:cxnSp>
+        <p:nvCxnSpPr>
+          <p:cNvPr id="616" name="直接连接符 615">
+            <a:extLst>
+              <a:ext uri="{FF2B5EF4-FFF2-40B4-BE49-F238E27FC236}">
+                <a16:creationId xmlns:a16="http://schemas.microsoft.com/office/drawing/2014/main" id="{1DBE3D74-21D6-4D01-8877-F2B817CDB8DE}"/>
+              </a:ext>
+            </a:extLst>
+          </p:cNvPr>
+          <p:cNvCxnSpPr>
+            <a:cxnSpLocks noChangeAspect="1"/>
+            <a:stCxn id="184" idx="6"/>
+            <a:endCxn id="199" idx="2"/>
+          </p:cNvCxnSpPr>
+          <p:nvPr/>
+        </p:nvCxnSpPr>
+        <p:spPr>
+          <a:xfrm flipV="1">
+            <a:off x="5398658" y="2331114"/>
+            <a:ext cx="1434980" cy="2760133"/>
+          </a:xfrm>
+          <a:prstGeom prst="line">
+            <a:avLst/>
+          </a:prstGeom>
+          <a:ln w="19050">
+            <a:solidFill>
+              <a:schemeClr val="tx1"/>
+            </a:solidFill>
+          </a:ln>
+        </p:spPr>
+        <p:style>
+          <a:lnRef idx="3">
+            <a:schemeClr val="dk1"/>
+          </a:lnRef>
+          <a:fillRef idx="0">
+            <a:schemeClr val="dk1"/>
+          </a:fillRef>
+          <a:effectRef idx="2">
+            <a:schemeClr val="dk1"/>
+          </a:effectRef>
+          <a:fontRef idx="minor">
+            <a:schemeClr val="tx1"/>
+          </a:fontRef>
+        </p:style>
+      </p:cxnSp>
+      <p:cxnSp>
+        <p:nvCxnSpPr>
+          <p:cNvPr id="620" name="直接连接符 619">
+            <a:extLst>
+              <a:ext uri="{FF2B5EF4-FFF2-40B4-BE49-F238E27FC236}">
+                <a16:creationId xmlns:a16="http://schemas.microsoft.com/office/drawing/2014/main" id="{1DBE3D74-21D6-4D01-8877-F2B817CDB8DE}"/>
+              </a:ext>
+            </a:extLst>
+          </p:cNvPr>
+          <p:cNvCxnSpPr>
+            <a:cxnSpLocks noChangeAspect="1"/>
+            <a:stCxn id="184" idx="6"/>
+            <a:endCxn id="197" idx="2"/>
+          </p:cNvCxnSpPr>
+          <p:nvPr/>
+        </p:nvCxnSpPr>
+        <p:spPr>
+          <a:xfrm flipV="1">
+            <a:off x="5398658" y="1641056"/>
+            <a:ext cx="1435904" cy="3450191"/>
+          </a:xfrm>
+          <a:prstGeom prst="line">
+            <a:avLst/>
+          </a:prstGeom>
+          <a:ln w="19050">
+            <a:solidFill>
+              <a:schemeClr val="tx1"/>
+            </a:solidFill>
+          </a:ln>
+        </p:spPr>
+        <p:style>
+          <a:lnRef idx="3">
+            <a:schemeClr val="dk1"/>
+          </a:lnRef>
+          <a:fillRef idx="0">
+            <a:schemeClr val="dk1"/>
+          </a:fillRef>
+          <a:effectRef idx="2">
+            <a:schemeClr val="dk1"/>
+          </a:effectRef>
+          <a:fontRef idx="minor">
+            <a:schemeClr val="tx1"/>
+          </a:fontRef>
+        </p:style>
+      </p:cxnSp>
+      <p:cxnSp>
+        <p:nvCxnSpPr>
+          <p:cNvPr id="623" name="直接连接符 622">
+            <a:extLst>
+              <a:ext uri="{FF2B5EF4-FFF2-40B4-BE49-F238E27FC236}">
+                <a16:creationId xmlns:a16="http://schemas.microsoft.com/office/drawing/2014/main" id="{1DBE3D74-21D6-4D01-8877-F2B817CDB8DE}"/>
+              </a:ext>
+            </a:extLst>
+          </p:cNvPr>
+          <p:cNvCxnSpPr>
+            <a:cxnSpLocks noChangeAspect="1"/>
+            <a:stCxn id="184" idx="6"/>
+            <a:endCxn id="192" idx="2"/>
+          </p:cNvCxnSpPr>
+          <p:nvPr/>
+        </p:nvCxnSpPr>
+        <p:spPr>
+          <a:xfrm flipV="1">
+            <a:off x="5398658" y="939607"/>
+            <a:ext cx="1437752" cy="4151640"/>
+          </a:xfrm>
+          <a:prstGeom prst="line">
+            <a:avLst/>
+          </a:prstGeom>
+          <a:ln w="19050">
+            <a:solidFill>
+              <a:schemeClr val="tx1"/>
+            </a:solidFill>
+          </a:ln>
+        </p:spPr>
+        <p:style>
+          <a:lnRef idx="3">
+            <a:schemeClr val="dk1"/>
+          </a:lnRef>
+          <a:fillRef idx="0">
+            <a:schemeClr val="dk1"/>
+          </a:fillRef>
+          <a:effectRef idx="2">
+            <a:schemeClr val="dk1"/>
+          </a:effectRef>
+          <a:fontRef idx="minor">
+            <a:schemeClr val="tx1"/>
+          </a:fontRef>
+        </p:style>
+      </p:cxnSp>
+      <p:cxnSp>
+        <p:nvCxnSpPr>
+          <p:cNvPr id="626" name="直接连接符 625">
+            <a:extLst>
+              <a:ext uri="{FF2B5EF4-FFF2-40B4-BE49-F238E27FC236}">
+                <a16:creationId xmlns:a16="http://schemas.microsoft.com/office/drawing/2014/main" id="{1DBE3D74-21D6-4D01-8877-F2B817CDB8DE}"/>
+              </a:ext>
+            </a:extLst>
+          </p:cNvPr>
+          <p:cNvCxnSpPr>
+            <a:cxnSpLocks noChangeAspect="1"/>
+            <a:stCxn id="184" idx="6"/>
+            <a:endCxn id="191" idx="2"/>
+          </p:cNvCxnSpPr>
+          <p:nvPr/>
+        </p:nvCxnSpPr>
+        <p:spPr>
+          <a:xfrm flipV="1">
+            <a:off x="5398658" y="239902"/>
+            <a:ext cx="1437753" cy="4851345"/>
+          </a:xfrm>
+          <a:prstGeom prst="line">
+            <a:avLst/>
+          </a:prstGeom>
+          <a:ln w="19050">
+            <a:solidFill>
+              <a:schemeClr val="tx1"/>
+            </a:solidFill>
+          </a:ln>
+        </p:spPr>
+        <p:style>
+          <a:lnRef idx="3">
+            <a:schemeClr val="dk1"/>
+          </a:lnRef>
+          <a:fillRef idx="0">
+            <a:schemeClr val="dk1"/>
+          </a:fillRef>
+          <a:effectRef idx="2">
+            <a:schemeClr val="dk1"/>
+          </a:effectRef>
+          <a:fontRef idx="minor">
+            <a:schemeClr val="tx1"/>
+          </a:fontRef>
+        </p:style>
+      </p:cxnSp>
+      <p:cxnSp>
+        <p:nvCxnSpPr>
+          <p:cNvPr id="629" name="直接连接符 628">
+            <a:extLst>
+              <a:ext uri="{FF2B5EF4-FFF2-40B4-BE49-F238E27FC236}">
+                <a16:creationId xmlns:a16="http://schemas.microsoft.com/office/drawing/2014/main" id="{1DBE3D74-21D6-4D01-8877-F2B817CDB8DE}"/>
+              </a:ext>
+            </a:extLst>
+          </p:cNvPr>
+          <p:cNvCxnSpPr>
+            <a:cxnSpLocks noChangeAspect="1"/>
+            <a:stCxn id="183" idx="6"/>
+            <a:endCxn id="191" idx="2"/>
+          </p:cNvCxnSpPr>
+          <p:nvPr/>
+        </p:nvCxnSpPr>
+        <p:spPr>
+          <a:xfrm flipV="1">
+            <a:off x="5384875" y="239902"/>
+            <a:ext cx="1451536" cy="5548767"/>
+          </a:xfrm>
+          <a:prstGeom prst="line">
+            <a:avLst/>
+          </a:prstGeom>
+          <a:ln w="19050">
+            <a:solidFill>
+              <a:schemeClr val="tx1"/>
+            </a:solidFill>
+          </a:ln>
+        </p:spPr>
+        <p:style>
+          <a:lnRef idx="3">
+            <a:schemeClr val="dk1"/>
+          </a:lnRef>
+          <a:fillRef idx="0">
+            <a:schemeClr val="dk1"/>
+          </a:fillRef>
+          <a:effectRef idx="2">
+            <a:schemeClr val="dk1"/>
+          </a:effectRef>
+          <a:fontRef idx="minor">
+            <a:schemeClr val="tx1"/>
+          </a:fontRef>
+        </p:style>
+      </p:cxnSp>
+      <p:cxnSp>
+        <p:nvCxnSpPr>
+          <p:cNvPr id="633" name="直接连接符 632">
+            <a:extLst>
+              <a:ext uri="{FF2B5EF4-FFF2-40B4-BE49-F238E27FC236}">
+                <a16:creationId xmlns:a16="http://schemas.microsoft.com/office/drawing/2014/main" id="{1DBE3D74-21D6-4D01-8877-F2B817CDB8DE}"/>
+              </a:ext>
+            </a:extLst>
+          </p:cNvPr>
+          <p:cNvCxnSpPr>
+            <a:cxnSpLocks noChangeAspect="1"/>
+            <a:stCxn id="183" idx="6"/>
+            <a:endCxn id="192" idx="2"/>
+          </p:cNvCxnSpPr>
+          <p:nvPr/>
+        </p:nvCxnSpPr>
+        <p:spPr>
+          <a:xfrm flipV="1">
+            <a:off x="5384875" y="939607"/>
+            <a:ext cx="1451535" cy="4849062"/>
+          </a:xfrm>
+          <a:prstGeom prst="line">
+            <a:avLst/>
+          </a:prstGeom>
+          <a:ln w="19050">
+            <a:solidFill>
+              <a:schemeClr val="tx1"/>
+            </a:solidFill>
+          </a:ln>
+        </p:spPr>
+        <p:style>
+          <a:lnRef idx="3">
+            <a:schemeClr val="dk1"/>
+          </a:lnRef>
+          <a:fillRef idx="0">
+            <a:schemeClr val="dk1"/>
+          </a:fillRef>
+          <a:effectRef idx="2">
+            <a:schemeClr val="dk1"/>
+          </a:effectRef>
+          <a:fontRef idx="minor">
+            <a:schemeClr val="tx1"/>
+          </a:fontRef>
+        </p:style>
+      </p:cxnSp>
+      <p:cxnSp>
+        <p:nvCxnSpPr>
+          <p:cNvPr id="636" name="直接连接符 635">
+            <a:extLst>
+              <a:ext uri="{FF2B5EF4-FFF2-40B4-BE49-F238E27FC236}">
+                <a16:creationId xmlns:a16="http://schemas.microsoft.com/office/drawing/2014/main" id="{1DBE3D74-21D6-4D01-8877-F2B817CDB8DE}"/>
+              </a:ext>
+            </a:extLst>
+          </p:cNvPr>
+          <p:cNvCxnSpPr>
+            <a:cxnSpLocks noChangeAspect="1"/>
+            <a:stCxn id="183" idx="6"/>
+            <a:endCxn id="197" idx="2"/>
+          </p:cNvCxnSpPr>
+          <p:nvPr/>
+        </p:nvCxnSpPr>
+        <p:spPr>
+          <a:xfrm flipV="1">
+            <a:off x="5384875" y="1641056"/>
+            <a:ext cx="1449687" cy="4147613"/>
+          </a:xfrm>
+          <a:prstGeom prst="line">
+            <a:avLst/>
+          </a:prstGeom>
+          <a:ln w="19050">
+            <a:solidFill>
+              <a:schemeClr val="tx1"/>
+            </a:solidFill>
+          </a:ln>
+        </p:spPr>
+        <p:style>
+          <a:lnRef idx="3">
+            <a:schemeClr val="dk1"/>
+          </a:lnRef>
+          <a:fillRef idx="0">
+            <a:schemeClr val="dk1"/>
+          </a:fillRef>
+          <a:effectRef idx="2">
+            <a:schemeClr val="dk1"/>
+          </a:effectRef>
+          <a:fontRef idx="minor">
+            <a:schemeClr val="tx1"/>
+          </a:fontRef>
+        </p:style>
+      </p:cxnSp>
+      <p:cxnSp>
+        <p:nvCxnSpPr>
+          <p:cNvPr id="639" name="直接连接符 638">
+            <a:extLst>
+              <a:ext uri="{FF2B5EF4-FFF2-40B4-BE49-F238E27FC236}">
+                <a16:creationId xmlns:a16="http://schemas.microsoft.com/office/drawing/2014/main" id="{1DBE3D74-21D6-4D01-8877-F2B817CDB8DE}"/>
+              </a:ext>
+            </a:extLst>
+          </p:cNvPr>
+          <p:cNvCxnSpPr>
+            <a:cxnSpLocks noChangeAspect="1"/>
+            <a:stCxn id="183" idx="6"/>
+            <a:endCxn id="199" idx="2"/>
+          </p:cNvCxnSpPr>
+          <p:nvPr/>
+        </p:nvCxnSpPr>
+        <p:spPr>
+          <a:xfrm flipV="1">
+            <a:off x="5384875" y="2331114"/>
+            <a:ext cx="1448763" cy="3457555"/>
+          </a:xfrm>
+          <a:prstGeom prst="line">
+            <a:avLst/>
+          </a:prstGeom>
+          <a:ln w="19050">
+            <a:solidFill>
+              <a:schemeClr val="tx1"/>
+            </a:solidFill>
+          </a:ln>
+        </p:spPr>
+        <p:style>
+          <a:lnRef idx="3">
+            <a:schemeClr val="dk1"/>
+          </a:lnRef>
+          <a:fillRef idx="0">
+            <a:schemeClr val="dk1"/>
+          </a:fillRef>
+          <a:effectRef idx="2">
+            <a:schemeClr val="dk1"/>
+          </a:effectRef>
+          <a:fontRef idx="minor">
+            <a:schemeClr val="tx1"/>
+          </a:fontRef>
+        </p:style>
+      </p:cxnSp>
+      <p:cxnSp>
+        <p:nvCxnSpPr>
+          <p:cNvPr id="642" name="直接连接符 641">
+            <a:extLst>
+              <a:ext uri="{FF2B5EF4-FFF2-40B4-BE49-F238E27FC236}">
+                <a16:creationId xmlns:a16="http://schemas.microsoft.com/office/drawing/2014/main" id="{1DBE3D74-21D6-4D01-8877-F2B817CDB8DE}"/>
+              </a:ext>
+            </a:extLst>
+          </p:cNvPr>
+          <p:cNvCxnSpPr>
+            <a:cxnSpLocks noChangeAspect="1"/>
+            <a:stCxn id="183" idx="6"/>
+            <a:endCxn id="200" idx="2"/>
+          </p:cNvCxnSpPr>
+          <p:nvPr/>
+        </p:nvCxnSpPr>
+        <p:spPr>
+          <a:xfrm flipV="1">
+            <a:off x="5384875" y="3687169"/>
+            <a:ext cx="1448763" cy="2101500"/>
+          </a:xfrm>
+          <a:prstGeom prst="line">
+            <a:avLst/>
+          </a:prstGeom>
+          <a:ln w="19050">
+            <a:solidFill>
+              <a:schemeClr val="tx1"/>
+            </a:solidFill>
+          </a:ln>
+        </p:spPr>
+        <p:style>
+          <a:lnRef idx="3">
+            <a:schemeClr val="dk1"/>
+          </a:lnRef>
+          <a:fillRef idx="0">
+            <a:schemeClr val="dk1"/>
+          </a:fillRef>
+          <a:effectRef idx="2">
+            <a:schemeClr val="dk1"/>
+          </a:effectRef>
+          <a:fontRef idx="minor">
+            <a:schemeClr val="tx1"/>
+          </a:fontRef>
+        </p:style>
+      </p:cxnSp>
+      <p:cxnSp>
+        <p:nvCxnSpPr>
+          <p:cNvPr id="645" name="直接连接符 644">
+            <a:extLst>
+              <a:ext uri="{FF2B5EF4-FFF2-40B4-BE49-F238E27FC236}">
+                <a16:creationId xmlns:a16="http://schemas.microsoft.com/office/drawing/2014/main" id="{1DBE3D74-21D6-4D01-8877-F2B817CDB8DE}"/>
+              </a:ext>
+            </a:extLst>
+          </p:cNvPr>
+          <p:cNvCxnSpPr>
+            <a:cxnSpLocks noChangeAspect="1"/>
+            <a:stCxn id="183" idx="6"/>
+            <a:endCxn id="198" idx="2"/>
+          </p:cNvCxnSpPr>
+          <p:nvPr/>
+        </p:nvCxnSpPr>
+        <p:spPr>
+          <a:xfrm flipV="1">
+            <a:off x="5384875" y="4393652"/>
+            <a:ext cx="1454829" cy="1395017"/>
+          </a:xfrm>
+          <a:prstGeom prst="line">
+            <a:avLst/>
+          </a:prstGeom>
+          <a:ln w="19050">
+            <a:solidFill>
+              <a:schemeClr val="tx1"/>
+            </a:solidFill>
+          </a:ln>
+        </p:spPr>
+        <p:style>
+          <a:lnRef idx="3">
+            <a:schemeClr val="dk1"/>
+          </a:lnRef>
+          <a:fillRef idx="0">
+            <a:schemeClr val="dk1"/>
+          </a:fillRef>
+          <a:effectRef idx="2">
+            <a:schemeClr val="dk1"/>
+          </a:effectRef>
+          <a:fontRef idx="minor">
+            <a:schemeClr val="tx1"/>
+          </a:fontRef>
+        </p:style>
+      </p:cxnSp>
+      <p:cxnSp>
+        <p:nvCxnSpPr>
+          <p:cNvPr id="648" name="直接连接符 647">
+            <a:extLst>
+              <a:ext uri="{FF2B5EF4-FFF2-40B4-BE49-F238E27FC236}">
+                <a16:creationId xmlns:a16="http://schemas.microsoft.com/office/drawing/2014/main" id="{1DBE3D74-21D6-4D01-8877-F2B817CDB8DE}"/>
+              </a:ext>
+            </a:extLst>
+          </p:cNvPr>
+          <p:cNvCxnSpPr>
+            <a:cxnSpLocks noChangeAspect="1"/>
+            <a:stCxn id="183" idx="6"/>
+            <a:endCxn id="195" idx="2"/>
+          </p:cNvCxnSpPr>
+          <p:nvPr/>
+        </p:nvCxnSpPr>
+        <p:spPr>
+          <a:xfrm flipV="1">
+            <a:off x="5384875" y="5091074"/>
+            <a:ext cx="1460460" cy="697595"/>
+          </a:xfrm>
+          <a:prstGeom prst="line">
+            <a:avLst/>
+          </a:prstGeom>
+          <a:ln w="19050">
+            <a:solidFill>
+              <a:schemeClr val="tx1"/>
+            </a:solidFill>
+          </a:ln>
+        </p:spPr>
+        <p:style>
+          <a:lnRef idx="3">
+            <a:schemeClr val="dk1"/>
+          </a:lnRef>
+          <a:fillRef idx="0">
+            <a:schemeClr val="dk1"/>
+          </a:fillRef>
+          <a:effectRef idx="2">
+            <a:schemeClr val="dk1"/>
+          </a:effectRef>
+          <a:fontRef idx="minor">
+            <a:schemeClr val="tx1"/>
+          </a:fontRef>
+        </p:style>
+      </p:cxnSp>
+      <p:cxnSp>
+        <p:nvCxnSpPr>
+          <p:cNvPr id="651" name="直接连接符 650">
+            <a:extLst>
+              <a:ext uri="{FF2B5EF4-FFF2-40B4-BE49-F238E27FC236}">
+                <a16:creationId xmlns:a16="http://schemas.microsoft.com/office/drawing/2014/main" id="{1DBE3D74-21D6-4D01-8877-F2B817CDB8DE}"/>
+              </a:ext>
+            </a:extLst>
+          </p:cNvPr>
+          <p:cNvCxnSpPr>
+            <a:cxnSpLocks noChangeAspect="1"/>
+            <a:stCxn id="183" idx="6"/>
+            <a:endCxn id="193" idx="2"/>
+          </p:cNvCxnSpPr>
+          <p:nvPr/>
+        </p:nvCxnSpPr>
+        <p:spPr>
+          <a:xfrm flipV="1">
+            <a:off x="5384875" y="5783662"/>
+            <a:ext cx="1466526" cy="5007"/>
+          </a:xfrm>
+          <a:prstGeom prst="line">
+            <a:avLst/>
+          </a:prstGeom>
+          <a:ln w="19050">
+            <a:solidFill>
+              <a:schemeClr val="tx1"/>
+            </a:solidFill>
+          </a:ln>
+        </p:spPr>
+        <p:style>
+          <a:lnRef idx="3">
+            <a:schemeClr val="dk1"/>
+          </a:lnRef>
+          <a:fillRef idx="0">
+            <a:schemeClr val="dk1"/>
+          </a:fillRef>
+          <a:effectRef idx="2">
+            <a:schemeClr val="dk1"/>
+          </a:effectRef>
+          <a:fontRef idx="minor">
+            <a:schemeClr val="tx1"/>
+          </a:fontRef>
+        </p:style>
+      </p:cxnSp>
+      <p:sp>
+        <p:nvSpPr>
+          <p:cNvPr id="1115" name="文本框 1114"/>
+          <p:cNvSpPr txBox="1"/>
+          <p:nvPr/>
+        </p:nvSpPr>
+        <p:spPr>
+          <a:xfrm>
+            <a:off x="8015986" y="3482536"/>
+            <a:ext cx="958917" cy="400110"/>
+          </a:xfrm>
+          <a:prstGeom prst="rect">
+            <a:avLst/>
+          </a:prstGeom>
+          <a:noFill/>
+          <a:ln w="19050">
+            <a:noFill/>
+          </a:ln>
+        </p:spPr>
+        <p:txBody>
+          <a:bodyPr wrap="none" rtlCol="0">
+            <a:spAutoFit/>
+          </a:bodyPr>
+          <a:lstStyle/>
+          <a:p>
+            <a:r>
+              <a:rPr lang="zh-CN" altLang="en-US" sz="2000" b="1" dirty="0" smtClean="0">
+                <a:latin typeface="宋体" panose="02010600030101010101" pitchFamily="2" charset="-122"/>
+                <a:ea typeface="宋体" panose="02010600030101010101" pitchFamily="2" charset="-122"/>
+              </a:rPr>
+              <a:t>输出层</a:t>
+            </a:r>
+            <a:endParaRPr lang="zh-CN" altLang="en-US" sz="2000" b="1" dirty="0">
+              <a:latin typeface="宋体" panose="02010600030101010101" pitchFamily="2" charset="-122"/>
+              <a:ea typeface="宋体" panose="02010600030101010101" pitchFamily="2" charset="-122"/>
+            </a:endParaRPr>
+          </a:p>
+        </p:txBody>
+      </p:sp>
+      <p:sp>
+        <p:nvSpPr>
+          <p:cNvPr id="1116" name="文本框 1115"/>
+          <p:cNvSpPr txBox="1"/>
+          <p:nvPr/>
+        </p:nvSpPr>
+        <p:spPr>
+          <a:xfrm>
+            <a:off x="4192053" y="6407644"/>
+            <a:ext cx="958917" cy="400110"/>
+          </a:xfrm>
+          <a:prstGeom prst="rect">
+            <a:avLst/>
+          </a:prstGeom>
+          <a:noFill/>
+          <a:ln w="19050">
+            <a:noFill/>
+          </a:ln>
+        </p:spPr>
+        <p:txBody>
+          <a:bodyPr wrap="none" rtlCol="0">
+            <a:spAutoFit/>
+          </a:bodyPr>
+          <a:lstStyle/>
+          <a:p>
+            <a:r>
+              <a:rPr lang="zh-CN" altLang="en-US" sz="2000" b="1" dirty="0" smtClean="0">
+                <a:latin typeface="宋体" panose="02010600030101010101" pitchFamily="2" charset="-122"/>
+                <a:ea typeface="宋体" panose="02010600030101010101" pitchFamily="2" charset="-122"/>
+              </a:rPr>
+              <a:t>隐藏层</a:t>
+            </a:r>
+            <a:endParaRPr lang="zh-CN" altLang="en-US" sz="2000" b="1" dirty="0">
+              <a:latin typeface="宋体" panose="02010600030101010101" pitchFamily="2" charset="-122"/>
+              <a:ea typeface="宋体" panose="02010600030101010101" pitchFamily="2" charset="-122"/>
+            </a:endParaRPr>
+          </a:p>
+        </p:txBody>
+      </p:sp>
+      <p:sp>
+        <p:nvSpPr>
+          <p:cNvPr id="1117" name="右大括号 1116"/>
+          <p:cNvSpPr/>
+          <p:nvPr/>
+        </p:nvSpPr>
+        <p:spPr>
+          <a:xfrm rot="5400000">
+            <a:off x="4511006" y="3558937"/>
+            <a:ext cx="321013" cy="5254267"/>
+          </a:xfrm>
+          <a:prstGeom prst="rightBrace">
+            <a:avLst>
+              <a:gd name="adj1" fmla="val 87121"/>
+              <a:gd name="adj2" fmla="val 50000"/>
+            </a:avLst>
+          </a:prstGeom>
+          <a:ln w="19050"/>
+        </p:spPr>
+        <p:style>
+          <a:lnRef idx="1">
+            <a:schemeClr val="dk1"/>
+          </a:lnRef>
+          <a:fillRef idx="0">
+            <a:schemeClr val="dk1"/>
+          </a:fillRef>
+          <a:effectRef idx="0">
+            <a:schemeClr val="dk1"/>
+          </a:effectRef>
+          <a:fontRef idx="minor">
+            <a:schemeClr val="tx1"/>
+          </a:fontRef>
+        </p:style>
+        <p:txBody>
+          <a:bodyPr rtlCol="0" anchor="ctr"/>
+          <a:lstStyle/>
+          <a:p>
+            <a:pPr algn="ctr"/>
+            <a:endParaRPr lang="zh-CN" altLang="en-US"/>
+          </a:p>
+        </p:txBody>
+      </p:sp>
+    </p:spTree>
+    <p:extLst>
+      <p:ext uri="{BB962C8B-B14F-4D97-AF65-F5344CB8AC3E}">
+        <p14:creationId xmlns:p14="http://schemas.microsoft.com/office/powerpoint/2010/main" val="2840321326"/>
       </p:ext>
     </p:extLst>
   </p:cSld>

--- a/figure/大论文作图.pptx
+++ b/figure/大论文作图.pptx
@@ -5,7 +5,7 @@
     <p:sldMasterId id="2147483648" r:id="rId1"/>
   </p:sldMasterIdLst>
   <p:notesMasterIdLst>
-    <p:notesMasterId r:id="rId14"/>
+    <p:notesMasterId r:id="rId15"/>
   </p:notesMasterIdLst>
   <p:sldIdLst>
     <p:sldId id="257" r:id="rId2"/>
@@ -20,6 +20,7 @@
     <p:sldId id="267" r:id="rId11"/>
     <p:sldId id="266" r:id="rId12"/>
     <p:sldId id="268" r:id="rId13"/>
+    <p:sldId id="269" r:id="rId14"/>
   </p:sldIdLst>
   <p:sldSz cx="12192000" cy="6858000"/>
   <p:notesSz cx="6858000" cy="9144000"/>
@@ -5274,7 +5275,7 @@
           <a:graphicData uri="http://schemas.openxmlformats.org/presentationml/2006/ole">
             <mc:AlternateContent xmlns:mc="http://schemas.openxmlformats.org/markup-compatibility/2006">
               <mc:Choice xmlns:v="urn:schemas-microsoft-com:vml" Requires="v">
-                <p:oleObj spid="_x0000_s4127" name="AxMath" r:id="rId3" imgW="151920" imgH="226800" progId="Equation.AxMath">
+                <p:oleObj spid="_x0000_s4243" name="AxMath" r:id="rId3" imgW="151920" imgH="226800" progId="Equation.AxMath">
                   <p:embed/>
                 </p:oleObj>
               </mc:Choice>
@@ -5331,7 +5332,7 @@
           <a:graphicData uri="http://schemas.openxmlformats.org/presentationml/2006/ole">
             <mc:AlternateContent xmlns:mc="http://schemas.openxmlformats.org/markup-compatibility/2006">
               <mc:Choice xmlns:v="urn:schemas-microsoft-com:vml" Requires="v">
-                <p:oleObj spid="_x0000_s4128" name="AxMath" r:id="rId5" imgW="151920" imgH="226800" progId="Equation.AxMath">
+                <p:oleObj spid="_x0000_s4244" name="AxMath" r:id="rId5" imgW="151920" imgH="226800" progId="Equation.AxMath">
                   <p:embed/>
                 </p:oleObj>
               </mc:Choice>
@@ -5388,7 +5389,7 @@
           <a:graphicData uri="http://schemas.openxmlformats.org/presentationml/2006/ole">
             <mc:AlternateContent xmlns:mc="http://schemas.openxmlformats.org/markup-compatibility/2006">
               <mc:Choice xmlns:v="urn:schemas-microsoft-com:vml" Requires="v">
-                <p:oleObj spid="_x0000_s4129" name="AxMath" r:id="rId6" imgW="151920" imgH="226800" progId="Equation.AxMath">
+                <p:oleObj spid="_x0000_s4245" name="AxMath" r:id="rId6" imgW="151920" imgH="226800" progId="Equation.AxMath">
                   <p:embed/>
                 </p:oleObj>
               </mc:Choice>
@@ -5445,7 +5446,7 @@
           <a:graphicData uri="http://schemas.openxmlformats.org/presentationml/2006/ole">
             <mc:AlternateContent xmlns:mc="http://schemas.openxmlformats.org/markup-compatibility/2006">
               <mc:Choice xmlns:v="urn:schemas-microsoft-com:vml" Requires="v">
-                <p:oleObj spid="_x0000_s4130" name="AxMath" r:id="rId7" imgW="151920" imgH="226800" progId="Equation.AxMath">
+                <p:oleObj spid="_x0000_s4246" name="AxMath" r:id="rId7" imgW="151920" imgH="226800" progId="Equation.AxMath">
                   <p:embed/>
                 </p:oleObj>
               </mc:Choice>
@@ -5502,7 +5503,7 @@
           <a:graphicData uri="http://schemas.openxmlformats.org/presentationml/2006/ole">
             <mc:AlternateContent xmlns:mc="http://schemas.openxmlformats.org/markup-compatibility/2006">
               <mc:Choice xmlns:v="urn:schemas-microsoft-com:vml" Requires="v">
-                <p:oleObj spid="_x0000_s4131" name="AxMath" r:id="rId8" imgW="151920" imgH="226800" progId="Equation.AxMath">
+                <p:oleObj spid="_x0000_s4247" name="AxMath" r:id="rId8" imgW="151920" imgH="226800" progId="Equation.AxMath">
                   <p:embed/>
                 </p:oleObj>
               </mc:Choice>
@@ -5559,7 +5560,7 @@
           <a:graphicData uri="http://schemas.openxmlformats.org/presentationml/2006/ole">
             <mc:AlternateContent xmlns:mc="http://schemas.openxmlformats.org/markup-compatibility/2006">
               <mc:Choice xmlns:v="urn:schemas-microsoft-com:vml" Requires="v">
-                <p:oleObj spid="_x0000_s4132" name="AxMath" r:id="rId10" imgW="151920" imgH="226800" progId="Equation.AxMath">
+                <p:oleObj spid="_x0000_s4248" name="AxMath" r:id="rId10" imgW="151920" imgH="226800" progId="Equation.AxMath">
                   <p:embed/>
                 </p:oleObj>
               </mc:Choice>
@@ -5616,7 +5617,7 @@
           <a:graphicData uri="http://schemas.openxmlformats.org/presentationml/2006/ole">
             <mc:AlternateContent xmlns:mc="http://schemas.openxmlformats.org/markup-compatibility/2006">
               <mc:Choice xmlns:v="urn:schemas-microsoft-com:vml" Requires="v">
-                <p:oleObj spid="_x0000_s4133" name="AxMath" r:id="rId11" imgW="151920" imgH="226800" progId="Equation.AxMath">
+                <p:oleObj spid="_x0000_s4249" name="AxMath" r:id="rId11" imgW="151920" imgH="226800" progId="Equation.AxMath">
                   <p:embed/>
                 </p:oleObj>
               </mc:Choice>
@@ -5673,7 +5674,7 @@
           <a:graphicData uri="http://schemas.openxmlformats.org/presentationml/2006/ole">
             <mc:AlternateContent xmlns:mc="http://schemas.openxmlformats.org/markup-compatibility/2006">
               <mc:Choice xmlns:v="urn:schemas-microsoft-com:vml" Requires="v">
-                <p:oleObj spid="_x0000_s4134" name="AxMath" r:id="rId12" imgW="151920" imgH="226800" progId="Equation.AxMath">
+                <p:oleObj spid="_x0000_s4250" name="AxMath" r:id="rId12" imgW="151920" imgH="226800" progId="Equation.AxMath">
                   <p:embed/>
                 </p:oleObj>
               </mc:Choice>
@@ -5730,7 +5731,7 @@
           <a:graphicData uri="http://schemas.openxmlformats.org/presentationml/2006/ole">
             <mc:AlternateContent xmlns:mc="http://schemas.openxmlformats.org/markup-compatibility/2006">
               <mc:Choice xmlns:v="urn:schemas-microsoft-com:vml" Requires="v">
-                <p:oleObj spid="_x0000_s4135" name="AxMath" r:id="rId13" imgW="622080" imgH="279000" progId="Equation.AxMath">
+                <p:oleObj spid="_x0000_s4251" name="AxMath" r:id="rId13" imgW="622080" imgH="279000" progId="Equation.AxMath">
                   <p:embed/>
                 </p:oleObj>
               </mc:Choice>
@@ -5835,7 +5836,7 @@
           <a:graphicData uri="http://schemas.openxmlformats.org/presentationml/2006/ole">
             <mc:AlternateContent xmlns:mc="http://schemas.openxmlformats.org/markup-compatibility/2006">
               <mc:Choice xmlns:v="urn:schemas-microsoft-com:vml" Requires="v">
-                <p:oleObj spid="_x0000_s4136" name="AxMath" r:id="rId15" imgW="629280" imgH="279000" progId="Equation.AxMath">
+                <p:oleObj spid="_x0000_s4252" name="AxMath" r:id="rId15" imgW="629280" imgH="279000" progId="Equation.AxMath">
                   <p:embed/>
                 </p:oleObj>
               </mc:Choice>
@@ -5940,7 +5941,7 @@
           <a:graphicData uri="http://schemas.openxmlformats.org/presentationml/2006/ole">
             <mc:AlternateContent xmlns:mc="http://schemas.openxmlformats.org/markup-compatibility/2006">
               <mc:Choice xmlns:v="urn:schemas-microsoft-com:vml" Requires="v">
-                <p:oleObj spid="_x0000_s4137" name="AxMath" r:id="rId17" imgW="630720" imgH="279000" progId="Equation.AxMath">
+                <p:oleObj spid="_x0000_s4253" name="AxMath" r:id="rId17" imgW="630720" imgH="279000" progId="Equation.AxMath">
                   <p:embed/>
                 </p:oleObj>
               </mc:Choice>
@@ -6045,7 +6046,7 @@
           <a:graphicData uri="http://schemas.openxmlformats.org/presentationml/2006/ole">
             <mc:AlternateContent xmlns:mc="http://schemas.openxmlformats.org/markup-compatibility/2006">
               <mc:Choice xmlns:v="urn:schemas-microsoft-com:vml" Requires="v">
-                <p:oleObj spid="_x0000_s4138" name="AxMath" r:id="rId19" imgW="637560" imgH="279000" progId="Equation.AxMath">
+                <p:oleObj spid="_x0000_s4254" name="AxMath" r:id="rId19" imgW="637560" imgH="279000" progId="Equation.AxMath">
                   <p:embed/>
                 </p:oleObj>
               </mc:Choice>
@@ -6102,7 +6103,7 @@
           <a:graphicData uri="http://schemas.openxmlformats.org/presentationml/2006/ole">
             <mc:AlternateContent xmlns:mc="http://schemas.openxmlformats.org/markup-compatibility/2006">
               <mc:Choice xmlns:v="urn:schemas-microsoft-com:vml" Requires="v">
-                <p:oleObj spid="_x0000_s4139" name="AxMath" r:id="rId21" imgW="629280" imgH="279000" progId="Equation.AxMath">
+                <p:oleObj spid="_x0000_s4255" name="AxMath" r:id="rId21" imgW="629280" imgH="279000" progId="Equation.AxMath">
                   <p:embed/>
                 </p:oleObj>
               </mc:Choice>
@@ -6205,7 +6206,7 @@
           <a:graphicData uri="http://schemas.openxmlformats.org/presentationml/2006/ole">
             <mc:AlternateContent xmlns:mc="http://schemas.openxmlformats.org/markup-compatibility/2006">
               <mc:Choice xmlns:v="urn:schemas-microsoft-com:vml" Requires="v">
-                <p:oleObj spid="_x0000_s4140" name="AxMath" r:id="rId23" imgW="839160" imgH="279000" progId="Equation.AxMath">
+                <p:oleObj spid="_x0000_s4256" name="AxMath" r:id="rId23" imgW="839160" imgH="279000" progId="Equation.AxMath">
                   <p:embed/>
                 </p:oleObj>
               </mc:Choice>
@@ -6308,7 +6309,7 @@
           <a:graphicData uri="http://schemas.openxmlformats.org/presentationml/2006/ole">
             <mc:AlternateContent xmlns:mc="http://schemas.openxmlformats.org/markup-compatibility/2006">
               <mc:Choice xmlns:v="urn:schemas-microsoft-com:vml" Requires="v">
-                <p:oleObj spid="_x0000_s4141" name="AxMath" r:id="rId25" imgW="773640" imgH="230400" progId="Equation.AxMath">
+                <p:oleObj spid="_x0000_s4257" name="AxMath" r:id="rId25" imgW="773640" imgH="230400" progId="Equation.AxMath">
                   <p:embed/>
                 </p:oleObj>
               </mc:Choice>
@@ -6411,7 +6412,7 @@
           <a:graphicData uri="http://schemas.openxmlformats.org/presentationml/2006/ole">
             <mc:AlternateContent xmlns:mc="http://schemas.openxmlformats.org/markup-compatibility/2006">
               <mc:Choice xmlns:v="urn:schemas-microsoft-com:vml" Requires="v">
-                <p:oleObj spid="_x0000_s4142" name="AxMath" r:id="rId27" imgW="1183680" imgH="279000" progId="Equation.AxMath">
+                <p:oleObj spid="_x0000_s4258" name="AxMath" r:id="rId27" imgW="1183680" imgH="279000" progId="Equation.AxMath">
                   <p:embed/>
                 </p:oleObj>
               </mc:Choice>
@@ -6514,7 +6515,7 @@
           <a:graphicData uri="http://schemas.openxmlformats.org/presentationml/2006/ole">
             <mc:AlternateContent xmlns:mc="http://schemas.openxmlformats.org/markup-compatibility/2006">
               <mc:Choice xmlns:v="urn:schemas-microsoft-com:vml" Requires="v">
-                <p:oleObj spid="_x0000_s4143" name="AxMath" r:id="rId29" imgW="1183680" imgH="279000" progId="Equation.AxMath">
+                <p:oleObj spid="_x0000_s4259" name="AxMath" r:id="rId29" imgW="1183680" imgH="279000" progId="Equation.AxMath">
                   <p:embed/>
                 </p:oleObj>
               </mc:Choice>
@@ -6619,7 +6620,7 @@
           <a:graphicData uri="http://schemas.openxmlformats.org/presentationml/2006/ole">
             <mc:AlternateContent xmlns:mc="http://schemas.openxmlformats.org/markup-compatibility/2006">
               <mc:Choice xmlns:v="urn:schemas-microsoft-com:vml" Requires="v">
-                <p:oleObj spid="_x0000_s4144" name="AxMath" r:id="rId31" imgW="630720" imgH="279000" progId="Equation.AxMath">
+                <p:oleObj spid="_x0000_s4260" name="AxMath" r:id="rId31" imgW="630720" imgH="279000" progId="Equation.AxMath">
                   <p:embed/>
                 </p:oleObj>
               </mc:Choice>
@@ -6722,7 +6723,7 @@
           <a:graphicData uri="http://schemas.openxmlformats.org/presentationml/2006/ole">
             <mc:AlternateContent xmlns:mc="http://schemas.openxmlformats.org/markup-compatibility/2006">
               <mc:Choice xmlns:v="urn:schemas-microsoft-com:vml" Requires="v">
-                <p:oleObj spid="_x0000_s4145" name="AxMath" r:id="rId33" imgW="606240" imgH="279000" progId="Equation.AxMath">
+                <p:oleObj spid="_x0000_s4261" name="AxMath" r:id="rId33" imgW="606240" imgH="279000" progId="Equation.AxMath">
                   <p:embed/>
                 </p:oleObj>
               </mc:Choice>
@@ -6825,7 +6826,7 @@
           <a:graphicData uri="http://schemas.openxmlformats.org/presentationml/2006/ole">
             <mc:AlternateContent xmlns:mc="http://schemas.openxmlformats.org/markup-compatibility/2006">
               <mc:Choice xmlns:v="urn:schemas-microsoft-com:vml" Requires="v">
-                <p:oleObj spid="_x0000_s4146" name="AxMath" r:id="rId35" imgW="604080" imgH="279000" progId="Equation.AxMath">
+                <p:oleObj spid="_x0000_s4262" name="AxMath" r:id="rId35" imgW="604080" imgH="279000" progId="Equation.AxMath">
                   <p:embed/>
                 </p:oleObj>
               </mc:Choice>
@@ -6928,7 +6929,7 @@
           <a:graphicData uri="http://schemas.openxmlformats.org/presentationml/2006/ole">
             <mc:AlternateContent xmlns:mc="http://schemas.openxmlformats.org/markup-compatibility/2006">
               <mc:Choice xmlns:v="urn:schemas-microsoft-com:vml" Requires="v">
-                <p:oleObj spid="_x0000_s4147" name="AxMath" r:id="rId37" imgW="606240" imgH="279000" progId="Equation.AxMath">
+                <p:oleObj spid="_x0000_s4263" name="AxMath" r:id="rId37" imgW="606240" imgH="279000" progId="Equation.AxMath">
                   <p:embed/>
                 </p:oleObj>
               </mc:Choice>
@@ -7031,7 +7032,7 @@
           <a:graphicData uri="http://schemas.openxmlformats.org/presentationml/2006/ole">
             <mc:AlternateContent xmlns:mc="http://schemas.openxmlformats.org/markup-compatibility/2006">
               <mc:Choice xmlns:v="urn:schemas-microsoft-com:vml" Requires="v">
-                <p:oleObj spid="_x0000_s4148" name="AxMath" r:id="rId39" imgW="637920" imgH="279000" progId="Equation.AxMath">
+                <p:oleObj spid="_x0000_s4264" name="AxMath" r:id="rId39" imgW="637920" imgH="279000" progId="Equation.AxMath">
                   <p:embed/>
                 </p:oleObj>
               </mc:Choice>
@@ -7134,7 +7135,7 @@
           <a:graphicData uri="http://schemas.openxmlformats.org/presentationml/2006/ole">
             <mc:AlternateContent xmlns:mc="http://schemas.openxmlformats.org/markup-compatibility/2006">
               <mc:Choice xmlns:v="urn:schemas-microsoft-com:vml" Requires="v">
-                <p:oleObj spid="_x0000_s4149" name="AxMath" r:id="rId41" imgW="636480" imgH="279000" progId="Equation.AxMath">
+                <p:oleObj spid="_x0000_s4265" name="AxMath" r:id="rId41" imgW="636480" imgH="279000" progId="Equation.AxMath">
                   <p:embed/>
                 </p:oleObj>
               </mc:Choice>
@@ -7237,7 +7238,7 @@
           <a:graphicData uri="http://schemas.openxmlformats.org/presentationml/2006/ole">
             <mc:AlternateContent xmlns:mc="http://schemas.openxmlformats.org/markup-compatibility/2006">
               <mc:Choice xmlns:v="urn:schemas-microsoft-com:vml" Requires="v">
-                <p:oleObj spid="_x0000_s4150" name="AxMath" r:id="rId43" imgW="629280" imgH="279000" progId="Equation.AxMath">
+                <p:oleObj spid="_x0000_s4266" name="AxMath" r:id="rId43" imgW="629280" imgH="279000" progId="Equation.AxMath">
                   <p:embed/>
                 </p:oleObj>
               </mc:Choice>
@@ -7580,7 +7581,7 @@
           <a:graphicData uri="http://schemas.openxmlformats.org/presentationml/2006/ole">
             <mc:AlternateContent xmlns:mc="http://schemas.openxmlformats.org/markup-compatibility/2006">
               <mc:Choice xmlns:v="urn:schemas-microsoft-com:vml" Requires="v">
-                <p:oleObj spid="_x0000_s4151" name="AxMath" r:id="rId7" imgW="151920" imgH="226800" progId="Equation.AxMath">
+                <p:oleObj spid="_x0000_s4267" name="AxMath" r:id="rId7" imgW="151920" imgH="226800" progId="Equation.AxMath">
                   <p:embed/>
                 </p:oleObj>
               </mc:Choice>
@@ -7685,7 +7686,7 @@
           <a:graphicData uri="http://schemas.openxmlformats.org/presentationml/2006/ole">
             <mc:AlternateContent xmlns:mc="http://schemas.openxmlformats.org/markup-compatibility/2006">
               <mc:Choice xmlns:v="urn:schemas-microsoft-com:vml" Requires="v">
-                <p:oleObj spid="_x0000_s4152" name="AxMath" r:id="rId45" imgW="637560" imgH="279000" progId="Equation.AxMath">
+                <p:oleObj spid="_x0000_s4268" name="AxMath" r:id="rId45" imgW="637560" imgH="279000" progId="Equation.AxMath">
                   <p:embed/>
                 </p:oleObj>
               </mc:Choice>
@@ -7788,7 +7789,7 @@
           <a:graphicData uri="http://schemas.openxmlformats.org/presentationml/2006/ole">
             <mc:AlternateContent xmlns:mc="http://schemas.openxmlformats.org/markup-compatibility/2006">
               <mc:Choice xmlns:v="urn:schemas-microsoft-com:vml" Requires="v">
-                <p:oleObj spid="_x0000_s4153" name="AxMath" r:id="rId46" imgW="630720" imgH="279000" progId="Equation.AxMath">
+                <p:oleObj spid="_x0000_s4269" name="AxMath" r:id="rId46" imgW="630720" imgH="279000" progId="Equation.AxMath">
                   <p:embed/>
                 </p:oleObj>
               </mc:Choice>
@@ -7891,7 +7892,7 @@
           <a:graphicData uri="http://schemas.openxmlformats.org/presentationml/2006/ole">
             <mc:AlternateContent xmlns:mc="http://schemas.openxmlformats.org/markup-compatibility/2006">
               <mc:Choice xmlns:v="urn:schemas-microsoft-com:vml" Requires="v">
-                <p:oleObj spid="_x0000_s4154" name="AxMath" r:id="rId48" imgW="629280" imgH="279000" progId="Equation.AxMath">
+                <p:oleObj spid="_x0000_s4270" name="AxMath" r:id="rId48" imgW="629280" imgH="279000" progId="Equation.AxMath">
                   <p:embed/>
                 </p:oleObj>
               </mc:Choice>
@@ -7996,7 +7997,7 @@
           <a:graphicData uri="http://schemas.openxmlformats.org/presentationml/2006/ole">
             <mc:AlternateContent xmlns:mc="http://schemas.openxmlformats.org/markup-compatibility/2006">
               <mc:Choice xmlns:v="urn:schemas-microsoft-com:vml" Requires="v">
-                <p:oleObj spid="_x0000_s4155" name="AxMath" r:id="rId50" imgW="622080" imgH="279000" progId="Equation.AxMath">
+                <p:oleObj spid="_x0000_s4271" name="AxMath" r:id="rId50" imgW="622080" imgH="279000" progId="Equation.AxMath">
                   <p:embed/>
                 </p:oleObj>
               </mc:Choice>
@@ -8472,7 +8473,7 @@
           <a:graphicData uri="http://schemas.openxmlformats.org/presentationml/2006/ole">
             <mc:AlternateContent xmlns:mc="http://schemas.openxmlformats.org/markup-compatibility/2006">
               <mc:Choice xmlns:v="urn:schemas-microsoft-com:vml" Requires="v">
-                <p:oleObj spid="_x0000_s5151" name="AxMath" r:id="rId3" imgW="151920" imgH="226800" progId="Equation.AxMath">
+                <p:oleObj spid="_x0000_s5267" name="AxMath" r:id="rId3" imgW="151920" imgH="226800" progId="Equation.AxMath">
                   <p:embed/>
                 </p:oleObj>
               </mc:Choice>
@@ -8529,7 +8530,7 @@
           <a:graphicData uri="http://schemas.openxmlformats.org/presentationml/2006/ole">
             <mc:AlternateContent xmlns:mc="http://schemas.openxmlformats.org/markup-compatibility/2006">
               <mc:Choice xmlns:v="urn:schemas-microsoft-com:vml" Requires="v">
-                <p:oleObj spid="_x0000_s5152" name="AxMath" r:id="rId5" imgW="151920" imgH="226800" progId="Equation.AxMath">
+                <p:oleObj spid="_x0000_s5268" name="AxMath" r:id="rId5" imgW="151920" imgH="226800" progId="Equation.AxMath">
                   <p:embed/>
                 </p:oleObj>
               </mc:Choice>
@@ -8586,7 +8587,7 @@
           <a:graphicData uri="http://schemas.openxmlformats.org/presentationml/2006/ole">
             <mc:AlternateContent xmlns:mc="http://schemas.openxmlformats.org/markup-compatibility/2006">
               <mc:Choice xmlns:v="urn:schemas-microsoft-com:vml" Requires="v">
-                <p:oleObj spid="_x0000_s5153" name="AxMath" r:id="rId6" imgW="151920" imgH="226800" progId="Equation.AxMath">
+                <p:oleObj spid="_x0000_s5269" name="AxMath" r:id="rId6" imgW="151920" imgH="226800" progId="Equation.AxMath">
                   <p:embed/>
                 </p:oleObj>
               </mc:Choice>
@@ -8643,7 +8644,7 @@
           <a:graphicData uri="http://schemas.openxmlformats.org/presentationml/2006/ole">
             <mc:AlternateContent xmlns:mc="http://schemas.openxmlformats.org/markup-compatibility/2006">
               <mc:Choice xmlns:v="urn:schemas-microsoft-com:vml" Requires="v">
-                <p:oleObj spid="_x0000_s5154" name="AxMath" r:id="rId7" imgW="151920" imgH="226800" progId="Equation.AxMath">
+                <p:oleObj spid="_x0000_s5270" name="AxMath" r:id="rId7" imgW="151920" imgH="226800" progId="Equation.AxMath">
                   <p:embed/>
                 </p:oleObj>
               </mc:Choice>
@@ -8700,7 +8701,7 @@
           <a:graphicData uri="http://schemas.openxmlformats.org/presentationml/2006/ole">
             <mc:AlternateContent xmlns:mc="http://schemas.openxmlformats.org/markup-compatibility/2006">
               <mc:Choice xmlns:v="urn:schemas-microsoft-com:vml" Requires="v">
-                <p:oleObj spid="_x0000_s5155" name="AxMath" r:id="rId8" imgW="151920" imgH="226800" progId="Equation.AxMath">
+                <p:oleObj spid="_x0000_s5271" name="AxMath" r:id="rId8" imgW="151920" imgH="226800" progId="Equation.AxMath">
                   <p:embed/>
                 </p:oleObj>
               </mc:Choice>
@@ -8757,7 +8758,7 @@
           <a:graphicData uri="http://schemas.openxmlformats.org/presentationml/2006/ole">
             <mc:AlternateContent xmlns:mc="http://schemas.openxmlformats.org/markup-compatibility/2006">
               <mc:Choice xmlns:v="urn:schemas-microsoft-com:vml" Requires="v">
-                <p:oleObj spid="_x0000_s5156" name="AxMath" r:id="rId10" imgW="151920" imgH="226800" progId="Equation.AxMath">
+                <p:oleObj spid="_x0000_s5272" name="AxMath" r:id="rId10" imgW="151920" imgH="226800" progId="Equation.AxMath">
                   <p:embed/>
                 </p:oleObj>
               </mc:Choice>
@@ -8814,7 +8815,7 @@
           <a:graphicData uri="http://schemas.openxmlformats.org/presentationml/2006/ole">
             <mc:AlternateContent xmlns:mc="http://schemas.openxmlformats.org/markup-compatibility/2006">
               <mc:Choice xmlns:v="urn:schemas-microsoft-com:vml" Requires="v">
-                <p:oleObj spid="_x0000_s5157" name="AxMath" r:id="rId11" imgW="151920" imgH="226800" progId="Equation.AxMath">
+                <p:oleObj spid="_x0000_s5273" name="AxMath" r:id="rId11" imgW="151920" imgH="226800" progId="Equation.AxMath">
                   <p:embed/>
                 </p:oleObj>
               </mc:Choice>
@@ -8871,7 +8872,7 @@
           <a:graphicData uri="http://schemas.openxmlformats.org/presentationml/2006/ole">
             <mc:AlternateContent xmlns:mc="http://schemas.openxmlformats.org/markup-compatibility/2006">
               <mc:Choice xmlns:v="urn:schemas-microsoft-com:vml" Requires="v">
-                <p:oleObj spid="_x0000_s5158" name="AxMath" r:id="rId12" imgW="151920" imgH="226800" progId="Equation.AxMath">
+                <p:oleObj spid="_x0000_s5274" name="AxMath" r:id="rId12" imgW="151920" imgH="226800" progId="Equation.AxMath">
                   <p:embed/>
                 </p:oleObj>
               </mc:Choice>
@@ -8928,7 +8929,7 @@
           <a:graphicData uri="http://schemas.openxmlformats.org/presentationml/2006/ole">
             <mc:AlternateContent xmlns:mc="http://schemas.openxmlformats.org/markup-compatibility/2006">
               <mc:Choice xmlns:v="urn:schemas-microsoft-com:vml" Requires="v">
-                <p:oleObj spid="_x0000_s5159" name="AxMath" r:id="rId13" imgW="622080" imgH="279000" progId="Equation.AxMath">
+                <p:oleObj spid="_x0000_s5275" name="AxMath" r:id="rId13" imgW="622080" imgH="279000" progId="Equation.AxMath">
                   <p:embed/>
                 </p:oleObj>
               </mc:Choice>
@@ -9033,7 +9034,7 @@
           <a:graphicData uri="http://schemas.openxmlformats.org/presentationml/2006/ole">
             <mc:AlternateContent xmlns:mc="http://schemas.openxmlformats.org/markup-compatibility/2006">
               <mc:Choice xmlns:v="urn:schemas-microsoft-com:vml" Requires="v">
-                <p:oleObj spid="_x0000_s5160" name="AxMath" r:id="rId15" imgW="629280" imgH="279000" progId="Equation.AxMath">
+                <p:oleObj spid="_x0000_s5276" name="AxMath" r:id="rId15" imgW="629280" imgH="279000" progId="Equation.AxMath">
                   <p:embed/>
                 </p:oleObj>
               </mc:Choice>
@@ -9138,7 +9139,7 @@
           <a:graphicData uri="http://schemas.openxmlformats.org/presentationml/2006/ole">
             <mc:AlternateContent xmlns:mc="http://schemas.openxmlformats.org/markup-compatibility/2006">
               <mc:Choice xmlns:v="urn:schemas-microsoft-com:vml" Requires="v">
-                <p:oleObj spid="_x0000_s5161" name="AxMath" r:id="rId17" imgW="630720" imgH="279000" progId="Equation.AxMath">
+                <p:oleObj spid="_x0000_s5277" name="AxMath" r:id="rId17" imgW="630720" imgH="279000" progId="Equation.AxMath">
                   <p:embed/>
                 </p:oleObj>
               </mc:Choice>
@@ -9243,7 +9244,7 @@
           <a:graphicData uri="http://schemas.openxmlformats.org/presentationml/2006/ole">
             <mc:AlternateContent xmlns:mc="http://schemas.openxmlformats.org/markup-compatibility/2006">
               <mc:Choice xmlns:v="urn:schemas-microsoft-com:vml" Requires="v">
-                <p:oleObj spid="_x0000_s5162" name="AxMath" r:id="rId19" imgW="637560" imgH="279000" progId="Equation.AxMath">
+                <p:oleObj spid="_x0000_s5278" name="AxMath" r:id="rId19" imgW="637560" imgH="279000" progId="Equation.AxMath">
                   <p:embed/>
                 </p:oleObj>
               </mc:Choice>
@@ -9300,7 +9301,7 @@
           <a:graphicData uri="http://schemas.openxmlformats.org/presentationml/2006/ole">
             <mc:AlternateContent xmlns:mc="http://schemas.openxmlformats.org/markup-compatibility/2006">
               <mc:Choice xmlns:v="urn:schemas-microsoft-com:vml" Requires="v">
-                <p:oleObj spid="_x0000_s5163" name="AxMath" r:id="rId21" imgW="629280" imgH="279000" progId="Equation.AxMath">
+                <p:oleObj spid="_x0000_s5279" name="AxMath" r:id="rId21" imgW="629280" imgH="279000" progId="Equation.AxMath">
                   <p:embed/>
                 </p:oleObj>
               </mc:Choice>
@@ -9405,7 +9406,7 @@
           <a:graphicData uri="http://schemas.openxmlformats.org/presentationml/2006/ole">
             <mc:AlternateContent xmlns:mc="http://schemas.openxmlformats.org/markup-compatibility/2006">
               <mc:Choice xmlns:v="urn:schemas-microsoft-com:vml" Requires="v">
-                <p:oleObj spid="_x0000_s5164" name="AxMath" r:id="rId23" imgW="630720" imgH="279000" progId="Equation.AxMath">
+                <p:oleObj spid="_x0000_s5280" name="AxMath" r:id="rId23" imgW="630720" imgH="279000" progId="Equation.AxMath">
                   <p:embed/>
                 </p:oleObj>
               </mc:Choice>
@@ -9510,7 +9511,7 @@
           <a:graphicData uri="http://schemas.openxmlformats.org/presentationml/2006/ole">
             <mc:AlternateContent xmlns:mc="http://schemas.openxmlformats.org/markup-compatibility/2006">
               <mc:Choice xmlns:v="urn:schemas-microsoft-com:vml" Requires="v">
-                <p:oleObj spid="_x0000_s5165" name="AxMath" r:id="rId25" imgW="630720" imgH="279000" progId="Equation.AxMath">
+                <p:oleObj spid="_x0000_s5281" name="AxMath" r:id="rId25" imgW="630720" imgH="279000" progId="Equation.AxMath">
                   <p:embed/>
                 </p:oleObj>
               </mc:Choice>
@@ -9615,7 +9616,7 @@
           <a:graphicData uri="http://schemas.openxmlformats.org/presentationml/2006/ole">
             <mc:AlternateContent xmlns:mc="http://schemas.openxmlformats.org/markup-compatibility/2006">
               <mc:Choice xmlns:v="urn:schemas-microsoft-com:vml" Requires="v">
-                <p:oleObj spid="_x0000_s5166" name="AxMath" r:id="rId27" imgW="622080" imgH="279000" progId="Equation.AxMath">
+                <p:oleObj spid="_x0000_s5282" name="AxMath" r:id="rId27" imgW="622080" imgH="279000" progId="Equation.AxMath">
                   <p:embed/>
                 </p:oleObj>
               </mc:Choice>
@@ -9720,7 +9721,7 @@
           <a:graphicData uri="http://schemas.openxmlformats.org/presentationml/2006/ole">
             <mc:AlternateContent xmlns:mc="http://schemas.openxmlformats.org/markup-compatibility/2006">
               <mc:Choice xmlns:v="urn:schemas-microsoft-com:vml" Requires="v">
-                <p:oleObj spid="_x0000_s5167" name="AxMath" r:id="rId29" imgW="629280" imgH="279000" progId="Equation.AxMath">
+                <p:oleObj spid="_x0000_s5283" name="AxMath" r:id="rId29" imgW="629280" imgH="279000" progId="Equation.AxMath">
                   <p:embed/>
                 </p:oleObj>
               </mc:Choice>
@@ -9825,7 +9826,7 @@
           <a:graphicData uri="http://schemas.openxmlformats.org/presentationml/2006/ole">
             <mc:AlternateContent xmlns:mc="http://schemas.openxmlformats.org/markup-compatibility/2006">
               <mc:Choice xmlns:v="urn:schemas-microsoft-com:vml" Requires="v">
-                <p:oleObj spid="_x0000_s5168" name="AxMath" r:id="rId31" imgW="622080" imgH="279000" progId="Equation.AxMath">
+                <p:oleObj spid="_x0000_s5284" name="AxMath" r:id="rId31" imgW="622080" imgH="279000" progId="Equation.AxMath">
                   <p:embed/>
                 </p:oleObj>
               </mc:Choice>
@@ -9930,7 +9931,7 @@
           <a:graphicData uri="http://schemas.openxmlformats.org/presentationml/2006/ole">
             <mc:AlternateContent xmlns:mc="http://schemas.openxmlformats.org/markup-compatibility/2006">
               <mc:Choice xmlns:v="urn:schemas-microsoft-com:vml" Requires="v">
-                <p:oleObj spid="_x0000_s5169" name="AxMath" r:id="rId32" imgW="630720" imgH="279000" progId="Equation.AxMath">
+                <p:oleObj spid="_x0000_s5285" name="AxMath" r:id="rId32" imgW="630720" imgH="279000" progId="Equation.AxMath">
                   <p:embed/>
                 </p:oleObj>
               </mc:Choice>
@@ -10035,7 +10036,7 @@
           <a:graphicData uri="http://schemas.openxmlformats.org/presentationml/2006/ole">
             <mc:AlternateContent xmlns:mc="http://schemas.openxmlformats.org/markup-compatibility/2006">
               <mc:Choice xmlns:v="urn:schemas-microsoft-com:vml" Requires="v">
-                <p:oleObj spid="_x0000_s5170" name="AxMath" r:id="rId34" imgW="629280" imgH="279000" progId="Equation.AxMath">
+                <p:oleObj spid="_x0000_s5286" name="AxMath" r:id="rId34" imgW="629280" imgH="279000" progId="Equation.AxMath">
                   <p:embed/>
                 </p:oleObj>
               </mc:Choice>
@@ -10140,7 +10141,7 @@
           <a:graphicData uri="http://schemas.openxmlformats.org/presentationml/2006/ole">
             <mc:AlternateContent xmlns:mc="http://schemas.openxmlformats.org/markup-compatibility/2006">
               <mc:Choice xmlns:v="urn:schemas-microsoft-com:vml" Requires="v">
-                <p:oleObj spid="_x0000_s5171" name="AxMath" r:id="rId36" imgW="622080" imgH="279000" progId="Equation.AxMath">
+                <p:oleObj spid="_x0000_s5287" name="AxMath" r:id="rId36" imgW="622080" imgH="279000" progId="Equation.AxMath">
                   <p:embed/>
                 </p:oleObj>
               </mc:Choice>
@@ -10483,7 +10484,7 @@
           <a:graphicData uri="http://schemas.openxmlformats.org/presentationml/2006/ole">
             <mc:AlternateContent xmlns:mc="http://schemas.openxmlformats.org/markup-compatibility/2006">
               <mc:Choice xmlns:v="urn:schemas-microsoft-com:vml" Requires="v">
-                <p:oleObj spid="_x0000_s5172" name="AxMath" r:id="rId7" imgW="151920" imgH="226800" progId="Equation.AxMath">
+                <p:oleObj spid="_x0000_s5288" name="AxMath" r:id="rId7" imgW="151920" imgH="226800" progId="Equation.AxMath">
                   <p:embed/>
                 </p:oleObj>
               </mc:Choice>
@@ -10636,7 +10637,7 @@
           <a:graphicData uri="http://schemas.openxmlformats.org/presentationml/2006/ole">
             <mc:AlternateContent xmlns:mc="http://schemas.openxmlformats.org/markup-compatibility/2006">
               <mc:Choice xmlns:v="urn:schemas-microsoft-com:vml" Requires="v">
-                <p:oleObj spid="_x0000_s5173" name="AxMath" r:id="rId38" imgW="630720" imgH="279000" progId="Equation.AxMath">
+                <p:oleObj spid="_x0000_s5289" name="AxMath" r:id="rId38" imgW="630720" imgH="279000" progId="Equation.AxMath">
                   <p:embed/>
                 </p:oleObj>
               </mc:Choice>
@@ -10741,7 +10742,7 @@
           <a:graphicData uri="http://schemas.openxmlformats.org/presentationml/2006/ole">
             <mc:AlternateContent xmlns:mc="http://schemas.openxmlformats.org/markup-compatibility/2006">
               <mc:Choice xmlns:v="urn:schemas-microsoft-com:vml" Requires="v">
-                <p:oleObj spid="_x0000_s5174" name="AxMath" r:id="rId40" imgW="629280" imgH="279000" progId="Equation.AxMath">
+                <p:oleObj spid="_x0000_s5290" name="AxMath" r:id="rId40" imgW="629280" imgH="279000" progId="Equation.AxMath">
                   <p:embed/>
                 </p:oleObj>
               </mc:Choice>
@@ -10846,7 +10847,7 @@
           <a:graphicData uri="http://schemas.openxmlformats.org/presentationml/2006/ole">
             <mc:AlternateContent xmlns:mc="http://schemas.openxmlformats.org/markup-compatibility/2006">
               <mc:Choice xmlns:v="urn:schemas-microsoft-com:vml" Requires="v">
-                <p:oleObj spid="_x0000_s5175" name="AxMath" r:id="rId41" imgW="622080" imgH="279000" progId="Equation.AxMath">
+                <p:oleObj spid="_x0000_s5291" name="AxMath" r:id="rId41" imgW="622080" imgH="279000" progId="Equation.AxMath">
                   <p:embed/>
                 </p:oleObj>
               </mc:Choice>
@@ -10977,7 +10978,7 @@
           <a:graphicData uri="http://schemas.openxmlformats.org/presentationml/2006/ole">
             <mc:AlternateContent xmlns:mc="http://schemas.openxmlformats.org/markup-compatibility/2006">
               <mc:Choice xmlns:v="urn:schemas-microsoft-com:vml" Requires="v">
-                <p:oleObj spid="_x0000_s5176" name="AxMath" r:id="rId19" imgW="637560" imgH="279000" progId="Equation.AxMath">
+                <p:oleObj spid="_x0000_s5292" name="AxMath" r:id="rId19" imgW="637560" imgH="279000" progId="Equation.AxMath">
                   <p:embed/>
                 </p:oleObj>
               </mc:Choice>
@@ -11082,7 +11083,7 @@
           <a:graphicData uri="http://schemas.openxmlformats.org/presentationml/2006/ole">
             <mc:AlternateContent xmlns:mc="http://schemas.openxmlformats.org/markup-compatibility/2006">
               <mc:Choice xmlns:v="urn:schemas-microsoft-com:vml" Requires="v">
-                <p:oleObj spid="_x0000_s5177" name="AxMath" r:id="rId43" imgW="637560" imgH="279000" progId="Equation.AxMath">
+                <p:oleObj spid="_x0000_s5293" name="AxMath" r:id="rId43" imgW="637560" imgH="279000" progId="Equation.AxMath">
                   <p:embed/>
                 </p:oleObj>
               </mc:Choice>
@@ -11187,7 +11188,7 @@
           <a:graphicData uri="http://schemas.openxmlformats.org/presentationml/2006/ole">
             <mc:AlternateContent xmlns:mc="http://schemas.openxmlformats.org/markup-compatibility/2006">
               <mc:Choice xmlns:v="urn:schemas-microsoft-com:vml" Requires="v">
-                <p:oleObj spid="_x0000_s5178" name="AxMath" r:id="rId45" imgW="637560" imgH="279000" progId="Equation.AxMath">
+                <p:oleObj spid="_x0000_s5294" name="AxMath" r:id="rId45" imgW="637560" imgH="279000" progId="Equation.AxMath">
                   <p:embed/>
                 </p:oleObj>
               </mc:Choice>
@@ -11292,7 +11293,7 @@
           <a:graphicData uri="http://schemas.openxmlformats.org/presentationml/2006/ole">
             <mc:AlternateContent xmlns:mc="http://schemas.openxmlformats.org/markup-compatibility/2006">
               <mc:Choice xmlns:v="urn:schemas-microsoft-com:vml" Requires="v">
-                <p:oleObj spid="_x0000_s5179" name="AxMath" r:id="rId47" imgW="637560" imgH="279000" progId="Equation.AxMath">
+                <p:oleObj spid="_x0000_s5295" name="AxMath" r:id="rId47" imgW="637560" imgH="279000" progId="Equation.AxMath">
                   <p:embed/>
                 </p:oleObj>
               </mc:Choice>
@@ -11483,7 +11484,7 @@
             <a:graphicData uri="http://schemas.openxmlformats.org/presentationml/2006/ole">
               <mc:AlternateContent xmlns:mc="http://schemas.openxmlformats.org/markup-compatibility/2006">
                 <mc:Choice xmlns:v="urn:schemas-microsoft-com:vml" Requires="v">
-                  <p:oleObj spid="_x0000_s6261" name="AxMath" r:id="rId3" imgW="151920" imgH="226800" progId="Equation.AxMath">
+                  <p:oleObj spid="_x0000_s6721" name="AxMath" r:id="rId3" imgW="151920" imgH="226800" progId="Equation.AxMath">
                     <p:embed/>
                   </p:oleObj>
                 </mc:Choice>
@@ -11536,7 +11537,7 @@
             <a:graphicData uri="http://schemas.openxmlformats.org/presentationml/2006/ole">
               <mc:AlternateContent xmlns:mc="http://schemas.openxmlformats.org/markup-compatibility/2006">
                 <mc:Choice xmlns:v="urn:schemas-microsoft-com:vml" Requires="v">
-                  <p:oleObj spid="_x0000_s6262" name="AxMath" r:id="rId5" imgW="151920" imgH="226800" progId="Equation.AxMath">
+                  <p:oleObj spid="_x0000_s6722" name="AxMath" r:id="rId5" imgW="151920" imgH="226800" progId="Equation.AxMath">
                     <p:embed/>
                   </p:oleObj>
                 </mc:Choice>
@@ -11589,7 +11590,7 @@
             <a:graphicData uri="http://schemas.openxmlformats.org/presentationml/2006/ole">
               <mc:AlternateContent xmlns:mc="http://schemas.openxmlformats.org/markup-compatibility/2006">
                 <mc:Choice xmlns:v="urn:schemas-microsoft-com:vml" Requires="v">
-                  <p:oleObj spid="_x0000_s6263" name="AxMath" r:id="rId6" imgW="151920" imgH="226800" progId="Equation.AxMath">
+                  <p:oleObj spid="_x0000_s6723" name="AxMath" r:id="rId6" imgW="151920" imgH="226800" progId="Equation.AxMath">
                     <p:embed/>
                   </p:oleObj>
                 </mc:Choice>
@@ -11642,7 +11643,7 @@
             <a:graphicData uri="http://schemas.openxmlformats.org/presentationml/2006/ole">
               <mc:AlternateContent xmlns:mc="http://schemas.openxmlformats.org/markup-compatibility/2006">
                 <mc:Choice xmlns:v="urn:schemas-microsoft-com:vml" Requires="v">
-                  <p:oleObj spid="_x0000_s6264" name="AxMath" r:id="rId7" imgW="151920" imgH="226800" progId="Equation.AxMath">
+                  <p:oleObj spid="_x0000_s6724" name="AxMath" r:id="rId7" imgW="151920" imgH="226800" progId="Equation.AxMath">
                     <p:embed/>
                   </p:oleObj>
                 </mc:Choice>
@@ -11695,7 +11696,7 @@
             <a:graphicData uri="http://schemas.openxmlformats.org/presentationml/2006/ole">
               <mc:AlternateContent xmlns:mc="http://schemas.openxmlformats.org/markup-compatibility/2006">
                 <mc:Choice xmlns:v="urn:schemas-microsoft-com:vml" Requires="v">
-                  <p:oleObj spid="_x0000_s6265" name="AxMath" r:id="rId8" imgW="151920" imgH="226800" progId="Equation.AxMath">
+                  <p:oleObj spid="_x0000_s6725" name="AxMath" r:id="rId8" imgW="151920" imgH="226800" progId="Equation.AxMath">
                     <p:embed/>
                   </p:oleObj>
                 </mc:Choice>
@@ -11748,7 +11749,7 @@
             <a:graphicData uri="http://schemas.openxmlformats.org/presentationml/2006/ole">
               <mc:AlternateContent xmlns:mc="http://schemas.openxmlformats.org/markup-compatibility/2006">
                 <mc:Choice xmlns:v="urn:schemas-microsoft-com:vml" Requires="v">
-                  <p:oleObj spid="_x0000_s6266" name="AxMath" r:id="rId10" imgW="151920" imgH="226800" progId="Equation.AxMath">
+                  <p:oleObj spid="_x0000_s6726" name="AxMath" r:id="rId10" imgW="151920" imgH="226800" progId="Equation.AxMath">
                     <p:embed/>
                   </p:oleObj>
                 </mc:Choice>
@@ -11801,7 +11802,7 @@
             <a:graphicData uri="http://schemas.openxmlformats.org/presentationml/2006/ole">
               <mc:AlternateContent xmlns:mc="http://schemas.openxmlformats.org/markup-compatibility/2006">
                 <mc:Choice xmlns:v="urn:schemas-microsoft-com:vml" Requires="v">
-                  <p:oleObj spid="_x0000_s6267" name="AxMath" r:id="rId11" imgW="151920" imgH="226800" progId="Equation.AxMath">
+                  <p:oleObj spid="_x0000_s6727" name="AxMath" r:id="rId11" imgW="151920" imgH="226800" progId="Equation.AxMath">
                     <p:embed/>
                   </p:oleObj>
                 </mc:Choice>
@@ -11854,7 +11855,7 @@
             <a:graphicData uri="http://schemas.openxmlformats.org/presentationml/2006/ole">
               <mc:AlternateContent xmlns:mc="http://schemas.openxmlformats.org/markup-compatibility/2006">
                 <mc:Choice xmlns:v="urn:schemas-microsoft-com:vml" Requires="v">
-                  <p:oleObj spid="_x0000_s6268" name="AxMath" r:id="rId12" imgW="151920" imgH="226800" progId="Equation.AxMath">
+                  <p:oleObj spid="_x0000_s6728" name="AxMath" r:id="rId12" imgW="151920" imgH="226800" progId="Equation.AxMath">
                     <p:embed/>
                   </p:oleObj>
                 </mc:Choice>
@@ -11907,7 +11908,7 @@
             <a:graphicData uri="http://schemas.openxmlformats.org/presentationml/2006/ole">
               <mc:AlternateContent xmlns:mc="http://schemas.openxmlformats.org/markup-compatibility/2006">
                 <mc:Choice xmlns:v="urn:schemas-microsoft-com:vml" Requires="v">
-                  <p:oleObj spid="_x0000_s6269" name="AxMath" r:id="rId13" imgW="218880" imgH="230400" progId="Equation.AxMath">
+                  <p:oleObj spid="_x0000_s6729" name="AxMath" r:id="rId13" imgW="218880" imgH="230400" progId="Equation.AxMath">
                     <p:embed/>
                   </p:oleObj>
                 </mc:Choice>
@@ -12006,7 +12007,7 @@
             <a:graphicData uri="http://schemas.openxmlformats.org/presentationml/2006/ole">
               <mc:AlternateContent xmlns:mc="http://schemas.openxmlformats.org/markup-compatibility/2006">
                 <mc:Choice xmlns:v="urn:schemas-microsoft-com:vml" Requires="v">
-                  <p:oleObj spid="_x0000_s6270" name="AxMath" r:id="rId15" imgW="217080" imgH="230400" progId="Equation.AxMath">
+                  <p:oleObj spid="_x0000_s6730" name="AxMath" r:id="rId15" imgW="217080" imgH="230400" progId="Equation.AxMath">
                     <p:embed/>
                   </p:oleObj>
                 </mc:Choice>
@@ -12105,7 +12106,7 @@
             <a:graphicData uri="http://schemas.openxmlformats.org/presentationml/2006/ole">
               <mc:AlternateContent xmlns:mc="http://schemas.openxmlformats.org/markup-compatibility/2006">
                 <mc:Choice xmlns:v="urn:schemas-microsoft-com:vml" Requires="v">
-                  <p:oleObj spid="_x0000_s6271" name="AxMath" r:id="rId17" imgW="225360" imgH="230400" progId="Equation.AxMath">
+                  <p:oleObj spid="_x0000_s6731" name="AxMath" r:id="rId17" imgW="225360" imgH="230400" progId="Equation.AxMath">
                     <p:embed/>
                   </p:oleObj>
                 </mc:Choice>
@@ -12206,7 +12207,7 @@
             <a:graphicData uri="http://schemas.openxmlformats.org/presentationml/2006/ole">
               <mc:AlternateContent xmlns:mc="http://schemas.openxmlformats.org/markup-compatibility/2006">
                 <mc:Choice xmlns:v="urn:schemas-microsoft-com:vml" Requires="v">
-                  <p:oleObj spid="_x0000_s6272" name="AxMath" r:id="rId19" imgW="637560" imgH="279000" progId="Equation.AxMath">
+                  <p:oleObj spid="_x0000_s6732" name="AxMath" r:id="rId19" imgW="637560" imgH="279000" progId="Equation.AxMath">
                     <p:embed/>
                   </p:oleObj>
                 </mc:Choice>
@@ -12259,7 +12260,7 @@
             <a:graphicData uri="http://schemas.openxmlformats.org/presentationml/2006/ole">
               <mc:AlternateContent xmlns:mc="http://schemas.openxmlformats.org/markup-compatibility/2006">
                 <mc:Choice xmlns:v="urn:schemas-microsoft-com:vml" Requires="v">
-                  <p:oleObj spid="_x0000_s6273" name="AxMath" r:id="rId21" imgW="629280" imgH="279000" progId="Equation.AxMath">
+                  <p:oleObj spid="_x0000_s6733" name="AxMath" r:id="rId21" imgW="629280" imgH="279000" progId="Equation.AxMath">
                     <p:embed/>
                   </p:oleObj>
                 </mc:Choice>
@@ -12358,7 +12359,7 @@
             <a:graphicData uri="http://schemas.openxmlformats.org/presentationml/2006/ole">
               <mc:AlternateContent xmlns:mc="http://schemas.openxmlformats.org/markup-compatibility/2006">
                 <mc:Choice xmlns:v="urn:schemas-microsoft-com:vml" Requires="v">
-                  <p:oleObj spid="_x0000_s6274" name="AxMath" r:id="rId23" imgW="839160" imgH="279000" progId="Equation.AxMath">
+                  <p:oleObj spid="_x0000_s6734" name="AxMath" r:id="rId23" imgW="839160" imgH="279000" progId="Equation.AxMath">
                     <p:embed/>
                   </p:oleObj>
                 </mc:Choice>
@@ -12457,7 +12458,7 @@
             <a:graphicData uri="http://schemas.openxmlformats.org/presentationml/2006/ole">
               <mc:AlternateContent xmlns:mc="http://schemas.openxmlformats.org/markup-compatibility/2006">
                 <mc:Choice xmlns:v="urn:schemas-microsoft-com:vml" Requires="v">
-                  <p:oleObj spid="_x0000_s6275" name="AxMath" r:id="rId25" imgW="773640" imgH="230400" progId="Equation.AxMath">
+                  <p:oleObj spid="_x0000_s6735" name="AxMath" r:id="rId25" imgW="773640" imgH="230400" progId="Equation.AxMath">
                     <p:embed/>
                   </p:oleObj>
                 </mc:Choice>
@@ -12556,7 +12557,7 @@
             <a:graphicData uri="http://schemas.openxmlformats.org/presentationml/2006/ole">
               <mc:AlternateContent xmlns:mc="http://schemas.openxmlformats.org/markup-compatibility/2006">
                 <mc:Choice xmlns:v="urn:schemas-microsoft-com:vml" Requires="v">
-                  <p:oleObj spid="_x0000_s6276" name="AxMath" r:id="rId27" imgW="1183680" imgH="279000" progId="Equation.AxMath">
+                  <p:oleObj spid="_x0000_s6736" name="AxMath" r:id="rId27" imgW="1183680" imgH="279000" progId="Equation.AxMath">
                     <p:embed/>
                   </p:oleObj>
                 </mc:Choice>
@@ -12655,7 +12656,7 @@
             <a:graphicData uri="http://schemas.openxmlformats.org/presentationml/2006/ole">
               <mc:AlternateContent xmlns:mc="http://schemas.openxmlformats.org/markup-compatibility/2006">
                 <mc:Choice xmlns:v="urn:schemas-microsoft-com:vml" Requires="v">
-                  <p:oleObj spid="_x0000_s6277" name="AxMath" r:id="rId29" imgW="1183680" imgH="279000" progId="Equation.AxMath">
+                  <p:oleObj spid="_x0000_s6737" name="AxMath" r:id="rId29" imgW="1183680" imgH="279000" progId="Equation.AxMath">
                     <p:embed/>
                   </p:oleObj>
                 </mc:Choice>
@@ -12756,7 +12757,7 @@
             <a:graphicData uri="http://schemas.openxmlformats.org/presentationml/2006/ole">
               <mc:AlternateContent xmlns:mc="http://schemas.openxmlformats.org/markup-compatibility/2006">
                 <mc:Choice xmlns:v="urn:schemas-microsoft-com:vml" Requires="v">
-                  <p:oleObj spid="_x0000_s6278" name="AxMath" r:id="rId31" imgW="630720" imgH="279000" progId="Equation.AxMath">
+                  <p:oleObj spid="_x0000_s6738" name="AxMath" r:id="rId31" imgW="630720" imgH="279000" progId="Equation.AxMath">
                     <p:embed/>
                   </p:oleObj>
                 </mc:Choice>
@@ -12855,7 +12856,7 @@
             <a:graphicData uri="http://schemas.openxmlformats.org/presentationml/2006/ole">
               <mc:AlternateContent xmlns:mc="http://schemas.openxmlformats.org/markup-compatibility/2006">
                 <mc:Choice xmlns:v="urn:schemas-microsoft-com:vml" Requires="v">
-                  <p:oleObj spid="_x0000_s6279" name="AxMath" r:id="rId33" imgW="606240" imgH="279000" progId="Equation.AxMath">
+                  <p:oleObj spid="_x0000_s6739" name="AxMath" r:id="rId33" imgW="606240" imgH="279000" progId="Equation.AxMath">
                     <p:embed/>
                   </p:oleObj>
                 </mc:Choice>
@@ -12954,7 +12955,7 @@
             <a:graphicData uri="http://schemas.openxmlformats.org/presentationml/2006/ole">
               <mc:AlternateContent xmlns:mc="http://schemas.openxmlformats.org/markup-compatibility/2006">
                 <mc:Choice xmlns:v="urn:schemas-microsoft-com:vml" Requires="v">
-                  <p:oleObj spid="_x0000_s6280" name="AxMath" r:id="rId35" imgW="604080" imgH="279000" progId="Equation.AxMath">
+                  <p:oleObj spid="_x0000_s6740" name="AxMath" r:id="rId35" imgW="604080" imgH="279000" progId="Equation.AxMath">
                     <p:embed/>
                   </p:oleObj>
                 </mc:Choice>
@@ -13053,7 +13054,7 @@
             <a:graphicData uri="http://schemas.openxmlformats.org/presentationml/2006/ole">
               <mc:AlternateContent xmlns:mc="http://schemas.openxmlformats.org/markup-compatibility/2006">
                 <mc:Choice xmlns:v="urn:schemas-microsoft-com:vml" Requires="v">
-                  <p:oleObj spid="_x0000_s6281" name="AxMath" r:id="rId37" imgW="606240" imgH="279000" progId="Equation.AxMath">
+                  <p:oleObj spid="_x0000_s6741" name="AxMath" r:id="rId37" imgW="606240" imgH="279000" progId="Equation.AxMath">
                     <p:embed/>
                   </p:oleObj>
                 </mc:Choice>
@@ -13152,7 +13153,7 @@
             <a:graphicData uri="http://schemas.openxmlformats.org/presentationml/2006/ole">
               <mc:AlternateContent xmlns:mc="http://schemas.openxmlformats.org/markup-compatibility/2006">
                 <mc:Choice xmlns:v="urn:schemas-microsoft-com:vml" Requires="v">
-                  <p:oleObj spid="_x0000_s6282" name="AxMath" r:id="rId39" imgW="637920" imgH="279000" progId="Equation.AxMath">
+                  <p:oleObj spid="_x0000_s6742" name="AxMath" r:id="rId39" imgW="637920" imgH="279000" progId="Equation.AxMath">
                     <p:embed/>
                   </p:oleObj>
                 </mc:Choice>
@@ -13251,7 +13252,7 @@
             <a:graphicData uri="http://schemas.openxmlformats.org/presentationml/2006/ole">
               <mc:AlternateContent xmlns:mc="http://schemas.openxmlformats.org/markup-compatibility/2006">
                 <mc:Choice xmlns:v="urn:schemas-microsoft-com:vml" Requires="v">
-                  <p:oleObj spid="_x0000_s6283" name="AxMath" r:id="rId41" imgW="636480" imgH="279000" progId="Equation.AxMath">
+                  <p:oleObj spid="_x0000_s6743" name="AxMath" r:id="rId41" imgW="636480" imgH="279000" progId="Equation.AxMath">
                     <p:embed/>
                   </p:oleObj>
                 </mc:Choice>
@@ -13350,7 +13351,7 @@
             <a:graphicData uri="http://schemas.openxmlformats.org/presentationml/2006/ole">
               <mc:AlternateContent xmlns:mc="http://schemas.openxmlformats.org/markup-compatibility/2006">
                 <mc:Choice xmlns:v="urn:schemas-microsoft-com:vml" Requires="v">
-                  <p:oleObj spid="_x0000_s6284" name="AxMath" r:id="rId43" imgW="629280" imgH="279000" progId="Equation.AxMath">
+                  <p:oleObj spid="_x0000_s6744" name="AxMath" r:id="rId43" imgW="629280" imgH="279000" progId="Equation.AxMath">
                     <p:embed/>
                   </p:oleObj>
                 </mc:Choice>
@@ -13689,7 +13690,7 @@
             <a:graphicData uri="http://schemas.openxmlformats.org/presentationml/2006/ole">
               <mc:AlternateContent xmlns:mc="http://schemas.openxmlformats.org/markup-compatibility/2006">
                 <mc:Choice xmlns:v="urn:schemas-microsoft-com:vml" Requires="v">
-                  <p:oleObj spid="_x0000_s6285" name="AxMath" r:id="rId7" imgW="151920" imgH="226800" progId="Equation.AxMath">
+                  <p:oleObj spid="_x0000_s6745" name="AxMath" r:id="rId7" imgW="151920" imgH="226800" progId="Equation.AxMath">
                     <p:embed/>
                   </p:oleObj>
                 </mc:Choice>
@@ -13788,7 +13789,7 @@
             <a:graphicData uri="http://schemas.openxmlformats.org/presentationml/2006/ole">
               <mc:AlternateContent xmlns:mc="http://schemas.openxmlformats.org/markup-compatibility/2006">
                 <mc:Choice xmlns:v="urn:schemas-microsoft-com:vml" Requires="v">
-                  <p:oleObj spid="_x0000_s6286" name="AxMath" r:id="rId45" imgW="385200" imgH="230400" progId="Equation.AxMath">
+                  <p:oleObj spid="_x0000_s6746" name="AxMath" r:id="rId45" imgW="385200" imgH="230400" progId="Equation.AxMath">
                     <p:embed/>
                   </p:oleObj>
                 </mc:Choice>
@@ -13887,7 +13888,7 @@
             <a:graphicData uri="http://schemas.openxmlformats.org/presentationml/2006/ole">
               <mc:AlternateContent xmlns:mc="http://schemas.openxmlformats.org/markup-compatibility/2006">
                 <mc:Choice xmlns:v="urn:schemas-microsoft-com:vml" Requires="v">
-                  <p:oleObj spid="_x0000_s6287" name="AxMath" r:id="rId47" imgW="630720" imgH="279000" progId="Equation.AxMath">
+                  <p:oleObj spid="_x0000_s6747" name="AxMath" r:id="rId47" imgW="630720" imgH="279000" progId="Equation.AxMath">
                     <p:embed/>
                   </p:oleObj>
                 </mc:Choice>
@@ -13986,7 +13987,7 @@
             <a:graphicData uri="http://schemas.openxmlformats.org/presentationml/2006/ole">
               <mc:AlternateContent xmlns:mc="http://schemas.openxmlformats.org/markup-compatibility/2006">
                 <mc:Choice xmlns:v="urn:schemas-microsoft-com:vml" Requires="v">
-                  <p:oleObj spid="_x0000_s6288" name="AxMath" r:id="rId49" imgW="629280" imgH="279000" progId="Equation.AxMath">
+                  <p:oleObj spid="_x0000_s6748" name="AxMath" r:id="rId49" imgW="629280" imgH="279000" progId="Equation.AxMath">
                     <p:embed/>
                   </p:oleObj>
                 </mc:Choice>
@@ -14087,7 +14088,7 @@
             <a:graphicData uri="http://schemas.openxmlformats.org/presentationml/2006/ole">
               <mc:AlternateContent xmlns:mc="http://schemas.openxmlformats.org/markup-compatibility/2006">
                 <mc:Choice xmlns:v="urn:schemas-microsoft-com:vml" Requires="v">
-                  <p:oleObj spid="_x0000_s6289" name="AxMath" r:id="rId51" imgW="622080" imgH="279000" progId="Equation.AxMath">
+                  <p:oleObj spid="_x0000_s6749" name="AxMath" r:id="rId51" imgW="622080" imgH="279000" progId="Equation.AxMath">
                     <p:embed/>
                   </p:oleObj>
                 </mc:Choice>
@@ -14357,7 +14358,7 @@
           <a:graphicData uri="http://schemas.openxmlformats.org/presentationml/2006/ole">
             <mc:AlternateContent xmlns:mc="http://schemas.openxmlformats.org/markup-compatibility/2006">
               <mc:Choice xmlns:v="urn:schemas-microsoft-com:vml" Requires="v">
-                <p:oleObj spid="_x0000_s6290" name="AxMath" r:id="rId3" imgW="151920" imgH="226800" progId="Equation.AxMath">
+                <p:oleObj spid="_x0000_s6750" name="AxMath" r:id="rId3" imgW="151920" imgH="226800" progId="Equation.AxMath">
                   <p:embed/>
                 </p:oleObj>
               </mc:Choice>
@@ -14410,7 +14411,7 @@
           <a:graphicData uri="http://schemas.openxmlformats.org/presentationml/2006/ole">
             <mc:AlternateContent xmlns:mc="http://schemas.openxmlformats.org/markup-compatibility/2006">
               <mc:Choice xmlns:v="urn:schemas-microsoft-com:vml" Requires="v">
-                <p:oleObj spid="_x0000_s6291" name="AxMath" r:id="rId5" imgW="151920" imgH="226800" progId="Equation.AxMath">
+                <p:oleObj spid="_x0000_s6751" name="AxMath" r:id="rId5" imgW="151920" imgH="226800" progId="Equation.AxMath">
                   <p:embed/>
                 </p:oleObj>
               </mc:Choice>
@@ -14463,7 +14464,7 @@
           <a:graphicData uri="http://schemas.openxmlformats.org/presentationml/2006/ole">
             <mc:AlternateContent xmlns:mc="http://schemas.openxmlformats.org/markup-compatibility/2006">
               <mc:Choice xmlns:v="urn:schemas-microsoft-com:vml" Requires="v">
-                <p:oleObj spid="_x0000_s6292" name="AxMath" r:id="rId6" imgW="151920" imgH="226800" progId="Equation.AxMath">
+                <p:oleObj spid="_x0000_s6752" name="AxMath" r:id="rId6" imgW="151920" imgH="226800" progId="Equation.AxMath">
                   <p:embed/>
                 </p:oleObj>
               </mc:Choice>
@@ -14516,7 +14517,7 @@
           <a:graphicData uri="http://schemas.openxmlformats.org/presentationml/2006/ole">
             <mc:AlternateContent xmlns:mc="http://schemas.openxmlformats.org/markup-compatibility/2006">
               <mc:Choice xmlns:v="urn:schemas-microsoft-com:vml" Requires="v">
-                <p:oleObj spid="_x0000_s6293" name="AxMath" r:id="rId7" imgW="151920" imgH="226800" progId="Equation.AxMath">
+                <p:oleObj spid="_x0000_s6753" name="AxMath" r:id="rId7" imgW="151920" imgH="226800" progId="Equation.AxMath">
                   <p:embed/>
                 </p:oleObj>
               </mc:Choice>
@@ -14569,7 +14570,7 @@
           <a:graphicData uri="http://schemas.openxmlformats.org/presentationml/2006/ole">
             <mc:AlternateContent xmlns:mc="http://schemas.openxmlformats.org/markup-compatibility/2006">
               <mc:Choice xmlns:v="urn:schemas-microsoft-com:vml" Requires="v">
-                <p:oleObj spid="_x0000_s6294" name="AxMath" r:id="rId8" imgW="151920" imgH="226800" progId="Equation.AxMath">
+                <p:oleObj spid="_x0000_s6754" name="AxMath" r:id="rId8" imgW="151920" imgH="226800" progId="Equation.AxMath">
                   <p:embed/>
                 </p:oleObj>
               </mc:Choice>
@@ -14622,7 +14623,7 @@
           <a:graphicData uri="http://schemas.openxmlformats.org/presentationml/2006/ole">
             <mc:AlternateContent xmlns:mc="http://schemas.openxmlformats.org/markup-compatibility/2006">
               <mc:Choice xmlns:v="urn:schemas-microsoft-com:vml" Requires="v">
-                <p:oleObj spid="_x0000_s6295" name="AxMath" r:id="rId10" imgW="151920" imgH="226800" progId="Equation.AxMath">
+                <p:oleObj spid="_x0000_s6755" name="AxMath" r:id="rId10" imgW="151920" imgH="226800" progId="Equation.AxMath">
                   <p:embed/>
                 </p:oleObj>
               </mc:Choice>
@@ -14675,7 +14676,7 @@
           <a:graphicData uri="http://schemas.openxmlformats.org/presentationml/2006/ole">
             <mc:AlternateContent xmlns:mc="http://schemas.openxmlformats.org/markup-compatibility/2006">
               <mc:Choice xmlns:v="urn:schemas-microsoft-com:vml" Requires="v">
-                <p:oleObj spid="_x0000_s6296" name="AxMath" r:id="rId11" imgW="151920" imgH="226800" progId="Equation.AxMath">
+                <p:oleObj spid="_x0000_s6756" name="AxMath" r:id="rId11" imgW="151920" imgH="226800" progId="Equation.AxMath">
                   <p:embed/>
                 </p:oleObj>
               </mc:Choice>
@@ -14728,7 +14729,7 @@
           <a:graphicData uri="http://schemas.openxmlformats.org/presentationml/2006/ole">
             <mc:AlternateContent xmlns:mc="http://schemas.openxmlformats.org/markup-compatibility/2006">
               <mc:Choice xmlns:v="urn:schemas-microsoft-com:vml" Requires="v">
-                <p:oleObj spid="_x0000_s6297" name="AxMath" r:id="rId12" imgW="151920" imgH="226800" progId="Equation.AxMath">
+                <p:oleObj spid="_x0000_s6757" name="AxMath" r:id="rId12" imgW="151920" imgH="226800" progId="Equation.AxMath">
                   <p:embed/>
                 </p:oleObj>
               </mc:Choice>
@@ -14781,7 +14782,7 @@
           <a:graphicData uri="http://schemas.openxmlformats.org/presentationml/2006/ole">
             <mc:AlternateContent xmlns:mc="http://schemas.openxmlformats.org/markup-compatibility/2006">
               <mc:Choice xmlns:v="urn:schemas-microsoft-com:vml" Requires="v">
-                <p:oleObj spid="_x0000_s6298" name="AxMath" r:id="rId53" imgW="622080" imgH="279000" progId="Equation.AxMath">
+                <p:oleObj spid="_x0000_s6758" name="AxMath" r:id="rId53" imgW="622080" imgH="279000" progId="Equation.AxMath">
                   <p:embed/>
                 </p:oleObj>
               </mc:Choice>
@@ -14882,7 +14883,7 @@
           <a:graphicData uri="http://schemas.openxmlformats.org/presentationml/2006/ole">
             <mc:AlternateContent xmlns:mc="http://schemas.openxmlformats.org/markup-compatibility/2006">
               <mc:Choice xmlns:v="urn:schemas-microsoft-com:vml" Requires="v">
-                <p:oleObj spid="_x0000_s6299" name="AxMath" r:id="rId55" imgW="629280" imgH="279000" progId="Equation.AxMath">
+                <p:oleObj spid="_x0000_s6759" name="AxMath" r:id="rId55" imgW="629280" imgH="279000" progId="Equation.AxMath">
                   <p:embed/>
                 </p:oleObj>
               </mc:Choice>
@@ -14983,7 +14984,7 @@
           <a:graphicData uri="http://schemas.openxmlformats.org/presentationml/2006/ole">
             <mc:AlternateContent xmlns:mc="http://schemas.openxmlformats.org/markup-compatibility/2006">
               <mc:Choice xmlns:v="urn:schemas-microsoft-com:vml" Requires="v">
-                <p:oleObj spid="_x0000_s6300" name="AxMath" r:id="rId57" imgW="630720" imgH="279000" progId="Equation.AxMath">
+                <p:oleObj spid="_x0000_s6760" name="AxMath" r:id="rId57" imgW="630720" imgH="279000" progId="Equation.AxMath">
                   <p:embed/>
                 </p:oleObj>
               </mc:Choice>
@@ -15084,7 +15085,7 @@
           <a:graphicData uri="http://schemas.openxmlformats.org/presentationml/2006/ole">
             <mc:AlternateContent xmlns:mc="http://schemas.openxmlformats.org/markup-compatibility/2006">
               <mc:Choice xmlns:v="urn:schemas-microsoft-com:vml" Requires="v">
-                <p:oleObj spid="_x0000_s6301" name="AxMath" r:id="rId19" imgW="637560" imgH="279000" progId="Equation.AxMath">
+                <p:oleObj spid="_x0000_s6761" name="AxMath" r:id="rId19" imgW="637560" imgH="279000" progId="Equation.AxMath">
                   <p:embed/>
                 </p:oleObj>
               </mc:Choice>
@@ -15137,7 +15138,7 @@
           <a:graphicData uri="http://schemas.openxmlformats.org/presentationml/2006/ole">
             <mc:AlternateContent xmlns:mc="http://schemas.openxmlformats.org/markup-compatibility/2006">
               <mc:Choice xmlns:v="urn:schemas-microsoft-com:vml" Requires="v">
-                <p:oleObj spid="_x0000_s6302" name="AxMath" r:id="rId59" imgW="629280" imgH="279000" progId="Equation.AxMath">
+                <p:oleObj spid="_x0000_s6762" name="AxMath" r:id="rId59" imgW="629280" imgH="279000" progId="Equation.AxMath">
                   <p:embed/>
                 </p:oleObj>
               </mc:Choice>
@@ -15236,7 +15237,7 @@
           <a:graphicData uri="http://schemas.openxmlformats.org/presentationml/2006/ole">
             <mc:AlternateContent xmlns:mc="http://schemas.openxmlformats.org/markup-compatibility/2006">
               <mc:Choice xmlns:v="urn:schemas-microsoft-com:vml" Requires="v">
-                <p:oleObj spid="_x0000_s6303" name="AxMath" r:id="rId60" imgW="839160" imgH="279000" progId="Equation.AxMath">
+                <p:oleObj spid="_x0000_s6763" name="AxMath" r:id="rId60" imgW="839160" imgH="279000" progId="Equation.AxMath">
                   <p:embed/>
                 </p:oleObj>
               </mc:Choice>
@@ -15335,7 +15336,7 @@
           <a:graphicData uri="http://schemas.openxmlformats.org/presentationml/2006/ole">
             <mc:AlternateContent xmlns:mc="http://schemas.openxmlformats.org/markup-compatibility/2006">
               <mc:Choice xmlns:v="urn:schemas-microsoft-com:vml" Requires="v">
-                <p:oleObj spid="_x0000_s6304" name="AxMath" r:id="rId61" imgW="773640" imgH="230400" progId="Equation.AxMath">
+                <p:oleObj spid="_x0000_s6764" name="AxMath" r:id="rId61" imgW="773640" imgH="230400" progId="Equation.AxMath">
                   <p:embed/>
                 </p:oleObj>
               </mc:Choice>
@@ -15434,7 +15435,7 @@
           <a:graphicData uri="http://schemas.openxmlformats.org/presentationml/2006/ole">
             <mc:AlternateContent xmlns:mc="http://schemas.openxmlformats.org/markup-compatibility/2006">
               <mc:Choice xmlns:v="urn:schemas-microsoft-com:vml" Requires="v">
-                <p:oleObj spid="_x0000_s6305" name="AxMath" r:id="rId62" imgW="1183680" imgH="279000" progId="Equation.AxMath">
+                <p:oleObj spid="_x0000_s6765" name="AxMath" r:id="rId62" imgW="1183680" imgH="279000" progId="Equation.AxMath">
                   <p:embed/>
                 </p:oleObj>
               </mc:Choice>
@@ -15533,7 +15534,7 @@
           <a:graphicData uri="http://schemas.openxmlformats.org/presentationml/2006/ole">
             <mc:AlternateContent xmlns:mc="http://schemas.openxmlformats.org/markup-compatibility/2006">
               <mc:Choice xmlns:v="urn:schemas-microsoft-com:vml" Requires="v">
-                <p:oleObj spid="_x0000_s6306" name="AxMath" r:id="rId63" imgW="1183680" imgH="279000" progId="Equation.AxMath">
+                <p:oleObj spid="_x0000_s6766" name="AxMath" r:id="rId63" imgW="1183680" imgH="279000" progId="Equation.AxMath">
                   <p:embed/>
                 </p:oleObj>
               </mc:Choice>
@@ -15634,7 +15635,7 @@
           <a:graphicData uri="http://schemas.openxmlformats.org/presentationml/2006/ole">
             <mc:AlternateContent xmlns:mc="http://schemas.openxmlformats.org/markup-compatibility/2006">
               <mc:Choice xmlns:v="urn:schemas-microsoft-com:vml" Requires="v">
-                <p:oleObj spid="_x0000_s6307" name="AxMath" r:id="rId64" imgW="630720" imgH="279000" progId="Equation.AxMath">
+                <p:oleObj spid="_x0000_s6767" name="AxMath" r:id="rId64" imgW="630720" imgH="279000" progId="Equation.AxMath">
                   <p:embed/>
                 </p:oleObj>
               </mc:Choice>
@@ -15733,7 +15734,7 @@
           <a:graphicData uri="http://schemas.openxmlformats.org/presentationml/2006/ole">
             <mc:AlternateContent xmlns:mc="http://schemas.openxmlformats.org/markup-compatibility/2006">
               <mc:Choice xmlns:v="urn:schemas-microsoft-com:vml" Requires="v">
-                <p:oleObj spid="_x0000_s6308" name="AxMath" r:id="rId65" imgW="606240" imgH="279000" progId="Equation.AxMath">
+                <p:oleObj spid="_x0000_s6768" name="AxMath" r:id="rId65" imgW="606240" imgH="279000" progId="Equation.AxMath">
                   <p:embed/>
                 </p:oleObj>
               </mc:Choice>
@@ -15832,7 +15833,7 @@
           <a:graphicData uri="http://schemas.openxmlformats.org/presentationml/2006/ole">
             <mc:AlternateContent xmlns:mc="http://schemas.openxmlformats.org/markup-compatibility/2006">
               <mc:Choice xmlns:v="urn:schemas-microsoft-com:vml" Requires="v">
-                <p:oleObj spid="_x0000_s6309" name="AxMath" r:id="rId66" imgW="604080" imgH="279000" progId="Equation.AxMath">
+                <p:oleObj spid="_x0000_s6769" name="AxMath" r:id="rId66" imgW="604080" imgH="279000" progId="Equation.AxMath">
                   <p:embed/>
                 </p:oleObj>
               </mc:Choice>
@@ -15931,7 +15932,7 @@
           <a:graphicData uri="http://schemas.openxmlformats.org/presentationml/2006/ole">
             <mc:AlternateContent xmlns:mc="http://schemas.openxmlformats.org/markup-compatibility/2006">
               <mc:Choice xmlns:v="urn:schemas-microsoft-com:vml" Requires="v">
-                <p:oleObj spid="_x0000_s6310" name="AxMath" r:id="rId67" imgW="606240" imgH="279000" progId="Equation.AxMath">
+                <p:oleObj spid="_x0000_s6770" name="AxMath" r:id="rId67" imgW="606240" imgH="279000" progId="Equation.AxMath">
                   <p:embed/>
                 </p:oleObj>
               </mc:Choice>
@@ -16030,7 +16031,7 @@
           <a:graphicData uri="http://schemas.openxmlformats.org/presentationml/2006/ole">
             <mc:AlternateContent xmlns:mc="http://schemas.openxmlformats.org/markup-compatibility/2006">
               <mc:Choice xmlns:v="urn:schemas-microsoft-com:vml" Requires="v">
-                <p:oleObj spid="_x0000_s6311" name="AxMath" r:id="rId68" imgW="637920" imgH="279000" progId="Equation.AxMath">
+                <p:oleObj spid="_x0000_s6771" name="AxMath" r:id="rId68" imgW="637920" imgH="279000" progId="Equation.AxMath">
                   <p:embed/>
                 </p:oleObj>
               </mc:Choice>
@@ -16129,7 +16130,7 @@
           <a:graphicData uri="http://schemas.openxmlformats.org/presentationml/2006/ole">
             <mc:AlternateContent xmlns:mc="http://schemas.openxmlformats.org/markup-compatibility/2006">
               <mc:Choice xmlns:v="urn:schemas-microsoft-com:vml" Requires="v">
-                <p:oleObj spid="_x0000_s6312" name="AxMath" r:id="rId69" imgW="636480" imgH="279000" progId="Equation.AxMath">
+                <p:oleObj spid="_x0000_s6772" name="AxMath" r:id="rId69" imgW="636480" imgH="279000" progId="Equation.AxMath">
                   <p:embed/>
                 </p:oleObj>
               </mc:Choice>
@@ -16228,7 +16229,7 @@
           <a:graphicData uri="http://schemas.openxmlformats.org/presentationml/2006/ole">
             <mc:AlternateContent xmlns:mc="http://schemas.openxmlformats.org/markup-compatibility/2006">
               <mc:Choice xmlns:v="urn:schemas-microsoft-com:vml" Requires="v">
-                <p:oleObj spid="_x0000_s6313" name="AxMath" r:id="rId70" imgW="629280" imgH="279000" progId="Equation.AxMath">
+                <p:oleObj spid="_x0000_s6773" name="AxMath" r:id="rId70" imgW="629280" imgH="279000" progId="Equation.AxMath">
                   <p:embed/>
                 </p:oleObj>
               </mc:Choice>
@@ -16567,7 +16568,7 @@
           <a:graphicData uri="http://schemas.openxmlformats.org/presentationml/2006/ole">
             <mc:AlternateContent xmlns:mc="http://schemas.openxmlformats.org/markup-compatibility/2006">
               <mc:Choice xmlns:v="urn:schemas-microsoft-com:vml" Requires="v">
-                <p:oleObj spid="_x0000_s6314" name="AxMath" r:id="rId7" imgW="151920" imgH="226800" progId="Equation.AxMath">
+                <p:oleObj spid="_x0000_s6774" name="AxMath" r:id="rId7" imgW="151920" imgH="226800" progId="Equation.AxMath">
                   <p:embed/>
                 </p:oleObj>
               </mc:Choice>
@@ -16668,7 +16669,7 @@
           <a:graphicData uri="http://schemas.openxmlformats.org/presentationml/2006/ole">
             <mc:AlternateContent xmlns:mc="http://schemas.openxmlformats.org/markup-compatibility/2006">
               <mc:Choice xmlns:v="urn:schemas-microsoft-com:vml" Requires="v">
-                <p:oleObj spid="_x0000_s6315" name="AxMath" r:id="rId71" imgW="637560" imgH="279000" progId="Equation.AxMath">
+                <p:oleObj spid="_x0000_s6775" name="AxMath" r:id="rId71" imgW="637560" imgH="279000" progId="Equation.AxMath">
                   <p:embed/>
                 </p:oleObj>
               </mc:Choice>
@@ -16767,7 +16768,7 @@
           <a:graphicData uri="http://schemas.openxmlformats.org/presentationml/2006/ole">
             <mc:AlternateContent xmlns:mc="http://schemas.openxmlformats.org/markup-compatibility/2006">
               <mc:Choice xmlns:v="urn:schemas-microsoft-com:vml" Requires="v">
-                <p:oleObj spid="_x0000_s6316" name="AxMath" r:id="rId72" imgW="630720" imgH="279000" progId="Equation.AxMath">
+                <p:oleObj spid="_x0000_s6776" name="AxMath" r:id="rId72" imgW="630720" imgH="279000" progId="Equation.AxMath">
                   <p:embed/>
                 </p:oleObj>
               </mc:Choice>
@@ -16866,7 +16867,7 @@
           <a:graphicData uri="http://schemas.openxmlformats.org/presentationml/2006/ole">
             <mc:AlternateContent xmlns:mc="http://schemas.openxmlformats.org/markup-compatibility/2006">
               <mc:Choice xmlns:v="urn:schemas-microsoft-com:vml" Requires="v">
-                <p:oleObj spid="_x0000_s6317" name="AxMath" r:id="rId73" imgW="629280" imgH="279000" progId="Equation.AxMath">
+                <p:oleObj spid="_x0000_s6777" name="AxMath" r:id="rId73" imgW="629280" imgH="279000" progId="Equation.AxMath">
                   <p:embed/>
                 </p:oleObj>
               </mc:Choice>
@@ -16967,7 +16968,7 @@
           <a:graphicData uri="http://schemas.openxmlformats.org/presentationml/2006/ole">
             <mc:AlternateContent xmlns:mc="http://schemas.openxmlformats.org/markup-compatibility/2006">
               <mc:Choice xmlns:v="urn:schemas-microsoft-com:vml" Requires="v">
-                <p:oleObj spid="_x0000_s6318" name="AxMath" r:id="rId74" imgW="622080" imgH="279000" progId="Equation.AxMath">
+                <p:oleObj spid="_x0000_s6778" name="AxMath" r:id="rId74" imgW="622080" imgH="279000" progId="Equation.AxMath">
                   <p:embed/>
                 </p:oleObj>
               </mc:Choice>
@@ -17666,7 +17667,7 @@
           <a:graphicData uri="http://schemas.openxmlformats.org/presentationml/2006/ole">
             <mc:AlternateContent xmlns:mc="http://schemas.openxmlformats.org/markup-compatibility/2006">
               <mc:Choice xmlns:v="urn:schemas-microsoft-com:vml" Requires="v">
-                <p:oleObj spid="_x0000_s6319" name="AxMath" r:id="rId3" imgW="151920" imgH="226800" progId="Equation.AxMath">
+                <p:oleObj spid="_x0000_s6779" name="AxMath" r:id="rId3" imgW="151920" imgH="226800" progId="Equation.AxMath">
                   <p:embed/>
                 </p:oleObj>
               </mc:Choice>
@@ -17719,7 +17720,7 @@
           <a:graphicData uri="http://schemas.openxmlformats.org/presentationml/2006/ole">
             <mc:AlternateContent xmlns:mc="http://schemas.openxmlformats.org/markup-compatibility/2006">
               <mc:Choice xmlns:v="urn:schemas-microsoft-com:vml" Requires="v">
-                <p:oleObj spid="_x0000_s6320" name="AxMath" r:id="rId5" imgW="151920" imgH="226800" progId="Equation.AxMath">
+                <p:oleObj spid="_x0000_s6780" name="AxMath" r:id="rId5" imgW="151920" imgH="226800" progId="Equation.AxMath">
                   <p:embed/>
                 </p:oleObj>
               </mc:Choice>
@@ -17772,7 +17773,7 @@
           <a:graphicData uri="http://schemas.openxmlformats.org/presentationml/2006/ole">
             <mc:AlternateContent xmlns:mc="http://schemas.openxmlformats.org/markup-compatibility/2006">
               <mc:Choice xmlns:v="urn:schemas-microsoft-com:vml" Requires="v">
-                <p:oleObj spid="_x0000_s6321" name="AxMath" r:id="rId6" imgW="151920" imgH="226800" progId="Equation.AxMath">
+                <p:oleObj spid="_x0000_s6781" name="AxMath" r:id="rId6" imgW="151920" imgH="226800" progId="Equation.AxMath">
                   <p:embed/>
                 </p:oleObj>
               </mc:Choice>
@@ -17825,7 +17826,7 @@
           <a:graphicData uri="http://schemas.openxmlformats.org/presentationml/2006/ole">
             <mc:AlternateContent xmlns:mc="http://schemas.openxmlformats.org/markup-compatibility/2006">
               <mc:Choice xmlns:v="urn:schemas-microsoft-com:vml" Requires="v">
-                <p:oleObj spid="_x0000_s6322" name="AxMath" r:id="rId7" imgW="151920" imgH="226800" progId="Equation.AxMath">
+                <p:oleObj spid="_x0000_s6782" name="AxMath" r:id="rId7" imgW="151920" imgH="226800" progId="Equation.AxMath">
                   <p:embed/>
                 </p:oleObj>
               </mc:Choice>
@@ -17878,7 +17879,7 @@
           <a:graphicData uri="http://schemas.openxmlformats.org/presentationml/2006/ole">
             <mc:AlternateContent xmlns:mc="http://schemas.openxmlformats.org/markup-compatibility/2006">
               <mc:Choice xmlns:v="urn:schemas-microsoft-com:vml" Requires="v">
-                <p:oleObj spid="_x0000_s6323" name="AxMath" r:id="rId8" imgW="151920" imgH="226800" progId="Equation.AxMath">
+                <p:oleObj spid="_x0000_s6783" name="AxMath" r:id="rId8" imgW="151920" imgH="226800" progId="Equation.AxMath">
                   <p:embed/>
                 </p:oleObj>
               </mc:Choice>
@@ -17931,7 +17932,7 @@
           <a:graphicData uri="http://schemas.openxmlformats.org/presentationml/2006/ole">
             <mc:AlternateContent xmlns:mc="http://schemas.openxmlformats.org/markup-compatibility/2006">
               <mc:Choice xmlns:v="urn:schemas-microsoft-com:vml" Requires="v">
-                <p:oleObj spid="_x0000_s6324" name="AxMath" r:id="rId10" imgW="151920" imgH="226800" progId="Equation.AxMath">
+                <p:oleObj spid="_x0000_s6784" name="AxMath" r:id="rId10" imgW="151920" imgH="226800" progId="Equation.AxMath">
                   <p:embed/>
                 </p:oleObj>
               </mc:Choice>
@@ -17984,7 +17985,7 @@
           <a:graphicData uri="http://schemas.openxmlformats.org/presentationml/2006/ole">
             <mc:AlternateContent xmlns:mc="http://schemas.openxmlformats.org/markup-compatibility/2006">
               <mc:Choice xmlns:v="urn:schemas-microsoft-com:vml" Requires="v">
-                <p:oleObj spid="_x0000_s6325" name="AxMath" r:id="rId11" imgW="151920" imgH="226800" progId="Equation.AxMath">
+                <p:oleObj spid="_x0000_s6785" name="AxMath" r:id="rId11" imgW="151920" imgH="226800" progId="Equation.AxMath">
                   <p:embed/>
                 </p:oleObj>
               </mc:Choice>
@@ -18037,7 +18038,7 @@
           <a:graphicData uri="http://schemas.openxmlformats.org/presentationml/2006/ole">
             <mc:AlternateContent xmlns:mc="http://schemas.openxmlformats.org/markup-compatibility/2006">
               <mc:Choice xmlns:v="urn:schemas-microsoft-com:vml" Requires="v">
-                <p:oleObj spid="_x0000_s6326" name="AxMath" r:id="rId12" imgW="151920" imgH="226800" progId="Equation.AxMath">
+                <p:oleObj spid="_x0000_s6786" name="AxMath" r:id="rId12" imgW="151920" imgH="226800" progId="Equation.AxMath">
                   <p:embed/>
                 </p:oleObj>
               </mc:Choice>
@@ -18090,7 +18091,7 @@
           <a:graphicData uri="http://schemas.openxmlformats.org/presentationml/2006/ole">
             <mc:AlternateContent xmlns:mc="http://schemas.openxmlformats.org/markup-compatibility/2006">
               <mc:Choice xmlns:v="urn:schemas-microsoft-com:vml" Requires="v">
-                <p:oleObj spid="_x0000_s6327" name="AxMath" r:id="rId75" imgW="622080" imgH="279000" progId="Equation.AxMath">
+                <p:oleObj spid="_x0000_s6787" name="AxMath" r:id="rId75" imgW="622080" imgH="279000" progId="Equation.AxMath">
                   <p:embed/>
                 </p:oleObj>
               </mc:Choice>
@@ -18191,7 +18192,7 @@
           <a:graphicData uri="http://schemas.openxmlformats.org/presentationml/2006/ole">
             <mc:AlternateContent xmlns:mc="http://schemas.openxmlformats.org/markup-compatibility/2006">
               <mc:Choice xmlns:v="urn:schemas-microsoft-com:vml" Requires="v">
-                <p:oleObj spid="_x0000_s6328" name="AxMath" r:id="rId76" imgW="629280" imgH="279000" progId="Equation.AxMath">
+                <p:oleObj spid="_x0000_s6788" name="AxMath" r:id="rId76" imgW="629280" imgH="279000" progId="Equation.AxMath">
                   <p:embed/>
                 </p:oleObj>
               </mc:Choice>
@@ -18292,7 +18293,7 @@
           <a:graphicData uri="http://schemas.openxmlformats.org/presentationml/2006/ole">
             <mc:AlternateContent xmlns:mc="http://schemas.openxmlformats.org/markup-compatibility/2006">
               <mc:Choice xmlns:v="urn:schemas-microsoft-com:vml" Requires="v">
-                <p:oleObj spid="_x0000_s6329" name="AxMath" r:id="rId77" imgW="630720" imgH="279000" progId="Equation.AxMath">
+                <p:oleObj spid="_x0000_s6789" name="AxMath" r:id="rId77" imgW="630720" imgH="279000" progId="Equation.AxMath">
                   <p:embed/>
                 </p:oleObj>
               </mc:Choice>
@@ -18393,7 +18394,7 @@
           <a:graphicData uri="http://schemas.openxmlformats.org/presentationml/2006/ole">
             <mc:AlternateContent xmlns:mc="http://schemas.openxmlformats.org/markup-compatibility/2006">
               <mc:Choice xmlns:v="urn:schemas-microsoft-com:vml" Requires="v">
-                <p:oleObj spid="_x0000_s6330" name="AxMath" r:id="rId19" imgW="637560" imgH="279000" progId="Equation.AxMath">
+                <p:oleObj spid="_x0000_s6790" name="AxMath" r:id="rId19" imgW="637560" imgH="279000" progId="Equation.AxMath">
                   <p:embed/>
                 </p:oleObj>
               </mc:Choice>
@@ -18446,7 +18447,7 @@
           <a:graphicData uri="http://schemas.openxmlformats.org/presentationml/2006/ole">
             <mc:AlternateContent xmlns:mc="http://schemas.openxmlformats.org/markup-compatibility/2006">
               <mc:Choice xmlns:v="urn:schemas-microsoft-com:vml" Requires="v">
-                <p:oleObj spid="_x0000_s6331" name="AxMath" r:id="rId59" imgW="629280" imgH="279000" progId="Equation.AxMath">
+                <p:oleObj spid="_x0000_s6791" name="AxMath" r:id="rId59" imgW="629280" imgH="279000" progId="Equation.AxMath">
                   <p:embed/>
                 </p:oleObj>
               </mc:Choice>
@@ -18547,7 +18548,7 @@
           <a:graphicData uri="http://schemas.openxmlformats.org/presentationml/2006/ole">
             <mc:AlternateContent xmlns:mc="http://schemas.openxmlformats.org/markup-compatibility/2006">
               <mc:Choice xmlns:v="urn:schemas-microsoft-com:vml" Requires="v">
-                <p:oleObj spid="_x0000_s6332" name="AxMath" r:id="rId78" imgW="630720" imgH="279000" progId="Equation.AxMath">
+                <p:oleObj spid="_x0000_s6792" name="AxMath" r:id="rId78" imgW="630720" imgH="279000" progId="Equation.AxMath">
                   <p:embed/>
                 </p:oleObj>
               </mc:Choice>
@@ -18648,7 +18649,7 @@
           <a:graphicData uri="http://schemas.openxmlformats.org/presentationml/2006/ole">
             <mc:AlternateContent xmlns:mc="http://schemas.openxmlformats.org/markup-compatibility/2006">
               <mc:Choice xmlns:v="urn:schemas-microsoft-com:vml" Requires="v">
-                <p:oleObj spid="_x0000_s6333" name="AxMath" r:id="rId64" imgW="630720" imgH="279000" progId="Equation.AxMath">
+                <p:oleObj spid="_x0000_s6793" name="AxMath" r:id="rId64" imgW="630720" imgH="279000" progId="Equation.AxMath">
                   <p:embed/>
                 </p:oleObj>
               </mc:Choice>
@@ -18749,7 +18750,7 @@
           <a:graphicData uri="http://schemas.openxmlformats.org/presentationml/2006/ole">
             <mc:AlternateContent xmlns:mc="http://schemas.openxmlformats.org/markup-compatibility/2006">
               <mc:Choice xmlns:v="urn:schemas-microsoft-com:vml" Requires="v">
-                <p:oleObj spid="_x0000_s6334" name="AxMath" r:id="rId80" imgW="622080" imgH="279000" progId="Equation.AxMath">
+                <p:oleObj spid="_x0000_s6794" name="AxMath" r:id="rId80" imgW="622080" imgH="279000" progId="Equation.AxMath">
                   <p:embed/>
                 </p:oleObj>
               </mc:Choice>
@@ -18850,7 +18851,7 @@
           <a:graphicData uri="http://schemas.openxmlformats.org/presentationml/2006/ole">
             <mc:AlternateContent xmlns:mc="http://schemas.openxmlformats.org/markup-compatibility/2006">
               <mc:Choice xmlns:v="urn:schemas-microsoft-com:vml" Requires="v">
-                <p:oleObj spid="_x0000_s6335" name="AxMath" r:id="rId82" imgW="629280" imgH="279000" progId="Equation.AxMath">
+                <p:oleObj spid="_x0000_s6795" name="AxMath" r:id="rId82" imgW="629280" imgH="279000" progId="Equation.AxMath">
                   <p:embed/>
                 </p:oleObj>
               </mc:Choice>
@@ -18951,7 +18952,7 @@
           <a:graphicData uri="http://schemas.openxmlformats.org/presentationml/2006/ole">
             <mc:AlternateContent xmlns:mc="http://schemas.openxmlformats.org/markup-compatibility/2006">
               <mc:Choice xmlns:v="urn:schemas-microsoft-com:vml" Requires="v">
-                <p:oleObj spid="_x0000_s6336" name="AxMath" r:id="rId84" imgW="622080" imgH="279000" progId="Equation.AxMath">
+                <p:oleObj spid="_x0000_s6796" name="AxMath" r:id="rId84" imgW="622080" imgH="279000" progId="Equation.AxMath">
                   <p:embed/>
                 </p:oleObj>
               </mc:Choice>
@@ -19052,7 +19053,7 @@
           <a:graphicData uri="http://schemas.openxmlformats.org/presentationml/2006/ole">
             <mc:AlternateContent xmlns:mc="http://schemas.openxmlformats.org/markup-compatibility/2006">
               <mc:Choice xmlns:v="urn:schemas-microsoft-com:vml" Requires="v">
-                <p:oleObj spid="_x0000_s6337" name="AxMath" r:id="rId85" imgW="630720" imgH="279000" progId="Equation.AxMath">
+                <p:oleObj spid="_x0000_s6797" name="AxMath" r:id="rId85" imgW="630720" imgH="279000" progId="Equation.AxMath">
                   <p:embed/>
                 </p:oleObj>
               </mc:Choice>
@@ -19153,7 +19154,7 @@
           <a:graphicData uri="http://schemas.openxmlformats.org/presentationml/2006/ole">
             <mc:AlternateContent xmlns:mc="http://schemas.openxmlformats.org/markup-compatibility/2006">
               <mc:Choice xmlns:v="urn:schemas-microsoft-com:vml" Requires="v">
-                <p:oleObj spid="_x0000_s6338" name="AxMath" r:id="rId87" imgW="629280" imgH="279000" progId="Equation.AxMath">
+                <p:oleObj spid="_x0000_s6798" name="AxMath" r:id="rId87" imgW="629280" imgH="279000" progId="Equation.AxMath">
                   <p:embed/>
                 </p:oleObj>
               </mc:Choice>
@@ -19254,7 +19255,7 @@
           <a:graphicData uri="http://schemas.openxmlformats.org/presentationml/2006/ole">
             <mc:AlternateContent xmlns:mc="http://schemas.openxmlformats.org/markup-compatibility/2006">
               <mc:Choice xmlns:v="urn:schemas-microsoft-com:vml" Requires="v">
-                <p:oleObj spid="_x0000_s6339" name="AxMath" r:id="rId89" imgW="622080" imgH="279000" progId="Equation.AxMath">
+                <p:oleObj spid="_x0000_s6799" name="AxMath" r:id="rId89" imgW="622080" imgH="279000" progId="Equation.AxMath">
                   <p:embed/>
                 </p:oleObj>
               </mc:Choice>
@@ -19593,7 +19594,7 @@
           <a:graphicData uri="http://schemas.openxmlformats.org/presentationml/2006/ole">
             <mc:AlternateContent xmlns:mc="http://schemas.openxmlformats.org/markup-compatibility/2006">
               <mc:Choice xmlns:v="urn:schemas-microsoft-com:vml" Requires="v">
-                <p:oleObj spid="_x0000_s6340" name="AxMath" r:id="rId7" imgW="151920" imgH="226800" progId="Equation.AxMath">
+                <p:oleObj spid="_x0000_s6800" name="AxMath" r:id="rId7" imgW="151920" imgH="226800" progId="Equation.AxMath">
                   <p:embed/>
                 </p:oleObj>
               </mc:Choice>
@@ -19742,7 +19743,7 @@
           <a:graphicData uri="http://schemas.openxmlformats.org/presentationml/2006/ole">
             <mc:AlternateContent xmlns:mc="http://schemas.openxmlformats.org/markup-compatibility/2006">
               <mc:Choice xmlns:v="urn:schemas-microsoft-com:vml" Requires="v">
-                <p:oleObj spid="_x0000_s6341" name="AxMath" r:id="rId91" imgW="630720" imgH="279000" progId="Equation.AxMath">
+                <p:oleObj spid="_x0000_s6801" name="AxMath" r:id="rId91" imgW="630720" imgH="279000" progId="Equation.AxMath">
                   <p:embed/>
                 </p:oleObj>
               </mc:Choice>
@@ -19843,7 +19844,7 @@
           <a:graphicData uri="http://schemas.openxmlformats.org/presentationml/2006/ole">
             <mc:AlternateContent xmlns:mc="http://schemas.openxmlformats.org/markup-compatibility/2006">
               <mc:Choice xmlns:v="urn:schemas-microsoft-com:vml" Requires="v">
-                <p:oleObj spid="_x0000_s6342" name="AxMath" r:id="rId93" imgW="629280" imgH="279000" progId="Equation.AxMath">
+                <p:oleObj spid="_x0000_s6802" name="AxMath" r:id="rId93" imgW="629280" imgH="279000" progId="Equation.AxMath">
                   <p:embed/>
                 </p:oleObj>
               </mc:Choice>
@@ -19944,7 +19945,7 @@
           <a:graphicData uri="http://schemas.openxmlformats.org/presentationml/2006/ole">
             <mc:AlternateContent xmlns:mc="http://schemas.openxmlformats.org/markup-compatibility/2006">
               <mc:Choice xmlns:v="urn:schemas-microsoft-com:vml" Requires="v">
-                <p:oleObj spid="_x0000_s6343" name="AxMath" r:id="rId74" imgW="622080" imgH="279000" progId="Equation.AxMath">
+                <p:oleObj spid="_x0000_s6803" name="AxMath" r:id="rId74" imgW="622080" imgH="279000" progId="Equation.AxMath">
                   <p:embed/>
                 </p:oleObj>
               </mc:Choice>
@@ -20071,7 +20072,7 @@
           <a:graphicData uri="http://schemas.openxmlformats.org/presentationml/2006/ole">
             <mc:AlternateContent xmlns:mc="http://schemas.openxmlformats.org/markup-compatibility/2006">
               <mc:Choice xmlns:v="urn:schemas-microsoft-com:vml" Requires="v">
-                <p:oleObj spid="_x0000_s6344" name="AxMath" r:id="rId19" imgW="637560" imgH="279000" progId="Equation.AxMath">
+                <p:oleObj spid="_x0000_s6804" name="AxMath" r:id="rId19" imgW="637560" imgH="279000" progId="Equation.AxMath">
                   <p:embed/>
                 </p:oleObj>
               </mc:Choice>
@@ -20172,7 +20173,7 @@
           <a:graphicData uri="http://schemas.openxmlformats.org/presentationml/2006/ole">
             <mc:AlternateContent xmlns:mc="http://schemas.openxmlformats.org/markup-compatibility/2006">
               <mc:Choice xmlns:v="urn:schemas-microsoft-com:vml" Requires="v">
-                <p:oleObj spid="_x0000_s6345" name="AxMath" r:id="rId94" imgW="637560" imgH="279000" progId="Equation.AxMath">
+                <p:oleObj spid="_x0000_s6805" name="AxMath" r:id="rId94" imgW="637560" imgH="279000" progId="Equation.AxMath">
                   <p:embed/>
                 </p:oleObj>
               </mc:Choice>
@@ -20273,7 +20274,7 @@
           <a:graphicData uri="http://schemas.openxmlformats.org/presentationml/2006/ole">
             <mc:AlternateContent xmlns:mc="http://schemas.openxmlformats.org/markup-compatibility/2006">
               <mc:Choice xmlns:v="urn:schemas-microsoft-com:vml" Requires="v">
-                <p:oleObj spid="_x0000_s6346" name="AxMath" r:id="rId96" imgW="637560" imgH="279000" progId="Equation.AxMath">
+                <p:oleObj spid="_x0000_s6806" name="AxMath" r:id="rId96" imgW="637560" imgH="279000" progId="Equation.AxMath">
                   <p:embed/>
                 </p:oleObj>
               </mc:Choice>
@@ -20374,7 +20375,7 @@
           <a:graphicData uri="http://schemas.openxmlformats.org/presentationml/2006/ole">
             <mc:AlternateContent xmlns:mc="http://schemas.openxmlformats.org/markup-compatibility/2006">
               <mc:Choice xmlns:v="urn:schemas-microsoft-com:vml" Requires="v">
-                <p:oleObj spid="_x0000_s6347" name="AxMath" r:id="rId98" imgW="637560" imgH="279000" progId="Equation.AxMath">
+                <p:oleObj spid="_x0000_s6807" name="AxMath" r:id="rId98" imgW="637560" imgH="279000" progId="Equation.AxMath">
                   <p:embed/>
                 </p:oleObj>
               </mc:Choice>
@@ -20583,7 +20584,7 @@
           <a:graphicData uri="http://schemas.openxmlformats.org/presentationml/2006/ole">
             <mc:AlternateContent xmlns:mc="http://schemas.openxmlformats.org/markup-compatibility/2006">
               <mc:Choice xmlns:v="urn:schemas-microsoft-com:vml" Requires="v">
-                <p:oleObj spid="_x0000_s6348" name="AxMath" r:id="rId100" imgW="151920" imgH="226800" progId="Equation.AxMath">
+                <p:oleObj spid="_x0000_s6808" name="AxMath" r:id="rId100" imgW="151920" imgH="226800" progId="Equation.AxMath">
                   <p:embed/>
                 </p:oleObj>
               </mc:Choice>
@@ -20710,7 +20711,7 @@
           <a:graphicData uri="http://schemas.openxmlformats.org/presentationml/2006/ole">
             <mc:AlternateContent xmlns:mc="http://schemas.openxmlformats.org/markup-compatibility/2006">
               <mc:Choice xmlns:v="urn:schemas-microsoft-com:vml" Requires="v">
-                <p:oleObj spid="_x0000_s6349" name="AxMath" r:id="rId101" imgW="151920" imgH="226800" progId="Equation.AxMath">
+                <p:oleObj spid="_x0000_s6809" name="AxMath" r:id="rId101" imgW="151920" imgH="226800" progId="Equation.AxMath">
                   <p:embed/>
                 </p:oleObj>
               </mc:Choice>
@@ -20837,7 +20838,7 @@
           <a:graphicData uri="http://schemas.openxmlformats.org/presentationml/2006/ole">
             <mc:AlternateContent xmlns:mc="http://schemas.openxmlformats.org/markup-compatibility/2006">
               <mc:Choice xmlns:v="urn:schemas-microsoft-com:vml" Requires="v">
-                <p:oleObj spid="_x0000_s6350" name="AxMath" r:id="rId102" imgW="151920" imgH="226800" progId="Equation.AxMath">
+                <p:oleObj spid="_x0000_s6810" name="AxMath" r:id="rId102" imgW="151920" imgH="226800" progId="Equation.AxMath">
                   <p:embed/>
                 </p:oleObj>
               </mc:Choice>
@@ -20964,7 +20965,7 @@
           <a:graphicData uri="http://schemas.openxmlformats.org/presentationml/2006/ole">
             <mc:AlternateContent xmlns:mc="http://schemas.openxmlformats.org/markup-compatibility/2006">
               <mc:Choice xmlns:v="urn:schemas-microsoft-com:vml" Requires="v">
-                <p:oleObj spid="_x0000_s6351" name="AxMath" r:id="rId103" imgW="151920" imgH="226800" progId="Equation.AxMath">
+                <p:oleObj spid="_x0000_s6811" name="AxMath" r:id="rId103" imgW="151920" imgH="226800" progId="Equation.AxMath">
                   <p:embed/>
                 </p:oleObj>
               </mc:Choice>
@@ -21017,7 +21018,7 @@
           <a:graphicData uri="http://schemas.openxmlformats.org/presentationml/2006/ole">
             <mc:AlternateContent xmlns:mc="http://schemas.openxmlformats.org/markup-compatibility/2006">
               <mc:Choice xmlns:v="urn:schemas-microsoft-com:vml" Requires="v">
-                <p:oleObj spid="_x0000_s6352" name="AxMath" r:id="rId104" imgW="151920" imgH="226800" progId="Equation.AxMath">
+                <p:oleObj spid="_x0000_s6812" name="AxMath" r:id="rId104" imgW="151920" imgH="226800" progId="Equation.AxMath">
                   <p:embed/>
                 </p:oleObj>
               </mc:Choice>
@@ -21070,7 +21071,7 @@
           <a:graphicData uri="http://schemas.openxmlformats.org/presentationml/2006/ole">
             <mc:AlternateContent xmlns:mc="http://schemas.openxmlformats.org/markup-compatibility/2006">
               <mc:Choice xmlns:v="urn:schemas-microsoft-com:vml" Requires="v">
-                <p:oleObj spid="_x0000_s6353" name="AxMath" r:id="rId105" imgW="151920" imgH="226800" progId="Equation.AxMath">
+                <p:oleObj spid="_x0000_s6813" name="AxMath" r:id="rId105" imgW="151920" imgH="226800" progId="Equation.AxMath">
                   <p:embed/>
                 </p:oleObj>
               </mc:Choice>
@@ -21123,7 +21124,7 @@
           <a:graphicData uri="http://schemas.openxmlformats.org/presentationml/2006/ole">
             <mc:AlternateContent xmlns:mc="http://schemas.openxmlformats.org/markup-compatibility/2006">
               <mc:Choice xmlns:v="urn:schemas-microsoft-com:vml" Requires="v">
-                <p:oleObj spid="_x0000_s6354" name="AxMath" r:id="rId106" imgW="151920" imgH="226800" progId="Equation.AxMath">
+                <p:oleObj spid="_x0000_s6814" name="AxMath" r:id="rId106" imgW="151920" imgH="226800" progId="Equation.AxMath">
                   <p:embed/>
                 </p:oleObj>
               </mc:Choice>
@@ -21176,7 +21177,7 @@
           <a:graphicData uri="http://schemas.openxmlformats.org/presentationml/2006/ole">
             <mc:AlternateContent xmlns:mc="http://schemas.openxmlformats.org/markup-compatibility/2006">
               <mc:Choice xmlns:v="urn:schemas-microsoft-com:vml" Requires="v">
-                <p:oleObj spid="_x0000_s6355" name="AxMath" r:id="rId107" imgW="151920" imgH="226800" progId="Equation.AxMath">
+                <p:oleObj spid="_x0000_s6815" name="AxMath" r:id="rId107" imgW="151920" imgH="226800" progId="Equation.AxMath">
                   <p:embed/>
                 </p:oleObj>
               </mc:Choice>
@@ -21411,7 +21412,7 @@
           <a:graphicData uri="http://schemas.openxmlformats.org/presentationml/2006/ole">
             <mc:AlternateContent xmlns:mc="http://schemas.openxmlformats.org/markup-compatibility/2006">
               <mc:Choice xmlns:v="urn:schemas-microsoft-com:vml" Requires="v">
-                <p:oleObj spid="_x0000_s6356" name="AxMath" r:id="rId108" imgW="218880" imgH="230400" progId="Equation.AxMath">
+                <p:oleObj spid="_x0000_s6816" name="AxMath" r:id="rId108" imgW="218880" imgH="230400" progId="Equation.AxMath">
                   <p:embed/>
                 </p:oleObj>
               </mc:Choice>
@@ -21510,7 +21511,7 @@
           <a:graphicData uri="http://schemas.openxmlformats.org/presentationml/2006/ole">
             <mc:AlternateContent xmlns:mc="http://schemas.openxmlformats.org/markup-compatibility/2006">
               <mc:Choice xmlns:v="urn:schemas-microsoft-com:vml" Requires="v">
-                <p:oleObj spid="_x0000_s6357" name="AxMath" r:id="rId109" imgW="217080" imgH="230400" progId="Equation.AxMath">
+                <p:oleObj spid="_x0000_s6817" name="AxMath" r:id="rId109" imgW="217080" imgH="230400" progId="Equation.AxMath">
                   <p:embed/>
                 </p:oleObj>
               </mc:Choice>
@@ -21609,7 +21610,7 @@
           <a:graphicData uri="http://schemas.openxmlformats.org/presentationml/2006/ole">
             <mc:AlternateContent xmlns:mc="http://schemas.openxmlformats.org/markup-compatibility/2006">
               <mc:Choice xmlns:v="urn:schemas-microsoft-com:vml" Requires="v">
-                <p:oleObj spid="_x0000_s6358" name="AxMath" r:id="rId110" imgW="225360" imgH="230400" progId="Equation.AxMath">
+                <p:oleObj spid="_x0000_s6818" name="AxMath" r:id="rId110" imgW="225360" imgH="230400" progId="Equation.AxMath">
                   <p:embed/>
                 </p:oleObj>
               </mc:Choice>
@@ -21708,7 +21709,7 @@
           <a:graphicData uri="http://schemas.openxmlformats.org/presentationml/2006/ole">
             <mc:AlternateContent xmlns:mc="http://schemas.openxmlformats.org/markup-compatibility/2006">
               <mc:Choice xmlns:v="urn:schemas-microsoft-com:vml" Requires="v">
-                <p:oleObj spid="_x0000_s6359" name="AxMath" r:id="rId111" imgW="385200" imgH="230400" progId="Equation.AxMath">
+                <p:oleObj spid="_x0000_s6819" name="AxMath" r:id="rId111" imgW="385200" imgH="230400" progId="Equation.AxMath">
                   <p:embed/>
                 </p:oleObj>
               </mc:Choice>
@@ -21761,7 +21762,7 @@
           <a:graphicData uri="http://schemas.openxmlformats.org/presentationml/2006/ole">
             <mc:AlternateContent xmlns:mc="http://schemas.openxmlformats.org/markup-compatibility/2006">
               <mc:Choice xmlns:v="urn:schemas-microsoft-com:vml" Requires="v">
-                <p:oleObj spid="_x0000_s6360" name="AxMath" r:id="rId112" imgW="226080" imgH="230400" progId="Equation.AxMath">
+                <p:oleObj spid="_x0000_s6820" name="AxMath" r:id="rId112" imgW="226080" imgH="230400" progId="Equation.AxMath">
                   <p:embed/>
                 </p:oleObj>
               </mc:Choice>
@@ -21860,7 +21861,7 @@
           <a:graphicData uri="http://schemas.openxmlformats.org/presentationml/2006/ole">
             <mc:AlternateContent xmlns:mc="http://schemas.openxmlformats.org/markup-compatibility/2006">
               <mc:Choice xmlns:v="urn:schemas-microsoft-com:vml" Requires="v">
-                <p:oleObj spid="_x0000_s6361" name="AxMath" r:id="rId114" imgW="227520" imgH="230400" progId="Equation.AxMath">
+                <p:oleObj spid="_x0000_s6821" name="AxMath" r:id="rId114" imgW="227520" imgH="230400" progId="Equation.AxMath">
                   <p:embed/>
                 </p:oleObj>
               </mc:Choice>
@@ -21959,7 +21960,7 @@
           <a:graphicData uri="http://schemas.openxmlformats.org/presentationml/2006/ole">
             <mc:AlternateContent xmlns:mc="http://schemas.openxmlformats.org/markup-compatibility/2006">
               <mc:Choice xmlns:v="urn:schemas-microsoft-com:vml" Requires="v">
-                <p:oleObj spid="_x0000_s6362" name="AxMath" r:id="rId116" imgW="773640" imgH="230400" progId="Equation.AxMath">
+                <p:oleObj spid="_x0000_s6822" name="AxMath" r:id="rId116" imgW="773640" imgH="230400" progId="Equation.AxMath">
                   <p:embed/>
                 </p:oleObj>
               </mc:Choice>
@@ -22058,7 +22059,7 @@
           <a:graphicData uri="http://schemas.openxmlformats.org/presentationml/2006/ole">
             <mc:AlternateContent xmlns:mc="http://schemas.openxmlformats.org/markup-compatibility/2006">
               <mc:Choice xmlns:v="urn:schemas-microsoft-com:vml" Requires="v">
-                <p:oleObj spid="_x0000_s6363" name="AxMath" r:id="rId117" imgW="225360" imgH="230400" progId="Equation.AxMath">
+                <p:oleObj spid="_x0000_s6823" name="AxMath" r:id="rId117" imgW="225360" imgH="230400" progId="Equation.AxMath">
                   <p:embed/>
                 </p:oleObj>
               </mc:Choice>
@@ -22157,7 +22158,7 @@
           <a:graphicData uri="http://schemas.openxmlformats.org/presentationml/2006/ole">
             <mc:AlternateContent xmlns:mc="http://schemas.openxmlformats.org/markup-compatibility/2006">
               <mc:Choice xmlns:v="urn:schemas-microsoft-com:vml" Requires="v">
-                <p:oleObj spid="_x0000_s6364" name="AxMath" r:id="rId119" imgW="232200" imgH="230400" progId="Equation.AxMath">
+                <p:oleObj spid="_x0000_s6824" name="AxMath" r:id="rId119" imgW="232200" imgH="230400" progId="Equation.AxMath">
                   <p:embed/>
                 </p:oleObj>
               </mc:Choice>
@@ -22256,7 +22257,7 @@
           <a:graphicData uri="http://schemas.openxmlformats.org/presentationml/2006/ole">
             <mc:AlternateContent xmlns:mc="http://schemas.openxmlformats.org/markup-compatibility/2006">
               <mc:Choice xmlns:v="urn:schemas-microsoft-com:vml" Requires="v">
-                <p:oleObj spid="_x0000_s6365" name="AxMath" r:id="rId121" imgW="218520" imgH="230400" progId="Equation.AxMath">
+                <p:oleObj spid="_x0000_s6825" name="AxMath" r:id="rId121" imgW="218520" imgH="230400" progId="Equation.AxMath">
                   <p:embed/>
                 </p:oleObj>
               </mc:Choice>
@@ -22355,7 +22356,7 @@
           <a:graphicData uri="http://schemas.openxmlformats.org/presentationml/2006/ole">
             <mc:AlternateContent xmlns:mc="http://schemas.openxmlformats.org/markup-compatibility/2006">
               <mc:Choice xmlns:v="urn:schemas-microsoft-com:vml" Requires="v">
-                <p:oleObj spid="_x0000_s6366" name="AxMath" r:id="rId123" imgW="583200" imgH="230400" progId="Equation.AxMath">
+                <p:oleObj spid="_x0000_s6826" name="AxMath" r:id="rId123" imgW="583200" imgH="230400" progId="Equation.AxMath">
                   <p:embed/>
                 </p:oleObj>
               </mc:Choice>
@@ -22454,7 +22455,7 @@
           <a:graphicData uri="http://schemas.openxmlformats.org/presentationml/2006/ole">
             <mc:AlternateContent xmlns:mc="http://schemas.openxmlformats.org/markup-compatibility/2006">
               <mc:Choice xmlns:v="urn:schemas-microsoft-com:vml" Requires="v">
-                <p:oleObj spid="_x0000_s6367" name="AxMath" r:id="rId125" imgW="595080" imgH="230400" progId="Equation.AxMath">
+                <p:oleObj spid="_x0000_s6827" name="AxMath" r:id="rId125" imgW="595080" imgH="230400" progId="Equation.AxMath">
                   <p:embed/>
                 </p:oleObj>
               </mc:Choice>
@@ -22553,7 +22554,7 @@
           <a:graphicData uri="http://schemas.openxmlformats.org/presentationml/2006/ole">
             <mc:AlternateContent xmlns:mc="http://schemas.openxmlformats.org/markup-compatibility/2006">
               <mc:Choice xmlns:v="urn:schemas-microsoft-com:vml" Requires="v">
-                <p:oleObj spid="_x0000_s6368" name="AxMath" r:id="rId127" imgW="234000" imgH="230400" progId="Equation.AxMath">
+                <p:oleObj spid="_x0000_s6828" name="AxMath" r:id="rId127" imgW="234000" imgH="230400" progId="Equation.AxMath">
                   <p:embed/>
                 </p:oleObj>
               </mc:Choice>
@@ -22652,7 +22653,7 @@
           <a:graphicData uri="http://schemas.openxmlformats.org/presentationml/2006/ole">
             <mc:AlternateContent xmlns:mc="http://schemas.openxmlformats.org/markup-compatibility/2006">
               <mc:Choice xmlns:v="urn:schemas-microsoft-com:vml" Requires="v">
-                <p:oleObj spid="_x0000_s6369" name="AxMath" r:id="rId129" imgW="378360" imgH="230400" progId="Equation.AxMath">
+                <p:oleObj spid="_x0000_s6829" name="AxMath" r:id="rId129" imgW="378360" imgH="230400" progId="Equation.AxMath">
                   <p:embed/>
                 </p:oleObj>
               </mc:Choice>
@@ -22751,7 +22752,7 @@
           <a:graphicData uri="http://schemas.openxmlformats.org/presentationml/2006/ole">
             <mc:AlternateContent xmlns:mc="http://schemas.openxmlformats.org/markup-compatibility/2006">
               <mc:Choice xmlns:v="urn:schemas-microsoft-com:vml" Requires="v">
-                <p:oleObj spid="_x0000_s6370" name="AxMath" r:id="rId131" imgW="376560" imgH="230400" progId="Equation.AxMath">
+                <p:oleObj spid="_x0000_s6830" name="AxMath" r:id="rId131" imgW="376560" imgH="230400" progId="Equation.AxMath">
                   <p:embed/>
                 </p:oleObj>
               </mc:Choice>
@@ -22850,7 +22851,7 @@
           <a:graphicData uri="http://schemas.openxmlformats.org/presentationml/2006/ole">
             <mc:AlternateContent xmlns:mc="http://schemas.openxmlformats.org/markup-compatibility/2006">
               <mc:Choice xmlns:v="urn:schemas-microsoft-com:vml" Requires="v">
-                <p:oleObj spid="_x0000_s6371" name="AxMath" r:id="rId133" imgW="369720" imgH="230400" progId="Equation.AxMath">
+                <p:oleObj spid="_x0000_s6831" name="AxMath" r:id="rId133" imgW="369720" imgH="230400" progId="Equation.AxMath">
                   <p:embed/>
                 </p:oleObj>
               </mc:Choice>
@@ -23023,7 +23024,7 @@
           <a:graphicData uri="http://schemas.openxmlformats.org/presentationml/2006/ole">
             <mc:AlternateContent xmlns:mc="http://schemas.openxmlformats.org/markup-compatibility/2006">
               <mc:Choice xmlns:v="urn:schemas-microsoft-com:vml" Requires="v">
-                <p:oleObj spid="_x0000_s6372" name="AxMath" r:id="rId135" imgW="392040" imgH="230400" progId="Equation.AxMath">
+                <p:oleObj spid="_x0000_s6832" name="AxMath" r:id="rId135" imgW="392040" imgH="230400" progId="Equation.AxMath">
                   <p:embed/>
                 </p:oleObj>
               </mc:Choice>
@@ -23122,7 +23123,7 @@
           <a:graphicData uri="http://schemas.openxmlformats.org/presentationml/2006/ole">
             <mc:AlternateContent xmlns:mc="http://schemas.openxmlformats.org/markup-compatibility/2006">
               <mc:Choice xmlns:v="urn:schemas-microsoft-com:vml" Requires="v">
-                <p:oleObj spid="_x0000_s6373" name="AxMath" r:id="rId137" imgW="385200" imgH="230400" progId="Equation.AxMath">
+                <p:oleObj spid="_x0000_s6833" name="AxMath" r:id="rId137" imgW="385200" imgH="230400" progId="Equation.AxMath">
                   <p:embed/>
                 </p:oleObj>
               </mc:Choice>
@@ -23221,7 +23222,7 @@
           <a:graphicData uri="http://schemas.openxmlformats.org/presentationml/2006/ole">
             <mc:AlternateContent xmlns:mc="http://schemas.openxmlformats.org/markup-compatibility/2006">
               <mc:Choice xmlns:v="urn:schemas-microsoft-com:vml" Requires="v">
-                <p:oleObj spid="_x0000_s6374" name="AxMath" r:id="rId139" imgW="383760" imgH="230400" progId="Equation.AxMath">
+                <p:oleObj spid="_x0000_s6834" name="AxMath" r:id="rId139" imgW="383760" imgH="230400" progId="Equation.AxMath">
                   <p:embed/>
                 </p:oleObj>
               </mc:Choice>
@@ -23320,7 +23321,7 @@
           <a:graphicData uri="http://schemas.openxmlformats.org/presentationml/2006/ole">
             <mc:AlternateContent xmlns:mc="http://schemas.openxmlformats.org/markup-compatibility/2006">
               <mc:Choice xmlns:v="urn:schemas-microsoft-com:vml" Requires="v">
-                <p:oleObj spid="_x0000_s6375" name="AxMath" r:id="rId141" imgW="376560" imgH="230400" progId="Equation.AxMath">
+                <p:oleObj spid="_x0000_s6835" name="AxMath" r:id="rId141" imgW="376560" imgH="230400" progId="Equation.AxMath">
                   <p:embed/>
                 </p:oleObj>
               </mc:Choice>
@@ -23395,6 +23396,7411 @@
     <p:extLst>
       <p:ext uri="{BB962C8B-B14F-4D97-AF65-F5344CB8AC3E}">
         <p14:creationId xmlns:p14="http://schemas.microsoft.com/office/powerpoint/2010/main" val="2367818546"/>
+      </p:ext>
+    </p:extLst>
+  </p:cSld>
+  <p:clrMapOvr>
+    <a:masterClrMapping/>
+  </p:clrMapOvr>
+</p:sld>
+</file>
+
+<file path=ppt/slides/slide13.xml><?xml version="1.0" encoding="utf-8"?>
+<p:sld xmlns:a="http://schemas.openxmlformats.org/drawingml/2006/main" xmlns:r="http://schemas.openxmlformats.org/officeDocument/2006/relationships" xmlns:p="http://schemas.openxmlformats.org/presentationml/2006/main">
+  <p:cSld>
+    <p:spTree>
+      <p:nvGrpSpPr>
+        <p:cNvPr id="1" name=""/>
+        <p:cNvGrpSpPr/>
+        <p:nvPr/>
+      </p:nvGrpSpPr>
+      <p:grpSpPr>
+        <a:xfrm>
+          <a:off x="0" y="0"/>
+          <a:ext cx="0" cy="0"/>
+          <a:chOff x="0" y="0"/>
+          <a:chExt cx="0" cy="0"/>
+        </a:xfrm>
+      </p:grpSpPr>
+      <p:sp>
+        <p:nvSpPr>
+          <p:cNvPr id="244" name="圆角矩形 243"/>
+          <p:cNvSpPr/>
+          <p:nvPr/>
+        </p:nvSpPr>
+        <p:spPr>
+          <a:xfrm>
+            <a:off x="2414238" y="214258"/>
+            <a:ext cx="1126057" cy="432262"/>
+          </a:xfrm>
+          <a:prstGeom prst="roundRect">
+            <a:avLst/>
+          </a:prstGeom>
+          <a:solidFill>
+            <a:srgbClr val="BDD7EE"/>
+          </a:solidFill>
+          <a:ln w="28575">
+            <a:solidFill>
+              <a:schemeClr val="tx1"/>
+            </a:solidFill>
+          </a:ln>
+        </p:spPr>
+        <p:style>
+          <a:lnRef idx="2">
+            <a:schemeClr val="accent1">
+              <a:shade val="50000"/>
+            </a:schemeClr>
+          </a:lnRef>
+          <a:fillRef idx="1">
+            <a:schemeClr val="accent1"/>
+          </a:fillRef>
+          <a:effectRef idx="0">
+            <a:schemeClr val="accent1"/>
+          </a:effectRef>
+          <a:fontRef idx="minor">
+            <a:schemeClr val="lt1"/>
+          </a:fontRef>
+        </p:style>
+        <p:txBody>
+          <a:bodyPr rtlCol="0" anchor="ctr"/>
+          <a:lstStyle/>
+          <a:p>
+            <a:pPr algn="ctr"/>
+            <a:r>
+              <a:rPr lang="en-US" altLang="zh-CN" dirty="0" smtClean="0">
+                <a:solidFill>
+                  <a:schemeClr val="tx1"/>
+                </a:solidFill>
+                <a:latin typeface="Times New Roman" panose="02020603050405020304" pitchFamily="18" charset="0"/>
+                <a:cs typeface="Times New Roman" panose="02020603050405020304" pitchFamily="18" charset="0"/>
+              </a:rPr>
+              <a:t>GPU 0</a:t>
+            </a:r>
+            <a:endParaRPr lang="zh-CN" altLang="en-US" dirty="0">
+              <a:solidFill>
+                <a:schemeClr val="tx1"/>
+              </a:solidFill>
+              <a:latin typeface="Times New Roman" panose="02020603050405020304" pitchFamily="18" charset="0"/>
+              <a:cs typeface="Times New Roman" panose="02020603050405020304" pitchFamily="18" charset="0"/>
+            </a:endParaRPr>
+          </a:p>
+        </p:txBody>
+      </p:sp>
+      <p:sp>
+        <p:nvSpPr>
+          <p:cNvPr id="245" name="矩形 244"/>
+          <p:cNvSpPr/>
+          <p:nvPr/>
+        </p:nvSpPr>
+        <p:spPr>
+          <a:xfrm>
+            <a:off x="3698237" y="214258"/>
+            <a:ext cx="1230283" cy="432262"/>
+          </a:xfrm>
+          <a:prstGeom prst="rect">
+            <a:avLst/>
+          </a:prstGeom>
+          <a:solidFill>
+            <a:srgbClr val="E2F0D9"/>
+          </a:solidFill>
+          <a:ln w="28575">
+            <a:solidFill>
+              <a:schemeClr val="tx1"/>
+            </a:solidFill>
+          </a:ln>
+        </p:spPr>
+        <p:style>
+          <a:lnRef idx="2">
+            <a:schemeClr val="accent1">
+              <a:shade val="50000"/>
+            </a:schemeClr>
+          </a:lnRef>
+          <a:fillRef idx="1">
+            <a:schemeClr val="accent1"/>
+          </a:fillRef>
+          <a:effectRef idx="0">
+            <a:schemeClr val="accent1"/>
+          </a:effectRef>
+          <a:fontRef idx="minor">
+            <a:schemeClr val="lt1"/>
+          </a:fontRef>
+        </p:style>
+        <p:txBody>
+          <a:bodyPr rtlCol="0" anchor="ctr"/>
+          <a:lstStyle/>
+          <a:p>
+            <a:pPr algn="ctr"/>
+            <a:endParaRPr lang="zh-CN" altLang="en-US" dirty="0"/>
+          </a:p>
+        </p:txBody>
+      </p:sp>
+      <p:sp>
+        <p:nvSpPr>
+          <p:cNvPr id="246" name="矩形 245"/>
+          <p:cNvSpPr/>
+          <p:nvPr/>
+        </p:nvSpPr>
+        <p:spPr>
+          <a:xfrm>
+            <a:off x="5086462" y="214258"/>
+            <a:ext cx="1230283" cy="432262"/>
+          </a:xfrm>
+          <a:prstGeom prst="rect">
+            <a:avLst/>
+          </a:prstGeom>
+          <a:solidFill>
+            <a:srgbClr val="E2F0D9"/>
+          </a:solidFill>
+          <a:ln w="28575">
+            <a:solidFill>
+              <a:schemeClr val="tx1"/>
+            </a:solidFill>
+          </a:ln>
+        </p:spPr>
+        <p:style>
+          <a:lnRef idx="2">
+            <a:schemeClr val="accent1">
+              <a:shade val="50000"/>
+            </a:schemeClr>
+          </a:lnRef>
+          <a:fillRef idx="1">
+            <a:schemeClr val="accent1"/>
+          </a:fillRef>
+          <a:effectRef idx="0">
+            <a:schemeClr val="accent1"/>
+          </a:effectRef>
+          <a:fontRef idx="minor">
+            <a:schemeClr val="lt1"/>
+          </a:fontRef>
+        </p:style>
+        <p:txBody>
+          <a:bodyPr rtlCol="0" anchor="ctr"/>
+          <a:lstStyle/>
+          <a:p>
+            <a:pPr algn="ctr"/>
+            <a:endParaRPr lang="zh-CN" altLang="en-US" dirty="0"/>
+          </a:p>
+        </p:txBody>
+      </p:sp>
+      <p:graphicFrame>
+        <p:nvGraphicFramePr>
+          <p:cNvPr id="247" name="对象 246"/>
+          <p:cNvGraphicFramePr>
+            <a:graphicFrameLocks noChangeAspect="1"/>
+          </p:cNvGraphicFramePr>
+          <p:nvPr>
+            <p:extLst>
+              <p:ext uri="{D42A27DB-BD31-4B8C-83A1-F6EECF244321}">
+                <p14:modId xmlns:p14="http://schemas.microsoft.com/office/powerpoint/2010/main" val="1943611678"/>
+              </p:ext>
+            </p:extLst>
+          </p:nvPr>
+        </p:nvGraphicFramePr>
+        <p:xfrm>
+          <a:off x="7873303" y="66136"/>
+          <a:ext cx="463435" cy="728505"/>
+        </p:xfrm>
+        <a:graphic>
+          <a:graphicData uri="http://schemas.openxmlformats.org/presentationml/2006/ole">
+            <mc:AlternateContent xmlns:mc="http://schemas.openxmlformats.org/markup-compatibility/2006">
+              <mc:Choice xmlns:v="urn:schemas-microsoft-com:vml" Requires="v">
+                <p:oleObj spid="_x0000_s7291" name="AxMath" r:id="rId3" imgW="151920" imgH="226800" progId="Equation.AxMath">
+                  <p:embed/>
+                </p:oleObj>
+              </mc:Choice>
+              <mc:Fallback>
+                <p:oleObj name="AxMath" r:id="rId3" imgW="151920" imgH="226800" progId="Equation.AxMath">
+                  <p:embed/>
+                  <p:pic>
+                    <p:nvPicPr>
+                      <p:cNvPr id="247" name="对象 246"/>
+                      <p:cNvPicPr/>
+                      <p:nvPr/>
+                    </p:nvPicPr>
+                    <p:blipFill>
+                      <a:blip r:embed="rId4"/>
+                      <a:stretch>
+                        <a:fillRect/>
+                      </a:stretch>
+                    </p:blipFill>
+                    <p:spPr>
+                      <a:xfrm>
+                        <a:off x="7873303" y="66136"/>
+                        <a:ext cx="463435" cy="728505"/>
+                      </a:xfrm>
+                      <a:prstGeom prst="rect">
+                        <a:avLst/>
+                      </a:prstGeom>
+                    </p:spPr>
+                  </p:pic>
+                </p:oleObj>
+              </mc:Fallback>
+            </mc:AlternateContent>
+          </a:graphicData>
+        </a:graphic>
+      </p:graphicFrame>
+      <p:sp>
+        <p:nvSpPr>
+          <p:cNvPr id="248" name="圆角矩形 247"/>
+          <p:cNvSpPr/>
+          <p:nvPr/>
+        </p:nvSpPr>
+        <p:spPr>
+          <a:xfrm>
+            <a:off x="2401336" y="826106"/>
+            <a:ext cx="1138959" cy="432262"/>
+          </a:xfrm>
+          <a:prstGeom prst="roundRect">
+            <a:avLst/>
+          </a:prstGeom>
+          <a:solidFill>
+            <a:srgbClr val="BDD7EE"/>
+          </a:solidFill>
+          <a:ln w="28575">
+            <a:solidFill>
+              <a:schemeClr val="tx1"/>
+            </a:solidFill>
+          </a:ln>
+        </p:spPr>
+        <p:style>
+          <a:lnRef idx="2">
+            <a:schemeClr val="accent1">
+              <a:shade val="50000"/>
+            </a:schemeClr>
+          </a:lnRef>
+          <a:fillRef idx="1">
+            <a:schemeClr val="accent1"/>
+          </a:fillRef>
+          <a:effectRef idx="0">
+            <a:schemeClr val="accent1"/>
+          </a:effectRef>
+          <a:fontRef idx="minor">
+            <a:schemeClr val="lt1"/>
+          </a:fontRef>
+        </p:style>
+        <p:txBody>
+          <a:bodyPr rtlCol="0" anchor="ctr"/>
+          <a:lstStyle/>
+          <a:p>
+            <a:pPr algn="ctr"/>
+            <a:r>
+              <a:rPr lang="en-US" altLang="zh-CN" dirty="0">
+                <a:solidFill>
+                  <a:schemeClr val="tx1"/>
+                </a:solidFill>
+                <a:latin typeface="Times New Roman" panose="02020603050405020304" pitchFamily="18" charset="0"/>
+                <a:cs typeface="Times New Roman" panose="02020603050405020304" pitchFamily="18" charset="0"/>
+              </a:rPr>
+              <a:t>GPU </a:t>
+            </a:r>
+            <a:r>
+              <a:rPr lang="en-US" altLang="zh-CN" dirty="0" smtClean="0">
+                <a:solidFill>
+                  <a:schemeClr val="tx1"/>
+                </a:solidFill>
+                <a:latin typeface="Times New Roman" panose="02020603050405020304" pitchFamily="18" charset="0"/>
+                <a:cs typeface="Times New Roman" panose="02020603050405020304" pitchFamily="18" charset="0"/>
+              </a:rPr>
+              <a:t>1</a:t>
+            </a:r>
+            <a:endParaRPr lang="zh-CN" altLang="en-US" dirty="0">
+              <a:solidFill>
+                <a:schemeClr val="tx1"/>
+              </a:solidFill>
+              <a:latin typeface="Times New Roman" panose="02020603050405020304" pitchFamily="18" charset="0"/>
+              <a:cs typeface="Times New Roman" panose="02020603050405020304" pitchFamily="18" charset="0"/>
+            </a:endParaRPr>
+          </a:p>
+        </p:txBody>
+      </p:sp>
+      <p:graphicFrame>
+        <p:nvGraphicFramePr>
+          <p:cNvPr id="249" name="对象 248"/>
+          <p:cNvGraphicFramePr>
+            <a:graphicFrameLocks noChangeAspect="1"/>
+          </p:cNvGraphicFramePr>
+          <p:nvPr>
+            <p:extLst>
+              <p:ext uri="{D42A27DB-BD31-4B8C-83A1-F6EECF244321}">
+                <p14:modId xmlns:p14="http://schemas.microsoft.com/office/powerpoint/2010/main" val="3938030247"/>
+              </p:ext>
+            </p:extLst>
+          </p:nvPr>
+        </p:nvGraphicFramePr>
+        <p:xfrm>
+          <a:off x="7873303" y="677984"/>
+          <a:ext cx="463435" cy="728505"/>
+        </p:xfrm>
+        <a:graphic>
+          <a:graphicData uri="http://schemas.openxmlformats.org/presentationml/2006/ole">
+            <mc:AlternateContent xmlns:mc="http://schemas.openxmlformats.org/markup-compatibility/2006">
+              <mc:Choice xmlns:v="urn:schemas-microsoft-com:vml" Requires="v">
+                <p:oleObj spid="_x0000_s7292" name="AxMath" r:id="rId5" imgW="151920" imgH="226800" progId="Equation.AxMath">
+                  <p:embed/>
+                </p:oleObj>
+              </mc:Choice>
+              <mc:Fallback>
+                <p:oleObj name="AxMath" r:id="rId5" imgW="151920" imgH="226800" progId="Equation.AxMath">
+                  <p:embed/>
+                  <p:pic>
+                    <p:nvPicPr>
+                      <p:cNvPr id="249" name="对象 248"/>
+                      <p:cNvPicPr/>
+                      <p:nvPr/>
+                    </p:nvPicPr>
+                    <p:blipFill>
+                      <a:blip r:embed="rId4"/>
+                      <a:stretch>
+                        <a:fillRect/>
+                      </a:stretch>
+                    </p:blipFill>
+                    <p:spPr>
+                      <a:xfrm>
+                        <a:off x="7873303" y="677984"/>
+                        <a:ext cx="463435" cy="728505"/>
+                      </a:xfrm>
+                      <a:prstGeom prst="rect">
+                        <a:avLst/>
+                      </a:prstGeom>
+                    </p:spPr>
+                  </p:pic>
+                </p:oleObj>
+              </mc:Fallback>
+            </mc:AlternateContent>
+          </a:graphicData>
+        </a:graphic>
+      </p:graphicFrame>
+      <p:sp>
+        <p:nvSpPr>
+          <p:cNvPr id="250" name="圆角矩形 249"/>
+          <p:cNvSpPr/>
+          <p:nvPr/>
+        </p:nvSpPr>
+        <p:spPr>
+          <a:xfrm>
+            <a:off x="2401336" y="1437953"/>
+            <a:ext cx="1138959" cy="432262"/>
+          </a:xfrm>
+          <a:prstGeom prst="roundRect">
+            <a:avLst/>
+          </a:prstGeom>
+          <a:solidFill>
+            <a:srgbClr val="BDD7EE"/>
+          </a:solidFill>
+          <a:ln w="28575">
+            <a:solidFill>
+              <a:schemeClr val="tx1"/>
+            </a:solidFill>
+          </a:ln>
+        </p:spPr>
+        <p:style>
+          <a:lnRef idx="2">
+            <a:schemeClr val="accent1">
+              <a:shade val="50000"/>
+            </a:schemeClr>
+          </a:lnRef>
+          <a:fillRef idx="1">
+            <a:schemeClr val="accent1"/>
+          </a:fillRef>
+          <a:effectRef idx="0">
+            <a:schemeClr val="accent1"/>
+          </a:effectRef>
+          <a:fontRef idx="minor">
+            <a:schemeClr val="lt1"/>
+          </a:fontRef>
+        </p:style>
+        <p:txBody>
+          <a:bodyPr rtlCol="0" anchor="ctr"/>
+          <a:lstStyle/>
+          <a:p>
+            <a:pPr algn="ctr"/>
+            <a:r>
+              <a:rPr lang="en-US" altLang="zh-CN" dirty="0">
+                <a:solidFill>
+                  <a:schemeClr val="tx1"/>
+                </a:solidFill>
+                <a:latin typeface="Times New Roman" panose="02020603050405020304" pitchFamily="18" charset="0"/>
+                <a:cs typeface="Times New Roman" panose="02020603050405020304" pitchFamily="18" charset="0"/>
+              </a:rPr>
+              <a:t>GPU </a:t>
+            </a:r>
+            <a:r>
+              <a:rPr lang="en-US" altLang="zh-CN" dirty="0" smtClean="0">
+                <a:solidFill>
+                  <a:schemeClr val="tx1"/>
+                </a:solidFill>
+                <a:latin typeface="Times New Roman" panose="02020603050405020304" pitchFamily="18" charset="0"/>
+                <a:cs typeface="Times New Roman" panose="02020603050405020304" pitchFamily="18" charset="0"/>
+              </a:rPr>
+              <a:t>2</a:t>
+            </a:r>
+            <a:endParaRPr lang="zh-CN" altLang="en-US" dirty="0">
+              <a:solidFill>
+                <a:schemeClr val="tx1"/>
+              </a:solidFill>
+              <a:latin typeface="Times New Roman" panose="02020603050405020304" pitchFamily="18" charset="0"/>
+              <a:cs typeface="Times New Roman" panose="02020603050405020304" pitchFamily="18" charset="0"/>
+            </a:endParaRPr>
+          </a:p>
+        </p:txBody>
+      </p:sp>
+      <p:graphicFrame>
+        <p:nvGraphicFramePr>
+          <p:cNvPr id="251" name="对象 250"/>
+          <p:cNvGraphicFramePr>
+            <a:graphicFrameLocks noChangeAspect="1"/>
+          </p:cNvGraphicFramePr>
+          <p:nvPr>
+            <p:extLst>
+              <p:ext uri="{D42A27DB-BD31-4B8C-83A1-F6EECF244321}">
+                <p14:modId xmlns:p14="http://schemas.microsoft.com/office/powerpoint/2010/main" val="2864861302"/>
+              </p:ext>
+            </p:extLst>
+          </p:nvPr>
+        </p:nvGraphicFramePr>
+        <p:xfrm>
+          <a:off x="7873303" y="1289831"/>
+          <a:ext cx="463435" cy="728505"/>
+        </p:xfrm>
+        <a:graphic>
+          <a:graphicData uri="http://schemas.openxmlformats.org/presentationml/2006/ole">
+            <mc:AlternateContent xmlns:mc="http://schemas.openxmlformats.org/markup-compatibility/2006">
+              <mc:Choice xmlns:v="urn:schemas-microsoft-com:vml" Requires="v">
+                <p:oleObj spid="_x0000_s7293" name="AxMath" r:id="rId6" imgW="151920" imgH="226800" progId="Equation.AxMath">
+                  <p:embed/>
+                </p:oleObj>
+              </mc:Choice>
+              <mc:Fallback>
+                <p:oleObj name="AxMath" r:id="rId6" imgW="151920" imgH="226800" progId="Equation.AxMath">
+                  <p:embed/>
+                  <p:pic>
+                    <p:nvPicPr>
+                      <p:cNvPr id="251" name="对象 250"/>
+                      <p:cNvPicPr/>
+                      <p:nvPr/>
+                    </p:nvPicPr>
+                    <p:blipFill>
+                      <a:blip r:embed="rId4"/>
+                      <a:stretch>
+                        <a:fillRect/>
+                      </a:stretch>
+                    </p:blipFill>
+                    <p:spPr>
+                      <a:xfrm>
+                        <a:off x="7873303" y="1289831"/>
+                        <a:ext cx="463435" cy="728505"/>
+                      </a:xfrm>
+                      <a:prstGeom prst="rect">
+                        <a:avLst/>
+                      </a:prstGeom>
+                    </p:spPr>
+                  </p:pic>
+                </p:oleObj>
+              </mc:Fallback>
+            </mc:AlternateContent>
+          </a:graphicData>
+        </a:graphic>
+      </p:graphicFrame>
+      <p:sp>
+        <p:nvSpPr>
+          <p:cNvPr id="252" name="圆角矩形 251"/>
+          <p:cNvSpPr/>
+          <p:nvPr/>
+        </p:nvSpPr>
+        <p:spPr>
+          <a:xfrm>
+            <a:off x="2401336" y="3074514"/>
+            <a:ext cx="1138843" cy="432262"/>
+          </a:xfrm>
+          <a:prstGeom prst="roundRect">
+            <a:avLst/>
+          </a:prstGeom>
+          <a:solidFill>
+            <a:srgbClr val="BDD7EE"/>
+          </a:solidFill>
+          <a:ln w="28575">
+            <a:solidFill>
+              <a:schemeClr val="tx1"/>
+            </a:solidFill>
+          </a:ln>
+        </p:spPr>
+        <p:style>
+          <a:lnRef idx="2">
+            <a:schemeClr val="accent1">
+              <a:shade val="50000"/>
+            </a:schemeClr>
+          </a:lnRef>
+          <a:fillRef idx="1">
+            <a:schemeClr val="accent1"/>
+          </a:fillRef>
+          <a:effectRef idx="0">
+            <a:schemeClr val="accent1"/>
+          </a:effectRef>
+          <a:fontRef idx="minor">
+            <a:schemeClr val="lt1"/>
+          </a:fontRef>
+        </p:style>
+        <p:txBody>
+          <a:bodyPr rtlCol="0" anchor="ctr"/>
+          <a:lstStyle/>
+          <a:p>
+            <a:pPr algn="ctr"/>
+            <a:r>
+              <a:rPr lang="en-US" altLang="zh-CN" dirty="0">
+                <a:solidFill>
+                  <a:schemeClr val="tx1"/>
+                </a:solidFill>
+                <a:latin typeface="Times New Roman" panose="02020603050405020304" pitchFamily="18" charset="0"/>
+                <a:cs typeface="Times New Roman" panose="02020603050405020304" pitchFamily="18" charset="0"/>
+              </a:rPr>
+              <a:t>GPU </a:t>
+            </a:r>
+            <a:r>
+              <a:rPr lang="en-US" altLang="zh-CN" dirty="0" smtClean="0">
+                <a:solidFill>
+                  <a:schemeClr val="tx1"/>
+                </a:solidFill>
+                <a:latin typeface="Times New Roman" panose="02020603050405020304" pitchFamily="18" charset="0"/>
+                <a:cs typeface="Times New Roman" panose="02020603050405020304" pitchFamily="18" charset="0"/>
+              </a:rPr>
+              <a:t>n-1</a:t>
+            </a:r>
+            <a:endParaRPr lang="zh-CN" altLang="en-US" dirty="0">
+              <a:solidFill>
+                <a:schemeClr val="tx1"/>
+              </a:solidFill>
+              <a:latin typeface="Times New Roman" panose="02020603050405020304" pitchFamily="18" charset="0"/>
+              <a:cs typeface="Times New Roman" panose="02020603050405020304" pitchFamily="18" charset="0"/>
+            </a:endParaRPr>
+          </a:p>
+        </p:txBody>
+      </p:sp>
+      <p:graphicFrame>
+        <p:nvGraphicFramePr>
+          <p:cNvPr id="253" name="对象 252"/>
+          <p:cNvGraphicFramePr>
+            <a:graphicFrameLocks noChangeAspect="1"/>
+          </p:cNvGraphicFramePr>
+          <p:nvPr>
+            <p:extLst>
+              <p:ext uri="{D42A27DB-BD31-4B8C-83A1-F6EECF244321}">
+                <p14:modId xmlns:p14="http://schemas.microsoft.com/office/powerpoint/2010/main" val="1583554477"/>
+              </p:ext>
+            </p:extLst>
+          </p:nvPr>
+        </p:nvGraphicFramePr>
+        <p:xfrm>
+          <a:off x="7873187" y="2926392"/>
+          <a:ext cx="463435" cy="728505"/>
+        </p:xfrm>
+        <a:graphic>
+          <a:graphicData uri="http://schemas.openxmlformats.org/presentationml/2006/ole">
+            <mc:AlternateContent xmlns:mc="http://schemas.openxmlformats.org/markup-compatibility/2006">
+              <mc:Choice xmlns:v="urn:schemas-microsoft-com:vml" Requires="v">
+                <p:oleObj spid="_x0000_s7294" name="AxMath" r:id="rId7" imgW="151920" imgH="226800" progId="Equation.AxMath">
+                  <p:embed/>
+                </p:oleObj>
+              </mc:Choice>
+              <mc:Fallback>
+                <p:oleObj name="AxMath" r:id="rId7" imgW="151920" imgH="226800" progId="Equation.AxMath">
+                  <p:embed/>
+                  <p:pic>
+                    <p:nvPicPr>
+                      <p:cNvPr id="253" name="对象 252"/>
+                      <p:cNvPicPr/>
+                      <p:nvPr/>
+                    </p:nvPicPr>
+                    <p:blipFill>
+                      <a:blip r:embed="rId4"/>
+                      <a:stretch>
+                        <a:fillRect/>
+                      </a:stretch>
+                    </p:blipFill>
+                    <p:spPr>
+                      <a:xfrm>
+                        <a:off x="7873187" y="2926392"/>
+                        <a:ext cx="463435" cy="728505"/>
+                      </a:xfrm>
+                      <a:prstGeom prst="rect">
+                        <a:avLst/>
+                      </a:prstGeom>
+                    </p:spPr>
+                  </p:pic>
+                </p:oleObj>
+              </mc:Fallback>
+            </mc:AlternateContent>
+          </a:graphicData>
+        </a:graphic>
+      </p:graphicFrame>
+      <p:graphicFrame>
+        <p:nvGraphicFramePr>
+          <p:cNvPr id="254" name="对象 253"/>
+          <p:cNvGraphicFramePr>
+            <a:graphicFrameLocks noChangeAspect="1"/>
+          </p:cNvGraphicFramePr>
+          <p:nvPr>
+            <p:extLst>
+              <p:ext uri="{D42A27DB-BD31-4B8C-83A1-F6EECF244321}">
+                <p14:modId xmlns:p14="http://schemas.microsoft.com/office/powerpoint/2010/main" val="109967791"/>
+              </p:ext>
+            </p:extLst>
+          </p:nvPr>
+        </p:nvGraphicFramePr>
+        <p:xfrm>
+          <a:off x="5464691" y="1835759"/>
+          <a:ext cx="463435" cy="728505"/>
+        </p:xfrm>
+        <a:graphic>
+          <a:graphicData uri="http://schemas.openxmlformats.org/presentationml/2006/ole">
+            <mc:AlternateContent xmlns:mc="http://schemas.openxmlformats.org/markup-compatibility/2006">
+              <mc:Choice xmlns:v="urn:schemas-microsoft-com:vml" Requires="v">
+                <p:oleObj spid="_x0000_s7295" name="AxMath" r:id="rId8" imgW="151920" imgH="226800" progId="Equation.AxMath">
+                  <p:embed/>
+                </p:oleObj>
+              </mc:Choice>
+              <mc:Fallback>
+                <p:oleObj name="AxMath" r:id="rId8" imgW="151920" imgH="226800" progId="Equation.AxMath">
+                  <p:embed/>
+                  <p:pic>
+                    <p:nvPicPr>
+                      <p:cNvPr id="254" name="对象 253"/>
+                      <p:cNvPicPr/>
+                      <p:nvPr/>
+                    </p:nvPicPr>
+                    <p:blipFill>
+                      <a:blip r:embed="rId9"/>
+                      <a:stretch>
+                        <a:fillRect/>
+                      </a:stretch>
+                    </p:blipFill>
+                    <p:spPr>
+                      <a:xfrm>
+                        <a:off x="5464691" y="1835759"/>
+                        <a:ext cx="463435" cy="728505"/>
+                      </a:xfrm>
+                      <a:prstGeom prst="rect">
+                        <a:avLst/>
+                      </a:prstGeom>
+                    </p:spPr>
+                  </p:pic>
+                </p:oleObj>
+              </mc:Fallback>
+            </mc:AlternateContent>
+          </a:graphicData>
+        </a:graphic>
+      </p:graphicFrame>
+      <p:graphicFrame>
+        <p:nvGraphicFramePr>
+          <p:cNvPr id="255" name="对象 254"/>
+          <p:cNvGraphicFramePr>
+            <a:graphicFrameLocks noChangeAspect="1"/>
+          </p:cNvGraphicFramePr>
+          <p:nvPr>
+            <p:extLst>
+              <p:ext uri="{D42A27DB-BD31-4B8C-83A1-F6EECF244321}">
+                <p14:modId xmlns:p14="http://schemas.microsoft.com/office/powerpoint/2010/main" val="3087800795"/>
+              </p:ext>
+            </p:extLst>
+          </p:nvPr>
+        </p:nvGraphicFramePr>
+        <p:xfrm>
+          <a:off x="4086857" y="1840410"/>
+          <a:ext cx="463435" cy="728505"/>
+        </p:xfrm>
+        <a:graphic>
+          <a:graphicData uri="http://schemas.openxmlformats.org/presentationml/2006/ole">
+            <mc:AlternateContent xmlns:mc="http://schemas.openxmlformats.org/markup-compatibility/2006">
+              <mc:Choice xmlns:v="urn:schemas-microsoft-com:vml" Requires="v">
+                <p:oleObj spid="_x0000_s7296" name="AxMath" r:id="rId10" imgW="151920" imgH="226800" progId="Equation.AxMath">
+                  <p:embed/>
+                </p:oleObj>
+              </mc:Choice>
+              <mc:Fallback>
+                <p:oleObj name="AxMath" r:id="rId10" imgW="151920" imgH="226800" progId="Equation.AxMath">
+                  <p:embed/>
+                  <p:pic>
+                    <p:nvPicPr>
+                      <p:cNvPr id="255" name="对象 254"/>
+                      <p:cNvPicPr/>
+                      <p:nvPr/>
+                    </p:nvPicPr>
+                    <p:blipFill>
+                      <a:blip r:embed="rId9"/>
+                      <a:stretch>
+                        <a:fillRect/>
+                      </a:stretch>
+                    </p:blipFill>
+                    <p:spPr>
+                      <a:xfrm>
+                        <a:off x="4086857" y="1840410"/>
+                        <a:ext cx="463435" cy="728505"/>
+                      </a:xfrm>
+                      <a:prstGeom prst="rect">
+                        <a:avLst/>
+                      </a:prstGeom>
+                    </p:spPr>
+                  </p:pic>
+                </p:oleObj>
+              </mc:Fallback>
+            </mc:AlternateContent>
+          </a:graphicData>
+        </a:graphic>
+      </p:graphicFrame>
+      <p:graphicFrame>
+        <p:nvGraphicFramePr>
+          <p:cNvPr id="256" name="对象 255"/>
+          <p:cNvGraphicFramePr>
+            <a:graphicFrameLocks noChangeAspect="1"/>
+          </p:cNvGraphicFramePr>
+          <p:nvPr>
+            <p:extLst>
+              <p:ext uri="{D42A27DB-BD31-4B8C-83A1-F6EECF244321}">
+                <p14:modId xmlns:p14="http://schemas.microsoft.com/office/powerpoint/2010/main" val="1684284702"/>
+              </p:ext>
+            </p:extLst>
+          </p:nvPr>
+        </p:nvGraphicFramePr>
+        <p:xfrm>
+          <a:off x="6856033" y="1835759"/>
+          <a:ext cx="463435" cy="728505"/>
+        </p:xfrm>
+        <a:graphic>
+          <a:graphicData uri="http://schemas.openxmlformats.org/presentationml/2006/ole">
+            <mc:AlternateContent xmlns:mc="http://schemas.openxmlformats.org/markup-compatibility/2006">
+              <mc:Choice xmlns:v="urn:schemas-microsoft-com:vml" Requires="v">
+                <p:oleObj spid="_x0000_s7297" name="AxMath" r:id="rId11" imgW="151920" imgH="226800" progId="Equation.AxMath">
+                  <p:embed/>
+                </p:oleObj>
+              </mc:Choice>
+              <mc:Fallback>
+                <p:oleObj name="AxMath" r:id="rId11" imgW="151920" imgH="226800" progId="Equation.AxMath">
+                  <p:embed/>
+                  <p:pic>
+                    <p:nvPicPr>
+                      <p:cNvPr id="256" name="对象 255"/>
+                      <p:cNvPicPr/>
+                      <p:nvPr/>
+                    </p:nvPicPr>
+                    <p:blipFill>
+                      <a:blip r:embed="rId9"/>
+                      <a:stretch>
+                        <a:fillRect/>
+                      </a:stretch>
+                    </p:blipFill>
+                    <p:spPr>
+                      <a:xfrm>
+                        <a:off x="6856033" y="1835759"/>
+                        <a:ext cx="463435" cy="728505"/>
+                      </a:xfrm>
+                      <a:prstGeom prst="rect">
+                        <a:avLst/>
+                      </a:prstGeom>
+                    </p:spPr>
+                  </p:pic>
+                </p:oleObj>
+              </mc:Fallback>
+            </mc:AlternateContent>
+          </a:graphicData>
+        </a:graphic>
+      </p:graphicFrame>
+      <p:graphicFrame>
+        <p:nvGraphicFramePr>
+          <p:cNvPr id="257" name="对象 256"/>
+          <p:cNvGraphicFramePr>
+            <a:graphicFrameLocks noChangeAspect="1"/>
+          </p:cNvGraphicFramePr>
+          <p:nvPr>
+            <p:extLst>
+              <p:ext uri="{D42A27DB-BD31-4B8C-83A1-F6EECF244321}">
+                <p14:modId xmlns:p14="http://schemas.microsoft.com/office/powerpoint/2010/main" val="2569198044"/>
+              </p:ext>
+            </p:extLst>
+          </p:nvPr>
+        </p:nvGraphicFramePr>
+        <p:xfrm>
+          <a:off x="8872908" y="1840435"/>
+          <a:ext cx="463435" cy="728505"/>
+        </p:xfrm>
+        <a:graphic>
+          <a:graphicData uri="http://schemas.openxmlformats.org/presentationml/2006/ole">
+            <mc:AlternateContent xmlns:mc="http://schemas.openxmlformats.org/markup-compatibility/2006">
+              <mc:Choice xmlns:v="urn:schemas-microsoft-com:vml" Requires="v">
+                <p:oleObj spid="_x0000_s7298" name="AxMath" r:id="rId12" imgW="151920" imgH="226800" progId="Equation.AxMath">
+                  <p:embed/>
+                </p:oleObj>
+              </mc:Choice>
+              <mc:Fallback>
+                <p:oleObj name="AxMath" r:id="rId12" imgW="151920" imgH="226800" progId="Equation.AxMath">
+                  <p:embed/>
+                  <p:pic>
+                    <p:nvPicPr>
+                      <p:cNvPr id="257" name="对象 256"/>
+                      <p:cNvPicPr/>
+                      <p:nvPr/>
+                    </p:nvPicPr>
+                    <p:blipFill>
+                      <a:blip r:embed="rId9"/>
+                      <a:stretch>
+                        <a:fillRect/>
+                      </a:stretch>
+                    </p:blipFill>
+                    <p:spPr>
+                      <a:xfrm>
+                        <a:off x="8872908" y="1840435"/>
+                        <a:ext cx="463435" cy="728505"/>
+                      </a:xfrm>
+                      <a:prstGeom prst="rect">
+                        <a:avLst/>
+                      </a:prstGeom>
+                    </p:spPr>
+                  </p:pic>
+                </p:oleObj>
+              </mc:Fallback>
+            </mc:AlternateContent>
+          </a:graphicData>
+        </a:graphic>
+      </p:graphicFrame>
+      <p:sp>
+        <p:nvSpPr>
+          <p:cNvPr id="265" name="矩形 264"/>
+          <p:cNvSpPr/>
+          <p:nvPr/>
+        </p:nvSpPr>
+        <p:spPr>
+          <a:xfrm>
+            <a:off x="5086462" y="826105"/>
+            <a:ext cx="1230283" cy="432262"/>
+          </a:xfrm>
+          <a:prstGeom prst="rect">
+            <a:avLst/>
+          </a:prstGeom>
+          <a:noFill/>
+          <a:ln w="28575">
+            <a:solidFill>
+              <a:schemeClr val="tx1"/>
+            </a:solidFill>
+          </a:ln>
+        </p:spPr>
+        <p:style>
+          <a:lnRef idx="2">
+            <a:schemeClr val="accent1">
+              <a:shade val="50000"/>
+            </a:schemeClr>
+          </a:lnRef>
+          <a:fillRef idx="1">
+            <a:schemeClr val="accent1"/>
+          </a:fillRef>
+          <a:effectRef idx="0">
+            <a:schemeClr val="accent1"/>
+          </a:effectRef>
+          <a:fontRef idx="minor">
+            <a:schemeClr val="lt1"/>
+          </a:fontRef>
+        </p:style>
+        <p:txBody>
+          <a:bodyPr rtlCol="0" anchor="ctr"/>
+          <a:lstStyle/>
+          <a:p>
+            <a:pPr algn="ctr"/>
+            <a:endParaRPr lang="zh-CN" altLang="en-US" dirty="0"/>
+          </a:p>
+        </p:txBody>
+      </p:sp>
+      <p:sp>
+        <p:nvSpPr>
+          <p:cNvPr id="267" name="矩形 266"/>
+          <p:cNvSpPr/>
+          <p:nvPr/>
+        </p:nvSpPr>
+        <p:spPr>
+          <a:xfrm>
+            <a:off x="6481442" y="1437952"/>
+            <a:ext cx="1230283" cy="432262"/>
+          </a:xfrm>
+          <a:prstGeom prst="rect">
+            <a:avLst/>
+          </a:prstGeom>
+          <a:noFill/>
+          <a:ln w="28575">
+            <a:solidFill>
+              <a:schemeClr val="tx1"/>
+            </a:solidFill>
+          </a:ln>
+        </p:spPr>
+        <p:style>
+          <a:lnRef idx="2">
+            <a:schemeClr val="accent1">
+              <a:shade val="50000"/>
+            </a:schemeClr>
+          </a:lnRef>
+          <a:fillRef idx="1">
+            <a:schemeClr val="accent1"/>
+          </a:fillRef>
+          <a:effectRef idx="0">
+            <a:schemeClr val="accent1"/>
+          </a:effectRef>
+          <a:fontRef idx="minor">
+            <a:schemeClr val="lt1"/>
+          </a:fontRef>
+        </p:style>
+        <p:txBody>
+          <a:bodyPr rtlCol="0" anchor="ctr"/>
+          <a:lstStyle/>
+          <a:p>
+            <a:pPr algn="ctr"/>
+            <a:endParaRPr lang="zh-CN" altLang="en-US" dirty="0"/>
+          </a:p>
+        </p:txBody>
+      </p:sp>
+      <p:sp>
+        <p:nvSpPr>
+          <p:cNvPr id="269" name="矩形 268"/>
+          <p:cNvSpPr/>
+          <p:nvPr/>
+        </p:nvSpPr>
+        <p:spPr>
+          <a:xfrm>
+            <a:off x="8422520" y="3070631"/>
+            <a:ext cx="1230283" cy="432262"/>
+          </a:xfrm>
+          <a:prstGeom prst="rect">
+            <a:avLst/>
+          </a:prstGeom>
+          <a:noFill/>
+          <a:ln w="28575">
+            <a:solidFill>
+              <a:schemeClr val="tx1"/>
+            </a:solidFill>
+          </a:ln>
+        </p:spPr>
+        <p:style>
+          <a:lnRef idx="2">
+            <a:schemeClr val="accent1">
+              <a:shade val="50000"/>
+            </a:schemeClr>
+          </a:lnRef>
+          <a:fillRef idx="1">
+            <a:schemeClr val="accent1"/>
+          </a:fillRef>
+          <a:effectRef idx="0">
+            <a:schemeClr val="accent1"/>
+          </a:effectRef>
+          <a:fontRef idx="minor">
+            <a:schemeClr val="lt1"/>
+          </a:fontRef>
+        </p:style>
+        <p:txBody>
+          <a:bodyPr rtlCol="0" anchor="ctr"/>
+          <a:lstStyle/>
+          <a:p>
+            <a:pPr algn="ctr"/>
+            <a:endParaRPr lang="zh-CN" altLang="en-US" dirty="0"/>
+          </a:p>
+        </p:txBody>
+      </p:sp>
+      <p:sp>
+        <p:nvSpPr>
+          <p:cNvPr id="272" name="矩形 271"/>
+          <p:cNvSpPr/>
+          <p:nvPr/>
+        </p:nvSpPr>
+        <p:spPr>
+          <a:xfrm>
+            <a:off x="6481442" y="214257"/>
+            <a:ext cx="1230283" cy="432262"/>
+          </a:xfrm>
+          <a:prstGeom prst="rect">
+            <a:avLst/>
+          </a:prstGeom>
+          <a:solidFill>
+            <a:srgbClr val="E2F0D9"/>
+          </a:solidFill>
+          <a:ln w="28575">
+            <a:solidFill>
+              <a:schemeClr val="tx1"/>
+            </a:solidFill>
+          </a:ln>
+        </p:spPr>
+        <p:style>
+          <a:lnRef idx="2">
+            <a:schemeClr val="accent1">
+              <a:shade val="50000"/>
+            </a:schemeClr>
+          </a:lnRef>
+          <a:fillRef idx="1">
+            <a:schemeClr val="accent1"/>
+          </a:fillRef>
+          <a:effectRef idx="0">
+            <a:schemeClr val="accent1"/>
+          </a:effectRef>
+          <a:fontRef idx="minor">
+            <a:schemeClr val="lt1"/>
+          </a:fontRef>
+        </p:style>
+        <p:txBody>
+          <a:bodyPr rtlCol="0" anchor="ctr"/>
+          <a:lstStyle/>
+          <a:p>
+            <a:pPr algn="ctr"/>
+            <a:endParaRPr lang="zh-CN" altLang="en-US" dirty="0"/>
+          </a:p>
+        </p:txBody>
+      </p:sp>
+      <p:sp>
+        <p:nvSpPr>
+          <p:cNvPr id="274" name="矩形 273"/>
+          <p:cNvSpPr/>
+          <p:nvPr/>
+        </p:nvSpPr>
+        <p:spPr>
+          <a:xfrm>
+            <a:off x="8422636" y="218962"/>
+            <a:ext cx="1230283" cy="432262"/>
+          </a:xfrm>
+          <a:prstGeom prst="rect">
+            <a:avLst/>
+          </a:prstGeom>
+          <a:solidFill>
+            <a:srgbClr val="E2F0D9"/>
+          </a:solidFill>
+          <a:ln w="28575">
+            <a:solidFill>
+              <a:schemeClr val="tx1"/>
+            </a:solidFill>
+          </a:ln>
+        </p:spPr>
+        <p:style>
+          <a:lnRef idx="2">
+            <a:schemeClr val="accent1">
+              <a:shade val="50000"/>
+            </a:schemeClr>
+          </a:lnRef>
+          <a:fillRef idx="1">
+            <a:schemeClr val="accent1"/>
+          </a:fillRef>
+          <a:effectRef idx="0">
+            <a:schemeClr val="accent1"/>
+          </a:effectRef>
+          <a:fontRef idx="minor">
+            <a:schemeClr val="lt1"/>
+          </a:fontRef>
+        </p:style>
+        <p:txBody>
+          <a:bodyPr rtlCol="0" anchor="ctr"/>
+          <a:lstStyle/>
+          <a:p>
+            <a:pPr algn="ctr"/>
+            <a:endParaRPr lang="zh-CN" altLang="en-US" dirty="0"/>
+          </a:p>
+        </p:txBody>
+      </p:sp>
+      <p:sp>
+        <p:nvSpPr>
+          <p:cNvPr id="276" name="矩形 275"/>
+          <p:cNvSpPr/>
+          <p:nvPr/>
+        </p:nvSpPr>
+        <p:spPr>
+          <a:xfrm>
+            <a:off x="8428061" y="826105"/>
+            <a:ext cx="1230283" cy="432262"/>
+          </a:xfrm>
+          <a:prstGeom prst="rect">
+            <a:avLst/>
+          </a:prstGeom>
+          <a:noFill/>
+          <a:ln w="28575">
+            <a:solidFill>
+              <a:schemeClr val="tx1"/>
+            </a:solidFill>
+          </a:ln>
+        </p:spPr>
+        <p:style>
+          <a:lnRef idx="2">
+            <a:schemeClr val="accent1">
+              <a:shade val="50000"/>
+            </a:schemeClr>
+          </a:lnRef>
+          <a:fillRef idx="1">
+            <a:schemeClr val="accent1"/>
+          </a:fillRef>
+          <a:effectRef idx="0">
+            <a:schemeClr val="accent1"/>
+          </a:effectRef>
+          <a:fontRef idx="minor">
+            <a:schemeClr val="lt1"/>
+          </a:fontRef>
+        </p:style>
+        <p:txBody>
+          <a:bodyPr rtlCol="0" anchor="ctr"/>
+          <a:lstStyle/>
+          <a:p>
+            <a:pPr algn="ctr"/>
+            <a:endParaRPr lang="zh-CN" altLang="en-US" dirty="0"/>
+          </a:p>
+        </p:txBody>
+      </p:sp>
+      <p:sp>
+        <p:nvSpPr>
+          <p:cNvPr id="278" name="矩形 277"/>
+          <p:cNvSpPr/>
+          <p:nvPr/>
+        </p:nvSpPr>
+        <p:spPr>
+          <a:xfrm>
+            <a:off x="8422636" y="1433248"/>
+            <a:ext cx="1230283" cy="432262"/>
+          </a:xfrm>
+          <a:prstGeom prst="rect">
+            <a:avLst/>
+          </a:prstGeom>
+          <a:noFill/>
+          <a:ln w="28575">
+            <a:solidFill>
+              <a:schemeClr val="tx1"/>
+            </a:solidFill>
+          </a:ln>
+        </p:spPr>
+        <p:style>
+          <a:lnRef idx="2">
+            <a:schemeClr val="accent1">
+              <a:shade val="50000"/>
+            </a:schemeClr>
+          </a:lnRef>
+          <a:fillRef idx="1">
+            <a:schemeClr val="accent1"/>
+          </a:fillRef>
+          <a:effectRef idx="0">
+            <a:schemeClr val="accent1"/>
+          </a:effectRef>
+          <a:fontRef idx="minor">
+            <a:schemeClr val="lt1"/>
+          </a:fontRef>
+        </p:style>
+        <p:txBody>
+          <a:bodyPr rtlCol="0" anchor="ctr"/>
+          <a:lstStyle/>
+          <a:p>
+            <a:pPr algn="ctr"/>
+            <a:endParaRPr lang="zh-CN" altLang="en-US" dirty="0"/>
+          </a:p>
+        </p:txBody>
+      </p:sp>
+      <p:sp>
+        <p:nvSpPr>
+          <p:cNvPr id="280" name="矩形 279"/>
+          <p:cNvSpPr/>
+          <p:nvPr/>
+        </p:nvSpPr>
+        <p:spPr>
+          <a:xfrm>
+            <a:off x="6474687" y="826105"/>
+            <a:ext cx="1230283" cy="432262"/>
+          </a:xfrm>
+          <a:prstGeom prst="rect">
+            <a:avLst/>
+          </a:prstGeom>
+          <a:noFill/>
+          <a:ln w="28575">
+            <a:solidFill>
+              <a:schemeClr val="tx1"/>
+            </a:solidFill>
+          </a:ln>
+        </p:spPr>
+        <p:style>
+          <a:lnRef idx="2">
+            <a:schemeClr val="accent1">
+              <a:shade val="50000"/>
+            </a:schemeClr>
+          </a:lnRef>
+          <a:fillRef idx="1">
+            <a:schemeClr val="accent1"/>
+          </a:fillRef>
+          <a:effectRef idx="0">
+            <a:schemeClr val="accent1"/>
+          </a:effectRef>
+          <a:fontRef idx="minor">
+            <a:schemeClr val="lt1"/>
+          </a:fontRef>
+        </p:style>
+        <p:txBody>
+          <a:bodyPr rtlCol="0" anchor="ctr"/>
+          <a:lstStyle/>
+          <a:p>
+            <a:pPr algn="ctr"/>
+            <a:endParaRPr lang="zh-CN" altLang="en-US" dirty="0"/>
+          </a:p>
+        </p:txBody>
+      </p:sp>
+      <p:sp>
+        <p:nvSpPr>
+          <p:cNvPr id="282" name="矩形 281"/>
+          <p:cNvSpPr/>
+          <p:nvPr/>
+        </p:nvSpPr>
+        <p:spPr>
+          <a:xfrm>
+            <a:off x="3698006" y="822699"/>
+            <a:ext cx="1230283" cy="432262"/>
+          </a:xfrm>
+          <a:prstGeom prst="rect">
+            <a:avLst/>
+          </a:prstGeom>
+          <a:noFill/>
+          <a:ln w="28575">
+            <a:solidFill>
+              <a:schemeClr val="tx1"/>
+            </a:solidFill>
+          </a:ln>
+        </p:spPr>
+        <p:style>
+          <a:lnRef idx="2">
+            <a:schemeClr val="accent1">
+              <a:shade val="50000"/>
+            </a:schemeClr>
+          </a:lnRef>
+          <a:fillRef idx="1">
+            <a:schemeClr val="accent1"/>
+          </a:fillRef>
+          <a:effectRef idx="0">
+            <a:schemeClr val="accent1"/>
+          </a:effectRef>
+          <a:fontRef idx="minor">
+            <a:schemeClr val="lt1"/>
+          </a:fontRef>
+        </p:style>
+        <p:txBody>
+          <a:bodyPr rtlCol="0" anchor="ctr"/>
+          <a:lstStyle/>
+          <a:p>
+            <a:pPr algn="ctr"/>
+            <a:endParaRPr lang="zh-CN" altLang="en-US" dirty="0"/>
+          </a:p>
+        </p:txBody>
+      </p:sp>
+      <p:sp>
+        <p:nvSpPr>
+          <p:cNvPr id="284" name="矩形 283"/>
+          <p:cNvSpPr/>
+          <p:nvPr/>
+        </p:nvSpPr>
+        <p:spPr>
+          <a:xfrm>
+            <a:off x="5089349" y="1433248"/>
+            <a:ext cx="1230283" cy="432262"/>
+          </a:xfrm>
+          <a:prstGeom prst="rect">
+            <a:avLst/>
+          </a:prstGeom>
+          <a:noFill/>
+          <a:ln w="28575">
+            <a:solidFill>
+              <a:schemeClr val="tx1"/>
+            </a:solidFill>
+          </a:ln>
+        </p:spPr>
+        <p:style>
+          <a:lnRef idx="2">
+            <a:schemeClr val="accent1">
+              <a:shade val="50000"/>
+            </a:schemeClr>
+          </a:lnRef>
+          <a:fillRef idx="1">
+            <a:schemeClr val="accent1"/>
+          </a:fillRef>
+          <a:effectRef idx="0">
+            <a:schemeClr val="accent1"/>
+          </a:effectRef>
+          <a:fontRef idx="minor">
+            <a:schemeClr val="lt1"/>
+          </a:fontRef>
+        </p:style>
+        <p:txBody>
+          <a:bodyPr rtlCol="0" anchor="ctr"/>
+          <a:lstStyle/>
+          <a:p>
+            <a:pPr algn="ctr"/>
+            <a:endParaRPr lang="zh-CN" altLang="en-US" dirty="0"/>
+          </a:p>
+        </p:txBody>
+      </p:sp>
+      <p:sp>
+        <p:nvSpPr>
+          <p:cNvPr id="286" name="矩形 285"/>
+          <p:cNvSpPr/>
+          <p:nvPr/>
+        </p:nvSpPr>
+        <p:spPr>
+          <a:xfrm>
+            <a:off x="3698006" y="1433248"/>
+            <a:ext cx="1230283" cy="432262"/>
+          </a:xfrm>
+          <a:prstGeom prst="rect">
+            <a:avLst/>
+          </a:prstGeom>
+          <a:noFill/>
+          <a:ln w="28575">
+            <a:solidFill>
+              <a:schemeClr val="tx1"/>
+            </a:solidFill>
+          </a:ln>
+        </p:spPr>
+        <p:style>
+          <a:lnRef idx="2">
+            <a:schemeClr val="accent1">
+              <a:shade val="50000"/>
+            </a:schemeClr>
+          </a:lnRef>
+          <a:fillRef idx="1">
+            <a:schemeClr val="accent1"/>
+          </a:fillRef>
+          <a:effectRef idx="0">
+            <a:schemeClr val="accent1"/>
+          </a:effectRef>
+          <a:fontRef idx="minor">
+            <a:schemeClr val="lt1"/>
+          </a:fontRef>
+        </p:style>
+        <p:txBody>
+          <a:bodyPr rtlCol="0" anchor="ctr"/>
+          <a:lstStyle/>
+          <a:p>
+            <a:pPr algn="ctr"/>
+            <a:endParaRPr lang="zh-CN" altLang="en-US" dirty="0"/>
+          </a:p>
+        </p:txBody>
+      </p:sp>
+      <p:sp>
+        <p:nvSpPr>
+          <p:cNvPr id="288" name="矩形 287"/>
+          <p:cNvSpPr/>
+          <p:nvPr/>
+        </p:nvSpPr>
+        <p:spPr>
+          <a:xfrm>
+            <a:off x="6487430" y="3074513"/>
+            <a:ext cx="1230283" cy="432262"/>
+          </a:xfrm>
+          <a:prstGeom prst="rect">
+            <a:avLst/>
+          </a:prstGeom>
+          <a:noFill/>
+          <a:ln w="28575">
+            <a:solidFill>
+              <a:schemeClr val="tx1"/>
+            </a:solidFill>
+          </a:ln>
+        </p:spPr>
+        <p:style>
+          <a:lnRef idx="2">
+            <a:schemeClr val="accent1">
+              <a:shade val="50000"/>
+            </a:schemeClr>
+          </a:lnRef>
+          <a:fillRef idx="1">
+            <a:schemeClr val="accent1"/>
+          </a:fillRef>
+          <a:effectRef idx="0">
+            <a:schemeClr val="accent1"/>
+          </a:effectRef>
+          <a:fontRef idx="minor">
+            <a:schemeClr val="lt1"/>
+          </a:fontRef>
+        </p:style>
+        <p:txBody>
+          <a:bodyPr rtlCol="0" anchor="ctr"/>
+          <a:lstStyle/>
+          <a:p>
+            <a:pPr algn="ctr"/>
+            <a:endParaRPr lang="zh-CN" altLang="en-US" dirty="0"/>
+          </a:p>
+        </p:txBody>
+      </p:sp>
+      <p:sp>
+        <p:nvSpPr>
+          <p:cNvPr id="290" name="矩形 289"/>
+          <p:cNvSpPr/>
+          <p:nvPr/>
+        </p:nvSpPr>
+        <p:spPr>
+          <a:xfrm>
+            <a:off x="5080706" y="3070631"/>
+            <a:ext cx="1230283" cy="432262"/>
+          </a:xfrm>
+          <a:prstGeom prst="rect">
+            <a:avLst/>
+          </a:prstGeom>
+          <a:noFill/>
+          <a:ln w="28575">
+            <a:solidFill>
+              <a:schemeClr val="tx1"/>
+            </a:solidFill>
+          </a:ln>
+        </p:spPr>
+        <p:style>
+          <a:lnRef idx="2">
+            <a:schemeClr val="accent1">
+              <a:shade val="50000"/>
+            </a:schemeClr>
+          </a:lnRef>
+          <a:fillRef idx="1">
+            <a:schemeClr val="accent1"/>
+          </a:fillRef>
+          <a:effectRef idx="0">
+            <a:schemeClr val="accent1"/>
+          </a:effectRef>
+          <a:fontRef idx="minor">
+            <a:schemeClr val="lt1"/>
+          </a:fontRef>
+        </p:style>
+        <p:txBody>
+          <a:bodyPr rtlCol="0" anchor="ctr"/>
+          <a:lstStyle/>
+          <a:p>
+            <a:pPr algn="ctr"/>
+            <a:endParaRPr lang="zh-CN" altLang="en-US" dirty="0"/>
+          </a:p>
+        </p:txBody>
+      </p:sp>
+      <p:sp>
+        <p:nvSpPr>
+          <p:cNvPr id="292" name="矩形 291"/>
+          <p:cNvSpPr/>
+          <p:nvPr/>
+        </p:nvSpPr>
+        <p:spPr>
+          <a:xfrm>
+            <a:off x="3695301" y="3074513"/>
+            <a:ext cx="1230283" cy="432262"/>
+          </a:xfrm>
+          <a:prstGeom prst="rect">
+            <a:avLst/>
+          </a:prstGeom>
+          <a:noFill/>
+          <a:ln w="28575">
+            <a:solidFill>
+              <a:schemeClr val="tx1"/>
+            </a:solidFill>
+          </a:ln>
+        </p:spPr>
+        <p:style>
+          <a:lnRef idx="2">
+            <a:schemeClr val="accent1">
+              <a:shade val="50000"/>
+            </a:schemeClr>
+          </a:lnRef>
+          <a:fillRef idx="1">
+            <a:schemeClr val="accent1"/>
+          </a:fillRef>
+          <a:effectRef idx="0">
+            <a:schemeClr val="accent1"/>
+          </a:effectRef>
+          <a:fontRef idx="minor">
+            <a:schemeClr val="lt1"/>
+          </a:fontRef>
+        </p:style>
+        <p:txBody>
+          <a:bodyPr rtlCol="0" anchor="ctr"/>
+          <a:lstStyle/>
+          <a:p>
+            <a:pPr algn="ctr"/>
+            <a:endParaRPr lang="zh-CN" altLang="en-US" dirty="0"/>
+          </a:p>
+        </p:txBody>
+      </p:sp>
+      <p:sp>
+        <p:nvSpPr>
+          <p:cNvPr id="294" name="圆角矩形 293"/>
+          <p:cNvSpPr/>
+          <p:nvPr/>
+        </p:nvSpPr>
+        <p:spPr>
+          <a:xfrm>
+            <a:off x="2401336" y="2495869"/>
+            <a:ext cx="1138843" cy="432262"/>
+          </a:xfrm>
+          <a:prstGeom prst="roundRect">
+            <a:avLst/>
+          </a:prstGeom>
+          <a:solidFill>
+            <a:srgbClr val="BDD7EE"/>
+          </a:solidFill>
+          <a:ln w="28575">
+            <a:solidFill>
+              <a:schemeClr val="tx1"/>
+            </a:solidFill>
+          </a:ln>
+        </p:spPr>
+        <p:style>
+          <a:lnRef idx="2">
+            <a:schemeClr val="accent1">
+              <a:shade val="50000"/>
+            </a:schemeClr>
+          </a:lnRef>
+          <a:fillRef idx="1">
+            <a:schemeClr val="accent1"/>
+          </a:fillRef>
+          <a:effectRef idx="0">
+            <a:schemeClr val="accent1"/>
+          </a:effectRef>
+          <a:fontRef idx="minor">
+            <a:schemeClr val="lt1"/>
+          </a:fontRef>
+        </p:style>
+        <p:txBody>
+          <a:bodyPr rtlCol="0" anchor="ctr"/>
+          <a:lstStyle/>
+          <a:p>
+            <a:pPr algn="ctr"/>
+            <a:r>
+              <a:rPr lang="en-US" altLang="zh-CN" dirty="0">
+                <a:solidFill>
+                  <a:schemeClr val="tx1"/>
+                </a:solidFill>
+                <a:latin typeface="Times New Roman" panose="02020603050405020304" pitchFamily="18" charset="0"/>
+                <a:cs typeface="Times New Roman" panose="02020603050405020304" pitchFamily="18" charset="0"/>
+              </a:rPr>
+              <a:t>GPU </a:t>
+            </a:r>
+            <a:r>
+              <a:rPr lang="en-US" altLang="zh-CN" dirty="0" smtClean="0">
+                <a:solidFill>
+                  <a:schemeClr val="tx1"/>
+                </a:solidFill>
+                <a:latin typeface="Times New Roman" panose="02020603050405020304" pitchFamily="18" charset="0"/>
+                <a:cs typeface="Times New Roman" panose="02020603050405020304" pitchFamily="18" charset="0"/>
+              </a:rPr>
+              <a:t>n-2</a:t>
+            </a:r>
+            <a:endParaRPr lang="zh-CN" altLang="en-US" dirty="0">
+              <a:solidFill>
+                <a:schemeClr val="tx1"/>
+              </a:solidFill>
+              <a:latin typeface="Times New Roman" panose="02020603050405020304" pitchFamily="18" charset="0"/>
+              <a:cs typeface="Times New Roman" panose="02020603050405020304" pitchFamily="18" charset="0"/>
+            </a:endParaRPr>
+          </a:p>
+        </p:txBody>
+      </p:sp>
+      <p:sp>
+        <p:nvSpPr>
+          <p:cNvPr id="295" name="矩形 294"/>
+          <p:cNvSpPr/>
+          <p:nvPr/>
+        </p:nvSpPr>
+        <p:spPr>
+          <a:xfrm>
+            <a:off x="8422520" y="2491986"/>
+            <a:ext cx="1230283" cy="432262"/>
+          </a:xfrm>
+          <a:prstGeom prst="rect">
+            <a:avLst/>
+          </a:prstGeom>
+          <a:noFill/>
+          <a:ln w="28575">
+            <a:solidFill>
+              <a:schemeClr val="tx1"/>
+            </a:solidFill>
+          </a:ln>
+        </p:spPr>
+        <p:style>
+          <a:lnRef idx="2">
+            <a:schemeClr val="accent1">
+              <a:shade val="50000"/>
+            </a:schemeClr>
+          </a:lnRef>
+          <a:fillRef idx="1">
+            <a:schemeClr val="accent1"/>
+          </a:fillRef>
+          <a:effectRef idx="0">
+            <a:schemeClr val="accent1"/>
+          </a:effectRef>
+          <a:fontRef idx="minor">
+            <a:schemeClr val="lt1"/>
+          </a:fontRef>
+        </p:style>
+        <p:txBody>
+          <a:bodyPr rtlCol="0" anchor="ctr"/>
+          <a:lstStyle/>
+          <a:p>
+            <a:pPr algn="ctr"/>
+            <a:endParaRPr lang="zh-CN" altLang="en-US" dirty="0"/>
+          </a:p>
+        </p:txBody>
+      </p:sp>
+      <p:sp>
+        <p:nvSpPr>
+          <p:cNvPr id="297" name="矩形 296"/>
+          <p:cNvSpPr/>
+          <p:nvPr/>
+        </p:nvSpPr>
+        <p:spPr>
+          <a:xfrm>
+            <a:off x="6487430" y="2495868"/>
+            <a:ext cx="1230283" cy="432262"/>
+          </a:xfrm>
+          <a:prstGeom prst="rect">
+            <a:avLst/>
+          </a:prstGeom>
+          <a:noFill/>
+          <a:ln w="28575">
+            <a:solidFill>
+              <a:schemeClr val="tx1"/>
+            </a:solidFill>
+          </a:ln>
+        </p:spPr>
+        <p:style>
+          <a:lnRef idx="2">
+            <a:schemeClr val="accent1">
+              <a:shade val="50000"/>
+            </a:schemeClr>
+          </a:lnRef>
+          <a:fillRef idx="1">
+            <a:schemeClr val="accent1"/>
+          </a:fillRef>
+          <a:effectRef idx="0">
+            <a:schemeClr val="accent1"/>
+          </a:effectRef>
+          <a:fontRef idx="minor">
+            <a:schemeClr val="lt1"/>
+          </a:fontRef>
+        </p:style>
+        <p:txBody>
+          <a:bodyPr rtlCol="0" anchor="ctr"/>
+          <a:lstStyle/>
+          <a:p>
+            <a:pPr algn="ctr"/>
+            <a:endParaRPr lang="zh-CN" altLang="en-US" dirty="0"/>
+          </a:p>
+        </p:txBody>
+      </p:sp>
+      <p:sp>
+        <p:nvSpPr>
+          <p:cNvPr id="299" name="矩形 298"/>
+          <p:cNvSpPr/>
+          <p:nvPr/>
+        </p:nvSpPr>
+        <p:spPr>
+          <a:xfrm>
+            <a:off x="5080706" y="2491986"/>
+            <a:ext cx="1230283" cy="432262"/>
+          </a:xfrm>
+          <a:prstGeom prst="rect">
+            <a:avLst/>
+          </a:prstGeom>
+          <a:noFill/>
+          <a:ln w="28575">
+            <a:solidFill>
+              <a:schemeClr val="tx1"/>
+            </a:solidFill>
+          </a:ln>
+        </p:spPr>
+        <p:style>
+          <a:lnRef idx="2">
+            <a:schemeClr val="accent1">
+              <a:shade val="50000"/>
+            </a:schemeClr>
+          </a:lnRef>
+          <a:fillRef idx="1">
+            <a:schemeClr val="accent1"/>
+          </a:fillRef>
+          <a:effectRef idx="0">
+            <a:schemeClr val="accent1"/>
+          </a:effectRef>
+          <a:fontRef idx="minor">
+            <a:schemeClr val="lt1"/>
+          </a:fontRef>
+        </p:style>
+        <p:txBody>
+          <a:bodyPr rtlCol="0" anchor="ctr"/>
+          <a:lstStyle/>
+          <a:p>
+            <a:pPr algn="ctr"/>
+            <a:endParaRPr lang="zh-CN" altLang="en-US" dirty="0"/>
+          </a:p>
+        </p:txBody>
+      </p:sp>
+      <p:sp>
+        <p:nvSpPr>
+          <p:cNvPr id="301" name="矩形 300"/>
+          <p:cNvSpPr/>
+          <p:nvPr/>
+        </p:nvSpPr>
+        <p:spPr>
+          <a:xfrm>
+            <a:off x="3695301" y="2495868"/>
+            <a:ext cx="1230283" cy="432262"/>
+          </a:xfrm>
+          <a:prstGeom prst="rect">
+            <a:avLst/>
+          </a:prstGeom>
+          <a:noFill/>
+          <a:ln w="28575">
+            <a:solidFill>
+              <a:schemeClr val="tx1"/>
+            </a:solidFill>
+          </a:ln>
+        </p:spPr>
+        <p:style>
+          <a:lnRef idx="2">
+            <a:schemeClr val="accent1">
+              <a:shade val="50000"/>
+            </a:schemeClr>
+          </a:lnRef>
+          <a:fillRef idx="1">
+            <a:schemeClr val="accent1"/>
+          </a:fillRef>
+          <a:effectRef idx="0">
+            <a:schemeClr val="accent1"/>
+          </a:effectRef>
+          <a:fontRef idx="minor">
+            <a:schemeClr val="lt1"/>
+          </a:fontRef>
+        </p:style>
+        <p:txBody>
+          <a:bodyPr rtlCol="0" anchor="ctr"/>
+          <a:lstStyle/>
+          <a:p>
+            <a:pPr algn="ctr"/>
+            <a:endParaRPr lang="zh-CN" altLang="en-US" dirty="0"/>
+          </a:p>
+        </p:txBody>
+      </p:sp>
+      <p:graphicFrame>
+        <p:nvGraphicFramePr>
+          <p:cNvPr id="241" name="对象 240"/>
+          <p:cNvGraphicFramePr>
+            <a:graphicFrameLocks noChangeAspect="1"/>
+          </p:cNvGraphicFramePr>
+          <p:nvPr>
+            <p:extLst>
+              <p:ext uri="{D42A27DB-BD31-4B8C-83A1-F6EECF244321}">
+                <p14:modId xmlns:p14="http://schemas.microsoft.com/office/powerpoint/2010/main" val="3227052299"/>
+              </p:ext>
+            </p:extLst>
+          </p:nvPr>
+        </p:nvGraphicFramePr>
+        <p:xfrm>
+          <a:off x="4174111" y="288038"/>
+          <a:ext cx="288925" cy="303212"/>
+        </p:xfrm>
+        <a:graphic>
+          <a:graphicData uri="http://schemas.openxmlformats.org/presentationml/2006/ole">
+            <mc:AlternateContent xmlns:mc="http://schemas.openxmlformats.org/markup-compatibility/2006">
+              <mc:Choice xmlns:v="urn:schemas-microsoft-com:vml" Requires="v">
+                <p:oleObj spid="_x0000_s7299" name="AxMath" r:id="rId13" imgW="218880" imgH="230400" progId="Equation.AxMath">
+                  <p:embed/>
+                </p:oleObj>
+              </mc:Choice>
+              <mc:Fallback>
+                <p:oleObj name="AxMath" r:id="rId13" imgW="218880" imgH="230400" progId="Equation.AxMath">
+                  <p:embed/>
+                  <p:pic>
+                    <p:nvPicPr>
+                      <p:cNvPr id="264" name="对象 263"/>
+                      <p:cNvPicPr/>
+                      <p:nvPr/>
+                    </p:nvPicPr>
+                    <p:blipFill>
+                      <a:blip r:embed="rId14"/>
+                      <a:stretch>
+                        <a:fillRect/>
+                      </a:stretch>
+                    </p:blipFill>
+                    <p:spPr>
+                      <a:xfrm>
+                        <a:off x="4174111" y="288038"/>
+                        <a:ext cx="288925" cy="303212"/>
+                      </a:xfrm>
+                      <a:prstGeom prst="rect">
+                        <a:avLst/>
+                      </a:prstGeom>
+                    </p:spPr>
+                  </p:pic>
+                </p:oleObj>
+              </mc:Fallback>
+            </mc:AlternateContent>
+          </a:graphicData>
+        </a:graphic>
+      </p:graphicFrame>
+      <p:graphicFrame>
+        <p:nvGraphicFramePr>
+          <p:cNvPr id="242" name="对象 241"/>
+          <p:cNvGraphicFramePr>
+            <a:graphicFrameLocks noChangeAspect="1"/>
+          </p:cNvGraphicFramePr>
+          <p:nvPr>
+            <p:extLst>
+              <p:ext uri="{D42A27DB-BD31-4B8C-83A1-F6EECF244321}">
+                <p14:modId xmlns:p14="http://schemas.microsoft.com/office/powerpoint/2010/main" val="2341110228"/>
+              </p:ext>
+            </p:extLst>
+          </p:nvPr>
+        </p:nvGraphicFramePr>
+        <p:xfrm>
+          <a:off x="5543358" y="281154"/>
+          <a:ext cx="322263" cy="330200"/>
+        </p:xfrm>
+        <a:graphic>
+          <a:graphicData uri="http://schemas.openxmlformats.org/presentationml/2006/ole">
+            <mc:AlternateContent xmlns:mc="http://schemas.openxmlformats.org/markup-compatibility/2006">
+              <mc:Choice xmlns:v="urn:schemas-microsoft-com:vml" Requires="v">
+                <p:oleObj spid="_x0000_s7300" name="AxMath" r:id="rId15" imgW="226080" imgH="230400" progId="Equation.AxMath">
+                  <p:embed/>
+                </p:oleObj>
+              </mc:Choice>
+              <mc:Fallback>
+                <p:oleObj name="AxMath" r:id="rId15" imgW="226080" imgH="230400" progId="Equation.AxMath">
+                  <p:embed/>
+                  <p:pic>
+                    <p:nvPicPr>
+                      <p:cNvPr id="271" name="对象 270"/>
+                      <p:cNvPicPr/>
+                      <p:nvPr/>
+                    </p:nvPicPr>
+                    <p:blipFill>
+                      <a:blip r:embed="rId16"/>
+                      <a:stretch>
+                        <a:fillRect/>
+                      </a:stretch>
+                    </p:blipFill>
+                    <p:spPr>
+                      <a:xfrm>
+                        <a:off x="5543358" y="281154"/>
+                        <a:ext cx="322263" cy="330200"/>
+                      </a:xfrm>
+                      <a:prstGeom prst="rect">
+                        <a:avLst/>
+                      </a:prstGeom>
+                    </p:spPr>
+                  </p:pic>
+                </p:oleObj>
+              </mc:Fallback>
+            </mc:AlternateContent>
+          </a:graphicData>
+        </a:graphic>
+      </p:graphicFrame>
+      <p:graphicFrame>
+        <p:nvGraphicFramePr>
+          <p:cNvPr id="243" name="对象 242"/>
+          <p:cNvGraphicFramePr>
+            <a:graphicFrameLocks noChangeAspect="1"/>
+          </p:cNvGraphicFramePr>
+          <p:nvPr>
+            <p:extLst>
+              <p:ext uri="{D42A27DB-BD31-4B8C-83A1-F6EECF244321}">
+                <p14:modId xmlns:p14="http://schemas.microsoft.com/office/powerpoint/2010/main" val="566495133"/>
+              </p:ext>
+            </p:extLst>
+          </p:nvPr>
+        </p:nvGraphicFramePr>
+        <p:xfrm>
+          <a:off x="6933864" y="277828"/>
+          <a:ext cx="325438" cy="330200"/>
+        </p:xfrm>
+        <a:graphic>
+          <a:graphicData uri="http://schemas.openxmlformats.org/presentationml/2006/ole">
+            <mc:AlternateContent xmlns:mc="http://schemas.openxmlformats.org/markup-compatibility/2006">
+              <mc:Choice xmlns:v="urn:schemas-microsoft-com:vml" Requires="v">
+                <p:oleObj spid="_x0000_s7301" name="AxMath" r:id="rId17" imgW="227520" imgH="230400" progId="Equation.AxMath">
+                  <p:embed/>
+                </p:oleObj>
+              </mc:Choice>
+              <mc:Fallback>
+                <p:oleObj name="AxMath" r:id="rId17" imgW="227520" imgH="230400" progId="Equation.AxMath">
+                  <p:embed/>
+                  <p:pic>
+                    <p:nvPicPr>
+                      <p:cNvPr id="273" name="对象 272"/>
+                      <p:cNvPicPr/>
+                      <p:nvPr/>
+                    </p:nvPicPr>
+                    <p:blipFill>
+                      <a:blip r:embed="rId18"/>
+                      <a:stretch>
+                        <a:fillRect/>
+                      </a:stretch>
+                    </p:blipFill>
+                    <p:spPr>
+                      <a:xfrm>
+                        <a:off x="6933864" y="277828"/>
+                        <a:ext cx="325438" cy="330200"/>
+                      </a:xfrm>
+                      <a:prstGeom prst="rect">
+                        <a:avLst/>
+                      </a:prstGeom>
+                    </p:spPr>
+                  </p:pic>
+                </p:oleObj>
+              </mc:Fallback>
+            </mc:AlternateContent>
+          </a:graphicData>
+        </a:graphic>
+      </p:graphicFrame>
+      <p:graphicFrame>
+        <p:nvGraphicFramePr>
+          <p:cNvPr id="303" name="对象 302"/>
+          <p:cNvGraphicFramePr>
+            <a:graphicFrameLocks noChangeAspect="1"/>
+          </p:cNvGraphicFramePr>
+          <p:nvPr>
+            <p:extLst>
+              <p:ext uri="{D42A27DB-BD31-4B8C-83A1-F6EECF244321}">
+                <p14:modId xmlns:p14="http://schemas.microsoft.com/office/powerpoint/2010/main" val="3619271159"/>
+              </p:ext>
+            </p:extLst>
+          </p:nvPr>
+        </p:nvGraphicFramePr>
+        <p:xfrm>
+          <a:off x="8932863" y="279400"/>
+          <a:ext cx="344487" cy="327025"/>
+        </p:xfrm>
+        <a:graphic>
+          <a:graphicData uri="http://schemas.openxmlformats.org/presentationml/2006/ole">
+            <mc:AlternateContent xmlns:mc="http://schemas.openxmlformats.org/markup-compatibility/2006">
+              <mc:Choice xmlns:v="urn:schemas-microsoft-com:vml" Requires="v">
+                <p:oleObj spid="_x0000_s7302" name="AxMath" r:id="rId19" imgW="239760" imgH="228960" progId="Equation.AxMath">
+                  <p:embed/>
+                </p:oleObj>
+              </mc:Choice>
+              <mc:Fallback>
+                <p:oleObj name="AxMath" r:id="rId19" imgW="239760" imgH="228960" progId="Equation.AxMath">
+                  <p:embed/>
+                  <p:pic>
+                    <p:nvPicPr>
+                      <p:cNvPr id="243" name="对象 242"/>
+                      <p:cNvPicPr/>
+                      <p:nvPr/>
+                    </p:nvPicPr>
+                    <p:blipFill>
+                      <a:blip r:embed="rId20"/>
+                      <a:stretch>
+                        <a:fillRect/>
+                      </a:stretch>
+                    </p:blipFill>
+                    <p:spPr>
+                      <a:xfrm>
+                        <a:off x="8932863" y="279400"/>
+                        <a:ext cx="344487" cy="327025"/>
+                      </a:xfrm>
+                      <a:prstGeom prst="rect">
+                        <a:avLst/>
+                      </a:prstGeom>
+                    </p:spPr>
+                  </p:pic>
+                </p:oleObj>
+              </mc:Fallback>
+            </mc:AlternateContent>
+          </a:graphicData>
+        </a:graphic>
+      </p:graphicFrame>
+      <p:sp>
+        <p:nvSpPr>
+          <p:cNvPr id="305" name="圆角矩形 304"/>
+          <p:cNvSpPr/>
+          <p:nvPr/>
+        </p:nvSpPr>
+        <p:spPr>
+          <a:xfrm>
+            <a:off x="2408250" y="4550445"/>
+            <a:ext cx="1126057" cy="432262"/>
+          </a:xfrm>
+          <a:prstGeom prst="roundRect">
+            <a:avLst/>
+          </a:prstGeom>
+          <a:solidFill>
+            <a:srgbClr val="BDD7EE"/>
+          </a:solidFill>
+          <a:ln w="28575">
+            <a:solidFill>
+              <a:schemeClr val="tx1"/>
+            </a:solidFill>
+          </a:ln>
+        </p:spPr>
+        <p:style>
+          <a:lnRef idx="2">
+            <a:schemeClr val="accent1">
+              <a:shade val="50000"/>
+            </a:schemeClr>
+          </a:lnRef>
+          <a:fillRef idx="1">
+            <a:schemeClr val="accent1"/>
+          </a:fillRef>
+          <a:effectRef idx="0">
+            <a:schemeClr val="accent1"/>
+          </a:effectRef>
+          <a:fontRef idx="minor">
+            <a:schemeClr val="lt1"/>
+          </a:fontRef>
+        </p:style>
+        <p:txBody>
+          <a:bodyPr rtlCol="0" anchor="ctr"/>
+          <a:lstStyle/>
+          <a:p>
+            <a:pPr algn="ctr"/>
+            <a:r>
+              <a:rPr lang="en-US" altLang="zh-CN" dirty="0" smtClean="0">
+                <a:solidFill>
+                  <a:schemeClr val="tx1"/>
+                </a:solidFill>
+                <a:latin typeface="Times New Roman" panose="02020603050405020304" pitchFamily="18" charset="0"/>
+                <a:cs typeface="Times New Roman" panose="02020603050405020304" pitchFamily="18" charset="0"/>
+              </a:rPr>
+              <a:t>GPU 0</a:t>
+            </a:r>
+            <a:endParaRPr lang="zh-CN" altLang="en-US" dirty="0">
+              <a:solidFill>
+                <a:schemeClr val="tx1"/>
+              </a:solidFill>
+              <a:latin typeface="Times New Roman" panose="02020603050405020304" pitchFamily="18" charset="0"/>
+              <a:cs typeface="Times New Roman" panose="02020603050405020304" pitchFamily="18" charset="0"/>
+            </a:endParaRPr>
+          </a:p>
+        </p:txBody>
+      </p:sp>
+      <p:sp>
+        <p:nvSpPr>
+          <p:cNvPr id="306" name="矩形 305"/>
+          <p:cNvSpPr/>
+          <p:nvPr/>
+        </p:nvSpPr>
+        <p:spPr>
+          <a:xfrm>
+            <a:off x="3692249" y="4550445"/>
+            <a:ext cx="1230283" cy="432262"/>
+          </a:xfrm>
+          <a:prstGeom prst="rect">
+            <a:avLst/>
+          </a:prstGeom>
+          <a:solidFill>
+            <a:srgbClr val="E2F0D9"/>
+          </a:solidFill>
+          <a:ln w="28575">
+            <a:solidFill>
+              <a:schemeClr val="tx1"/>
+            </a:solidFill>
+          </a:ln>
+        </p:spPr>
+        <p:style>
+          <a:lnRef idx="2">
+            <a:schemeClr val="accent1">
+              <a:shade val="50000"/>
+            </a:schemeClr>
+          </a:lnRef>
+          <a:fillRef idx="1">
+            <a:schemeClr val="accent1"/>
+          </a:fillRef>
+          <a:effectRef idx="0">
+            <a:schemeClr val="accent1"/>
+          </a:effectRef>
+          <a:fontRef idx="minor">
+            <a:schemeClr val="lt1"/>
+          </a:fontRef>
+        </p:style>
+        <p:txBody>
+          <a:bodyPr rtlCol="0" anchor="ctr"/>
+          <a:lstStyle/>
+          <a:p>
+            <a:pPr algn="ctr"/>
+            <a:endParaRPr lang="zh-CN" altLang="en-US" dirty="0"/>
+          </a:p>
+        </p:txBody>
+      </p:sp>
+      <p:sp>
+        <p:nvSpPr>
+          <p:cNvPr id="307" name="矩形 306"/>
+          <p:cNvSpPr/>
+          <p:nvPr/>
+        </p:nvSpPr>
+        <p:spPr>
+          <a:xfrm>
+            <a:off x="5080474" y="4550445"/>
+            <a:ext cx="1230283" cy="432262"/>
+          </a:xfrm>
+          <a:prstGeom prst="rect">
+            <a:avLst/>
+          </a:prstGeom>
+          <a:solidFill>
+            <a:srgbClr val="E2F0D9"/>
+          </a:solidFill>
+          <a:ln w="28575">
+            <a:solidFill>
+              <a:schemeClr val="tx1"/>
+            </a:solidFill>
+          </a:ln>
+        </p:spPr>
+        <p:style>
+          <a:lnRef idx="2">
+            <a:schemeClr val="accent1">
+              <a:shade val="50000"/>
+            </a:schemeClr>
+          </a:lnRef>
+          <a:fillRef idx="1">
+            <a:schemeClr val="accent1"/>
+          </a:fillRef>
+          <a:effectRef idx="0">
+            <a:schemeClr val="accent1"/>
+          </a:effectRef>
+          <a:fontRef idx="minor">
+            <a:schemeClr val="lt1"/>
+          </a:fontRef>
+        </p:style>
+        <p:txBody>
+          <a:bodyPr rtlCol="0" anchor="ctr"/>
+          <a:lstStyle/>
+          <a:p>
+            <a:pPr algn="ctr"/>
+            <a:endParaRPr lang="zh-CN" altLang="en-US" dirty="0"/>
+          </a:p>
+        </p:txBody>
+      </p:sp>
+      <p:graphicFrame>
+        <p:nvGraphicFramePr>
+          <p:cNvPr id="308" name="对象 307"/>
+          <p:cNvGraphicFramePr>
+            <a:graphicFrameLocks noChangeAspect="1"/>
+          </p:cNvGraphicFramePr>
+          <p:nvPr>
+            <p:extLst>
+              <p:ext uri="{D42A27DB-BD31-4B8C-83A1-F6EECF244321}">
+                <p14:modId xmlns:p14="http://schemas.microsoft.com/office/powerpoint/2010/main" val="1787418667"/>
+              </p:ext>
+            </p:extLst>
+          </p:nvPr>
+        </p:nvGraphicFramePr>
+        <p:xfrm>
+          <a:off x="7867315" y="4402323"/>
+          <a:ext cx="463435" cy="728505"/>
+        </p:xfrm>
+        <a:graphic>
+          <a:graphicData uri="http://schemas.openxmlformats.org/presentationml/2006/ole">
+            <mc:AlternateContent xmlns:mc="http://schemas.openxmlformats.org/markup-compatibility/2006">
+              <mc:Choice xmlns:v="urn:schemas-microsoft-com:vml" Requires="v">
+                <p:oleObj spid="_x0000_s7303" name="AxMath" r:id="rId3" imgW="151920" imgH="226800" progId="Equation.AxMath">
+                  <p:embed/>
+                </p:oleObj>
+              </mc:Choice>
+              <mc:Fallback>
+                <p:oleObj name="AxMath" r:id="rId3" imgW="151920" imgH="226800" progId="Equation.AxMath">
+                  <p:embed/>
+                  <p:pic>
+                    <p:nvPicPr>
+                      <p:cNvPr id="247" name="对象 246"/>
+                      <p:cNvPicPr/>
+                      <p:nvPr/>
+                    </p:nvPicPr>
+                    <p:blipFill>
+                      <a:blip r:embed="rId4"/>
+                      <a:stretch>
+                        <a:fillRect/>
+                      </a:stretch>
+                    </p:blipFill>
+                    <p:spPr>
+                      <a:xfrm>
+                        <a:off x="7867315" y="4402323"/>
+                        <a:ext cx="463435" cy="728505"/>
+                      </a:xfrm>
+                      <a:prstGeom prst="rect">
+                        <a:avLst/>
+                      </a:prstGeom>
+                    </p:spPr>
+                  </p:pic>
+                </p:oleObj>
+              </mc:Fallback>
+            </mc:AlternateContent>
+          </a:graphicData>
+        </a:graphic>
+      </p:graphicFrame>
+      <p:sp>
+        <p:nvSpPr>
+          <p:cNvPr id="309" name="圆角矩形 308"/>
+          <p:cNvSpPr/>
+          <p:nvPr/>
+        </p:nvSpPr>
+        <p:spPr>
+          <a:xfrm>
+            <a:off x="2395348" y="5162293"/>
+            <a:ext cx="1138959" cy="432262"/>
+          </a:xfrm>
+          <a:prstGeom prst="roundRect">
+            <a:avLst/>
+          </a:prstGeom>
+          <a:solidFill>
+            <a:srgbClr val="BDD7EE"/>
+          </a:solidFill>
+          <a:ln w="28575">
+            <a:solidFill>
+              <a:schemeClr val="tx1"/>
+            </a:solidFill>
+          </a:ln>
+        </p:spPr>
+        <p:style>
+          <a:lnRef idx="2">
+            <a:schemeClr val="accent1">
+              <a:shade val="50000"/>
+            </a:schemeClr>
+          </a:lnRef>
+          <a:fillRef idx="1">
+            <a:schemeClr val="accent1"/>
+          </a:fillRef>
+          <a:effectRef idx="0">
+            <a:schemeClr val="accent1"/>
+          </a:effectRef>
+          <a:fontRef idx="minor">
+            <a:schemeClr val="lt1"/>
+          </a:fontRef>
+        </p:style>
+        <p:txBody>
+          <a:bodyPr rtlCol="0" anchor="ctr"/>
+          <a:lstStyle/>
+          <a:p>
+            <a:pPr algn="ctr"/>
+            <a:r>
+              <a:rPr lang="en-US" altLang="zh-CN" dirty="0">
+                <a:solidFill>
+                  <a:schemeClr val="tx1"/>
+                </a:solidFill>
+                <a:latin typeface="Times New Roman" panose="02020603050405020304" pitchFamily="18" charset="0"/>
+                <a:cs typeface="Times New Roman" panose="02020603050405020304" pitchFamily="18" charset="0"/>
+              </a:rPr>
+              <a:t>GPU </a:t>
+            </a:r>
+            <a:r>
+              <a:rPr lang="en-US" altLang="zh-CN" dirty="0" smtClean="0">
+                <a:solidFill>
+                  <a:schemeClr val="tx1"/>
+                </a:solidFill>
+                <a:latin typeface="Times New Roman" panose="02020603050405020304" pitchFamily="18" charset="0"/>
+                <a:cs typeface="Times New Roman" panose="02020603050405020304" pitchFamily="18" charset="0"/>
+              </a:rPr>
+              <a:t>1</a:t>
+            </a:r>
+            <a:endParaRPr lang="zh-CN" altLang="en-US" dirty="0">
+              <a:solidFill>
+                <a:schemeClr val="tx1"/>
+              </a:solidFill>
+              <a:latin typeface="Times New Roman" panose="02020603050405020304" pitchFamily="18" charset="0"/>
+              <a:cs typeface="Times New Roman" panose="02020603050405020304" pitchFamily="18" charset="0"/>
+            </a:endParaRPr>
+          </a:p>
+        </p:txBody>
+      </p:sp>
+      <p:graphicFrame>
+        <p:nvGraphicFramePr>
+          <p:cNvPr id="310" name="对象 309"/>
+          <p:cNvGraphicFramePr>
+            <a:graphicFrameLocks noChangeAspect="1"/>
+          </p:cNvGraphicFramePr>
+          <p:nvPr>
+            <p:extLst>
+              <p:ext uri="{D42A27DB-BD31-4B8C-83A1-F6EECF244321}">
+                <p14:modId xmlns:p14="http://schemas.microsoft.com/office/powerpoint/2010/main" val="3339573776"/>
+              </p:ext>
+            </p:extLst>
+          </p:nvPr>
+        </p:nvGraphicFramePr>
+        <p:xfrm>
+          <a:off x="7867315" y="5014171"/>
+          <a:ext cx="463435" cy="728505"/>
+        </p:xfrm>
+        <a:graphic>
+          <a:graphicData uri="http://schemas.openxmlformats.org/presentationml/2006/ole">
+            <mc:AlternateContent xmlns:mc="http://schemas.openxmlformats.org/markup-compatibility/2006">
+              <mc:Choice xmlns:v="urn:schemas-microsoft-com:vml" Requires="v">
+                <p:oleObj spid="_x0000_s7304" name="AxMath" r:id="rId5" imgW="151920" imgH="226800" progId="Equation.AxMath">
+                  <p:embed/>
+                </p:oleObj>
+              </mc:Choice>
+              <mc:Fallback>
+                <p:oleObj name="AxMath" r:id="rId5" imgW="151920" imgH="226800" progId="Equation.AxMath">
+                  <p:embed/>
+                  <p:pic>
+                    <p:nvPicPr>
+                      <p:cNvPr id="249" name="对象 248"/>
+                      <p:cNvPicPr/>
+                      <p:nvPr/>
+                    </p:nvPicPr>
+                    <p:blipFill>
+                      <a:blip r:embed="rId4"/>
+                      <a:stretch>
+                        <a:fillRect/>
+                      </a:stretch>
+                    </p:blipFill>
+                    <p:spPr>
+                      <a:xfrm>
+                        <a:off x="7867315" y="5014171"/>
+                        <a:ext cx="463435" cy="728505"/>
+                      </a:xfrm>
+                      <a:prstGeom prst="rect">
+                        <a:avLst/>
+                      </a:prstGeom>
+                    </p:spPr>
+                  </p:pic>
+                </p:oleObj>
+              </mc:Fallback>
+            </mc:AlternateContent>
+          </a:graphicData>
+        </a:graphic>
+      </p:graphicFrame>
+      <p:sp>
+        <p:nvSpPr>
+          <p:cNvPr id="311" name="圆角矩形 310"/>
+          <p:cNvSpPr/>
+          <p:nvPr/>
+        </p:nvSpPr>
+        <p:spPr>
+          <a:xfrm>
+            <a:off x="2395348" y="5774140"/>
+            <a:ext cx="1138959" cy="432262"/>
+          </a:xfrm>
+          <a:prstGeom prst="roundRect">
+            <a:avLst/>
+          </a:prstGeom>
+          <a:solidFill>
+            <a:srgbClr val="BDD7EE"/>
+          </a:solidFill>
+          <a:ln w="28575">
+            <a:solidFill>
+              <a:schemeClr val="tx1"/>
+            </a:solidFill>
+          </a:ln>
+        </p:spPr>
+        <p:style>
+          <a:lnRef idx="2">
+            <a:schemeClr val="accent1">
+              <a:shade val="50000"/>
+            </a:schemeClr>
+          </a:lnRef>
+          <a:fillRef idx="1">
+            <a:schemeClr val="accent1"/>
+          </a:fillRef>
+          <a:effectRef idx="0">
+            <a:schemeClr val="accent1"/>
+          </a:effectRef>
+          <a:fontRef idx="minor">
+            <a:schemeClr val="lt1"/>
+          </a:fontRef>
+        </p:style>
+        <p:txBody>
+          <a:bodyPr rtlCol="0" anchor="ctr"/>
+          <a:lstStyle/>
+          <a:p>
+            <a:pPr algn="ctr"/>
+            <a:r>
+              <a:rPr lang="en-US" altLang="zh-CN" dirty="0">
+                <a:solidFill>
+                  <a:schemeClr val="tx1"/>
+                </a:solidFill>
+                <a:latin typeface="Times New Roman" panose="02020603050405020304" pitchFamily="18" charset="0"/>
+                <a:cs typeface="Times New Roman" panose="02020603050405020304" pitchFamily="18" charset="0"/>
+              </a:rPr>
+              <a:t>GPU </a:t>
+            </a:r>
+            <a:r>
+              <a:rPr lang="en-US" altLang="zh-CN" dirty="0" smtClean="0">
+                <a:solidFill>
+                  <a:schemeClr val="tx1"/>
+                </a:solidFill>
+                <a:latin typeface="Times New Roman" panose="02020603050405020304" pitchFamily="18" charset="0"/>
+                <a:cs typeface="Times New Roman" panose="02020603050405020304" pitchFamily="18" charset="0"/>
+              </a:rPr>
+              <a:t>2</a:t>
+            </a:r>
+            <a:endParaRPr lang="zh-CN" altLang="en-US" dirty="0">
+              <a:solidFill>
+                <a:schemeClr val="tx1"/>
+              </a:solidFill>
+              <a:latin typeface="Times New Roman" panose="02020603050405020304" pitchFamily="18" charset="0"/>
+              <a:cs typeface="Times New Roman" panose="02020603050405020304" pitchFamily="18" charset="0"/>
+            </a:endParaRPr>
+          </a:p>
+        </p:txBody>
+      </p:sp>
+      <p:graphicFrame>
+        <p:nvGraphicFramePr>
+          <p:cNvPr id="312" name="对象 311"/>
+          <p:cNvGraphicFramePr>
+            <a:graphicFrameLocks noChangeAspect="1"/>
+          </p:cNvGraphicFramePr>
+          <p:nvPr>
+            <p:extLst>
+              <p:ext uri="{D42A27DB-BD31-4B8C-83A1-F6EECF244321}">
+                <p14:modId xmlns:p14="http://schemas.microsoft.com/office/powerpoint/2010/main" val="2088750311"/>
+              </p:ext>
+            </p:extLst>
+          </p:nvPr>
+        </p:nvGraphicFramePr>
+        <p:xfrm>
+          <a:off x="7867315" y="5626018"/>
+          <a:ext cx="463435" cy="728505"/>
+        </p:xfrm>
+        <a:graphic>
+          <a:graphicData uri="http://schemas.openxmlformats.org/presentationml/2006/ole">
+            <mc:AlternateContent xmlns:mc="http://schemas.openxmlformats.org/markup-compatibility/2006">
+              <mc:Choice xmlns:v="urn:schemas-microsoft-com:vml" Requires="v">
+                <p:oleObj spid="_x0000_s7305" name="AxMath" r:id="rId6" imgW="151920" imgH="226800" progId="Equation.AxMath">
+                  <p:embed/>
+                </p:oleObj>
+              </mc:Choice>
+              <mc:Fallback>
+                <p:oleObj name="AxMath" r:id="rId6" imgW="151920" imgH="226800" progId="Equation.AxMath">
+                  <p:embed/>
+                  <p:pic>
+                    <p:nvPicPr>
+                      <p:cNvPr id="251" name="对象 250"/>
+                      <p:cNvPicPr/>
+                      <p:nvPr/>
+                    </p:nvPicPr>
+                    <p:blipFill>
+                      <a:blip r:embed="rId4"/>
+                      <a:stretch>
+                        <a:fillRect/>
+                      </a:stretch>
+                    </p:blipFill>
+                    <p:spPr>
+                      <a:xfrm>
+                        <a:off x="7867315" y="5626018"/>
+                        <a:ext cx="463435" cy="728505"/>
+                      </a:xfrm>
+                      <a:prstGeom prst="rect">
+                        <a:avLst/>
+                      </a:prstGeom>
+                    </p:spPr>
+                  </p:pic>
+                </p:oleObj>
+              </mc:Fallback>
+            </mc:AlternateContent>
+          </a:graphicData>
+        </a:graphic>
+      </p:graphicFrame>
+      <p:sp>
+        <p:nvSpPr>
+          <p:cNvPr id="313" name="圆角矩形 312"/>
+          <p:cNvSpPr/>
+          <p:nvPr/>
+        </p:nvSpPr>
+        <p:spPr>
+          <a:xfrm>
+            <a:off x="2395348" y="7410701"/>
+            <a:ext cx="1138843" cy="432262"/>
+          </a:xfrm>
+          <a:prstGeom prst="roundRect">
+            <a:avLst/>
+          </a:prstGeom>
+          <a:solidFill>
+            <a:srgbClr val="BDD7EE"/>
+          </a:solidFill>
+          <a:ln w="28575">
+            <a:solidFill>
+              <a:schemeClr val="tx1"/>
+            </a:solidFill>
+          </a:ln>
+        </p:spPr>
+        <p:style>
+          <a:lnRef idx="2">
+            <a:schemeClr val="accent1">
+              <a:shade val="50000"/>
+            </a:schemeClr>
+          </a:lnRef>
+          <a:fillRef idx="1">
+            <a:schemeClr val="accent1"/>
+          </a:fillRef>
+          <a:effectRef idx="0">
+            <a:schemeClr val="accent1"/>
+          </a:effectRef>
+          <a:fontRef idx="minor">
+            <a:schemeClr val="lt1"/>
+          </a:fontRef>
+        </p:style>
+        <p:txBody>
+          <a:bodyPr rtlCol="0" anchor="ctr"/>
+          <a:lstStyle/>
+          <a:p>
+            <a:pPr algn="ctr"/>
+            <a:r>
+              <a:rPr lang="en-US" altLang="zh-CN" dirty="0">
+                <a:solidFill>
+                  <a:schemeClr val="tx1"/>
+                </a:solidFill>
+                <a:latin typeface="Times New Roman" panose="02020603050405020304" pitchFamily="18" charset="0"/>
+                <a:cs typeface="Times New Roman" panose="02020603050405020304" pitchFamily="18" charset="0"/>
+              </a:rPr>
+              <a:t>GPU </a:t>
+            </a:r>
+            <a:r>
+              <a:rPr lang="en-US" altLang="zh-CN" dirty="0" smtClean="0">
+                <a:solidFill>
+                  <a:schemeClr val="tx1"/>
+                </a:solidFill>
+                <a:latin typeface="Times New Roman" panose="02020603050405020304" pitchFamily="18" charset="0"/>
+                <a:cs typeface="Times New Roman" panose="02020603050405020304" pitchFamily="18" charset="0"/>
+              </a:rPr>
+              <a:t>n-1</a:t>
+            </a:r>
+            <a:endParaRPr lang="zh-CN" altLang="en-US" dirty="0">
+              <a:solidFill>
+                <a:schemeClr val="tx1"/>
+              </a:solidFill>
+              <a:latin typeface="Times New Roman" panose="02020603050405020304" pitchFamily="18" charset="0"/>
+              <a:cs typeface="Times New Roman" panose="02020603050405020304" pitchFamily="18" charset="0"/>
+            </a:endParaRPr>
+          </a:p>
+        </p:txBody>
+      </p:sp>
+      <p:graphicFrame>
+        <p:nvGraphicFramePr>
+          <p:cNvPr id="314" name="对象 313"/>
+          <p:cNvGraphicFramePr>
+            <a:graphicFrameLocks noChangeAspect="1"/>
+          </p:cNvGraphicFramePr>
+          <p:nvPr>
+            <p:extLst>
+              <p:ext uri="{D42A27DB-BD31-4B8C-83A1-F6EECF244321}">
+                <p14:modId xmlns:p14="http://schemas.microsoft.com/office/powerpoint/2010/main" val="3306882007"/>
+              </p:ext>
+            </p:extLst>
+          </p:nvPr>
+        </p:nvGraphicFramePr>
+        <p:xfrm>
+          <a:off x="7867199" y="7262579"/>
+          <a:ext cx="463435" cy="728505"/>
+        </p:xfrm>
+        <a:graphic>
+          <a:graphicData uri="http://schemas.openxmlformats.org/presentationml/2006/ole">
+            <mc:AlternateContent xmlns:mc="http://schemas.openxmlformats.org/markup-compatibility/2006">
+              <mc:Choice xmlns:v="urn:schemas-microsoft-com:vml" Requires="v">
+                <p:oleObj spid="_x0000_s7306" name="AxMath" r:id="rId7" imgW="151920" imgH="226800" progId="Equation.AxMath">
+                  <p:embed/>
+                </p:oleObj>
+              </mc:Choice>
+              <mc:Fallback>
+                <p:oleObj name="AxMath" r:id="rId7" imgW="151920" imgH="226800" progId="Equation.AxMath">
+                  <p:embed/>
+                  <p:pic>
+                    <p:nvPicPr>
+                      <p:cNvPr id="253" name="对象 252"/>
+                      <p:cNvPicPr/>
+                      <p:nvPr/>
+                    </p:nvPicPr>
+                    <p:blipFill>
+                      <a:blip r:embed="rId4"/>
+                      <a:stretch>
+                        <a:fillRect/>
+                      </a:stretch>
+                    </p:blipFill>
+                    <p:spPr>
+                      <a:xfrm>
+                        <a:off x="7867199" y="7262579"/>
+                        <a:ext cx="463435" cy="728505"/>
+                      </a:xfrm>
+                      <a:prstGeom prst="rect">
+                        <a:avLst/>
+                      </a:prstGeom>
+                    </p:spPr>
+                  </p:pic>
+                </p:oleObj>
+              </mc:Fallback>
+            </mc:AlternateContent>
+          </a:graphicData>
+        </a:graphic>
+      </p:graphicFrame>
+      <p:graphicFrame>
+        <p:nvGraphicFramePr>
+          <p:cNvPr id="315" name="对象 314"/>
+          <p:cNvGraphicFramePr>
+            <a:graphicFrameLocks noChangeAspect="1"/>
+          </p:cNvGraphicFramePr>
+          <p:nvPr>
+            <p:extLst>
+              <p:ext uri="{D42A27DB-BD31-4B8C-83A1-F6EECF244321}">
+                <p14:modId xmlns:p14="http://schemas.microsoft.com/office/powerpoint/2010/main" val="2796578742"/>
+              </p:ext>
+            </p:extLst>
+          </p:nvPr>
+        </p:nvGraphicFramePr>
+        <p:xfrm>
+          <a:off x="5458703" y="6171946"/>
+          <a:ext cx="463435" cy="728505"/>
+        </p:xfrm>
+        <a:graphic>
+          <a:graphicData uri="http://schemas.openxmlformats.org/presentationml/2006/ole">
+            <mc:AlternateContent xmlns:mc="http://schemas.openxmlformats.org/markup-compatibility/2006">
+              <mc:Choice xmlns:v="urn:schemas-microsoft-com:vml" Requires="v">
+                <p:oleObj spid="_x0000_s7307" name="AxMath" r:id="rId8" imgW="151920" imgH="226800" progId="Equation.AxMath">
+                  <p:embed/>
+                </p:oleObj>
+              </mc:Choice>
+              <mc:Fallback>
+                <p:oleObj name="AxMath" r:id="rId8" imgW="151920" imgH="226800" progId="Equation.AxMath">
+                  <p:embed/>
+                  <p:pic>
+                    <p:nvPicPr>
+                      <p:cNvPr id="254" name="对象 253"/>
+                      <p:cNvPicPr/>
+                      <p:nvPr/>
+                    </p:nvPicPr>
+                    <p:blipFill>
+                      <a:blip r:embed="rId9"/>
+                      <a:stretch>
+                        <a:fillRect/>
+                      </a:stretch>
+                    </p:blipFill>
+                    <p:spPr>
+                      <a:xfrm>
+                        <a:off x="5458703" y="6171946"/>
+                        <a:ext cx="463435" cy="728505"/>
+                      </a:xfrm>
+                      <a:prstGeom prst="rect">
+                        <a:avLst/>
+                      </a:prstGeom>
+                    </p:spPr>
+                  </p:pic>
+                </p:oleObj>
+              </mc:Fallback>
+            </mc:AlternateContent>
+          </a:graphicData>
+        </a:graphic>
+      </p:graphicFrame>
+      <p:graphicFrame>
+        <p:nvGraphicFramePr>
+          <p:cNvPr id="316" name="对象 315"/>
+          <p:cNvGraphicFramePr>
+            <a:graphicFrameLocks noChangeAspect="1"/>
+          </p:cNvGraphicFramePr>
+          <p:nvPr>
+            <p:extLst>
+              <p:ext uri="{D42A27DB-BD31-4B8C-83A1-F6EECF244321}">
+                <p14:modId xmlns:p14="http://schemas.microsoft.com/office/powerpoint/2010/main" val="3756894402"/>
+              </p:ext>
+            </p:extLst>
+          </p:nvPr>
+        </p:nvGraphicFramePr>
+        <p:xfrm>
+          <a:off x="4080869" y="6176597"/>
+          <a:ext cx="463435" cy="728505"/>
+        </p:xfrm>
+        <a:graphic>
+          <a:graphicData uri="http://schemas.openxmlformats.org/presentationml/2006/ole">
+            <mc:AlternateContent xmlns:mc="http://schemas.openxmlformats.org/markup-compatibility/2006">
+              <mc:Choice xmlns:v="urn:schemas-microsoft-com:vml" Requires="v">
+                <p:oleObj spid="_x0000_s7308" name="AxMath" r:id="rId10" imgW="151920" imgH="226800" progId="Equation.AxMath">
+                  <p:embed/>
+                </p:oleObj>
+              </mc:Choice>
+              <mc:Fallback>
+                <p:oleObj name="AxMath" r:id="rId10" imgW="151920" imgH="226800" progId="Equation.AxMath">
+                  <p:embed/>
+                  <p:pic>
+                    <p:nvPicPr>
+                      <p:cNvPr id="255" name="对象 254"/>
+                      <p:cNvPicPr/>
+                      <p:nvPr/>
+                    </p:nvPicPr>
+                    <p:blipFill>
+                      <a:blip r:embed="rId9"/>
+                      <a:stretch>
+                        <a:fillRect/>
+                      </a:stretch>
+                    </p:blipFill>
+                    <p:spPr>
+                      <a:xfrm>
+                        <a:off x="4080869" y="6176597"/>
+                        <a:ext cx="463435" cy="728505"/>
+                      </a:xfrm>
+                      <a:prstGeom prst="rect">
+                        <a:avLst/>
+                      </a:prstGeom>
+                    </p:spPr>
+                  </p:pic>
+                </p:oleObj>
+              </mc:Fallback>
+            </mc:AlternateContent>
+          </a:graphicData>
+        </a:graphic>
+      </p:graphicFrame>
+      <p:graphicFrame>
+        <p:nvGraphicFramePr>
+          <p:cNvPr id="317" name="对象 316"/>
+          <p:cNvGraphicFramePr>
+            <a:graphicFrameLocks noChangeAspect="1"/>
+          </p:cNvGraphicFramePr>
+          <p:nvPr>
+            <p:extLst>
+              <p:ext uri="{D42A27DB-BD31-4B8C-83A1-F6EECF244321}">
+                <p14:modId xmlns:p14="http://schemas.microsoft.com/office/powerpoint/2010/main" val="97512175"/>
+              </p:ext>
+            </p:extLst>
+          </p:nvPr>
+        </p:nvGraphicFramePr>
+        <p:xfrm>
+          <a:off x="6850045" y="6171946"/>
+          <a:ext cx="463435" cy="728505"/>
+        </p:xfrm>
+        <a:graphic>
+          <a:graphicData uri="http://schemas.openxmlformats.org/presentationml/2006/ole">
+            <mc:AlternateContent xmlns:mc="http://schemas.openxmlformats.org/markup-compatibility/2006">
+              <mc:Choice xmlns:v="urn:schemas-microsoft-com:vml" Requires="v">
+                <p:oleObj spid="_x0000_s7309" name="AxMath" r:id="rId11" imgW="151920" imgH="226800" progId="Equation.AxMath">
+                  <p:embed/>
+                </p:oleObj>
+              </mc:Choice>
+              <mc:Fallback>
+                <p:oleObj name="AxMath" r:id="rId11" imgW="151920" imgH="226800" progId="Equation.AxMath">
+                  <p:embed/>
+                  <p:pic>
+                    <p:nvPicPr>
+                      <p:cNvPr id="256" name="对象 255"/>
+                      <p:cNvPicPr/>
+                      <p:nvPr/>
+                    </p:nvPicPr>
+                    <p:blipFill>
+                      <a:blip r:embed="rId9"/>
+                      <a:stretch>
+                        <a:fillRect/>
+                      </a:stretch>
+                    </p:blipFill>
+                    <p:spPr>
+                      <a:xfrm>
+                        <a:off x="6850045" y="6171946"/>
+                        <a:ext cx="463435" cy="728505"/>
+                      </a:xfrm>
+                      <a:prstGeom prst="rect">
+                        <a:avLst/>
+                      </a:prstGeom>
+                    </p:spPr>
+                  </p:pic>
+                </p:oleObj>
+              </mc:Fallback>
+            </mc:AlternateContent>
+          </a:graphicData>
+        </a:graphic>
+      </p:graphicFrame>
+      <p:graphicFrame>
+        <p:nvGraphicFramePr>
+          <p:cNvPr id="318" name="对象 317"/>
+          <p:cNvGraphicFramePr>
+            <a:graphicFrameLocks noChangeAspect="1"/>
+          </p:cNvGraphicFramePr>
+          <p:nvPr>
+            <p:extLst>
+              <p:ext uri="{D42A27DB-BD31-4B8C-83A1-F6EECF244321}">
+                <p14:modId xmlns:p14="http://schemas.microsoft.com/office/powerpoint/2010/main" val="4293689075"/>
+              </p:ext>
+            </p:extLst>
+          </p:nvPr>
+        </p:nvGraphicFramePr>
+        <p:xfrm>
+          <a:off x="8866920" y="6176622"/>
+          <a:ext cx="463435" cy="728505"/>
+        </p:xfrm>
+        <a:graphic>
+          <a:graphicData uri="http://schemas.openxmlformats.org/presentationml/2006/ole">
+            <mc:AlternateContent xmlns:mc="http://schemas.openxmlformats.org/markup-compatibility/2006">
+              <mc:Choice xmlns:v="urn:schemas-microsoft-com:vml" Requires="v">
+                <p:oleObj spid="_x0000_s7310" name="AxMath" r:id="rId12" imgW="151920" imgH="226800" progId="Equation.AxMath">
+                  <p:embed/>
+                </p:oleObj>
+              </mc:Choice>
+              <mc:Fallback>
+                <p:oleObj name="AxMath" r:id="rId12" imgW="151920" imgH="226800" progId="Equation.AxMath">
+                  <p:embed/>
+                  <p:pic>
+                    <p:nvPicPr>
+                      <p:cNvPr id="257" name="对象 256"/>
+                      <p:cNvPicPr/>
+                      <p:nvPr/>
+                    </p:nvPicPr>
+                    <p:blipFill>
+                      <a:blip r:embed="rId9"/>
+                      <a:stretch>
+                        <a:fillRect/>
+                      </a:stretch>
+                    </p:blipFill>
+                    <p:spPr>
+                      <a:xfrm>
+                        <a:off x="8866920" y="6176622"/>
+                        <a:ext cx="463435" cy="728505"/>
+                      </a:xfrm>
+                      <a:prstGeom prst="rect">
+                        <a:avLst/>
+                      </a:prstGeom>
+                    </p:spPr>
+                  </p:pic>
+                </p:oleObj>
+              </mc:Fallback>
+            </mc:AlternateContent>
+          </a:graphicData>
+        </a:graphic>
+      </p:graphicFrame>
+      <p:sp>
+        <p:nvSpPr>
+          <p:cNvPr id="319" name="矩形 318"/>
+          <p:cNvSpPr/>
+          <p:nvPr/>
+        </p:nvSpPr>
+        <p:spPr>
+          <a:xfrm>
+            <a:off x="5080474" y="5162292"/>
+            <a:ext cx="1230283" cy="432262"/>
+          </a:xfrm>
+          <a:prstGeom prst="rect">
+            <a:avLst/>
+          </a:prstGeom>
+          <a:solidFill>
+            <a:srgbClr val="E2F0D9"/>
+          </a:solidFill>
+          <a:ln w="28575">
+            <a:solidFill>
+              <a:schemeClr val="tx1"/>
+            </a:solidFill>
+          </a:ln>
+        </p:spPr>
+        <p:style>
+          <a:lnRef idx="2">
+            <a:schemeClr val="accent1">
+              <a:shade val="50000"/>
+            </a:schemeClr>
+          </a:lnRef>
+          <a:fillRef idx="1">
+            <a:schemeClr val="accent1"/>
+          </a:fillRef>
+          <a:effectRef idx="0">
+            <a:schemeClr val="accent1"/>
+          </a:effectRef>
+          <a:fontRef idx="minor">
+            <a:schemeClr val="lt1"/>
+          </a:fontRef>
+        </p:style>
+        <p:txBody>
+          <a:bodyPr rtlCol="0" anchor="ctr"/>
+          <a:lstStyle/>
+          <a:p>
+            <a:pPr algn="ctr"/>
+            <a:endParaRPr lang="zh-CN" altLang="en-US" dirty="0"/>
+          </a:p>
+        </p:txBody>
+      </p:sp>
+      <p:sp>
+        <p:nvSpPr>
+          <p:cNvPr id="320" name="矩形 319"/>
+          <p:cNvSpPr/>
+          <p:nvPr/>
+        </p:nvSpPr>
+        <p:spPr>
+          <a:xfrm>
+            <a:off x="6475454" y="5774139"/>
+            <a:ext cx="1230283" cy="432262"/>
+          </a:xfrm>
+          <a:prstGeom prst="rect">
+            <a:avLst/>
+          </a:prstGeom>
+          <a:noFill/>
+          <a:ln w="28575">
+            <a:solidFill>
+              <a:schemeClr val="tx1"/>
+            </a:solidFill>
+          </a:ln>
+        </p:spPr>
+        <p:style>
+          <a:lnRef idx="2">
+            <a:schemeClr val="accent1">
+              <a:shade val="50000"/>
+            </a:schemeClr>
+          </a:lnRef>
+          <a:fillRef idx="1">
+            <a:schemeClr val="accent1"/>
+          </a:fillRef>
+          <a:effectRef idx="0">
+            <a:schemeClr val="accent1"/>
+          </a:effectRef>
+          <a:fontRef idx="minor">
+            <a:schemeClr val="lt1"/>
+          </a:fontRef>
+        </p:style>
+        <p:txBody>
+          <a:bodyPr rtlCol="0" anchor="ctr"/>
+          <a:lstStyle/>
+          <a:p>
+            <a:pPr algn="ctr"/>
+            <a:endParaRPr lang="zh-CN" altLang="en-US" dirty="0"/>
+          </a:p>
+        </p:txBody>
+      </p:sp>
+      <p:sp>
+        <p:nvSpPr>
+          <p:cNvPr id="321" name="矩形 320"/>
+          <p:cNvSpPr/>
+          <p:nvPr/>
+        </p:nvSpPr>
+        <p:spPr>
+          <a:xfrm>
+            <a:off x="8416532" y="7406818"/>
+            <a:ext cx="1230283" cy="432262"/>
+          </a:xfrm>
+          <a:prstGeom prst="rect">
+            <a:avLst/>
+          </a:prstGeom>
+          <a:noFill/>
+          <a:ln w="28575">
+            <a:solidFill>
+              <a:schemeClr val="tx1"/>
+            </a:solidFill>
+          </a:ln>
+        </p:spPr>
+        <p:style>
+          <a:lnRef idx="2">
+            <a:schemeClr val="accent1">
+              <a:shade val="50000"/>
+            </a:schemeClr>
+          </a:lnRef>
+          <a:fillRef idx="1">
+            <a:schemeClr val="accent1"/>
+          </a:fillRef>
+          <a:effectRef idx="0">
+            <a:schemeClr val="accent1"/>
+          </a:effectRef>
+          <a:fontRef idx="minor">
+            <a:schemeClr val="lt1"/>
+          </a:fontRef>
+        </p:style>
+        <p:txBody>
+          <a:bodyPr rtlCol="0" anchor="ctr"/>
+          <a:lstStyle/>
+          <a:p>
+            <a:pPr algn="ctr"/>
+            <a:endParaRPr lang="zh-CN" altLang="en-US" dirty="0"/>
+          </a:p>
+        </p:txBody>
+      </p:sp>
+      <p:sp>
+        <p:nvSpPr>
+          <p:cNvPr id="322" name="矩形 321"/>
+          <p:cNvSpPr/>
+          <p:nvPr/>
+        </p:nvSpPr>
+        <p:spPr>
+          <a:xfrm>
+            <a:off x="6475454" y="4550444"/>
+            <a:ext cx="1230283" cy="432262"/>
+          </a:xfrm>
+          <a:prstGeom prst="rect">
+            <a:avLst/>
+          </a:prstGeom>
+          <a:solidFill>
+            <a:srgbClr val="E2F0D9"/>
+          </a:solidFill>
+          <a:ln w="28575">
+            <a:solidFill>
+              <a:schemeClr val="tx1"/>
+            </a:solidFill>
+          </a:ln>
+        </p:spPr>
+        <p:style>
+          <a:lnRef idx="2">
+            <a:schemeClr val="accent1">
+              <a:shade val="50000"/>
+            </a:schemeClr>
+          </a:lnRef>
+          <a:fillRef idx="1">
+            <a:schemeClr val="accent1"/>
+          </a:fillRef>
+          <a:effectRef idx="0">
+            <a:schemeClr val="accent1"/>
+          </a:effectRef>
+          <a:fontRef idx="minor">
+            <a:schemeClr val="lt1"/>
+          </a:fontRef>
+        </p:style>
+        <p:txBody>
+          <a:bodyPr rtlCol="0" anchor="ctr"/>
+          <a:lstStyle/>
+          <a:p>
+            <a:pPr algn="ctr"/>
+            <a:endParaRPr lang="zh-CN" altLang="en-US" dirty="0"/>
+          </a:p>
+        </p:txBody>
+      </p:sp>
+      <p:sp>
+        <p:nvSpPr>
+          <p:cNvPr id="323" name="矩形 322"/>
+          <p:cNvSpPr/>
+          <p:nvPr/>
+        </p:nvSpPr>
+        <p:spPr>
+          <a:xfrm>
+            <a:off x="8416648" y="4555149"/>
+            <a:ext cx="1230283" cy="432262"/>
+          </a:xfrm>
+          <a:prstGeom prst="rect">
+            <a:avLst/>
+          </a:prstGeom>
+          <a:solidFill>
+            <a:srgbClr val="E2F0D9"/>
+          </a:solidFill>
+          <a:ln w="28575">
+            <a:solidFill>
+              <a:schemeClr val="tx1"/>
+            </a:solidFill>
+          </a:ln>
+        </p:spPr>
+        <p:style>
+          <a:lnRef idx="2">
+            <a:schemeClr val="accent1">
+              <a:shade val="50000"/>
+            </a:schemeClr>
+          </a:lnRef>
+          <a:fillRef idx="1">
+            <a:schemeClr val="accent1"/>
+          </a:fillRef>
+          <a:effectRef idx="0">
+            <a:schemeClr val="accent1"/>
+          </a:effectRef>
+          <a:fontRef idx="minor">
+            <a:schemeClr val="lt1"/>
+          </a:fontRef>
+        </p:style>
+        <p:txBody>
+          <a:bodyPr rtlCol="0" anchor="ctr"/>
+          <a:lstStyle/>
+          <a:p>
+            <a:pPr algn="ctr"/>
+            <a:endParaRPr lang="zh-CN" altLang="en-US" dirty="0"/>
+          </a:p>
+        </p:txBody>
+      </p:sp>
+      <p:sp>
+        <p:nvSpPr>
+          <p:cNvPr id="324" name="矩形 323"/>
+          <p:cNvSpPr/>
+          <p:nvPr/>
+        </p:nvSpPr>
+        <p:spPr>
+          <a:xfrm>
+            <a:off x="8422073" y="5162292"/>
+            <a:ext cx="1230283" cy="432262"/>
+          </a:xfrm>
+          <a:prstGeom prst="rect">
+            <a:avLst/>
+          </a:prstGeom>
+          <a:noFill/>
+          <a:ln w="28575">
+            <a:solidFill>
+              <a:schemeClr val="tx1"/>
+            </a:solidFill>
+          </a:ln>
+        </p:spPr>
+        <p:style>
+          <a:lnRef idx="2">
+            <a:schemeClr val="accent1">
+              <a:shade val="50000"/>
+            </a:schemeClr>
+          </a:lnRef>
+          <a:fillRef idx="1">
+            <a:schemeClr val="accent1"/>
+          </a:fillRef>
+          <a:effectRef idx="0">
+            <a:schemeClr val="accent1"/>
+          </a:effectRef>
+          <a:fontRef idx="minor">
+            <a:schemeClr val="lt1"/>
+          </a:fontRef>
+        </p:style>
+        <p:txBody>
+          <a:bodyPr rtlCol="0" anchor="ctr"/>
+          <a:lstStyle/>
+          <a:p>
+            <a:pPr algn="ctr"/>
+            <a:endParaRPr lang="zh-CN" altLang="en-US" dirty="0"/>
+          </a:p>
+        </p:txBody>
+      </p:sp>
+      <p:sp>
+        <p:nvSpPr>
+          <p:cNvPr id="325" name="矩形 324"/>
+          <p:cNvSpPr/>
+          <p:nvPr/>
+        </p:nvSpPr>
+        <p:spPr>
+          <a:xfrm>
+            <a:off x="8416648" y="5769435"/>
+            <a:ext cx="1230283" cy="432262"/>
+          </a:xfrm>
+          <a:prstGeom prst="rect">
+            <a:avLst/>
+          </a:prstGeom>
+          <a:noFill/>
+          <a:ln w="28575">
+            <a:solidFill>
+              <a:schemeClr val="tx1"/>
+            </a:solidFill>
+          </a:ln>
+        </p:spPr>
+        <p:style>
+          <a:lnRef idx="2">
+            <a:schemeClr val="accent1">
+              <a:shade val="50000"/>
+            </a:schemeClr>
+          </a:lnRef>
+          <a:fillRef idx="1">
+            <a:schemeClr val="accent1"/>
+          </a:fillRef>
+          <a:effectRef idx="0">
+            <a:schemeClr val="accent1"/>
+          </a:effectRef>
+          <a:fontRef idx="minor">
+            <a:schemeClr val="lt1"/>
+          </a:fontRef>
+        </p:style>
+        <p:txBody>
+          <a:bodyPr rtlCol="0" anchor="ctr"/>
+          <a:lstStyle/>
+          <a:p>
+            <a:pPr algn="ctr"/>
+            <a:endParaRPr lang="zh-CN" altLang="en-US" dirty="0"/>
+          </a:p>
+        </p:txBody>
+      </p:sp>
+      <p:sp>
+        <p:nvSpPr>
+          <p:cNvPr id="326" name="矩形 325"/>
+          <p:cNvSpPr/>
+          <p:nvPr/>
+        </p:nvSpPr>
+        <p:spPr>
+          <a:xfrm>
+            <a:off x="6468699" y="5162292"/>
+            <a:ext cx="1230283" cy="432262"/>
+          </a:xfrm>
+          <a:prstGeom prst="rect">
+            <a:avLst/>
+          </a:prstGeom>
+          <a:solidFill>
+            <a:srgbClr val="E2F0D9"/>
+          </a:solidFill>
+          <a:ln w="28575">
+            <a:solidFill>
+              <a:schemeClr val="tx1"/>
+            </a:solidFill>
+          </a:ln>
+        </p:spPr>
+        <p:style>
+          <a:lnRef idx="2">
+            <a:schemeClr val="accent1">
+              <a:shade val="50000"/>
+            </a:schemeClr>
+          </a:lnRef>
+          <a:fillRef idx="1">
+            <a:schemeClr val="accent1"/>
+          </a:fillRef>
+          <a:effectRef idx="0">
+            <a:schemeClr val="accent1"/>
+          </a:effectRef>
+          <a:fontRef idx="minor">
+            <a:schemeClr val="lt1"/>
+          </a:fontRef>
+        </p:style>
+        <p:txBody>
+          <a:bodyPr rtlCol="0" anchor="ctr"/>
+          <a:lstStyle/>
+          <a:p>
+            <a:pPr algn="ctr"/>
+            <a:endParaRPr lang="zh-CN" altLang="en-US" dirty="0"/>
+          </a:p>
+        </p:txBody>
+      </p:sp>
+      <p:sp>
+        <p:nvSpPr>
+          <p:cNvPr id="327" name="矩形 326"/>
+          <p:cNvSpPr/>
+          <p:nvPr/>
+        </p:nvSpPr>
+        <p:spPr>
+          <a:xfrm>
+            <a:off x="3692018" y="5158886"/>
+            <a:ext cx="1230283" cy="432262"/>
+          </a:xfrm>
+          <a:prstGeom prst="rect">
+            <a:avLst/>
+          </a:prstGeom>
+          <a:solidFill>
+            <a:srgbClr val="E2F0D9"/>
+          </a:solidFill>
+          <a:ln w="28575">
+            <a:solidFill>
+              <a:schemeClr val="tx1"/>
+            </a:solidFill>
+          </a:ln>
+        </p:spPr>
+        <p:style>
+          <a:lnRef idx="2">
+            <a:schemeClr val="accent1">
+              <a:shade val="50000"/>
+            </a:schemeClr>
+          </a:lnRef>
+          <a:fillRef idx="1">
+            <a:schemeClr val="accent1"/>
+          </a:fillRef>
+          <a:effectRef idx="0">
+            <a:schemeClr val="accent1"/>
+          </a:effectRef>
+          <a:fontRef idx="minor">
+            <a:schemeClr val="lt1"/>
+          </a:fontRef>
+        </p:style>
+        <p:txBody>
+          <a:bodyPr rtlCol="0" anchor="ctr"/>
+          <a:lstStyle/>
+          <a:p>
+            <a:pPr algn="ctr"/>
+            <a:endParaRPr lang="zh-CN" altLang="en-US" dirty="0"/>
+          </a:p>
+        </p:txBody>
+      </p:sp>
+      <p:sp>
+        <p:nvSpPr>
+          <p:cNvPr id="328" name="矩形 327"/>
+          <p:cNvSpPr/>
+          <p:nvPr/>
+        </p:nvSpPr>
+        <p:spPr>
+          <a:xfrm>
+            <a:off x="5083361" y="5769435"/>
+            <a:ext cx="1230283" cy="432262"/>
+          </a:xfrm>
+          <a:prstGeom prst="rect">
+            <a:avLst/>
+          </a:prstGeom>
+          <a:solidFill>
+            <a:srgbClr val="E2F0D9"/>
+          </a:solidFill>
+          <a:ln w="28575">
+            <a:solidFill>
+              <a:schemeClr val="tx1"/>
+            </a:solidFill>
+          </a:ln>
+        </p:spPr>
+        <p:style>
+          <a:lnRef idx="2">
+            <a:schemeClr val="accent1">
+              <a:shade val="50000"/>
+            </a:schemeClr>
+          </a:lnRef>
+          <a:fillRef idx="1">
+            <a:schemeClr val="accent1"/>
+          </a:fillRef>
+          <a:effectRef idx="0">
+            <a:schemeClr val="accent1"/>
+          </a:effectRef>
+          <a:fontRef idx="minor">
+            <a:schemeClr val="lt1"/>
+          </a:fontRef>
+        </p:style>
+        <p:txBody>
+          <a:bodyPr rtlCol="0" anchor="ctr"/>
+          <a:lstStyle/>
+          <a:p>
+            <a:pPr algn="ctr"/>
+            <a:endParaRPr lang="zh-CN" altLang="en-US" dirty="0"/>
+          </a:p>
+        </p:txBody>
+      </p:sp>
+      <p:sp>
+        <p:nvSpPr>
+          <p:cNvPr id="329" name="矩形 328"/>
+          <p:cNvSpPr/>
+          <p:nvPr/>
+        </p:nvSpPr>
+        <p:spPr>
+          <a:xfrm>
+            <a:off x="3692018" y="5769435"/>
+            <a:ext cx="1230283" cy="432262"/>
+          </a:xfrm>
+          <a:prstGeom prst="rect">
+            <a:avLst/>
+          </a:prstGeom>
+          <a:solidFill>
+            <a:srgbClr val="E2F0D9"/>
+          </a:solidFill>
+          <a:ln w="28575">
+            <a:solidFill>
+              <a:schemeClr val="tx1"/>
+            </a:solidFill>
+          </a:ln>
+        </p:spPr>
+        <p:style>
+          <a:lnRef idx="2">
+            <a:schemeClr val="accent1">
+              <a:shade val="50000"/>
+            </a:schemeClr>
+          </a:lnRef>
+          <a:fillRef idx="1">
+            <a:schemeClr val="accent1"/>
+          </a:fillRef>
+          <a:effectRef idx="0">
+            <a:schemeClr val="accent1"/>
+          </a:effectRef>
+          <a:fontRef idx="minor">
+            <a:schemeClr val="lt1"/>
+          </a:fontRef>
+        </p:style>
+        <p:txBody>
+          <a:bodyPr rtlCol="0" anchor="ctr"/>
+          <a:lstStyle/>
+          <a:p>
+            <a:pPr algn="ctr"/>
+            <a:endParaRPr lang="zh-CN" altLang="en-US" dirty="0"/>
+          </a:p>
+        </p:txBody>
+      </p:sp>
+      <p:sp>
+        <p:nvSpPr>
+          <p:cNvPr id="330" name="矩形 329"/>
+          <p:cNvSpPr/>
+          <p:nvPr/>
+        </p:nvSpPr>
+        <p:spPr>
+          <a:xfrm>
+            <a:off x="6481442" y="7410700"/>
+            <a:ext cx="1230283" cy="432262"/>
+          </a:xfrm>
+          <a:prstGeom prst="rect">
+            <a:avLst/>
+          </a:prstGeom>
+          <a:noFill/>
+          <a:ln w="28575">
+            <a:solidFill>
+              <a:schemeClr val="tx1"/>
+            </a:solidFill>
+          </a:ln>
+        </p:spPr>
+        <p:style>
+          <a:lnRef idx="2">
+            <a:schemeClr val="accent1">
+              <a:shade val="50000"/>
+            </a:schemeClr>
+          </a:lnRef>
+          <a:fillRef idx="1">
+            <a:schemeClr val="accent1"/>
+          </a:fillRef>
+          <a:effectRef idx="0">
+            <a:schemeClr val="accent1"/>
+          </a:effectRef>
+          <a:fontRef idx="minor">
+            <a:schemeClr val="lt1"/>
+          </a:fontRef>
+        </p:style>
+        <p:txBody>
+          <a:bodyPr rtlCol="0" anchor="ctr"/>
+          <a:lstStyle/>
+          <a:p>
+            <a:pPr algn="ctr"/>
+            <a:endParaRPr lang="zh-CN" altLang="en-US" dirty="0"/>
+          </a:p>
+        </p:txBody>
+      </p:sp>
+      <p:sp>
+        <p:nvSpPr>
+          <p:cNvPr id="331" name="矩形 330"/>
+          <p:cNvSpPr/>
+          <p:nvPr/>
+        </p:nvSpPr>
+        <p:spPr>
+          <a:xfrm>
+            <a:off x="5074718" y="7406818"/>
+            <a:ext cx="1230283" cy="432262"/>
+          </a:xfrm>
+          <a:prstGeom prst="rect">
+            <a:avLst/>
+          </a:prstGeom>
+          <a:noFill/>
+          <a:ln w="28575">
+            <a:solidFill>
+              <a:schemeClr val="tx1"/>
+            </a:solidFill>
+          </a:ln>
+        </p:spPr>
+        <p:style>
+          <a:lnRef idx="2">
+            <a:schemeClr val="accent1">
+              <a:shade val="50000"/>
+            </a:schemeClr>
+          </a:lnRef>
+          <a:fillRef idx="1">
+            <a:schemeClr val="accent1"/>
+          </a:fillRef>
+          <a:effectRef idx="0">
+            <a:schemeClr val="accent1"/>
+          </a:effectRef>
+          <a:fontRef idx="minor">
+            <a:schemeClr val="lt1"/>
+          </a:fontRef>
+        </p:style>
+        <p:txBody>
+          <a:bodyPr rtlCol="0" anchor="ctr"/>
+          <a:lstStyle/>
+          <a:p>
+            <a:pPr algn="ctr"/>
+            <a:endParaRPr lang="zh-CN" altLang="en-US" dirty="0"/>
+          </a:p>
+        </p:txBody>
+      </p:sp>
+      <p:sp>
+        <p:nvSpPr>
+          <p:cNvPr id="332" name="矩形 331"/>
+          <p:cNvSpPr/>
+          <p:nvPr/>
+        </p:nvSpPr>
+        <p:spPr>
+          <a:xfrm>
+            <a:off x="3689313" y="7410700"/>
+            <a:ext cx="1230283" cy="432262"/>
+          </a:xfrm>
+          <a:prstGeom prst="rect">
+            <a:avLst/>
+          </a:prstGeom>
+          <a:noFill/>
+          <a:ln w="28575">
+            <a:solidFill>
+              <a:schemeClr val="tx1"/>
+            </a:solidFill>
+          </a:ln>
+        </p:spPr>
+        <p:style>
+          <a:lnRef idx="2">
+            <a:schemeClr val="accent1">
+              <a:shade val="50000"/>
+            </a:schemeClr>
+          </a:lnRef>
+          <a:fillRef idx="1">
+            <a:schemeClr val="accent1"/>
+          </a:fillRef>
+          <a:effectRef idx="0">
+            <a:schemeClr val="accent1"/>
+          </a:effectRef>
+          <a:fontRef idx="minor">
+            <a:schemeClr val="lt1"/>
+          </a:fontRef>
+        </p:style>
+        <p:txBody>
+          <a:bodyPr rtlCol="0" anchor="ctr"/>
+          <a:lstStyle/>
+          <a:p>
+            <a:pPr algn="ctr"/>
+            <a:endParaRPr lang="zh-CN" altLang="en-US" dirty="0"/>
+          </a:p>
+        </p:txBody>
+      </p:sp>
+      <p:sp>
+        <p:nvSpPr>
+          <p:cNvPr id="333" name="圆角矩形 332"/>
+          <p:cNvSpPr/>
+          <p:nvPr/>
+        </p:nvSpPr>
+        <p:spPr>
+          <a:xfrm>
+            <a:off x="2395348" y="6832056"/>
+            <a:ext cx="1138843" cy="432262"/>
+          </a:xfrm>
+          <a:prstGeom prst="roundRect">
+            <a:avLst/>
+          </a:prstGeom>
+          <a:solidFill>
+            <a:srgbClr val="BDD7EE"/>
+          </a:solidFill>
+          <a:ln w="28575">
+            <a:solidFill>
+              <a:schemeClr val="tx1"/>
+            </a:solidFill>
+          </a:ln>
+        </p:spPr>
+        <p:style>
+          <a:lnRef idx="2">
+            <a:schemeClr val="accent1">
+              <a:shade val="50000"/>
+            </a:schemeClr>
+          </a:lnRef>
+          <a:fillRef idx="1">
+            <a:schemeClr val="accent1"/>
+          </a:fillRef>
+          <a:effectRef idx="0">
+            <a:schemeClr val="accent1"/>
+          </a:effectRef>
+          <a:fontRef idx="minor">
+            <a:schemeClr val="lt1"/>
+          </a:fontRef>
+        </p:style>
+        <p:txBody>
+          <a:bodyPr rtlCol="0" anchor="ctr"/>
+          <a:lstStyle/>
+          <a:p>
+            <a:pPr algn="ctr"/>
+            <a:r>
+              <a:rPr lang="en-US" altLang="zh-CN" dirty="0">
+                <a:solidFill>
+                  <a:schemeClr val="tx1"/>
+                </a:solidFill>
+                <a:latin typeface="Times New Roman" panose="02020603050405020304" pitchFamily="18" charset="0"/>
+                <a:cs typeface="Times New Roman" panose="02020603050405020304" pitchFamily="18" charset="0"/>
+              </a:rPr>
+              <a:t>GPU </a:t>
+            </a:r>
+            <a:r>
+              <a:rPr lang="en-US" altLang="zh-CN" dirty="0" smtClean="0">
+                <a:solidFill>
+                  <a:schemeClr val="tx1"/>
+                </a:solidFill>
+                <a:latin typeface="Times New Roman" panose="02020603050405020304" pitchFamily="18" charset="0"/>
+                <a:cs typeface="Times New Roman" panose="02020603050405020304" pitchFamily="18" charset="0"/>
+              </a:rPr>
+              <a:t>n-2</a:t>
+            </a:r>
+            <a:endParaRPr lang="zh-CN" altLang="en-US" dirty="0">
+              <a:solidFill>
+                <a:schemeClr val="tx1"/>
+              </a:solidFill>
+              <a:latin typeface="Times New Roman" panose="02020603050405020304" pitchFamily="18" charset="0"/>
+              <a:cs typeface="Times New Roman" panose="02020603050405020304" pitchFamily="18" charset="0"/>
+            </a:endParaRPr>
+          </a:p>
+        </p:txBody>
+      </p:sp>
+      <p:sp>
+        <p:nvSpPr>
+          <p:cNvPr id="334" name="矩形 333"/>
+          <p:cNvSpPr/>
+          <p:nvPr/>
+        </p:nvSpPr>
+        <p:spPr>
+          <a:xfrm>
+            <a:off x="8416532" y="6828173"/>
+            <a:ext cx="1230283" cy="432262"/>
+          </a:xfrm>
+          <a:prstGeom prst="rect">
+            <a:avLst/>
+          </a:prstGeom>
+          <a:noFill/>
+          <a:ln w="28575">
+            <a:solidFill>
+              <a:schemeClr val="tx1"/>
+            </a:solidFill>
+          </a:ln>
+        </p:spPr>
+        <p:style>
+          <a:lnRef idx="2">
+            <a:schemeClr val="accent1">
+              <a:shade val="50000"/>
+            </a:schemeClr>
+          </a:lnRef>
+          <a:fillRef idx="1">
+            <a:schemeClr val="accent1"/>
+          </a:fillRef>
+          <a:effectRef idx="0">
+            <a:schemeClr val="accent1"/>
+          </a:effectRef>
+          <a:fontRef idx="minor">
+            <a:schemeClr val="lt1"/>
+          </a:fontRef>
+        </p:style>
+        <p:txBody>
+          <a:bodyPr rtlCol="0" anchor="ctr"/>
+          <a:lstStyle/>
+          <a:p>
+            <a:pPr algn="ctr"/>
+            <a:endParaRPr lang="zh-CN" altLang="en-US" dirty="0"/>
+          </a:p>
+        </p:txBody>
+      </p:sp>
+      <p:sp>
+        <p:nvSpPr>
+          <p:cNvPr id="335" name="矩形 334"/>
+          <p:cNvSpPr/>
+          <p:nvPr/>
+        </p:nvSpPr>
+        <p:spPr>
+          <a:xfrm>
+            <a:off x="6481442" y="6832055"/>
+            <a:ext cx="1230283" cy="432262"/>
+          </a:xfrm>
+          <a:prstGeom prst="rect">
+            <a:avLst/>
+          </a:prstGeom>
+          <a:noFill/>
+          <a:ln w="28575">
+            <a:solidFill>
+              <a:schemeClr val="tx1"/>
+            </a:solidFill>
+          </a:ln>
+        </p:spPr>
+        <p:style>
+          <a:lnRef idx="2">
+            <a:schemeClr val="accent1">
+              <a:shade val="50000"/>
+            </a:schemeClr>
+          </a:lnRef>
+          <a:fillRef idx="1">
+            <a:schemeClr val="accent1"/>
+          </a:fillRef>
+          <a:effectRef idx="0">
+            <a:schemeClr val="accent1"/>
+          </a:effectRef>
+          <a:fontRef idx="minor">
+            <a:schemeClr val="lt1"/>
+          </a:fontRef>
+        </p:style>
+        <p:txBody>
+          <a:bodyPr rtlCol="0" anchor="ctr"/>
+          <a:lstStyle/>
+          <a:p>
+            <a:pPr algn="ctr"/>
+            <a:endParaRPr lang="zh-CN" altLang="en-US" dirty="0"/>
+          </a:p>
+        </p:txBody>
+      </p:sp>
+      <p:sp>
+        <p:nvSpPr>
+          <p:cNvPr id="336" name="矩形 335"/>
+          <p:cNvSpPr/>
+          <p:nvPr/>
+        </p:nvSpPr>
+        <p:spPr>
+          <a:xfrm>
+            <a:off x="5074718" y="6828173"/>
+            <a:ext cx="1230283" cy="432262"/>
+          </a:xfrm>
+          <a:prstGeom prst="rect">
+            <a:avLst/>
+          </a:prstGeom>
+          <a:noFill/>
+          <a:ln w="28575">
+            <a:solidFill>
+              <a:schemeClr val="tx1"/>
+            </a:solidFill>
+          </a:ln>
+        </p:spPr>
+        <p:style>
+          <a:lnRef idx="2">
+            <a:schemeClr val="accent1">
+              <a:shade val="50000"/>
+            </a:schemeClr>
+          </a:lnRef>
+          <a:fillRef idx="1">
+            <a:schemeClr val="accent1"/>
+          </a:fillRef>
+          <a:effectRef idx="0">
+            <a:schemeClr val="accent1"/>
+          </a:effectRef>
+          <a:fontRef idx="minor">
+            <a:schemeClr val="lt1"/>
+          </a:fontRef>
+        </p:style>
+        <p:txBody>
+          <a:bodyPr rtlCol="0" anchor="ctr"/>
+          <a:lstStyle/>
+          <a:p>
+            <a:pPr algn="ctr"/>
+            <a:endParaRPr lang="zh-CN" altLang="en-US" dirty="0"/>
+          </a:p>
+        </p:txBody>
+      </p:sp>
+      <p:sp>
+        <p:nvSpPr>
+          <p:cNvPr id="337" name="矩形 336"/>
+          <p:cNvSpPr/>
+          <p:nvPr/>
+        </p:nvSpPr>
+        <p:spPr>
+          <a:xfrm>
+            <a:off x="3689313" y="6832055"/>
+            <a:ext cx="1230283" cy="432262"/>
+          </a:xfrm>
+          <a:prstGeom prst="rect">
+            <a:avLst/>
+          </a:prstGeom>
+          <a:noFill/>
+          <a:ln w="28575">
+            <a:solidFill>
+              <a:schemeClr val="tx1"/>
+            </a:solidFill>
+          </a:ln>
+        </p:spPr>
+        <p:style>
+          <a:lnRef idx="2">
+            <a:schemeClr val="accent1">
+              <a:shade val="50000"/>
+            </a:schemeClr>
+          </a:lnRef>
+          <a:fillRef idx="1">
+            <a:schemeClr val="accent1"/>
+          </a:fillRef>
+          <a:effectRef idx="0">
+            <a:schemeClr val="accent1"/>
+          </a:effectRef>
+          <a:fontRef idx="minor">
+            <a:schemeClr val="lt1"/>
+          </a:fontRef>
+        </p:style>
+        <p:txBody>
+          <a:bodyPr rtlCol="0" anchor="ctr"/>
+          <a:lstStyle/>
+          <a:p>
+            <a:pPr algn="ctr"/>
+            <a:endParaRPr lang="zh-CN" altLang="en-US" dirty="0"/>
+          </a:p>
+        </p:txBody>
+      </p:sp>
+      <p:graphicFrame>
+        <p:nvGraphicFramePr>
+          <p:cNvPr id="338" name="对象 337"/>
+          <p:cNvGraphicFramePr>
+            <a:graphicFrameLocks noChangeAspect="1"/>
+          </p:cNvGraphicFramePr>
+          <p:nvPr>
+            <p:extLst>
+              <p:ext uri="{D42A27DB-BD31-4B8C-83A1-F6EECF244321}">
+                <p14:modId xmlns:p14="http://schemas.microsoft.com/office/powerpoint/2010/main" val="1484505630"/>
+              </p:ext>
+            </p:extLst>
+          </p:nvPr>
+        </p:nvGraphicFramePr>
+        <p:xfrm>
+          <a:off x="4168123" y="4624225"/>
+          <a:ext cx="288925" cy="303212"/>
+        </p:xfrm>
+        <a:graphic>
+          <a:graphicData uri="http://schemas.openxmlformats.org/presentationml/2006/ole">
+            <mc:AlternateContent xmlns:mc="http://schemas.openxmlformats.org/markup-compatibility/2006">
+              <mc:Choice xmlns:v="urn:schemas-microsoft-com:vml" Requires="v">
+                <p:oleObj spid="_x0000_s7311" name="AxMath" r:id="rId13" imgW="218880" imgH="230400" progId="Equation.AxMath">
+                  <p:embed/>
+                </p:oleObj>
+              </mc:Choice>
+              <mc:Fallback>
+                <p:oleObj name="AxMath" r:id="rId13" imgW="218880" imgH="230400" progId="Equation.AxMath">
+                  <p:embed/>
+                  <p:pic>
+                    <p:nvPicPr>
+                      <p:cNvPr id="241" name="对象 240"/>
+                      <p:cNvPicPr/>
+                      <p:nvPr/>
+                    </p:nvPicPr>
+                    <p:blipFill>
+                      <a:blip r:embed="rId14"/>
+                      <a:stretch>
+                        <a:fillRect/>
+                      </a:stretch>
+                    </p:blipFill>
+                    <p:spPr>
+                      <a:xfrm>
+                        <a:off x="4168123" y="4624225"/>
+                        <a:ext cx="288925" cy="303212"/>
+                      </a:xfrm>
+                      <a:prstGeom prst="rect">
+                        <a:avLst/>
+                      </a:prstGeom>
+                    </p:spPr>
+                  </p:pic>
+                </p:oleObj>
+              </mc:Fallback>
+            </mc:AlternateContent>
+          </a:graphicData>
+        </a:graphic>
+      </p:graphicFrame>
+      <p:graphicFrame>
+        <p:nvGraphicFramePr>
+          <p:cNvPr id="339" name="对象 338"/>
+          <p:cNvGraphicFramePr>
+            <a:graphicFrameLocks noChangeAspect="1"/>
+          </p:cNvGraphicFramePr>
+          <p:nvPr>
+            <p:extLst>
+              <p:ext uri="{D42A27DB-BD31-4B8C-83A1-F6EECF244321}">
+                <p14:modId xmlns:p14="http://schemas.microsoft.com/office/powerpoint/2010/main" val="3097661719"/>
+              </p:ext>
+            </p:extLst>
+          </p:nvPr>
+        </p:nvGraphicFramePr>
+        <p:xfrm>
+          <a:off x="5537370" y="4617341"/>
+          <a:ext cx="322263" cy="330200"/>
+        </p:xfrm>
+        <a:graphic>
+          <a:graphicData uri="http://schemas.openxmlformats.org/presentationml/2006/ole">
+            <mc:AlternateContent xmlns:mc="http://schemas.openxmlformats.org/markup-compatibility/2006">
+              <mc:Choice xmlns:v="urn:schemas-microsoft-com:vml" Requires="v">
+                <p:oleObj spid="_x0000_s7312" name="AxMath" r:id="rId15" imgW="226080" imgH="230400" progId="Equation.AxMath">
+                  <p:embed/>
+                </p:oleObj>
+              </mc:Choice>
+              <mc:Fallback>
+                <p:oleObj name="AxMath" r:id="rId15" imgW="226080" imgH="230400" progId="Equation.AxMath">
+                  <p:embed/>
+                  <p:pic>
+                    <p:nvPicPr>
+                      <p:cNvPr id="242" name="对象 241"/>
+                      <p:cNvPicPr/>
+                      <p:nvPr/>
+                    </p:nvPicPr>
+                    <p:blipFill>
+                      <a:blip r:embed="rId16"/>
+                      <a:stretch>
+                        <a:fillRect/>
+                      </a:stretch>
+                    </p:blipFill>
+                    <p:spPr>
+                      <a:xfrm>
+                        <a:off x="5537370" y="4617341"/>
+                        <a:ext cx="322263" cy="330200"/>
+                      </a:xfrm>
+                      <a:prstGeom prst="rect">
+                        <a:avLst/>
+                      </a:prstGeom>
+                    </p:spPr>
+                  </p:pic>
+                </p:oleObj>
+              </mc:Fallback>
+            </mc:AlternateContent>
+          </a:graphicData>
+        </a:graphic>
+      </p:graphicFrame>
+      <p:graphicFrame>
+        <p:nvGraphicFramePr>
+          <p:cNvPr id="340" name="对象 339"/>
+          <p:cNvGraphicFramePr>
+            <a:graphicFrameLocks noChangeAspect="1"/>
+          </p:cNvGraphicFramePr>
+          <p:nvPr>
+            <p:extLst>
+              <p:ext uri="{D42A27DB-BD31-4B8C-83A1-F6EECF244321}">
+                <p14:modId xmlns:p14="http://schemas.microsoft.com/office/powerpoint/2010/main" val="3572241621"/>
+              </p:ext>
+            </p:extLst>
+          </p:nvPr>
+        </p:nvGraphicFramePr>
+        <p:xfrm>
+          <a:off x="6927876" y="4614015"/>
+          <a:ext cx="325438" cy="330200"/>
+        </p:xfrm>
+        <a:graphic>
+          <a:graphicData uri="http://schemas.openxmlformats.org/presentationml/2006/ole">
+            <mc:AlternateContent xmlns:mc="http://schemas.openxmlformats.org/markup-compatibility/2006">
+              <mc:Choice xmlns:v="urn:schemas-microsoft-com:vml" Requires="v">
+                <p:oleObj spid="_x0000_s7313" name="AxMath" r:id="rId17" imgW="227520" imgH="230400" progId="Equation.AxMath">
+                  <p:embed/>
+                </p:oleObj>
+              </mc:Choice>
+              <mc:Fallback>
+                <p:oleObj name="AxMath" r:id="rId17" imgW="227520" imgH="230400" progId="Equation.AxMath">
+                  <p:embed/>
+                  <p:pic>
+                    <p:nvPicPr>
+                      <p:cNvPr id="243" name="对象 242"/>
+                      <p:cNvPicPr/>
+                      <p:nvPr/>
+                    </p:nvPicPr>
+                    <p:blipFill>
+                      <a:blip r:embed="rId18"/>
+                      <a:stretch>
+                        <a:fillRect/>
+                      </a:stretch>
+                    </p:blipFill>
+                    <p:spPr>
+                      <a:xfrm>
+                        <a:off x="6927876" y="4614015"/>
+                        <a:ext cx="325438" cy="330200"/>
+                      </a:xfrm>
+                      <a:prstGeom prst="rect">
+                        <a:avLst/>
+                      </a:prstGeom>
+                    </p:spPr>
+                  </p:pic>
+                </p:oleObj>
+              </mc:Fallback>
+            </mc:AlternateContent>
+          </a:graphicData>
+        </a:graphic>
+      </p:graphicFrame>
+      <p:graphicFrame>
+        <p:nvGraphicFramePr>
+          <p:cNvPr id="341" name="对象 340"/>
+          <p:cNvGraphicFramePr>
+            <a:graphicFrameLocks noChangeAspect="1"/>
+          </p:cNvGraphicFramePr>
+          <p:nvPr>
+            <p:extLst>
+              <p:ext uri="{D42A27DB-BD31-4B8C-83A1-F6EECF244321}">
+                <p14:modId xmlns:p14="http://schemas.microsoft.com/office/powerpoint/2010/main" val="190595886"/>
+              </p:ext>
+            </p:extLst>
+          </p:nvPr>
+        </p:nvGraphicFramePr>
+        <p:xfrm>
+          <a:off x="8926875" y="4615587"/>
+          <a:ext cx="344487" cy="327025"/>
+        </p:xfrm>
+        <a:graphic>
+          <a:graphicData uri="http://schemas.openxmlformats.org/presentationml/2006/ole">
+            <mc:AlternateContent xmlns:mc="http://schemas.openxmlformats.org/markup-compatibility/2006">
+              <mc:Choice xmlns:v="urn:schemas-microsoft-com:vml" Requires="v">
+                <p:oleObj spid="_x0000_s7314" name="AxMath" r:id="rId21" imgW="239760" imgH="228960" progId="Equation.AxMath">
+                  <p:embed/>
+                </p:oleObj>
+              </mc:Choice>
+              <mc:Fallback>
+                <p:oleObj name="AxMath" r:id="rId21" imgW="239760" imgH="228960" progId="Equation.AxMath">
+                  <p:embed/>
+                  <p:pic>
+                    <p:nvPicPr>
+                      <p:cNvPr id="303" name="对象 302"/>
+                      <p:cNvPicPr/>
+                      <p:nvPr/>
+                    </p:nvPicPr>
+                    <p:blipFill>
+                      <a:blip r:embed="rId20"/>
+                      <a:stretch>
+                        <a:fillRect/>
+                      </a:stretch>
+                    </p:blipFill>
+                    <p:spPr>
+                      <a:xfrm>
+                        <a:off x="8926875" y="4615587"/>
+                        <a:ext cx="344487" cy="327025"/>
+                      </a:xfrm>
+                      <a:prstGeom prst="rect">
+                        <a:avLst/>
+                      </a:prstGeom>
+                    </p:spPr>
+                  </p:pic>
+                </p:oleObj>
+              </mc:Fallback>
+            </mc:AlternateContent>
+          </a:graphicData>
+        </a:graphic>
+      </p:graphicFrame>
+      <p:sp>
+        <p:nvSpPr>
+          <p:cNvPr id="2" name="虚尾箭头 1"/>
+          <p:cNvSpPr/>
+          <p:nvPr/>
+        </p:nvSpPr>
+        <p:spPr>
+          <a:xfrm rot="5400000">
+            <a:off x="6181265" y="3810415"/>
+            <a:ext cx="414751" cy="409575"/>
+          </a:xfrm>
+          <a:prstGeom prst="stripedRightArrow">
+            <a:avLst>
+              <a:gd name="adj1" fmla="val 50000"/>
+              <a:gd name="adj2" fmla="val 50000"/>
+            </a:avLst>
+          </a:prstGeom>
+          <a:solidFill>
+            <a:schemeClr val="accent5">
+              <a:lumMod val="20000"/>
+              <a:lumOff val="80000"/>
+            </a:schemeClr>
+          </a:solidFill>
+          <a:ln w="19050">
+            <a:solidFill>
+              <a:schemeClr val="accent5">
+                <a:lumMod val="75000"/>
+              </a:schemeClr>
+            </a:solidFill>
+          </a:ln>
+        </p:spPr>
+        <p:style>
+          <a:lnRef idx="2">
+            <a:schemeClr val="accent1">
+              <a:shade val="50000"/>
+            </a:schemeClr>
+          </a:lnRef>
+          <a:fillRef idx="1">
+            <a:schemeClr val="accent1"/>
+          </a:fillRef>
+          <a:effectRef idx="0">
+            <a:schemeClr val="accent1"/>
+          </a:effectRef>
+          <a:fontRef idx="minor">
+            <a:schemeClr val="lt1"/>
+          </a:fontRef>
+        </p:style>
+        <p:txBody>
+          <a:bodyPr rtlCol="0" anchor="ctr"/>
+          <a:lstStyle/>
+          <a:p>
+            <a:pPr algn="ctr"/>
+            <a:endParaRPr lang="zh-CN" altLang="en-US"/>
+          </a:p>
+        </p:txBody>
+      </p:sp>
+      <p:graphicFrame>
+        <p:nvGraphicFramePr>
+          <p:cNvPr id="342" name="对象 341"/>
+          <p:cNvGraphicFramePr>
+            <a:graphicFrameLocks noChangeAspect="1"/>
+          </p:cNvGraphicFramePr>
+          <p:nvPr>
+            <p:extLst>
+              <p:ext uri="{D42A27DB-BD31-4B8C-83A1-F6EECF244321}">
+                <p14:modId xmlns:p14="http://schemas.microsoft.com/office/powerpoint/2010/main" val="2285051017"/>
+              </p:ext>
+            </p:extLst>
+          </p:nvPr>
+        </p:nvGraphicFramePr>
+        <p:xfrm>
+          <a:off x="4157733" y="5226903"/>
+          <a:ext cx="288925" cy="303212"/>
+        </p:xfrm>
+        <a:graphic>
+          <a:graphicData uri="http://schemas.openxmlformats.org/presentationml/2006/ole">
+            <mc:AlternateContent xmlns:mc="http://schemas.openxmlformats.org/markup-compatibility/2006">
+              <mc:Choice xmlns:v="urn:schemas-microsoft-com:vml" Requires="v">
+                <p:oleObj spid="_x0000_s7315" name="AxMath" r:id="rId13" imgW="218880" imgH="230400" progId="Equation.AxMath">
+                  <p:embed/>
+                </p:oleObj>
+              </mc:Choice>
+              <mc:Fallback>
+                <p:oleObj name="AxMath" r:id="rId13" imgW="218880" imgH="230400" progId="Equation.AxMath">
+                  <p:embed/>
+                  <p:pic>
+                    <p:nvPicPr>
+                      <p:cNvPr id="338" name="对象 337"/>
+                      <p:cNvPicPr/>
+                      <p:nvPr/>
+                    </p:nvPicPr>
+                    <p:blipFill>
+                      <a:blip r:embed="rId14"/>
+                      <a:stretch>
+                        <a:fillRect/>
+                      </a:stretch>
+                    </p:blipFill>
+                    <p:spPr>
+                      <a:xfrm>
+                        <a:off x="4157733" y="5226903"/>
+                        <a:ext cx="288925" cy="303212"/>
+                      </a:xfrm>
+                      <a:prstGeom prst="rect">
+                        <a:avLst/>
+                      </a:prstGeom>
+                    </p:spPr>
+                  </p:pic>
+                </p:oleObj>
+              </mc:Fallback>
+            </mc:AlternateContent>
+          </a:graphicData>
+        </a:graphic>
+      </p:graphicFrame>
+      <p:graphicFrame>
+        <p:nvGraphicFramePr>
+          <p:cNvPr id="343" name="对象 342"/>
+          <p:cNvGraphicFramePr>
+            <a:graphicFrameLocks noChangeAspect="1"/>
+          </p:cNvGraphicFramePr>
+          <p:nvPr>
+            <p:extLst>
+              <p:ext uri="{D42A27DB-BD31-4B8C-83A1-F6EECF244321}">
+                <p14:modId xmlns:p14="http://schemas.microsoft.com/office/powerpoint/2010/main" val="1820399672"/>
+              </p:ext>
+            </p:extLst>
+          </p:nvPr>
+        </p:nvGraphicFramePr>
+        <p:xfrm>
+          <a:off x="4157081" y="5831404"/>
+          <a:ext cx="288925" cy="303212"/>
+        </p:xfrm>
+        <a:graphic>
+          <a:graphicData uri="http://schemas.openxmlformats.org/presentationml/2006/ole">
+            <mc:AlternateContent xmlns:mc="http://schemas.openxmlformats.org/markup-compatibility/2006">
+              <mc:Choice xmlns:v="urn:schemas-microsoft-com:vml" Requires="v">
+                <p:oleObj spid="_x0000_s7316" name="AxMath" r:id="rId13" imgW="218880" imgH="230400" progId="Equation.AxMath">
+                  <p:embed/>
+                </p:oleObj>
+              </mc:Choice>
+              <mc:Fallback>
+                <p:oleObj name="AxMath" r:id="rId13" imgW="218880" imgH="230400" progId="Equation.AxMath">
+                  <p:embed/>
+                  <p:pic>
+                    <p:nvPicPr>
+                      <p:cNvPr id="338" name="对象 337"/>
+                      <p:cNvPicPr/>
+                      <p:nvPr/>
+                    </p:nvPicPr>
+                    <p:blipFill>
+                      <a:blip r:embed="rId14"/>
+                      <a:stretch>
+                        <a:fillRect/>
+                      </a:stretch>
+                    </p:blipFill>
+                    <p:spPr>
+                      <a:xfrm>
+                        <a:off x="4157081" y="5831404"/>
+                        <a:ext cx="288925" cy="303212"/>
+                      </a:xfrm>
+                      <a:prstGeom prst="rect">
+                        <a:avLst/>
+                      </a:prstGeom>
+                    </p:spPr>
+                  </p:pic>
+                </p:oleObj>
+              </mc:Fallback>
+            </mc:AlternateContent>
+          </a:graphicData>
+        </a:graphic>
+      </p:graphicFrame>
+      <p:graphicFrame>
+        <p:nvGraphicFramePr>
+          <p:cNvPr id="344" name="对象 343"/>
+          <p:cNvGraphicFramePr>
+            <a:graphicFrameLocks noChangeAspect="1"/>
+          </p:cNvGraphicFramePr>
+          <p:nvPr>
+            <p:extLst>
+              <p:ext uri="{D42A27DB-BD31-4B8C-83A1-F6EECF244321}">
+                <p14:modId xmlns:p14="http://schemas.microsoft.com/office/powerpoint/2010/main" val="2292629141"/>
+              </p:ext>
+            </p:extLst>
+          </p:nvPr>
+        </p:nvGraphicFramePr>
+        <p:xfrm>
+          <a:off x="5528727" y="5219901"/>
+          <a:ext cx="322263" cy="330200"/>
+        </p:xfrm>
+        <a:graphic>
+          <a:graphicData uri="http://schemas.openxmlformats.org/presentationml/2006/ole">
+            <mc:AlternateContent xmlns:mc="http://schemas.openxmlformats.org/markup-compatibility/2006">
+              <mc:Choice xmlns:v="urn:schemas-microsoft-com:vml" Requires="v">
+                <p:oleObj spid="_x0000_s7317" name="AxMath" r:id="rId15" imgW="226080" imgH="230400" progId="Equation.AxMath">
+                  <p:embed/>
+                </p:oleObj>
+              </mc:Choice>
+              <mc:Fallback>
+                <p:oleObj name="AxMath" r:id="rId15" imgW="226080" imgH="230400" progId="Equation.AxMath">
+                  <p:embed/>
+                  <p:pic>
+                    <p:nvPicPr>
+                      <p:cNvPr id="339" name="对象 338"/>
+                      <p:cNvPicPr/>
+                      <p:nvPr/>
+                    </p:nvPicPr>
+                    <p:blipFill>
+                      <a:blip r:embed="rId16"/>
+                      <a:stretch>
+                        <a:fillRect/>
+                      </a:stretch>
+                    </p:blipFill>
+                    <p:spPr>
+                      <a:xfrm>
+                        <a:off x="5528727" y="5219901"/>
+                        <a:ext cx="322263" cy="330200"/>
+                      </a:xfrm>
+                      <a:prstGeom prst="rect">
+                        <a:avLst/>
+                      </a:prstGeom>
+                    </p:spPr>
+                  </p:pic>
+                </p:oleObj>
+              </mc:Fallback>
+            </mc:AlternateContent>
+          </a:graphicData>
+        </a:graphic>
+      </p:graphicFrame>
+      <p:graphicFrame>
+        <p:nvGraphicFramePr>
+          <p:cNvPr id="345" name="对象 344"/>
+          <p:cNvGraphicFramePr>
+            <a:graphicFrameLocks noChangeAspect="1"/>
+          </p:cNvGraphicFramePr>
+          <p:nvPr>
+            <p:extLst>
+              <p:ext uri="{D42A27DB-BD31-4B8C-83A1-F6EECF244321}">
+                <p14:modId xmlns:p14="http://schemas.microsoft.com/office/powerpoint/2010/main" val="3443410202"/>
+              </p:ext>
+            </p:extLst>
+          </p:nvPr>
+        </p:nvGraphicFramePr>
+        <p:xfrm>
+          <a:off x="6919588" y="5221370"/>
+          <a:ext cx="325438" cy="330200"/>
+        </p:xfrm>
+        <a:graphic>
+          <a:graphicData uri="http://schemas.openxmlformats.org/presentationml/2006/ole">
+            <mc:AlternateContent xmlns:mc="http://schemas.openxmlformats.org/markup-compatibility/2006">
+              <mc:Choice xmlns:v="urn:schemas-microsoft-com:vml" Requires="v">
+                <p:oleObj spid="_x0000_s7318" name="AxMath" r:id="rId17" imgW="227520" imgH="230400" progId="Equation.AxMath">
+                  <p:embed/>
+                </p:oleObj>
+              </mc:Choice>
+              <mc:Fallback>
+                <p:oleObj name="AxMath" r:id="rId17" imgW="227520" imgH="230400" progId="Equation.AxMath">
+                  <p:embed/>
+                  <p:pic>
+                    <p:nvPicPr>
+                      <p:cNvPr id="340" name="对象 339"/>
+                      <p:cNvPicPr/>
+                      <p:nvPr/>
+                    </p:nvPicPr>
+                    <p:blipFill>
+                      <a:blip r:embed="rId18"/>
+                      <a:stretch>
+                        <a:fillRect/>
+                      </a:stretch>
+                    </p:blipFill>
+                    <p:spPr>
+                      <a:xfrm>
+                        <a:off x="6919588" y="5221370"/>
+                        <a:ext cx="325438" cy="330200"/>
+                      </a:xfrm>
+                      <a:prstGeom prst="rect">
+                        <a:avLst/>
+                      </a:prstGeom>
+                    </p:spPr>
+                  </p:pic>
+                </p:oleObj>
+              </mc:Fallback>
+            </mc:AlternateContent>
+          </a:graphicData>
+        </a:graphic>
+      </p:graphicFrame>
+      <p:graphicFrame>
+        <p:nvGraphicFramePr>
+          <p:cNvPr id="349" name="对象 348"/>
+          <p:cNvGraphicFramePr>
+            <a:graphicFrameLocks noChangeAspect="1"/>
+          </p:cNvGraphicFramePr>
+          <p:nvPr>
+            <p:extLst>
+              <p:ext uri="{D42A27DB-BD31-4B8C-83A1-F6EECF244321}">
+                <p14:modId xmlns:p14="http://schemas.microsoft.com/office/powerpoint/2010/main" val="1786668308"/>
+              </p:ext>
+            </p:extLst>
+          </p:nvPr>
+        </p:nvGraphicFramePr>
+        <p:xfrm>
+          <a:off x="5543357" y="5831404"/>
+          <a:ext cx="322263" cy="330200"/>
+        </p:xfrm>
+        <a:graphic>
+          <a:graphicData uri="http://schemas.openxmlformats.org/presentationml/2006/ole">
+            <mc:AlternateContent xmlns:mc="http://schemas.openxmlformats.org/markup-compatibility/2006">
+              <mc:Choice xmlns:v="urn:schemas-microsoft-com:vml" Requires="v">
+                <p:oleObj spid="_x0000_s7319" name="AxMath" r:id="rId15" imgW="226080" imgH="230400" progId="Equation.AxMath">
+                  <p:embed/>
+                </p:oleObj>
+              </mc:Choice>
+              <mc:Fallback>
+                <p:oleObj name="AxMath" r:id="rId15" imgW="226080" imgH="230400" progId="Equation.AxMath">
+                  <p:embed/>
+                  <p:pic>
+                    <p:nvPicPr>
+                      <p:cNvPr id="344" name="对象 343"/>
+                      <p:cNvPicPr/>
+                      <p:nvPr/>
+                    </p:nvPicPr>
+                    <p:blipFill>
+                      <a:blip r:embed="rId16"/>
+                      <a:stretch>
+                        <a:fillRect/>
+                      </a:stretch>
+                    </p:blipFill>
+                    <p:spPr>
+                      <a:xfrm>
+                        <a:off x="5543357" y="5831404"/>
+                        <a:ext cx="322263" cy="330200"/>
+                      </a:xfrm>
+                      <a:prstGeom prst="rect">
+                        <a:avLst/>
+                      </a:prstGeom>
+                    </p:spPr>
+                  </p:pic>
+                </p:oleObj>
+              </mc:Fallback>
+            </mc:AlternateContent>
+          </a:graphicData>
+        </a:graphic>
+      </p:graphicFrame>
+      <p:cxnSp>
+        <p:nvCxnSpPr>
+          <p:cNvPr id="353" name="直接箭头连接符 352"/>
+          <p:cNvCxnSpPr/>
+          <p:nvPr/>
+        </p:nvCxnSpPr>
+        <p:spPr>
+          <a:xfrm flipH="1">
+            <a:off x="6141308" y="5480799"/>
+            <a:ext cx="1" cy="432261"/>
+          </a:xfrm>
+          <a:prstGeom prst="straightConnector1">
+            <a:avLst/>
+          </a:prstGeom>
+          <a:ln w="28575">
+            <a:solidFill>
+              <a:schemeClr val="tx1"/>
+            </a:solidFill>
+            <a:tailEnd type="triangle"/>
+          </a:ln>
+        </p:spPr>
+        <p:style>
+          <a:lnRef idx="1">
+            <a:schemeClr val="accent1"/>
+          </a:lnRef>
+          <a:fillRef idx="0">
+            <a:schemeClr val="accent1"/>
+          </a:fillRef>
+          <a:effectRef idx="0">
+            <a:schemeClr val="accent1"/>
+          </a:effectRef>
+          <a:fontRef idx="minor">
+            <a:schemeClr val="tx1"/>
+          </a:fontRef>
+        </p:style>
+      </p:cxnSp>
+      <p:cxnSp>
+        <p:nvCxnSpPr>
+          <p:cNvPr id="354" name="直接箭头连接符 353"/>
+          <p:cNvCxnSpPr/>
+          <p:nvPr/>
+        </p:nvCxnSpPr>
+        <p:spPr>
+          <a:xfrm flipH="1">
+            <a:off x="4766521" y="6084614"/>
+            <a:ext cx="1" cy="432261"/>
+          </a:xfrm>
+          <a:prstGeom prst="straightConnector1">
+            <a:avLst/>
+          </a:prstGeom>
+          <a:ln w="28575">
+            <a:solidFill>
+              <a:schemeClr val="tx1"/>
+            </a:solidFill>
+            <a:tailEnd type="triangle"/>
+          </a:ln>
+        </p:spPr>
+        <p:style>
+          <a:lnRef idx="1">
+            <a:schemeClr val="accent1"/>
+          </a:lnRef>
+          <a:fillRef idx="0">
+            <a:schemeClr val="accent1"/>
+          </a:fillRef>
+          <a:effectRef idx="0">
+            <a:schemeClr val="accent1"/>
+          </a:effectRef>
+          <a:fontRef idx="minor">
+            <a:schemeClr val="tx1"/>
+          </a:fontRef>
+        </p:style>
+      </p:cxnSp>
+      <p:cxnSp>
+        <p:nvCxnSpPr>
+          <p:cNvPr id="355" name="直接箭头连接符 354"/>
+          <p:cNvCxnSpPr/>
+          <p:nvPr/>
+        </p:nvCxnSpPr>
+        <p:spPr>
+          <a:xfrm flipH="1">
+            <a:off x="7576995" y="4902098"/>
+            <a:ext cx="1" cy="432261"/>
+          </a:xfrm>
+          <a:prstGeom prst="straightConnector1">
+            <a:avLst/>
+          </a:prstGeom>
+          <a:ln w="28575">
+            <a:solidFill>
+              <a:schemeClr val="tx1"/>
+            </a:solidFill>
+            <a:tailEnd type="triangle"/>
+          </a:ln>
+        </p:spPr>
+        <p:style>
+          <a:lnRef idx="1">
+            <a:schemeClr val="accent1"/>
+          </a:lnRef>
+          <a:fillRef idx="0">
+            <a:schemeClr val="accent1"/>
+          </a:fillRef>
+          <a:effectRef idx="0">
+            <a:schemeClr val="accent1"/>
+          </a:effectRef>
+          <a:fontRef idx="minor">
+            <a:schemeClr val="tx1"/>
+          </a:fontRef>
+        </p:style>
+      </p:cxnSp>
+      <p:sp>
+        <p:nvSpPr>
+          <p:cNvPr id="356" name="圆角矩形 355"/>
+          <p:cNvSpPr/>
+          <p:nvPr/>
+        </p:nvSpPr>
+        <p:spPr>
+          <a:xfrm>
+            <a:off x="2401495" y="8893653"/>
+            <a:ext cx="1126057" cy="432262"/>
+          </a:xfrm>
+          <a:prstGeom prst="roundRect">
+            <a:avLst/>
+          </a:prstGeom>
+          <a:solidFill>
+            <a:srgbClr val="BDD7EE"/>
+          </a:solidFill>
+          <a:ln w="28575">
+            <a:solidFill>
+              <a:schemeClr val="tx1"/>
+            </a:solidFill>
+          </a:ln>
+        </p:spPr>
+        <p:style>
+          <a:lnRef idx="2">
+            <a:schemeClr val="accent1">
+              <a:shade val="50000"/>
+            </a:schemeClr>
+          </a:lnRef>
+          <a:fillRef idx="1">
+            <a:schemeClr val="accent1"/>
+          </a:fillRef>
+          <a:effectRef idx="0">
+            <a:schemeClr val="accent1"/>
+          </a:effectRef>
+          <a:fontRef idx="minor">
+            <a:schemeClr val="lt1"/>
+          </a:fontRef>
+        </p:style>
+        <p:txBody>
+          <a:bodyPr rtlCol="0" anchor="ctr"/>
+          <a:lstStyle/>
+          <a:p>
+            <a:pPr algn="ctr"/>
+            <a:r>
+              <a:rPr lang="en-US" altLang="zh-CN" dirty="0" smtClean="0">
+                <a:solidFill>
+                  <a:schemeClr val="tx1"/>
+                </a:solidFill>
+                <a:latin typeface="Times New Roman" panose="02020603050405020304" pitchFamily="18" charset="0"/>
+                <a:cs typeface="Times New Roman" panose="02020603050405020304" pitchFamily="18" charset="0"/>
+              </a:rPr>
+              <a:t>GPU 0</a:t>
+            </a:r>
+            <a:endParaRPr lang="zh-CN" altLang="en-US" dirty="0">
+              <a:solidFill>
+                <a:schemeClr val="tx1"/>
+              </a:solidFill>
+              <a:latin typeface="Times New Roman" panose="02020603050405020304" pitchFamily="18" charset="0"/>
+              <a:cs typeface="Times New Roman" panose="02020603050405020304" pitchFamily="18" charset="0"/>
+            </a:endParaRPr>
+          </a:p>
+        </p:txBody>
+      </p:sp>
+      <p:sp>
+        <p:nvSpPr>
+          <p:cNvPr id="357" name="矩形 356"/>
+          <p:cNvSpPr/>
+          <p:nvPr/>
+        </p:nvSpPr>
+        <p:spPr>
+          <a:xfrm>
+            <a:off x="3685494" y="8893653"/>
+            <a:ext cx="1230283" cy="432262"/>
+          </a:xfrm>
+          <a:prstGeom prst="rect">
+            <a:avLst/>
+          </a:prstGeom>
+          <a:solidFill>
+            <a:srgbClr val="E2F0D9"/>
+          </a:solidFill>
+          <a:ln w="28575">
+            <a:solidFill>
+              <a:schemeClr val="tx1"/>
+            </a:solidFill>
+          </a:ln>
+        </p:spPr>
+        <p:style>
+          <a:lnRef idx="2">
+            <a:schemeClr val="accent1">
+              <a:shade val="50000"/>
+            </a:schemeClr>
+          </a:lnRef>
+          <a:fillRef idx="1">
+            <a:schemeClr val="accent1"/>
+          </a:fillRef>
+          <a:effectRef idx="0">
+            <a:schemeClr val="accent1"/>
+          </a:effectRef>
+          <a:fontRef idx="minor">
+            <a:schemeClr val="lt1"/>
+          </a:fontRef>
+        </p:style>
+        <p:txBody>
+          <a:bodyPr rtlCol="0" anchor="ctr"/>
+          <a:lstStyle/>
+          <a:p>
+            <a:pPr algn="ctr"/>
+            <a:endParaRPr lang="zh-CN" altLang="en-US" dirty="0"/>
+          </a:p>
+        </p:txBody>
+      </p:sp>
+      <p:sp>
+        <p:nvSpPr>
+          <p:cNvPr id="358" name="矩形 357"/>
+          <p:cNvSpPr/>
+          <p:nvPr/>
+        </p:nvSpPr>
+        <p:spPr>
+          <a:xfrm>
+            <a:off x="5073719" y="8893653"/>
+            <a:ext cx="1230283" cy="432262"/>
+          </a:xfrm>
+          <a:prstGeom prst="rect">
+            <a:avLst/>
+          </a:prstGeom>
+          <a:solidFill>
+            <a:srgbClr val="E2F0D9"/>
+          </a:solidFill>
+          <a:ln w="28575">
+            <a:solidFill>
+              <a:schemeClr val="tx1"/>
+            </a:solidFill>
+          </a:ln>
+        </p:spPr>
+        <p:style>
+          <a:lnRef idx="2">
+            <a:schemeClr val="accent1">
+              <a:shade val="50000"/>
+            </a:schemeClr>
+          </a:lnRef>
+          <a:fillRef idx="1">
+            <a:schemeClr val="accent1"/>
+          </a:fillRef>
+          <a:effectRef idx="0">
+            <a:schemeClr val="accent1"/>
+          </a:effectRef>
+          <a:fontRef idx="minor">
+            <a:schemeClr val="lt1"/>
+          </a:fontRef>
+        </p:style>
+        <p:txBody>
+          <a:bodyPr rtlCol="0" anchor="ctr"/>
+          <a:lstStyle/>
+          <a:p>
+            <a:pPr algn="ctr"/>
+            <a:endParaRPr lang="zh-CN" altLang="en-US" dirty="0"/>
+          </a:p>
+        </p:txBody>
+      </p:sp>
+      <p:graphicFrame>
+        <p:nvGraphicFramePr>
+          <p:cNvPr id="359" name="对象 358"/>
+          <p:cNvGraphicFramePr>
+            <a:graphicFrameLocks noChangeAspect="1"/>
+          </p:cNvGraphicFramePr>
+          <p:nvPr>
+            <p:extLst>
+              <p:ext uri="{D42A27DB-BD31-4B8C-83A1-F6EECF244321}">
+                <p14:modId xmlns:p14="http://schemas.microsoft.com/office/powerpoint/2010/main" val="2457795869"/>
+              </p:ext>
+            </p:extLst>
+          </p:nvPr>
+        </p:nvGraphicFramePr>
+        <p:xfrm>
+          <a:off x="7860560" y="8745531"/>
+          <a:ext cx="463435" cy="728505"/>
+        </p:xfrm>
+        <a:graphic>
+          <a:graphicData uri="http://schemas.openxmlformats.org/presentationml/2006/ole">
+            <mc:AlternateContent xmlns:mc="http://schemas.openxmlformats.org/markup-compatibility/2006">
+              <mc:Choice xmlns:v="urn:schemas-microsoft-com:vml" Requires="v">
+                <p:oleObj spid="_x0000_s7320" name="AxMath" r:id="rId3" imgW="151920" imgH="226800" progId="Equation.AxMath">
+                  <p:embed/>
+                </p:oleObj>
+              </mc:Choice>
+              <mc:Fallback>
+                <p:oleObj name="AxMath" r:id="rId3" imgW="151920" imgH="226800" progId="Equation.AxMath">
+                  <p:embed/>
+                  <p:pic>
+                    <p:nvPicPr>
+                      <p:cNvPr id="308" name="对象 307"/>
+                      <p:cNvPicPr/>
+                      <p:nvPr/>
+                    </p:nvPicPr>
+                    <p:blipFill>
+                      <a:blip r:embed="rId4"/>
+                      <a:stretch>
+                        <a:fillRect/>
+                      </a:stretch>
+                    </p:blipFill>
+                    <p:spPr>
+                      <a:xfrm>
+                        <a:off x="7860560" y="8745531"/>
+                        <a:ext cx="463435" cy="728505"/>
+                      </a:xfrm>
+                      <a:prstGeom prst="rect">
+                        <a:avLst/>
+                      </a:prstGeom>
+                    </p:spPr>
+                  </p:pic>
+                </p:oleObj>
+              </mc:Fallback>
+            </mc:AlternateContent>
+          </a:graphicData>
+        </a:graphic>
+      </p:graphicFrame>
+      <p:sp>
+        <p:nvSpPr>
+          <p:cNvPr id="360" name="圆角矩形 359"/>
+          <p:cNvSpPr/>
+          <p:nvPr/>
+        </p:nvSpPr>
+        <p:spPr>
+          <a:xfrm>
+            <a:off x="2388593" y="9505501"/>
+            <a:ext cx="1138959" cy="432262"/>
+          </a:xfrm>
+          <a:prstGeom prst="roundRect">
+            <a:avLst/>
+          </a:prstGeom>
+          <a:solidFill>
+            <a:srgbClr val="BDD7EE"/>
+          </a:solidFill>
+          <a:ln w="28575">
+            <a:solidFill>
+              <a:schemeClr val="tx1"/>
+            </a:solidFill>
+          </a:ln>
+        </p:spPr>
+        <p:style>
+          <a:lnRef idx="2">
+            <a:schemeClr val="accent1">
+              <a:shade val="50000"/>
+            </a:schemeClr>
+          </a:lnRef>
+          <a:fillRef idx="1">
+            <a:schemeClr val="accent1"/>
+          </a:fillRef>
+          <a:effectRef idx="0">
+            <a:schemeClr val="accent1"/>
+          </a:effectRef>
+          <a:fontRef idx="minor">
+            <a:schemeClr val="lt1"/>
+          </a:fontRef>
+        </p:style>
+        <p:txBody>
+          <a:bodyPr rtlCol="0" anchor="ctr"/>
+          <a:lstStyle/>
+          <a:p>
+            <a:pPr algn="ctr"/>
+            <a:r>
+              <a:rPr lang="en-US" altLang="zh-CN" dirty="0">
+                <a:solidFill>
+                  <a:schemeClr val="tx1"/>
+                </a:solidFill>
+                <a:latin typeface="Times New Roman" panose="02020603050405020304" pitchFamily="18" charset="0"/>
+                <a:cs typeface="Times New Roman" panose="02020603050405020304" pitchFamily="18" charset="0"/>
+              </a:rPr>
+              <a:t>GPU </a:t>
+            </a:r>
+            <a:r>
+              <a:rPr lang="en-US" altLang="zh-CN" dirty="0" smtClean="0">
+                <a:solidFill>
+                  <a:schemeClr val="tx1"/>
+                </a:solidFill>
+                <a:latin typeface="Times New Roman" panose="02020603050405020304" pitchFamily="18" charset="0"/>
+                <a:cs typeface="Times New Roman" panose="02020603050405020304" pitchFamily="18" charset="0"/>
+              </a:rPr>
+              <a:t>1</a:t>
+            </a:r>
+            <a:endParaRPr lang="zh-CN" altLang="en-US" dirty="0">
+              <a:solidFill>
+                <a:schemeClr val="tx1"/>
+              </a:solidFill>
+              <a:latin typeface="Times New Roman" panose="02020603050405020304" pitchFamily="18" charset="0"/>
+              <a:cs typeface="Times New Roman" panose="02020603050405020304" pitchFamily="18" charset="0"/>
+            </a:endParaRPr>
+          </a:p>
+        </p:txBody>
+      </p:sp>
+      <p:graphicFrame>
+        <p:nvGraphicFramePr>
+          <p:cNvPr id="361" name="对象 360"/>
+          <p:cNvGraphicFramePr>
+            <a:graphicFrameLocks noChangeAspect="1"/>
+          </p:cNvGraphicFramePr>
+          <p:nvPr>
+            <p:extLst>
+              <p:ext uri="{D42A27DB-BD31-4B8C-83A1-F6EECF244321}">
+                <p14:modId xmlns:p14="http://schemas.microsoft.com/office/powerpoint/2010/main" val="443338014"/>
+              </p:ext>
+            </p:extLst>
+          </p:nvPr>
+        </p:nvGraphicFramePr>
+        <p:xfrm>
+          <a:off x="7860560" y="9357379"/>
+          <a:ext cx="463435" cy="728505"/>
+        </p:xfrm>
+        <a:graphic>
+          <a:graphicData uri="http://schemas.openxmlformats.org/presentationml/2006/ole">
+            <mc:AlternateContent xmlns:mc="http://schemas.openxmlformats.org/markup-compatibility/2006">
+              <mc:Choice xmlns:v="urn:schemas-microsoft-com:vml" Requires="v">
+                <p:oleObj spid="_x0000_s7321" name="AxMath" r:id="rId5" imgW="151920" imgH="226800" progId="Equation.AxMath">
+                  <p:embed/>
+                </p:oleObj>
+              </mc:Choice>
+              <mc:Fallback>
+                <p:oleObj name="AxMath" r:id="rId5" imgW="151920" imgH="226800" progId="Equation.AxMath">
+                  <p:embed/>
+                  <p:pic>
+                    <p:nvPicPr>
+                      <p:cNvPr id="310" name="对象 309"/>
+                      <p:cNvPicPr/>
+                      <p:nvPr/>
+                    </p:nvPicPr>
+                    <p:blipFill>
+                      <a:blip r:embed="rId4"/>
+                      <a:stretch>
+                        <a:fillRect/>
+                      </a:stretch>
+                    </p:blipFill>
+                    <p:spPr>
+                      <a:xfrm>
+                        <a:off x="7860560" y="9357379"/>
+                        <a:ext cx="463435" cy="728505"/>
+                      </a:xfrm>
+                      <a:prstGeom prst="rect">
+                        <a:avLst/>
+                      </a:prstGeom>
+                    </p:spPr>
+                  </p:pic>
+                </p:oleObj>
+              </mc:Fallback>
+            </mc:AlternateContent>
+          </a:graphicData>
+        </a:graphic>
+      </p:graphicFrame>
+      <p:sp>
+        <p:nvSpPr>
+          <p:cNvPr id="362" name="圆角矩形 361"/>
+          <p:cNvSpPr/>
+          <p:nvPr/>
+        </p:nvSpPr>
+        <p:spPr>
+          <a:xfrm>
+            <a:off x="2388593" y="10117348"/>
+            <a:ext cx="1138959" cy="432262"/>
+          </a:xfrm>
+          <a:prstGeom prst="roundRect">
+            <a:avLst/>
+          </a:prstGeom>
+          <a:solidFill>
+            <a:srgbClr val="BDD7EE"/>
+          </a:solidFill>
+          <a:ln w="28575">
+            <a:solidFill>
+              <a:schemeClr val="tx1"/>
+            </a:solidFill>
+          </a:ln>
+        </p:spPr>
+        <p:style>
+          <a:lnRef idx="2">
+            <a:schemeClr val="accent1">
+              <a:shade val="50000"/>
+            </a:schemeClr>
+          </a:lnRef>
+          <a:fillRef idx="1">
+            <a:schemeClr val="accent1"/>
+          </a:fillRef>
+          <a:effectRef idx="0">
+            <a:schemeClr val="accent1"/>
+          </a:effectRef>
+          <a:fontRef idx="minor">
+            <a:schemeClr val="lt1"/>
+          </a:fontRef>
+        </p:style>
+        <p:txBody>
+          <a:bodyPr rtlCol="0" anchor="ctr"/>
+          <a:lstStyle/>
+          <a:p>
+            <a:pPr algn="ctr"/>
+            <a:r>
+              <a:rPr lang="en-US" altLang="zh-CN" dirty="0">
+                <a:solidFill>
+                  <a:schemeClr val="tx1"/>
+                </a:solidFill>
+                <a:latin typeface="Times New Roman" panose="02020603050405020304" pitchFamily="18" charset="0"/>
+                <a:cs typeface="Times New Roman" panose="02020603050405020304" pitchFamily="18" charset="0"/>
+              </a:rPr>
+              <a:t>GPU </a:t>
+            </a:r>
+            <a:r>
+              <a:rPr lang="en-US" altLang="zh-CN" dirty="0" smtClean="0">
+                <a:solidFill>
+                  <a:schemeClr val="tx1"/>
+                </a:solidFill>
+                <a:latin typeface="Times New Roman" panose="02020603050405020304" pitchFamily="18" charset="0"/>
+                <a:cs typeface="Times New Roman" panose="02020603050405020304" pitchFamily="18" charset="0"/>
+              </a:rPr>
+              <a:t>2</a:t>
+            </a:r>
+            <a:endParaRPr lang="zh-CN" altLang="en-US" dirty="0">
+              <a:solidFill>
+                <a:schemeClr val="tx1"/>
+              </a:solidFill>
+              <a:latin typeface="Times New Roman" panose="02020603050405020304" pitchFamily="18" charset="0"/>
+              <a:cs typeface="Times New Roman" panose="02020603050405020304" pitchFamily="18" charset="0"/>
+            </a:endParaRPr>
+          </a:p>
+        </p:txBody>
+      </p:sp>
+      <p:graphicFrame>
+        <p:nvGraphicFramePr>
+          <p:cNvPr id="363" name="对象 362"/>
+          <p:cNvGraphicFramePr>
+            <a:graphicFrameLocks noChangeAspect="1"/>
+          </p:cNvGraphicFramePr>
+          <p:nvPr>
+            <p:extLst>
+              <p:ext uri="{D42A27DB-BD31-4B8C-83A1-F6EECF244321}">
+                <p14:modId xmlns:p14="http://schemas.microsoft.com/office/powerpoint/2010/main" val="2672616039"/>
+              </p:ext>
+            </p:extLst>
+          </p:nvPr>
+        </p:nvGraphicFramePr>
+        <p:xfrm>
+          <a:off x="7860560" y="9969226"/>
+          <a:ext cx="463435" cy="728505"/>
+        </p:xfrm>
+        <a:graphic>
+          <a:graphicData uri="http://schemas.openxmlformats.org/presentationml/2006/ole">
+            <mc:AlternateContent xmlns:mc="http://schemas.openxmlformats.org/markup-compatibility/2006">
+              <mc:Choice xmlns:v="urn:schemas-microsoft-com:vml" Requires="v">
+                <p:oleObj spid="_x0000_s7322" name="AxMath" r:id="rId6" imgW="151920" imgH="226800" progId="Equation.AxMath">
+                  <p:embed/>
+                </p:oleObj>
+              </mc:Choice>
+              <mc:Fallback>
+                <p:oleObj name="AxMath" r:id="rId6" imgW="151920" imgH="226800" progId="Equation.AxMath">
+                  <p:embed/>
+                  <p:pic>
+                    <p:nvPicPr>
+                      <p:cNvPr id="312" name="对象 311"/>
+                      <p:cNvPicPr/>
+                      <p:nvPr/>
+                    </p:nvPicPr>
+                    <p:blipFill>
+                      <a:blip r:embed="rId4"/>
+                      <a:stretch>
+                        <a:fillRect/>
+                      </a:stretch>
+                    </p:blipFill>
+                    <p:spPr>
+                      <a:xfrm>
+                        <a:off x="7860560" y="9969226"/>
+                        <a:ext cx="463435" cy="728505"/>
+                      </a:xfrm>
+                      <a:prstGeom prst="rect">
+                        <a:avLst/>
+                      </a:prstGeom>
+                    </p:spPr>
+                  </p:pic>
+                </p:oleObj>
+              </mc:Fallback>
+            </mc:AlternateContent>
+          </a:graphicData>
+        </a:graphic>
+      </p:graphicFrame>
+      <p:sp>
+        <p:nvSpPr>
+          <p:cNvPr id="364" name="圆角矩形 363"/>
+          <p:cNvSpPr/>
+          <p:nvPr/>
+        </p:nvSpPr>
+        <p:spPr>
+          <a:xfrm>
+            <a:off x="2388593" y="11753909"/>
+            <a:ext cx="1138843" cy="432262"/>
+          </a:xfrm>
+          <a:prstGeom prst="roundRect">
+            <a:avLst/>
+          </a:prstGeom>
+          <a:solidFill>
+            <a:srgbClr val="BDD7EE"/>
+          </a:solidFill>
+          <a:ln w="28575">
+            <a:solidFill>
+              <a:schemeClr val="tx1"/>
+            </a:solidFill>
+          </a:ln>
+        </p:spPr>
+        <p:style>
+          <a:lnRef idx="2">
+            <a:schemeClr val="accent1">
+              <a:shade val="50000"/>
+            </a:schemeClr>
+          </a:lnRef>
+          <a:fillRef idx="1">
+            <a:schemeClr val="accent1"/>
+          </a:fillRef>
+          <a:effectRef idx="0">
+            <a:schemeClr val="accent1"/>
+          </a:effectRef>
+          <a:fontRef idx="minor">
+            <a:schemeClr val="lt1"/>
+          </a:fontRef>
+        </p:style>
+        <p:txBody>
+          <a:bodyPr rtlCol="0" anchor="ctr"/>
+          <a:lstStyle/>
+          <a:p>
+            <a:pPr algn="ctr"/>
+            <a:r>
+              <a:rPr lang="en-US" altLang="zh-CN" dirty="0">
+                <a:solidFill>
+                  <a:schemeClr val="tx1"/>
+                </a:solidFill>
+                <a:latin typeface="Times New Roman" panose="02020603050405020304" pitchFamily="18" charset="0"/>
+                <a:cs typeface="Times New Roman" panose="02020603050405020304" pitchFamily="18" charset="0"/>
+              </a:rPr>
+              <a:t>GPU </a:t>
+            </a:r>
+            <a:r>
+              <a:rPr lang="en-US" altLang="zh-CN" dirty="0" smtClean="0">
+                <a:solidFill>
+                  <a:schemeClr val="tx1"/>
+                </a:solidFill>
+                <a:latin typeface="Times New Roman" panose="02020603050405020304" pitchFamily="18" charset="0"/>
+                <a:cs typeface="Times New Roman" panose="02020603050405020304" pitchFamily="18" charset="0"/>
+              </a:rPr>
+              <a:t>n-1</a:t>
+            </a:r>
+            <a:endParaRPr lang="zh-CN" altLang="en-US" dirty="0">
+              <a:solidFill>
+                <a:schemeClr val="tx1"/>
+              </a:solidFill>
+              <a:latin typeface="Times New Roman" panose="02020603050405020304" pitchFamily="18" charset="0"/>
+              <a:cs typeface="Times New Roman" panose="02020603050405020304" pitchFamily="18" charset="0"/>
+            </a:endParaRPr>
+          </a:p>
+        </p:txBody>
+      </p:sp>
+      <p:graphicFrame>
+        <p:nvGraphicFramePr>
+          <p:cNvPr id="365" name="对象 364"/>
+          <p:cNvGraphicFramePr>
+            <a:graphicFrameLocks noChangeAspect="1"/>
+          </p:cNvGraphicFramePr>
+          <p:nvPr>
+            <p:extLst>
+              <p:ext uri="{D42A27DB-BD31-4B8C-83A1-F6EECF244321}">
+                <p14:modId xmlns:p14="http://schemas.microsoft.com/office/powerpoint/2010/main" val="350231191"/>
+              </p:ext>
+            </p:extLst>
+          </p:nvPr>
+        </p:nvGraphicFramePr>
+        <p:xfrm>
+          <a:off x="7860444" y="11605787"/>
+          <a:ext cx="463435" cy="728505"/>
+        </p:xfrm>
+        <a:graphic>
+          <a:graphicData uri="http://schemas.openxmlformats.org/presentationml/2006/ole">
+            <mc:AlternateContent xmlns:mc="http://schemas.openxmlformats.org/markup-compatibility/2006">
+              <mc:Choice xmlns:v="urn:schemas-microsoft-com:vml" Requires="v">
+                <p:oleObj spid="_x0000_s7323" name="AxMath" r:id="rId7" imgW="151920" imgH="226800" progId="Equation.AxMath">
+                  <p:embed/>
+                </p:oleObj>
+              </mc:Choice>
+              <mc:Fallback>
+                <p:oleObj name="AxMath" r:id="rId7" imgW="151920" imgH="226800" progId="Equation.AxMath">
+                  <p:embed/>
+                  <p:pic>
+                    <p:nvPicPr>
+                      <p:cNvPr id="314" name="对象 313"/>
+                      <p:cNvPicPr/>
+                      <p:nvPr/>
+                    </p:nvPicPr>
+                    <p:blipFill>
+                      <a:blip r:embed="rId4"/>
+                      <a:stretch>
+                        <a:fillRect/>
+                      </a:stretch>
+                    </p:blipFill>
+                    <p:spPr>
+                      <a:xfrm>
+                        <a:off x="7860444" y="11605787"/>
+                        <a:ext cx="463435" cy="728505"/>
+                      </a:xfrm>
+                      <a:prstGeom prst="rect">
+                        <a:avLst/>
+                      </a:prstGeom>
+                    </p:spPr>
+                  </p:pic>
+                </p:oleObj>
+              </mc:Fallback>
+            </mc:AlternateContent>
+          </a:graphicData>
+        </a:graphic>
+      </p:graphicFrame>
+      <p:graphicFrame>
+        <p:nvGraphicFramePr>
+          <p:cNvPr id="366" name="对象 365"/>
+          <p:cNvGraphicFramePr>
+            <a:graphicFrameLocks noChangeAspect="1"/>
+          </p:cNvGraphicFramePr>
+          <p:nvPr>
+            <p:extLst>
+              <p:ext uri="{D42A27DB-BD31-4B8C-83A1-F6EECF244321}">
+                <p14:modId xmlns:p14="http://schemas.microsoft.com/office/powerpoint/2010/main" val="1168321140"/>
+              </p:ext>
+            </p:extLst>
+          </p:nvPr>
+        </p:nvGraphicFramePr>
+        <p:xfrm>
+          <a:off x="5451948" y="10515154"/>
+          <a:ext cx="463435" cy="728505"/>
+        </p:xfrm>
+        <a:graphic>
+          <a:graphicData uri="http://schemas.openxmlformats.org/presentationml/2006/ole">
+            <mc:AlternateContent xmlns:mc="http://schemas.openxmlformats.org/markup-compatibility/2006">
+              <mc:Choice xmlns:v="urn:schemas-microsoft-com:vml" Requires="v">
+                <p:oleObj spid="_x0000_s7324" name="AxMath" r:id="rId8" imgW="151920" imgH="226800" progId="Equation.AxMath">
+                  <p:embed/>
+                </p:oleObj>
+              </mc:Choice>
+              <mc:Fallback>
+                <p:oleObj name="AxMath" r:id="rId8" imgW="151920" imgH="226800" progId="Equation.AxMath">
+                  <p:embed/>
+                  <p:pic>
+                    <p:nvPicPr>
+                      <p:cNvPr id="315" name="对象 314"/>
+                      <p:cNvPicPr/>
+                      <p:nvPr/>
+                    </p:nvPicPr>
+                    <p:blipFill>
+                      <a:blip r:embed="rId9"/>
+                      <a:stretch>
+                        <a:fillRect/>
+                      </a:stretch>
+                    </p:blipFill>
+                    <p:spPr>
+                      <a:xfrm>
+                        <a:off x="5451948" y="10515154"/>
+                        <a:ext cx="463435" cy="728505"/>
+                      </a:xfrm>
+                      <a:prstGeom prst="rect">
+                        <a:avLst/>
+                      </a:prstGeom>
+                    </p:spPr>
+                  </p:pic>
+                </p:oleObj>
+              </mc:Fallback>
+            </mc:AlternateContent>
+          </a:graphicData>
+        </a:graphic>
+      </p:graphicFrame>
+      <p:graphicFrame>
+        <p:nvGraphicFramePr>
+          <p:cNvPr id="367" name="对象 366"/>
+          <p:cNvGraphicFramePr>
+            <a:graphicFrameLocks noChangeAspect="1"/>
+          </p:cNvGraphicFramePr>
+          <p:nvPr>
+            <p:extLst>
+              <p:ext uri="{D42A27DB-BD31-4B8C-83A1-F6EECF244321}">
+                <p14:modId xmlns:p14="http://schemas.microsoft.com/office/powerpoint/2010/main" val="831567437"/>
+              </p:ext>
+            </p:extLst>
+          </p:nvPr>
+        </p:nvGraphicFramePr>
+        <p:xfrm>
+          <a:off x="4074114" y="10519805"/>
+          <a:ext cx="463435" cy="728505"/>
+        </p:xfrm>
+        <a:graphic>
+          <a:graphicData uri="http://schemas.openxmlformats.org/presentationml/2006/ole">
+            <mc:AlternateContent xmlns:mc="http://schemas.openxmlformats.org/markup-compatibility/2006">
+              <mc:Choice xmlns:v="urn:schemas-microsoft-com:vml" Requires="v">
+                <p:oleObj spid="_x0000_s7325" name="AxMath" r:id="rId10" imgW="151920" imgH="226800" progId="Equation.AxMath">
+                  <p:embed/>
+                </p:oleObj>
+              </mc:Choice>
+              <mc:Fallback>
+                <p:oleObj name="AxMath" r:id="rId10" imgW="151920" imgH="226800" progId="Equation.AxMath">
+                  <p:embed/>
+                  <p:pic>
+                    <p:nvPicPr>
+                      <p:cNvPr id="316" name="对象 315"/>
+                      <p:cNvPicPr/>
+                      <p:nvPr/>
+                    </p:nvPicPr>
+                    <p:blipFill>
+                      <a:blip r:embed="rId9"/>
+                      <a:stretch>
+                        <a:fillRect/>
+                      </a:stretch>
+                    </p:blipFill>
+                    <p:spPr>
+                      <a:xfrm>
+                        <a:off x="4074114" y="10519805"/>
+                        <a:ext cx="463435" cy="728505"/>
+                      </a:xfrm>
+                      <a:prstGeom prst="rect">
+                        <a:avLst/>
+                      </a:prstGeom>
+                    </p:spPr>
+                  </p:pic>
+                </p:oleObj>
+              </mc:Fallback>
+            </mc:AlternateContent>
+          </a:graphicData>
+        </a:graphic>
+      </p:graphicFrame>
+      <p:graphicFrame>
+        <p:nvGraphicFramePr>
+          <p:cNvPr id="368" name="对象 367"/>
+          <p:cNvGraphicFramePr>
+            <a:graphicFrameLocks noChangeAspect="1"/>
+          </p:cNvGraphicFramePr>
+          <p:nvPr>
+            <p:extLst>
+              <p:ext uri="{D42A27DB-BD31-4B8C-83A1-F6EECF244321}">
+                <p14:modId xmlns:p14="http://schemas.microsoft.com/office/powerpoint/2010/main" val="1548437497"/>
+              </p:ext>
+            </p:extLst>
+          </p:nvPr>
+        </p:nvGraphicFramePr>
+        <p:xfrm>
+          <a:off x="6843290" y="10515154"/>
+          <a:ext cx="463435" cy="728505"/>
+        </p:xfrm>
+        <a:graphic>
+          <a:graphicData uri="http://schemas.openxmlformats.org/presentationml/2006/ole">
+            <mc:AlternateContent xmlns:mc="http://schemas.openxmlformats.org/markup-compatibility/2006">
+              <mc:Choice xmlns:v="urn:schemas-microsoft-com:vml" Requires="v">
+                <p:oleObj spid="_x0000_s7326" name="AxMath" r:id="rId11" imgW="151920" imgH="226800" progId="Equation.AxMath">
+                  <p:embed/>
+                </p:oleObj>
+              </mc:Choice>
+              <mc:Fallback>
+                <p:oleObj name="AxMath" r:id="rId11" imgW="151920" imgH="226800" progId="Equation.AxMath">
+                  <p:embed/>
+                  <p:pic>
+                    <p:nvPicPr>
+                      <p:cNvPr id="317" name="对象 316"/>
+                      <p:cNvPicPr/>
+                      <p:nvPr/>
+                    </p:nvPicPr>
+                    <p:blipFill>
+                      <a:blip r:embed="rId9"/>
+                      <a:stretch>
+                        <a:fillRect/>
+                      </a:stretch>
+                    </p:blipFill>
+                    <p:spPr>
+                      <a:xfrm>
+                        <a:off x="6843290" y="10515154"/>
+                        <a:ext cx="463435" cy="728505"/>
+                      </a:xfrm>
+                      <a:prstGeom prst="rect">
+                        <a:avLst/>
+                      </a:prstGeom>
+                    </p:spPr>
+                  </p:pic>
+                </p:oleObj>
+              </mc:Fallback>
+            </mc:AlternateContent>
+          </a:graphicData>
+        </a:graphic>
+      </p:graphicFrame>
+      <p:graphicFrame>
+        <p:nvGraphicFramePr>
+          <p:cNvPr id="369" name="对象 368"/>
+          <p:cNvGraphicFramePr>
+            <a:graphicFrameLocks noChangeAspect="1"/>
+          </p:cNvGraphicFramePr>
+          <p:nvPr>
+            <p:extLst>
+              <p:ext uri="{D42A27DB-BD31-4B8C-83A1-F6EECF244321}">
+                <p14:modId xmlns:p14="http://schemas.microsoft.com/office/powerpoint/2010/main" val="1036673867"/>
+              </p:ext>
+            </p:extLst>
+          </p:nvPr>
+        </p:nvGraphicFramePr>
+        <p:xfrm>
+          <a:off x="8860165" y="10519830"/>
+          <a:ext cx="463435" cy="728505"/>
+        </p:xfrm>
+        <a:graphic>
+          <a:graphicData uri="http://schemas.openxmlformats.org/presentationml/2006/ole">
+            <mc:AlternateContent xmlns:mc="http://schemas.openxmlformats.org/markup-compatibility/2006">
+              <mc:Choice xmlns:v="urn:schemas-microsoft-com:vml" Requires="v">
+                <p:oleObj spid="_x0000_s7327" name="AxMath" r:id="rId12" imgW="151920" imgH="226800" progId="Equation.AxMath">
+                  <p:embed/>
+                </p:oleObj>
+              </mc:Choice>
+              <mc:Fallback>
+                <p:oleObj name="AxMath" r:id="rId12" imgW="151920" imgH="226800" progId="Equation.AxMath">
+                  <p:embed/>
+                  <p:pic>
+                    <p:nvPicPr>
+                      <p:cNvPr id="318" name="对象 317"/>
+                      <p:cNvPicPr/>
+                      <p:nvPr/>
+                    </p:nvPicPr>
+                    <p:blipFill>
+                      <a:blip r:embed="rId9"/>
+                      <a:stretch>
+                        <a:fillRect/>
+                      </a:stretch>
+                    </p:blipFill>
+                    <p:spPr>
+                      <a:xfrm>
+                        <a:off x="8860165" y="10519830"/>
+                        <a:ext cx="463435" cy="728505"/>
+                      </a:xfrm>
+                      <a:prstGeom prst="rect">
+                        <a:avLst/>
+                      </a:prstGeom>
+                    </p:spPr>
+                  </p:pic>
+                </p:oleObj>
+              </mc:Fallback>
+            </mc:AlternateContent>
+          </a:graphicData>
+        </a:graphic>
+      </p:graphicFrame>
+      <p:sp>
+        <p:nvSpPr>
+          <p:cNvPr id="370" name="矩形 369"/>
+          <p:cNvSpPr/>
+          <p:nvPr/>
+        </p:nvSpPr>
+        <p:spPr>
+          <a:xfrm>
+            <a:off x="5073719" y="9505500"/>
+            <a:ext cx="1230283" cy="432262"/>
+          </a:xfrm>
+          <a:prstGeom prst="rect">
+            <a:avLst/>
+          </a:prstGeom>
+          <a:solidFill>
+            <a:srgbClr val="E2F0D9"/>
+          </a:solidFill>
+          <a:ln w="28575">
+            <a:solidFill>
+              <a:schemeClr val="tx1"/>
+            </a:solidFill>
+          </a:ln>
+        </p:spPr>
+        <p:style>
+          <a:lnRef idx="2">
+            <a:schemeClr val="accent1">
+              <a:shade val="50000"/>
+            </a:schemeClr>
+          </a:lnRef>
+          <a:fillRef idx="1">
+            <a:schemeClr val="accent1"/>
+          </a:fillRef>
+          <a:effectRef idx="0">
+            <a:schemeClr val="accent1"/>
+          </a:effectRef>
+          <a:fontRef idx="minor">
+            <a:schemeClr val="lt1"/>
+          </a:fontRef>
+        </p:style>
+        <p:txBody>
+          <a:bodyPr rtlCol="0" anchor="ctr"/>
+          <a:lstStyle/>
+          <a:p>
+            <a:pPr algn="ctr"/>
+            <a:endParaRPr lang="zh-CN" altLang="en-US" dirty="0"/>
+          </a:p>
+        </p:txBody>
+      </p:sp>
+      <p:sp>
+        <p:nvSpPr>
+          <p:cNvPr id="371" name="矩形 370"/>
+          <p:cNvSpPr/>
+          <p:nvPr/>
+        </p:nvSpPr>
+        <p:spPr>
+          <a:xfrm>
+            <a:off x="6468699" y="10117347"/>
+            <a:ext cx="1230283" cy="432262"/>
+          </a:xfrm>
+          <a:prstGeom prst="rect">
+            <a:avLst/>
+          </a:prstGeom>
+          <a:solidFill>
+            <a:srgbClr val="E2F0D9"/>
+          </a:solidFill>
+          <a:ln w="28575">
+            <a:solidFill>
+              <a:schemeClr val="tx1"/>
+            </a:solidFill>
+          </a:ln>
+        </p:spPr>
+        <p:style>
+          <a:lnRef idx="2">
+            <a:schemeClr val="accent1">
+              <a:shade val="50000"/>
+            </a:schemeClr>
+          </a:lnRef>
+          <a:fillRef idx="1">
+            <a:schemeClr val="accent1"/>
+          </a:fillRef>
+          <a:effectRef idx="0">
+            <a:schemeClr val="accent1"/>
+          </a:effectRef>
+          <a:fontRef idx="minor">
+            <a:schemeClr val="lt1"/>
+          </a:fontRef>
+        </p:style>
+        <p:txBody>
+          <a:bodyPr rtlCol="0" anchor="ctr"/>
+          <a:lstStyle/>
+          <a:p>
+            <a:pPr algn="ctr"/>
+            <a:endParaRPr lang="zh-CN" altLang="en-US" dirty="0"/>
+          </a:p>
+        </p:txBody>
+      </p:sp>
+      <p:sp>
+        <p:nvSpPr>
+          <p:cNvPr id="372" name="矩形 371"/>
+          <p:cNvSpPr/>
+          <p:nvPr/>
+        </p:nvSpPr>
+        <p:spPr>
+          <a:xfrm>
+            <a:off x="8409777" y="11750026"/>
+            <a:ext cx="1230283" cy="432262"/>
+          </a:xfrm>
+          <a:prstGeom prst="rect">
+            <a:avLst/>
+          </a:prstGeom>
+          <a:solidFill>
+            <a:srgbClr val="E2F0D9"/>
+          </a:solidFill>
+          <a:ln w="28575">
+            <a:solidFill>
+              <a:schemeClr val="tx1"/>
+            </a:solidFill>
+          </a:ln>
+        </p:spPr>
+        <p:style>
+          <a:lnRef idx="2">
+            <a:schemeClr val="accent1">
+              <a:shade val="50000"/>
+            </a:schemeClr>
+          </a:lnRef>
+          <a:fillRef idx="1">
+            <a:schemeClr val="accent1"/>
+          </a:fillRef>
+          <a:effectRef idx="0">
+            <a:schemeClr val="accent1"/>
+          </a:effectRef>
+          <a:fontRef idx="minor">
+            <a:schemeClr val="lt1"/>
+          </a:fontRef>
+        </p:style>
+        <p:txBody>
+          <a:bodyPr rtlCol="0" anchor="ctr"/>
+          <a:lstStyle/>
+          <a:p>
+            <a:pPr algn="ctr"/>
+            <a:endParaRPr lang="zh-CN" altLang="en-US" dirty="0"/>
+          </a:p>
+        </p:txBody>
+      </p:sp>
+      <p:sp>
+        <p:nvSpPr>
+          <p:cNvPr id="373" name="矩形 372"/>
+          <p:cNvSpPr/>
+          <p:nvPr/>
+        </p:nvSpPr>
+        <p:spPr>
+          <a:xfrm>
+            <a:off x="6468699" y="8893652"/>
+            <a:ext cx="1230283" cy="432262"/>
+          </a:xfrm>
+          <a:prstGeom prst="rect">
+            <a:avLst/>
+          </a:prstGeom>
+          <a:solidFill>
+            <a:srgbClr val="E2F0D9"/>
+          </a:solidFill>
+          <a:ln w="28575">
+            <a:solidFill>
+              <a:schemeClr val="tx1"/>
+            </a:solidFill>
+          </a:ln>
+        </p:spPr>
+        <p:style>
+          <a:lnRef idx="2">
+            <a:schemeClr val="accent1">
+              <a:shade val="50000"/>
+            </a:schemeClr>
+          </a:lnRef>
+          <a:fillRef idx="1">
+            <a:schemeClr val="accent1"/>
+          </a:fillRef>
+          <a:effectRef idx="0">
+            <a:schemeClr val="accent1"/>
+          </a:effectRef>
+          <a:fontRef idx="minor">
+            <a:schemeClr val="lt1"/>
+          </a:fontRef>
+        </p:style>
+        <p:txBody>
+          <a:bodyPr rtlCol="0" anchor="ctr"/>
+          <a:lstStyle/>
+          <a:p>
+            <a:pPr algn="ctr"/>
+            <a:endParaRPr lang="zh-CN" altLang="en-US" dirty="0"/>
+          </a:p>
+        </p:txBody>
+      </p:sp>
+      <p:sp>
+        <p:nvSpPr>
+          <p:cNvPr id="374" name="矩形 373"/>
+          <p:cNvSpPr/>
+          <p:nvPr/>
+        </p:nvSpPr>
+        <p:spPr>
+          <a:xfrm>
+            <a:off x="8409893" y="8898357"/>
+            <a:ext cx="1230283" cy="432262"/>
+          </a:xfrm>
+          <a:prstGeom prst="rect">
+            <a:avLst/>
+          </a:prstGeom>
+          <a:solidFill>
+            <a:srgbClr val="E2F0D9"/>
+          </a:solidFill>
+          <a:ln w="28575">
+            <a:solidFill>
+              <a:schemeClr val="tx1"/>
+            </a:solidFill>
+          </a:ln>
+        </p:spPr>
+        <p:style>
+          <a:lnRef idx="2">
+            <a:schemeClr val="accent1">
+              <a:shade val="50000"/>
+            </a:schemeClr>
+          </a:lnRef>
+          <a:fillRef idx="1">
+            <a:schemeClr val="accent1"/>
+          </a:fillRef>
+          <a:effectRef idx="0">
+            <a:schemeClr val="accent1"/>
+          </a:effectRef>
+          <a:fontRef idx="minor">
+            <a:schemeClr val="lt1"/>
+          </a:fontRef>
+        </p:style>
+        <p:txBody>
+          <a:bodyPr rtlCol="0" anchor="ctr"/>
+          <a:lstStyle/>
+          <a:p>
+            <a:pPr algn="ctr"/>
+            <a:endParaRPr lang="zh-CN" altLang="en-US" dirty="0"/>
+          </a:p>
+        </p:txBody>
+      </p:sp>
+      <p:sp>
+        <p:nvSpPr>
+          <p:cNvPr id="375" name="矩形 374"/>
+          <p:cNvSpPr/>
+          <p:nvPr/>
+        </p:nvSpPr>
+        <p:spPr>
+          <a:xfrm>
+            <a:off x="8415318" y="9505500"/>
+            <a:ext cx="1230283" cy="432262"/>
+          </a:xfrm>
+          <a:prstGeom prst="rect">
+            <a:avLst/>
+          </a:prstGeom>
+          <a:solidFill>
+            <a:srgbClr val="E2F0D9"/>
+          </a:solidFill>
+          <a:ln w="28575">
+            <a:solidFill>
+              <a:schemeClr val="tx1"/>
+            </a:solidFill>
+          </a:ln>
+        </p:spPr>
+        <p:style>
+          <a:lnRef idx="2">
+            <a:schemeClr val="accent1">
+              <a:shade val="50000"/>
+            </a:schemeClr>
+          </a:lnRef>
+          <a:fillRef idx="1">
+            <a:schemeClr val="accent1"/>
+          </a:fillRef>
+          <a:effectRef idx="0">
+            <a:schemeClr val="accent1"/>
+          </a:effectRef>
+          <a:fontRef idx="minor">
+            <a:schemeClr val="lt1"/>
+          </a:fontRef>
+        </p:style>
+        <p:txBody>
+          <a:bodyPr rtlCol="0" anchor="ctr"/>
+          <a:lstStyle/>
+          <a:p>
+            <a:pPr algn="ctr"/>
+            <a:endParaRPr lang="zh-CN" altLang="en-US" dirty="0"/>
+          </a:p>
+        </p:txBody>
+      </p:sp>
+      <p:sp>
+        <p:nvSpPr>
+          <p:cNvPr id="376" name="矩形 375"/>
+          <p:cNvSpPr/>
+          <p:nvPr/>
+        </p:nvSpPr>
+        <p:spPr>
+          <a:xfrm>
+            <a:off x="8409893" y="10112643"/>
+            <a:ext cx="1230283" cy="432262"/>
+          </a:xfrm>
+          <a:prstGeom prst="rect">
+            <a:avLst/>
+          </a:prstGeom>
+          <a:solidFill>
+            <a:srgbClr val="E2F0D9"/>
+          </a:solidFill>
+          <a:ln w="28575">
+            <a:solidFill>
+              <a:schemeClr val="tx1"/>
+            </a:solidFill>
+          </a:ln>
+        </p:spPr>
+        <p:style>
+          <a:lnRef idx="2">
+            <a:schemeClr val="accent1">
+              <a:shade val="50000"/>
+            </a:schemeClr>
+          </a:lnRef>
+          <a:fillRef idx="1">
+            <a:schemeClr val="accent1"/>
+          </a:fillRef>
+          <a:effectRef idx="0">
+            <a:schemeClr val="accent1"/>
+          </a:effectRef>
+          <a:fontRef idx="minor">
+            <a:schemeClr val="lt1"/>
+          </a:fontRef>
+        </p:style>
+        <p:txBody>
+          <a:bodyPr rtlCol="0" anchor="ctr"/>
+          <a:lstStyle/>
+          <a:p>
+            <a:pPr algn="ctr"/>
+            <a:endParaRPr lang="zh-CN" altLang="en-US" dirty="0"/>
+          </a:p>
+        </p:txBody>
+      </p:sp>
+      <p:sp>
+        <p:nvSpPr>
+          <p:cNvPr id="377" name="矩形 376"/>
+          <p:cNvSpPr/>
+          <p:nvPr/>
+        </p:nvSpPr>
+        <p:spPr>
+          <a:xfrm>
+            <a:off x="6461944" y="9505500"/>
+            <a:ext cx="1230283" cy="432262"/>
+          </a:xfrm>
+          <a:prstGeom prst="rect">
+            <a:avLst/>
+          </a:prstGeom>
+          <a:solidFill>
+            <a:srgbClr val="E2F0D9"/>
+          </a:solidFill>
+          <a:ln w="28575">
+            <a:solidFill>
+              <a:schemeClr val="tx1"/>
+            </a:solidFill>
+          </a:ln>
+        </p:spPr>
+        <p:style>
+          <a:lnRef idx="2">
+            <a:schemeClr val="accent1">
+              <a:shade val="50000"/>
+            </a:schemeClr>
+          </a:lnRef>
+          <a:fillRef idx="1">
+            <a:schemeClr val="accent1"/>
+          </a:fillRef>
+          <a:effectRef idx="0">
+            <a:schemeClr val="accent1"/>
+          </a:effectRef>
+          <a:fontRef idx="minor">
+            <a:schemeClr val="lt1"/>
+          </a:fontRef>
+        </p:style>
+        <p:txBody>
+          <a:bodyPr rtlCol="0" anchor="ctr"/>
+          <a:lstStyle/>
+          <a:p>
+            <a:pPr algn="ctr"/>
+            <a:endParaRPr lang="zh-CN" altLang="en-US" dirty="0"/>
+          </a:p>
+        </p:txBody>
+      </p:sp>
+      <p:sp>
+        <p:nvSpPr>
+          <p:cNvPr id="378" name="矩形 377"/>
+          <p:cNvSpPr/>
+          <p:nvPr/>
+        </p:nvSpPr>
+        <p:spPr>
+          <a:xfrm>
+            <a:off x="3685263" y="9502094"/>
+            <a:ext cx="1230283" cy="432262"/>
+          </a:xfrm>
+          <a:prstGeom prst="rect">
+            <a:avLst/>
+          </a:prstGeom>
+          <a:solidFill>
+            <a:srgbClr val="E2F0D9"/>
+          </a:solidFill>
+          <a:ln w="28575">
+            <a:solidFill>
+              <a:schemeClr val="tx1"/>
+            </a:solidFill>
+          </a:ln>
+        </p:spPr>
+        <p:style>
+          <a:lnRef idx="2">
+            <a:schemeClr val="accent1">
+              <a:shade val="50000"/>
+            </a:schemeClr>
+          </a:lnRef>
+          <a:fillRef idx="1">
+            <a:schemeClr val="accent1"/>
+          </a:fillRef>
+          <a:effectRef idx="0">
+            <a:schemeClr val="accent1"/>
+          </a:effectRef>
+          <a:fontRef idx="minor">
+            <a:schemeClr val="lt1"/>
+          </a:fontRef>
+        </p:style>
+        <p:txBody>
+          <a:bodyPr rtlCol="0" anchor="ctr"/>
+          <a:lstStyle/>
+          <a:p>
+            <a:pPr algn="ctr"/>
+            <a:endParaRPr lang="zh-CN" altLang="en-US" dirty="0"/>
+          </a:p>
+        </p:txBody>
+      </p:sp>
+      <p:sp>
+        <p:nvSpPr>
+          <p:cNvPr id="379" name="矩形 378"/>
+          <p:cNvSpPr/>
+          <p:nvPr/>
+        </p:nvSpPr>
+        <p:spPr>
+          <a:xfrm>
+            <a:off x="5076606" y="10112643"/>
+            <a:ext cx="1230283" cy="432262"/>
+          </a:xfrm>
+          <a:prstGeom prst="rect">
+            <a:avLst/>
+          </a:prstGeom>
+          <a:solidFill>
+            <a:srgbClr val="E2F0D9"/>
+          </a:solidFill>
+          <a:ln w="28575">
+            <a:solidFill>
+              <a:schemeClr val="tx1"/>
+            </a:solidFill>
+          </a:ln>
+        </p:spPr>
+        <p:style>
+          <a:lnRef idx="2">
+            <a:schemeClr val="accent1">
+              <a:shade val="50000"/>
+            </a:schemeClr>
+          </a:lnRef>
+          <a:fillRef idx="1">
+            <a:schemeClr val="accent1"/>
+          </a:fillRef>
+          <a:effectRef idx="0">
+            <a:schemeClr val="accent1"/>
+          </a:effectRef>
+          <a:fontRef idx="minor">
+            <a:schemeClr val="lt1"/>
+          </a:fontRef>
+        </p:style>
+        <p:txBody>
+          <a:bodyPr rtlCol="0" anchor="ctr"/>
+          <a:lstStyle/>
+          <a:p>
+            <a:pPr algn="ctr"/>
+            <a:endParaRPr lang="zh-CN" altLang="en-US" dirty="0"/>
+          </a:p>
+        </p:txBody>
+      </p:sp>
+      <p:sp>
+        <p:nvSpPr>
+          <p:cNvPr id="380" name="矩形 379"/>
+          <p:cNvSpPr/>
+          <p:nvPr/>
+        </p:nvSpPr>
+        <p:spPr>
+          <a:xfrm>
+            <a:off x="3685263" y="10112643"/>
+            <a:ext cx="1230283" cy="432262"/>
+          </a:xfrm>
+          <a:prstGeom prst="rect">
+            <a:avLst/>
+          </a:prstGeom>
+          <a:solidFill>
+            <a:srgbClr val="E2F0D9"/>
+          </a:solidFill>
+          <a:ln w="28575">
+            <a:solidFill>
+              <a:schemeClr val="tx1"/>
+            </a:solidFill>
+          </a:ln>
+        </p:spPr>
+        <p:style>
+          <a:lnRef idx="2">
+            <a:schemeClr val="accent1">
+              <a:shade val="50000"/>
+            </a:schemeClr>
+          </a:lnRef>
+          <a:fillRef idx="1">
+            <a:schemeClr val="accent1"/>
+          </a:fillRef>
+          <a:effectRef idx="0">
+            <a:schemeClr val="accent1"/>
+          </a:effectRef>
+          <a:fontRef idx="minor">
+            <a:schemeClr val="lt1"/>
+          </a:fontRef>
+        </p:style>
+        <p:txBody>
+          <a:bodyPr rtlCol="0" anchor="ctr"/>
+          <a:lstStyle/>
+          <a:p>
+            <a:pPr algn="ctr"/>
+            <a:endParaRPr lang="zh-CN" altLang="en-US" dirty="0"/>
+          </a:p>
+        </p:txBody>
+      </p:sp>
+      <p:sp>
+        <p:nvSpPr>
+          <p:cNvPr id="381" name="矩形 380"/>
+          <p:cNvSpPr/>
+          <p:nvPr/>
+        </p:nvSpPr>
+        <p:spPr>
+          <a:xfrm>
+            <a:off x="6474687" y="11753908"/>
+            <a:ext cx="1230283" cy="432262"/>
+          </a:xfrm>
+          <a:prstGeom prst="rect">
+            <a:avLst/>
+          </a:prstGeom>
+          <a:solidFill>
+            <a:srgbClr val="E2F0D9"/>
+          </a:solidFill>
+          <a:ln w="28575">
+            <a:solidFill>
+              <a:schemeClr val="tx1"/>
+            </a:solidFill>
+          </a:ln>
+        </p:spPr>
+        <p:style>
+          <a:lnRef idx="2">
+            <a:schemeClr val="accent1">
+              <a:shade val="50000"/>
+            </a:schemeClr>
+          </a:lnRef>
+          <a:fillRef idx="1">
+            <a:schemeClr val="accent1"/>
+          </a:fillRef>
+          <a:effectRef idx="0">
+            <a:schemeClr val="accent1"/>
+          </a:effectRef>
+          <a:fontRef idx="minor">
+            <a:schemeClr val="lt1"/>
+          </a:fontRef>
+        </p:style>
+        <p:txBody>
+          <a:bodyPr rtlCol="0" anchor="ctr"/>
+          <a:lstStyle/>
+          <a:p>
+            <a:pPr algn="ctr"/>
+            <a:endParaRPr lang="zh-CN" altLang="en-US" dirty="0"/>
+          </a:p>
+        </p:txBody>
+      </p:sp>
+      <p:sp>
+        <p:nvSpPr>
+          <p:cNvPr id="382" name="矩形 381"/>
+          <p:cNvSpPr/>
+          <p:nvPr/>
+        </p:nvSpPr>
+        <p:spPr>
+          <a:xfrm>
+            <a:off x="5067963" y="11750026"/>
+            <a:ext cx="1230283" cy="432262"/>
+          </a:xfrm>
+          <a:prstGeom prst="rect">
+            <a:avLst/>
+          </a:prstGeom>
+          <a:solidFill>
+            <a:srgbClr val="E2F0D9"/>
+          </a:solidFill>
+          <a:ln w="28575">
+            <a:solidFill>
+              <a:schemeClr val="tx1"/>
+            </a:solidFill>
+          </a:ln>
+        </p:spPr>
+        <p:style>
+          <a:lnRef idx="2">
+            <a:schemeClr val="accent1">
+              <a:shade val="50000"/>
+            </a:schemeClr>
+          </a:lnRef>
+          <a:fillRef idx="1">
+            <a:schemeClr val="accent1"/>
+          </a:fillRef>
+          <a:effectRef idx="0">
+            <a:schemeClr val="accent1"/>
+          </a:effectRef>
+          <a:fontRef idx="minor">
+            <a:schemeClr val="lt1"/>
+          </a:fontRef>
+        </p:style>
+        <p:txBody>
+          <a:bodyPr rtlCol="0" anchor="ctr"/>
+          <a:lstStyle/>
+          <a:p>
+            <a:pPr algn="ctr"/>
+            <a:endParaRPr lang="zh-CN" altLang="en-US" dirty="0"/>
+          </a:p>
+        </p:txBody>
+      </p:sp>
+      <p:sp>
+        <p:nvSpPr>
+          <p:cNvPr id="383" name="矩形 382"/>
+          <p:cNvSpPr/>
+          <p:nvPr/>
+        </p:nvSpPr>
+        <p:spPr>
+          <a:xfrm>
+            <a:off x="3682558" y="11753908"/>
+            <a:ext cx="1230283" cy="432262"/>
+          </a:xfrm>
+          <a:prstGeom prst="rect">
+            <a:avLst/>
+          </a:prstGeom>
+          <a:solidFill>
+            <a:srgbClr val="E2F0D9"/>
+          </a:solidFill>
+          <a:ln w="28575">
+            <a:solidFill>
+              <a:schemeClr val="tx1"/>
+            </a:solidFill>
+          </a:ln>
+        </p:spPr>
+        <p:style>
+          <a:lnRef idx="2">
+            <a:schemeClr val="accent1">
+              <a:shade val="50000"/>
+            </a:schemeClr>
+          </a:lnRef>
+          <a:fillRef idx="1">
+            <a:schemeClr val="accent1"/>
+          </a:fillRef>
+          <a:effectRef idx="0">
+            <a:schemeClr val="accent1"/>
+          </a:effectRef>
+          <a:fontRef idx="minor">
+            <a:schemeClr val="lt1"/>
+          </a:fontRef>
+        </p:style>
+        <p:txBody>
+          <a:bodyPr rtlCol="0" anchor="ctr"/>
+          <a:lstStyle/>
+          <a:p>
+            <a:pPr algn="ctr"/>
+            <a:endParaRPr lang="zh-CN" altLang="en-US" dirty="0"/>
+          </a:p>
+        </p:txBody>
+      </p:sp>
+      <p:sp>
+        <p:nvSpPr>
+          <p:cNvPr id="384" name="圆角矩形 383"/>
+          <p:cNvSpPr/>
+          <p:nvPr/>
+        </p:nvSpPr>
+        <p:spPr>
+          <a:xfrm>
+            <a:off x="2388593" y="11175264"/>
+            <a:ext cx="1138843" cy="432262"/>
+          </a:xfrm>
+          <a:prstGeom prst="roundRect">
+            <a:avLst/>
+          </a:prstGeom>
+          <a:solidFill>
+            <a:srgbClr val="BDD7EE"/>
+          </a:solidFill>
+          <a:ln w="28575">
+            <a:solidFill>
+              <a:schemeClr val="tx1"/>
+            </a:solidFill>
+          </a:ln>
+        </p:spPr>
+        <p:style>
+          <a:lnRef idx="2">
+            <a:schemeClr val="accent1">
+              <a:shade val="50000"/>
+            </a:schemeClr>
+          </a:lnRef>
+          <a:fillRef idx="1">
+            <a:schemeClr val="accent1"/>
+          </a:fillRef>
+          <a:effectRef idx="0">
+            <a:schemeClr val="accent1"/>
+          </a:effectRef>
+          <a:fontRef idx="minor">
+            <a:schemeClr val="lt1"/>
+          </a:fontRef>
+        </p:style>
+        <p:txBody>
+          <a:bodyPr rtlCol="0" anchor="ctr"/>
+          <a:lstStyle/>
+          <a:p>
+            <a:pPr algn="ctr"/>
+            <a:r>
+              <a:rPr lang="en-US" altLang="zh-CN" dirty="0">
+                <a:solidFill>
+                  <a:schemeClr val="tx1"/>
+                </a:solidFill>
+                <a:latin typeface="Times New Roman" panose="02020603050405020304" pitchFamily="18" charset="0"/>
+                <a:cs typeface="Times New Roman" panose="02020603050405020304" pitchFamily="18" charset="0"/>
+              </a:rPr>
+              <a:t>GPU </a:t>
+            </a:r>
+            <a:r>
+              <a:rPr lang="en-US" altLang="zh-CN" dirty="0" smtClean="0">
+                <a:solidFill>
+                  <a:schemeClr val="tx1"/>
+                </a:solidFill>
+                <a:latin typeface="Times New Roman" panose="02020603050405020304" pitchFamily="18" charset="0"/>
+                <a:cs typeface="Times New Roman" panose="02020603050405020304" pitchFamily="18" charset="0"/>
+              </a:rPr>
+              <a:t>n-2</a:t>
+            </a:r>
+            <a:endParaRPr lang="zh-CN" altLang="en-US" dirty="0">
+              <a:solidFill>
+                <a:schemeClr val="tx1"/>
+              </a:solidFill>
+              <a:latin typeface="Times New Roman" panose="02020603050405020304" pitchFamily="18" charset="0"/>
+              <a:cs typeface="Times New Roman" panose="02020603050405020304" pitchFamily="18" charset="0"/>
+            </a:endParaRPr>
+          </a:p>
+        </p:txBody>
+      </p:sp>
+      <p:sp>
+        <p:nvSpPr>
+          <p:cNvPr id="385" name="矩形 384"/>
+          <p:cNvSpPr/>
+          <p:nvPr/>
+        </p:nvSpPr>
+        <p:spPr>
+          <a:xfrm>
+            <a:off x="8409777" y="11171381"/>
+            <a:ext cx="1230283" cy="432262"/>
+          </a:xfrm>
+          <a:prstGeom prst="rect">
+            <a:avLst/>
+          </a:prstGeom>
+          <a:solidFill>
+            <a:srgbClr val="E2F0D9"/>
+          </a:solidFill>
+          <a:ln w="28575">
+            <a:solidFill>
+              <a:schemeClr val="tx1"/>
+            </a:solidFill>
+          </a:ln>
+        </p:spPr>
+        <p:style>
+          <a:lnRef idx="2">
+            <a:schemeClr val="accent1">
+              <a:shade val="50000"/>
+            </a:schemeClr>
+          </a:lnRef>
+          <a:fillRef idx="1">
+            <a:schemeClr val="accent1"/>
+          </a:fillRef>
+          <a:effectRef idx="0">
+            <a:schemeClr val="accent1"/>
+          </a:effectRef>
+          <a:fontRef idx="minor">
+            <a:schemeClr val="lt1"/>
+          </a:fontRef>
+        </p:style>
+        <p:txBody>
+          <a:bodyPr rtlCol="0" anchor="ctr"/>
+          <a:lstStyle/>
+          <a:p>
+            <a:pPr algn="ctr"/>
+            <a:endParaRPr lang="zh-CN" altLang="en-US" dirty="0"/>
+          </a:p>
+        </p:txBody>
+      </p:sp>
+      <p:sp>
+        <p:nvSpPr>
+          <p:cNvPr id="386" name="矩形 385"/>
+          <p:cNvSpPr/>
+          <p:nvPr/>
+        </p:nvSpPr>
+        <p:spPr>
+          <a:xfrm>
+            <a:off x="6474687" y="11175263"/>
+            <a:ext cx="1230283" cy="432262"/>
+          </a:xfrm>
+          <a:prstGeom prst="rect">
+            <a:avLst/>
+          </a:prstGeom>
+          <a:solidFill>
+            <a:srgbClr val="E2F0D9"/>
+          </a:solidFill>
+          <a:ln w="28575">
+            <a:solidFill>
+              <a:schemeClr val="tx1"/>
+            </a:solidFill>
+          </a:ln>
+        </p:spPr>
+        <p:style>
+          <a:lnRef idx="2">
+            <a:schemeClr val="accent1">
+              <a:shade val="50000"/>
+            </a:schemeClr>
+          </a:lnRef>
+          <a:fillRef idx="1">
+            <a:schemeClr val="accent1"/>
+          </a:fillRef>
+          <a:effectRef idx="0">
+            <a:schemeClr val="accent1"/>
+          </a:effectRef>
+          <a:fontRef idx="minor">
+            <a:schemeClr val="lt1"/>
+          </a:fontRef>
+        </p:style>
+        <p:txBody>
+          <a:bodyPr rtlCol="0" anchor="ctr"/>
+          <a:lstStyle/>
+          <a:p>
+            <a:pPr algn="ctr"/>
+            <a:endParaRPr lang="zh-CN" altLang="en-US" dirty="0"/>
+          </a:p>
+        </p:txBody>
+      </p:sp>
+      <p:sp>
+        <p:nvSpPr>
+          <p:cNvPr id="387" name="矩形 386"/>
+          <p:cNvSpPr/>
+          <p:nvPr/>
+        </p:nvSpPr>
+        <p:spPr>
+          <a:xfrm>
+            <a:off x="5067963" y="11171381"/>
+            <a:ext cx="1230283" cy="432262"/>
+          </a:xfrm>
+          <a:prstGeom prst="rect">
+            <a:avLst/>
+          </a:prstGeom>
+          <a:solidFill>
+            <a:srgbClr val="E2F0D9"/>
+          </a:solidFill>
+          <a:ln w="28575">
+            <a:solidFill>
+              <a:schemeClr val="tx1"/>
+            </a:solidFill>
+          </a:ln>
+        </p:spPr>
+        <p:style>
+          <a:lnRef idx="2">
+            <a:schemeClr val="accent1">
+              <a:shade val="50000"/>
+            </a:schemeClr>
+          </a:lnRef>
+          <a:fillRef idx="1">
+            <a:schemeClr val="accent1"/>
+          </a:fillRef>
+          <a:effectRef idx="0">
+            <a:schemeClr val="accent1"/>
+          </a:effectRef>
+          <a:fontRef idx="minor">
+            <a:schemeClr val="lt1"/>
+          </a:fontRef>
+        </p:style>
+        <p:txBody>
+          <a:bodyPr rtlCol="0" anchor="ctr"/>
+          <a:lstStyle/>
+          <a:p>
+            <a:pPr algn="ctr"/>
+            <a:endParaRPr lang="zh-CN" altLang="en-US" dirty="0"/>
+          </a:p>
+        </p:txBody>
+      </p:sp>
+      <p:sp>
+        <p:nvSpPr>
+          <p:cNvPr id="388" name="矩形 387"/>
+          <p:cNvSpPr/>
+          <p:nvPr/>
+        </p:nvSpPr>
+        <p:spPr>
+          <a:xfrm>
+            <a:off x="3682558" y="11175263"/>
+            <a:ext cx="1230283" cy="432262"/>
+          </a:xfrm>
+          <a:prstGeom prst="rect">
+            <a:avLst/>
+          </a:prstGeom>
+          <a:solidFill>
+            <a:srgbClr val="E2F0D9"/>
+          </a:solidFill>
+          <a:ln w="28575">
+            <a:solidFill>
+              <a:schemeClr val="tx1"/>
+            </a:solidFill>
+          </a:ln>
+        </p:spPr>
+        <p:style>
+          <a:lnRef idx="2">
+            <a:schemeClr val="accent1">
+              <a:shade val="50000"/>
+            </a:schemeClr>
+          </a:lnRef>
+          <a:fillRef idx="1">
+            <a:schemeClr val="accent1"/>
+          </a:fillRef>
+          <a:effectRef idx="0">
+            <a:schemeClr val="accent1"/>
+          </a:effectRef>
+          <a:fontRef idx="minor">
+            <a:schemeClr val="lt1"/>
+          </a:fontRef>
+        </p:style>
+        <p:txBody>
+          <a:bodyPr rtlCol="0" anchor="ctr"/>
+          <a:lstStyle/>
+          <a:p>
+            <a:pPr algn="ctr"/>
+            <a:endParaRPr lang="zh-CN" altLang="en-US" dirty="0"/>
+          </a:p>
+        </p:txBody>
+      </p:sp>
+      <p:graphicFrame>
+        <p:nvGraphicFramePr>
+          <p:cNvPr id="389" name="对象 388"/>
+          <p:cNvGraphicFramePr>
+            <a:graphicFrameLocks noChangeAspect="1"/>
+          </p:cNvGraphicFramePr>
+          <p:nvPr>
+            <p:extLst>
+              <p:ext uri="{D42A27DB-BD31-4B8C-83A1-F6EECF244321}">
+                <p14:modId xmlns:p14="http://schemas.microsoft.com/office/powerpoint/2010/main" val="3620186552"/>
+              </p:ext>
+            </p:extLst>
+          </p:nvPr>
+        </p:nvGraphicFramePr>
+        <p:xfrm>
+          <a:off x="4161368" y="8967433"/>
+          <a:ext cx="288925" cy="303212"/>
+        </p:xfrm>
+        <a:graphic>
+          <a:graphicData uri="http://schemas.openxmlformats.org/presentationml/2006/ole">
+            <mc:AlternateContent xmlns:mc="http://schemas.openxmlformats.org/markup-compatibility/2006">
+              <mc:Choice xmlns:v="urn:schemas-microsoft-com:vml" Requires="v">
+                <p:oleObj spid="_x0000_s7328" name="AxMath" r:id="rId13" imgW="218880" imgH="230400" progId="Equation.AxMath">
+                  <p:embed/>
+                </p:oleObj>
+              </mc:Choice>
+              <mc:Fallback>
+                <p:oleObj name="AxMath" r:id="rId13" imgW="218880" imgH="230400" progId="Equation.AxMath">
+                  <p:embed/>
+                  <p:pic>
+                    <p:nvPicPr>
+                      <p:cNvPr id="338" name="对象 337"/>
+                      <p:cNvPicPr/>
+                      <p:nvPr/>
+                    </p:nvPicPr>
+                    <p:blipFill>
+                      <a:blip r:embed="rId14"/>
+                      <a:stretch>
+                        <a:fillRect/>
+                      </a:stretch>
+                    </p:blipFill>
+                    <p:spPr>
+                      <a:xfrm>
+                        <a:off x="4161368" y="8967433"/>
+                        <a:ext cx="288925" cy="303212"/>
+                      </a:xfrm>
+                      <a:prstGeom prst="rect">
+                        <a:avLst/>
+                      </a:prstGeom>
+                    </p:spPr>
+                  </p:pic>
+                </p:oleObj>
+              </mc:Fallback>
+            </mc:AlternateContent>
+          </a:graphicData>
+        </a:graphic>
+      </p:graphicFrame>
+      <p:graphicFrame>
+        <p:nvGraphicFramePr>
+          <p:cNvPr id="390" name="对象 389"/>
+          <p:cNvGraphicFramePr>
+            <a:graphicFrameLocks noChangeAspect="1"/>
+          </p:cNvGraphicFramePr>
+          <p:nvPr>
+            <p:extLst>
+              <p:ext uri="{D42A27DB-BD31-4B8C-83A1-F6EECF244321}">
+                <p14:modId xmlns:p14="http://schemas.microsoft.com/office/powerpoint/2010/main" val="420426849"/>
+              </p:ext>
+            </p:extLst>
+          </p:nvPr>
+        </p:nvGraphicFramePr>
+        <p:xfrm>
+          <a:off x="5530615" y="8960549"/>
+          <a:ext cx="322263" cy="330200"/>
+        </p:xfrm>
+        <a:graphic>
+          <a:graphicData uri="http://schemas.openxmlformats.org/presentationml/2006/ole">
+            <mc:AlternateContent xmlns:mc="http://schemas.openxmlformats.org/markup-compatibility/2006">
+              <mc:Choice xmlns:v="urn:schemas-microsoft-com:vml" Requires="v">
+                <p:oleObj spid="_x0000_s7329" name="AxMath" r:id="rId15" imgW="226080" imgH="230400" progId="Equation.AxMath">
+                  <p:embed/>
+                </p:oleObj>
+              </mc:Choice>
+              <mc:Fallback>
+                <p:oleObj name="AxMath" r:id="rId15" imgW="226080" imgH="230400" progId="Equation.AxMath">
+                  <p:embed/>
+                  <p:pic>
+                    <p:nvPicPr>
+                      <p:cNvPr id="339" name="对象 338"/>
+                      <p:cNvPicPr/>
+                      <p:nvPr/>
+                    </p:nvPicPr>
+                    <p:blipFill>
+                      <a:blip r:embed="rId16"/>
+                      <a:stretch>
+                        <a:fillRect/>
+                      </a:stretch>
+                    </p:blipFill>
+                    <p:spPr>
+                      <a:xfrm>
+                        <a:off x="5530615" y="8960549"/>
+                        <a:ext cx="322263" cy="330200"/>
+                      </a:xfrm>
+                      <a:prstGeom prst="rect">
+                        <a:avLst/>
+                      </a:prstGeom>
+                    </p:spPr>
+                  </p:pic>
+                </p:oleObj>
+              </mc:Fallback>
+            </mc:AlternateContent>
+          </a:graphicData>
+        </a:graphic>
+      </p:graphicFrame>
+      <p:graphicFrame>
+        <p:nvGraphicFramePr>
+          <p:cNvPr id="391" name="对象 390"/>
+          <p:cNvGraphicFramePr>
+            <a:graphicFrameLocks noChangeAspect="1"/>
+          </p:cNvGraphicFramePr>
+          <p:nvPr>
+            <p:extLst>
+              <p:ext uri="{D42A27DB-BD31-4B8C-83A1-F6EECF244321}">
+                <p14:modId xmlns:p14="http://schemas.microsoft.com/office/powerpoint/2010/main" val="1575530017"/>
+              </p:ext>
+            </p:extLst>
+          </p:nvPr>
+        </p:nvGraphicFramePr>
+        <p:xfrm>
+          <a:off x="6921121" y="8957223"/>
+          <a:ext cx="325438" cy="330200"/>
+        </p:xfrm>
+        <a:graphic>
+          <a:graphicData uri="http://schemas.openxmlformats.org/presentationml/2006/ole">
+            <mc:AlternateContent xmlns:mc="http://schemas.openxmlformats.org/markup-compatibility/2006">
+              <mc:Choice xmlns:v="urn:schemas-microsoft-com:vml" Requires="v">
+                <p:oleObj spid="_x0000_s7330" name="AxMath" r:id="rId17" imgW="227520" imgH="230400" progId="Equation.AxMath">
+                  <p:embed/>
+                </p:oleObj>
+              </mc:Choice>
+              <mc:Fallback>
+                <p:oleObj name="AxMath" r:id="rId17" imgW="227520" imgH="230400" progId="Equation.AxMath">
+                  <p:embed/>
+                  <p:pic>
+                    <p:nvPicPr>
+                      <p:cNvPr id="340" name="对象 339"/>
+                      <p:cNvPicPr/>
+                      <p:nvPr/>
+                    </p:nvPicPr>
+                    <p:blipFill>
+                      <a:blip r:embed="rId18"/>
+                      <a:stretch>
+                        <a:fillRect/>
+                      </a:stretch>
+                    </p:blipFill>
+                    <p:spPr>
+                      <a:xfrm>
+                        <a:off x="6921121" y="8957223"/>
+                        <a:ext cx="325438" cy="330200"/>
+                      </a:xfrm>
+                      <a:prstGeom prst="rect">
+                        <a:avLst/>
+                      </a:prstGeom>
+                    </p:spPr>
+                  </p:pic>
+                </p:oleObj>
+              </mc:Fallback>
+            </mc:AlternateContent>
+          </a:graphicData>
+        </a:graphic>
+      </p:graphicFrame>
+      <p:graphicFrame>
+        <p:nvGraphicFramePr>
+          <p:cNvPr id="392" name="对象 391"/>
+          <p:cNvGraphicFramePr>
+            <a:graphicFrameLocks noChangeAspect="1"/>
+          </p:cNvGraphicFramePr>
+          <p:nvPr>
+            <p:extLst>
+              <p:ext uri="{D42A27DB-BD31-4B8C-83A1-F6EECF244321}">
+                <p14:modId xmlns:p14="http://schemas.microsoft.com/office/powerpoint/2010/main" val="3310253902"/>
+              </p:ext>
+            </p:extLst>
+          </p:nvPr>
+        </p:nvGraphicFramePr>
+        <p:xfrm>
+          <a:off x="8920120" y="8958795"/>
+          <a:ext cx="344487" cy="327025"/>
+        </p:xfrm>
+        <a:graphic>
+          <a:graphicData uri="http://schemas.openxmlformats.org/presentationml/2006/ole">
+            <mc:AlternateContent xmlns:mc="http://schemas.openxmlformats.org/markup-compatibility/2006">
+              <mc:Choice xmlns:v="urn:schemas-microsoft-com:vml" Requires="v">
+                <p:oleObj spid="_x0000_s7331" name="AxMath" r:id="rId22" imgW="239760" imgH="228960" progId="Equation.AxMath">
+                  <p:embed/>
+                </p:oleObj>
+              </mc:Choice>
+              <mc:Fallback>
+                <p:oleObj name="AxMath" r:id="rId22" imgW="239760" imgH="228960" progId="Equation.AxMath">
+                  <p:embed/>
+                  <p:pic>
+                    <p:nvPicPr>
+                      <p:cNvPr id="341" name="对象 340"/>
+                      <p:cNvPicPr/>
+                      <p:nvPr/>
+                    </p:nvPicPr>
+                    <p:blipFill>
+                      <a:blip r:embed="rId20"/>
+                      <a:stretch>
+                        <a:fillRect/>
+                      </a:stretch>
+                    </p:blipFill>
+                    <p:spPr>
+                      <a:xfrm>
+                        <a:off x="8920120" y="8958795"/>
+                        <a:ext cx="344487" cy="327025"/>
+                      </a:xfrm>
+                      <a:prstGeom prst="rect">
+                        <a:avLst/>
+                      </a:prstGeom>
+                    </p:spPr>
+                  </p:pic>
+                </p:oleObj>
+              </mc:Fallback>
+            </mc:AlternateContent>
+          </a:graphicData>
+        </a:graphic>
+      </p:graphicFrame>
+      <p:sp>
+        <p:nvSpPr>
+          <p:cNvPr id="393" name="虚尾箭头 392"/>
+          <p:cNvSpPr/>
+          <p:nvPr/>
+        </p:nvSpPr>
+        <p:spPr>
+          <a:xfrm rot="5400000">
+            <a:off x="6174510" y="8153623"/>
+            <a:ext cx="414751" cy="409575"/>
+          </a:xfrm>
+          <a:prstGeom prst="stripedRightArrow">
+            <a:avLst>
+              <a:gd name="adj1" fmla="val 50000"/>
+              <a:gd name="adj2" fmla="val 50000"/>
+            </a:avLst>
+          </a:prstGeom>
+          <a:solidFill>
+            <a:schemeClr val="accent5">
+              <a:lumMod val="20000"/>
+              <a:lumOff val="80000"/>
+            </a:schemeClr>
+          </a:solidFill>
+          <a:ln w="19050">
+            <a:solidFill>
+              <a:schemeClr val="accent5">
+                <a:lumMod val="75000"/>
+              </a:schemeClr>
+            </a:solidFill>
+          </a:ln>
+        </p:spPr>
+        <p:style>
+          <a:lnRef idx="2">
+            <a:schemeClr val="accent1">
+              <a:shade val="50000"/>
+            </a:schemeClr>
+          </a:lnRef>
+          <a:fillRef idx="1">
+            <a:schemeClr val="accent1"/>
+          </a:fillRef>
+          <a:effectRef idx="0">
+            <a:schemeClr val="accent1"/>
+          </a:effectRef>
+          <a:fontRef idx="minor">
+            <a:schemeClr val="lt1"/>
+          </a:fontRef>
+        </p:style>
+        <p:txBody>
+          <a:bodyPr rtlCol="0" anchor="ctr"/>
+          <a:lstStyle/>
+          <a:p>
+            <a:pPr algn="ctr"/>
+            <a:endParaRPr lang="zh-CN" altLang="en-US"/>
+          </a:p>
+        </p:txBody>
+      </p:sp>
+      <p:graphicFrame>
+        <p:nvGraphicFramePr>
+          <p:cNvPr id="402" name="对象 401"/>
+          <p:cNvGraphicFramePr>
+            <a:graphicFrameLocks noChangeAspect="1"/>
+          </p:cNvGraphicFramePr>
+          <p:nvPr>
+            <p:extLst>
+              <p:ext uri="{D42A27DB-BD31-4B8C-83A1-F6EECF244321}">
+                <p14:modId xmlns:p14="http://schemas.microsoft.com/office/powerpoint/2010/main" val="59978475"/>
+              </p:ext>
+            </p:extLst>
+          </p:nvPr>
+        </p:nvGraphicFramePr>
+        <p:xfrm>
+          <a:off x="4161368" y="9560847"/>
+          <a:ext cx="288925" cy="303212"/>
+        </p:xfrm>
+        <a:graphic>
+          <a:graphicData uri="http://schemas.openxmlformats.org/presentationml/2006/ole">
+            <mc:AlternateContent xmlns:mc="http://schemas.openxmlformats.org/markup-compatibility/2006">
+              <mc:Choice xmlns:v="urn:schemas-microsoft-com:vml" Requires="v">
+                <p:oleObj spid="_x0000_s7332" name="AxMath" r:id="rId13" imgW="218880" imgH="230400" progId="Equation.AxMath">
+                  <p:embed/>
+                </p:oleObj>
+              </mc:Choice>
+              <mc:Fallback>
+                <p:oleObj name="AxMath" r:id="rId13" imgW="218880" imgH="230400" progId="Equation.AxMath">
+                  <p:embed/>
+                  <p:pic>
+                    <p:nvPicPr>
+                      <p:cNvPr id="389" name="对象 388"/>
+                      <p:cNvPicPr/>
+                      <p:nvPr/>
+                    </p:nvPicPr>
+                    <p:blipFill>
+                      <a:blip r:embed="rId14"/>
+                      <a:stretch>
+                        <a:fillRect/>
+                      </a:stretch>
+                    </p:blipFill>
+                    <p:spPr>
+                      <a:xfrm>
+                        <a:off x="4161368" y="9560847"/>
+                        <a:ext cx="288925" cy="303212"/>
+                      </a:xfrm>
+                      <a:prstGeom prst="rect">
+                        <a:avLst/>
+                      </a:prstGeom>
+                    </p:spPr>
+                  </p:pic>
+                </p:oleObj>
+              </mc:Fallback>
+            </mc:AlternateContent>
+          </a:graphicData>
+        </a:graphic>
+      </p:graphicFrame>
+      <p:graphicFrame>
+        <p:nvGraphicFramePr>
+          <p:cNvPr id="403" name="对象 402"/>
+          <p:cNvGraphicFramePr>
+            <a:graphicFrameLocks noChangeAspect="1"/>
+          </p:cNvGraphicFramePr>
+          <p:nvPr>
+            <p:extLst>
+              <p:ext uri="{D42A27DB-BD31-4B8C-83A1-F6EECF244321}">
+                <p14:modId xmlns:p14="http://schemas.microsoft.com/office/powerpoint/2010/main" val="3812487652"/>
+              </p:ext>
+            </p:extLst>
+          </p:nvPr>
+        </p:nvGraphicFramePr>
+        <p:xfrm>
+          <a:off x="5530615" y="9553963"/>
+          <a:ext cx="322263" cy="330200"/>
+        </p:xfrm>
+        <a:graphic>
+          <a:graphicData uri="http://schemas.openxmlformats.org/presentationml/2006/ole">
+            <mc:AlternateContent xmlns:mc="http://schemas.openxmlformats.org/markup-compatibility/2006">
+              <mc:Choice xmlns:v="urn:schemas-microsoft-com:vml" Requires="v">
+                <p:oleObj spid="_x0000_s7333" name="AxMath" r:id="rId15" imgW="226080" imgH="230400" progId="Equation.AxMath">
+                  <p:embed/>
+                </p:oleObj>
+              </mc:Choice>
+              <mc:Fallback>
+                <p:oleObj name="AxMath" r:id="rId15" imgW="226080" imgH="230400" progId="Equation.AxMath">
+                  <p:embed/>
+                  <p:pic>
+                    <p:nvPicPr>
+                      <p:cNvPr id="390" name="对象 389"/>
+                      <p:cNvPicPr/>
+                      <p:nvPr/>
+                    </p:nvPicPr>
+                    <p:blipFill>
+                      <a:blip r:embed="rId16"/>
+                      <a:stretch>
+                        <a:fillRect/>
+                      </a:stretch>
+                    </p:blipFill>
+                    <p:spPr>
+                      <a:xfrm>
+                        <a:off x="5530615" y="9553963"/>
+                        <a:ext cx="322263" cy="330200"/>
+                      </a:xfrm>
+                      <a:prstGeom prst="rect">
+                        <a:avLst/>
+                      </a:prstGeom>
+                    </p:spPr>
+                  </p:pic>
+                </p:oleObj>
+              </mc:Fallback>
+            </mc:AlternateContent>
+          </a:graphicData>
+        </a:graphic>
+      </p:graphicFrame>
+      <p:graphicFrame>
+        <p:nvGraphicFramePr>
+          <p:cNvPr id="404" name="对象 403"/>
+          <p:cNvGraphicFramePr>
+            <a:graphicFrameLocks noChangeAspect="1"/>
+          </p:cNvGraphicFramePr>
+          <p:nvPr>
+            <p:extLst>
+              <p:ext uri="{D42A27DB-BD31-4B8C-83A1-F6EECF244321}">
+                <p14:modId xmlns:p14="http://schemas.microsoft.com/office/powerpoint/2010/main" val="1401519649"/>
+              </p:ext>
+            </p:extLst>
+          </p:nvPr>
+        </p:nvGraphicFramePr>
+        <p:xfrm>
+          <a:off x="6921121" y="9550637"/>
+          <a:ext cx="325438" cy="330200"/>
+        </p:xfrm>
+        <a:graphic>
+          <a:graphicData uri="http://schemas.openxmlformats.org/presentationml/2006/ole">
+            <mc:AlternateContent xmlns:mc="http://schemas.openxmlformats.org/markup-compatibility/2006">
+              <mc:Choice xmlns:v="urn:schemas-microsoft-com:vml" Requires="v">
+                <p:oleObj spid="_x0000_s7334" name="AxMath" r:id="rId17" imgW="227520" imgH="230400" progId="Equation.AxMath">
+                  <p:embed/>
+                </p:oleObj>
+              </mc:Choice>
+              <mc:Fallback>
+                <p:oleObj name="AxMath" r:id="rId17" imgW="227520" imgH="230400" progId="Equation.AxMath">
+                  <p:embed/>
+                  <p:pic>
+                    <p:nvPicPr>
+                      <p:cNvPr id="391" name="对象 390"/>
+                      <p:cNvPicPr/>
+                      <p:nvPr/>
+                    </p:nvPicPr>
+                    <p:blipFill>
+                      <a:blip r:embed="rId18"/>
+                      <a:stretch>
+                        <a:fillRect/>
+                      </a:stretch>
+                    </p:blipFill>
+                    <p:spPr>
+                      <a:xfrm>
+                        <a:off x="6921121" y="9550637"/>
+                        <a:ext cx="325438" cy="330200"/>
+                      </a:xfrm>
+                      <a:prstGeom prst="rect">
+                        <a:avLst/>
+                      </a:prstGeom>
+                    </p:spPr>
+                  </p:pic>
+                </p:oleObj>
+              </mc:Fallback>
+            </mc:AlternateContent>
+          </a:graphicData>
+        </a:graphic>
+      </p:graphicFrame>
+      <p:graphicFrame>
+        <p:nvGraphicFramePr>
+          <p:cNvPr id="405" name="对象 404"/>
+          <p:cNvGraphicFramePr>
+            <a:graphicFrameLocks noChangeAspect="1"/>
+          </p:cNvGraphicFramePr>
+          <p:nvPr>
+            <p:extLst>
+              <p:ext uri="{D42A27DB-BD31-4B8C-83A1-F6EECF244321}">
+                <p14:modId xmlns:p14="http://schemas.microsoft.com/office/powerpoint/2010/main" val="2527614852"/>
+              </p:ext>
+            </p:extLst>
+          </p:nvPr>
+        </p:nvGraphicFramePr>
+        <p:xfrm>
+          <a:off x="8920120" y="9552209"/>
+          <a:ext cx="344487" cy="327025"/>
+        </p:xfrm>
+        <a:graphic>
+          <a:graphicData uri="http://schemas.openxmlformats.org/presentationml/2006/ole">
+            <mc:AlternateContent xmlns:mc="http://schemas.openxmlformats.org/markup-compatibility/2006">
+              <mc:Choice xmlns:v="urn:schemas-microsoft-com:vml" Requires="v">
+                <p:oleObj spid="_x0000_s7335" name="AxMath" r:id="rId23" imgW="239760" imgH="228960" progId="Equation.AxMath">
+                  <p:embed/>
+                </p:oleObj>
+              </mc:Choice>
+              <mc:Fallback>
+                <p:oleObj name="AxMath" r:id="rId23" imgW="239760" imgH="228960" progId="Equation.AxMath">
+                  <p:embed/>
+                  <p:pic>
+                    <p:nvPicPr>
+                      <p:cNvPr id="392" name="对象 391"/>
+                      <p:cNvPicPr/>
+                      <p:nvPr/>
+                    </p:nvPicPr>
+                    <p:blipFill>
+                      <a:blip r:embed="rId20"/>
+                      <a:stretch>
+                        <a:fillRect/>
+                      </a:stretch>
+                    </p:blipFill>
+                    <p:spPr>
+                      <a:xfrm>
+                        <a:off x="8920120" y="9552209"/>
+                        <a:ext cx="344487" cy="327025"/>
+                      </a:xfrm>
+                      <a:prstGeom prst="rect">
+                        <a:avLst/>
+                      </a:prstGeom>
+                    </p:spPr>
+                  </p:pic>
+                </p:oleObj>
+              </mc:Fallback>
+            </mc:AlternateContent>
+          </a:graphicData>
+        </a:graphic>
+      </p:graphicFrame>
+      <p:graphicFrame>
+        <p:nvGraphicFramePr>
+          <p:cNvPr id="406" name="对象 405"/>
+          <p:cNvGraphicFramePr>
+            <a:graphicFrameLocks noChangeAspect="1"/>
+          </p:cNvGraphicFramePr>
+          <p:nvPr>
+            <p:extLst>
+              <p:ext uri="{D42A27DB-BD31-4B8C-83A1-F6EECF244321}">
+                <p14:modId xmlns:p14="http://schemas.microsoft.com/office/powerpoint/2010/main" val="1051272037"/>
+              </p:ext>
+            </p:extLst>
+          </p:nvPr>
+        </p:nvGraphicFramePr>
+        <p:xfrm>
+          <a:off x="4161368" y="10178856"/>
+          <a:ext cx="288925" cy="303212"/>
+        </p:xfrm>
+        <a:graphic>
+          <a:graphicData uri="http://schemas.openxmlformats.org/presentationml/2006/ole">
+            <mc:AlternateContent xmlns:mc="http://schemas.openxmlformats.org/markup-compatibility/2006">
+              <mc:Choice xmlns:v="urn:schemas-microsoft-com:vml" Requires="v">
+                <p:oleObj spid="_x0000_s7336" name="AxMath" r:id="rId13" imgW="218880" imgH="230400" progId="Equation.AxMath">
+                  <p:embed/>
+                </p:oleObj>
+              </mc:Choice>
+              <mc:Fallback>
+                <p:oleObj name="AxMath" r:id="rId13" imgW="218880" imgH="230400" progId="Equation.AxMath">
+                  <p:embed/>
+                  <p:pic>
+                    <p:nvPicPr>
+                      <p:cNvPr id="402" name="对象 401"/>
+                      <p:cNvPicPr/>
+                      <p:nvPr/>
+                    </p:nvPicPr>
+                    <p:blipFill>
+                      <a:blip r:embed="rId14"/>
+                      <a:stretch>
+                        <a:fillRect/>
+                      </a:stretch>
+                    </p:blipFill>
+                    <p:spPr>
+                      <a:xfrm>
+                        <a:off x="4161368" y="10178856"/>
+                        <a:ext cx="288925" cy="303212"/>
+                      </a:xfrm>
+                      <a:prstGeom prst="rect">
+                        <a:avLst/>
+                      </a:prstGeom>
+                    </p:spPr>
+                  </p:pic>
+                </p:oleObj>
+              </mc:Fallback>
+            </mc:AlternateContent>
+          </a:graphicData>
+        </a:graphic>
+      </p:graphicFrame>
+      <p:graphicFrame>
+        <p:nvGraphicFramePr>
+          <p:cNvPr id="407" name="对象 406"/>
+          <p:cNvGraphicFramePr>
+            <a:graphicFrameLocks noChangeAspect="1"/>
+          </p:cNvGraphicFramePr>
+          <p:nvPr>
+            <p:extLst>
+              <p:ext uri="{D42A27DB-BD31-4B8C-83A1-F6EECF244321}">
+                <p14:modId xmlns:p14="http://schemas.microsoft.com/office/powerpoint/2010/main" val="406101906"/>
+              </p:ext>
+            </p:extLst>
+          </p:nvPr>
+        </p:nvGraphicFramePr>
+        <p:xfrm>
+          <a:off x="5530615" y="10171972"/>
+          <a:ext cx="322263" cy="330200"/>
+        </p:xfrm>
+        <a:graphic>
+          <a:graphicData uri="http://schemas.openxmlformats.org/presentationml/2006/ole">
+            <mc:AlternateContent xmlns:mc="http://schemas.openxmlformats.org/markup-compatibility/2006">
+              <mc:Choice xmlns:v="urn:schemas-microsoft-com:vml" Requires="v">
+                <p:oleObj spid="_x0000_s7337" name="AxMath" r:id="rId15" imgW="226080" imgH="230400" progId="Equation.AxMath">
+                  <p:embed/>
+                </p:oleObj>
+              </mc:Choice>
+              <mc:Fallback>
+                <p:oleObj name="AxMath" r:id="rId15" imgW="226080" imgH="230400" progId="Equation.AxMath">
+                  <p:embed/>
+                  <p:pic>
+                    <p:nvPicPr>
+                      <p:cNvPr id="403" name="对象 402"/>
+                      <p:cNvPicPr/>
+                      <p:nvPr/>
+                    </p:nvPicPr>
+                    <p:blipFill>
+                      <a:blip r:embed="rId16"/>
+                      <a:stretch>
+                        <a:fillRect/>
+                      </a:stretch>
+                    </p:blipFill>
+                    <p:spPr>
+                      <a:xfrm>
+                        <a:off x="5530615" y="10171972"/>
+                        <a:ext cx="322263" cy="330200"/>
+                      </a:xfrm>
+                      <a:prstGeom prst="rect">
+                        <a:avLst/>
+                      </a:prstGeom>
+                    </p:spPr>
+                  </p:pic>
+                </p:oleObj>
+              </mc:Fallback>
+            </mc:AlternateContent>
+          </a:graphicData>
+        </a:graphic>
+      </p:graphicFrame>
+      <p:graphicFrame>
+        <p:nvGraphicFramePr>
+          <p:cNvPr id="408" name="对象 407"/>
+          <p:cNvGraphicFramePr>
+            <a:graphicFrameLocks noChangeAspect="1"/>
+          </p:cNvGraphicFramePr>
+          <p:nvPr>
+            <p:extLst>
+              <p:ext uri="{D42A27DB-BD31-4B8C-83A1-F6EECF244321}">
+                <p14:modId xmlns:p14="http://schemas.microsoft.com/office/powerpoint/2010/main" val="2552662681"/>
+              </p:ext>
+            </p:extLst>
+          </p:nvPr>
+        </p:nvGraphicFramePr>
+        <p:xfrm>
+          <a:off x="6921121" y="10168646"/>
+          <a:ext cx="325438" cy="330200"/>
+        </p:xfrm>
+        <a:graphic>
+          <a:graphicData uri="http://schemas.openxmlformats.org/presentationml/2006/ole">
+            <mc:AlternateContent xmlns:mc="http://schemas.openxmlformats.org/markup-compatibility/2006">
+              <mc:Choice xmlns:v="urn:schemas-microsoft-com:vml" Requires="v">
+                <p:oleObj spid="_x0000_s7338" name="AxMath" r:id="rId17" imgW="227520" imgH="230400" progId="Equation.AxMath">
+                  <p:embed/>
+                </p:oleObj>
+              </mc:Choice>
+              <mc:Fallback>
+                <p:oleObj name="AxMath" r:id="rId17" imgW="227520" imgH="230400" progId="Equation.AxMath">
+                  <p:embed/>
+                  <p:pic>
+                    <p:nvPicPr>
+                      <p:cNvPr id="404" name="对象 403"/>
+                      <p:cNvPicPr/>
+                      <p:nvPr/>
+                    </p:nvPicPr>
+                    <p:blipFill>
+                      <a:blip r:embed="rId18"/>
+                      <a:stretch>
+                        <a:fillRect/>
+                      </a:stretch>
+                    </p:blipFill>
+                    <p:spPr>
+                      <a:xfrm>
+                        <a:off x="6921121" y="10168646"/>
+                        <a:ext cx="325438" cy="330200"/>
+                      </a:xfrm>
+                      <a:prstGeom prst="rect">
+                        <a:avLst/>
+                      </a:prstGeom>
+                    </p:spPr>
+                  </p:pic>
+                </p:oleObj>
+              </mc:Fallback>
+            </mc:AlternateContent>
+          </a:graphicData>
+        </a:graphic>
+      </p:graphicFrame>
+      <p:graphicFrame>
+        <p:nvGraphicFramePr>
+          <p:cNvPr id="409" name="对象 408"/>
+          <p:cNvGraphicFramePr>
+            <a:graphicFrameLocks noChangeAspect="1"/>
+          </p:cNvGraphicFramePr>
+          <p:nvPr>
+            <p:extLst>
+              <p:ext uri="{D42A27DB-BD31-4B8C-83A1-F6EECF244321}">
+                <p14:modId xmlns:p14="http://schemas.microsoft.com/office/powerpoint/2010/main" val="1185761599"/>
+              </p:ext>
+            </p:extLst>
+          </p:nvPr>
+        </p:nvGraphicFramePr>
+        <p:xfrm>
+          <a:off x="8920120" y="10170218"/>
+          <a:ext cx="344487" cy="327025"/>
+        </p:xfrm>
+        <a:graphic>
+          <a:graphicData uri="http://schemas.openxmlformats.org/presentationml/2006/ole">
+            <mc:AlternateContent xmlns:mc="http://schemas.openxmlformats.org/markup-compatibility/2006">
+              <mc:Choice xmlns:v="urn:schemas-microsoft-com:vml" Requires="v">
+                <p:oleObj spid="_x0000_s7339" name="AxMath" r:id="rId24" imgW="239760" imgH="228960" progId="Equation.AxMath">
+                  <p:embed/>
+                </p:oleObj>
+              </mc:Choice>
+              <mc:Fallback>
+                <p:oleObj name="AxMath" r:id="rId24" imgW="239760" imgH="228960" progId="Equation.AxMath">
+                  <p:embed/>
+                  <p:pic>
+                    <p:nvPicPr>
+                      <p:cNvPr id="405" name="对象 404"/>
+                      <p:cNvPicPr/>
+                      <p:nvPr/>
+                    </p:nvPicPr>
+                    <p:blipFill>
+                      <a:blip r:embed="rId20"/>
+                      <a:stretch>
+                        <a:fillRect/>
+                      </a:stretch>
+                    </p:blipFill>
+                    <p:spPr>
+                      <a:xfrm>
+                        <a:off x="8920120" y="10170218"/>
+                        <a:ext cx="344487" cy="327025"/>
+                      </a:xfrm>
+                      <a:prstGeom prst="rect">
+                        <a:avLst/>
+                      </a:prstGeom>
+                    </p:spPr>
+                  </p:pic>
+                </p:oleObj>
+              </mc:Fallback>
+            </mc:AlternateContent>
+          </a:graphicData>
+        </a:graphic>
+      </p:graphicFrame>
+      <p:graphicFrame>
+        <p:nvGraphicFramePr>
+          <p:cNvPr id="410" name="对象 409"/>
+          <p:cNvGraphicFramePr>
+            <a:graphicFrameLocks noChangeAspect="1"/>
+          </p:cNvGraphicFramePr>
+          <p:nvPr>
+            <p:extLst>
+              <p:ext uri="{D42A27DB-BD31-4B8C-83A1-F6EECF244321}">
+                <p14:modId xmlns:p14="http://schemas.microsoft.com/office/powerpoint/2010/main" val="696373533"/>
+              </p:ext>
+            </p:extLst>
+          </p:nvPr>
+        </p:nvGraphicFramePr>
+        <p:xfrm>
+          <a:off x="4161368" y="11239471"/>
+          <a:ext cx="288925" cy="303212"/>
+        </p:xfrm>
+        <a:graphic>
+          <a:graphicData uri="http://schemas.openxmlformats.org/presentationml/2006/ole">
+            <mc:AlternateContent xmlns:mc="http://schemas.openxmlformats.org/markup-compatibility/2006">
+              <mc:Choice xmlns:v="urn:schemas-microsoft-com:vml" Requires="v">
+                <p:oleObj spid="_x0000_s7340" name="AxMath" r:id="rId13" imgW="218880" imgH="230400" progId="Equation.AxMath">
+                  <p:embed/>
+                </p:oleObj>
+              </mc:Choice>
+              <mc:Fallback>
+                <p:oleObj name="AxMath" r:id="rId13" imgW="218880" imgH="230400" progId="Equation.AxMath">
+                  <p:embed/>
+                  <p:pic>
+                    <p:nvPicPr>
+                      <p:cNvPr id="406" name="对象 405"/>
+                      <p:cNvPicPr/>
+                      <p:nvPr/>
+                    </p:nvPicPr>
+                    <p:blipFill>
+                      <a:blip r:embed="rId14"/>
+                      <a:stretch>
+                        <a:fillRect/>
+                      </a:stretch>
+                    </p:blipFill>
+                    <p:spPr>
+                      <a:xfrm>
+                        <a:off x="4161368" y="11239471"/>
+                        <a:ext cx="288925" cy="303212"/>
+                      </a:xfrm>
+                      <a:prstGeom prst="rect">
+                        <a:avLst/>
+                      </a:prstGeom>
+                    </p:spPr>
+                  </p:pic>
+                </p:oleObj>
+              </mc:Fallback>
+            </mc:AlternateContent>
+          </a:graphicData>
+        </a:graphic>
+      </p:graphicFrame>
+      <p:graphicFrame>
+        <p:nvGraphicFramePr>
+          <p:cNvPr id="411" name="对象 410"/>
+          <p:cNvGraphicFramePr>
+            <a:graphicFrameLocks noChangeAspect="1"/>
+          </p:cNvGraphicFramePr>
+          <p:nvPr>
+            <p:extLst>
+              <p:ext uri="{D42A27DB-BD31-4B8C-83A1-F6EECF244321}">
+                <p14:modId xmlns:p14="http://schemas.microsoft.com/office/powerpoint/2010/main" val="2930516404"/>
+              </p:ext>
+            </p:extLst>
+          </p:nvPr>
+        </p:nvGraphicFramePr>
+        <p:xfrm>
+          <a:off x="5530615" y="11232587"/>
+          <a:ext cx="322263" cy="330200"/>
+        </p:xfrm>
+        <a:graphic>
+          <a:graphicData uri="http://schemas.openxmlformats.org/presentationml/2006/ole">
+            <mc:AlternateContent xmlns:mc="http://schemas.openxmlformats.org/markup-compatibility/2006">
+              <mc:Choice xmlns:v="urn:schemas-microsoft-com:vml" Requires="v">
+                <p:oleObj spid="_x0000_s7341" name="AxMath" r:id="rId15" imgW="226080" imgH="230400" progId="Equation.AxMath">
+                  <p:embed/>
+                </p:oleObj>
+              </mc:Choice>
+              <mc:Fallback>
+                <p:oleObj name="AxMath" r:id="rId15" imgW="226080" imgH="230400" progId="Equation.AxMath">
+                  <p:embed/>
+                  <p:pic>
+                    <p:nvPicPr>
+                      <p:cNvPr id="407" name="对象 406"/>
+                      <p:cNvPicPr/>
+                      <p:nvPr/>
+                    </p:nvPicPr>
+                    <p:blipFill>
+                      <a:blip r:embed="rId16"/>
+                      <a:stretch>
+                        <a:fillRect/>
+                      </a:stretch>
+                    </p:blipFill>
+                    <p:spPr>
+                      <a:xfrm>
+                        <a:off x="5530615" y="11232587"/>
+                        <a:ext cx="322263" cy="330200"/>
+                      </a:xfrm>
+                      <a:prstGeom prst="rect">
+                        <a:avLst/>
+                      </a:prstGeom>
+                    </p:spPr>
+                  </p:pic>
+                </p:oleObj>
+              </mc:Fallback>
+            </mc:AlternateContent>
+          </a:graphicData>
+        </a:graphic>
+      </p:graphicFrame>
+      <p:graphicFrame>
+        <p:nvGraphicFramePr>
+          <p:cNvPr id="412" name="对象 411"/>
+          <p:cNvGraphicFramePr>
+            <a:graphicFrameLocks noChangeAspect="1"/>
+          </p:cNvGraphicFramePr>
+          <p:nvPr>
+            <p:extLst>
+              <p:ext uri="{D42A27DB-BD31-4B8C-83A1-F6EECF244321}">
+                <p14:modId xmlns:p14="http://schemas.microsoft.com/office/powerpoint/2010/main" val="697783834"/>
+              </p:ext>
+            </p:extLst>
+          </p:nvPr>
+        </p:nvGraphicFramePr>
+        <p:xfrm>
+          <a:off x="6921121" y="11229261"/>
+          <a:ext cx="325438" cy="330200"/>
+        </p:xfrm>
+        <a:graphic>
+          <a:graphicData uri="http://schemas.openxmlformats.org/presentationml/2006/ole">
+            <mc:AlternateContent xmlns:mc="http://schemas.openxmlformats.org/markup-compatibility/2006">
+              <mc:Choice xmlns:v="urn:schemas-microsoft-com:vml" Requires="v">
+                <p:oleObj spid="_x0000_s7342" name="AxMath" r:id="rId17" imgW="227520" imgH="230400" progId="Equation.AxMath">
+                  <p:embed/>
+                </p:oleObj>
+              </mc:Choice>
+              <mc:Fallback>
+                <p:oleObj name="AxMath" r:id="rId17" imgW="227520" imgH="230400" progId="Equation.AxMath">
+                  <p:embed/>
+                  <p:pic>
+                    <p:nvPicPr>
+                      <p:cNvPr id="408" name="对象 407"/>
+                      <p:cNvPicPr/>
+                      <p:nvPr/>
+                    </p:nvPicPr>
+                    <p:blipFill>
+                      <a:blip r:embed="rId18"/>
+                      <a:stretch>
+                        <a:fillRect/>
+                      </a:stretch>
+                    </p:blipFill>
+                    <p:spPr>
+                      <a:xfrm>
+                        <a:off x="6921121" y="11229261"/>
+                        <a:ext cx="325438" cy="330200"/>
+                      </a:xfrm>
+                      <a:prstGeom prst="rect">
+                        <a:avLst/>
+                      </a:prstGeom>
+                    </p:spPr>
+                  </p:pic>
+                </p:oleObj>
+              </mc:Fallback>
+            </mc:AlternateContent>
+          </a:graphicData>
+        </a:graphic>
+      </p:graphicFrame>
+      <p:graphicFrame>
+        <p:nvGraphicFramePr>
+          <p:cNvPr id="413" name="对象 412"/>
+          <p:cNvGraphicFramePr>
+            <a:graphicFrameLocks noChangeAspect="1"/>
+          </p:cNvGraphicFramePr>
+          <p:nvPr>
+            <p:extLst>
+              <p:ext uri="{D42A27DB-BD31-4B8C-83A1-F6EECF244321}">
+                <p14:modId xmlns:p14="http://schemas.microsoft.com/office/powerpoint/2010/main" val="3067062143"/>
+              </p:ext>
+            </p:extLst>
+          </p:nvPr>
+        </p:nvGraphicFramePr>
+        <p:xfrm>
+          <a:off x="8920120" y="11230833"/>
+          <a:ext cx="344487" cy="327025"/>
+        </p:xfrm>
+        <a:graphic>
+          <a:graphicData uri="http://schemas.openxmlformats.org/presentationml/2006/ole">
+            <mc:AlternateContent xmlns:mc="http://schemas.openxmlformats.org/markup-compatibility/2006">
+              <mc:Choice xmlns:v="urn:schemas-microsoft-com:vml" Requires="v">
+                <p:oleObj spid="_x0000_s7343" name="AxMath" r:id="rId25" imgW="239760" imgH="228960" progId="Equation.AxMath">
+                  <p:embed/>
+                </p:oleObj>
+              </mc:Choice>
+              <mc:Fallback>
+                <p:oleObj name="AxMath" r:id="rId25" imgW="239760" imgH="228960" progId="Equation.AxMath">
+                  <p:embed/>
+                  <p:pic>
+                    <p:nvPicPr>
+                      <p:cNvPr id="409" name="对象 408"/>
+                      <p:cNvPicPr/>
+                      <p:nvPr/>
+                    </p:nvPicPr>
+                    <p:blipFill>
+                      <a:blip r:embed="rId20"/>
+                      <a:stretch>
+                        <a:fillRect/>
+                      </a:stretch>
+                    </p:blipFill>
+                    <p:spPr>
+                      <a:xfrm>
+                        <a:off x="8920120" y="11230833"/>
+                        <a:ext cx="344487" cy="327025"/>
+                      </a:xfrm>
+                      <a:prstGeom prst="rect">
+                        <a:avLst/>
+                      </a:prstGeom>
+                    </p:spPr>
+                  </p:pic>
+                </p:oleObj>
+              </mc:Fallback>
+            </mc:AlternateContent>
+          </a:graphicData>
+        </a:graphic>
+      </p:graphicFrame>
+      <p:graphicFrame>
+        <p:nvGraphicFramePr>
+          <p:cNvPr id="414" name="对象 413"/>
+          <p:cNvGraphicFramePr>
+            <a:graphicFrameLocks noChangeAspect="1"/>
+          </p:cNvGraphicFramePr>
+          <p:nvPr>
+            <p:extLst>
+              <p:ext uri="{D42A27DB-BD31-4B8C-83A1-F6EECF244321}">
+                <p14:modId xmlns:p14="http://schemas.microsoft.com/office/powerpoint/2010/main" val="1633829801"/>
+              </p:ext>
+            </p:extLst>
+          </p:nvPr>
+        </p:nvGraphicFramePr>
+        <p:xfrm>
+          <a:off x="4161368" y="11810935"/>
+          <a:ext cx="288925" cy="303212"/>
+        </p:xfrm>
+        <a:graphic>
+          <a:graphicData uri="http://schemas.openxmlformats.org/presentationml/2006/ole">
+            <mc:AlternateContent xmlns:mc="http://schemas.openxmlformats.org/markup-compatibility/2006">
+              <mc:Choice xmlns:v="urn:schemas-microsoft-com:vml" Requires="v">
+                <p:oleObj spid="_x0000_s7344" name="AxMath" r:id="rId13" imgW="218880" imgH="230400" progId="Equation.AxMath">
+                  <p:embed/>
+                </p:oleObj>
+              </mc:Choice>
+              <mc:Fallback>
+                <p:oleObj name="AxMath" r:id="rId13" imgW="218880" imgH="230400" progId="Equation.AxMath">
+                  <p:embed/>
+                  <p:pic>
+                    <p:nvPicPr>
+                      <p:cNvPr id="410" name="对象 409"/>
+                      <p:cNvPicPr/>
+                      <p:nvPr/>
+                    </p:nvPicPr>
+                    <p:blipFill>
+                      <a:blip r:embed="rId14"/>
+                      <a:stretch>
+                        <a:fillRect/>
+                      </a:stretch>
+                    </p:blipFill>
+                    <p:spPr>
+                      <a:xfrm>
+                        <a:off x="4161368" y="11810935"/>
+                        <a:ext cx="288925" cy="303212"/>
+                      </a:xfrm>
+                      <a:prstGeom prst="rect">
+                        <a:avLst/>
+                      </a:prstGeom>
+                    </p:spPr>
+                  </p:pic>
+                </p:oleObj>
+              </mc:Fallback>
+            </mc:AlternateContent>
+          </a:graphicData>
+        </a:graphic>
+      </p:graphicFrame>
+      <p:graphicFrame>
+        <p:nvGraphicFramePr>
+          <p:cNvPr id="415" name="对象 414"/>
+          <p:cNvGraphicFramePr>
+            <a:graphicFrameLocks noChangeAspect="1"/>
+          </p:cNvGraphicFramePr>
+          <p:nvPr>
+            <p:extLst>
+              <p:ext uri="{D42A27DB-BD31-4B8C-83A1-F6EECF244321}">
+                <p14:modId xmlns:p14="http://schemas.microsoft.com/office/powerpoint/2010/main" val="2906084419"/>
+              </p:ext>
+            </p:extLst>
+          </p:nvPr>
+        </p:nvGraphicFramePr>
+        <p:xfrm>
+          <a:off x="5530615" y="11804051"/>
+          <a:ext cx="322263" cy="330200"/>
+        </p:xfrm>
+        <a:graphic>
+          <a:graphicData uri="http://schemas.openxmlformats.org/presentationml/2006/ole">
+            <mc:AlternateContent xmlns:mc="http://schemas.openxmlformats.org/markup-compatibility/2006">
+              <mc:Choice xmlns:v="urn:schemas-microsoft-com:vml" Requires="v">
+                <p:oleObj spid="_x0000_s7345" name="AxMath" r:id="rId15" imgW="226080" imgH="230400" progId="Equation.AxMath">
+                  <p:embed/>
+                </p:oleObj>
+              </mc:Choice>
+              <mc:Fallback>
+                <p:oleObj name="AxMath" r:id="rId15" imgW="226080" imgH="230400" progId="Equation.AxMath">
+                  <p:embed/>
+                  <p:pic>
+                    <p:nvPicPr>
+                      <p:cNvPr id="411" name="对象 410"/>
+                      <p:cNvPicPr/>
+                      <p:nvPr/>
+                    </p:nvPicPr>
+                    <p:blipFill>
+                      <a:blip r:embed="rId16"/>
+                      <a:stretch>
+                        <a:fillRect/>
+                      </a:stretch>
+                    </p:blipFill>
+                    <p:spPr>
+                      <a:xfrm>
+                        <a:off x="5530615" y="11804051"/>
+                        <a:ext cx="322263" cy="330200"/>
+                      </a:xfrm>
+                      <a:prstGeom prst="rect">
+                        <a:avLst/>
+                      </a:prstGeom>
+                    </p:spPr>
+                  </p:pic>
+                </p:oleObj>
+              </mc:Fallback>
+            </mc:AlternateContent>
+          </a:graphicData>
+        </a:graphic>
+      </p:graphicFrame>
+      <p:graphicFrame>
+        <p:nvGraphicFramePr>
+          <p:cNvPr id="416" name="对象 415"/>
+          <p:cNvGraphicFramePr>
+            <a:graphicFrameLocks noChangeAspect="1"/>
+          </p:cNvGraphicFramePr>
+          <p:nvPr>
+            <p:extLst>
+              <p:ext uri="{D42A27DB-BD31-4B8C-83A1-F6EECF244321}">
+                <p14:modId xmlns:p14="http://schemas.microsoft.com/office/powerpoint/2010/main" val="1074934330"/>
+              </p:ext>
+            </p:extLst>
+          </p:nvPr>
+        </p:nvGraphicFramePr>
+        <p:xfrm>
+          <a:off x="6921121" y="11800725"/>
+          <a:ext cx="325438" cy="330200"/>
+        </p:xfrm>
+        <a:graphic>
+          <a:graphicData uri="http://schemas.openxmlformats.org/presentationml/2006/ole">
+            <mc:AlternateContent xmlns:mc="http://schemas.openxmlformats.org/markup-compatibility/2006">
+              <mc:Choice xmlns:v="urn:schemas-microsoft-com:vml" Requires="v">
+                <p:oleObj spid="_x0000_s7346" name="AxMath" r:id="rId17" imgW="227520" imgH="230400" progId="Equation.AxMath">
+                  <p:embed/>
+                </p:oleObj>
+              </mc:Choice>
+              <mc:Fallback>
+                <p:oleObj name="AxMath" r:id="rId17" imgW="227520" imgH="230400" progId="Equation.AxMath">
+                  <p:embed/>
+                  <p:pic>
+                    <p:nvPicPr>
+                      <p:cNvPr id="412" name="对象 411"/>
+                      <p:cNvPicPr/>
+                      <p:nvPr/>
+                    </p:nvPicPr>
+                    <p:blipFill>
+                      <a:blip r:embed="rId18"/>
+                      <a:stretch>
+                        <a:fillRect/>
+                      </a:stretch>
+                    </p:blipFill>
+                    <p:spPr>
+                      <a:xfrm>
+                        <a:off x="6921121" y="11800725"/>
+                        <a:ext cx="325438" cy="330200"/>
+                      </a:xfrm>
+                      <a:prstGeom prst="rect">
+                        <a:avLst/>
+                      </a:prstGeom>
+                    </p:spPr>
+                  </p:pic>
+                </p:oleObj>
+              </mc:Fallback>
+            </mc:AlternateContent>
+          </a:graphicData>
+        </a:graphic>
+      </p:graphicFrame>
+      <p:graphicFrame>
+        <p:nvGraphicFramePr>
+          <p:cNvPr id="417" name="对象 416"/>
+          <p:cNvGraphicFramePr>
+            <a:graphicFrameLocks noChangeAspect="1"/>
+          </p:cNvGraphicFramePr>
+          <p:nvPr>
+            <p:extLst>
+              <p:ext uri="{D42A27DB-BD31-4B8C-83A1-F6EECF244321}">
+                <p14:modId xmlns:p14="http://schemas.microsoft.com/office/powerpoint/2010/main" val="4073160585"/>
+              </p:ext>
+            </p:extLst>
+          </p:nvPr>
+        </p:nvGraphicFramePr>
+        <p:xfrm>
+          <a:off x="8920120" y="11802297"/>
+          <a:ext cx="344487" cy="327025"/>
+        </p:xfrm>
+        <a:graphic>
+          <a:graphicData uri="http://schemas.openxmlformats.org/presentationml/2006/ole">
+            <mc:AlternateContent xmlns:mc="http://schemas.openxmlformats.org/markup-compatibility/2006">
+              <mc:Choice xmlns:v="urn:schemas-microsoft-com:vml" Requires="v">
+                <p:oleObj spid="_x0000_s7347" name="AxMath" r:id="rId26" imgW="239760" imgH="228960" progId="Equation.AxMath">
+                  <p:embed/>
+                </p:oleObj>
+              </mc:Choice>
+              <mc:Fallback>
+                <p:oleObj name="AxMath" r:id="rId26" imgW="239760" imgH="228960" progId="Equation.AxMath">
+                  <p:embed/>
+                  <p:pic>
+                    <p:nvPicPr>
+                      <p:cNvPr id="413" name="对象 412"/>
+                      <p:cNvPicPr/>
+                      <p:nvPr/>
+                    </p:nvPicPr>
+                    <p:blipFill>
+                      <a:blip r:embed="rId20"/>
+                      <a:stretch>
+                        <a:fillRect/>
+                      </a:stretch>
+                    </p:blipFill>
+                    <p:spPr>
+                      <a:xfrm>
+                        <a:off x="8920120" y="11802297"/>
+                        <a:ext cx="344487" cy="327025"/>
+                      </a:xfrm>
+                      <a:prstGeom prst="rect">
+                        <a:avLst/>
+                      </a:prstGeom>
+                    </p:spPr>
+                  </p:pic>
+                </p:oleObj>
+              </mc:Fallback>
+            </mc:AlternateContent>
+          </a:graphicData>
+        </a:graphic>
+      </p:graphicFrame>
+    </p:spTree>
+    <p:extLst>
+      <p:ext uri="{BB962C8B-B14F-4D97-AF65-F5344CB8AC3E}">
+        <p14:creationId xmlns:p14="http://schemas.microsoft.com/office/powerpoint/2010/main" val="2957867466"/>
       </p:ext>
     </p:extLst>
   </p:cSld>
@@ -27313,7 +34719,7 @@
           <a:graphicData uri="http://schemas.openxmlformats.org/presentationml/2006/ole">
             <mc:AlternateContent xmlns:mc="http://schemas.openxmlformats.org/markup-compatibility/2006">
               <mc:Choice xmlns:v="urn:schemas-microsoft-com:vml" Requires="v">
-                <p:oleObj spid="_x0000_s1068" name="AxMath" r:id="rId3" imgW="315000" imgH="228600" progId="Equation.AxMath">
+                <p:oleObj spid="_x0000_s1080" name="AxMath" r:id="rId3" imgW="315000" imgH="228600" progId="Equation.AxMath">
                   <p:embed/>
                 </p:oleObj>
               </mc:Choice>
@@ -27366,7 +34772,7 @@
           <a:graphicData uri="http://schemas.openxmlformats.org/presentationml/2006/ole">
             <mc:AlternateContent xmlns:mc="http://schemas.openxmlformats.org/markup-compatibility/2006">
               <mc:Choice xmlns:v="urn:schemas-microsoft-com:vml" Requires="v">
-                <p:oleObj spid="_x0000_s1069" name="AxMath" r:id="rId5" imgW="347760" imgH="228600" progId="Equation.AxMath">
+                <p:oleObj spid="_x0000_s1081" name="AxMath" r:id="rId5" imgW="347760" imgH="228600" progId="Equation.AxMath">
                   <p:embed/>
                 </p:oleObj>
               </mc:Choice>
@@ -27419,7 +34825,7 @@
           <a:graphicData uri="http://schemas.openxmlformats.org/presentationml/2006/ole">
             <mc:AlternateContent xmlns:mc="http://schemas.openxmlformats.org/markup-compatibility/2006">
               <mc:Choice xmlns:v="urn:schemas-microsoft-com:vml" Requires="v">
-                <p:oleObj spid="_x0000_s1070" name="AxMath" r:id="rId7" imgW="378000" imgH="228600" progId="Equation.AxMath">
+                <p:oleObj spid="_x0000_s1082" name="AxMath" r:id="rId7" imgW="378000" imgH="228600" progId="Equation.AxMath">
                   <p:embed/>
                 </p:oleObj>
               </mc:Choice>
@@ -42239,7 +49645,7 @@
           <a:graphicData uri="http://schemas.openxmlformats.org/presentationml/2006/ole">
             <mc:AlternateContent xmlns:mc="http://schemas.openxmlformats.org/markup-compatibility/2006">
               <mc:Choice xmlns:v="urn:schemas-microsoft-com:vml" Requires="v">
-                <p:oleObj spid="_x0000_s2078" name="AxMath" r:id="rId3" imgW="151920" imgH="226800" progId="Equation.AxMath">
+                <p:oleObj spid="_x0000_s2190" name="AxMath" r:id="rId3" imgW="151920" imgH="226800" progId="Equation.AxMath">
                   <p:embed/>
                 </p:oleObj>
               </mc:Choice>
@@ -42370,7 +49776,7 @@
           <a:graphicData uri="http://schemas.openxmlformats.org/presentationml/2006/ole">
             <mc:AlternateContent xmlns:mc="http://schemas.openxmlformats.org/markup-compatibility/2006">
               <mc:Choice xmlns:v="urn:schemas-microsoft-com:vml" Requires="v">
-                <p:oleObj spid="_x0000_s2079" name="AxMath" r:id="rId5" imgW="151920" imgH="226800" progId="Equation.AxMath">
+                <p:oleObj spid="_x0000_s2191" name="AxMath" r:id="rId5" imgW="151920" imgH="226800" progId="Equation.AxMath">
                   <p:embed/>
                 </p:oleObj>
               </mc:Choice>
@@ -42501,7 +49907,7 @@
           <a:graphicData uri="http://schemas.openxmlformats.org/presentationml/2006/ole">
             <mc:AlternateContent xmlns:mc="http://schemas.openxmlformats.org/markup-compatibility/2006">
               <mc:Choice xmlns:v="urn:schemas-microsoft-com:vml" Requires="v">
-                <p:oleObj spid="_x0000_s2080" name="AxMath" r:id="rId6" imgW="151920" imgH="226800" progId="Equation.AxMath">
+                <p:oleObj spid="_x0000_s2192" name="AxMath" r:id="rId6" imgW="151920" imgH="226800" progId="Equation.AxMath">
                   <p:embed/>
                 </p:oleObj>
               </mc:Choice>
@@ -42632,7 +50038,7 @@
           <a:graphicData uri="http://schemas.openxmlformats.org/presentationml/2006/ole">
             <mc:AlternateContent xmlns:mc="http://schemas.openxmlformats.org/markup-compatibility/2006">
               <mc:Choice xmlns:v="urn:schemas-microsoft-com:vml" Requires="v">
-                <p:oleObj spid="_x0000_s2081" name="AxMath" r:id="rId7" imgW="151920" imgH="226800" progId="Equation.AxMath">
+                <p:oleObj spid="_x0000_s2193" name="AxMath" r:id="rId7" imgW="151920" imgH="226800" progId="Equation.AxMath">
                   <p:embed/>
                 </p:oleObj>
               </mc:Choice>
@@ -42689,7 +50095,7 @@
           <a:graphicData uri="http://schemas.openxmlformats.org/presentationml/2006/ole">
             <mc:AlternateContent xmlns:mc="http://schemas.openxmlformats.org/markup-compatibility/2006">
               <mc:Choice xmlns:v="urn:schemas-microsoft-com:vml" Requires="v">
-                <p:oleObj spid="_x0000_s2082" name="AxMath" r:id="rId8" imgW="151920" imgH="226800" progId="Equation.AxMath">
+                <p:oleObj spid="_x0000_s2194" name="AxMath" r:id="rId8" imgW="151920" imgH="226800" progId="Equation.AxMath">
                   <p:embed/>
                 </p:oleObj>
               </mc:Choice>
@@ -42746,7 +50152,7 @@
           <a:graphicData uri="http://schemas.openxmlformats.org/presentationml/2006/ole">
             <mc:AlternateContent xmlns:mc="http://schemas.openxmlformats.org/markup-compatibility/2006">
               <mc:Choice xmlns:v="urn:schemas-microsoft-com:vml" Requires="v">
-                <p:oleObj spid="_x0000_s2083" name="AxMath" r:id="rId10" imgW="151920" imgH="226800" progId="Equation.AxMath">
+                <p:oleObj spid="_x0000_s2195" name="AxMath" r:id="rId10" imgW="151920" imgH="226800" progId="Equation.AxMath">
                   <p:embed/>
                 </p:oleObj>
               </mc:Choice>
@@ -42803,7 +50209,7 @@
           <a:graphicData uri="http://schemas.openxmlformats.org/presentationml/2006/ole">
             <mc:AlternateContent xmlns:mc="http://schemas.openxmlformats.org/markup-compatibility/2006">
               <mc:Choice xmlns:v="urn:schemas-microsoft-com:vml" Requires="v">
-                <p:oleObj spid="_x0000_s2084" name="AxMath" r:id="rId11" imgW="151920" imgH="226800" progId="Equation.AxMath">
+                <p:oleObj spid="_x0000_s2196" name="AxMath" r:id="rId11" imgW="151920" imgH="226800" progId="Equation.AxMath">
                   <p:embed/>
                 </p:oleObj>
               </mc:Choice>
@@ -42860,7 +50266,7 @@
           <a:graphicData uri="http://schemas.openxmlformats.org/presentationml/2006/ole">
             <mc:AlternateContent xmlns:mc="http://schemas.openxmlformats.org/markup-compatibility/2006">
               <mc:Choice xmlns:v="urn:schemas-microsoft-com:vml" Requires="v">
-                <p:oleObj spid="_x0000_s2085" name="AxMath" r:id="rId12" imgW="151920" imgH="226800" progId="Equation.AxMath">
+                <p:oleObj spid="_x0000_s2197" name="AxMath" r:id="rId12" imgW="151920" imgH="226800" progId="Equation.AxMath">
                   <p:embed/>
                 </p:oleObj>
               </mc:Choice>
@@ -43099,7 +50505,7 @@
           <a:graphicData uri="http://schemas.openxmlformats.org/presentationml/2006/ole">
             <mc:AlternateContent xmlns:mc="http://schemas.openxmlformats.org/markup-compatibility/2006">
               <mc:Choice xmlns:v="urn:schemas-microsoft-com:vml" Requires="v">
-                <p:oleObj spid="_x0000_s2086" name="AxMath" r:id="rId13" imgW="218880" imgH="230400" progId="Equation.AxMath">
+                <p:oleObj spid="_x0000_s2198" name="AxMath" r:id="rId13" imgW="218880" imgH="230400" progId="Equation.AxMath">
                   <p:embed/>
                 </p:oleObj>
               </mc:Choice>
@@ -43202,7 +50608,7 @@
           <a:graphicData uri="http://schemas.openxmlformats.org/presentationml/2006/ole">
             <mc:AlternateContent xmlns:mc="http://schemas.openxmlformats.org/markup-compatibility/2006">
               <mc:Choice xmlns:v="urn:schemas-microsoft-com:vml" Requires="v">
-                <p:oleObj spid="_x0000_s2087" name="AxMath" r:id="rId15" imgW="217080" imgH="230400" progId="Equation.AxMath">
+                <p:oleObj spid="_x0000_s2199" name="AxMath" r:id="rId15" imgW="217080" imgH="230400" progId="Equation.AxMath">
                   <p:embed/>
                 </p:oleObj>
               </mc:Choice>
@@ -43305,7 +50711,7 @@
           <a:graphicData uri="http://schemas.openxmlformats.org/presentationml/2006/ole">
             <mc:AlternateContent xmlns:mc="http://schemas.openxmlformats.org/markup-compatibility/2006">
               <mc:Choice xmlns:v="urn:schemas-microsoft-com:vml" Requires="v">
-                <p:oleObj spid="_x0000_s2088" name="AxMath" r:id="rId17" imgW="225360" imgH="230400" progId="Equation.AxMath">
+                <p:oleObj spid="_x0000_s2200" name="AxMath" r:id="rId17" imgW="225360" imgH="230400" progId="Equation.AxMath">
                   <p:embed/>
                 </p:oleObj>
               </mc:Choice>
@@ -43408,7 +50814,7 @@
           <a:graphicData uri="http://schemas.openxmlformats.org/presentationml/2006/ole">
             <mc:AlternateContent xmlns:mc="http://schemas.openxmlformats.org/markup-compatibility/2006">
               <mc:Choice xmlns:v="urn:schemas-microsoft-com:vml" Requires="v">
-                <p:oleObj spid="_x0000_s2089" name="AxMath" r:id="rId19" imgW="385200" imgH="230400" progId="Equation.AxMath">
+                <p:oleObj spid="_x0000_s2201" name="AxMath" r:id="rId19" imgW="385200" imgH="230400" progId="Equation.AxMath">
                   <p:embed/>
                 </p:oleObj>
               </mc:Choice>
@@ -43465,7 +50871,7 @@
           <a:graphicData uri="http://schemas.openxmlformats.org/presentationml/2006/ole">
             <mc:AlternateContent xmlns:mc="http://schemas.openxmlformats.org/markup-compatibility/2006">
               <mc:Choice xmlns:v="urn:schemas-microsoft-com:vml" Requires="v">
-                <p:oleObj spid="_x0000_s2090" name="AxMath" r:id="rId21" imgW="226080" imgH="230400" progId="Equation.AxMath">
+                <p:oleObj spid="_x0000_s2202" name="AxMath" r:id="rId21" imgW="226080" imgH="230400" progId="Equation.AxMath">
                   <p:embed/>
                 </p:oleObj>
               </mc:Choice>
@@ -43568,7 +50974,7 @@
           <a:graphicData uri="http://schemas.openxmlformats.org/presentationml/2006/ole">
             <mc:AlternateContent xmlns:mc="http://schemas.openxmlformats.org/markup-compatibility/2006">
               <mc:Choice xmlns:v="urn:schemas-microsoft-com:vml" Requires="v">
-                <p:oleObj spid="_x0000_s2091" name="AxMath" r:id="rId23" imgW="227520" imgH="230400" progId="Equation.AxMath">
+                <p:oleObj spid="_x0000_s2203" name="AxMath" r:id="rId23" imgW="227520" imgH="230400" progId="Equation.AxMath">
                   <p:embed/>
                 </p:oleObj>
               </mc:Choice>
@@ -43671,7 +51077,7 @@
           <a:graphicData uri="http://schemas.openxmlformats.org/presentationml/2006/ole">
             <mc:AlternateContent xmlns:mc="http://schemas.openxmlformats.org/markup-compatibility/2006">
               <mc:Choice xmlns:v="urn:schemas-microsoft-com:vml" Requires="v">
-                <p:oleObj spid="_x0000_s2092" name="AxMath" r:id="rId25" imgW="773640" imgH="230400" progId="Equation.AxMath">
+                <p:oleObj spid="_x0000_s2204" name="AxMath" r:id="rId25" imgW="773640" imgH="230400" progId="Equation.AxMath">
                   <p:embed/>
                 </p:oleObj>
               </mc:Choice>
@@ -43774,7 +51180,7 @@
           <a:graphicData uri="http://schemas.openxmlformats.org/presentationml/2006/ole">
             <mc:AlternateContent xmlns:mc="http://schemas.openxmlformats.org/markup-compatibility/2006">
               <mc:Choice xmlns:v="urn:schemas-microsoft-com:vml" Requires="v">
-                <p:oleObj spid="_x0000_s2093" name="AxMath" r:id="rId27" imgW="225360" imgH="230400" progId="Equation.AxMath">
+                <p:oleObj spid="_x0000_s2205" name="AxMath" r:id="rId27" imgW="225360" imgH="230400" progId="Equation.AxMath">
                   <p:embed/>
                 </p:oleObj>
               </mc:Choice>
@@ -43877,7 +51283,7 @@
           <a:graphicData uri="http://schemas.openxmlformats.org/presentationml/2006/ole">
             <mc:AlternateContent xmlns:mc="http://schemas.openxmlformats.org/markup-compatibility/2006">
               <mc:Choice xmlns:v="urn:schemas-microsoft-com:vml" Requires="v">
-                <p:oleObj spid="_x0000_s2094" name="AxMath" r:id="rId29" imgW="232200" imgH="230400" progId="Equation.AxMath">
+                <p:oleObj spid="_x0000_s2206" name="AxMath" r:id="rId29" imgW="232200" imgH="230400" progId="Equation.AxMath">
                   <p:embed/>
                 </p:oleObj>
               </mc:Choice>
@@ -43980,7 +51386,7 @@
           <a:graphicData uri="http://schemas.openxmlformats.org/presentationml/2006/ole">
             <mc:AlternateContent xmlns:mc="http://schemas.openxmlformats.org/markup-compatibility/2006">
               <mc:Choice xmlns:v="urn:schemas-microsoft-com:vml" Requires="v">
-                <p:oleObj spid="_x0000_s2095" name="AxMath" r:id="rId31" imgW="218520" imgH="230400" progId="Equation.AxMath">
+                <p:oleObj spid="_x0000_s2207" name="AxMath" r:id="rId31" imgW="218520" imgH="230400" progId="Equation.AxMath">
                   <p:embed/>
                 </p:oleObj>
               </mc:Choice>
@@ -44083,7 +51489,7 @@
           <a:graphicData uri="http://schemas.openxmlformats.org/presentationml/2006/ole">
             <mc:AlternateContent xmlns:mc="http://schemas.openxmlformats.org/markup-compatibility/2006">
               <mc:Choice xmlns:v="urn:schemas-microsoft-com:vml" Requires="v">
-                <p:oleObj spid="_x0000_s2096" name="AxMath" r:id="rId33" imgW="583200" imgH="230400" progId="Equation.AxMath">
+                <p:oleObj spid="_x0000_s2208" name="AxMath" r:id="rId33" imgW="583200" imgH="230400" progId="Equation.AxMath">
                   <p:embed/>
                 </p:oleObj>
               </mc:Choice>
@@ -44186,7 +51592,7 @@
           <a:graphicData uri="http://schemas.openxmlformats.org/presentationml/2006/ole">
             <mc:AlternateContent xmlns:mc="http://schemas.openxmlformats.org/markup-compatibility/2006">
               <mc:Choice xmlns:v="urn:schemas-microsoft-com:vml" Requires="v">
-                <p:oleObj spid="_x0000_s2097" name="AxMath" r:id="rId35" imgW="595080" imgH="230400" progId="Equation.AxMath">
+                <p:oleObj spid="_x0000_s2209" name="AxMath" r:id="rId35" imgW="595080" imgH="230400" progId="Equation.AxMath">
                   <p:embed/>
                 </p:oleObj>
               </mc:Choice>
@@ -44289,7 +51695,7 @@
           <a:graphicData uri="http://schemas.openxmlformats.org/presentationml/2006/ole">
             <mc:AlternateContent xmlns:mc="http://schemas.openxmlformats.org/markup-compatibility/2006">
               <mc:Choice xmlns:v="urn:schemas-microsoft-com:vml" Requires="v">
-                <p:oleObj spid="_x0000_s2098" name="AxMath" r:id="rId37" imgW="234000" imgH="230400" progId="Equation.AxMath">
+                <p:oleObj spid="_x0000_s2210" name="AxMath" r:id="rId37" imgW="234000" imgH="230400" progId="Equation.AxMath">
                   <p:embed/>
                 </p:oleObj>
               </mc:Choice>
@@ -44392,7 +51798,7 @@
           <a:graphicData uri="http://schemas.openxmlformats.org/presentationml/2006/ole">
             <mc:AlternateContent xmlns:mc="http://schemas.openxmlformats.org/markup-compatibility/2006">
               <mc:Choice xmlns:v="urn:schemas-microsoft-com:vml" Requires="v">
-                <p:oleObj spid="_x0000_s2099" name="AxMath" r:id="rId39" imgW="378360" imgH="230400" progId="Equation.AxMath">
+                <p:oleObj spid="_x0000_s2211" name="AxMath" r:id="rId39" imgW="378360" imgH="230400" progId="Equation.AxMath">
                   <p:embed/>
                 </p:oleObj>
               </mc:Choice>
@@ -44495,7 +51901,7 @@
           <a:graphicData uri="http://schemas.openxmlformats.org/presentationml/2006/ole">
             <mc:AlternateContent xmlns:mc="http://schemas.openxmlformats.org/markup-compatibility/2006">
               <mc:Choice xmlns:v="urn:schemas-microsoft-com:vml" Requires="v">
-                <p:oleObj spid="_x0000_s2100" name="AxMath" r:id="rId41" imgW="376560" imgH="230400" progId="Equation.AxMath">
+                <p:oleObj spid="_x0000_s2212" name="AxMath" r:id="rId41" imgW="376560" imgH="230400" progId="Equation.AxMath">
                   <p:embed/>
                 </p:oleObj>
               </mc:Choice>
@@ -44598,7 +52004,7 @@
           <a:graphicData uri="http://schemas.openxmlformats.org/presentationml/2006/ole">
             <mc:AlternateContent xmlns:mc="http://schemas.openxmlformats.org/markup-compatibility/2006">
               <mc:Choice xmlns:v="urn:schemas-microsoft-com:vml" Requires="v">
-                <p:oleObj spid="_x0000_s2101" name="AxMath" r:id="rId43" imgW="369720" imgH="230400" progId="Equation.AxMath">
+                <p:oleObj spid="_x0000_s2213" name="AxMath" r:id="rId43" imgW="369720" imgH="230400" progId="Equation.AxMath">
                   <p:embed/>
                 </p:oleObj>
               </mc:Choice>
@@ -44775,7 +52181,7 @@
           <a:graphicData uri="http://schemas.openxmlformats.org/presentationml/2006/ole">
             <mc:AlternateContent xmlns:mc="http://schemas.openxmlformats.org/markup-compatibility/2006">
               <mc:Choice xmlns:v="urn:schemas-microsoft-com:vml" Requires="v">
-                <p:oleObj spid="_x0000_s2102" name="AxMath" r:id="rId45" imgW="392040" imgH="230400" progId="Equation.AxMath">
+                <p:oleObj spid="_x0000_s2214" name="AxMath" r:id="rId45" imgW="392040" imgH="230400" progId="Equation.AxMath">
                   <p:embed/>
                 </p:oleObj>
               </mc:Choice>
@@ -44878,7 +52284,7 @@
           <a:graphicData uri="http://schemas.openxmlformats.org/presentationml/2006/ole">
             <mc:AlternateContent xmlns:mc="http://schemas.openxmlformats.org/markup-compatibility/2006">
               <mc:Choice xmlns:v="urn:schemas-microsoft-com:vml" Requires="v">
-                <p:oleObj spid="_x0000_s2103" name="AxMath" r:id="rId47" imgW="385200" imgH="230400" progId="Equation.AxMath">
+                <p:oleObj spid="_x0000_s2215" name="AxMath" r:id="rId47" imgW="385200" imgH="230400" progId="Equation.AxMath">
                   <p:embed/>
                 </p:oleObj>
               </mc:Choice>
@@ -44981,7 +52387,7 @@
           <a:graphicData uri="http://schemas.openxmlformats.org/presentationml/2006/ole">
             <mc:AlternateContent xmlns:mc="http://schemas.openxmlformats.org/markup-compatibility/2006">
               <mc:Choice xmlns:v="urn:schemas-microsoft-com:vml" Requires="v">
-                <p:oleObj spid="_x0000_s2104" name="AxMath" r:id="rId49" imgW="383760" imgH="230400" progId="Equation.AxMath">
+                <p:oleObj spid="_x0000_s2216" name="AxMath" r:id="rId49" imgW="383760" imgH="230400" progId="Equation.AxMath">
                   <p:embed/>
                 </p:oleObj>
               </mc:Choice>
@@ -45084,7 +52490,7 @@
           <a:graphicData uri="http://schemas.openxmlformats.org/presentationml/2006/ole">
             <mc:AlternateContent xmlns:mc="http://schemas.openxmlformats.org/markup-compatibility/2006">
               <mc:Choice xmlns:v="urn:schemas-microsoft-com:vml" Requires="v">
-                <p:oleObj spid="_x0000_s2105" name="AxMath" r:id="rId51" imgW="376560" imgH="230400" progId="Equation.AxMath">
+                <p:oleObj spid="_x0000_s2217" name="AxMath" r:id="rId51" imgW="376560" imgH="230400" progId="Equation.AxMath">
                   <p:embed/>
                 </p:oleObj>
               </mc:Choice>
@@ -45311,7 +52717,7 @@
             <a:graphicData uri="http://schemas.openxmlformats.org/presentationml/2006/ole">
               <mc:AlternateContent xmlns:mc="http://schemas.openxmlformats.org/markup-compatibility/2006">
                 <mc:Choice xmlns:v="urn:schemas-microsoft-com:vml" Requires="v">
-                  <p:oleObj spid="_x0000_s3103" name="AxMath" r:id="rId3" imgW="151920" imgH="226800" progId="Equation.AxMath">
+                  <p:oleObj spid="_x0000_s3219" name="AxMath" r:id="rId3" imgW="151920" imgH="226800" progId="Equation.AxMath">
                     <p:embed/>
                   </p:oleObj>
                 </mc:Choice>
@@ -45364,7 +52770,7 @@
             <a:graphicData uri="http://schemas.openxmlformats.org/presentationml/2006/ole">
               <mc:AlternateContent xmlns:mc="http://schemas.openxmlformats.org/markup-compatibility/2006">
                 <mc:Choice xmlns:v="urn:schemas-microsoft-com:vml" Requires="v">
-                  <p:oleObj spid="_x0000_s3104" name="AxMath" r:id="rId5" imgW="151920" imgH="226800" progId="Equation.AxMath">
+                  <p:oleObj spid="_x0000_s3220" name="AxMath" r:id="rId5" imgW="151920" imgH="226800" progId="Equation.AxMath">
                     <p:embed/>
                   </p:oleObj>
                 </mc:Choice>
@@ -45417,7 +52823,7 @@
             <a:graphicData uri="http://schemas.openxmlformats.org/presentationml/2006/ole">
               <mc:AlternateContent xmlns:mc="http://schemas.openxmlformats.org/markup-compatibility/2006">
                 <mc:Choice xmlns:v="urn:schemas-microsoft-com:vml" Requires="v">
-                  <p:oleObj spid="_x0000_s3105" name="AxMath" r:id="rId6" imgW="151920" imgH="226800" progId="Equation.AxMath">
+                  <p:oleObj spid="_x0000_s3221" name="AxMath" r:id="rId6" imgW="151920" imgH="226800" progId="Equation.AxMath">
                     <p:embed/>
                   </p:oleObj>
                 </mc:Choice>
@@ -45470,7 +52876,7 @@
             <a:graphicData uri="http://schemas.openxmlformats.org/presentationml/2006/ole">
               <mc:AlternateContent xmlns:mc="http://schemas.openxmlformats.org/markup-compatibility/2006">
                 <mc:Choice xmlns:v="urn:schemas-microsoft-com:vml" Requires="v">
-                  <p:oleObj spid="_x0000_s3106" name="AxMath" r:id="rId7" imgW="151920" imgH="226800" progId="Equation.AxMath">
+                  <p:oleObj spid="_x0000_s3222" name="AxMath" r:id="rId7" imgW="151920" imgH="226800" progId="Equation.AxMath">
                     <p:embed/>
                   </p:oleObj>
                 </mc:Choice>
@@ -45523,7 +52929,7 @@
             <a:graphicData uri="http://schemas.openxmlformats.org/presentationml/2006/ole">
               <mc:AlternateContent xmlns:mc="http://schemas.openxmlformats.org/markup-compatibility/2006">
                 <mc:Choice xmlns:v="urn:schemas-microsoft-com:vml" Requires="v">
-                  <p:oleObj spid="_x0000_s3107" name="AxMath" r:id="rId8" imgW="151920" imgH="226800" progId="Equation.AxMath">
+                  <p:oleObj spid="_x0000_s3223" name="AxMath" r:id="rId8" imgW="151920" imgH="226800" progId="Equation.AxMath">
                     <p:embed/>
                   </p:oleObj>
                 </mc:Choice>
@@ -45576,7 +52982,7 @@
             <a:graphicData uri="http://schemas.openxmlformats.org/presentationml/2006/ole">
               <mc:AlternateContent xmlns:mc="http://schemas.openxmlformats.org/markup-compatibility/2006">
                 <mc:Choice xmlns:v="urn:schemas-microsoft-com:vml" Requires="v">
-                  <p:oleObj spid="_x0000_s3108" name="AxMath" r:id="rId10" imgW="151920" imgH="226800" progId="Equation.AxMath">
+                  <p:oleObj spid="_x0000_s3224" name="AxMath" r:id="rId10" imgW="151920" imgH="226800" progId="Equation.AxMath">
                     <p:embed/>
                   </p:oleObj>
                 </mc:Choice>
@@ -45629,7 +53035,7 @@
             <a:graphicData uri="http://schemas.openxmlformats.org/presentationml/2006/ole">
               <mc:AlternateContent xmlns:mc="http://schemas.openxmlformats.org/markup-compatibility/2006">
                 <mc:Choice xmlns:v="urn:schemas-microsoft-com:vml" Requires="v">
-                  <p:oleObj spid="_x0000_s3109" name="AxMath" r:id="rId11" imgW="151920" imgH="226800" progId="Equation.AxMath">
+                  <p:oleObj spid="_x0000_s3225" name="AxMath" r:id="rId11" imgW="151920" imgH="226800" progId="Equation.AxMath">
                     <p:embed/>
                   </p:oleObj>
                 </mc:Choice>
@@ -45682,7 +53088,7 @@
             <a:graphicData uri="http://schemas.openxmlformats.org/presentationml/2006/ole">
               <mc:AlternateContent xmlns:mc="http://schemas.openxmlformats.org/markup-compatibility/2006">
                 <mc:Choice xmlns:v="urn:schemas-microsoft-com:vml" Requires="v">
-                  <p:oleObj spid="_x0000_s3110" name="AxMath" r:id="rId12" imgW="151920" imgH="226800" progId="Equation.AxMath">
+                  <p:oleObj spid="_x0000_s3226" name="AxMath" r:id="rId12" imgW="151920" imgH="226800" progId="Equation.AxMath">
                     <p:embed/>
                   </p:oleObj>
                 </mc:Choice>
@@ -45735,7 +53141,7 @@
             <a:graphicData uri="http://schemas.openxmlformats.org/presentationml/2006/ole">
               <mc:AlternateContent xmlns:mc="http://schemas.openxmlformats.org/markup-compatibility/2006">
                 <mc:Choice xmlns:v="urn:schemas-microsoft-com:vml" Requires="v">
-                  <p:oleObj spid="_x0000_s3111" name="AxMath" r:id="rId13" imgW="218880" imgH="230400" progId="Equation.AxMath">
+                  <p:oleObj spid="_x0000_s3227" name="AxMath" r:id="rId13" imgW="218880" imgH="230400" progId="Equation.AxMath">
                     <p:embed/>
                   </p:oleObj>
                 </mc:Choice>
@@ -45834,7 +53240,7 @@
             <a:graphicData uri="http://schemas.openxmlformats.org/presentationml/2006/ole">
               <mc:AlternateContent xmlns:mc="http://schemas.openxmlformats.org/markup-compatibility/2006">
                 <mc:Choice xmlns:v="urn:schemas-microsoft-com:vml" Requires="v">
-                  <p:oleObj spid="_x0000_s3112" name="AxMath" r:id="rId15" imgW="217080" imgH="230400" progId="Equation.AxMath">
+                  <p:oleObj spid="_x0000_s3228" name="AxMath" r:id="rId15" imgW="217080" imgH="230400" progId="Equation.AxMath">
                     <p:embed/>
                   </p:oleObj>
                 </mc:Choice>
@@ -45933,7 +53339,7 @@
             <a:graphicData uri="http://schemas.openxmlformats.org/presentationml/2006/ole">
               <mc:AlternateContent xmlns:mc="http://schemas.openxmlformats.org/markup-compatibility/2006">
                 <mc:Choice xmlns:v="urn:schemas-microsoft-com:vml" Requires="v">
-                  <p:oleObj spid="_x0000_s3113" name="AxMath" r:id="rId17" imgW="225360" imgH="230400" progId="Equation.AxMath">
+                  <p:oleObj spid="_x0000_s3229" name="AxMath" r:id="rId17" imgW="225360" imgH="230400" progId="Equation.AxMath">
                     <p:embed/>
                   </p:oleObj>
                 </mc:Choice>
@@ -46034,7 +53440,7 @@
             <a:graphicData uri="http://schemas.openxmlformats.org/presentationml/2006/ole">
               <mc:AlternateContent xmlns:mc="http://schemas.openxmlformats.org/markup-compatibility/2006">
                 <mc:Choice xmlns:v="urn:schemas-microsoft-com:vml" Requires="v">
-                  <p:oleObj spid="_x0000_s3114" name="AxMath" r:id="rId19" imgW="637560" imgH="279000" progId="Equation.AxMath">
+                  <p:oleObj spid="_x0000_s3230" name="AxMath" r:id="rId19" imgW="637560" imgH="279000" progId="Equation.AxMath">
                     <p:embed/>
                   </p:oleObj>
                 </mc:Choice>
@@ -46087,7 +53493,7 @@
             <a:graphicData uri="http://schemas.openxmlformats.org/presentationml/2006/ole">
               <mc:AlternateContent xmlns:mc="http://schemas.openxmlformats.org/markup-compatibility/2006">
                 <mc:Choice xmlns:v="urn:schemas-microsoft-com:vml" Requires="v">
-                  <p:oleObj spid="_x0000_s3115" name="AxMath" r:id="rId21" imgW="629280" imgH="279000" progId="Equation.AxMath">
+                  <p:oleObj spid="_x0000_s3231" name="AxMath" r:id="rId21" imgW="629280" imgH="279000" progId="Equation.AxMath">
                     <p:embed/>
                   </p:oleObj>
                 </mc:Choice>
@@ -46186,7 +53592,7 @@
             <a:graphicData uri="http://schemas.openxmlformats.org/presentationml/2006/ole">
               <mc:AlternateContent xmlns:mc="http://schemas.openxmlformats.org/markup-compatibility/2006">
                 <mc:Choice xmlns:v="urn:schemas-microsoft-com:vml" Requires="v">
-                  <p:oleObj spid="_x0000_s3116" name="AxMath" r:id="rId23" imgW="839160" imgH="279000" progId="Equation.AxMath">
+                  <p:oleObj spid="_x0000_s3232" name="AxMath" r:id="rId23" imgW="839160" imgH="279000" progId="Equation.AxMath">
                     <p:embed/>
                   </p:oleObj>
                 </mc:Choice>
@@ -46285,7 +53691,7 @@
             <a:graphicData uri="http://schemas.openxmlformats.org/presentationml/2006/ole">
               <mc:AlternateContent xmlns:mc="http://schemas.openxmlformats.org/markup-compatibility/2006">
                 <mc:Choice xmlns:v="urn:schemas-microsoft-com:vml" Requires="v">
-                  <p:oleObj spid="_x0000_s3117" name="AxMath" r:id="rId25" imgW="773640" imgH="230400" progId="Equation.AxMath">
+                  <p:oleObj spid="_x0000_s3233" name="AxMath" r:id="rId25" imgW="773640" imgH="230400" progId="Equation.AxMath">
                     <p:embed/>
                   </p:oleObj>
                 </mc:Choice>
@@ -46384,7 +53790,7 @@
             <a:graphicData uri="http://schemas.openxmlformats.org/presentationml/2006/ole">
               <mc:AlternateContent xmlns:mc="http://schemas.openxmlformats.org/markup-compatibility/2006">
                 <mc:Choice xmlns:v="urn:schemas-microsoft-com:vml" Requires="v">
-                  <p:oleObj spid="_x0000_s3118" name="AxMath" r:id="rId27" imgW="1183680" imgH="279000" progId="Equation.AxMath">
+                  <p:oleObj spid="_x0000_s3234" name="AxMath" r:id="rId27" imgW="1183680" imgH="279000" progId="Equation.AxMath">
                     <p:embed/>
                   </p:oleObj>
                 </mc:Choice>
@@ -46483,7 +53889,7 @@
             <a:graphicData uri="http://schemas.openxmlformats.org/presentationml/2006/ole">
               <mc:AlternateContent xmlns:mc="http://schemas.openxmlformats.org/markup-compatibility/2006">
                 <mc:Choice xmlns:v="urn:schemas-microsoft-com:vml" Requires="v">
-                  <p:oleObj spid="_x0000_s3119" name="AxMath" r:id="rId29" imgW="1183680" imgH="279000" progId="Equation.AxMath">
+                  <p:oleObj spid="_x0000_s3235" name="AxMath" r:id="rId29" imgW="1183680" imgH="279000" progId="Equation.AxMath">
                     <p:embed/>
                   </p:oleObj>
                 </mc:Choice>
@@ -46584,7 +53990,7 @@
             <a:graphicData uri="http://schemas.openxmlformats.org/presentationml/2006/ole">
               <mc:AlternateContent xmlns:mc="http://schemas.openxmlformats.org/markup-compatibility/2006">
                 <mc:Choice xmlns:v="urn:schemas-microsoft-com:vml" Requires="v">
-                  <p:oleObj spid="_x0000_s3120" name="AxMath" r:id="rId31" imgW="630720" imgH="279000" progId="Equation.AxMath">
+                  <p:oleObj spid="_x0000_s3236" name="AxMath" r:id="rId31" imgW="630720" imgH="279000" progId="Equation.AxMath">
                     <p:embed/>
                   </p:oleObj>
                 </mc:Choice>
@@ -46683,7 +54089,7 @@
             <a:graphicData uri="http://schemas.openxmlformats.org/presentationml/2006/ole">
               <mc:AlternateContent xmlns:mc="http://schemas.openxmlformats.org/markup-compatibility/2006">
                 <mc:Choice xmlns:v="urn:schemas-microsoft-com:vml" Requires="v">
-                  <p:oleObj spid="_x0000_s3121" name="AxMath" r:id="rId33" imgW="606240" imgH="279000" progId="Equation.AxMath">
+                  <p:oleObj spid="_x0000_s3237" name="AxMath" r:id="rId33" imgW="606240" imgH="279000" progId="Equation.AxMath">
                     <p:embed/>
                   </p:oleObj>
                 </mc:Choice>
@@ -46782,7 +54188,7 @@
             <a:graphicData uri="http://schemas.openxmlformats.org/presentationml/2006/ole">
               <mc:AlternateContent xmlns:mc="http://schemas.openxmlformats.org/markup-compatibility/2006">
                 <mc:Choice xmlns:v="urn:schemas-microsoft-com:vml" Requires="v">
-                  <p:oleObj spid="_x0000_s3122" name="AxMath" r:id="rId35" imgW="604080" imgH="279000" progId="Equation.AxMath">
+                  <p:oleObj spid="_x0000_s3238" name="AxMath" r:id="rId35" imgW="604080" imgH="279000" progId="Equation.AxMath">
                     <p:embed/>
                   </p:oleObj>
                 </mc:Choice>
@@ -46881,7 +54287,7 @@
             <a:graphicData uri="http://schemas.openxmlformats.org/presentationml/2006/ole">
               <mc:AlternateContent xmlns:mc="http://schemas.openxmlformats.org/markup-compatibility/2006">
                 <mc:Choice xmlns:v="urn:schemas-microsoft-com:vml" Requires="v">
-                  <p:oleObj spid="_x0000_s3123" name="AxMath" r:id="rId37" imgW="606240" imgH="279000" progId="Equation.AxMath">
+                  <p:oleObj spid="_x0000_s3239" name="AxMath" r:id="rId37" imgW="606240" imgH="279000" progId="Equation.AxMath">
                     <p:embed/>
                   </p:oleObj>
                 </mc:Choice>
@@ -46980,7 +54386,7 @@
             <a:graphicData uri="http://schemas.openxmlformats.org/presentationml/2006/ole">
               <mc:AlternateContent xmlns:mc="http://schemas.openxmlformats.org/markup-compatibility/2006">
                 <mc:Choice xmlns:v="urn:schemas-microsoft-com:vml" Requires="v">
-                  <p:oleObj spid="_x0000_s3124" name="AxMath" r:id="rId39" imgW="637920" imgH="279000" progId="Equation.AxMath">
+                  <p:oleObj spid="_x0000_s3240" name="AxMath" r:id="rId39" imgW="637920" imgH="279000" progId="Equation.AxMath">
                     <p:embed/>
                   </p:oleObj>
                 </mc:Choice>
@@ -47079,7 +54485,7 @@
             <a:graphicData uri="http://schemas.openxmlformats.org/presentationml/2006/ole">
               <mc:AlternateContent xmlns:mc="http://schemas.openxmlformats.org/markup-compatibility/2006">
                 <mc:Choice xmlns:v="urn:schemas-microsoft-com:vml" Requires="v">
-                  <p:oleObj spid="_x0000_s3125" name="AxMath" r:id="rId41" imgW="636480" imgH="279000" progId="Equation.AxMath">
+                  <p:oleObj spid="_x0000_s3241" name="AxMath" r:id="rId41" imgW="636480" imgH="279000" progId="Equation.AxMath">
                     <p:embed/>
                   </p:oleObj>
                 </mc:Choice>
@@ -47178,7 +54584,7 @@
             <a:graphicData uri="http://schemas.openxmlformats.org/presentationml/2006/ole">
               <mc:AlternateContent xmlns:mc="http://schemas.openxmlformats.org/markup-compatibility/2006">
                 <mc:Choice xmlns:v="urn:schemas-microsoft-com:vml" Requires="v">
-                  <p:oleObj spid="_x0000_s3126" name="AxMath" r:id="rId43" imgW="629280" imgH="279000" progId="Equation.AxMath">
+                  <p:oleObj spid="_x0000_s3242" name="AxMath" r:id="rId43" imgW="629280" imgH="279000" progId="Equation.AxMath">
                     <p:embed/>
                   </p:oleObj>
                 </mc:Choice>
@@ -47517,7 +54923,7 @@
             <a:graphicData uri="http://schemas.openxmlformats.org/presentationml/2006/ole">
               <mc:AlternateContent xmlns:mc="http://schemas.openxmlformats.org/markup-compatibility/2006">
                 <mc:Choice xmlns:v="urn:schemas-microsoft-com:vml" Requires="v">
-                  <p:oleObj spid="_x0000_s3127" name="AxMath" r:id="rId7" imgW="151920" imgH="226800" progId="Equation.AxMath">
+                  <p:oleObj spid="_x0000_s3243" name="AxMath" r:id="rId7" imgW="151920" imgH="226800" progId="Equation.AxMath">
                     <p:embed/>
                   </p:oleObj>
                 </mc:Choice>
@@ -47616,7 +55022,7 @@
             <a:graphicData uri="http://schemas.openxmlformats.org/presentationml/2006/ole">
               <mc:AlternateContent xmlns:mc="http://schemas.openxmlformats.org/markup-compatibility/2006">
                 <mc:Choice xmlns:v="urn:schemas-microsoft-com:vml" Requires="v">
-                  <p:oleObj spid="_x0000_s3128" name="AxMath" r:id="rId45" imgW="385200" imgH="230400" progId="Equation.AxMath">
+                  <p:oleObj spid="_x0000_s3244" name="AxMath" r:id="rId45" imgW="385200" imgH="230400" progId="Equation.AxMath">
                     <p:embed/>
                   </p:oleObj>
                 </mc:Choice>
@@ -47715,7 +55121,7 @@
             <a:graphicData uri="http://schemas.openxmlformats.org/presentationml/2006/ole">
               <mc:AlternateContent xmlns:mc="http://schemas.openxmlformats.org/markup-compatibility/2006">
                 <mc:Choice xmlns:v="urn:schemas-microsoft-com:vml" Requires="v">
-                  <p:oleObj spid="_x0000_s3129" name="AxMath" r:id="rId47" imgW="630720" imgH="279000" progId="Equation.AxMath">
+                  <p:oleObj spid="_x0000_s3245" name="AxMath" r:id="rId47" imgW="630720" imgH="279000" progId="Equation.AxMath">
                     <p:embed/>
                   </p:oleObj>
                 </mc:Choice>
@@ -47814,7 +55220,7 @@
             <a:graphicData uri="http://schemas.openxmlformats.org/presentationml/2006/ole">
               <mc:AlternateContent xmlns:mc="http://schemas.openxmlformats.org/markup-compatibility/2006">
                 <mc:Choice xmlns:v="urn:schemas-microsoft-com:vml" Requires="v">
-                  <p:oleObj spid="_x0000_s3130" name="AxMath" r:id="rId49" imgW="629280" imgH="279000" progId="Equation.AxMath">
+                  <p:oleObj spid="_x0000_s3246" name="AxMath" r:id="rId49" imgW="629280" imgH="279000" progId="Equation.AxMath">
                     <p:embed/>
                   </p:oleObj>
                 </mc:Choice>
@@ -47915,7 +55321,7 @@
             <a:graphicData uri="http://schemas.openxmlformats.org/presentationml/2006/ole">
               <mc:AlternateContent xmlns:mc="http://schemas.openxmlformats.org/markup-compatibility/2006">
                 <mc:Choice xmlns:v="urn:schemas-microsoft-com:vml" Requires="v">
-                  <p:oleObj spid="_x0000_s3131" name="AxMath" r:id="rId51" imgW="622080" imgH="279000" progId="Equation.AxMath">
+                  <p:oleObj spid="_x0000_s3247" name="AxMath" r:id="rId51" imgW="622080" imgH="279000" progId="Equation.AxMath">
                     <p:embed/>
                   </p:oleObj>
                 </mc:Choice>

--- a/figure/大论文作图.pptx
+++ b/figure/大论文作图.pptx
@@ -209,7 +209,7 @@
           <a:p>
             <a:fld id="{85C2D6EB-C800-464F-A79F-2EE684CA1913}" type="datetimeFigureOut">
               <a:rPr lang="zh-CN" altLang="en-US" smtClean="0"/>
-              <a:t>2023/12/10</a:t>
+              <a:t>2023/12/11</a:t>
             </a:fld>
             <a:endParaRPr lang="zh-CN" altLang="en-US"/>
           </a:p>
@@ -860,7 +860,7 @@
           <a:p>
             <a:fld id="{3F936331-16FD-497A-8586-31CE5CA58C54}" type="datetimeFigureOut">
               <a:rPr lang="zh-CN" altLang="en-US" smtClean="0"/>
-              <a:t>2023/12/10</a:t>
+              <a:t>2023/12/11</a:t>
             </a:fld>
             <a:endParaRPr lang="zh-CN" altLang="en-US"/>
           </a:p>
@@ -1030,7 +1030,7 @@
           <a:p>
             <a:fld id="{3F936331-16FD-497A-8586-31CE5CA58C54}" type="datetimeFigureOut">
               <a:rPr lang="zh-CN" altLang="en-US" smtClean="0"/>
-              <a:t>2023/12/10</a:t>
+              <a:t>2023/12/11</a:t>
             </a:fld>
             <a:endParaRPr lang="zh-CN" altLang="en-US"/>
           </a:p>
@@ -1210,7 +1210,7 @@
           <a:p>
             <a:fld id="{3F936331-16FD-497A-8586-31CE5CA58C54}" type="datetimeFigureOut">
               <a:rPr lang="zh-CN" altLang="en-US" smtClean="0"/>
-              <a:t>2023/12/10</a:t>
+              <a:t>2023/12/11</a:t>
             </a:fld>
             <a:endParaRPr lang="zh-CN" altLang="en-US"/>
           </a:p>
@@ -1380,7 +1380,7 @@
           <a:p>
             <a:fld id="{3F936331-16FD-497A-8586-31CE5CA58C54}" type="datetimeFigureOut">
               <a:rPr lang="zh-CN" altLang="en-US" smtClean="0"/>
-              <a:t>2023/12/10</a:t>
+              <a:t>2023/12/11</a:t>
             </a:fld>
             <a:endParaRPr lang="zh-CN" altLang="en-US"/>
           </a:p>
@@ -1626,7 +1626,7 @@
           <a:p>
             <a:fld id="{3F936331-16FD-497A-8586-31CE5CA58C54}" type="datetimeFigureOut">
               <a:rPr lang="zh-CN" altLang="en-US" smtClean="0"/>
-              <a:t>2023/12/10</a:t>
+              <a:t>2023/12/11</a:t>
             </a:fld>
             <a:endParaRPr lang="zh-CN" altLang="en-US"/>
           </a:p>
@@ -1858,7 +1858,7 @@
           <a:p>
             <a:fld id="{3F936331-16FD-497A-8586-31CE5CA58C54}" type="datetimeFigureOut">
               <a:rPr lang="zh-CN" altLang="en-US" smtClean="0"/>
-              <a:t>2023/12/10</a:t>
+              <a:t>2023/12/11</a:t>
             </a:fld>
             <a:endParaRPr lang="zh-CN" altLang="en-US"/>
           </a:p>
@@ -2225,7 +2225,7 @@
           <a:p>
             <a:fld id="{3F936331-16FD-497A-8586-31CE5CA58C54}" type="datetimeFigureOut">
               <a:rPr lang="zh-CN" altLang="en-US" smtClean="0"/>
-              <a:t>2023/12/10</a:t>
+              <a:t>2023/12/11</a:t>
             </a:fld>
             <a:endParaRPr lang="zh-CN" altLang="en-US"/>
           </a:p>
@@ -2343,7 +2343,7 @@
           <a:p>
             <a:fld id="{3F936331-16FD-497A-8586-31CE5CA58C54}" type="datetimeFigureOut">
               <a:rPr lang="zh-CN" altLang="en-US" smtClean="0"/>
-              <a:t>2023/12/10</a:t>
+              <a:t>2023/12/11</a:t>
             </a:fld>
             <a:endParaRPr lang="zh-CN" altLang="en-US"/>
           </a:p>
@@ -2438,7 +2438,7 @@
           <a:p>
             <a:fld id="{3F936331-16FD-497A-8586-31CE5CA58C54}" type="datetimeFigureOut">
               <a:rPr lang="zh-CN" altLang="en-US" smtClean="0"/>
-              <a:t>2023/12/10</a:t>
+              <a:t>2023/12/11</a:t>
             </a:fld>
             <a:endParaRPr lang="zh-CN" altLang="en-US"/>
           </a:p>
@@ -2715,7 +2715,7 @@
           <a:p>
             <a:fld id="{3F936331-16FD-497A-8586-31CE5CA58C54}" type="datetimeFigureOut">
               <a:rPr lang="zh-CN" altLang="en-US" smtClean="0"/>
-              <a:t>2023/12/10</a:t>
+              <a:t>2023/12/11</a:t>
             </a:fld>
             <a:endParaRPr lang="zh-CN" altLang="en-US"/>
           </a:p>
@@ -2968,7 +2968,7 @@
           <a:p>
             <a:fld id="{3F936331-16FD-497A-8586-31CE5CA58C54}" type="datetimeFigureOut">
               <a:rPr lang="zh-CN" altLang="en-US" smtClean="0"/>
-              <a:t>2023/12/10</a:t>
+              <a:t>2023/12/11</a:t>
             </a:fld>
             <a:endParaRPr lang="zh-CN" altLang="en-US"/>
           </a:p>
@@ -3181,7 +3181,7 @@
           <a:p>
             <a:fld id="{3F936331-16FD-497A-8586-31CE5CA58C54}" type="datetimeFigureOut">
               <a:rPr lang="zh-CN" altLang="en-US" smtClean="0"/>
-              <a:t>2023/12/10</a:t>
+              <a:t>2023/12/11</a:t>
             </a:fld>
             <a:endParaRPr lang="zh-CN" altLang="en-US"/>
           </a:p>
@@ -5275,7 +5275,7 @@
           <a:graphicData uri="http://schemas.openxmlformats.org/presentationml/2006/ole">
             <mc:AlternateContent xmlns:mc="http://schemas.openxmlformats.org/markup-compatibility/2006">
               <mc:Choice xmlns:v="urn:schemas-microsoft-com:vml" Requires="v">
-                <p:oleObj spid="_x0000_s4243" name="AxMath" r:id="rId3" imgW="151920" imgH="226800" progId="Equation.AxMath">
+                <p:oleObj spid="_x0000_s4272" name="AxMath" r:id="rId3" imgW="151920" imgH="226800" progId="Equation.AxMath">
                   <p:embed/>
                 </p:oleObj>
               </mc:Choice>
@@ -5332,7 +5332,7 @@
           <a:graphicData uri="http://schemas.openxmlformats.org/presentationml/2006/ole">
             <mc:AlternateContent xmlns:mc="http://schemas.openxmlformats.org/markup-compatibility/2006">
               <mc:Choice xmlns:v="urn:schemas-microsoft-com:vml" Requires="v">
-                <p:oleObj spid="_x0000_s4244" name="AxMath" r:id="rId5" imgW="151920" imgH="226800" progId="Equation.AxMath">
+                <p:oleObj spid="_x0000_s4273" name="AxMath" r:id="rId5" imgW="151920" imgH="226800" progId="Equation.AxMath">
                   <p:embed/>
                 </p:oleObj>
               </mc:Choice>
@@ -5389,7 +5389,7 @@
           <a:graphicData uri="http://schemas.openxmlformats.org/presentationml/2006/ole">
             <mc:AlternateContent xmlns:mc="http://schemas.openxmlformats.org/markup-compatibility/2006">
               <mc:Choice xmlns:v="urn:schemas-microsoft-com:vml" Requires="v">
-                <p:oleObj spid="_x0000_s4245" name="AxMath" r:id="rId6" imgW="151920" imgH="226800" progId="Equation.AxMath">
+                <p:oleObj spid="_x0000_s4274" name="AxMath" r:id="rId6" imgW="151920" imgH="226800" progId="Equation.AxMath">
                   <p:embed/>
                 </p:oleObj>
               </mc:Choice>
@@ -5446,7 +5446,7 @@
           <a:graphicData uri="http://schemas.openxmlformats.org/presentationml/2006/ole">
             <mc:AlternateContent xmlns:mc="http://schemas.openxmlformats.org/markup-compatibility/2006">
               <mc:Choice xmlns:v="urn:schemas-microsoft-com:vml" Requires="v">
-                <p:oleObj spid="_x0000_s4246" name="AxMath" r:id="rId7" imgW="151920" imgH="226800" progId="Equation.AxMath">
+                <p:oleObj spid="_x0000_s4275" name="AxMath" r:id="rId7" imgW="151920" imgH="226800" progId="Equation.AxMath">
                   <p:embed/>
                 </p:oleObj>
               </mc:Choice>
@@ -5503,7 +5503,7 @@
           <a:graphicData uri="http://schemas.openxmlformats.org/presentationml/2006/ole">
             <mc:AlternateContent xmlns:mc="http://schemas.openxmlformats.org/markup-compatibility/2006">
               <mc:Choice xmlns:v="urn:schemas-microsoft-com:vml" Requires="v">
-                <p:oleObj spid="_x0000_s4247" name="AxMath" r:id="rId8" imgW="151920" imgH="226800" progId="Equation.AxMath">
+                <p:oleObj spid="_x0000_s4276" name="AxMath" r:id="rId8" imgW="151920" imgH="226800" progId="Equation.AxMath">
                   <p:embed/>
                 </p:oleObj>
               </mc:Choice>
@@ -5560,7 +5560,7 @@
           <a:graphicData uri="http://schemas.openxmlformats.org/presentationml/2006/ole">
             <mc:AlternateContent xmlns:mc="http://schemas.openxmlformats.org/markup-compatibility/2006">
               <mc:Choice xmlns:v="urn:schemas-microsoft-com:vml" Requires="v">
-                <p:oleObj spid="_x0000_s4248" name="AxMath" r:id="rId10" imgW="151920" imgH="226800" progId="Equation.AxMath">
+                <p:oleObj spid="_x0000_s4277" name="AxMath" r:id="rId10" imgW="151920" imgH="226800" progId="Equation.AxMath">
                   <p:embed/>
                 </p:oleObj>
               </mc:Choice>
@@ -5617,7 +5617,7 @@
           <a:graphicData uri="http://schemas.openxmlformats.org/presentationml/2006/ole">
             <mc:AlternateContent xmlns:mc="http://schemas.openxmlformats.org/markup-compatibility/2006">
               <mc:Choice xmlns:v="urn:schemas-microsoft-com:vml" Requires="v">
-                <p:oleObj spid="_x0000_s4249" name="AxMath" r:id="rId11" imgW="151920" imgH="226800" progId="Equation.AxMath">
+                <p:oleObj spid="_x0000_s4278" name="AxMath" r:id="rId11" imgW="151920" imgH="226800" progId="Equation.AxMath">
                   <p:embed/>
                 </p:oleObj>
               </mc:Choice>
@@ -5674,7 +5674,7 @@
           <a:graphicData uri="http://schemas.openxmlformats.org/presentationml/2006/ole">
             <mc:AlternateContent xmlns:mc="http://schemas.openxmlformats.org/markup-compatibility/2006">
               <mc:Choice xmlns:v="urn:schemas-microsoft-com:vml" Requires="v">
-                <p:oleObj spid="_x0000_s4250" name="AxMath" r:id="rId12" imgW="151920" imgH="226800" progId="Equation.AxMath">
+                <p:oleObj spid="_x0000_s4279" name="AxMath" r:id="rId12" imgW="151920" imgH="226800" progId="Equation.AxMath">
                   <p:embed/>
                 </p:oleObj>
               </mc:Choice>
@@ -5731,7 +5731,7 @@
           <a:graphicData uri="http://schemas.openxmlformats.org/presentationml/2006/ole">
             <mc:AlternateContent xmlns:mc="http://schemas.openxmlformats.org/markup-compatibility/2006">
               <mc:Choice xmlns:v="urn:schemas-microsoft-com:vml" Requires="v">
-                <p:oleObj spid="_x0000_s4251" name="AxMath" r:id="rId13" imgW="622080" imgH="279000" progId="Equation.AxMath">
+                <p:oleObj spid="_x0000_s4280" name="AxMath" r:id="rId13" imgW="622080" imgH="279000" progId="Equation.AxMath">
                   <p:embed/>
                 </p:oleObj>
               </mc:Choice>
@@ -5836,7 +5836,7 @@
           <a:graphicData uri="http://schemas.openxmlformats.org/presentationml/2006/ole">
             <mc:AlternateContent xmlns:mc="http://schemas.openxmlformats.org/markup-compatibility/2006">
               <mc:Choice xmlns:v="urn:schemas-microsoft-com:vml" Requires="v">
-                <p:oleObj spid="_x0000_s4252" name="AxMath" r:id="rId15" imgW="629280" imgH="279000" progId="Equation.AxMath">
+                <p:oleObj spid="_x0000_s4281" name="AxMath" r:id="rId15" imgW="629280" imgH="279000" progId="Equation.AxMath">
                   <p:embed/>
                 </p:oleObj>
               </mc:Choice>
@@ -5941,7 +5941,7 @@
           <a:graphicData uri="http://schemas.openxmlformats.org/presentationml/2006/ole">
             <mc:AlternateContent xmlns:mc="http://schemas.openxmlformats.org/markup-compatibility/2006">
               <mc:Choice xmlns:v="urn:schemas-microsoft-com:vml" Requires="v">
-                <p:oleObj spid="_x0000_s4253" name="AxMath" r:id="rId17" imgW="630720" imgH="279000" progId="Equation.AxMath">
+                <p:oleObj spid="_x0000_s4282" name="AxMath" r:id="rId17" imgW="630720" imgH="279000" progId="Equation.AxMath">
                   <p:embed/>
                 </p:oleObj>
               </mc:Choice>
@@ -6046,7 +6046,7 @@
           <a:graphicData uri="http://schemas.openxmlformats.org/presentationml/2006/ole">
             <mc:AlternateContent xmlns:mc="http://schemas.openxmlformats.org/markup-compatibility/2006">
               <mc:Choice xmlns:v="urn:schemas-microsoft-com:vml" Requires="v">
-                <p:oleObj spid="_x0000_s4254" name="AxMath" r:id="rId19" imgW="637560" imgH="279000" progId="Equation.AxMath">
+                <p:oleObj spid="_x0000_s4283" name="AxMath" r:id="rId19" imgW="637560" imgH="279000" progId="Equation.AxMath">
                   <p:embed/>
                 </p:oleObj>
               </mc:Choice>
@@ -6103,7 +6103,7 @@
           <a:graphicData uri="http://schemas.openxmlformats.org/presentationml/2006/ole">
             <mc:AlternateContent xmlns:mc="http://schemas.openxmlformats.org/markup-compatibility/2006">
               <mc:Choice xmlns:v="urn:schemas-microsoft-com:vml" Requires="v">
-                <p:oleObj spid="_x0000_s4255" name="AxMath" r:id="rId21" imgW="629280" imgH="279000" progId="Equation.AxMath">
+                <p:oleObj spid="_x0000_s4284" name="AxMath" r:id="rId21" imgW="629280" imgH="279000" progId="Equation.AxMath">
                   <p:embed/>
                 </p:oleObj>
               </mc:Choice>
@@ -6206,7 +6206,7 @@
           <a:graphicData uri="http://schemas.openxmlformats.org/presentationml/2006/ole">
             <mc:AlternateContent xmlns:mc="http://schemas.openxmlformats.org/markup-compatibility/2006">
               <mc:Choice xmlns:v="urn:schemas-microsoft-com:vml" Requires="v">
-                <p:oleObj spid="_x0000_s4256" name="AxMath" r:id="rId23" imgW="839160" imgH="279000" progId="Equation.AxMath">
+                <p:oleObj spid="_x0000_s4285" name="AxMath" r:id="rId23" imgW="839160" imgH="279000" progId="Equation.AxMath">
                   <p:embed/>
                 </p:oleObj>
               </mc:Choice>
@@ -6309,7 +6309,7 @@
           <a:graphicData uri="http://schemas.openxmlformats.org/presentationml/2006/ole">
             <mc:AlternateContent xmlns:mc="http://schemas.openxmlformats.org/markup-compatibility/2006">
               <mc:Choice xmlns:v="urn:schemas-microsoft-com:vml" Requires="v">
-                <p:oleObj spid="_x0000_s4257" name="AxMath" r:id="rId25" imgW="773640" imgH="230400" progId="Equation.AxMath">
+                <p:oleObj spid="_x0000_s4286" name="AxMath" r:id="rId25" imgW="773640" imgH="230400" progId="Equation.AxMath">
                   <p:embed/>
                 </p:oleObj>
               </mc:Choice>
@@ -6412,7 +6412,7 @@
           <a:graphicData uri="http://schemas.openxmlformats.org/presentationml/2006/ole">
             <mc:AlternateContent xmlns:mc="http://schemas.openxmlformats.org/markup-compatibility/2006">
               <mc:Choice xmlns:v="urn:schemas-microsoft-com:vml" Requires="v">
-                <p:oleObj spid="_x0000_s4258" name="AxMath" r:id="rId27" imgW="1183680" imgH="279000" progId="Equation.AxMath">
+                <p:oleObj spid="_x0000_s4287" name="AxMath" r:id="rId27" imgW="1183680" imgH="279000" progId="Equation.AxMath">
                   <p:embed/>
                 </p:oleObj>
               </mc:Choice>
@@ -6515,7 +6515,7 @@
           <a:graphicData uri="http://schemas.openxmlformats.org/presentationml/2006/ole">
             <mc:AlternateContent xmlns:mc="http://schemas.openxmlformats.org/markup-compatibility/2006">
               <mc:Choice xmlns:v="urn:schemas-microsoft-com:vml" Requires="v">
-                <p:oleObj spid="_x0000_s4259" name="AxMath" r:id="rId29" imgW="1183680" imgH="279000" progId="Equation.AxMath">
+                <p:oleObj spid="_x0000_s4288" name="AxMath" r:id="rId29" imgW="1183680" imgH="279000" progId="Equation.AxMath">
                   <p:embed/>
                 </p:oleObj>
               </mc:Choice>
@@ -6620,7 +6620,7 @@
           <a:graphicData uri="http://schemas.openxmlformats.org/presentationml/2006/ole">
             <mc:AlternateContent xmlns:mc="http://schemas.openxmlformats.org/markup-compatibility/2006">
               <mc:Choice xmlns:v="urn:schemas-microsoft-com:vml" Requires="v">
-                <p:oleObj spid="_x0000_s4260" name="AxMath" r:id="rId31" imgW="630720" imgH="279000" progId="Equation.AxMath">
+                <p:oleObj spid="_x0000_s4289" name="AxMath" r:id="rId31" imgW="630720" imgH="279000" progId="Equation.AxMath">
                   <p:embed/>
                 </p:oleObj>
               </mc:Choice>
@@ -6723,7 +6723,7 @@
           <a:graphicData uri="http://schemas.openxmlformats.org/presentationml/2006/ole">
             <mc:AlternateContent xmlns:mc="http://schemas.openxmlformats.org/markup-compatibility/2006">
               <mc:Choice xmlns:v="urn:schemas-microsoft-com:vml" Requires="v">
-                <p:oleObj spid="_x0000_s4261" name="AxMath" r:id="rId33" imgW="606240" imgH="279000" progId="Equation.AxMath">
+                <p:oleObj spid="_x0000_s4290" name="AxMath" r:id="rId33" imgW="606240" imgH="279000" progId="Equation.AxMath">
                   <p:embed/>
                 </p:oleObj>
               </mc:Choice>
@@ -6826,7 +6826,7 @@
           <a:graphicData uri="http://schemas.openxmlformats.org/presentationml/2006/ole">
             <mc:AlternateContent xmlns:mc="http://schemas.openxmlformats.org/markup-compatibility/2006">
               <mc:Choice xmlns:v="urn:schemas-microsoft-com:vml" Requires="v">
-                <p:oleObj spid="_x0000_s4262" name="AxMath" r:id="rId35" imgW="604080" imgH="279000" progId="Equation.AxMath">
+                <p:oleObj spid="_x0000_s4291" name="AxMath" r:id="rId35" imgW="604080" imgH="279000" progId="Equation.AxMath">
                   <p:embed/>
                 </p:oleObj>
               </mc:Choice>
@@ -6929,7 +6929,7 @@
           <a:graphicData uri="http://schemas.openxmlformats.org/presentationml/2006/ole">
             <mc:AlternateContent xmlns:mc="http://schemas.openxmlformats.org/markup-compatibility/2006">
               <mc:Choice xmlns:v="urn:schemas-microsoft-com:vml" Requires="v">
-                <p:oleObj spid="_x0000_s4263" name="AxMath" r:id="rId37" imgW="606240" imgH="279000" progId="Equation.AxMath">
+                <p:oleObj spid="_x0000_s4292" name="AxMath" r:id="rId37" imgW="606240" imgH="279000" progId="Equation.AxMath">
                   <p:embed/>
                 </p:oleObj>
               </mc:Choice>
@@ -7032,7 +7032,7 @@
           <a:graphicData uri="http://schemas.openxmlformats.org/presentationml/2006/ole">
             <mc:AlternateContent xmlns:mc="http://schemas.openxmlformats.org/markup-compatibility/2006">
               <mc:Choice xmlns:v="urn:schemas-microsoft-com:vml" Requires="v">
-                <p:oleObj spid="_x0000_s4264" name="AxMath" r:id="rId39" imgW="637920" imgH="279000" progId="Equation.AxMath">
+                <p:oleObj spid="_x0000_s4293" name="AxMath" r:id="rId39" imgW="637920" imgH="279000" progId="Equation.AxMath">
                   <p:embed/>
                 </p:oleObj>
               </mc:Choice>
@@ -7135,7 +7135,7 @@
           <a:graphicData uri="http://schemas.openxmlformats.org/presentationml/2006/ole">
             <mc:AlternateContent xmlns:mc="http://schemas.openxmlformats.org/markup-compatibility/2006">
               <mc:Choice xmlns:v="urn:schemas-microsoft-com:vml" Requires="v">
-                <p:oleObj spid="_x0000_s4265" name="AxMath" r:id="rId41" imgW="636480" imgH="279000" progId="Equation.AxMath">
+                <p:oleObj spid="_x0000_s4294" name="AxMath" r:id="rId41" imgW="636480" imgH="279000" progId="Equation.AxMath">
                   <p:embed/>
                 </p:oleObj>
               </mc:Choice>
@@ -7238,7 +7238,7 @@
           <a:graphicData uri="http://schemas.openxmlformats.org/presentationml/2006/ole">
             <mc:AlternateContent xmlns:mc="http://schemas.openxmlformats.org/markup-compatibility/2006">
               <mc:Choice xmlns:v="urn:schemas-microsoft-com:vml" Requires="v">
-                <p:oleObj spid="_x0000_s4266" name="AxMath" r:id="rId43" imgW="629280" imgH="279000" progId="Equation.AxMath">
+                <p:oleObj spid="_x0000_s4295" name="AxMath" r:id="rId43" imgW="629280" imgH="279000" progId="Equation.AxMath">
                   <p:embed/>
                 </p:oleObj>
               </mc:Choice>
@@ -7581,7 +7581,7 @@
           <a:graphicData uri="http://schemas.openxmlformats.org/presentationml/2006/ole">
             <mc:AlternateContent xmlns:mc="http://schemas.openxmlformats.org/markup-compatibility/2006">
               <mc:Choice xmlns:v="urn:schemas-microsoft-com:vml" Requires="v">
-                <p:oleObj spid="_x0000_s4267" name="AxMath" r:id="rId7" imgW="151920" imgH="226800" progId="Equation.AxMath">
+                <p:oleObj spid="_x0000_s4296" name="AxMath" r:id="rId7" imgW="151920" imgH="226800" progId="Equation.AxMath">
                   <p:embed/>
                 </p:oleObj>
               </mc:Choice>
@@ -7686,7 +7686,7 @@
           <a:graphicData uri="http://schemas.openxmlformats.org/presentationml/2006/ole">
             <mc:AlternateContent xmlns:mc="http://schemas.openxmlformats.org/markup-compatibility/2006">
               <mc:Choice xmlns:v="urn:schemas-microsoft-com:vml" Requires="v">
-                <p:oleObj spid="_x0000_s4268" name="AxMath" r:id="rId45" imgW="637560" imgH="279000" progId="Equation.AxMath">
+                <p:oleObj spid="_x0000_s4297" name="AxMath" r:id="rId45" imgW="637560" imgH="279000" progId="Equation.AxMath">
                   <p:embed/>
                 </p:oleObj>
               </mc:Choice>
@@ -7789,7 +7789,7 @@
           <a:graphicData uri="http://schemas.openxmlformats.org/presentationml/2006/ole">
             <mc:AlternateContent xmlns:mc="http://schemas.openxmlformats.org/markup-compatibility/2006">
               <mc:Choice xmlns:v="urn:schemas-microsoft-com:vml" Requires="v">
-                <p:oleObj spid="_x0000_s4269" name="AxMath" r:id="rId46" imgW="630720" imgH="279000" progId="Equation.AxMath">
+                <p:oleObj spid="_x0000_s4298" name="AxMath" r:id="rId46" imgW="630720" imgH="279000" progId="Equation.AxMath">
                   <p:embed/>
                 </p:oleObj>
               </mc:Choice>
@@ -7892,7 +7892,7 @@
           <a:graphicData uri="http://schemas.openxmlformats.org/presentationml/2006/ole">
             <mc:AlternateContent xmlns:mc="http://schemas.openxmlformats.org/markup-compatibility/2006">
               <mc:Choice xmlns:v="urn:schemas-microsoft-com:vml" Requires="v">
-                <p:oleObj spid="_x0000_s4270" name="AxMath" r:id="rId48" imgW="629280" imgH="279000" progId="Equation.AxMath">
+                <p:oleObj spid="_x0000_s4299" name="AxMath" r:id="rId48" imgW="629280" imgH="279000" progId="Equation.AxMath">
                   <p:embed/>
                 </p:oleObj>
               </mc:Choice>
@@ -7997,7 +7997,7 @@
           <a:graphicData uri="http://schemas.openxmlformats.org/presentationml/2006/ole">
             <mc:AlternateContent xmlns:mc="http://schemas.openxmlformats.org/markup-compatibility/2006">
               <mc:Choice xmlns:v="urn:schemas-microsoft-com:vml" Requires="v">
-                <p:oleObj spid="_x0000_s4271" name="AxMath" r:id="rId50" imgW="622080" imgH="279000" progId="Equation.AxMath">
+                <p:oleObj spid="_x0000_s4300" name="AxMath" r:id="rId50" imgW="622080" imgH="279000" progId="Equation.AxMath">
                   <p:embed/>
                 </p:oleObj>
               </mc:Choice>
@@ -8473,7 +8473,7 @@
           <a:graphicData uri="http://schemas.openxmlformats.org/presentationml/2006/ole">
             <mc:AlternateContent xmlns:mc="http://schemas.openxmlformats.org/markup-compatibility/2006">
               <mc:Choice xmlns:v="urn:schemas-microsoft-com:vml" Requires="v">
-                <p:oleObj spid="_x0000_s5267" name="AxMath" r:id="rId3" imgW="151920" imgH="226800" progId="Equation.AxMath">
+                <p:oleObj spid="_x0000_s5296" name="AxMath" r:id="rId3" imgW="151920" imgH="226800" progId="Equation.AxMath">
                   <p:embed/>
                 </p:oleObj>
               </mc:Choice>
@@ -8530,7 +8530,7 @@
           <a:graphicData uri="http://schemas.openxmlformats.org/presentationml/2006/ole">
             <mc:AlternateContent xmlns:mc="http://schemas.openxmlformats.org/markup-compatibility/2006">
               <mc:Choice xmlns:v="urn:schemas-microsoft-com:vml" Requires="v">
-                <p:oleObj spid="_x0000_s5268" name="AxMath" r:id="rId5" imgW="151920" imgH="226800" progId="Equation.AxMath">
+                <p:oleObj spid="_x0000_s5297" name="AxMath" r:id="rId5" imgW="151920" imgH="226800" progId="Equation.AxMath">
                   <p:embed/>
                 </p:oleObj>
               </mc:Choice>
@@ -8587,7 +8587,7 @@
           <a:graphicData uri="http://schemas.openxmlformats.org/presentationml/2006/ole">
             <mc:AlternateContent xmlns:mc="http://schemas.openxmlformats.org/markup-compatibility/2006">
               <mc:Choice xmlns:v="urn:schemas-microsoft-com:vml" Requires="v">
-                <p:oleObj spid="_x0000_s5269" name="AxMath" r:id="rId6" imgW="151920" imgH="226800" progId="Equation.AxMath">
+                <p:oleObj spid="_x0000_s5298" name="AxMath" r:id="rId6" imgW="151920" imgH="226800" progId="Equation.AxMath">
                   <p:embed/>
                 </p:oleObj>
               </mc:Choice>
@@ -8644,7 +8644,7 @@
           <a:graphicData uri="http://schemas.openxmlformats.org/presentationml/2006/ole">
             <mc:AlternateContent xmlns:mc="http://schemas.openxmlformats.org/markup-compatibility/2006">
               <mc:Choice xmlns:v="urn:schemas-microsoft-com:vml" Requires="v">
-                <p:oleObj spid="_x0000_s5270" name="AxMath" r:id="rId7" imgW="151920" imgH="226800" progId="Equation.AxMath">
+                <p:oleObj spid="_x0000_s5299" name="AxMath" r:id="rId7" imgW="151920" imgH="226800" progId="Equation.AxMath">
                   <p:embed/>
                 </p:oleObj>
               </mc:Choice>
@@ -8701,7 +8701,7 @@
           <a:graphicData uri="http://schemas.openxmlformats.org/presentationml/2006/ole">
             <mc:AlternateContent xmlns:mc="http://schemas.openxmlformats.org/markup-compatibility/2006">
               <mc:Choice xmlns:v="urn:schemas-microsoft-com:vml" Requires="v">
-                <p:oleObj spid="_x0000_s5271" name="AxMath" r:id="rId8" imgW="151920" imgH="226800" progId="Equation.AxMath">
+                <p:oleObj spid="_x0000_s5300" name="AxMath" r:id="rId8" imgW="151920" imgH="226800" progId="Equation.AxMath">
                   <p:embed/>
                 </p:oleObj>
               </mc:Choice>
@@ -8758,7 +8758,7 @@
           <a:graphicData uri="http://schemas.openxmlformats.org/presentationml/2006/ole">
             <mc:AlternateContent xmlns:mc="http://schemas.openxmlformats.org/markup-compatibility/2006">
               <mc:Choice xmlns:v="urn:schemas-microsoft-com:vml" Requires="v">
-                <p:oleObj spid="_x0000_s5272" name="AxMath" r:id="rId10" imgW="151920" imgH="226800" progId="Equation.AxMath">
+                <p:oleObj spid="_x0000_s5301" name="AxMath" r:id="rId10" imgW="151920" imgH="226800" progId="Equation.AxMath">
                   <p:embed/>
                 </p:oleObj>
               </mc:Choice>
@@ -8815,7 +8815,7 @@
           <a:graphicData uri="http://schemas.openxmlformats.org/presentationml/2006/ole">
             <mc:AlternateContent xmlns:mc="http://schemas.openxmlformats.org/markup-compatibility/2006">
               <mc:Choice xmlns:v="urn:schemas-microsoft-com:vml" Requires="v">
-                <p:oleObj spid="_x0000_s5273" name="AxMath" r:id="rId11" imgW="151920" imgH="226800" progId="Equation.AxMath">
+                <p:oleObj spid="_x0000_s5302" name="AxMath" r:id="rId11" imgW="151920" imgH="226800" progId="Equation.AxMath">
                   <p:embed/>
                 </p:oleObj>
               </mc:Choice>
@@ -8872,7 +8872,7 @@
           <a:graphicData uri="http://schemas.openxmlformats.org/presentationml/2006/ole">
             <mc:AlternateContent xmlns:mc="http://schemas.openxmlformats.org/markup-compatibility/2006">
               <mc:Choice xmlns:v="urn:schemas-microsoft-com:vml" Requires="v">
-                <p:oleObj spid="_x0000_s5274" name="AxMath" r:id="rId12" imgW="151920" imgH="226800" progId="Equation.AxMath">
+                <p:oleObj spid="_x0000_s5303" name="AxMath" r:id="rId12" imgW="151920" imgH="226800" progId="Equation.AxMath">
                   <p:embed/>
                 </p:oleObj>
               </mc:Choice>
@@ -8929,7 +8929,7 @@
           <a:graphicData uri="http://schemas.openxmlformats.org/presentationml/2006/ole">
             <mc:AlternateContent xmlns:mc="http://schemas.openxmlformats.org/markup-compatibility/2006">
               <mc:Choice xmlns:v="urn:schemas-microsoft-com:vml" Requires="v">
-                <p:oleObj spid="_x0000_s5275" name="AxMath" r:id="rId13" imgW="622080" imgH="279000" progId="Equation.AxMath">
+                <p:oleObj spid="_x0000_s5304" name="AxMath" r:id="rId13" imgW="622080" imgH="279000" progId="Equation.AxMath">
                   <p:embed/>
                 </p:oleObj>
               </mc:Choice>
@@ -9034,7 +9034,7 @@
           <a:graphicData uri="http://schemas.openxmlformats.org/presentationml/2006/ole">
             <mc:AlternateContent xmlns:mc="http://schemas.openxmlformats.org/markup-compatibility/2006">
               <mc:Choice xmlns:v="urn:schemas-microsoft-com:vml" Requires="v">
-                <p:oleObj spid="_x0000_s5276" name="AxMath" r:id="rId15" imgW="629280" imgH="279000" progId="Equation.AxMath">
+                <p:oleObj spid="_x0000_s5305" name="AxMath" r:id="rId15" imgW="629280" imgH="279000" progId="Equation.AxMath">
                   <p:embed/>
                 </p:oleObj>
               </mc:Choice>
@@ -9139,7 +9139,7 @@
           <a:graphicData uri="http://schemas.openxmlformats.org/presentationml/2006/ole">
             <mc:AlternateContent xmlns:mc="http://schemas.openxmlformats.org/markup-compatibility/2006">
               <mc:Choice xmlns:v="urn:schemas-microsoft-com:vml" Requires="v">
-                <p:oleObj spid="_x0000_s5277" name="AxMath" r:id="rId17" imgW="630720" imgH="279000" progId="Equation.AxMath">
+                <p:oleObj spid="_x0000_s5306" name="AxMath" r:id="rId17" imgW="630720" imgH="279000" progId="Equation.AxMath">
                   <p:embed/>
                 </p:oleObj>
               </mc:Choice>
@@ -9244,7 +9244,7 @@
           <a:graphicData uri="http://schemas.openxmlformats.org/presentationml/2006/ole">
             <mc:AlternateContent xmlns:mc="http://schemas.openxmlformats.org/markup-compatibility/2006">
               <mc:Choice xmlns:v="urn:schemas-microsoft-com:vml" Requires="v">
-                <p:oleObj spid="_x0000_s5278" name="AxMath" r:id="rId19" imgW="637560" imgH="279000" progId="Equation.AxMath">
+                <p:oleObj spid="_x0000_s5307" name="AxMath" r:id="rId19" imgW="637560" imgH="279000" progId="Equation.AxMath">
                   <p:embed/>
                 </p:oleObj>
               </mc:Choice>
@@ -9301,7 +9301,7 @@
           <a:graphicData uri="http://schemas.openxmlformats.org/presentationml/2006/ole">
             <mc:AlternateContent xmlns:mc="http://schemas.openxmlformats.org/markup-compatibility/2006">
               <mc:Choice xmlns:v="urn:schemas-microsoft-com:vml" Requires="v">
-                <p:oleObj spid="_x0000_s5279" name="AxMath" r:id="rId21" imgW="629280" imgH="279000" progId="Equation.AxMath">
+                <p:oleObj spid="_x0000_s5308" name="AxMath" r:id="rId21" imgW="629280" imgH="279000" progId="Equation.AxMath">
                   <p:embed/>
                 </p:oleObj>
               </mc:Choice>
@@ -9406,7 +9406,7 @@
           <a:graphicData uri="http://schemas.openxmlformats.org/presentationml/2006/ole">
             <mc:AlternateContent xmlns:mc="http://schemas.openxmlformats.org/markup-compatibility/2006">
               <mc:Choice xmlns:v="urn:schemas-microsoft-com:vml" Requires="v">
-                <p:oleObj spid="_x0000_s5280" name="AxMath" r:id="rId23" imgW="630720" imgH="279000" progId="Equation.AxMath">
+                <p:oleObj spid="_x0000_s5309" name="AxMath" r:id="rId23" imgW="630720" imgH="279000" progId="Equation.AxMath">
                   <p:embed/>
                 </p:oleObj>
               </mc:Choice>
@@ -9511,7 +9511,7 @@
           <a:graphicData uri="http://schemas.openxmlformats.org/presentationml/2006/ole">
             <mc:AlternateContent xmlns:mc="http://schemas.openxmlformats.org/markup-compatibility/2006">
               <mc:Choice xmlns:v="urn:schemas-microsoft-com:vml" Requires="v">
-                <p:oleObj spid="_x0000_s5281" name="AxMath" r:id="rId25" imgW="630720" imgH="279000" progId="Equation.AxMath">
+                <p:oleObj spid="_x0000_s5310" name="AxMath" r:id="rId25" imgW="630720" imgH="279000" progId="Equation.AxMath">
                   <p:embed/>
                 </p:oleObj>
               </mc:Choice>
@@ -9616,7 +9616,7 @@
           <a:graphicData uri="http://schemas.openxmlformats.org/presentationml/2006/ole">
             <mc:AlternateContent xmlns:mc="http://schemas.openxmlformats.org/markup-compatibility/2006">
               <mc:Choice xmlns:v="urn:schemas-microsoft-com:vml" Requires="v">
-                <p:oleObj spid="_x0000_s5282" name="AxMath" r:id="rId27" imgW="622080" imgH="279000" progId="Equation.AxMath">
+                <p:oleObj spid="_x0000_s5311" name="AxMath" r:id="rId27" imgW="622080" imgH="279000" progId="Equation.AxMath">
                   <p:embed/>
                 </p:oleObj>
               </mc:Choice>
@@ -9721,7 +9721,7 @@
           <a:graphicData uri="http://schemas.openxmlformats.org/presentationml/2006/ole">
             <mc:AlternateContent xmlns:mc="http://schemas.openxmlformats.org/markup-compatibility/2006">
               <mc:Choice xmlns:v="urn:schemas-microsoft-com:vml" Requires="v">
-                <p:oleObj spid="_x0000_s5283" name="AxMath" r:id="rId29" imgW="629280" imgH="279000" progId="Equation.AxMath">
+                <p:oleObj spid="_x0000_s5312" name="AxMath" r:id="rId29" imgW="629280" imgH="279000" progId="Equation.AxMath">
                   <p:embed/>
                 </p:oleObj>
               </mc:Choice>
@@ -9826,7 +9826,7 @@
           <a:graphicData uri="http://schemas.openxmlformats.org/presentationml/2006/ole">
             <mc:AlternateContent xmlns:mc="http://schemas.openxmlformats.org/markup-compatibility/2006">
               <mc:Choice xmlns:v="urn:schemas-microsoft-com:vml" Requires="v">
-                <p:oleObj spid="_x0000_s5284" name="AxMath" r:id="rId31" imgW="622080" imgH="279000" progId="Equation.AxMath">
+                <p:oleObj spid="_x0000_s5313" name="AxMath" r:id="rId31" imgW="622080" imgH="279000" progId="Equation.AxMath">
                   <p:embed/>
                 </p:oleObj>
               </mc:Choice>
@@ -9931,7 +9931,7 @@
           <a:graphicData uri="http://schemas.openxmlformats.org/presentationml/2006/ole">
             <mc:AlternateContent xmlns:mc="http://schemas.openxmlformats.org/markup-compatibility/2006">
               <mc:Choice xmlns:v="urn:schemas-microsoft-com:vml" Requires="v">
-                <p:oleObj spid="_x0000_s5285" name="AxMath" r:id="rId32" imgW="630720" imgH="279000" progId="Equation.AxMath">
+                <p:oleObj spid="_x0000_s5314" name="AxMath" r:id="rId32" imgW="630720" imgH="279000" progId="Equation.AxMath">
                   <p:embed/>
                 </p:oleObj>
               </mc:Choice>
@@ -10036,7 +10036,7 @@
           <a:graphicData uri="http://schemas.openxmlformats.org/presentationml/2006/ole">
             <mc:AlternateContent xmlns:mc="http://schemas.openxmlformats.org/markup-compatibility/2006">
               <mc:Choice xmlns:v="urn:schemas-microsoft-com:vml" Requires="v">
-                <p:oleObj spid="_x0000_s5286" name="AxMath" r:id="rId34" imgW="629280" imgH="279000" progId="Equation.AxMath">
+                <p:oleObj spid="_x0000_s5315" name="AxMath" r:id="rId34" imgW="629280" imgH="279000" progId="Equation.AxMath">
                   <p:embed/>
                 </p:oleObj>
               </mc:Choice>
@@ -10141,7 +10141,7 @@
           <a:graphicData uri="http://schemas.openxmlformats.org/presentationml/2006/ole">
             <mc:AlternateContent xmlns:mc="http://schemas.openxmlformats.org/markup-compatibility/2006">
               <mc:Choice xmlns:v="urn:schemas-microsoft-com:vml" Requires="v">
-                <p:oleObj spid="_x0000_s5287" name="AxMath" r:id="rId36" imgW="622080" imgH="279000" progId="Equation.AxMath">
+                <p:oleObj spid="_x0000_s5316" name="AxMath" r:id="rId36" imgW="622080" imgH="279000" progId="Equation.AxMath">
                   <p:embed/>
                 </p:oleObj>
               </mc:Choice>
@@ -10484,7 +10484,7 @@
           <a:graphicData uri="http://schemas.openxmlformats.org/presentationml/2006/ole">
             <mc:AlternateContent xmlns:mc="http://schemas.openxmlformats.org/markup-compatibility/2006">
               <mc:Choice xmlns:v="urn:schemas-microsoft-com:vml" Requires="v">
-                <p:oleObj spid="_x0000_s5288" name="AxMath" r:id="rId7" imgW="151920" imgH="226800" progId="Equation.AxMath">
+                <p:oleObj spid="_x0000_s5317" name="AxMath" r:id="rId7" imgW="151920" imgH="226800" progId="Equation.AxMath">
                   <p:embed/>
                 </p:oleObj>
               </mc:Choice>
@@ -10637,7 +10637,7 @@
           <a:graphicData uri="http://schemas.openxmlformats.org/presentationml/2006/ole">
             <mc:AlternateContent xmlns:mc="http://schemas.openxmlformats.org/markup-compatibility/2006">
               <mc:Choice xmlns:v="urn:schemas-microsoft-com:vml" Requires="v">
-                <p:oleObj spid="_x0000_s5289" name="AxMath" r:id="rId38" imgW="630720" imgH="279000" progId="Equation.AxMath">
+                <p:oleObj spid="_x0000_s5318" name="AxMath" r:id="rId38" imgW="630720" imgH="279000" progId="Equation.AxMath">
                   <p:embed/>
                 </p:oleObj>
               </mc:Choice>
@@ -10742,7 +10742,7 @@
           <a:graphicData uri="http://schemas.openxmlformats.org/presentationml/2006/ole">
             <mc:AlternateContent xmlns:mc="http://schemas.openxmlformats.org/markup-compatibility/2006">
               <mc:Choice xmlns:v="urn:schemas-microsoft-com:vml" Requires="v">
-                <p:oleObj spid="_x0000_s5290" name="AxMath" r:id="rId40" imgW="629280" imgH="279000" progId="Equation.AxMath">
+                <p:oleObj spid="_x0000_s5319" name="AxMath" r:id="rId40" imgW="629280" imgH="279000" progId="Equation.AxMath">
                   <p:embed/>
                 </p:oleObj>
               </mc:Choice>
@@ -10847,7 +10847,7 @@
           <a:graphicData uri="http://schemas.openxmlformats.org/presentationml/2006/ole">
             <mc:AlternateContent xmlns:mc="http://schemas.openxmlformats.org/markup-compatibility/2006">
               <mc:Choice xmlns:v="urn:schemas-microsoft-com:vml" Requires="v">
-                <p:oleObj spid="_x0000_s5291" name="AxMath" r:id="rId41" imgW="622080" imgH="279000" progId="Equation.AxMath">
+                <p:oleObj spid="_x0000_s5320" name="AxMath" r:id="rId41" imgW="622080" imgH="279000" progId="Equation.AxMath">
                   <p:embed/>
                 </p:oleObj>
               </mc:Choice>
@@ -10978,7 +10978,7 @@
           <a:graphicData uri="http://schemas.openxmlformats.org/presentationml/2006/ole">
             <mc:AlternateContent xmlns:mc="http://schemas.openxmlformats.org/markup-compatibility/2006">
               <mc:Choice xmlns:v="urn:schemas-microsoft-com:vml" Requires="v">
-                <p:oleObj spid="_x0000_s5292" name="AxMath" r:id="rId19" imgW="637560" imgH="279000" progId="Equation.AxMath">
+                <p:oleObj spid="_x0000_s5321" name="AxMath" r:id="rId19" imgW="637560" imgH="279000" progId="Equation.AxMath">
                   <p:embed/>
                 </p:oleObj>
               </mc:Choice>
@@ -11083,7 +11083,7 @@
           <a:graphicData uri="http://schemas.openxmlformats.org/presentationml/2006/ole">
             <mc:AlternateContent xmlns:mc="http://schemas.openxmlformats.org/markup-compatibility/2006">
               <mc:Choice xmlns:v="urn:schemas-microsoft-com:vml" Requires="v">
-                <p:oleObj spid="_x0000_s5293" name="AxMath" r:id="rId43" imgW="637560" imgH="279000" progId="Equation.AxMath">
+                <p:oleObj spid="_x0000_s5322" name="AxMath" r:id="rId43" imgW="637560" imgH="279000" progId="Equation.AxMath">
                   <p:embed/>
                 </p:oleObj>
               </mc:Choice>
@@ -11188,7 +11188,7 @@
           <a:graphicData uri="http://schemas.openxmlformats.org/presentationml/2006/ole">
             <mc:AlternateContent xmlns:mc="http://schemas.openxmlformats.org/markup-compatibility/2006">
               <mc:Choice xmlns:v="urn:schemas-microsoft-com:vml" Requires="v">
-                <p:oleObj spid="_x0000_s5294" name="AxMath" r:id="rId45" imgW="637560" imgH="279000" progId="Equation.AxMath">
+                <p:oleObj spid="_x0000_s5323" name="AxMath" r:id="rId45" imgW="637560" imgH="279000" progId="Equation.AxMath">
                   <p:embed/>
                 </p:oleObj>
               </mc:Choice>
@@ -11293,7 +11293,7 @@
           <a:graphicData uri="http://schemas.openxmlformats.org/presentationml/2006/ole">
             <mc:AlternateContent xmlns:mc="http://schemas.openxmlformats.org/markup-compatibility/2006">
               <mc:Choice xmlns:v="urn:schemas-microsoft-com:vml" Requires="v">
-                <p:oleObj spid="_x0000_s5295" name="AxMath" r:id="rId47" imgW="637560" imgH="279000" progId="Equation.AxMath">
+                <p:oleObj spid="_x0000_s5324" name="AxMath" r:id="rId47" imgW="637560" imgH="279000" progId="Equation.AxMath">
                   <p:embed/>
                 </p:oleObj>
               </mc:Choice>
@@ -11484,7 +11484,7 @@
             <a:graphicData uri="http://schemas.openxmlformats.org/presentationml/2006/ole">
               <mc:AlternateContent xmlns:mc="http://schemas.openxmlformats.org/markup-compatibility/2006">
                 <mc:Choice xmlns:v="urn:schemas-microsoft-com:vml" Requires="v">
-                  <p:oleObj spid="_x0000_s6721" name="AxMath" r:id="rId3" imgW="151920" imgH="226800" progId="Equation.AxMath">
+                  <p:oleObj spid="_x0000_s6836" name="AxMath" r:id="rId3" imgW="151920" imgH="226800" progId="Equation.AxMath">
                     <p:embed/>
                   </p:oleObj>
                 </mc:Choice>
@@ -11537,7 +11537,7 @@
             <a:graphicData uri="http://schemas.openxmlformats.org/presentationml/2006/ole">
               <mc:AlternateContent xmlns:mc="http://schemas.openxmlformats.org/markup-compatibility/2006">
                 <mc:Choice xmlns:v="urn:schemas-microsoft-com:vml" Requires="v">
-                  <p:oleObj spid="_x0000_s6722" name="AxMath" r:id="rId5" imgW="151920" imgH="226800" progId="Equation.AxMath">
+                  <p:oleObj spid="_x0000_s6837" name="AxMath" r:id="rId5" imgW="151920" imgH="226800" progId="Equation.AxMath">
                     <p:embed/>
                   </p:oleObj>
                 </mc:Choice>
@@ -11590,7 +11590,7 @@
             <a:graphicData uri="http://schemas.openxmlformats.org/presentationml/2006/ole">
               <mc:AlternateContent xmlns:mc="http://schemas.openxmlformats.org/markup-compatibility/2006">
                 <mc:Choice xmlns:v="urn:schemas-microsoft-com:vml" Requires="v">
-                  <p:oleObj spid="_x0000_s6723" name="AxMath" r:id="rId6" imgW="151920" imgH="226800" progId="Equation.AxMath">
+                  <p:oleObj spid="_x0000_s6838" name="AxMath" r:id="rId6" imgW="151920" imgH="226800" progId="Equation.AxMath">
                     <p:embed/>
                   </p:oleObj>
                 </mc:Choice>
@@ -11643,7 +11643,7 @@
             <a:graphicData uri="http://schemas.openxmlformats.org/presentationml/2006/ole">
               <mc:AlternateContent xmlns:mc="http://schemas.openxmlformats.org/markup-compatibility/2006">
                 <mc:Choice xmlns:v="urn:schemas-microsoft-com:vml" Requires="v">
-                  <p:oleObj spid="_x0000_s6724" name="AxMath" r:id="rId7" imgW="151920" imgH="226800" progId="Equation.AxMath">
+                  <p:oleObj spid="_x0000_s6839" name="AxMath" r:id="rId7" imgW="151920" imgH="226800" progId="Equation.AxMath">
                     <p:embed/>
                   </p:oleObj>
                 </mc:Choice>
@@ -11696,7 +11696,7 @@
             <a:graphicData uri="http://schemas.openxmlformats.org/presentationml/2006/ole">
               <mc:AlternateContent xmlns:mc="http://schemas.openxmlformats.org/markup-compatibility/2006">
                 <mc:Choice xmlns:v="urn:schemas-microsoft-com:vml" Requires="v">
-                  <p:oleObj spid="_x0000_s6725" name="AxMath" r:id="rId8" imgW="151920" imgH="226800" progId="Equation.AxMath">
+                  <p:oleObj spid="_x0000_s6840" name="AxMath" r:id="rId8" imgW="151920" imgH="226800" progId="Equation.AxMath">
                     <p:embed/>
                   </p:oleObj>
                 </mc:Choice>
@@ -11749,7 +11749,7 @@
             <a:graphicData uri="http://schemas.openxmlformats.org/presentationml/2006/ole">
               <mc:AlternateContent xmlns:mc="http://schemas.openxmlformats.org/markup-compatibility/2006">
                 <mc:Choice xmlns:v="urn:schemas-microsoft-com:vml" Requires="v">
-                  <p:oleObj spid="_x0000_s6726" name="AxMath" r:id="rId10" imgW="151920" imgH="226800" progId="Equation.AxMath">
+                  <p:oleObj spid="_x0000_s6841" name="AxMath" r:id="rId10" imgW="151920" imgH="226800" progId="Equation.AxMath">
                     <p:embed/>
                   </p:oleObj>
                 </mc:Choice>
@@ -11802,7 +11802,7 @@
             <a:graphicData uri="http://schemas.openxmlformats.org/presentationml/2006/ole">
               <mc:AlternateContent xmlns:mc="http://schemas.openxmlformats.org/markup-compatibility/2006">
                 <mc:Choice xmlns:v="urn:schemas-microsoft-com:vml" Requires="v">
-                  <p:oleObj spid="_x0000_s6727" name="AxMath" r:id="rId11" imgW="151920" imgH="226800" progId="Equation.AxMath">
+                  <p:oleObj spid="_x0000_s6842" name="AxMath" r:id="rId11" imgW="151920" imgH="226800" progId="Equation.AxMath">
                     <p:embed/>
                   </p:oleObj>
                 </mc:Choice>
@@ -11855,7 +11855,7 @@
             <a:graphicData uri="http://schemas.openxmlformats.org/presentationml/2006/ole">
               <mc:AlternateContent xmlns:mc="http://schemas.openxmlformats.org/markup-compatibility/2006">
                 <mc:Choice xmlns:v="urn:schemas-microsoft-com:vml" Requires="v">
-                  <p:oleObj spid="_x0000_s6728" name="AxMath" r:id="rId12" imgW="151920" imgH="226800" progId="Equation.AxMath">
+                  <p:oleObj spid="_x0000_s6843" name="AxMath" r:id="rId12" imgW="151920" imgH="226800" progId="Equation.AxMath">
                     <p:embed/>
                   </p:oleObj>
                 </mc:Choice>
@@ -11908,7 +11908,7 @@
             <a:graphicData uri="http://schemas.openxmlformats.org/presentationml/2006/ole">
               <mc:AlternateContent xmlns:mc="http://schemas.openxmlformats.org/markup-compatibility/2006">
                 <mc:Choice xmlns:v="urn:schemas-microsoft-com:vml" Requires="v">
-                  <p:oleObj spid="_x0000_s6729" name="AxMath" r:id="rId13" imgW="218880" imgH="230400" progId="Equation.AxMath">
+                  <p:oleObj spid="_x0000_s6844" name="AxMath" r:id="rId13" imgW="218880" imgH="230400" progId="Equation.AxMath">
                     <p:embed/>
                   </p:oleObj>
                 </mc:Choice>
@@ -12007,7 +12007,7 @@
             <a:graphicData uri="http://schemas.openxmlformats.org/presentationml/2006/ole">
               <mc:AlternateContent xmlns:mc="http://schemas.openxmlformats.org/markup-compatibility/2006">
                 <mc:Choice xmlns:v="urn:schemas-microsoft-com:vml" Requires="v">
-                  <p:oleObj spid="_x0000_s6730" name="AxMath" r:id="rId15" imgW="217080" imgH="230400" progId="Equation.AxMath">
+                  <p:oleObj spid="_x0000_s6845" name="AxMath" r:id="rId15" imgW="217080" imgH="230400" progId="Equation.AxMath">
                     <p:embed/>
                   </p:oleObj>
                 </mc:Choice>
@@ -12106,7 +12106,7 @@
             <a:graphicData uri="http://schemas.openxmlformats.org/presentationml/2006/ole">
               <mc:AlternateContent xmlns:mc="http://schemas.openxmlformats.org/markup-compatibility/2006">
                 <mc:Choice xmlns:v="urn:schemas-microsoft-com:vml" Requires="v">
-                  <p:oleObj spid="_x0000_s6731" name="AxMath" r:id="rId17" imgW="225360" imgH="230400" progId="Equation.AxMath">
+                  <p:oleObj spid="_x0000_s6846" name="AxMath" r:id="rId17" imgW="225360" imgH="230400" progId="Equation.AxMath">
                     <p:embed/>
                   </p:oleObj>
                 </mc:Choice>
@@ -12207,7 +12207,7 @@
             <a:graphicData uri="http://schemas.openxmlformats.org/presentationml/2006/ole">
               <mc:AlternateContent xmlns:mc="http://schemas.openxmlformats.org/markup-compatibility/2006">
                 <mc:Choice xmlns:v="urn:schemas-microsoft-com:vml" Requires="v">
-                  <p:oleObj spid="_x0000_s6732" name="AxMath" r:id="rId19" imgW="637560" imgH="279000" progId="Equation.AxMath">
+                  <p:oleObj spid="_x0000_s6847" name="AxMath" r:id="rId19" imgW="637560" imgH="279000" progId="Equation.AxMath">
                     <p:embed/>
                   </p:oleObj>
                 </mc:Choice>
@@ -12260,7 +12260,7 @@
             <a:graphicData uri="http://schemas.openxmlformats.org/presentationml/2006/ole">
               <mc:AlternateContent xmlns:mc="http://schemas.openxmlformats.org/markup-compatibility/2006">
                 <mc:Choice xmlns:v="urn:schemas-microsoft-com:vml" Requires="v">
-                  <p:oleObj spid="_x0000_s6733" name="AxMath" r:id="rId21" imgW="629280" imgH="279000" progId="Equation.AxMath">
+                  <p:oleObj spid="_x0000_s6848" name="AxMath" r:id="rId21" imgW="629280" imgH="279000" progId="Equation.AxMath">
                     <p:embed/>
                   </p:oleObj>
                 </mc:Choice>
@@ -12359,7 +12359,7 @@
             <a:graphicData uri="http://schemas.openxmlformats.org/presentationml/2006/ole">
               <mc:AlternateContent xmlns:mc="http://schemas.openxmlformats.org/markup-compatibility/2006">
                 <mc:Choice xmlns:v="urn:schemas-microsoft-com:vml" Requires="v">
-                  <p:oleObj spid="_x0000_s6734" name="AxMath" r:id="rId23" imgW="839160" imgH="279000" progId="Equation.AxMath">
+                  <p:oleObj spid="_x0000_s6849" name="AxMath" r:id="rId23" imgW="839160" imgH="279000" progId="Equation.AxMath">
                     <p:embed/>
                   </p:oleObj>
                 </mc:Choice>
@@ -12458,7 +12458,7 @@
             <a:graphicData uri="http://schemas.openxmlformats.org/presentationml/2006/ole">
               <mc:AlternateContent xmlns:mc="http://schemas.openxmlformats.org/markup-compatibility/2006">
                 <mc:Choice xmlns:v="urn:schemas-microsoft-com:vml" Requires="v">
-                  <p:oleObj spid="_x0000_s6735" name="AxMath" r:id="rId25" imgW="773640" imgH="230400" progId="Equation.AxMath">
+                  <p:oleObj spid="_x0000_s6850" name="AxMath" r:id="rId25" imgW="773640" imgH="230400" progId="Equation.AxMath">
                     <p:embed/>
                   </p:oleObj>
                 </mc:Choice>
@@ -12557,7 +12557,7 @@
             <a:graphicData uri="http://schemas.openxmlformats.org/presentationml/2006/ole">
               <mc:AlternateContent xmlns:mc="http://schemas.openxmlformats.org/markup-compatibility/2006">
                 <mc:Choice xmlns:v="urn:schemas-microsoft-com:vml" Requires="v">
-                  <p:oleObj spid="_x0000_s6736" name="AxMath" r:id="rId27" imgW="1183680" imgH="279000" progId="Equation.AxMath">
+                  <p:oleObj spid="_x0000_s6851" name="AxMath" r:id="rId27" imgW="1183680" imgH="279000" progId="Equation.AxMath">
                     <p:embed/>
                   </p:oleObj>
                 </mc:Choice>
@@ -12656,7 +12656,7 @@
             <a:graphicData uri="http://schemas.openxmlformats.org/presentationml/2006/ole">
               <mc:AlternateContent xmlns:mc="http://schemas.openxmlformats.org/markup-compatibility/2006">
                 <mc:Choice xmlns:v="urn:schemas-microsoft-com:vml" Requires="v">
-                  <p:oleObj spid="_x0000_s6737" name="AxMath" r:id="rId29" imgW="1183680" imgH="279000" progId="Equation.AxMath">
+                  <p:oleObj spid="_x0000_s6852" name="AxMath" r:id="rId29" imgW="1183680" imgH="279000" progId="Equation.AxMath">
                     <p:embed/>
                   </p:oleObj>
                 </mc:Choice>
@@ -12757,7 +12757,7 @@
             <a:graphicData uri="http://schemas.openxmlformats.org/presentationml/2006/ole">
               <mc:AlternateContent xmlns:mc="http://schemas.openxmlformats.org/markup-compatibility/2006">
                 <mc:Choice xmlns:v="urn:schemas-microsoft-com:vml" Requires="v">
-                  <p:oleObj spid="_x0000_s6738" name="AxMath" r:id="rId31" imgW="630720" imgH="279000" progId="Equation.AxMath">
+                  <p:oleObj spid="_x0000_s6853" name="AxMath" r:id="rId31" imgW="630720" imgH="279000" progId="Equation.AxMath">
                     <p:embed/>
                   </p:oleObj>
                 </mc:Choice>
@@ -12856,7 +12856,7 @@
             <a:graphicData uri="http://schemas.openxmlformats.org/presentationml/2006/ole">
               <mc:AlternateContent xmlns:mc="http://schemas.openxmlformats.org/markup-compatibility/2006">
                 <mc:Choice xmlns:v="urn:schemas-microsoft-com:vml" Requires="v">
-                  <p:oleObj spid="_x0000_s6739" name="AxMath" r:id="rId33" imgW="606240" imgH="279000" progId="Equation.AxMath">
+                  <p:oleObj spid="_x0000_s6854" name="AxMath" r:id="rId33" imgW="606240" imgH="279000" progId="Equation.AxMath">
                     <p:embed/>
                   </p:oleObj>
                 </mc:Choice>
@@ -12955,7 +12955,7 @@
             <a:graphicData uri="http://schemas.openxmlformats.org/presentationml/2006/ole">
               <mc:AlternateContent xmlns:mc="http://schemas.openxmlformats.org/markup-compatibility/2006">
                 <mc:Choice xmlns:v="urn:schemas-microsoft-com:vml" Requires="v">
-                  <p:oleObj spid="_x0000_s6740" name="AxMath" r:id="rId35" imgW="604080" imgH="279000" progId="Equation.AxMath">
+                  <p:oleObj spid="_x0000_s6855" name="AxMath" r:id="rId35" imgW="604080" imgH="279000" progId="Equation.AxMath">
                     <p:embed/>
                   </p:oleObj>
                 </mc:Choice>
@@ -13054,7 +13054,7 @@
             <a:graphicData uri="http://schemas.openxmlformats.org/presentationml/2006/ole">
               <mc:AlternateContent xmlns:mc="http://schemas.openxmlformats.org/markup-compatibility/2006">
                 <mc:Choice xmlns:v="urn:schemas-microsoft-com:vml" Requires="v">
-                  <p:oleObj spid="_x0000_s6741" name="AxMath" r:id="rId37" imgW="606240" imgH="279000" progId="Equation.AxMath">
+                  <p:oleObj spid="_x0000_s6856" name="AxMath" r:id="rId37" imgW="606240" imgH="279000" progId="Equation.AxMath">
                     <p:embed/>
                   </p:oleObj>
                 </mc:Choice>
@@ -13153,7 +13153,7 @@
             <a:graphicData uri="http://schemas.openxmlformats.org/presentationml/2006/ole">
               <mc:AlternateContent xmlns:mc="http://schemas.openxmlformats.org/markup-compatibility/2006">
                 <mc:Choice xmlns:v="urn:schemas-microsoft-com:vml" Requires="v">
-                  <p:oleObj spid="_x0000_s6742" name="AxMath" r:id="rId39" imgW="637920" imgH="279000" progId="Equation.AxMath">
+                  <p:oleObj spid="_x0000_s6857" name="AxMath" r:id="rId39" imgW="637920" imgH="279000" progId="Equation.AxMath">
                     <p:embed/>
                   </p:oleObj>
                 </mc:Choice>
@@ -13252,7 +13252,7 @@
             <a:graphicData uri="http://schemas.openxmlformats.org/presentationml/2006/ole">
               <mc:AlternateContent xmlns:mc="http://schemas.openxmlformats.org/markup-compatibility/2006">
                 <mc:Choice xmlns:v="urn:schemas-microsoft-com:vml" Requires="v">
-                  <p:oleObj spid="_x0000_s6743" name="AxMath" r:id="rId41" imgW="636480" imgH="279000" progId="Equation.AxMath">
+                  <p:oleObj spid="_x0000_s6858" name="AxMath" r:id="rId41" imgW="636480" imgH="279000" progId="Equation.AxMath">
                     <p:embed/>
                   </p:oleObj>
                 </mc:Choice>
@@ -13351,7 +13351,7 @@
             <a:graphicData uri="http://schemas.openxmlformats.org/presentationml/2006/ole">
               <mc:AlternateContent xmlns:mc="http://schemas.openxmlformats.org/markup-compatibility/2006">
                 <mc:Choice xmlns:v="urn:schemas-microsoft-com:vml" Requires="v">
-                  <p:oleObj spid="_x0000_s6744" name="AxMath" r:id="rId43" imgW="629280" imgH="279000" progId="Equation.AxMath">
+                  <p:oleObj spid="_x0000_s6859" name="AxMath" r:id="rId43" imgW="629280" imgH="279000" progId="Equation.AxMath">
                     <p:embed/>
                   </p:oleObj>
                 </mc:Choice>
@@ -13690,7 +13690,7 @@
             <a:graphicData uri="http://schemas.openxmlformats.org/presentationml/2006/ole">
               <mc:AlternateContent xmlns:mc="http://schemas.openxmlformats.org/markup-compatibility/2006">
                 <mc:Choice xmlns:v="urn:schemas-microsoft-com:vml" Requires="v">
-                  <p:oleObj spid="_x0000_s6745" name="AxMath" r:id="rId7" imgW="151920" imgH="226800" progId="Equation.AxMath">
+                  <p:oleObj spid="_x0000_s6860" name="AxMath" r:id="rId7" imgW="151920" imgH="226800" progId="Equation.AxMath">
                     <p:embed/>
                   </p:oleObj>
                 </mc:Choice>
@@ -13789,7 +13789,7 @@
             <a:graphicData uri="http://schemas.openxmlformats.org/presentationml/2006/ole">
               <mc:AlternateContent xmlns:mc="http://schemas.openxmlformats.org/markup-compatibility/2006">
                 <mc:Choice xmlns:v="urn:schemas-microsoft-com:vml" Requires="v">
-                  <p:oleObj spid="_x0000_s6746" name="AxMath" r:id="rId45" imgW="385200" imgH="230400" progId="Equation.AxMath">
+                  <p:oleObj spid="_x0000_s6861" name="AxMath" r:id="rId45" imgW="385200" imgH="230400" progId="Equation.AxMath">
                     <p:embed/>
                   </p:oleObj>
                 </mc:Choice>
@@ -13888,7 +13888,7 @@
             <a:graphicData uri="http://schemas.openxmlformats.org/presentationml/2006/ole">
               <mc:AlternateContent xmlns:mc="http://schemas.openxmlformats.org/markup-compatibility/2006">
                 <mc:Choice xmlns:v="urn:schemas-microsoft-com:vml" Requires="v">
-                  <p:oleObj spid="_x0000_s6747" name="AxMath" r:id="rId47" imgW="630720" imgH="279000" progId="Equation.AxMath">
+                  <p:oleObj spid="_x0000_s6862" name="AxMath" r:id="rId47" imgW="630720" imgH="279000" progId="Equation.AxMath">
                     <p:embed/>
                   </p:oleObj>
                 </mc:Choice>
@@ -13987,7 +13987,7 @@
             <a:graphicData uri="http://schemas.openxmlformats.org/presentationml/2006/ole">
               <mc:AlternateContent xmlns:mc="http://schemas.openxmlformats.org/markup-compatibility/2006">
                 <mc:Choice xmlns:v="urn:schemas-microsoft-com:vml" Requires="v">
-                  <p:oleObj spid="_x0000_s6748" name="AxMath" r:id="rId49" imgW="629280" imgH="279000" progId="Equation.AxMath">
+                  <p:oleObj spid="_x0000_s6863" name="AxMath" r:id="rId49" imgW="629280" imgH="279000" progId="Equation.AxMath">
                     <p:embed/>
                   </p:oleObj>
                 </mc:Choice>
@@ -14088,7 +14088,7 @@
             <a:graphicData uri="http://schemas.openxmlformats.org/presentationml/2006/ole">
               <mc:AlternateContent xmlns:mc="http://schemas.openxmlformats.org/markup-compatibility/2006">
                 <mc:Choice xmlns:v="urn:schemas-microsoft-com:vml" Requires="v">
-                  <p:oleObj spid="_x0000_s6749" name="AxMath" r:id="rId51" imgW="622080" imgH="279000" progId="Equation.AxMath">
+                  <p:oleObj spid="_x0000_s6864" name="AxMath" r:id="rId51" imgW="622080" imgH="279000" progId="Equation.AxMath">
                     <p:embed/>
                   </p:oleObj>
                 </mc:Choice>
@@ -14358,7 +14358,7 @@
           <a:graphicData uri="http://schemas.openxmlformats.org/presentationml/2006/ole">
             <mc:AlternateContent xmlns:mc="http://schemas.openxmlformats.org/markup-compatibility/2006">
               <mc:Choice xmlns:v="urn:schemas-microsoft-com:vml" Requires="v">
-                <p:oleObj spid="_x0000_s6750" name="AxMath" r:id="rId3" imgW="151920" imgH="226800" progId="Equation.AxMath">
+                <p:oleObj spid="_x0000_s6865" name="AxMath" r:id="rId3" imgW="151920" imgH="226800" progId="Equation.AxMath">
                   <p:embed/>
                 </p:oleObj>
               </mc:Choice>
@@ -14411,7 +14411,7 @@
           <a:graphicData uri="http://schemas.openxmlformats.org/presentationml/2006/ole">
             <mc:AlternateContent xmlns:mc="http://schemas.openxmlformats.org/markup-compatibility/2006">
               <mc:Choice xmlns:v="urn:schemas-microsoft-com:vml" Requires="v">
-                <p:oleObj spid="_x0000_s6751" name="AxMath" r:id="rId5" imgW="151920" imgH="226800" progId="Equation.AxMath">
+                <p:oleObj spid="_x0000_s6866" name="AxMath" r:id="rId5" imgW="151920" imgH="226800" progId="Equation.AxMath">
                   <p:embed/>
                 </p:oleObj>
               </mc:Choice>
@@ -14464,7 +14464,7 @@
           <a:graphicData uri="http://schemas.openxmlformats.org/presentationml/2006/ole">
             <mc:AlternateContent xmlns:mc="http://schemas.openxmlformats.org/markup-compatibility/2006">
               <mc:Choice xmlns:v="urn:schemas-microsoft-com:vml" Requires="v">
-                <p:oleObj spid="_x0000_s6752" name="AxMath" r:id="rId6" imgW="151920" imgH="226800" progId="Equation.AxMath">
+                <p:oleObj spid="_x0000_s6867" name="AxMath" r:id="rId6" imgW="151920" imgH="226800" progId="Equation.AxMath">
                   <p:embed/>
                 </p:oleObj>
               </mc:Choice>
@@ -14517,7 +14517,7 @@
           <a:graphicData uri="http://schemas.openxmlformats.org/presentationml/2006/ole">
             <mc:AlternateContent xmlns:mc="http://schemas.openxmlformats.org/markup-compatibility/2006">
               <mc:Choice xmlns:v="urn:schemas-microsoft-com:vml" Requires="v">
-                <p:oleObj spid="_x0000_s6753" name="AxMath" r:id="rId7" imgW="151920" imgH="226800" progId="Equation.AxMath">
+                <p:oleObj spid="_x0000_s6868" name="AxMath" r:id="rId7" imgW="151920" imgH="226800" progId="Equation.AxMath">
                   <p:embed/>
                 </p:oleObj>
               </mc:Choice>
@@ -14570,7 +14570,7 @@
           <a:graphicData uri="http://schemas.openxmlformats.org/presentationml/2006/ole">
             <mc:AlternateContent xmlns:mc="http://schemas.openxmlformats.org/markup-compatibility/2006">
               <mc:Choice xmlns:v="urn:schemas-microsoft-com:vml" Requires="v">
-                <p:oleObj spid="_x0000_s6754" name="AxMath" r:id="rId8" imgW="151920" imgH="226800" progId="Equation.AxMath">
+                <p:oleObj spid="_x0000_s6869" name="AxMath" r:id="rId8" imgW="151920" imgH="226800" progId="Equation.AxMath">
                   <p:embed/>
                 </p:oleObj>
               </mc:Choice>
@@ -14623,7 +14623,7 @@
           <a:graphicData uri="http://schemas.openxmlformats.org/presentationml/2006/ole">
             <mc:AlternateContent xmlns:mc="http://schemas.openxmlformats.org/markup-compatibility/2006">
               <mc:Choice xmlns:v="urn:schemas-microsoft-com:vml" Requires="v">
-                <p:oleObj spid="_x0000_s6755" name="AxMath" r:id="rId10" imgW="151920" imgH="226800" progId="Equation.AxMath">
+                <p:oleObj spid="_x0000_s6870" name="AxMath" r:id="rId10" imgW="151920" imgH="226800" progId="Equation.AxMath">
                   <p:embed/>
                 </p:oleObj>
               </mc:Choice>
@@ -14676,7 +14676,7 @@
           <a:graphicData uri="http://schemas.openxmlformats.org/presentationml/2006/ole">
             <mc:AlternateContent xmlns:mc="http://schemas.openxmlformats.org/markup-compatibility/2006">
               <mc:Choice xmlns:v="urn:schemas-microsoft-com:vml" Requires="v">
-                <p:oleObj spid="_x0000_s6756" name="AxMath" r:id="rId11" imgW="151920" imgH="226800" progId="Equation.AxMath">
+                <p:oleObj spid="_x0000_s6871" name="AxMath" r:id="rId11" imgW="151920" imgH="226800" progId="Equation.AxMath">
                   <p:embed/>
                 </p:oleObj>
               </mc:Choice>
@@ -14729,7 +14729,7 @@
           <a:graphicData uri="http://schemas.openxmlformats.org/presentationml/2006/ole">
             <mc:AlternateContent xmlns:mc="http://schemas.openxmlformats.org/markup-compatibility/2006">
               <mc:Choice xmlns:v="urn:schemas-microsoft-com:vml" Requires="v">
-                <p:oleObj spid="_x0000_s6757" name="AxMath" r:id="rId12" imgW="151920" imgH="226800" progId="Equation.AxMath">
+                <p:oleObj spid="_x0000_s6872" name="AxMath" r:id="rId12" imgW="151920" imgH="226800" progId="Equation.AxMath">
                   <p:embed/>
                 </p:oleObj>
               </mc:Choice>
@@ -14782,7 +14782,7 @@
           <a:graphicData uri="http://schemas.openxmlformats.org/presentationml/2006/ole">
             <mc:AlternateContent xmlns:mc="http://schemas.openxmlformats.org/markup-compatibility/2006">
               <mc:Choice xmlns:v="urn:schemas-microsoft-com:vml" Requires="v">
-                <p:oleObj spid="_x0000_s6758" name="AxMath" r:id="rId53" imgW="622080" imgH="279000" progId="Equation.AxMath">
+                <p:oleObj spid="_x0000_s6873" name="AxMath" r:id="rId53" imgW="622080" imgH="279000" progId="Equation.AxMath">
                   <p:embed/>
                 </p:oleObj>
               </mc:Choice>
@@ -14883,7 +14883,7 @@
           <a:graphicData uri="http://schemas.openxmlformats.org/presentationml/2006/ole">
             <mc:AlternateContent xmlns:mc="http://schemas.openxmlformats.org/markup-compatibility/2006">
               <mc:Choice xmlns:v="urn:schemas-microsoft-com:vml" Requires="v">
-                <p:oleObj spid="_x0000_s6759" name="AxMath" r:id="rId55" imgW="629280" imgH="279000" progId="Equation.AxMath">
+                <p:oleObj spid="_x0000_s6874" name="AxMath" r:id="rId55" imgW="629280" imgH="279000" progId="Equation.AxMath">
                   <p:embed/>
                 </p:oleObj>
               </mc:Choice>
@@ -14984,7 +14984,7 @@
           <a:graphicData uri="http://schemas.openxmlformats.org/presentationml/2006/ole">
             <mc:AlternateContent xmlns:mc="http://schemas.openxmlformats.org/markup-compatibility/2006">
               <mc:Choice xmlns:v="urn:schemas-microsoft-com:vml" Requires="v">
-                <p:oleObj spid="_x0000_s6760" name="AxMath" r:id="rId57" imgW="630720" imgH="279000" progId="Equation.AxMath">
+                <p:oleObj spid="_x0000_s6875" name="AxMath" r:id="rId57" imgW="630720" imgH="279000" progId="Equation.AxMath">
                   <p:embed/>
                 </p:oleObj>
               </mc:Choice>
@@ -15085,7 +15085,7 @@
           <a:graphicData uri="http://schemas.openxmlformats.org/presentationml/2006/ole">
             <mc:AlternateContent xmlns:mc="http://schemas.openxmlformats.org/markup-compatibility/2006">
               <mc:Choice xmlns:v="urn:schemas-microsoft-com:vml" Requires="v">
-                <p:oleObj spid="_x0000_s6761" name="AxMath" r:id="rId19" imgW="637560" imgH="279000" progId="Equation.AxMath">
+                <p:oleObj spid="_x0000_s6876" name="AxMath" r:id="rId19" imgW="637560" imgH="279000" progId="Equation.AxMath">
                   <p:embed/>
                 </p:oleObj>
               </mc:Choice>
@@ -15138,7 +15138,7 @@
           <a:graphicData uri="http://schemas.openxmlformats.org/presentationml/2006/ole">
             <mc:AlternateContent xmlns:mc="http://schemas.openxmlformats.org/markup-compatibility/2006">
               <mc:Choice xmlns:v="urn:schemas-microsoft-com:vml" Requires="v">
-                <p:oleObj spid="_x0000_s6762" name="AxMath" r:id="rId59" imgW="629280" imgH="279000" progId="Equation.AxMath">
+                <p:oleObj spid="_x0000_s6877" name="AxMath" r:id="rId59" imgW="629280" imgH="279000" progId="Equation.AxMath">
                   <p:embed/>
                 </p:oleObj>
               </mc:Choice>
@@ -15237,7 +15237,7 @@
           <a:graphicData uri="http://schemas.openxmlformats.org/presentationml/2006/ole">
             <mc:AlternateContent xmlns:mc="http://schemas.openxmlformats.org/markup-compatibility/2006">
               <mc:Choice xmlns:v="urn:schemas-microsoft-com:vml" Requires="v">
-                <p:oleObj spid="_x0000_s6763" name="AxMath" r:id="rId60" imgW="839160" imgH="279000" progId="Equation.AxMath">
+                <p:oleObj spid="_x0000_s6878" name="AxMath" r:id="rId60" imgW="839160" imgH="279000" progId="Equation.AxMath">
                   <p:embed/>
                 </p:oleObj>
               </mc:Choice>
@@ -15336,7 +15336,7 @@
           <a:graphicData uri="http://schemas.openxmlformats.org/presentationml/2006/ole">
             <mc:AlternateContent xmlns:mc="http://schemas.openxmlformats.org/markup-compatibility/2006">
               <mc:Choice xmlns:v="urn:schemas-microsoft-com:vml" Requires="v">
-                <p:oleObj spid="_x0000_s6764" name="AxMath" r:id="rId61" imgW="773640" imgH="230400" progId="Equation.AxMath">
+                <p:oleObj spid="_x0000_s6879" name="AxMath" r:id="rId61" imgW="773640" imgH="230400" progId="Equation.AxMath">
                   <p:embed/>
                 </p:oleObj>
               </mc:Choice>
@@ -15435,7 +15435,7 @@
           <a:graphicData uri="http://schemas.openxmlformats.org/presentationml/2006/ole">
             <mc:AlternateContent xmlns:mc="http://schemas.openxmlformats.org/markup-compatibility/2006">
               <mc:Choice xmlns:v="urn:schemas-microsoft-com:vml" Requires="v">
-                <p:oleObj spid="_x0000_s6765" name="AxMath" r:id="rId62" imgW="1183680" imgH="279000" progId="Equation.AxMath">
+                <p:oleObj spid="_x0000_s6880" name="AxMath" r:id="rId62" imgW="1183680" imgH="279000" progId="Equation.AxMath">
                   <p:embed/>
                 </p:oleObj>
               </mc:Choice>
@@ -15534,7 +15534,7 @@
           <a:graphicData uri="http://schemas.openxmlformats.org/presentationml/2006/ole">
             <mc:AlternateContent xmlns:mc="http://schemas.openxmlformats.org/markup-compatibility/2006">
               <mc:Choice xmlns:v="urn:schemas-microsoft-com:vml" Requires="v">
-                <p:oleObj spid="_x0000_s6766" name="AxMath" r:id="rId63" imgW="1183680" imgH="279000" progId="Equation.AxMath">
+                <p:oleObj spid="_x0000_s6881" name="AxMath" r:id="rId63" imgW="1183680" imgH="279000" progId="Equation.AxMath">
                   <p:embed/>
                 </p:oleObj>
               </mc:Choice>
@@ -15635,7 +15635,7 @@
           <a:graphicData uri="http://schemas.openxmlformats.org/presentationml/2006/ole">
             <mc:AlternateContent xmlns:mc="http://schemas.openxmlformats.org/markup-compatibility/2006">
               <mc:Choice xmlns:v="urn:schemas-microsoft-com:vml" Requires="v">
-                <p:oleObj spid="_x0000_s6767" name="AxMath" r:id="rId64" imgW="630720" imgH="279000" progId="Equation.AxMath">
+                <p:oleObj spid="_x0000_s6882" name="AxMath" r:id="rId64" imgW="630720" imgH="279000" progId="Equation.AxMath">
                   <p:embed/>
                 </p:oleObj>
               </mc:Choice>
@@ -15734,7 +15734,7 @@
           <a:graphicData uri="http://schemas.openxmlformats.org/presentationml/2006/ole">
             <mc:AlternateContent xmlns:mc="http://schemas.openxmlformats.org/markup-compatibility/2006">
               <mc:Choice xmlns:v="urn:schemas-microsoft-com:vml" Requires="v">
-                <p:oleObj spid="_x0000_s6768" name="AxMath" r:id="rId65" imgW="606240" imgH="279000" progId="Equation.AxMath">
+                <p:oleObj spid="_x0000_s6883" name="AxMath" r:id="rId65" imgW="606240" imgH="279000" progId="Equation.AxMath">
                   <p:embed/>
                 </p:oleObj>
               </mc:Choice>
@@ -15833,7 +15833,7 @@
           <a:graphicData uri="http://schemas.openxmlformats.org/presentationml/2006/ole">
             <mc:AlternateContent xmlns:mc="http://schemas.openxmlformats.org/markup-compatibility/2006">
               <mc:Choice xmlns:v="urn:schemas-microsoft-com:vml" Requires="v">
-                <p:oleObj spid="_x0000_s6769" name="AxMath" r:id="rId66" imgW="604080" imgH="279000" progId="Equation.AxMath">
+                <p:oleObj spid="_x0000_s6884" name="AxMath" r:id="rId66" imgW="604080" imgH="279000" progId="Equation.AxMath">
                   <p:embed/>
                 </p:oleObj>
               </mc:Choice>
@@ -15932,7 +15932,7 @@
           <a:graphicData uri="http://schemas.openxmlformats.org/presentationml/2006/ole">
             <mc:AlternateContent xmlns:mc="http://schemas.openxmlformats.org/markup-compatibility/2006">
               <mc:Choice xmlns:v="urn:schemas-microsoft-com:vml" Requires="v">
-                <p:oleObj spid="_x0000_s6770" name="AxMath" r:id="rId67" imgW="606240" imgH="279000" progId="Equation.AxMath">
+                <p:oleObj spid="_x0000_s6885" name="AxMath" r:id="rId67" imgW="606240" imgH="279000" progId="Equation.AxMath">
                   <p:embed/>
                 </p:oleObj>
               </mc:Choice>
@@ -16031,7 +16031,7 @@
           <a:graphicData uri="http://schemas.openxmlformats.org/presentationml/2006/ole">
             <mc:AlternateContent xmlns:mc="http://schemas.openxmlformats.org/markup-compatibility/2006">
               <mc:Choice xmlns:v="urn:schemas-microsoft-com:vml" Requires="v">
-                <p:oleObj spid="_x0000_s6771" name="AxMath" r:id="rId68" imgW="637920" imgH="279000" progId="Equation.AxMath">
+                <p:oleObj spid="_x0000_s6886" name="AxMath" r:id="rId68" imgW="637920" imgH="279000" progId="Equation.AxMath">
                   <p:embed/>
                 </p:oleObj>
               </mc:Choice>
@@ -16130,7 +16130,7 @@
           <a:graphicData uri="http://schemas.openxmlformats.org/presentationml/2006/ole">
             <mc:AlternateContent xmlns:mc="http://schemas.openxmlformats.org/markup-compatibility/2006">
               <mc:Choice xmlns:v="urn:schemas-microsoft-com:vml" Requires="v">
-                <p:oleObj spid="_x0000_s6772" name="AxMath" r:id="rId69" imgW="636480" imgH="279000" progId="Equation.AxMath">
+                <p:oleObj spid="_x0000_s6887" name="AxMath" r:id="rId69" imgW="636480" imgH="279000" progId="Equation.AxMath">
                   <p:embed/>
                 </p:oleObj>
               </mc:Choice>
@@ -16229,7 +16229,7 @@
           <a:graphicData uri="http://schemas.openxmlformats.org/presentationml/2006/ole">
             <mc:AlternateContent xmlns:mc="http://schemas.openxmlformats.org/markup-compatibility/2006">
               <mc:Choice xmlns:v="urn:schemas-microsoft-com:vml" Requires="v">
-                <p:oleObj spid="_x0000_s6773" name="AxMath" r:id="rId70" imgW="629280" imgH="279000" progId="Equation.AxMath">
+                <p:oleObj spid="_x0000_s6888" name="AxMath" r:id="rId70" imgW="629280" imgH="279000" progId="Equation.AxMath">
                   <p:embed/>
                 </p:oleObj>
               </mc:Choice>
@@ -16568,7 +16568,7 @@
           <a:graphicData uri="http://schemas.openxmlformats.org/presentationml/2006/ole">
             <mc:AlternateContent xmlns:mc="http://schemas.openxmlformats.org/markup-compatibility/2006">
               <mc:Choice xmlns:v="urn:schemas-microsoft-com:vml" Requires="v">
-                <p:oleObj spid="_x0000_s6774" name="AxMath" r:id="rId7" imgW="151920" imgH="226800" progId="Equation.AxMath">
+                <p:oleObj spid="_x0000_s6889" name="AxMath" r:id="rId7" imgW="151920" imgH="226800" progId="Equation.AxMath">
                   <p:embed/>
                 </p:oleObj>
               </mc:Choice>
@@ -16669,7 +16669,7 @@
           <a:graphicData uri="http://schemas.openxmlformats.org/presentationml/2006/ole">
             <mc:AlternateContent xmlns:mc="http://schemas.openxmlformats.org/markup-compatibility/2006">
               <mc:Choice xmlns:v="urn:schemas-microsoft-com:vml" Requires="v">
-                <p:oleObj spid="_x0000_s6775" name="AxMath" r:id="rId71" imgW="637560" imgH="279000" progId="Equation.AxMath">
+                <p:oleObj spid="_x0000_s6890" name="AxMath" r:id="rId71" imgW="637560" imgH="279000" progId="Equation.AxMath">
                   <p:embed/>
                 </p:oleObj>
               </mc:Choice>
@@ -16768,7 +16768,7 @@
           <a:graphicData uri="http://schemas.openxmlformats.org/presentationml/2006/ole">
             <mc:AlternateContent xmlns:mc="http://schemas.openxmlformats.org/markup-compatibility/2006">
               <mc:Choice xmlns:v="urn:schemas-microsoft-com:vml" Requires="v">
-                <p:oleObj spid="_x0000_s6776" name="AxMath" r:id="rId72" imgW="630720" imgH="279000" progId="Equation.AxMath">
+                <p:oleObj spid="_x0000_s6891" name="AxMath" r:id="rId72" imgW="630720" imgH="279000" progId="Equation.AxMath">
                   <p:embed/>
                 </p:oleObj>
               </mc:Choice>
@@ -16867,7 +16867,7 @@
           <a:graphicData uri="http://schemas.openxmlformats.org/presentationml/2006/ole">
             <mc:AlternateContent xmlns:mc="http://schemas.openxmlformats.org/markup-compatibility/2006">
               <mc:Choice xmlns:v="urn:schemas-microsoft-com:vml" Requires="v">
-                <p:oleObj spid="_x0000_s6777" name="AxMath" r:id="rId73" imgW="629280" imgH="279000" progId="Equation.AxMath">
+                <p:oleObj spid="_x0000_s6892" name="AxMath" r:id="rId73" imgW="629280" imgH="279000" progId="Equation.AxMath">
                   <p:embed/>
                 </p:oleObj>
               </mc:Choice>
@@ -16968,7 +16968,7 @@
           <a:graphicData uri="http://schemas.openxmlformats.org/presentationml/2006/ole">
             <mc:AlternateContent xmlns:mc="http://schemas.openxmlformats.org/markup-compatibility/2006">
               <mc:Choice xmlns:v="urn:schemas-microsoft-com:vml" Requires="v">
-                <p:oleObj spid="_x0000_s6778" name="AxMath" r:id="rId74" imgW="622080" imgH="279000" progId="Equation.AxMath">
+                <p:oleObj spid="_x0000_s6893" name="AxMath" r:id="rId74" imgW="622080" imgH="279000" progId="Equation.AxMath">
                   <p:embed/>
                 </p:oleObj>
               </mc:Choice>
@@ -17667,7 +17667,7 @@
           <a:graphicData uri="http://schemas.openxmlformats.org/presentationml/2006/ole">
             <mc:AlternateContent xmlns:mc="http://schemas.openxmlformats.org/markup-compatibility/2006">
               <mc:Choice xmlns:v="urn:schemas-microsoft-com:vml" Requires="v">
-                <p:oleObj spid="_x0000_s6779" name="AxMath" r:id="rId3" imgW="151920" imgH="226800" progId="Equation.AxMath">
+                <p:oleObj spid="_x0000_s6894" name="AxMath" r:id="rId3" imgW="151920" imgH="226800" progId="Equation.AxMath">
                   <p:embed/>
                 </p:oleObj>
               </mc:Choice>
@@ -17720,7 +17720,7 @@
           <a:graphicData uri="http://schemas.openxmlformats.org/presentationml/2006/ole">
             <mc:AlternateContent xmlns:mc="http://schemas.openxmlformats.org/markup-compatibility/2006">
               <mc:Choice xmlns:v="urn:schemas-microsoft-com:vml" Requires="v">
-                <p:oleObj spid="_x0000_s6780" name="AxMath" r:id="rId5" imgW="151920" imgH="226800" progId="Equation.AxMath">
+                <p:oleObj spid="_x0000_s6895" name="AxMath" r:id="rId5" imgW="151920" imgH="226800" progId="Equation.AxMath">
                   <p:embed/>
                 </p:oleObj>
               </mc:Choice>
@@ -17773,7 +17773,7 @@
           <a:graphicData uri="http://schemas.openxmlformats.org/presentationml/2006/ole">
             <mc:AlternateContent xmlns:mc="http://schemas.openxmlformats.org/markup-compatibility/2006">
               <mc:Choice xmlns:v="urn:schemas-microsoft-com:vml" Requires="v">
-                <p:oleObj spid="_x0000_s6781" name="AxMath" r:id="rId6" imgW="151920" imgH="226800" progId="Equation.AxMath">
+                <p:oleObj spid="_x0000_s6896" name="AxMath" r:id="rId6" imgW="151920" imgH="226800" progId="Equation.AxMath">
                   <p:embed/>
                 </p:oleObj>
               </mc:Choice>
@@ -17826,7 +17826,7 @@
           <a:graphicData uri="http://schemas.openxmlformats.org/presentationml/2006/ole">
             <mc:AlternateContent xmlns:mc="http://schemas.openxmlformats.org/markup-compatibility/2006">
               <mc:Choice xmlns:v="urn:schemas-microsoft-com:vml" Requires="v">
-                <p:oleObj spid="_x0000_s6782" name="AxMath" r:id="rId7" imgW="151920" imgH="226800" progId="Equation.AxMath">
+                <p:oleObj spid="_x0000_s6897" name="AxMath" r:id="rId7" imgW="151920" imgH="226800" progId="Equation.AxMath">
                   <p:embed/>
                 </p:oleObj>
               </mc:Choice>
@@ -17879,7 +17879,7 @@
           <a:graphicData uri="http://schemas.openxmlformats.org/presentationml/2006/ole">
             <mc:AlternateContent xmlns:mc="http://schemas.openxmlformats.org/markup-compatibility/2006">
               <mc:Choice xmlns:v="urn:schemas-microsoft-com:vml" Requires="v">
-                <p:oleObj spid="_x0000_s6783" name="AxMath" r:id="rId8" imgW="151920" imgH="226800" progId="Equation.AxMath">
+                <p:oleObj spid="_x0000_s6898" name="AxMath" r:id="rId8" imgW="151920" imgH="226800" progId="Equation.AxMath">
                   <p:embed/>
                 </p:oleObj>
               </mc:Choice>
@@ -17932,7 +17932,7 @@
           <a:graphicData uri="http://schemas.openxmlformats.org/presentationml/2006/ole">
             <mc:AlternateContent xmlns:mc="http://schemas.openxmlformats.org/markup-compatibility/2006">
               <mc:Choice xmlns:v="urn:schemas-microsoft-com:vml" Requires="v">
-                <p:oleObj spid="_x0000_s6784" name="AxMath" r:id="rId10" imgW="151920" imgH="226800" progId="Equation.AxMath">
+                <p:oleObj spid="_x0000_s6899" name="AxMath" r:id="rId10" imgW="151920" imgH="226800" progId="Equation.AxMath">
                   <p:embed/>
                 </p:oleObj>
               </mc:Choice>
@@ -17985,7 +17985,7 @@
           <a:graphicData uri="http://schemas.openxmlformats.org/presentationml/2006/ole">
             <mc:AlternateContent xmlns:mc="http://schemas.openxmlformats.org/markup-compatibility/2006">
               <mc:Choice xmlns:v="urn:schemas-microsoft-com:vml" Requires="v">
-                <p:oleObj spid="_x0000_s6785" name="AxMath" r:id="rId11" imgW="151920" imgH="226800" progId="Equation.AxMath">
+                <p:oleObj spid="_x0000_s6900" name="AxMath" r:id="rId11" imgW="151920" imgH="226800" progId="Equation.AxMath">
                   <p:embed/>
                 </p:oleObj>
               </mc:Choice>
@@ -18038,7 +18038,7 @@
           <a:graphicData uri="http://schemas.openxmlformats.org/presentationml/2006/ole">
             <mc:AlternateContent xmlns:mc="http://schemas.openxmlformats.org/markup-compatibility/2006">
               <mc:Choice xmlns:v="urn:schemas-microsoft-com:vml" Requires="v">
-                <p:oleObj spid="_x0000_s6786" name="AxMath" r:id="rId12" imgW="151920" imgH="226800" progId="Equation.AxMath">
+                <p:oleObj spid="_x0000_s6901" name="AxMath" r:id="rId12" imgW="151920" imgH="226800" progId="Equation.AxMath">
                   <p:embed/>
                 </p:oleObj>
               </mc:Choice>
@@ -18091,7 +18091,7 @@
           <a:graphicData uri="http://schemas.openxmlformats.org/presentationml/2006/ole">
             <mc:AlternateContent xmlns:mc="http://schemas.openxmlformats.org/markup-compatibility/2006">
               <mc:Choice xmlns:v="urn:schemas-microsoft-com:vml" Requires="v">
-                <p:oleObj spid="_x0000_s6787" name="AxMath" r:id="rId75" imgW="622080" imgH="279000" progId="Equation.AxMath">
+                <p:oleObj spid="_x0000_s6902" name="AxMath" r:id="rId75" imgW="622080" imgH="279000" progId="Equation.AxMath">
                   <p:embed/>
                 </p:oleObj>
               </mc:Choice>
@@ -18192,7 +18192,7 @@
           <a:graphicData uri="http://schemas.openxmlformats.org/presentationml/2006/ole">
             <mc:AlternateContent xmlns:mc="http://schemas.openxmlformats.org/markup-compatibility/2006">
               <mc:Choice xmlns:v="urn:schemas-microsoft-com:vml" Requires="v">
-                <p:oleObj spid="_x0000_s6788" name="AxMath" r:id="rId76" imgW="629280" imgH="279000" progId="Equation.AxMath">
+                <p:oleObj spid="_x0000_s6903" name="AxMath" r:id="rId76" imgW="629280" imgH="279000" progId="Equation.AxMath">
                   <p:embed/>
                 </p:oleObj>
               </mc:Choice>
@@ -18293,7 +18293,7 @@
           <a:graphicData uri="http://schemas.openxmlformats.org/presentationml/2006/ole">
             <mc:AlternateContent xmlns:mc="http://schemas.openxmlformats.org/markup-compatibility/2006">
               <mc:Choice xmlns:v="urn:schemas-microsoft-com:vml" Requires="v">
-                <p:oleObj spid="_x0000_s6789" name="AxMath" r:id="rId77" imgW="630720" imgH="279000" progId="Equation.AxMath">
+                <p:oleObj spid="_x0000_s6904" name="AxMath" r:id="rId77" imgW="630720" imgH="279000" progId="Equation.AxMath">
                   <p:embed/>
                 </p:oleObj>
               </mc:Choice>
@@ -18394,7 +18394,7 @@
           <a:graphicData uri="http://schemas.openxmlformats.org/presentationml/2006/ole">
             <mc:AlternateContent xmlns:mc="http://schemas.openxmlformats.org/markup-compatibility/2006">
               <mc:Choice xmlns:v="urn:schemas-microsoft-com:vml" Requires="v">
-                <p:oleObj spid="_x0000_s6790" name="AxMath" r:id="rId19" imgW="637560" imgH="279000" progId="Equation.AxMath">
+                <p:oleObj spid="_x0000_s6905" name="AxMath" r:id="rId19" imgW="637560" imgH="279000" progId="Equation.AxMath">
                   <p:embed/>
                 </p:oleObj>
               </mc:Choice>
@@ -18447,7 +18447,7 @@
           <a:graphicData uri="http://schemas.openxmlformats.org/presentationml/2006/ole">
             <mc:AlternateContent xmlns:mc="http://schemas.openxmlformats.org/markup-compatibility/2006">
               <mc:Choice xmlns:v="urn:schemas-microsoft-com:vml" Requires="v">
-                <p:oleObj spid="_x0000_s6791" name="AxMath" r:id="rId59" imgW="629280" imgH="279000" progId="Equation.AxMath">
+                <p:oleObj spid="_x0000_s6906" name="AxMath" r:id="rId59" imgW="629280" imgH="279000" progId="Equation.AxMath">
                   <p:embed/>
                 </p:oleObj>
               </mc:Choice>
@@ -18548,7 +18548,7 @@
           <a:graphicData uri="http://schemas.openxmlformats.org/presentationml/2006/ole">
             <mc:AlternateContent xmlns:mc="http://schemas.openxmlformats.org/markup-compatibility/2006">
               <mc:Choice xmlns:v="urn:schemas-microsoft-com:vml" Requires="v">
-                <p:oleObj spid="_x0000_s6792" name="AxMath" r:id="rId78" imgW="630720" imgH="279000" progId="Equation.AxMath">
+                <p:oleObj spid="_x0000_s6907" name="AxMath" r:id="rId78" imgW="630720" imgH="279000" progId="Equation.AxMath">
                   <p:embed/>
                 </p:oleObj>
               </mc:Choice>
@@ -18649,7 +18649,7 @@
           <a:graphicData uri="http://schemas.openxmlformats.org/presentationml/2006/ole">
             <mc:AlternateContent xmlns:mc="http://schemas.openxmlformats.org/markup-compatibility/2006">
               <mc:Choice xmlns:v="urn:schemas-microsoft-com:vml" Requires="v">
-                <p:oleObj spid="_x0000_s6793" name="AxMath" r:id="rId64" imgW="630720" imgH="279000" progId="Equation.AxMath">
+                <p:oleObj spid="_x0000_s6908" name="AxMath" r:id="rId64" imgW="630720" imgH="279000" progId="Equation.AxMath">
                   <p:embed/>
                 </p:oleObj>
               </mc:Choice>
@@ -18750,7 +18750,7 @@
           <a:graphicData uri="http://schemas.openxmlformats.org/presentationml/2006/ole">
             <mc:AlternateContent xmlns:mc="http://schemas.openxmlformats.org/markup-compatibility/2006">
               <mc:Choice xmlns:v="urn:schemas-microsoft-com:vml" Requires="v">
-                <p:oleObj spid="_x0000_s6794" name="AxMath" r:id="rId80" imgW="622080" imgH="279000" progId="Equation.AxMath">
+                <p:oleObj spid="_x0000_s6909" name="AxMath" r:id="rId80" imgW="622080" imgH="279000" progId="Equation.AxMath">
                   <p:embed/>
                 </p:oleObj>
               </mc:Choice>
@@ -18851,7 +18851,7 @@
           <a:graphicData uri="http://schemas.openxmlformats.org/presentationml/2006/ole">
             <mc:AlternateContent xmlns:mc="http://schemas.openxmlformats.org/markup-compatibility/2006">
               <mc:Choice xmlns:v="urn:schemas-microsoft-com:vml" Requires="v">
-                <p:oleObj spid="_x0000_s6795" name="AxMath" r:id="rId82" imgW="629280" imgH="279000" progId="Equation.AxMath">
+                <p:oleObj spid="_x0000_s6910" name="AxMath" r:id="rId82" imgW="629280" imgH="279000" progId="Equation.AxMath">
                   <p:embed/>
                 </p:oleObj>
               </mc:Choice>
@@ -18952,7 +18952,7 @@
           <a:graphicData uri="http://schemas.openxmlformats.org/presentationml/2006/ole">
             <mc:AlternateContent xmlns:mc="http://schemas.openxmlformats.org/markup-compatibility/2006">
               <mc:Choice xmlns:v="urn:schemas-microsoft-com:vml" Requires="v">
-                <p:oleObj spid="_x0000_s6796" name="AxMath" r:id="rId84" imgW="622080" imgH="279000" progId="Equation.AxMath">
+                <p:oleObj spid="_x0000_s6911" name="AxMath" r:id="rId84" imgW="622080" imgH="279000" progId="Equation.AxMath">
                   <p:embed/>
                 </p:oleObj>
               </mc:Choice>
@@ -19053,7 +19053,7 @@
           <a:graphicData uri="http://schemas.openxmlformats.org/presentationml/2006/ole">
             <mc:AlternateContent xmlns:mc="http://schemas.openxmlformats.org/markup-compatibility/2006">
               <mc:Choice xmlns:v="urn:schemas-microsoft-com:vml" Requires="v">
-                <p:oleObj spid="_x0000_s6797" name="AxMath" r:id="rId85" imgW="630720" imgH="279000" progId="Equation.AxMath">
+                <p:oleObj spid="_x0000_s6912" name="AxMath" r:id="rId85" imgW="630720" imgH="279000" progId="Equation.AxMath">
                   <p:embed/>
                 </p:oleObj>
               </mc:Choice>
@@ -19154,7 +19154,7 @@
           <a:graphicData uri="http://schemas.openxmlformats.org/presentationml/2006/ole">
             <mc:AlternateContent xmlns:mc="http://schemas.openxmlformats.org/markup-compatibility/2006">
               <mc:Choice xmlns:v="urn:schemas-microsoft-com:vml" Requires="v">
-                <p:oleObj spid="_x0000_s6798" name="AxMath" r:id="rId87" imgW="629280" imgH="279000" progId="Equation.AxMath">
+                <p:oleObj spid="_x0000_s6913" name="AxMath" r:id="rId87" imgW="629280" imgH="279000" progId="Equation.AxMath">
                   <p:embed/>
                 </p:oleObj>
               </mc:Choice>
@@ -19255,7 +19255,7 @@
           <a:graphicData uri="http://schemas.openxmlformats.org/presentationml/2006/ole">
             <mc:AlternateContent xmlns:mc="http://schemas.openxmlformats.org/markup-compatibility/2006">
               <mc:Choice xmlns:v="urn:schemas-microsoft-com:vml" Requires="v">
-                <p:oleObj spid="_x0000_s6799" name="AxMath" r:id="rId89" imgW="622080" imgH="279000" progId="Equation.AxMath">
+                <p:oleObj spid="_x0000_s6914" name="AxMath" r:id="rId89" imgW="622080" imgH="279000" progId="Equation.AxMath">
                   <p:embed/>
                 </p:oleObj>
               </mc:Choice>
@@ -19594,7 +19594,7 @@
           <a:graphicData uri="http://schemas.openxmlformats.org/presentationml/2006/ole">
             <mc:AlternateContent xmlns:mc="http://schemas.openxmlformats.org/markup-compatibility/2006">
               <mc:Choice xmlns:v="urn:schemas-microsoft-com:vml" Requires="v">
-                <p:oleObj spid="_x0000_s6800" name="AxMath" r:id="rId7" imgW="151920" imgH="226800" progId="Equation.AxMath">
+                <p:oleObj spid="_x0000_s6915" name="AxMath" r:id="rId7" imgW="151920" imgH="226800" progId="Equation.AxMath">
                   <p:embed/>
                 </p:oleObj>
               </mc:Choice>
@@ -19743,7 +19743,7 @@
           <a:graphicData uri="http://schemas.openxmlformats.org/presentationml/2006/ole">
             <mc:AlternateContent xmlns:mc="http://schemas.openxmlformats.org/markup-compatibility/2006">
               <mc:Choice xmlns:v="urn:schemas-microsoft-com:vml" Requires="v">
-                <p:oleObj spid="_x0000_s6801" name="AxMath" r:id="rId91" imgW="630720" imgH="279000" progId="Equation.AxMath">
+                <p:oleObj spid="_x0000_s6916" name="AxMath" r:id="rId91" imgW="630720" imgH="279000" progId="Equation.AxMath">
                   <p:embed/>
                 </p:oleObj>
               </mc:Choice>
@@ -19844,7 +19844,7 @@
           <a:graphicData uri="http://schemas.openxmlformats.org/presentationml/2006/ole">
             <mc:AlternateContent xmlns:mc="http://schemas.openxmlformats.org/markup-compatibility/2006">
               <mc:Choice xmlns:v="urn:schemas-microsoft-com:vml" Requires="v">
-                <p:oleObj spid="_x0000_s6802" name="AxMath" r:id="rId93" imgW="629280" imgH="279000" progId="Equation.AxMath">
+                <p:oleObj spid="_x0000_s6917" name="AxMath" r:id="rId93" imgW="629280" imgH="279000" progId="Equation.AxMath">
                   <p:embed/>
                 </p:oleObj>
               </mc:Choice>
@@ -19945,7 +19945,7 @@
           <a:graphicData uri="http://schemas.openxmlformats.org/presentationml/2006/ole">
             <mc:AlternateContent xmlns:mc="http://schemas.openxmlformats.org/markup-compatibility/2006">
               <mc:Choice xmlns:v="urn:schemas-microsoft-com:vml" Requires="v">
-                <p:oleObj spid="_x0000_s6803" name="AxMath" r:id="rId74" imgW="622080" imgH="279000" progId="Equation.AxMath">
+                <p:oleObj spid="_x0000_s6918" name="AxMath" r:id="rId74" imgW="622080" imgH="279000" progId="Equation.AxMath">
                   <p:embed/>
                 </p:oleObj>
               </mc:Choice>
@@ -20072,7 +20072,7 @@
           <a:graphicData uri="http://schemas.openxmlformats.org/presentationml/2006/ole">
             <mc:AlternateContent xmlns:mc="http://schemas.openxmlformats.org/markup-compatibility/2006">
               <mc:Choice xmlns:v="urn:schemas-microsoft-com:vml" Requires="v">
-                <p:oleObj spid="_x0000_s6804" name="AxMath" r:id="rId19" imgW="637560" imgH="279000" progId="Equation.AxMath">
+                <p:oleObj spid="_x0000_s6919" name="AxMath" r:id="rId19" imgW="637560" imgH="279000" progId="Equation.AxMath">
                   <p:embed/>
                 </p:oleObj>
               </mc:Choice>
@@ -20173,7 +20173,7 @@
           <a:graphicData uri="http://schemas.openxmlformats.org/presentationml/2006/ole">
             <mc:AlternateContent xmlns:mc="http://schemas.openxmlformats.org/markup-compatibility/2006">
               <mc:Choice xmlns:v="urn:schemas-microsoft-com:vml" Requires="v">
-                <p:oleObj spid="_x0000_s6805" name="AxMath" r:id="rId94" imgW="637560" imgH="279000" progId="Equation.AxMath">
+                <p:oleObj spid="_x0000_s6920" name="AxMath" r:id="rId94" imgW="637560" imgH="279000" progId="Equation.AxMath">
                   <p:embed/>
                 </p:oleObj>
               </mc:Choice>
@@ -20274,7 +20274,7 @@
           <a:graphicData uri="http://schemas.openxmlformats.org/presentationml/2006/ole">
             <mc:AlternateContent xmlns:mc="http://schemas.openxmlformats.org/markup-compatibility/2006">
               <mc:Choice xmlns:v="urn:schemas-microsoft-com:vml" Requires="v">
-                <p:oleObj spid="_x0000_s6806" name="AxMath" r:id="rId96" imgW="637560" imgH="279000" progId="Equation.AxMath">
+                <p:oleObj spid="_x0000_s6921" name="AxMath" r:id="rId96" imgW="637560" imgH="279000" progId="Equation.AxMath">
                   <p:embed/>
                 </p:oleObj>
               </mc:Choice>
@@ -20375,7 +20375,7 @@
           <a:graphicData uri="http://schemas.openxmlformats.org/presentationml/2006/ole">
             <mc:AlternateContent xmlns:mc="http://schemas.openxmlformats.org/markup-compatibility/2006">
               <mc:Choice xmlns:v="urn:schemas-microsoft-com:vml" Requires="v">
-                <p:oleObj spid="_x0000_s6807" name="AxMath" r:id="rId98" imgW="637560" imgH="279000" progId="Equation.AxMath">
+                <p:oleObj spid="_x0000_s6922" name="AxMath" r:id="rId98" imgW="637560" imgH="279000" progId="Equation.AxMath">
                   <p:embed/>
                 </p:oleObj>
               </mc:Choice>
@@ -20584,7 +20584,7 @@
           <a:graphicData uri="http://schemas.openxmlformats.org/presentationml/2006/ole">
             <mc:AlternateContent xmlns:mc="http://schemas.openxmlformats.org/markup-compatibility/2006">
               <mc:Choice xmlns:v="urn:schemas-microsoft-com:vml" Requires="v">
-                <p:oleObj spid="_x0000_s6808" name="AxMath" r:id="rId100" imgW="151920" imgH="226800" progId="Equation.AxMath">
+                <p:oleObj spid="_x0000_s6923" name="AxMath" r:id="rId100" imgW="151920" imgH="226800" progId="Equation.AxMath">
                   <p:embed/>
                 </p:oleObj>
               </mc:Choice>
@@ -20711,7 +20711,7 @@
           <a:graphicData uri="http://schemas.openxmlformats.org/presentationml/2006/ole">
             <mc:AlternateContent xmlns:mc="http://schemas.openxmlformats.org/markup-compatibility/2006">
               <mc:Choice xmlns:v="urn:schemas-microsoft-com:vml" Requires="v">
-                <p:oleObj spid="_x0000_s6809" name="AxMath" r:id="rId101" imgW="151920" imgH="226800" progId="Equation.AxMath">
+                <p:oleObj spid="_x0000_s6924" name="AxMath" r:id="rId101" imgW="151920" imgH="226800" progId="Equation.AxMath">
                   <p:embed/>
                 </p:oleObj>
               </mc:Choice>
@@ -20838,7 +20838,7 @@
           <a:graphicData uri="http://schemas.openxmlformats.org/presentationml/2006/ole">
             <mc:AlternateContent xmlns:mc="http://schemas.openxmlformats.org/markup-compatibility/2006">
               <mc:Choice xmlns:v="urn:schemas-microsoft-com:vml" Requires="v">
-                <p:oleObj spid="_x0000_s6810" name="AxMath" r:id="rId102" imgW="151920" imgH="226800" progId="Equation.AxMath">
+                <p:oleObj spid="_x0000_s6925" name="AxMath" r:id="rId102" imgW="151920" imgH="226800" progId="Equation.AxMath">
                   <p:embed/>
                 </p:oleObj>
               </mc:Choice>
@@ -20965,7 +20965,7 @@
           <a:graphicData uri="http://schemas.openxmlformats.org/presentationml/2006/ole">
             <mc:AlternateContent xmlns:mc="http://schemas.openxmlformats.org/markup-compatibility/2006">
               <mc:Choice xmlns:v="urn:schemas-microsoft-com:vml" Requires="v">
-                <p:oleObj spid="_x0000_s6811" name="AxMath" r:id="rId103" imgW="151920" imgH="226800" progId="Equation.AxMath">
+                <p:oleObj spid="_x0000_s6926" name="AxMath" r:id="rId103" imgW="151920" imgH="226800" progId="Equation.AxMath">
                   <p:embed/>
                 </p:oleObj>
               </mc:Choice>
@@ -21018,7 +21018,7 @@
           <a:graphicData uri="http://schemas.openxmlformats.org/presentationml/2006/ole">
             <mc:AlternateContent xmlns:mc="http://schemas.openxmlformats.org/markup-compatibility/2006">
               <mc:Choice xmlns:v="urn:schemas-microsoft-com:vml" Requires="v">
-                <p:oleObj spid="_x0000_s6812" name="AxMath" r:id="rId104" imgW="151920" imgH="226800" progId="Equation.AxMath">
+                <p:oleObj spid="_x0000_s6927" name="AxMath" r:id="rId104" imgW="151920" imgH="226800" progId="Equation.AxMath">
                   <p:embed/>
                 </p:oleObj>
               </mc:Choice>
@@ -21071,7 +21071,7 @@
           <a:graphicData uri="http://schemas.openxmlformats.org/presentationml/2006/ole">
             <mc:AlternateContent xmlns:mc="http://schemas.openxmlformats.org/markup-compatibility/2006">
               <mc:Choice xmlns:v="urn:schemas-microsoft-com:vml" Requires="v">
-                <p:oleObj spid="_x0000_s6813" name="AxMath" r:id="rId105" imgW="151920" imgH="226800" progId="Equation.AxMath">
+                <p:oleObj spid="_x0000_s6928" name="AxMath" r:id="rId105" imgW="151920" imgH="226800" progId="Equation.AxMath">
                   <p:embed/>
                 </p:oleObj>
               </mc:Choice>
@@ -21124,7 +21124,7 @@
           <a:graphicData uri="http://schemas.openxmlformats.org/presentationml/2006/ole">
             <mc:AlternateContent xmlns:mc="http://schemas.openxmlformats.org/markup-compatibility/2006">
               <mc:Choice xmlns:v="urn:schemas-microsoft-com:vml" Requires="v">
-                <p:oleObj spid="_x0000_s6814" name="AxMath" r:id="rId106" imgW="151920" imgH="226800" progId="Equation.AxMath">
+                <p:oleObj spid="_x0000_s6929" name="AxMath" r:id="rId106" imgW="151920" imgH="226800" progId="Equation.AxMath">
                   <p:embed/>
                 </p:oleObj>
               </mc:Choice>
@@ -21177,7 +21177,7 @@
           <a:graphicData uri="http://schemas.openxmlformats.org/presentationml/2006/ole">
             <mc:AlternateContent xmlns:mc="http://schemas.openxmlformats.org/markup-compatibility/2006">
               <mc:Choice xmlns:v="urn:schemas-microsoft-com:vml" Requires="v">
-                <p:oleObj spid="_x0000_s6815" name="AxMath" r:id="rId107" imgW="151920" imgH="226800" progId="Equation.AxMath">
+                <p:oleObj spid="_x0000_s6930" name="AxMath" r:id="rId107" imgW="151920" imgH="226800" progId="Equation.AxMath">
                   <p:embed/>
                 </p:oleObj>
               </mc:Choice>
@@ -21412,7 +21412,7 @@
           <a:graphicData uri="http://schemas.openxmlformats.org/presentationml/2006/ole">
             <mc:AlternateContent xmlns:mc="http://schemas.openxmlformats.org/markup-compatibility/2006">
               <mc:Choice xmlns:v="urn:schemas-microsoft-com:vml" Requires="v">
-                <p:oleObj spid="_x0000_s6816" name="AxMath" r:id="rId108" imgW="218880" imgH="230400" progId="Equation.AxMath">
+                <p:oleObj spid="_x0000_s6931" name="AxMath" r:id="rId108" imgW="218880" imgH="230400" progId="Equation.AxMath">
                   <p:embed/>
                 </p:oleObj>
               </mc:Choice>
@@ -21511,7 +21511,7 @@
           <a:graphicData uri="http://schemas.openxmlformats.org/presentationml/2006/ole">
             <mc:AlternateContent xmlns:mc="http://schemas.openxmlformats.org/markup-compatibility/2006">
               <mc:Choice xmlns:v="urn:schemas-microsoft-com:vml" Requires="v">
-                <p:oleObj spid="_x0000_s6817" name="AxMath" r:id="rId109" imgW="217080" imgH="230400" progId="Equation.AxMath">
+                <p:oleObj spid="_x0000_s6932" name="AxMath" r:id="rId109" imgW="217080" imgH="230400" progId="Equation.AxMath">
                   <p:embed/>
                 </p:oleObj>
               </mc:Choice>
@@ -21610,7 +21610,7 @@
           <a:graphicData uri="http://schemas.openxmlformats.org/presentationml/2006/ole">
             <mc:AlternateContent xmlns:mc="http://schemas.openxmlformats.org/markup-compatibility/2006">
               <mc:Choice xmlns:v="urn:schemas-microsoft-com:vml" Requires="v">
-                <p:oleObj spid="_x0000_s6818" name="AxMath" r:id="rId110" imgW="225360" imgH="230400" progId="Equation.AxMath">
+                <p:oleObj spid="_x0000_s6933" name="AxMath" r:id="rId110" imgW="225360" imgH="230400" progId="Equation.AxMath">
                   <p:embed/>
                 </p:oleObj>
               </mc:Choice>
@@ -21709,7 +21709,7 @@
           <a:graphicData uri="http://schemas.openxmlformats.org/presentationml/2006/ole">
             <mc:AlternateContent xmlns:mc="http://schemas.openxmlformats.org/markup-compatibility/2006">
               <mc:Choice xmlns:v="urn:schemas-microsoft-com:vml" Requires="v">
-                <p:oleObj spid="_x0000_s6819" name="AxMath" r:id="rId111" imgW="385200" imgH="230400" progId="Equation.AxMath">
+                <p:oleObj spid="_x0000_s6934" name="AxMath" r:id="rId111" imgW="385200" imgH="230400" progId="Equation.AxMath">
                   <p:embed/>
                 </p:oleObj>
               </mc:Choice>
@@ -21762,7 +21762,7 @@
           <a:graphicData uri="http://schemas.openxmlformats.org/presentationml/2006/ole">
             <mc:AlternateContent xmlns:mc="http://schemas.openxmlformats.org/markup-compatibility/2006">
               <mc:Choice xmlns:v="urn:schemas-microsoft-com:vml" Requires="v">
-                <p:oleObj spid="_x0000_s6820" name="AxMath" r:id="rId112" imgW="226080" imgH="230400" progId="Equation.AxMath">
+                <p:oleObj spid="_x0000_s6935" name="AxMath" r:id="rId112" imgW="226080" imgH="230400" progId="Equation.AxMath">
                   <p:embed/>
                 </p:oleObj>
               </mc:Choice>
@@ -21861,7 +21861,7 @@
           <a:graphicData uri="http://schemas.openxmlformats.org/presentationml/2006/ole">
             <mc:AlternateContent xmlns:mc="http://schemas.openxmlformats.org/markup-compatibility/2006">
               <mc:Choice xmlns:v="urn:schemas-microsoft-com:vml" Requires="v">
-                <p:oleObj spid="_x0000_s6821" name="AxMath" r:id="rId114" imgW="227520" imgH="230400" progId="Equation.AxMath">
+                <p:oleObj spid="_x0000_s6936" name="AxMath" r:id="rId114" imgW="227520" imgH="230400" progId="Equation.AxMath">
                   <p:embed/>
                 </p:oleObj>
               </mc:Choice>
@@ -21960,7 +21960,7 @@
           <a:graphicData uri="http://schemas.openxmlformats.org/presentationml/2006/ole">
             <mc:AlternateContent xmlns:mc="http://schemas.openxmlformats.org/markup-compatibility/2006">
               <mc:Choice xmlns:v="urn:schemas-microsoft-com:vml" Requires="v">
-                <p:oleObj spid="_x0000_s6822" name="AxMath" r:id="rId116" imgW="773640" imgH="230400" progId="Equation.AxMath">
+                <p:oleObj spid="_x0000_s6937" name="AxMath" r:id="rId116" imgW="773640" imgH="230400" progId="Equation.AxMath">
                   <p:embed/>
                 </p:oleObj>
               </mc:Choice>
@@ -22059,7 +22059,7 @@
           <a:graphicData uri="http://schemas.openxmlformats.org/presentationml/2006/ole">
             <mc:AlternateContent xmlns:mc="http://schemas.openxmlformats.org/markup-compatibility/2006">
               <mc:Choice xmlns:v="urn:schemas-microsoft-com:vml" Requires="v">
-                <p:oleObj spid="_x0000_s6823" name="AxMath" r:id="rId117" imgW="225360" imgH="230400" progId="Equation.AxMath">
+                <p:oleObj spid="_x0000_s6938" name="AxMath" r:id="rId117" imgW="225360" imgH="230400" progId="Equation.AxMath">
                   <p:embed/>
                 </p:oleObj>
               </mc:Choice>
@@ -22158,7 +22158,7 @@
           <a:graphicData uri="http://schemas.openxmlformats.org/presentationml/2006/ole">
             <mc:AlternateContent xmlns:mc="http://schemas.openxmlformats.org/markup-compatibility/2006">
               <mc:Choice xmlns:v="urn:schemas-microsoft-com:vml" Requires="v">
-                <p:oleObj spid="_x0000_s6824" name="AxMath" r:id="rId119" imgW="232200" imgH="230400" progId="Equation.AxMath">
+                <p:oleObj spid="_x0000_s6939" name="AxMath" r:id="rId119" imgW="232200" imgH="230400" progId="Equation.AxMath">
                   <p:embed/>
                 </p:oleObj>
               </mc:Choice>
@@ -22257,7 +22257,7 @@
           <a:graphicData uri="http://schemas.openxmlformats.org/presentationml/2006/ole">
             <mc:AlternateContent xmlns:mc="http://schemas.openxmlformats.org/markup-compatibility/2006">
               <mc:Choice xmlns:v="urn:schemas-microsoft-com:vml" Requires="v">
-                <p:oleObj spid="_x0000_s6825" name="AxMath" r:id="rId121" imgW="218520" imgH="230400" progId="Equation.AxMath">
+                <p:oleObj spid="_x0000_s6940" name="AxMath" r:id="rId121" imgW="218520" imgH="230400" progId="Equation.AxMath">
                   <p:embed/>
                 </p:oleObj>
               </mc:Choice>
@@ -22356,7 +22356,7 @@
           <a:graphicData uri="http://schemas.openxmlformats.org/presentationml/2006/ole">
             <mc:AlternateContent xmlns:mc="http://schemas.openxmlformats.org/markup-compatibility/2006">
               <mc:Choice xmlns:v="urn:schemas-microsoft-com:vml" Requires="v">
-                <p:oleObj spid="_x0000_s6826" name="AxMath" r:id="rId123" imgW="583200" imgH="230400" progId="Equation.AxMath">
+                <p:oleObj spid="_x0000_s6941" name="AxMath" r:id="rId123" imgW="583200" imgH="230400" progId="Equation.AxMath">
                   <p:embed/>
                 </p:oleObj>
               </mc:Choice>
@@ -22455,7 +22455,7 @@
           <a:graphicData uri="http://schemas.openxmlformats.org/presentationml/2006/ole">
             <mc:AlternateContent xmlns:mc="http://schemas.openxmlformats.org/markup-compatibility/2006">
               <mc:Choice xmlns:v="urn:schemas-microsoft-com:vml" Requires="v">
-                <p:oleObj spid="_x0000_s6827" name="AxMath" r:id="rId125" imgW="595080" imgH="230400" progId="Equation.AxMath">
+                <p:oleObj spid="_x0000_s6942" name="AxMath" r:id="rId125" imgW="595080" imgH="230400" progId="Equation.AxMath">
                   <p:embed/>
                 </p:oleObj>
               </mc:Choice>
@@ -22554,7 +22554,7 @@
           <a:graphicData uri="http://schemas.openxmlformats.org/presentationml/2006/ole">
             <mc:AlternateContent xmlns:mc="http://schemas.openxmlformats.org/markup-compatibility/2006">
               <mc:Choice xmlns:v="urn:schemas-microsoft-com:vml" Requires="v">
-                <p:oleObj spid="_x0000_s6828" name="AxMath" r:id="rId127" imgW="234000" imgH="230400" progId="Equation.AxMath">
+                <p:oleObj spid="_x0000_s6943" name="AxMath" r:id="rId127" imgW="234000" imgH="230400" progId="Equation.AxMath">
                   <p:embed/>
                 </p:oleObj>
               </mc:Choice>
@@ -22653,7 +22653,7 @@
           <a:graphicData uri="http://schemas.openxmlformats.org/presentationml/2006/ole">
             <mc:AlternateContent xmlns:mc="http://schemas.openxmlformats.org/markup-compatibility/2006">
               <mc:Choice xmlns:v="urn:schemas-microsoft-com:vml" Requires="v">
-                <p:oleObj spid="_x0000_s6829" name="AxMath" r:id="rId129" imgW="378360" imgH="230400" progId="Equation.AxMath">
+                <p:oleObj spid="_x0000_s6944" name="AxMath" r:id="rId129" imgW="378360" imgH="230400" progId="Equation.AxMath">
                   <p:embed/>
                 </p:oleObj>
               </mc:Choice>
@@ -22752,7 +22752,7 @@
           <a:graphicData uri="http://schemas.openxmlformats.org/presentationml/2006/ole">
             <mc:AlternateContent xmlns:mc="http://schemas.openxmlformats.org/markup-compatibility/2006">
               <mc:Choice xmlns:v="urn:schemas-microsoft-com:vml" Requires="v">
-                <p:oleObj spid="_x0000_s6830" name="AxMath" r:id="rId131" imgW="376560" imgH="230400" progId="Equation.AxMath">
+                <p:oleObj spid="_x0000_s6945" name="AxMath" r:id="rId131" imgW="376560" imgH="230400" progId="Equation.AxMath">
                   <p:embed/>
                 </p:oleObj>
               </mc:Choice>
@@ -22851,7 +22851,7 @@
           <a:graphicData uri="http://schemas.openxmlformats.org/presentationml/2006/ole">
             <mc:AlternateContent xmlns:mc="http://schemas.openxmlformats.org/markup-compatibility/2006">
               <mc:Choice xmlns:v="urn:schemas-microsoft-com:vml" Requires="v">
-                <p:oleObj spid="_x0000_s6831" name="AxMath" r:id="rId133" imgW="369720" imgH="230400" progId="Equation.AxMath">
+                <p:oleObj spid="_x0000_s6946" name="AxMath" r:id="rId133" imgW="369720" imgH="230400" progId="Equation.AxMath">
                   <p:embed/>
                 </p:oleObj>
               </mc:Choice>
@@ -23024,7 +23024,7 @@
           <a:graphicData uri="http://schemas.openxmlformats.org/presentationml/2006/ole">
             <mc:AlternateContent xmlns:mc="http://schemas.openxmlformats.org/markup-compatibility/2006">
               <mc:Choice xmlns:v="urn:schemas-microsoft-com:vml" Requires="v">
-                <p:oleObj spid="_x0000_s6832" name="AxMath" r:id="rId135" imgW="392040" imgH="230400" progId="Equation.AxMath">
+                <p:oleObj spid="_x0000_s6947" name="AxMath" r:id="rId135" imgW="392040" imgH="230400" progId="Equation.AxMath">
                   <p:embed/>
                 </p:oleObj>
               </mc:Choice>
@@ -23123,7 +23123,7 @@
           <a:graphicData uri="http://schemas.openxmlformats.org/presentationml/2006/ole">
             <mc:AlternateContent xmlns:mc="http://schemas.openxmlformats.org/markup-compatibility/2006">
               <mc:Choice xmlns:v="urn:schemas-microsoft-com:vml" Requires="v">
-                <p:oleObj spid="_x0000_s6833" name="AxMath" r:id="rId137" imgW="385200" imgH="230400" progId="Equation.AxMath">
+                <p:oleObj spid="_x0000_s6948" name="AxMath" r:id="rId137" imgW="385200" imgH="230400" progId="Equation.AxMath">
                   <p:embed/>
                 </p:oleObj>
               </mc:Choice>
@@ -23222,7 +23222,7 @@
           <a:graphicData uri="http://schemas.openxmlformats.org/presentationml/2006/ole">
             <mc:AlternateContent xmlns:mc="http://schemas.openxmlformats.org/markup-compatibility/2006">
               <mc:Choice xmlns:v="urn:schemas-microsoft-com:vml" Requires="v">
-                <p:oleObj spid="_x0000_s6834" name="AxMath" r:id="rId139" imgW="383760" imgH="230400" progId="Equation.AxMath">
+                <p:oleObj spid="_x0000_s6949" name="AxMath" r:id="rId139" imgW="383760" imgH="230400" progId="Equation.AxMath">
                   <p:embed/>
                 </p:oleObj>
               </mc:Choice>
@@ -23321,7 +23321,7 @@
           <a:graphicData uri="http://schemas.openxmlformats.org/presentationml/2006/ole">
             <mc:AlternateContent xmlns:mc="http://schemas.openxmlformats.org/markup-compatibility/2006">
               <mc:Choice xmlns:v="urn:schemas-microsoft-com:vml" Requires="v">
-                <p:oleObj spid="_x0000_s6835" name="AxMath" r:id="rId141" imgW="376560" imgH="230400" progId="Equation.AxMath">
+                <p:oleObj spid="_x0000_s6950" name="AxMath" r:id="rId141" imgW="376560" imgH="230400" progId="Equation.AxMath">
                   <p:embed/>
                 </p:oleObj>
               </mc:Choice>
@@ -23604,7 +23604,7 @@
           <a:graphicData uri="http://schemas.openxmlformats.org/presentationml/2006/ole">
             <mc:AlternateContent xmlns:mc="http://schemas.openxmlformats.org/markup-compatibility/2006">
               <mc:Choice xmlns:v="urn:schemas-microsoft-com:vml" Requires="v">
-                <p:oleObj spid="_x0000_s7291" name="AxMath" r:id="rId3" imgW="151920" imgH="226800" progId="Equation.AxMath">
+                <p:oleObj spid="_x0000_s7348" name="AxMath" r:id="rId3" imgW="151920" imgH="226800" progId="Equation.AxMath">
                   <p:embed/>
                 </p:oleObj>
               </mc:Choice>
@@ -23735,7 +23735,7 @@
           <a:graphicData uri="http://schemas.openxmlformats.org/presentationml/2006/ole">
             <mc:AlternateContent xmlns:mc="http://schemas.openxmlformats.org/markup-compatibility/2006">
               <mc:Choice xmlns:v="urn:schemas-microsoft-com:vml" Requires="v">
-                <p:oleObj spid="_x0000_s7292" name="AxMath" r:id="rId5" imgW="151920" imgH="226800" progId="Equation.AxMath">
+                <p:oleObj spid="_x0000_s7349" name="AxMath" r:id="rId5" imgW="151920" imgH="226800" progId="Equation.AxMath">
                   <p:embed/>
                 </p:oleObj>
               </mc:Choice>
@@ -23866,7 +23866,7 @@
           <a:graphicData uri="http://schemas.openxmlformats.org/presentationml/2006/ole">
             <mc:AlternateContent xmlns:mc="http://schemas.openxmlformats.org/markup-compatibility/2006">
               <mc:Choice xmlns:v="urn:schemas-microsoft-com:vml" Requires="v">
-                <p:oleObj spid="_x0000_s7293" name="AxMath" r:id="rId6" imgW="151920" imgH="226800" progId="Equation.AxMath">
+                <p:oleObj spid="_x0000_s7350" name="AxMath" r:id="rId6" imgW="151920" imgH="226800" progId="Equation.AxMath">
                   <p:embed/>
                 </p:oleObj>
               </mc:Choice>
@@ -23997,7 +23997,7 @@
           <a:graphicData uri="http://schemas.openxmlformats.org/presentationml/2006/ole">
             <mc:AlternateContent xmlns:mc="http://schemas.openxmlformats.org/markup-compatibility/2006">
               <mc:Choice xmlns:v="urn:schemas-microsoft-com:vml" Requires="v">
-                <p:oleObj spid="_x0000_s7294" name="AxMath" r:id="rId7" imgW="151920" imgH="226800" progId="Equation.AxMath">
+                <p:oleObj spid="_x0000_s7351" name="AxMath" r:id="rId7" imgW="151920" imgH="226800" progId="Equation.AxMath">
                   <p:embed/>
                 </p:oleObj>
               </mc:Choice>
@@ -24054,7 +24054,7 @@
           <a:graphicData uri="http://schemas.openxmlformats.org/presentationml/2006/ole">
             <mc:AlternateContent xmlns:mc="http://schemas.openxmlformats.org/markup-compatibility/2006">
               <mc:Choice xmlns:v="urn:schemas-microsoft-com:vml" Requires="v">
-                <p:oleObj spid="_x0000_s7295" name="AxMath" r:id="rId8" imgW="151920" imgH="226800" progId="Equation.AxMath">
+                <p:oleObj spid="_x0000_s7352" name="AxMath" r:id="rId8" imgW="151920" imgH="226800" progId="Equation.AxMath">
                   <p:embed/>
                 </p:oleObj>
               </mc:Choice>
@@ -24111,7 +24111,7 @@
           <a:graphicData uri="http://schemas.openxmlformats.org/presentationml/2006/ole">
             <mc:AlternateContent xmlns:mc="http://schemas.openxmlformats.org/markup-compatibility/2006">
               <mc:Choice xmlns:v="urn:schemas-microsoft-com:vml" Requires="v">
-                <p:oleObj spid="_x0000_s7296" name="AxMath" r:id="rId10" imgW="151920" imgH="226800" progId="Equation.AxMath">
+                <p:oleObj spid="_x0000_s7353" name="AxMath" r:id="rId10" imgW="151920" imgH="226800" progId="Equation.AxMath">
                   <p:embed/>
                 </p:oleObj>
               </mc:Choice>
@@ -24168,7 +24168,7 @@
           <a:graphicData uri="http://schemas.openxmlformats.org/presentationml/2006/ole">
             <mc:AlternateContent xmlns:mc="http://schemas.openxmlformats.org/markup-compatibility/2006">
               <mc:Choice xmlns:v="urn:schemas-microsoft-com:vml" Requires="v">
-                <p:oleObj spid="_x0000_s7297" name="AxMath" r:id="rId11" imgW="151920" imgH="226800" progId="Equation.AxMath">
+                <p:oleObj spid="_x0000_s7354" name="AxMath" r:id="rId11" imgW="151920" imgH="226800" progId="Equation.AxMath">
                   <p:embed/>
                 </p:oleObj>
               </mc:Choice>
@@ -24225,7 +24225,7 @@
           <a:graphicData uri="http://schemas.openxmlformats.org/presentationml/2006/ole">
             <mc:AlternateContent xmlns:mc="http://schemas.openxmlformats.org/markup-compatibility/2006">
               <mc:Choice xmlns:v="urn:schemas-microsoft-com:vml" Requires="v">
-                <p:oleObj spid="_x0000_s7298" name="AxMath" r:id="rId12" imgW="151920" imgH="226800" progId="Equation.AxMath">
+                <p:oleObj spid="_x0000_s7355" name="AxMath" r:id="rId12" imgW="151920" imgH="226800" progId="Equation.AxMath">
                   <p:embed/>
                 </p:oleObj>
               </mc:Choice>
@@ -25188,7 +25188,7 @@
           <a:graphicData uri="http://schemas.openxmlformats.org/presentationml/2006/ole">
             <mc:AlternateContent xmlns:mc="http://schemas.openxmlformats.org/markup-compatibility/2006">
               <mc:Choice xmlns:v="urn:schemas-microsoft-com:vml" Requires="v">
-                <p:oleObj spid="_x0000_s7299" name="AxMath" r:id="rId13" imgW="218880" imgH="230400" progId="Equation.AxMath">
+                <p:oleObj spid="_x0000_s7356" name="AxMath" r:id="rId13" imgW="218880" imgH="230400" progId="Equation.AxMath">
                   <p:embed/>
                 </p:oleObj>
               </mc:Choice>
@@ -25245,7 +25245,7 @@
           <a:graphicData uri="http://schemas.openxmlformats.org/presentationml/2006/ole">
             <mc:AlternateContent xmlns:mc="http://schemas.openxmlformats.org/markup-compatibility/2006">
               <mc:Choice xmlns:v="urn:schemas-microsoft-com:vml" Requires="v">
-                <p:oleObj spid="_x0000_s7300" name="AxMath" r:id="rId15" imgW="226080" imgH="230400" progId="Equation.AxMath">
+                <p:oleObj spid="_x0000_s7357" name="AxMath" r:id="rId15" imgW="226080" imgH="230400" progId="Equation.AxMath">
                   <p:embed/>
                 </p:oleObj>
               </mc:Choice>
@@ -25302,7 +25302,7 @@
           <a:graphicData uri="http://schemas.openxmlformats.org/presentationml/2006/ole">
             <mc:AlternateContent xmlns:mc="http://schemas.openxmlformats.org/markup-compatibility/2006">
               <mc:Choice xmlns:v="urn:schemas-microsoft-com:vml" Requires="v">
-                <p:oleObj spid="_x0000_s7301" name="AxMath" r:id="rId17" imgW="227520" imgH="230400" progId="Equation.AxMath">
+                <p:oleObj spid="_x0000_s7358" name="AxMath" r:id="rId17" imgW="227520" imgH="230400" progId="Equation.AxMath">
                   <p:embed/>
                 </p:oleObj>
               </mc:Choice>
@@ -25359,7 +25359,7 @@
           <a:graphicData uri="http://schemas.openxmlformats.org/presentationml/2006/ole">
             <mc:AlternateContent xmlns:mc="http://schemas.openxmlformats.org/markup-compatibility/2006">
               <mc:Choice xmlns:v="urn:schemas-microsoft-com:vml" Requires="v">
-                <p:oleObj spid="_x0000_s7302" name="AxMath" r:id="rId19" imgW="239760" imgH="228960" progId="Equation.AxMath">
+                <p:oleObj spid="_x0000_s7359" name="AxMath" r:id="rId19" imgW="239760" imgH="228960" progId="Equation.AxMath">
                   <p:embed/>
                 </p:oleObj>
               </mc:Choice>
@@ -25576,7 +25576,7 @@
           <a:graphicData uri="http://schemas.openxmlformats.org/presentationml/2006/ole">
             <mc:AlternateContent xmlns:mc="http://schemas.openxmlformats.org/markup-compatibility/2006">
               <mc:Choice xmlns:v="urn:schemas-microsoft-com:vml" Requires="v">
-                <p:oleObj spid="_x0000_s7303" name="AxMath" r:id="rId3" imgW="151920" imgH="226800" progId="Equation.AxMath">
+                <p:oleObj spid="_x0000_s7360" name="AxMath" r:id="rId3" imgW="151920" imgH="226800" progId="Equation.AxMath">
                   <p:embed/>
                 </p:oleObj>
               </mc:Choice>
@@ -25707,7 +25707,7 @@
           <a:graphicData uri="http://schemas.openxmlformats.org/presentationml/2006/ole">
             <mc:AlternateContent xmlns:mc="http://schemas.openxmlformats.org/markup-compatibility/2006">
               <mc:Choice xmlns:v="urn:schemas-microsoft-com:vml" Requires="v">
-                <p:oleObj spid="_x0000_s7304" name="AxMath" r:id="rId5" imgW="151920" imgH="226800" progId="Equation.AxMath">
+                <p:oleObj spid="_x0000_s7361" name="AxMath" r:id="rId5" imgW="151920" imgH="226800" progId="Equation.AxMath">
                   <p:embed/>
                 </p:oleObj>
               </mc:Choice>
@@ -25838,7 +25838,7 @@
           <a:graphicData uri="http://schemas.openxmlformats.org/presentationml/2006/ole">
             <mc:AlternateContent xmlns:mc="http://schemas.openxmlformats.org/markup-compatibility/2006">
               <mc:Choice xmlns:v="urn:schemas-microsoft-com:vml" Requires="v">
-                <p:oleObj spid="_x0000_s7305" name="AxMath" r:id="rId6" imgW="151920" imgH="226800" progId="Equation.AxMath">
+                <p:oleObj spid="_x0000_s7362" name="AxMath" r:id="rId6" imgW="151920" imgH="226800" progId="Equation.AxMath">
                   <p:embed/>
                 </p:oleObj>
               </mc:Choice>
@@ -25969,7 +25969,7 @@
           <a:graphicData uri="http://schemas.openxmlformats.org/presentationml/2006/ole">
             <mc:AlternateContent xmlns:mc="http://schemas.openxmlformats.org/markup-compatibility/2006">
               <mc:Choice xmlns:v="urn:schemas-microsoft-com:vml" Requires="v">
-                <p:oleObj spid="_x0000_s7306" name="AxMath" r:id="rId7" imgW="151920" imgH="226800" progId="Equation.AxMath">
+                <p:oleObj spid="_x0000_s7363" name="AxMath" r:id="rId7" imgW="151920" imgH="226800" progId="Equation.AxMath">
                   <p:embed/>
                 </p:oleObj>
               </mc:Choice>
@@ -26026,7 +26026,7 @@
           <a:graphicData uri="http://schemas.openxmlformats.org/presentationml/2006/ole">
             <mc:AlternateContent xmlns:mc="http://schemas.openxmlformats.org/markup-compatibility/2006">
               <mc:Choice xmlns:v="urn:schemas-microsoft-com:vml" Requires="v">
-                <p:oleObj spid="_x0000_s7307" name="AxMath" r:id="rId8" imgW="151920" imgH="226800" progId="Equation.AxMath">
+                <p:oleObj spid="_x0000_s7364" name="AxMath" r:id="rId8" imgW="151920" imgH="226800" progId="Equation.AxMath">
                   <p:embed/>
                 </p:oleObj>
               </mc:Choice>
@@ -26083,7 +26083,7 @@
           <a:graphicData uri="http://schemas.openxmlformats.org/presentationml/2006/ole">
             <mc:AlternateContent xmlns:mc="http://schemas.openxmlformats.org/markup-compatibility/2006">
               <mc:Choice xmlns:v="urn:schemas-microsoft-com:vml" Requires="v">
-                <p:oleObj spid="_x0000_s7308" name="AxMath" r:id="rId10" imgW="151920" imgH="226800" progId="Equation.AxMath">
+                <p:oleObj spid="_x0000_s7365" name="AxMath" r:id="rId10" imgW="151920" imgH="226800" progId="Equation.AxMath">
                   <p:embed/>
                 </p:oleObj>
               </mc:Choice>
@@ -26140,7 +26140,7 @@
           <a:graphicData uri="http://schemas.openxmlformats.org/presentationml/2006/ole">
             <mc:AlternateContent xmlns:mc="http://schemas.openxmlformats.org/markup-compatibility/2006">
               <mc:Choice xmlns:v="urn:schemas-microsoft-com:vml" Requires="v">
-                <p:oleObj spid="_x0000_s7309" name="AxMath" r:id="rId11" imgW="151920" imgH="226800" progId="Equation.AxMath">
+                <p:oleObj spid="_x0000_s7366" name="AxMath" r:id="rId11" imgW="151920" imgH="226800" progId="Equation.AxMath">
                   <p:embed/>
                 </p:oleObj>
               </mc:Choice>
@@ -26197,7 +26197,7 @@
           <a:graphicData uri="http://schemas.openxmlformats.org/presentationml/2006/ole">
             <mc:AlternateContent xmlns:mc="http://schemas.openxmlformats.org/markup-compatibility/2006">
               <mc:Choice xmlns:v="urn:schemas-microsoft-com:vml" Requires="v">
-                <p:oleObj spid="_x0000_s7310" name="AxMath" r:id="rId12" imgW="151920" imgH="226800" progId="Equation.AxMath">
+                <p:oleObj spid="_x0000_s7367" name="AxMath" r:id="rId12" imgW="151920" imgH="226800" progId="Equation.AxMath">
                   <p:embed/>
                 </p:oleObj>
               </mc:Choice>
@@ -27170,7 +27170,7 @@
           <a:graphicData uri="http://schemas.openxmlformats.org/presentationml/2006/ole">
             <mc:AlternateContent xmlns:mc="http://schemas.openxmlformats.org/markup-compatibility/2006">
               <mc:Choice xmlns:v="urn:schemas-microsoft-com:vml" Requires="v">
-                <p:oleObj spid="_x0000_s7311" name="AxMath" r:id="rId13" imgW="218880" imgH="230400" progId="Equation.AxMath">
+                <p:oleObj spid="_x0000_s7368" name="AxMath" r:id="rId13" imgW="218880" imgH="230400" progId="Equation.AxMath">
                   <p:embed/>
                 </p:oleObj>
               </mc:Choice>
@@ -27227,7 +27227,7 @@
           <a:graphicData uri="http://schemas.openxmlformats.org/presentationml/2006/ole">
             <mc:AlternateContent xmlns:mc="http://schemas.openxmlformats.org/markup-compatibility/2006">
               <mc:Choice xmlns:v="urn:schemas-microsoft-com:vml" Requires="v">
-                <p:oleObj spid="_x0000_s7312" name="AxMath" r:id="rId15" imgW="226080" imgH="230400" progId="Equation.AxMath">
+                <p:oleObj spid="_x0000_s7369" name="AxMath" r:id="rId15" imgW="226080" imgH="230400" progId="Equation.AxMath">
                   <p:embed/>
                 </p:oleObj>
               </mc:Choice>
@@ -27284,7 +27284,7 @@
           <a:graphicData uri="http://schemas.openxmlformats.org/presentationml/2006/ole">
             <mc:AlternateContent xmlns:mc="http://schemas.openxmlformats.org/markup-compatibility/2006">
               <mc:Choice xmlns:v="urn:schemas-microsoft-com:vml" Requires="v">
-                <p:oleObj spid="_x0000_s7313" name="AxMath" r:id="rId17" imgW="227520" imgH="230400" progId="Equation.AxMath">
+                <p:oleObj spid="_x0000_s7370" name="AxMath" r:id="rId17" imgW="227520" imgH="230400" progId="Equation.AxMath">
                   <p:embed/>
                 </p:oleObj>
               </mc:Choice>
@@ -27341,7 +27341,7 @@
           <a:graphicData uri="http://schemas.openxmlformats.org/presentationml/2006/ole">
             <mc:AlternateContent xmlns:mc="http://schemas.openxmlformats.org/markup-compatibility/2006">
               <mc:Choice xmlns:v="urn:schemas-microsoft-com:vml" Requires="v">
-                <p:oleObj spid="_x0000_s7314" name="AxMath" r:id="rId21" imgW="239760" imgH="228960" progId="Equation.AxMath">
+                <p:oleObj spid="_x0000_s7371" name="AxMath" r:id="rId21" imgW="239760" imgH="228960" progId="Equation.AxMath">
                   <p:embed/>
                 </p:oleObj>
               </mc:Choice>
@@ -27454,7 +27454,7 @@
           <a:graphicData uri="http://schemas.openxmlformats.org/presentationml/2006/ole">
             <mc:AlternateContent xmlns:mc="http://schemas.openxmlformats.org/markup-compatibility/2006">
               <mc:Choice xmlns:v="urn:schemas-microsoft-com:vml" Requires="v">
-                <p:oleObj spid="_x0000_s7315" name="AxMath" r:id="rId13" imgW="218880" imgH="230400" progId="Equation.AxMath">
+                <p:oleObj spid="_x0000_s7372" name="AxMath" r:id="rId13" imgW="218880" imgH="230400" progId="Equation.AxMath">
                   <p:embed/>
                 </p:oleObj>
               </mc:Choice>
@@ -27511,7 +27511,7 @@
           <a:graphicData uri="http://schemas.openxmlformats.org/presentationml/2006/ole">
             <mc:AlternateContent xmlns:mc="http://schemas.openxmlformats.org/markup-compatibility/2006">
               <mc:Choice xmlns:v="urn:schemas-microsoft-com:vml" Requires="v">
-                <p:oleObj spid="_x0000_s7316" name="AxMath" r:id="rId13" imgW="218880" imgH="230400" progId="Equation.AxMath">
+                <p:oleObj spid="_x0000_s7373" name="AxMath" r:id="rId13" imgW="218880" imgH="230400" progId="Equation.AxMath">
                   <p:embed/>
                 </p:oleObj>
               </mc:Choice>
@@ -27568,7 +27568,7 @@
           <a:graphicData uri="http://schemas.openxmlformats.org/presentationml/2006/ole">
             <mc:AlternateContent xmlns:mc="http://schemas.openxmlformats.org/markup-compatibility/2006">
               <mc:Choice xmlns:v="urn:schemas-microsoft-com:vml" Requires="v">
-                <p:oleObj spid="_x0000_s7317" name="AxMath" r:id="rId15" imgW="226080" imgH="230400" progId="Equation.AxMath">
+                <p:oleObj spid="_x0000_s7374" name="AxMath" r:id="rId15" imgW="226080" imgH="230400" progId="Equation.AxMath">
                   <p:embed/>
                 </p:oleObj>
               </mc:Choice>
@@ -27625,7 +27625,7 @@
           <a:graphicData uri="http://schemas.openxmlformats.org/presentationml/2006/ole">
             <mc:AlternateContent xmlns:mc="http://schemas.openxmlformats.org/markup-compatibility/2006">
               <mc:Choice xmlns:v="urn:schemas-microsoft-com:vml" Requires="v">
-                <p:oleObj spid="_x0000_s7318" name="AxMath" r:id="rId17" imgW="227520" imgH="230400" progId="Equation.AxMath">
+                <p:oleObj spid="_x0000_s7375" name="AxMath" r:id="rId17" imgW="227520" imgH="230400" progId="Equation.AxMath">
                   <p:embed/>
                 </p:oleObj>
               </mc:Choice>
@@ -27682,7 +27682,7 @@
           <a:graphicData uri="http://schemas.openxmlformats.org/presentationml/2006/ole">
             <mc:AlternateContent xmlns:mc="http://schemas.openxmlformats.org/markup-compatibility/2006">
               <mc:Choice xmlns:v="urn:schemas-microsoft-com:vml" Requires="v">
-                <p:oleObj spid="_x0000_s7319" name="AxMath" r:id="rId15" imgW="226080" imgH="230400" progId="Equation.AxMath">
+                <p:oleObj spid="_x0000_s7376" name="AxMath" r:id="rId15" imgW="226080" imgH="230400" progId="Equation.AxMath">
                   <p:embed/>
                 </p:oleObj>
               </mc:Choice>
@@ -28007,7 +28007,7 @@
           <a:graphicData uri="http://schemas.openxmlformats.org/presentationml/2006/ole">
             <mc:AlternateContent xmlns:mc="http://schemas.openxmlformats.org/markup-compatibility/2006">
               <mc:Choice xmlns:v="urn:schemas-microsoft-com:vml" Requires="v">
-                <p:oleObj spid="_x0000_s7320" name="AxMath" r:id="rId3" imgW="151920" imgH="226800" progId="Equation.AxMath">
+                <p:oleObj spid="_x0000_s7377" name="AxMath" r:id="rId3" imgW="151920" imgH="226800" progId="Equation.AxMath">
                   <p:embed/>
                 </p:oleObj>
               </mc:Choice>
@@ -28138,7 +28138,7 @@
           <a:graphicData uri="http://schemas.openxmlformats.org/presentationml/2006/ole">
             <mc:AlternateContent xmlns:mc="http://schemas.openxmlformats.org/markup-compatibility/2006">
               <mc:Choice xmlns:v="urn:schemas-microsoft-com:vml" Requires="v">
-                <p:oleObj spid="_x0000_s7321" name="AxMath" r:id="rId5" imgW="151920" imgH="226800" progId="Equation.AxMath">
+                <p:oleObj spid="_x0000_s7378" name="AxMath" r:id="rId5" imgW="151920" imgH="226800" progId="Equation.AxMath">
                   <p:embed/>
                 </p:oleObj>
               </mc:Choice>
@@ -28269,7 +28269,7 @@
           <a:graphicData uri="http://schemas.openxmlformats.org/presentationml/2006/ole">
             <mc:AlternateContent xmlns:mc="http://schemas.openxmlformats.org/markup-compatibility/2006">
               <mc:Choice xmlns:v="urn:schemas-microsoft-com:vml" Requires="v">
-                <p:oleObj spid="_x0000_s7322" name="AxMath" r:id="rId6" imgW="151920" imgH="226800" progId="Equation.AxMath">
+                <p:oleObj spid="_x0000_s7379" name="AxMath" r:id="rId6" imgW="151920" imgH="226800" progId="Equation.AxMath">
                   <p:embed/>
                 </p:oleObj>
               </mc:Choice>
@@ -28400,7 +28400,7 @@
           <a:graphicData uri="http://schemas.openxmlformats.org/presentationml/2006/ole">
             <mc:AlternateContent xmlns:mc="http://schemas.openxmlformats.org/markup-compatibility/2006">
               <mc:Choice xmlns:v="urn:schemas-microsoft-com:vml" Requires="v">
-                <p:oleObj spid="_x0000_s7323" name="AxMath" r:id="rId7" imgW="151920" imgH="226800" progId="Equation.AxMath">
+                <p:oleObj spid="_x0000_s7380" name="AxMath" r:id="rId7" imgW="151920" imgH="226800" progId="Equation.AxMath">
                   <p:embed/>
                 </p:oleObj>
               </mc:Choice>
@@ -28457,7 +28457,7 @@
           <a:graphicData uri="http://schemas.openxmlformats.org/presentationml/2006/ole">
             <mc:AlternateContent xmlns:mc="http://schemas.openxmlformats.org/markup-compatibility/2006">
               <mc:Choice xmlns:v="urn:schemas-microsoft-com:vml" Requires="v">
-                <p:oleObj spid="_x0000_s7324" name="AxMath" r:id="rId8" imgW="151920" imgH="226800" progId="Equation.AxMath">
+                <p:oleObj spid="_x0000_s7381" name="AxMath" r:id="rId8" imgW="151920" imgH="226800" progId="Equation.AxMath">
                   <p:embed/>
                 </p:oleObj>
               </mc:Choice>
@@ -28514,7 +28514,7 @@
           <a:graphicData uri="http://schemas.openxmlformats.org/presentationml/2006/ole">
             <mc:AlternateContent xmlns:mc="http://schemas.openxmlformats.org/markup-compatibility/2006">
               <mc:Choice xmlns:v="urn:schemas-microsoft-com:vml" Requires="v">
-                <p:oleObj spid="_x0000_s7325" name="AxMath" r:id="rId10" imgW="151920" imgH="226800" progId="Equation.AxMath">
+                <p:oleObj spid="_x0000_s7382" name="AxMath" r:id="rId10" imgW="151920" imgH="226800" progId="Equation.AxMath">
                   <p:embed/>
                 </p:oleObj>
               </mc:Choice>
@@ -28571,7 +28571,7 @@
           <a:graphicData uri="http://schemas.openxmlformats.org/presentationml/2006/ole">
             <mc:AlternateContent xmlns:mc="http://schemas.openxmlformats.org/markup-compatibility/2006">
               <mc:Choice xmlns:v="urn:schemas-microsoft-com:vml" Requires="v">
-                <p:oleObj spid="_x0000_s7326" name="AxMath" r:id="rId11" imgW="151920" imgH="226800" progId="Equation.AxMath">
+                <p:oleObj spid="_x0000_s7383" name="AxMath" r:id="rId11" imgW="151920" imgH="226800" progId="Equation.AxMath">
                   <p:embed/>
                 </p:oleObj>
               </mc:Choice>
@@ -28628,7 +28628,7 @@
           <a:graphicData uri="http://schemas.openxmlformats.org/presentationml/2006/ole">
             <mc:AlternateContent xmlns:mc="http://schemas.openxmlformats.org/markup-compatibility/2006">
               <mc:Choice xmlns:v="urn:schemas-microsoft-com:vml" Requires="v">
-                <p:oleObj spid="_x0000_s7327" name="AxMath" r:id="rId12" imgW="151920" imgH="226800" progId="Equation.AxMath">
+                <p:oleObj spid="_x0000_s7384" name="AxMath" r:id="rId12" imgW="151920" imgH="226800" progId="Equation.AxMath">
                   <p:embed/>
                 </p:oleObj>
               </mc:Choice>
@@ -29623,7 +29623,7 @@
           <a:graphicData uri="http://schemas.openxmlformats.org/presentationml/2006/ole">
             <mc:AlternateContent xmlns:mc="http://schemas.openxmlformats.org/markup-compatibility/2006">
               <mc:Choice xmlns:v="urn:schemas-microsoft-com:vml" Requires="v">
-                <p:oleObj spid="_x0000_s7328" name="AxMath" r:id="rId13" imgW="218880" imgH="230400" progId="Equation.AxMath">
+                <p:oleObj spid="_x0000_s7385" name="AxMath" r:id="rId13" imgW="218880" imgH="230400" progId="Equation.AxMath">
                   <p:embed/>
                 </p:oleObj>
               </mc:Choice>
@@ -29680,7 +29680,7 @@
           <a:graphicData uri="http://schemas.openxmlformats.org/presentationml/2006/ole">
             <mc:AlternateContent xmlns:mc="http://schemas.openxmlformats.org/markup-compatibility/2006">
               <mc:Choice xmlns:v="urn:schemas-microsoft-com:vml" Requires="v">
-                <p:oleObj spid="_x0000_s7329" name="AxMath" r:id="rId15" imgW="226080" imgH="230400" progId="Equation.AxMath">
+                <p:oleObj spid="_x0000_s7386" name="AxMath" r:id="rId15" imgW="226080" imgH="230400" progId="Equation.AxMath">
                   <p:embed/>
                 </p:oleObj>
               </mc:Choice>
@@ -29737,7 +29737,7 @@
           <a:graphicData uri="http://schemas.openxmlformats.org/presentationml/2006/ole">
             <mc:AlternateContent xmlns:mc="http://schemas.openxmlformats.org/markup-compatibility/2006">
               <mc:Choice xmlns:v="urn:schemas-microsoft-com:vml" Requires="v">
-                <p:oleObj spid="_x0000_s7330" name="AxMath" r:id="rId17" imgW="227520" imgH="230400" progId="Equation.AxMath">
+                <p:oleObj spid="_x0000_s7387" name="AxMath" r:id="rId17" imgW="227520" imgH="230400" progId="Equation.AxMath">
                   <p:embed/>
                 </p:oleObj>
               </mc:Choice>
@@ -29794,7 +29794,7 @@
           <a:graphicData uri="http://schemas.openxmlformats.org/presentationml/2006/ole">
             <mc:AlternateContent xmlns:mc="http://schemas.openxmlformats.org/markup-compatibility/2006">
               <mc:Choice xmlns:v="urn:schemas-microsoft-com:vml" Requires="v">
-                <p:oleObj spid="_x0000_s7331" name="AxMath" r:id="rId22" imgW="239760" imgH="228960" progId="Equation.AxMath">
+                <p:oleObj spid="_x0000_s7388" name="AxMath" r:id="rId22" imgW="239760" imgH="228960" progId="Equation.AxMath">
                   <p:embed/>
                 </p:oleObj>
               </mc:Choice>
@@ -29907,7 +29907,7 @@
           <a:graphicData uri="http://schemas.openxmlformats.org/presentationml/2006/ole">
             <mc:AlternateContent xmlns:mc="http://schemas.openxmlformats.org/markup-compatibility/2006">
               <mc:Choice xmlns:v="urn:schemas-microsoft-com:vml" Requires="v">
-                <p:oleObj spid="_x0000_s7332" name="AxMath" r:id="rId13" imgW="218880" imgH="230400" progId="Equation.AxMath">
+                <p:oleObj spid="_x0000_s7389" name="AxMath" r:id="rId13" imgW="218880" imgH="230400" progId="Equation.AxMath">
                   <p:embed/>
                 </p:oleObj>
               </mc:Choice>
@@ -29964,7 +29964,7 @@
           <a:graphicData uri="http://schemas.openxmlformats.org/presentationml/2006/ole">
             <mc:AlternateContent xmlns:mc="http://schemas.openxmlformats.org/markup-compatibility/2006">
               <mc:Choice xmlns:v="urn:schemas-microsoft-com:vml" Requires="v">
-                <p:oleObj spid="_x0000_s7333" name="AxMath" r:id="rId15" imgW="226080" imgH="230400" progId="Equation.AxMath">
+                <p:oleObj spid="_x0000_s7390" name="AxMath" r:id="rId15" imgW="226080" imgH="230400" progId="Equation.AxMath">
                   <p:embed/>
                 </p:oleObj>
               </mc:Choice>
@@ -30021,7 +30021,7 @@
           <a:graphicData uri="http://schemas.openxmlformats.org/presentationml/2006/ole">
             <mc:AlternateContent xmlns:mc="http://schemas.openxmlformats.org/markup-compatibility/2006">
               <mc:Choice xmlns:v="urn:schemas-microsoft-com:vml" Requires="v">
-                <p:oleObj spid="_x0000_s7334" name="AxMath" r:id="rId17" imgW="227520" imgH="230400" progId="Equation.AxMath">
+                <p:oleObj spid="_x0000_s7391" name="AxMath" r:id="rId17" imgW="227520" imgH="230400" progId="Equation.AxMath">
                   <p:embed/>
                 </p:oleObj>
               </mc:Choice>
@@ -30078,7 +30078,7 @@
           <a:graphicData uri="http://schemas.openxmlformats.org/presentationml/2006/ole">
             <mc:AlternateContent xmlns:mc="http://schemas.openxmlformats.org/markup-compatibility/2006">
               <mc:Choice xmlns:v="urn:schemas-microsoft-com:vml" Requires="v">
-                <p:oleObj spid="_x0000_s7335" name="AxMath" r:id="rId23" imgW="239760" imgH="228960" progId="Equation.AxMath">
+                <p:oleObj spid="_x0000_s7392" name="AxMath" r:id="rId23" imgW="239760" imgH="228960" progId="Equation.AxMath">
                   <p:embed/>
                 </p:oleObj>
               </mc:Choice>
@@ -30135,7 +30135,7 @@
           <a:graphicData uri="http://schemas.openxmlformats.org/presentationml/2006/ole">
             <mc:AlternateContent xmlns:mc="http://schemas.openxmlformats.org/markup-compatibility/2006">
               <mc:Choice xmlns:v="urn:schemas-microsoft-com:vml" Requires="v">
-                <p:oleObj spid="_x0000_s7336" name="AxMath" r:id="rId13" imgW="218880" imgH="230400" progId="Equation.AxMath">
+                <p:oleObj spid="_x0000_s7393" name="AxMath" r:id="rId13" imgW="218880" imgH="230400" progId="Equation.AxMath">
                   <p:embed/>
                 </p:oleObj>
               </mc:Choice>
@@ -30192,7 +30192,7 @@
           <a:graphicData uri="http://schemas.openxmlformats.org/presentationml/2006/ole">
             <mc:AlternateContent xmlns:mc="http://schemas.openxmlformats.org/markup-compatibility/2006">
               <mc:Choice xmlns:v="urn:schemas-microsoft-com:vml" Requires="v">
-                <p:oleObj spid="_x0000_s7337" name="AxMath" r:id="rId15" imgW="226080" imgH="230400" progId="Equation.AxMath">
+                <p:oleObj spid="_x0000_s7394" name="AxMath" r:id="rId15" imgW="226080" imgH="230400" progId="Equation.AxMath">
                   <p:embed/>
                 </p:oleObj>
               </mc:Choice>
@@ -30249,7 +30249,7 @@
           <a:graphicData uri="http://schemas.openxmlformats.org/presentationml/2006/ole">
             <mc:AlternateContent xmlns:mc="http://schemas.openxmlformats.org/markup-compatibility/2006">
               <mc:Choice xmlns:v="urn:schemas-microsoft-com:vml" Requires="v">
-                <p:oleObj spid="_x0000_s7338" name="AxMath" r:id="rId17" imgW="227520" imgH="230400" progId="Equation.AxMath">
+                <p:oleObj spid="_x0000_s7395" name="AxMath" r:id="rId17" imgW="227520" imgH="230400" progId="Equation.AxMath">
                   <p:embed/>
                 </p:oleObj>
               </mc:Choice>
@@ -30306,7 +30306,7 @@
           <a:graphicData uri="http://schemas.openxmlformats.org/presentationml/2006/ole">
             <mc:AlternateContent xmlns:mc="http://schemas.openxmlformats.org/markup-compatibility/2006">
               <mc:Choice xmlns:v="urn:schemas-microsoft-com:vml" Requires="v">
-                <p:oleObj spid="_x0000_s7339" name="AxMath" r:id="rId24" imgW="239760" imgH="228960" progId="Equation.AxMath">
+                <p:oleObj spid="_x0000_s7396" name="AxMath" r:id="rId24" imgW="239760" imgH="228960" progId="Equation.AxMath">
                   <p:embed/>
                 </p:oleObj>
               </mc:Choice>
@@ -30363,7 +30363,7 @@
           <a:graphicData uri="http://schemas.openxmlformats.org/presentationml/2006/ole">
             <mc:AlternateContent xmlns:mc="http://schemas.openxmlformats.org/markup-compatibility/2006">
               <mc:Choice xmlns:v="urn:schemas-microsoft-com:vml" Requires="v">
-                <p:oleObj spid="_x0000_s7340" name="AxMath" r:id="rId13" imgW="218880" imgH="230400" progId="Equation.AxMath">
+                <p:oleObj spid="_x0000_s7397" name="AxMath" r:id="rId13" imgW="218880" imgH="230400" progId="Equation.AxMath">
                   <p:embed/>
                 </p:oleObj>
               </mc:Choice>
@@ -30420,7 +30420,7 @@
           <a:graphicData uri="http://schemas.openxmlformats.org/presentationml/2006/ole">
             <mc:AlternateContent xmlns:mc="http://schemas.openxmlformats.org/markup-compatibility/2006">
               <mc:Choice xmlns:v="urn:schemas-microsoft-com:vml" Requires="v">
-                <p:oleObj spid="_x0000_s7341" name="AxMath" r:id="rId15" imgW="226080" imgH="230400" progId="Equation.AxMath">
+                <p:oleObj spid="_x0000_s7398" name="AxMath" r:id="rId15" imgW="226080" imgH="230400" progId="Equation.AxMath">
                   <p:embed/>
                 </p:oleObj>
               </mc:Choice>
@@ -30477,7 +30477,7 @@
           <a:graphicData uri="http://schemas.openxmlformats.org/presentationml/2006/ole">
             <mc:AlternateContent xmlns:mc="http://schemas.openxmlformats.org/markup-compatibility/2006">
               <mc:Choice xmlns:v="urn:schemas-microsoft-com:vml" Requires="v">
-                <p:oleObj spid="_x0000_s7342" name="AxMath" r:id="rId17" imgW="227520" imgH="230400" progId="Equation.AxMath">
+                <p:oleObj spid="_x0000_s7399" name="AxMath" r:id="rId17" imgW="227520" imgH="230400" progId="Equation.AxMath">
                   <p:embed/>
                 </p:oleObj>
               </mc:Choice>
@@ -30534,7 +30534,7 @@
           <a:graphicData uri="http://schemas.openxmlformats.org/presentationml/2006/ole">
             <mc:AlternateContent xmlns:mc="http://schemas.openxmlformats.org/markup-compatibility/2006">
               <mc:Choice xmlns:v="urn:schemas-microsoft-com:vml" Requires="v">
-                <p:oleObj spid="_x0000_s7343" name="AxMath" r:id="rId25" imgW="239760" imgH="228960" progId="Equation.AxMath">
+                <p:oleObj spid="_x0000_s7400" name="AxMath" r:id="rId25" imgW="239760" imgH="228960" progId="Equation.AxMath">
                   <p:embed/>
                 </p:oleObj>
               </mc:Choice>
@@ -30591,7 +30591,7 @@
           <a:graphicData uri="http://schemas.openxmlformats.org/presentationml/2006/ole">
             <mc:AlternateContent xmlns:mc="http://schemas.openxmlformats.org/markup-compatibility/2006">
               <mc:Choice xmlns:v="urn:schemas-microsoft-com:vml" Requires="v">
-                <p:oleObj spid="_x0000_s7344" name="AxMath" r:id="rId13" imgW="218880" imgH="230400" progId="Equation.AxMath">
+                <p:oleObj spid="_x0000_s7401" name="AxMath" r:id="rId13" imgW="218880" imgH="230400" progId="Equation.AxMath">
                   <p:embed/>
                 </p:oleObj>
               </mc:Choice>
@@ -30648,7 +30648,7 @@
           <a:graphicData uri="http://schemas.openxmlformats.org/presentationml/2006/ole">
             <mc:AlternateContent xmlns:mc="http://schemas.openxmlformats.org/markup-compatibility/2006">
               <mc:Choice xmlns:v="urn:schemas-microsoft-com:vml" Requires="v">
-                <p:oleObj spid="_x0000_s7345" name="AxMath" r:id="rId15" imgW="226080" imgH="230400" progId="Equation.AxMath">
+                <p:oleObj spid="_x0000_s7402" name="AxMath" r:id="rId15" imgW="226080" imgH="230400" progId="Equation.AxMath">
                   <p:embed/>
                 </p:oleObj>
               </mc:Choice>
@@ -30705,7 +30705,7 @@
           <a:graphicData uri="http://schemas.openxmlformats.org/presentationml/2006/ole">
             <mc:AlternateContent xmlns:mc="http://schemas.openxmlformats.org/markup-compatibility/2006">
               <mc:Choice xmlns:v="urn:schemas-microsoft-com:vml" Requires="v">
-                <p:oleObj spid="_x0000_s7346" name="AxMath" r:id="rId17" imgW="227520" imgH="230400" progId="Equation.AxMath">
+                <p:oleObj spid="_x0000_s7403" name="AxMath" r:id="rId17" imgW="227520" imgH="230400" progId="Equation.AxMath">
                   <p:embed/>
                 </p:oleObj>
               </mc:Choice>
@@ -30762,7 +30762,7 @@
           <a:graphicData uri="http://schemas.openxmlformats.org/presentationml/2006/ole">
             <mc:AlternateContent xmlns:mc="http://schemas.openxmlformats.org/markup-compatibility/2006">
               <mc:Choice xmlns:v="urn:schemas-microsoft-com:vml" Requires="v">
-                <p:oleObj spid="_x0000_s7347" name="AxMath" r:id="rId26" imgW="239760" imgH="228960" progId="Equation.AxMath">
+                <p:oleObj spid="_x0000_s7404" name="AxMath" r:id="rId26" imgW="239760" imgH="228960" progId="Equation.AxMath">
                   <p:embed/>
                 </p:oleObj>
               </mc:Choice>
@@ -34719,7 +34719,7 @@
           <a:graphicData uri="http://schemas.openxmlformats.org/presentationml/2006/ole">
             <mc:AlternateContent xmlns:mc="http://schemas.openxmlformats.org/markup-compatibility/2006">
               <mc:Choice xmlns:v="urn:schemas-microsoft-com:vml" Requires="v">
-                <p:oleObj spid="_x0000_s1080" name="AxMath" r:id="rId3" imgW="315000" imgH="228600" progId="Equation.AxMath">
+                <p:oleObj spid="_x0000_s1083" name="AxMath" r:id="rId3" imgW="315000" imgH="228600" progId="Equation.AxMath">
                   <p:embed/>
                 </p:oleObj>
               </mc:Choice>
@@ -34772,7 +34772,7 @@
           <a:graphicData uri="http://schemas.openxmlformats.org/presentationml/2006/ole">
             <mc:AlternateContent xmlns:mc="http://schemas.openxmlformats.org/markup-compatibility/2006">
               <mc:Choice xmlns:v="urn:schemas-microsoft-com:vml" Requires="v">
-                <p:oleObj spid="_x0000_s1081" name="AxMath" r:id="rId5" imgW="347760" imgH="228600" progId="Equation.AxMath">
+                <p:oleObj spid="_x0000_s1084" name="AxMath" r:id="rId5" imgW="347760" imgH="228600" progId="Equation.AxMath">
                   <p:embed/>
                 </p:oleObj>
               </mc:Choice>
@@ -34825,7 +34825,7 @@
           <a:graphicData uri="http://schemas.openxmlformats.org/presentationml/2006/ole">
             <mc:AlternateContent xmlns:mc="http://schemas.openxmlformats.org/markup-compatibility/2006">
               <mc:Choice xmlns:v="urn:schemas-microsoft-com:vml" Requires="v">
-                <p:oleObj spid="_x0000_s1082" name="AxMath" r:id="rId7" imgW="378000" imgH="228600" progId="Equation.AxMath">
+                <p:oleObj spid="_x0000_s1085" name="AxMath" r:id="rId7" imgW="378000" imgH="228600" progId="Equation.AxMath">
                   <p:embed/>
                 </p:oleObj>
               </mc:Choice>
@@ -49645,7 +49645,7 @@
           <a:graphicData uri="http://schemas.openxmlformats.org/presentationml/2006/ole">
             <mc:AlternateContent xmlns:mc="http://schemas.openxmlformats.org/markup-compatibility/2006">
               <mc:Choice xmlns:v="urn:schemas-microsoft-com:vml" Requires="v">
-                <p:oleObj spid="_x0000_s2190" name="AxMath" r:id="rId3" imgW="151920" imgH="226800" progId="Equation.AxMath">
+                <p:oleObj spid="_x0000_s2218" name="AxMath" r:id="rId3" imgW="151920" imgH="226800" progId="Equation.AxMath">
                   <p:embed/>
                 </p:oleObj>
               </mc:Choice>
@@ -49776,7 +49776,7 @@
           <a:graphicData uri="http://schemas.openxmlformats.org/presentationml/2006/ole">
             <mc:AlternateContent xmlns:mc="http://schemas.openxmlformats.org/markup-compatibility/2006">
               <mc:Choice xmlns:v="urn:schemas-microsoft-com:vml" Requires="v">
-                <p:oleObj spid="_x0000_s2191" name="AxMath" r:id="rId5" imgW="151920" imgH="226800" progId="Equation.AxMath">
+                <p:oleObj spid="_x0000_s2219" name="AxMath" r:id="rId5" imgW="151920" imgH="226800" progId="Equation.AxMath">
                   <p:embed/>
                 </p:oleObj>
               </mc:Choice>
@@ -49907,7 +49907,7 @@
           <a:graphicData uri="http://schemas.openxmlformats.org/presentationml/2006/ole">
             <mc:AlternateContent xmlns:mc="http://schemas.openxmlformats.org/markup-compatibility/2006">
               <mc:Choice xmlns:v="urn:schemas-microsoft-com:vml" Requires="v">
-                <p:oleObj spid="_x0000_s2192" name="AxMath" r:id="rId6" imgW="151920" imgH="226800" progId="Equation.AxMath">
+                <p:oleObj spid="_x0000_s2220" name="AxMath" r:id="rId6" imgW="151920" imgH="226800" progId="Equation.AxMath">
                   <p:embed/>
                 </p:oleObj>
               </mc:Choice>
@@ -50038,7 +50038,7 @@
           <a:graphicData uri="http://schemas.openxmlformats.org/presentationml/2006/ole">
             <mc:AlternateContent xmlns:mc="http://schemas.openxmlformats.org/markup-compatibility/2006">
               <mc:Choice xmlns:v="urn:schemas-microsoft-com:vml" Requires="v">
-                <p:oleObj spid="_x0000_s2193" name="AxMath" r:id="rId7" imgW="151920" imgH="226800" progId="Equation.AxMath">
+                <p:oleObj spid="_x0000_s2221" name="AxMath" r:id="rId7" imgW="151920" imgH="226800" progId="Equation.AxMath">
                   <p:embed/>
                 </p:oleObj>
               </mc:Choice>
@@ -50095,7 +50095,7 @@
           <a:graphicData uri="http://schemas.openxmlformats.org/presentationml/2006/ole">
             <mc:AlternateContent xmlns:mc="http://schemas.openxmlformats.org/markup-compatibility/2006">
               <mc:Choice xmlns:v="urn:schemas-microsoft-com:vml" Requires="v">
-                <p:oleObj spid="_x0000_s2194" name="AxMath" r:id="rId8" imgW="151920" imgH="226800" progId="Equation.AxMath">
+                <p:oleObj spid="_x0000_s2222" name="AxMath" r:id="rId8" imgW="151920" imgH="226800" progId="Equation.AxMath">
                   <p:embed/>
                 </p:oleObj>
               </mc:Choice>
@@ -50152,7 +50152,7 @@
           <a:graphicData uri="http://schemas.openxmlformats.org/presentationml/2006/ole">
             <mc:AlternateContent xmlns:mc="http://schemas.openxmlformats.org/markup-compatibility/2006">
               <mc:Choice xmlns:v="urn:schemas-microsoft-com:vml" Requires="v">
-                <p:oleObj spid="_x0000_s2195" name="AxMath" r:id="rId10" imgW="151920" imgH="226800" progId="Equation.AxMath">
+                <p:oleObj spid="_x0000_s2223" name="AxMath" r:id="rId10" imgW="151920" imgH="226800" progId="Equation.AxMath">
                   <p:embed/>
                 </p:oleObj>
               </mc:Choice>
@@ -50209,7 +50209,7 @@
           <a:graphicData uri="http://schemas.openxmlformats.org/presentationml/2006/ole">
             <mc:AlternateContent xmlns:mc="http://schemas.openxmlformats.org/markup-compatibility/2006">
               <mc:Choice xmlns:v="urn:schemas-microsoft-com:vml" Requires="v">
-                <p:oleObj spid="_x0000_s2196" name="AxMath" r:id="rId11" imgW="151920" imgH="226800" progId="Equation.AxMath">
+                <p:oleObj spid="_x0000_s2224" name="AxMath" r:id="rId11" imgW="151920" imgH="226800" progId="Equation.AxMath">
                   <p:embed/>
                 </p:oleObj>
               </mc:Choice>
@@ -50266,7 +50266,7 @@
           <a:graphicData uri="http://schemas.openxmlformats.org/presentationml/2006/ole">
             <mc:AlternateContent xmlns:mc="http://schemas.openxmlformats.org/markup-compatibility/2006">
               <mc:Choice xmlns:v="urn:schemas-microsoft-com:vml" Requires="v">
-                <p:oleObj spid="_x0000_s2197" name="AxMath" r:id="rId12" imgW="151920" imgH="226800" progId="Equation.AxMath">
+                <p:oleObj spid="_x0000_s2225" name="AxMath" r:id="rId12" imgW="151920" imgH="226800" progId="Equation.AxMath">
                   <p:embed/>
                 </p:oleObj>
               </mc:Choice>
@@ -50505,7 +50505,7 @@
           <a:graphicData uri="http://schemas.openxmlformats.org/presentationml/2006/ole">
             <mc:AlternateContent xmlns:mc="http://schemas.openxmlformats.org/markup-compatibility/2006">
               <mc:Choice xmlns:v="urn:schemas-microsoft-com:vml" Requires="v">
-                <p:oleObj spid="_x0000_s2198" name="AxMath" r:id="rId13" imgW="218880" imgH="230400" progId="Equation.AxMath">
+                <p:oleObj spid="_x0000_s2226" name="AxMath" r:id="rId13" imgW="218880" imgH="230400" progId="Equation.AxMath">
                   <p:embed/>
                 </p:oleObj>
               </mc:Choice>
@@ -50608,7 +50608,7 @@
           <a:graphicData uri="http://schemas.openxmlformats.org/presentationml/2006/ole">
             <mc:AlternateContent xmlns:mc="http://schemas.openxmlformats.org/markup-compatibility/2006">
               <mc:Choice xmlns:v="urn:schemas-microsoft-com:vml" Requires="v">
-                <p:oleObj spid="_x0000_s2199" name="AxMath" r:id="rId15" imgW="217080" imgH="230400" progId="Equation.AxMath">
+                <p:oleObj spid="_x0000_s2227" name="AxMath" r:id="rId15" imgW="217080" imgH="230400" progId="Equation.AxMath">
                   <p:embed/>
                 </p:oleObj>
               </mc:Choice>
@@ -50711,7 +50711,7 @@
           <a:graphicData uri="http://schemas.openxmlformats.org/presentationml/2006/ole">
             <mc:AlternateContent xmlns:mc="http://schemas.openxmlformats.org/markup-compatibility/2006">
               <mc:Choice xmlns:v="urn:schemas-microsoft-com:vml" Requires="v">
-                <p:oleObj spid="_x0000_s2200" name="AxMath" r:id="rId17" imgW="225360" imgH="230400" progId="Equation.AxMath">
+                <p:oleObj spid="_x0000_s2228" name="AxMath" r:id="rId17" imgW="225360" imgH="230400" progId="Equation.AxMath">
                   <p:embed/>
                 </p:oleObj>
               </mc:Choice>
@@ -50814,7 +50814,7 @@
           <a:graphicData uri="http://schemas.openxmlformats.org/presentationml/2006/ole">
             <mc:AlternateContent xmlns:mc="http://schemas.openxmlformats.org/markup-compatibility/2006">
               <mc:Choice xmlns:v="urn:schemas-microsoft-com:vml" Requires="v">
-                <p:oleObj spid="_x0000_s2201" name="AxMath" r:id="rId19" imgW="385200" imgH="230400" progId="Equation.AxMath">
+                <p:oleObj spid="_x0000_s2229" name="AxMath" r:id="rId19" imgW="385200" imgH="230400" progId="Equation.AxMath">
                   <p:embed/>
                 </p:oleObj>
               </mc:Choice>
@@ -50871,7 +50871,7 @@
           <a:graphicData uri="http://schemas.openxmlformats.org/presentationml/2006/ole">
             <mc:AlternateContent xmlns:mc="http://schemas.openxmlformats.org/markup-compatibility/2006">
               <mc:Choice xmlns:v="urn:schemas-microsoft-com:vml" Requires="v">
-                <p:oleObj spid="_x0000_s2202" name="AxMath" r:id="rId21" imgW="226080" imgH="230400" progId="Equation.AxMath">
+                <p:oleObj spid="_x0000_s2230" name="AxMath" r:id="rId21" imgW="226080" imgH="230400" progId="Equation.AxMath">
                   <p:embed/>
                 </p:oleObj>
               </mc:Choice>
@@ -50974,7 +50974,7 @@
           <a:graphicData uri="http://schemas.openxmlformats.org/presentationml/2006/ole">
             <mc:AlternateContent xmlns:mc="http://schemas.openxmlformats.org/markup-compatibility/2006">
               <mc:Choice xmlns:v="urn:schemas-microsoft-com:vml" Requires="v">
-                <p:oleObj spid="_x0000_s2203" name="AxMath" r:id="rId23" imgW="227520" imgH="230400" progId="Equation.AxMath">
+                <p:oleObj spid="_x0000_s2231" name="AxMath" r:id="rId23" imgW="227520" imgH="230400" progId="Equation.AxMath">
                   <p:embed/>
                 </p:oleObj>
               </mc:Choice>
@@ -51077,7 +51077,7 @@
           <a:graphicData uri="http://schemas.openxmlformats.org/presentationml/2006/ole">
             <mc:AlternateContent xmlns:mc="http://schemas.openxmlformats.org/markup-compatibility/2006">
               <mc:Choice xmlns:v="urn:schemas-microsoft-com:vml" Requires="v">
-                <p:oleObj spid="_x0000_s2204" name="AxMath" r:id="rId25" imgW="773640" imgH="230400" progId="Equation.AxMath">
+                <p:oleObj spid="_x0000_s2232" name="AxMath" r:id="rId25" imgW="773640" imgH="230400" progId="Equation.AxMath">
                   <p:embed/>
                 </p:oleObj>
               </mc:Choice>
@@ -51180,7 +51180,7 @@
           <a:graphicData uri="http://schemas.openxmlformats.org/presentationml/2006/ole">
             <mc:AlternateContent xmlns:mc="http://schemas.openxmlformats.org/markup-compatibility/2006">
               <mc:Choice xmlns:v="urn:schemas-microsoft-com:vml" Requires="v">
-                <p:oleObj spid="_x0000_s2205" name="AxMath" r:id="rId27" imgW="225360" imgH="230400" progId="Equation.AxMath">
+                <p:oleObj spid="_x0000_s2233" name="AxMath" r:id="rId27" imgW="225360" imgH="230400" progId="Equation.AxMath">
                   <p:embed/>
                 </p:oleObj>
               </mc:Choice>
@@ -51283,7 +51283,7 @@
           <a:graphicData uri="http://schemas.openxmlformats.org/presentationml/2006/ole">
             <mc:AlternateContent xmlns:mc="http://schemas.openxmlformats.org/markup-compatibility/2006">
               <mc:Choice xmlns:v="urn:schemas-microsoft-com:vml" Requires="v">
-                <p:oleObj spid="_x0000_s2206" name="AxMath" r:id="rId29" imgW="232200" imgH="230400" progId="Equation.AxMath">
+                <p:oleObj spid="_x0000_s2234" name="AxMath" r:id="rId29" imgW="232200" imgH="230400" progId="Equation.AxMath">
                   <p:embed/>
                 </p:oleObj>
               </mc:Choice>
@@ -51386,7 +51386,7 @@
           <a:graphicData uri="http://schemas.openxmlformats.org/presentationml/2006/ole">
             <mc:AlternateContent xmlns:mc="http://schemas.openxmlformats.org/markup-compatibility/2006">
               <mc:Choice xmlns:v="urn:schemas-microsoft-com:vml" Requires="v">
-                <p:oleObj spid="_x0000_s2207" name="AxMath" r:id="rId31" imgW="218520" imgH="230400" progId="Equation.AxMath">
+                <p:oleObj spid="_x0000_s2235" name="AxMath" r:id="rId31" imgW="218520" imgH="230400" progId="Equation.AxMath">
                   <p:embed/>
                 </p:oleObj>
               </mc:Choice>
@@ -51489,7 +51489,7 @@
           <a:graphicData uri="http://schemas.openxmlformats.org/presentationml/2006/ole">
             <mc:AlternateContent xmlns:mc="http://schemas.openxmlformats.org/markup-compatibility/2006">
               <mc:Choice xmlns:v="urn:schemas-microsoft-com:vml" Requires="v">
-                <p:oleObj spid="_x0000_s2208" name="AxMath" r:id="rId33" imgW="583200" imgH="230400" progId="Equation.AxMath">
+                <p:oleObj spid="_x0000_s2236" name="AxMath" r:id="rId33" imgW="583200" imgH="230400" progId="Equation.AxMath">
                   <p:embed/>
                 </p:oleObj>
               </mc:Choice>
@@ -51592,7 +51592,7 @@
           <a:graphicData uri="http://schemas.openxmlformats.org/presentationml/2006/ole">
             <mc:AlternateContent xmlns:mc="http://schemas.openxmlformats.org/markup-compatibility/2006">
               <mc:Choice xmlns:v="urn:schemas-microsoft-com:vml" Requires="v">
-                <p:oleObj spid="_x0000_s2209" name="AxMath" r:id="rId35" imgW="595080" imgH="230400" progId="Equation.AxMath">
+                <p:oleObj spid="_x0000_s2237" name="AxMath" r:id="rId35" imgW="595080" imgH="230400" progId="Equation.AxMath">
                   <p:embed/>
                 </p:oleObj>
               </mc:Choice>
@@ -51695,7 +51695,7 @@
           <a:graphicData uri="http://schemas.openxmlformats.org/presentationml/2006/ole">
             <mc:AlternateContent xmlns:mc="http://schemas.openxmlformats.org/markup-compatibility/2006">
               <mc:Choice xmlns:v="urn:schemas-microsoft-com:vml" Requires="v">
-                <p:oleObj spid="_x0000_s2210" name="AxMath" r:id="rId37" imgW="234000" imgH="230400" progId="Equation.AxMath">
+                <p:oleObj spid="_x0000_s2238" name="AxMath" r:id="rId37" imgW="234000" imgH="230400" progId="Equation.AxMath">
                   <p:embed/>
                 </p:oleObj>
               </mc:Choice>
@@ -51798,7 +51798,7 @@
           <a:graphicData uri="http://schemas.openxmlformats.org/presentationml/2006/ole">
             <mc:AlternateContent xmlns:mc="http://schemas.openxmlformats.org/markup-compatibility/2006">
               <mc:Choice xmlns:v="urn:schemas-microsoft-com:vml" Requires="v">
-                <p:oleObj spid="_x0000_s2211" name="AxMath" r:id="rId39" imgW="378360" imgH="230400" progId="Equation.AxMath">
+                <p:oleObj spid="_x0000_s2239" name="AxMath" r:id="rId39" imgW="378360" imgH="230400" progId="Equation.AxMath">
                   <p:embed/>
                 </p:oleObj>
               </mc:Choice>
@@ -51901,7 +51901,7 @@
           <a:graphicData uri="http://schemas.openxmlformats.org/presentationml/2006/ole">
             <mc:AlternateContent xmlns:mc="http://schemas.openxmlformats.org/markup-compatibility/2006">
               <mc:Choice xmlns:v="urn:schemas-microsoft-com:vml" Requires="v">
-                <p:oleObj spid="_x0000_s2212" name="AxMath" r:id="rId41" imgW="376560" imgH="230400" progId="Equation.AxMath">
+                <p:oleObj spid="_x0000_s2240" name="AxMath" r:id="rId41" imgW="376560" imgH="230400" progId="Equation.AxMath">
                   <p:embed/>
                 </p:oleObj>
               </mc:Choice>
@@ -52004,7 +52004,7 @@
           <a:graphicData uri="http://schemas.openxmlformats.org/presentationml/2006/ole">
             <mc:AlternateContent xmlns:mc="http://schemas.openxmlformats.org/markup-compatibility/2006">
               <mc:Choice xmlns:v="urn:schemas-microsoft-com:vml" Requires="v">
-                <p:oleObj spid="_x0000_s2213" name="AxMath" r:id="rId43" imgW="369720" imgH="230400" progId="Equation.AxMath">
+                <p:oleObj spid="_x0000_s2241" name="AxMath" r:id="rId43" imgW="369720" imgH="230400" progId="Equation.AxMath">
                   <p:embed/>
                 </p:oleObj>
               </mc:Choice>
@@ -52181,7 +52181,7 @@
           <a:graphicData uri="http://schemas.openxmlformats.org/presentationml/2006/ole">
             <mc:AlternateContent xmlns:mc="http://schemas.openxmlformats.org/markup-compatibility/2006">
               <mc:Choice xmlns:v="urn:schemas-microsoft-com:vml" Requires="v">
-                <p:oleObj spid="_x0000_s2214" name="AxMath" r:id="rId45" imgW="392040" imgH="230400" progId="Equation.AxMath">
+                <p:oleObj spid="_x0000_s2242" name="AxMath" r:id="rId45" imgW="392040" imgH="230400" progId="Equation.AxMath">
                   <p:embed/>
                 </p:oleObj>
               </mc:Choice>
@@ -52284,7 +52284,7 @@
           <a:graphicData uri="http://schemas.openxmlformats.org/presentationml/2006/ole">
             <mc:AlternateContent xmlns:mc="http://schemas.openxmlformats.org/markup-compatibility/2006">
               <mc:Choice xmlns:v="urn:schemas-microsoft-com:vml" Requires="v">
-                <p:oleObj spid="_x0000_s2215" name="AxMath" r:id="rId47" imgW="385200" imgH="230400" progId="Equation.AxMath">
+                <p:oleObj spid="_x0000_s2243" name="AxMath" r:id="rId47" imgW="385200" imgH="230400" progId="Equation.AxMath">
                   <p:embed/>
                 </p:oleObj>
               </mc:Choice>
@@ -52387,7 +52387,7 @@
           <a:graphicData uri="http://schemas.openxmlformats.org/presentationml/2006/ole">
             <mc:AlternateContent xmlns:mc="http://schemas.openxmlformats.org/markup-compatibility/2006">
               <mc:Choice xmlns:v="urn:schemas-microsoft-com:vml" Requires="v">
-                <p:oleObj spid="_x0000_s2216" name="AxMath" r:id="rId49" imgW="383760" imgH="230400" progId="Equation.AxMath">
+                <p:oleObj spid="_x0000_s2244" name="AxMath" r:id="rId49" imgW="383760" imgH="230400" progId="Equation.AxMath">
                   <p:embed/>
                 </p:oleObj>
               </mc:Choice>
@@ -52490,7 +52490,7 @@
           <a:graphicData uri="http://schemas.openxmlformats.org/presentationml/2006/ole">
             <mc:AlternateContent xmlns:mc="http://schemas.openxmlformats.org/markup-compatibility/2006">
               <mc:Choice xmlns:v="urn:schemas-microsoft-com:vml" Requires="v">
-                <p:oleObj spid="_x0000_s2217" name="AxMath" r:id="rId51" imgW="376560" imgH="230400" progId="Equation.AxMath">
+                <p:oleObj spid="_x0000_s2245" name="AxMath" r:id="rId51" imgW="376560" imgH="230400" progId="Equation.AxMath">
                   <p:embed/>
                 </p:oleObj>
               </mc:Choice>
@@ -52717,7 +52717,7 @@
             <a:graphicData uri="http://schemas.openxmlformats.org/presentationml/2006/ole">
               <mc:AlternateContent xmlns:mc="http://schemas.openxmlformats.org/markup-compatibility/2006">
                 <mc:Choice xmlns:v="urn:schemas-microsoft-com:vml" Requires="v">
-                  <p:oleObj spid="_x0000_s3219" name="AxMath" r:id="rId3" imgW="151920" imgH="226800" progId="Equation.AxMath">
+                  <p:oleObj spid="_x0000_s3248" name="AxMath" r:id="rId3" imgW="151920" imgH="226800" progId="Equation.AxMath">
                     <p:embed/>
                   </p:oleObj>
                 </mc:Choice>
@@ -52770,7 +52770,7 @@
             <a:graphicData uri="http://schemas.openxmlformats.org/presentationml/2006/ole">
               <mc:AlternateContent xmlns:mc="http://schemas.openxmlformats.org/markup-compatibility/2006">
                 <mc:Choice xmlns:v="urn:schemas-microsoft-com:vml" Requires="v">
-                  <p:oleObj spid="_x0000_s3220" name="AxMath" r:id="rId5" imgW="151920" imgH="226800" progId="Equation.AxMath">
+                  <p:oleObj spid="_x0000_s3249" name="AxMath" r:id="rId5" imgW="151920" imgH="226800" progId="Equation.AxMath">
                     <p:embed/>
                   </p:oleObj>
                 </mc:Choice>
@@ -52823,7 +52823,7 @@
             <a:graphicData uri="http://schemas.openxmlformats.org/presentationml/2006/ole">
               <mc:AlternateContent xmlns:mc="http://schemas.openxmlformats.org/markup-compatibility/2006">
                 <mc:Choice xmlns:v="urn:schemas-microsoft-com:vml" Requires="v">
-                  <p:oleObj spid="_x0000_s3221" name="AxMath" r:id="rId6" imgW="151920" imgH="226800" progId="Equation.AxMath">
+                  <p:oleObj spid="_x0000_s3250" name="AxMath" r:id="rId6" imgW="151920" imgH="226800" progId="Equation.AxMath">
                     <p:embed/>
                   </p:oleObj>
                 </mc:Choice>
@@ -52876,7 +52876,7 @@
             <a:graphicData uri="http://schemas.openxmlformats.org/presentationml/2006/ole">
               <mc:AlternateContent xmlns:mc="http://schemas.openxmlformats.org/markup-compatibility/2006">
                 <mc:Choice xmlns:v="urn:schemas-microsoft-com:vml" Requires="v">
-                  <p:oleObj spid="_x0000_s3222" name="AxMath" r:id="rId7" imgW="151920" imgH="226800" progId="Equation.AxMath">
+                  <p:oleObj spid="_x0000_s3251" name="AxMath" r:id="rId7" imgW="151920" imgH="226800" progId="Equation.AxMath">
                     <p:embed/>
                   </p:oleObj>
                 </mc:Choice>
@@ -52929,7 +52929,7 @@
             <a:graphicData uri="http://schemas.openxmlformats.org/presentationml/2006/ole">
               <mc:AlternateContent xmlns:mc="http://schemas.openxmlformats.org/markup-compatibility/2006">
                 <mc:Choice xmlns:v="urn:schemas-microsoft-com:vml" Requires="v">
-                  <p:oleObj spid="_x0000_s3223" name="AxMath" r:id="rId8" imgW="151920" imgH="226800" progId="Equation.AxMath">
+                  <p:oleObj spid="_x0000_s3252" name="AxMath" r:id="rId8" imgW="151920" imgH="226800" progId="Equation.AxMath">
                     <p:embed/>
                   </p:oleObj>
                 </mc:Choice>
@@ -52982,7 +52982,7 @@
             <a:graphicData uri="http://schemas.openxmlformats.org/presentationml/2006/ole">
               <mc:AlternateContent xmlns:mc="http://schemas.openxmlformats.org/markup-compatibility/2006">
                 <mc:Choice xmlns:v="urn:schemas-microsoft-com:vml" Requires="v">
-                  <p:oleObj spid="_x0000_s3224" name="AxMath" r:id="rId10" imgW="151920" imgH="226800" progId="Equation.AxMath">
+                  <p:oleObj spid="_x0000_s3253" name="AxMath" r:id="rId10" imgW="151920" imgH="226800" progId="Equation.AxMath">
                     <p:embed/>
                   </p:oleObj>
                 </mc:Choice>
@@ -53035,7 +53035,7 @@
             <a:graphicData uri="http://schemas.openxmlformats.org/presentationml/2006/ole">
               <mc:AlternateContent xmlns:mc="http://schemas.openxmlformats.org/markup-compatibility/2006">
                 <mc:Choice xmlns:v="urn:schemas-microsoft-com:vml" Requires="v">
-                  <p:oleObj spid="_x0000_s3225" name="AxMath" r:id="rId11" imgW="151920" imgH="226800" progId="Equation.AxMath">
+                  <p:oleObj spid="_x0000_s3254" name="AxMath" r:id="rId11" imgW="151920" imgH="226800" progId="Equation.AxMath">
                     <p:embed/>
                   </p:oleObj>
                 </mc:Choice>
@@ -53088,7 +53088,7 @@
             <a:graphicData uri="http://schemas.openxmlformats.org/presentationml/2006/ole">
               <mc:AlternateContent xmlns:mc="http://schemas.openxmlformats.org/markup-compatibility/2006">
                 <mc:Choice xmlns:v="urn:schemas-microsoft-com:vml" Requires="v">
-                  <p:oleObj spid="_x0000_s3226" name="AxMath" r:id="rId12" imgW="151920" imgH="226800" progId="Equation.AxMath">
+                  <p:oleObj spid="_x0000_s3255" name="AxMath" r:id="rId12" imgW="151920" imgH="226800" progId="Equation.AxMath">
                     <p:embed/>
                   </p:oleObj>
                 </mc:Choice>
@@ -53141,7 +53141,7 @@
             <a:graphicData uri="http://schemas.openxmlformats.org/presentationml/2006/ole">
               <mc:AlternateContent xmlns:mc="http://schemas.openxmlformats.org/markup-compatibility/2006">
                 <mc:Choice xmlns:v="urn:schemas-microsoft-com:vml" Requires="v">
-                  <p:oleObj spid="_x0000_s3227" name="AxMath" r:id="rId13" imgW="218880" imgH="230400" progId="Equation.AxMath">
+                  <p:oleObj spid="_x0000_s3256" name="AxMath" r:id="rId13" imgW="218880" imgH="230400" progId="Equation.AxMath">
                     <p:embed/>
                   </p:oleObj>
                 </mc:Choice>
@@ -53240,7 +53240,7 @@
             <a:graphicData uri="http://schemas.openxmlformats.org/presentationml/2006/ole">
               <mc:AlternateContent xmlns:mc="http://schemas.openxmlformats.org/markup-compatibility/2006">
                 <mc:Choice xmlns:v="urn:schemas-microsoft-com:vml" Requires="v">
-                  <p:oleObj spid="_x0000_s3228" name="AxMath" r:id="rId15" imgW="217080" imgH="230400" progId="Equation.AxMath">
+                  <p:oleObj spid="_x0000_s3257" name="AxMath" r:id="rId15" imgW="217080" imgH="230400" progId="Equation.AxMath">
                     <p:embed/>
                   </p:oleObj>
                 </mc:Choice>
@@ -53339,7 +53339,7 @@
             <a:graphicData uri="http://schemas.openxmlformats.org/presentationml/2006/ole">
               <mc:AlternateContent xmlns:mc="http://schemas.openxmlformats.org/markup-compatibility/2006">
                 <mc:Choice xmlns:v="urn:schemas-microsoft-com:vml" Requires="v">
-                  <p:oleObj spid="_x0000_s3229" name="AxMath" r:id="rId17" imgW="225360" imgH="230400" progId="Equation.AxMath">
+                  <p:oleObj spid="_x0000_s3258" name="AxMath" r:id="rId17" imgW="225360" imgH="230400" progId="Equation.AxMath">
                     <p:embed/>
                   </p:oleObj>
                 </mc:Choice>
@@ -53440,7 +53440,7 @@
             <a:graphicData uri="http://schemas.openxmlformats.org/presentationml/2006/ole">
               <mc:AlternateContent xmlns:mc="http://schemas.openxmlformats.org/markup-compatibility/2006">
                 <mc:Choice xmlns:v="urn:schemas-microsoft-com:vml" Requires="v">
-                  <p:oleObj spid="_x0000_s3230" name="AxMath" r:id="rId19" imgW="637560" imgH="279000" progId="Equation.AxMath">
+                  <p:oleObj spid="_x0000_s3259" name="AxMath" r:id="rId19" imgW="637560" imgH="279000" progId="Equation.AxMath">
                     <p:embed/>
                   </p:oleObj>
                 </mc:Choice>
@@ -53493,7 +53493,7 @@
             <a:graphicData uri="http://schemas.openxmlformats.org/presentationml/2006/ole">
               <mc:AlternateContent xmlns:mc="http://schemas.openxmlformats.org/markup-compatibility/2006">
                 <mc:Choice xmlns:v="urn:schemas-microsoft-com:vml" Requires="v">
-                  <p:oleObj spid="_x0000_s3231" name="AxMath" r:id="rId21" imgW="629280" imgH="279000" progId="Equation.AxMath">
+                  <p:oleObj spid="_x0000_s3260" name="AxMath" r:id="rId21" imgW="629280" imgH="279000" progId="Equation.AxMath">
                     <p:embed/>
                   </p:oleObj>
                 </mc:Choice>
@@ -53592,7 +53592,7 @@
             <a:graphicData uri="http://schemas.openxmlformats.org/presentationml/2006/ole">
               <mc:AlternateContent xmlns:mc="http://schemas.openxmlformats.org/markup-compatibility/2006">
                 <mc:Choice xmlns:v="urn:schemas-microsoft-com:vml" Requires="v">
-                  <p:oleObj spid="_x0000_s3232" name="AxMath" r:id="rId23" imgW="839160" imgH="279000" progId="Equation.AxMath">
+                  <p:oleObj spid="_x0000_s3261" name="AxMath" r:id="rId23" imgW="839160" imgH="279000" progId="Equation.AxMath">
                     <p:embed/>
                   </p:oleObj>
                 </mc:Choice>
@@ -53691,7 +53691,7 @@
             <a:graphicData uri="http://schemas.openxmlformats.org/presentationml/2006/ole">
               <mc:AlternateContent xmlns:mc="http://schemas.openxmlformats.org/markup-compatibility/2006">
                 <mc:Choice xmlns:v="urn:schemas-microsoft-com:vml" Requires="v">
-                  <p:oleObj spid="_x0000_s3233" name="AxMath" r:id="rId25" imgW="773640" imgH="230400" progId="Equation.AxMath">
+                  <p:oleObj spid="_x0000_s3262" name="AxMath" r:id="rId25" imgW="773640" imgH="230400" progId="Equation.AxMath">
                     <p:embed/>
                   </p:oleObj>
                 </mc:Choice>
@@ -53790,7 +53790,7 @@
             <a:graphicData uri="http://schemas.openxmlformats.org/presentationml/2006/ole">
               <mc:AlternateContent xmlns:mc="http://schemas.openxmlformats.org/markup-compatibility/2006">
                 <mc:Choice xmlns:v="urn:schemas-microsoft-com:vml" Requires="v">
-                  <p:oleObj spid="_x0000_s3234" name="AxMath" r:id="rId27" imgW="1183680" imgH="279000" progId="Equation.AxMath">
+                  <p:oleObj spid="_x0000_s3263" name="AxMath" r:id="rId27" imgW="1183680" imgH="279000" progId="Equation.AxMath">
                     <p:embed/>
                   </p:oleObj>
                 </mc:Choice>
@@ -53889,7 +53889,7 @@
             <a:graphicData uri="http://schemas.openxmlformats.org/presentationml/2006/ole">
               <mc:AlternateContent xmlns:mc="http://schemas.openxmlformats.org/markup-compatibility/2006">
                 <mc:Choice xmlns:v="urn:schemas-microsoft-com:vml" Requires="v">
-                  <p:oleObj spid="_x0000_s3235" name="AxMath" r:id="rId29" imgW="1183680" imgH="279000" progId="Equation.AxMath">
+                  <p:oleObj spid="_x0000_s3264" name="AxMath" r:id="rId29" imgW="1183680" imgH="279000" progId="Equation.AxMath">
                     <p:embed/>
                   </p:oleObj>
                 </mc:Choice>
@@ -53990,7 +53990,7 @@
             <a:graphicData uri="http://schemas.openxmlformats.org/presentationml/2006/ole">
               <mc:AlternateContent xmlns:mc="http://schemas.openxmlformats.org/markup-compatibility/2006">
                 <mc:Choice xmlns:v="urn:schemas-microsoft-com:vml" Requires="v">
-                  <p:oleObj spid="_x0000_s3236" name="AxMath" r:id="rId31" imgW="630720" imgH="279000" progId="Equation.AxMath">
+                  <p:oleObj spid="_x0000_s3265" name="AxMath" r:id="rId31" imgW="630720" imgH="279000" progId="Equation.AxMath">
                     <p:embed/>
                   </p:oleObj>
                 </mc:Choice>
@@ -54089,7 +54089,7 @@
             <a:graphicData uri="http://schemas.openxmlformats.org/presentationml/2006/ole">
               <mc:AlternateContent xmlns:mc="http://schemas.openxmlformats.org/markup-compatibility/2006">
                 <mc:Choice xmlns:v="urn:schemas-microsoft-com:vml" Requires="v">
-                  <p:oleObj spid="_x0000_s3237" name="AxMath" r:id="rId33" imgW="606240" imgH="279000" progId="Equation.AxMath">
+                  <p:oleObj spid="_x0000_s3266" name="AxMath" r:id="rId33" imgW="606240" imgH="279000" progId="Equation.AxMath">
                     <p:embed/>
                   </p:oleObj>
                 </mc:Choice>
@@ -54188,7 +54188,7 @@
             <a:graphicData uri="http://schemas.openxmlformats.org/presentationml/2006/ole">
               <mc:AlternateContent xmlns:mc="http://schemas.openxmlformats.org/markup-compatibility/2006">
                 <mc:Choice xmlns:v="urn:schemas-microsoft-com:vml" Requires="v">
-                  <p:oleObj spid="_x0000_s3238" name="AxMath" r:id="rId35" imgW="604080" imgH="279000" progId="Equation.AxMath">
+                  <p:oleObj spid="_x0000_s3267" name="AxMath" r:id="rId35" imgW="604080" imgH="279000" progId="Equation.AxMath">
                     <p:embed/>
                   </p:oleObj>
                 </mc:Choice>
@@ -54287,7 +54287,7 @@
             <a:graphicData uri="http://schemas.openxmlformats.org/presentationml/2006/ole">
               <mc:AlternateContent xmlns:mc="http://schemas.openxmlformats.org/markup-compatibility/2006">
                 <mc:Choice xmlns:v="urn:schemas-microsoft-com:vml" Requires="v">
-                  <p:oleObj spid="_x0000_s3239" name="AxMath" r:id="rId37" imgW="606240" imgH="279000" progId="Equation.AxMath">
+                  <p:oleObj spid="_x0000_s3268" name="AxMath" r:id="rId37" imgW="606240" imgH="279000" progId="Equation.AxMath">
                     <p:embed/>
                   </p:oleObj>
                 </mc:Choice>
@@ -54386,7 +54386,7 @@
             <a:graphicData uri="http://schemas.openxmlformats.org/presentationml/2006/ole">
               <mc:AlternateContent xmlns:mc="http://schemas.openxmlformats.org/markup-compatibility/2006">
                 <mc:Choice xmlns:v="urn:schemas-microsoft-com:vml" Requires="v">
-                  <p:oleObj spid="_x0000_s3240" name="AxMath" r:id="rId39" imgW="637920" imgH="279000" progId="Equation.AxMath">
+                  <p:oleObj spid="_x0000_s3269" name="AxMath" r:id="rId39" imgW="637920" imgH="279000" progId="Equation.AxMath">
                     <p:embed/>
                   </p:oleObj>
                 </mc:Choice>
@@ -54485,7 +54485,7 @@
             <a:graphicData uri="http://schemas.openxmlformats.org/presentationml/2006/ole">
               <mc:AlternateContent xmlns:mc="http://schemas.openxmlformats.org/markup-compatibility/2006">
                 <mc:Choice xmlns:v="urn:schemas-microsoft-com:vml" Requires="v">
-                  <p:oleObj spid="_x0000_s3241" name="AxMath" r:id="rId41" imgW="636480" imgH="279000" progId="Equation.AxMath">
+                  <p:oleObj spid="_x0000_s3270" name="AxMath" r:id="rId41" imgW="636480" imgH="279000" progId="Equation.AxMath">
                     <p:embed/>
                   </p:oleObj>
                 </mc:Choice>
@@ -54584,7 +54584,7 @@
             <a:graphicData uri="http://schemas.openxmlformats.org/presentationml/2006/ole">
               <mc:AlternateContent xmlns:mc="http://schemas.openxmlformats.org/markup-compatibility/2006">
                 <mc:Choice xmlns:v="urn:schemas-microsoft-com:vml" Requires="v">
-                  <p:oleObj spid="_x0000_s3242" name="AxMath" r:id="rId43" imgW="629280" imgH="279000" progId="Equation.AxMath">
+                  <p:oleObj spid="_x0000_s3271" name="AxMath" r:id="rId43" imgW="629280" imgH="279000" progId="Equation.AxMath">
                     <p:embed/>
                   </p:oleObj>
                 </mc:Choice>
@@ -54923,7 +54923,7 @@
             <a:graphicData uri="http://schemas.openxmlformats.org/presentationml/2006/ole">
               <mc:AlternateContent xmlns:mc="http://schemas.openxmlformats.org/markup-compatibility/2006">
                 <mc:Choice xmlns:v="urn:schemas-microsoft-com:vml" Requires="v">
-                  <p:oleObj spid="_x0000_s3243" name="AxMath" r:id="rId7" imgW="151920" imgH="226800" progId="Equation.AxMath">
+                  <p:oleObj spid="_x0000_s3272" name="AxMath" r:id="rId7" imgW="151920" imgH="226800" progId="Equation.AxMath">
                     <p:embed/>
                   </p:oleObj>
                 </mc:Choice>
@@ -55022,7 +55022,7 @@
             <a:graphicData uri="http://schemas.openxmlformats.org/presentationml/2006/ole">
               <mc:AlternateContent xmlns:mc="http://schemas.openxmlformats.org/markup-compatibility/2006">
                 <mc:Choice xmlns:v="urn:schemas-microsoft-com:vml" Requires="v">
-                  <p:oleObj spid="_x0000_s3244" name="AxMath" r:id="rId45" imgW="385200" imgH="230400" progId="Equation.AxMath">
+                  <p:oleObj spid="_x0000_s3273" name="AxMath" r:id="rId45" imgW="385200" imgH="230400" progId="Equation.AxMath">
                     <p:embed/>
                   </p:oleObj>
                 </mc:Choice>
@@ -55121,7 +55121,7 @@
             <a:graphicData uri="http://schemas.openxmlformats.org/presentationml/2006/ole">
               <mc:AlternateContent xmlns:mc="http://schemas.openxmlformats.org/markup-compatibility/2006">
                 <mc:Choice xmlns:v="urn:schemas-microsoft-com:vml" Requires="v">
-                  <p:oleObj spid="_x0000_s3245" name="AxMath" r:id="rId47" imgW="630720" imgH="279000" progId="Equation.AxMath">
+                  <p:oleObj spid="_x0000_s3274" name="AxMath" r:id="rId47" imgW="630720" imgH="279000" progId="Equation.AxMath">
                     <p:embed/>
                   </p:oleObj>
                 </mc:Choice>
@@ -55220,7 +55220,7 @@
             <a:graphicData uri="http://schemas.openxmlformats.org/presentationml/2006/ole">
               <mc:AlternateContent xmlns:mc="http://schemas.openxmlformats.org/markup-compatibility/2006">
                 <mc:Choice xmlns:v="urn:schemas-microsoft-com:vml" Requires="v">
-                  <p:oleObj spid="_x0000_s3246" name="AxMath" r:id="rId49" imgW="629280" imgH="279000" progId="Equation.AxMath">
+                  <p:oleObj spid="_x0000_s3275" name="AxMath" r:id="rId49" imgW="629280" imgH="279000" progId="Equation.AxMath">
                     <p:embed/>
                   </p:oleObj>
                 </mc:Choice>
@@ -55321,7 +55321,7 @@
             <a:graphicData uri="http://schemas.openxmlformats.org/presentationml/2006/ole">
               <mc:AlternateContent xmlns:mc="http://schemas.openxmlformats.org/markup-compatibility/2006">
                 <mc:Choice xmlns:v="urn:schemas-microsoft-com:vml" Requires="v">
-                  <p:oleObj spid="_x0000_s3247" name="AxMath" r:id="rId51" imgW="622080" imgH="279000" progId="Equation.AxMath">
+                  <p:oleObj spid="_x0000_s3276" name="AxMath" r:id="rId51" imgW="622080" imgH="279000" progId="Equation.AxMath">
                     <p:embed/>
                   </p:oleObj>
                 </mc:Choice>
